--- a/samples/VK_WorkSpace_Клиентская_конференция_Шабл__focus.pptx
+++ b/samples/VK_WorkSpace_Клиентская_конференция_Шабл__focus.pptx
@@ -15,8 +15,6 @@
     <p:sldId id="289" r:id="rId42"/>
     <p:sldId id="290" r:id="rId43"/>
     <p:sldId id="291" r:id="rId44"/>
-    <p:sldId id="292" r:id="rId45"/>
-    <p:sldId id="293" r:id="rId46"/>
   </p:sldIdLst>
   <p:sldSz cy="6858000" cx="12192000"/>
   <p:notesSz cx="6858000" cy="9144000"/>
@@ -303,7 +301,7 @@
               <c:strCache>
                 <c:ptCount val="1"/>
                 <c:pt idx="0">
-                  <c:v>Время</c:v>
+                  <c:v>Время (мин)</c:v>
                 </c:pt>
               </c:strCache>
             </c:strRef>
@@ -324,10 +322,10 @@
               <c:strCache>
                 <c:ptCount val="2"/>
                 <c:pt idx="0">
-                  <c:v>Текущее время</c:v>
+                  <c:v>Ручной</c:v>
                 </c:pt>
                 <c:pt idx="1">
-                  <c:v>Автоматизированное время</c:v>
+                  <c:v>Автоматический</c:v>
                 </c:pt>
               </c:strCache>
             </c:strRef>
@@ -416,7 +414,381 @@
                   </a:defRPr>
                 </a:pPr>
                 <a:r>
-                  <a:t>минут</a:t>
+                  <a:t>мин</a:t>
+                </a:r>
+              </a:p>
+            </c:rich>
+          </c:tx>
+          <c:layout/>
+          <c:overlay val="0"/>
+        </c:title>
+        <c:majorTickMark val="out"/>
+        <c:minorTickMark val="none"/>
+        <c:tickLblPos val="nextTo"/>
+        <c:txPr>
+          <a:bodyPr/>
+          <a:lstStyle/>
+          <a:p>
+            <a:pPr>
+              <a:defRPr sz="1100" b="0">
+                <a:solidFill>
+                  <a:srgbClr val="FFFFFF"/>
+                </a:solidFill>
+                <a:latin typeface="Play"/>
+                <a:ea typeface="Play"/>
+                <a:cs typeface="Play"/>
+              </a:defRPr>
+            </a:pPr>
+          </a:p>
+        </c:txPr>
+        <c:crossAx val="-2068027336"/>
+        <c:crosses val="autoZero"/>
+      </c:valAx>
+    </c:plotArea>
+    <c:dispBlanksAs val="gap"/>
+  </c:chart>
+  <c:txPr>
+    <a:bodyPr/>
+    <a:lstStyle/>
+    <a:p>
+      <a:pPr>
+        <a:defRPr sz="1200" b="0">
+          <a:solidFill>
+            <a:srgbClr val="FFFFFF"/>
+          </a:solidFill>
+          <a:latin typeface="Play"/>
+          <a:ea typeface="Play"/>
+          <a:cs typeface="Play"/>
+        </a:defRPr>
+      </a:pPr>
+      <a:endParaRPr lang="en-US"/>
+    </a:p>
+  </c:txPr>
+  <c:externalData r:id="rId1">
+    <c:autoUpdate val="0"/>
+  </c:externalData>
+</c:chartSpace>
+</file>
+
+<file path=ppt/charts/chart2.xml><?xml version="1.0" encoding="utf-8"?>
+<c:chartSpace xmlns:c="http://schemas.openxmlformats.org/drawingml/2006/chart" xmlns:a="http://schemas.openxmlformats.org/drawingml/2006/main" xmlns:r="http://schemas.openxmlformats.org/officeDocument/2006/relationships">
+  <c:date1904 val="0"/>
+  <c:chart>
+    <c:autoTitleDeleted val="1"/>
+    <c:plotArea>
+      <c:barChart>
+        <c:barDir val="col"/>
+        <c:grouping val="clustered"/>
+        <c:ser>
+          <c:idx val="0"/>
+          <c:order val="0"/>
+          <c:tx>
+            <c:strRef>
+              <c:f>Sheet1!$B$1</c:f>
+              <c:strCache>
+                <c:ptCount val="1"/>
+                <c:pt idx="0">
+                  <c:v>Время (мин)</c:v>
+                </c:pt>
+              </c:strCache>
+            </c:strRef>
+          </c:tx>
+          <c:spPr>
+            <a:solidFill>
+              <a:srgbClr val="0077FF"/>
+            </a:solidFill>
+            <a:ln>
+              <a:solidFill>
+                <a:srgbClr val="0077FF"/>
+              </a:solidFill>
+            </a:ln>
+          </c:spPr>
+          <c:cat>
+            <c:strRef>
+              <c:f>Sheet1!$A$2:$A$3</c:f>
+              <c:strCache>
+                <c:ptCount val="2"/>
+                <c:pt idx="0">
+                  <c:v>Ручной</c:v>
+                </c:pt>
+                <c:pt idx="1">
+                  <c:v>Автоматический</c:v>
+                </c:pt>
+              </c:strCache>
+            </c:strRef>
+          </c:cat>
+          <c:val>
+            <c:numRef>
+              <c:f>Sheet1!$B$2:$B$3</c:f>
+              <c:numCache>
+                <c:formatCode>General</c:formatCode>
+                <c:ptCount val="2"/>
+                <c:pt idx="0">
+                  <c:v>186.0</c:v>
+                </c:pt>
+                <c:pt idx="1">
+                  <c:v>4.0</c:v>
+                </c:pt>
+              </c:numCache>
+            </c:numRef>
+          </c:val>
+        </c:ser>
+        <c:gapWidth val="60"/>
+        <c:axId val="-2068027336"/>
+        <c:axId val="-2113994440"/>
+      </c:barChart>
+      <c:catAx>
+        <c:axId val="-2068027336"/>
+        <c:scaling>
+          <c:orientation val="minMax"/>
+        </c:scaling>
+        <c:delete val="0"/>
+        <c:axPos val="b"/>
+        <c:majorTickMark val="out"/>
+        <c:minorTickMark val="none"/>
+        <c:tickLblPos val="nextTo"/>
+        <c:txPr>
+          <a:bodyPr/>
+          <a:lstStyle/>
+          <a:p>
+            <a:pPr>
+              <a:defRPr sz="1100" b="0">
+                <a:solidFill>
+                  <a:srgbClr val="FFFFFF"/>
+                </a:solidFill>
+                <a:latin typeface="Play"/>
+                <a:ea typeface="Play"/>
+                <a:cs typeface="Play"/>
+              </a:defRPr>
+            </a:pPr>
+          </a:p>
+        </c:txPr>
+        <c:crossAx val="-2113994440"/>
+        <c:crosses val="autoZero"/>
+        <c:auto val="1"/>
+        <c:lblAlgn val="ctr"/>
+        <c:lblOffset val="100"/>
+        <c:noMultiLvlLbl val="0"/>
+      </c:catAx>
+      <c:valAx>
+        <c:axId val="-2113994440"/>
+        <c:scaling/>
+        <c:delete val="0"/>
+        <c:axPos val="l"/>
+        <c:majorGridlines>
+          <c:spPr>
+            <a:ln w="9525">
+              <a:solidFill>
+                <a:srgbClr val="3C3C3C"/>
+              </a:solidFill>
+            </a:ln>
+          </c:spPr>
+        </c:majorGridlines>
+        <c:title>
+          <c:tx>
+            <c:rich>
+              <a:bodyPr/>
+              <a:lstStyle/>
+              <a:p>
+                <a:pPr>
+                  <a:defRPr sz="1100" b="0">
+                    <a:solidFill>
+                      <a:srgbClr val="FFFFFF"/>
+                    </a:solidFill>
+                    <a:latin typeface="Play"/>
+                    <a:ea typeface="Play"/>
+                    <a:cs typeface="Play"/>
+                  </a:defRPr>
+                </a:pPr>
+                <a:r>
+                  <a:t>мин</a:t>
+                </a:r>
+              </a:p>
+            </c:rich>
+          </c:tx>
+          <c:layout/>
+          <c:overlay val="0"/>
+        </c:title>
+        <c:majorTickMark val="out"/>
+        <c:minorTickMark val="none"/>
+        <c:tickLblPos val="nextTo"/>
+        <c:txPr>
+          <a:bodyPr/>
+          <a:lstStyle/>
+          <a:p>
+            <a:pPr>
+              <a:defRPr sz="1100" b="0">
+                <a:solidFill>
+                  <a:srgbClr val="FFFFFF"/>
+                </a:solidFill>
+                <a:latin typeface="Play"/>
+                <a:ea typeface="Play"/>
+                <a:cs typeface="Play"/>
+              </a:defRPr>
+            </a:pPr>
+          </a:p>
+        </c:txPr>
+        <c:crossAx val="-2068027336"/>
+        <c:crosses val="autoZero"/>
+      </c:valAx>
+    </c:plotArea>
+    <c:dispBlanksAs val="gap"/>
+  </c:chart>
+  <c:txPr>
+    <a:bodyPr/>
+    <a:lstStyle/>
+    <a:p>
+      <a:pPr>
+        <a:defRPr sz="1200" b="0">
+          <a:solidFill>
+            <a:srgbClr val="FFFFFF"/>
+          </a:solidFill>
+          <a:latin typeface="Play"/>
+          <a:ea typeface="Play"/>
+          <a:cs typeface="Play"/>
+        </a:defRPr>
+      </a:pPr>
+      <a:endParaRPr lang="en-US"/>
+    </a:p>
+  </c:txPr>
+  <c:externalData r:id="rId1">
+    <c:autoUpdate val="0"/>
+  </c:externalData>
+</c:chartSpace>
+</file>
+
+<file path=ppt/charts/chart3.xml><?xml version="1.0" encoding="utf-8"?>
+<c:chartSpace xmlns:c="http://schemas.openxmlformats.org/drawingml/2006/chart" xmlns:a="http://schemas.openxmlformats.org/drawingml/2006/main" xmlns:r="http://schemas.openxmlformats.org/officeDocument/2006/relationships">
+  <c:date1904 val="0"/>
+  <c:chart>
+    <c:autoTitleDeleted val="1"/>
+    <c:plotArea>
+      <c:barChart>
+        <c:barDir val="col"/>
+        <c:grouping val="clustered"/>
+        <c:ser>
+          <c:idx val="0"/>
+          <c:order val="0"/>
+          <c:tx>
+            <c:strRef>
+              <c:f>Sheet1!$B$1</c:f>
+              <c:strCache>
+                <c:ptCount val="1"/>
+                <c:pt idx="0">
+                  <c:v>Нарушения (колоды)</c:v>
+                </c:pt>
+              </c:strCache>
+            </c:strRef>
+          </c:tx>
+          <c:spPr>
+            <a:solidFill>
+              <a:srgbClr val="0077FF"/>
+            </a:solidFill>
+            <a:ln>
+              <a:solidFill>
+                <a:srgbClr val="0077FF"/>
+              </a:solidFill>
+            </a:ln>
+          </c:spPr>
+          <c:cat>
+            <c:strRef>
+              <c:f>Sheet1!$A$2:$A$3</c:f>
+              <c:strCache>
+                <c:ptCount val="2"/>
+                <c:pt idx="0">
+                  <c:v>Ручной</c:v>
+                </c:pt>
+                <c:pt idx="1">
+                  <c:v>Автоматический</c:v>
+                </c:pt>
+              </c:strCache>
+            </c:strRef>
+          </c:cat>
+          <c:val>
+            <c:numRef>
+              <c:f>Sheet1!$B$2:$B$3</c:f>
+              <c:numCache>
+                <c:formatCode>General</c:formatCode>
+                <c:ptCount val="2"/>
+                <c:pt idx="0">
+                  <c:v>19.0</c:v>
+                </c:pt>
+                <c:pt idx="1">
+                  <c:v>2.0</c:v>
+                </c:pt>
+              </c:numCache>
+            </c:numRef>
+          </c:val>
+        </c:ser>
+        <c:gapWidth val="60"/>
+        <c:axId val="-2068027336"/>
+        <c:axId val="-2113994440"/>
+      </c:barChart>
+      <c:catAx>
+        <c:axId val="-2068027336"/>
+        <c:scaling>
+          <c:orientation val="minMax"/>
+        </c:scaling>
+        <c:delete val="0"/>
+        <c:axPos val="b"/>
+        <c:majorTickMark val="out"/>
+        <c:minorTickMark val="none"/>
+        <c:tickLblPos val="nextTo"/>
+        <c:txPr>
+          <a:bodyPr/>
+          <a:lstStyle/>
+          <a:p>
+            <a:pPr>
+              <a:defRPr sz="1100" b="0">
+                <a:solidFill>
+                  <a:srgbClr val="FFFFFF"/>
+                </a:solidFill>
+                <a:latin typeface="Play"/>
+                <a:ea typeface="Play"/>
+                <a:cs typeface="Play"/>
+              </a:defRPr>
+            </a:pPr>
+          </a:p>
+        </c:txPr>
+        <c:crossAx val="-2113994440"/>
+        <c:crosses val="autoZero"/>
+        <c:auto val="1"/>
+        <c:lblAlgn val="ctr"/>
+        <c:lblOffset val="100"/>
+        <c:noMultiLvlLbl val="0"/>
+      </c:catAx>
+      <c:valAx>
+        <c:axId val="-2113994440"/>
+        <c:scaling/>
+        <c:delete val="0"/>
+        <c:axPos val="l"/>
+        <c:majorGridlines>
+          <c:spPr>
+            <a:ln w="9525">
+              <a:solidFill>
+                <a:srgbClr val="3C3C3C"/>
+              </a:solidFill>
+            </a:ln>
+          </c:spPr>
+        </c:majorGridlines>
+        <c:title>
+          <c:tx>
+            <c:rich>
+              <a:bodyPr/>
+              <a:lstStyle/>
+              <a:p>
+                <a:pPr>
+                  <a:defRPr sz="1100" b="0">
+                    <a:solidFill>
+                      <a:srgbClr val="FFFFFF"/>
+                    </a:solidFill>
+                    <a:latin typeface="Play"/>
+                    <a:ea typeface="Play"/>
+                    <a:cs typeface="Play"/>
+                  </a:defRPr>
+                </a:pPr>
+                <a:r>
+                  <a:t>колоды</a:t>
                 </a:r>
               </a:p>
             </c:rich>
@@ -2102,1006 +2474,6 @@
 </p:notes>
 </file>
 
-<file path=ppt/notesSlides/notesSlide37.xml><?xml version="1.0" encoding="utf-8"?>
-<p:notes xmlns:a="http://schemas.openxmlformats.org/drawingml/2006/main" xmlns:p="http://schemas.openxmlformats.org/presentationml/2006/main" xmlns:r="http://schemas.openxmlformats.org/officeDocument/2006/relationships">
-  <p:cSld>
-    <p:spTree>
-      <p:nvGrpSpPr>
-        <p:cNvPr id="1" name=""/>
-        <p:cNvGrpSpPr/>
-        <p:nvPr/>
-      </p:nvGrpSpPr>
-      <p:grpSpPr>
-        <a:xfrm>
-          <a:off x="0" y="0"/>
-          <a:ext cx="0" cy="0"/>
-          <a:chOff x="0" y="0"/>
-          <a:chExt cx="0" cy="0"/>
-        </a:xfrm>
-      </p:grpSpPr>
-      <p:sp>
-        <p:nvSpPr>
-          <p:cNvPr id="2" name="Slide Image Placeholder 1"/>
-          <p:cNvSpPr>
-            <a:spLocks noGrp="1"/>
-          </p:cNvSpPr>
-          <p:nvPr>
-            <p:ph type="sldImg" idx="3"/>
-          </p:nvPr>
-        </p:nvSpPr>
-        <p:spPr/>
-      </p:sp>
-      <p:sp>
-        <p:nvSpPr>
-          <p:cNvPr id="3" name="Notes Placeholder 2"/>
-          <p:cNvSpPr>
-            <a:spLocks noGrp="1"/>
-          </p:cNvSpPr>
-          <p:nvPr>
-            <p:ph type="body" idx="1"/>
-          </p:nvPr>
-        </p:nvSpPr>
-        <p:spPr/>
-        <p:txBody>
-          <a:bodyPr/>
-          <a:lstStyle/>
-          <a:p/>
-        </p:txBody>
-      </p:sp>
-      <p:sp>
-        <p:nvSpPr>
-          <p:cNvPr id="4" name="Slide Number Placeholder 3"/>
-          <p:cNvSpPr>
-            <a:spLocks noGrp="1"/>
-          </p:cNvSpPr>
-          <p:nvPr>
-            <p:ph type="sldNum" idx="12"/>
-          </p:nvPr>
-        </p:nvSpPr>
-        <p:spPr/>
-      </p:sp>
-    </p:spTree>
-  </p:cSld>
-  <p:clrMapOvr>
-    <a:masterClrMapping/>
-  </p:clrMapOvr>
-</p:notes>
-</file>
-
-<file path=ppt/notesSlides/notesSlide38.xml><?xml version="1.0" encoding="utf-8"?>
-<p:notes xmlns:a="http://schemas.openxmlformats.org/drawingml/2006/main" xmlns:p="http://schemas.openxmlformats.org/presentationml/2006/main" xmlns:r="http://schemas.openxmlformats.org/officeDocument/2006/relationships">
-  <p:cSld>
-    <p:spTree>
-      <p:nvGrpSpPr>
-        <p:cNvPr id="1" name=""/>
-        <p:cNvGrpSpPr/>
-        <p:nvPr/>
-      </p:nvGrpSpPr>
-      <p:grpSpPr>
-        <a:xfrm>
-          <a:off x="0" y="0"/>
-          <a:ext cx="0" cy="0"/>
-          <a:chOff x="0" y="0"/>
-          <a:chExt cx="0" cy="0"/>
-        </a:xfrm>
-      </p:grpSpPr>
-      <p:sp>
-        <p:nvSpPr>
-          <p:cNvPr id="2" name="Slide Image Placeholder 1"/>
-          <p:cNvSpPr>
-            <a:spLocks noGrp="1"/>
-          </p:cNvSpPr>
-          <p:nvPr>
-            <p:ph type="sldImg" idx="3"/>
-          </p:nvPr>
-        </p:nvSpPr>
-        <p:spPr/>
-      </p:sp>
-      <p:sp>
-        <p:nvSpPr>
-          <p:cNvPr id="3" name="Notes Placeholder 2"/>
-          <p:cNvSpPr>
-            <a:spLocks noGrp="1"/>
-          </p:cNvSpPr>
-          <p:nvPr>
-            <p:ph type="body" idx="1"/>
-          </p:nvPr>
-        </p:nvSpPr>
-        <p:spPr/>
-        <p:txBody>
-          <a:bodyPr/>
-          <a:lstStyle/>
-          <a:p/>
-        </p:txBody>
-      </p:sp>
-      <p:sp>
-        <p:nvSpPr>
-          <p:cNvPr id="4" name="Slide Number Placeholder 3"/>
-          <p:cNvSpPr>
-            <a:spLocks noGrp="1"/>
-          </p:cNvSpPr>
-          <p:nvPr>
-            <p:ph type="sldNum" idx="12"/>
-          </p:nvPr>
-        </p:nvSpPr>
-        <p:spPr/>
-      </p:sp>
-    </p:spTree>
-  </p:cSld>
-  <p:clrMapOvr>
-    <a:masterClrMapping/>
-  </p:clrMapOvr>
-</p:notes>
-</file>
-
-<file path=ppt/slideLayouts/slideLayout14.xml><?xml version="1.0" encoding="utf-8"?>
-<p:sldLayout xmlns:a="http://schemas.openxmlformats.org/drawingml/2006/main" xmlns:r="http://schemas.openxmlformats.org/officeDocument/2006/relationships" xmlns:mc="http://schemas.openxmlformats.org/markup-compatibility/2006" xmlns:mv="urn:schemas-microsoft-com:mac:vml" xmlns:p="http://schemas.openxmlformats.org/presentationml/2006/main" xmlns:c="http://schemas.openxmlformats.org/drawingml/2006/chart" xmlns:dgm="http://schemas.openxmlformats.org/drawingml/2006/diagram" xmlns:o="urn:schemas-microsoft-com:office:office" xmlns:v="urn:schemas-microsoft-com:vml" xmlns:pvml="urn:schemas-microsoft-com:office:powerpoint" xmlns:com="http://schemas.openxmlformats.org/drawingml/2006/compatibility" xmlns:p14="http://schemas.microsoft.com/office/powerpoint/2010/main" xmlns:p15="http://schemas.microsoft.com/office/powerpoint/2012/main" xmlns:ahyp="http://schemas.microsoft.com/office/drawing/2018/hyperlinkcolor" matchingName="12_Титульный слайд">
-  <p:cSld name="12_Титульный слайд">
-    <p:bg>
-      <p:bgPr>
-        <a:solidFill>
-          <a:schemeClr val="dk1"/>
-        </a:solidFill>
-      </p:bgPr>
-    </p:bg>
-    <p:spTree>
-      <p:nvGrpSpPr>
-        <p:cNvPr id="326" name="Shape 326"/>
-        <p:cNvGrpSpPr/>
-        <p:nvPr/>
-      </p:nvGrpSpPr>
-      <p:grpSpPr>
-        <a:xfrm>
-          <a:off x="0" y="0"/>
-          <a:ext cx="0" cy="0"/>
-          <a:chOff x="0" y="0"/>
-          <a:chExt cx="0" cy="0"/>
-        </a:xfrm>
-      </p:grpSpPr>
-      <p:pic>
-        <p:nvPicPr>
-          <p:cNvPr descr=" " id="327" name="Google Shape;327;p15"/>
-          <p:cNvPicPr preferRelativeResize="0"/>
-          <p:nvPr/>
-        </p:nvPicPr>
-        <p:blipFill rotWithShape="1">
-          <a:blip r:embed="rId2">
-            <a:alphaModFix/>
-          </a:blip>
-          <a:srcRect b="0" l="0" r="0" t="0"/>
-          <a:stretch/>
-        </p:blipFill>
-        <p:spPr>
-          <a:xfrm>
-            <a:off x="0" y="0"/>
-            <a:ext cx="12191979" cy="6857131"/>
-          </a:xfrm>
-          <a:prstGeom prst="rect">
-            <a:avLst/>
-          </a:prstGeom>
-          <a:noFill/>
-          <a:ln>
-            <a:noFill/>
-          </a:ln>
-        </p:spPr>
-      </p:pic>
-      <p:sp>
-        <p:nvSpPr>
-          <p:cNvPr id="328" name="Google Shape;328;p15"/>
-          <p:cNvSpPr/>
-          <p:nvPr/>
-        </p:nvSpPr>
-        <p:spPr>
-          <a:xfrm>
-            <a:off x="0" y="4499104"/>
-            <a:ext cx="6792686" cy="1661684"/>
-          </a:xfrm>
-          <a:prstGeom prst="rect">
-            <a:avLst/>
-          </a:prstGeom>
-          <a:solidFill>
-            <a:srgbClr val="000000"/>
-          </a:solidFill>
-          <a:ln>
-            <a:noFill/>
-          </a:ln>
-        </p:spPr>
-        <p:txBody>
-          <a:bodyPr anchorCtr="0" anchor="ctr" bIns="45700" lIns="91425" spcFirstLastPara="1" rIns="91425" wrap="square" tIns="45700">
-            <a:noAutofit/>
-          </a:bodyPr>
-          <a:lstStyle/>
-          <a:p>
-            <a:pPr indent="0" lvl="0" marL="0" marR="0" rtl="0" algn="ctr">
-              <a:spcBef>
-                <a:spcPts val="0"/>
-              </a:spcBef>
-              <a:spcAft>
-                <a:spcPts val="0"/>
-              </a:spcAft>
-              <a:buNone/>
-            </a:pPr>
-            <a:r>
-              <a:t/>
-            </a:r>
-            <a:endParaRPr sz="1800">
-              <a:solidFill>
-                <a:schemeClr val="lt1"/>
-              </a:solidFill>
-              <a:latin typeface="Arial"/>
-              <a:ea typeface="Arial"/>
-              <a:cs typeface="Arial"/>
-              <a:sym typeface="Arial"/>
-            </a:endParaRPr>
-          </a:p>
-        </p:txBody>
-      </p:sp>
-      <p:sp>
-        <p:nvSpPr>
-          <p:cNvPr id="329" name="Google Shape;329;p15"/>
-          <p:cNvSpPr/>
-          <p:nvPr/>
-        </p:nvSpPr>
-        <p:spPr>
-          <a:xfrm>
-            <a:off x="1" y="5501389"/>
-            <a:ext cx="4811842" cy="1356609"/>
-          </a:xfrm>
-          <a:prstGeom prst="rect">
-            <a:avLst/>
-          </a:prstGeom>
-          <a:solidFill>
-            <a:srgbClr val="000000"/>
-          </a:solidFill>
-          <a:ln>
-            <a:noFill/>
-          </a:ln>
-        </p:spPr>
-        <p:txBody>
-          <a:bodyPr anchorCtr="0" anchor="ctr" bIns="45700" lIns="91425" spcFirstLastPara="1" rIns="91425" wrap="square" tIns="45700">
-            <a:noAutofit/>
-          </a:bodyPr>
-          <a:lstStyle/>
-          <a:p>
-            <a:pPr indent="0" lvl="0" marL="0" marR="0" rtl="0" algn="ctr">
-              <a:spcBef>
-                <a:spcPts val="0"/>
-              </a:spcBef>
-              <a:spcAft>
-                <a:spcPts val="0"/>
-              </a:spcAft>
-              <a:buNone/>
-            </a:pPr>
-            <a:r>
-              <a:t/>
-            </a:r>
-            <a:endParaRPr sz="1800">
-              <a:solidFill>
-                <a:schemeClr val="lt1"/>
-              </a:solidFill>
-              <a:latin typeface="Arial"/>
-              <a:ea typeface="Arial"/>
-              <a:cs typeface="Arial"/>
-              <a:sym typeface="Arial"/>
-            </a:endParaRPr>
-          </a:p>
-        </p:txBody>
-      </p:sp>
-      <p:grpSp>
-        <p:nvGrpSpPr>
-          <p:cNvPr id="330" name="Google Shape;330;p15"/>
-          <p:cNvGrpSpPr/>
-          <p:nvPr/>
-        </p:nvGrpSpPr>
-        <p:grpSpPr>
-          <a:xfrm>
-            <a:off x="224842" y="-74145"/>
-            <a:ext cx="12188171" cy="64326"/>
-            <a:chOff x="-2" y="-2"/>
-            <a:chExt cx="12188169" cy="64324"/>
-          </a:xfrm>
-        </p:grpSpPr>
-        <p:cxnSp>
-          <p:nvCxnSpPr>
-            <p:cNvPr id="331" name="Google Shape;331;p15"/>
-            <p:cNvCxnSpPr/>
-            <p:nvPr/>
-          </p:nvCxnSpPr>
-          <p:spPr>
-            <a:xfrm flipH="1">
-              <a:off x="-2" y="-2"/>
-              <a:ext cx="7" cy="64324"/>
-            </a:xfrm>
-            <a:prstGeom prst="straightConnector1">
-              <a:avLst/>
-            </a:prstGeom>
-            <a:noFill/>
-            <a:ln cap="flat" cmpd="sng" w="9525">
-              <a:solidFill>
-                <a:srgbClr val="808080"/>
-              </a:solidFill>
-              <a:prstDash val="solid"/>
-              <a:miter lim="8000"/>
-              <a:headEnd len="sm" w="sm" type="none"/>
-              <a:tailEnd len="sm" w="sm" type="none"/>
-            </a:ln>
-          </p:spPr>
-        </p:cxnSp>
-        <p:cxnSp>
-          <p:nvCxnSpPr>
-            <p:cNvPr id="332" name="Google Shape;332;p15"/>
-            <p:cNvCxnSpPr/>
-            <p:nvPr/>
-          </p:nvCxnSpPr>
-          <p:spPr>
-            <a:xfrm>
-              <a:off x="677118" y="-2"/>
-              <a:ext cx="7" cy="64324"/>
-            </a:xfrm>
-            <a:prstGeom prst="straightConnector1">
-              <a:avLst/>
-            </a:prstGeom>
-            <a:noFill/>
-            <a:ln cap="flat" cmpd="sng" w="9525">
-              <a:solidFill>
-                <a:srgbClr val="808080"/>
-              </a:solidFill>
-              <a:prstDash val="solid"/>
-              <a:miter lim="8000"/>
-              <a:headEnd len="sm" w="sm" type="none"/>
-              <a:tailEnd len="sm" w="sm" type="none"/>
-            </a:ln>
-          </p:spPr>
-        </p:cxnSp>
-        <p:cxnSp>
-          <p:nvCxnSpPr>
-            <p:cNvPr id="333" name="Google Shape;333;p15"/>
-            <p:cNvCxnSpPr/>
-            <p:nvPr/>
-          </p:nvCxnSpPr>
-          <p:spPr>
-            <a:xfrm>
-              <a:off x="1354241" y="-2"/>
-              <a:ext cx="7" cy="64324"/>
-            </a:xfrm>
-            <a:prstGeom prst="straightConnector1">
-              <a:avLst/>
-            </a:prstGeom>
-            <a:noFill/>
-            <a:ln cap="flat" cmpd="sng" w="9525">
-              <a:solidFill>
-                <a:srgbClr val="808080"/>
-              </a:solidFill>
-              <a:prstDash val="solid"/>
-              <a:miter lim="8000"/>
-              <a:headEnd len="sm" w="sm" type="none"/>
-              <a:tailEnd len="sm" w="sm" type="none"/>
-            </a:ln>
-          </p:spPr>
-        </p:cxnSp>
-        <p:cxnSp>
-          <p:nvCxnSpPr>
-            <p:cNvPr id="334" name="Google Shape;334;p15"/>
-            <p:cNvCxnSpPr/>
-            <p:nvPr/>
-          </p:nvCxnSpPr>
-          <p:spPr>
-            <a:xfrm>
-              <a:off x="2031360" y="-2"/>
-              <a:ext cx="7" cy="64324"/>
-            </a:xfrm>
-            <a:prstGeom prst="straightConnector1">
-              <a:avLst/>
-            </a:prstGeom>
-            <a:noFill/>
-            <a:ln cap="flat" cmpd="sng" w="9525">
-              <a:solidFill>
-                <a:srgbClr val="808080"/>
-              </a:solidFill>
-              <a:prstDash val="solid"/>
-              <a:miter lim="8000"/>
-              <a:headEnd len="sm" w="sm" type="none"/>
-              <a:tailEnd len="sm" w="sm" type="none"/>
-            </a:ln>
-          </p:spPr>
-        </p:cxnSp>
-        <p:cxnSp>
-          <p:nvCxnSpPr>
-            <p:cNvPr id="335" name="Google Shape;335;p15"/>
-            <p:cNvCxnSpPr/>
-            <p:nvPr/>
-          </p:nvCxnSpPr>
-          <p:spPr>
-            <a:xfrm>
-              <a:off x="2708479" y="-2"/>
-              <a:ext cx="7" cy="64324"/>
-            </a:xfrm>
-            <a:prstGeom prst="straightConnector1">
-              <a:avLst/>
-            </a:prstGeom>
-            <a:noFill/>
-            <a:ln cap="flat" cmpd="sng" w="9525">
-              <a:solidFill>
-                <a:srgbClr val="808080"/>
-              </a:solidFill>
-              <a:prstDash val="solid"/>
-              <a:miter lim="8000"/>
-              <a:headEnd len="sm" w="sm" type="none"/>
-              <a:tailEnd len="sm" w="sm" type="none"/>
-            </a:ln>
-          </p:spPr>
-        </p:cxnSp>
-        <p:cxnSp>
-          <p:nvCxnSpPr>
-            <p:cNvPr id="336" name="Google Shape;336;p15"/>
-            <p:cNvCxnSpPr/>
-            <p:nvPr/>
-          </p:nvCxnSpPr>
-          <p:spPr>
-            <a:xfrm>
-              <a:off x="3385598" y="-2"/>
-              <a:ext cx="7" cy="64324"/>
-            </a:xfrm>
-            <a:prstGeom prst="straightConnector1">
-              <a:avLst/>
-            </a:prstGeom>
-            <a:noFill/>
-            <a:ln cap="flat" cmpd="sng" w="9525">
-              <a:solidFill>
-                <a:srgbClr val="808080"/>
-              </a:solidFill>
-              <a:prstDash val="solid"/>
-              <a:miter lim="8000"/>
-              <a:headEnd len="sm" w="sm" type="none"/>
-              <a:tailEnd len="sm" w="sm" type="none"/>
-            </a:ln>
-          </p:spPr>
-        </p:cxnSp>
-        <p:cxnSp>
-          <p:nvCxnSpPr>
-            <p:cNvPr id="337" name="Google Shape;337;p15"/>
-            <p:cNvCxnSpPr/>
-            <p:nvPr/>
-          </p:nvCxnSpPr>
-          <p:spPr>
-            <a:xfrm>
-              <a:off x="4062717" y="-2"/>
-              <a:ext cx="7" cy="64324"/>
-            </a:xfrm>
-            <a:prstGeom prst="straightConnector1">
-              <a:avLst/>
-            </a:prstGeom>
-            <a:noFill/>
-            <a:ln cap="flat" cmpd="sng" w="9525">
-              <a:solidFill>
-                <a:srgbClr val="808080"/>
-              </a:solidFill>
-              <a:prstDash val="solid"/>
-              <a:miter lim="8000"/>
-              <a:headEnd len="sm" w="sm" type="none"/>
-              <a:tailEnd len="sm" w="sm" type="none"/>
-            </a:ln>
-          </p:spPr>
-        </p:cxnSp>
-        <p:cxnSp>
-          <p:nvCxnSpPr>
-            <p:cNvPr id="338" name="Google Shape;338;p15"/>
-            <p:cNvCxnSpPr/>
-            <p:nvPr/>
-          </p:nvCxnSpPr>
-          <p:spPr>
-            <a:xfrm>
-              <a:off x="4739836" y="-2"/>
-              <a:ext cx="7" cy="64324"/>
-            </a:xfrm>
-            <a:prstGeom prst="straightConnector1">
-              <a:avLst/>
-            </a:prstGeom>
-            <a:noFill/>
-            <a:ln cap="flat" cmpd="sng" w="9525">
-              <a:solidFill>
-                <a:srgbClr val="808080"/>
-              </a:solidFill>
-              <a:prstDash val="solid"/>
-              <a:miter lim="8000"/>
-              <a:headEnd len="sm" w="sm" type="none"/>
-              <a:tailEnd len="sm" w="sm" type="none"/>
-            </a:ln>
-          </p:spPr>
-        </p:cxnSp>
-        <p:cxnSp>
-          <p:nvCxnSpPr>
-            <p:cNvPr id="339" name="Google Shape;339;p15"/>
-            <p:cNvCxnSpPr/>
-            <p:nvPr/>
-          </p:nvCxnSpPr>
-          <p:spPr>
-            <a:xfrm>
-              <a:off x="5416955" y="-2"/>
-              <a:ext cx="7" cy="64324"/>
-            </a:xfrm>
-            <a:prstGeom prst="straightConnector1">
-              <a:avLst/>
-            </a:prstGeom>
-            <a:noFill/>
-            <a:ln cap="flat" cmpd="sng" w="9525">
-              <a:solidFill>
-                <a:srgbClr val="808080"/>
-              </a:solidFill>
-              <a:prstDash val="solid"/>
-              <a:miter lim="8000"/>
-              <a:headEnd len="sm" w="sm" type="none"/>
-              <a:tailEnd len="sm" w="sm" type="none"/>
-            </a:ln>
-          </p:spPr>
-        </p:cxnSp>
-        <p:cxnSp>
-          <p:nvCxnSpPr>
-            <p:cNvPr id="340" name="Google Shape;340;p15"/>
-            <p:cNvCxnSpPr/>
-            <p:nvPr/>
-          </p:nvCxnSpPr>
-          <p:spPr>
-            <a:xfrm>
-              <a:off x="6094077" y="-2"/>
-              <a:ext cx="7" cy="64324"/>
-            </a:xfrm>
-            <a:prstGeom prst="straightConnector1">
-              <a:avLst/>
-            </a:prstGeom>
-            <a:noFill/>
-            <a:ln cap="flat" cmpd="sng" w="9525">
-              <a:solidFill>
-                <a:srgbClr val="808080"/>
-              </a:solidFill>
-              <a:prstDash val="solid"/>
-              <a:miter lim="8000"/>
-              <a:headEnd len="sm" w="sm" type="none"/>
-              <a:tailEnd len="sm" w="sm" type="none"/>
-            </a:ln>
-          </p:spPr>
-        </p:cxnSp>
-        <p:cxnSp>
-          <p:nvCxnSpPr>
-            <p:cNvPr id="341" name="Google Shape;341;p15"/>
-            <p:cNvCxnSpPr/>
-            <p:nvPr/>
-          </p:nvCxnSpPr>
-          <p:spPr>
-            <a:xfrm>
-              <a:off x="6771195" y="-2"/>
-              <a:ext cx="7" cy="64324"/>
-            </a:xfrm>
-            <a:prstGeom prst="straightConnector1">
-              <a:avLst/>
-            </a:prstGeom>
-            <a:noFill/>
-            <a:ln cap="flat" cmpd="sng" w="9525">
-              <a:solidFill>
-                <a:srgbClr val="808080"/>
-              </a:solidFill>
-              <a:prstDash val="solid"/>
-              <a:miter lim="8000"/>
-              <a:headEnd len="sm" w="sm" type="none"/>
-              <a:tailEnd len="sm" w="sm" type="none"/>
-            </a:ln>
-          </p:spPr>
-        </p:cxnSp>
-        <p:cxnSp>
-          <p:nvCxnSpPr>
-            <p:cNvPr id="342" name="Google Shape;342;p15"/>
-            <p:cNvCxnSpPr/>
-            <p:nvPr/>
-          </p:nvCxnSpPr>
-          <p:spPr>
-            <a:xfrm>
-              <a:off x="7448315" y="-2"/>
-              <a:ext cx="7" cy="64324"/>
-            </a:xfrm>
-            <a:prstGeom prst="straightConnector1">
-              <a:avLst/>
-            </a:prstGeom>
-            <a:noFill/>
-            <a:ln cap="flat" cmpd="sng" w="9525">
-              <a:solidFill>
-                <a:srgbClr val="808080"/>
-              </a:solidFill>
-              <a:prstDash val="solid"/>
-              <a:miter lim="8000"/>
-              <a:headEnd len="sm" w="sm" type="none"/>
-              <a:tailEnd len="sm" w="sm" type="none"/>
-            </a:ln>
-          </p:spPr>
-        </p:cxnSp>
-        <p:cxnSp>
-          <p:nvCxnSpPr>
-            <p:cNvPr id="343" name="Google Shape;343;p15"/>
-            <p:cNvCxnSpPr/>
-            <p:nvPr/>
-          </p:nvCxnSpPr>
-          <p:spPr>
-            <a:xfrm>
-              <a:off x="8125435" y="-2"/>
-              <a:ext cx="7" cy="64324"/>
-            </a:xfrm>
-            <a:prstGeom prst="straightConnector1">
-              <a:avLst/>
-            </a:prstGeom>
-            <a:noFill/>
-            <a:ln cap="flat" cmpd="sng" w="9525">
-              <a:solidFill>
-                <a:srgbClr val="808080"/>
-              </a:solidFill>
-              <a:prstDash val="solid"/>
-              <a:miter lim="8000"/>
-              <a:headEnd len="sm" w="sm" type="none"/>
-              <a:tailEnd len="sm" w="sm" type="none"/>
-            </a:ln>
-          </p:spPr>
-        </p:cxnSp>
-        <p:cxnSp>
-          <p:nvCxnSpPr>
-            <p:cNvPr id="344" name="Google Shape;344;p15"/>
-            <p:cNvCxnSpPr/>
-            <p:nvPr/>
-          </p:nvCxnSpPr>
-          <p:spPr>
-            <a:xfrm>
-              <a:off x="8802554" y="-2"/>
-              <a:ext cx="7" cy="64324"/>
-            </a:xfrm>
-            <a:prstGeom prst="straightConnector1">
-              <a:avLst/>
-            </a:prstGeom>
-            <a:noFill/>
-            <a:ln cap="flat" cmpd="sng" w="9525">
-              <a:solidFill>
-                <a:srgbClr val="808080"/>
-              </a:solidFill>
-              <a:prstDash val="solid"/>
-              <a:miter lim="8000"/>
-              <a:headEnd len="sm" w="sm" type="none"/>
-              <a:tailEnd len="sm" w="sm" type="none"/>
-            </a:ln>
-          </p:spPr>
-        </p:cxnSp>
-        <p:cxnSp>
-          <p:nvCxnSpPr>
-            <p:cNvPr id="345" name="Google Shape;345;p15"/>
-            <p:cNvCxnSpPr/>
-            <p:nvPr/>
-          </p:nvCxnSpPr>
-          <p:spPr>
-            <a:xfrm>
-              <a:off x="9479673" y="-2"/>
-              <a:ext cx="7" cy="64324"/>
-            </a:xfrm>
-            <a:prstGeom prst="straightConnector1">
-              <a:avLst/>
-            </a:prstGeom>
-            <a:noFill/>
-            <a:ln cap="flat" cmpd="sng" w="9525">
-              <a:solidFill>
-                <a:srgbClr val="808080"/>
-              </a:solidFill>
-              <a:prstDash val="solid"/>
-              <a:miter lim="8000"/>
-              <a:headEnd len="sm" w="sm" type="none"/>
-              <a:tailEnd len="sm" w="sm" type="none"/>
-            </a:ln>
-          </p:spPr>
-        </p:cxnSp>
-        <p:cxnSp>
-          <p:nvCxnSpPr>
-            <p:cNvPr id="346" name="Google Shape;346;p15"/>
-            <p:cNvCxnSpPr/>
-            <p:nvPr/>
-          </p:nvCxnSpPr>
-          <p:spPr>
-            <a:xfrm>
-              <a:off x="10156792" y="-2"/>
-              <a:ext cx="7" cy="64324"/>
-            </a:xfrm>
-            <a:prstGeom prst="straightConnector1">
-              <a:avLst/>
-            </a:prstGeom>
-            <a:noFill/>
-            <a:ln cap="flat" cmpd="sng" w="9525">
-              <a:solidFill>
-                <a:srgbClr val="808080"/>
-              </a:solidFill>
-              <a:prstDash val="solid"/>
-              <a:miter lim="8000"/>
-              <a:headEnd len="sm" w="sm" type="none"/>
-              <a:tailEnd len="sm" w="sm" type="none"/>
-            </a:ln>
-          </p:spPr>
-        </p:cxnSp>
-        <p:cxnSp>
-          <p:nvCxnSpPr>
-            <p:cNvPr id="347" name="Google Shape;347;p15"/>
-            <p:cNvCxnSpPr/>
-            <p:nvPr/>
-          </p:nvCxnSpPr>
-          <p:spPr>
-            <a:xfrm>
-              <a:off x="10833914" y="-2"/>
-              <a:ext cx="7" cy="64324"/>
-            </a:xfrm>
-            <a:prstGeom prst="straightConnector1">
-              <a:avLst/>
-            </a:prstGeom>
-            <a:noFill/>
-            <a:ln cap="flat" cmpd="sng" w="9525">
-              <a:solidFill>
-                <a:srgbClr val="808080"/>
-              </a:solidFill>
-              <a:prstDash val="solid"/>
-              <a:miter lim="8000"/>
-              <a:headEnd len="sm" w="sm" type="none"/>
-              <a:tailEnd len="sm" w="sm" type="none"/>
-            </a:ln>
-          </p:spPr>
-        </p:cxnSp>
-        <p:cxnSp>
-          <p:nvCxnSpPr>
-            <p:cNvPr id="348" name="Google Shape;348;p15"/>
-            <p:cNvCxnSpPr/>
-            <p:nvPr/>
-          </p:nvCxnSpPr>
-          <p:spPr>
-            <a:xfrm>
-              <a:off x="11511034" y="-2"/>
-              <a:ext cx="7" cy="64324"/>
-            </a:xfrm>
-            <a:prstGeom prst="straightConnector1">
-              <a:avLst/>
-            </a:prstGeom>
-            <a:noFill/>
-            <a:ln cap="flat" cmpd="sng" w="9525">
-              <a:solidFill>
-                <a:srgbClr val="808080"/>
-              </a:solidFill>
-              <a:prstDash val="solid"/>
-              <a:miter lim="8000"/>
-              <a:headEnd len="sm" w="sm" type="none"/>
-              <a:tailEnd len="sm" w="sm" type="none"/>
-            </a:ln>
-          </p:spPr>
-        </p:cxnSp>
-        <p:cxnSp>
-          <p:nvCxnSpPr>
-            <p:cNvPr id="349" name="Google Shape;349;p15"/>
-            <p:cNvCxnSpPr/>
-            <p:nvPr/>
-          </p:nvCxnSpPr>
-          <p:spPr>
-            <a:xfrm>
-              <a:off x="12188160" y="-2"/>
-              <a:ext cx="7" cy="64324"/>
-            </a:xfrm>
-            <a:prstGeom prst="straightConnector1">
-              <a:avLst/>
-            </a:prstGeom>
-            <a:noFill/>
-            <a:ln cap="flat" cmpd="sng" w="9525">
-              <a:solidFill>
-                <a:srgbClr val="808080"/>
-              </a:solidFill>
-              <a:prstDash val="solid"/>
-              <a:miter lim="8000"/>
-              <a:headEnd len="sm" w="sm" type="none"/>
-              <a:tailEnd len="sm" w="sm" type="none"/>
-            </a:ln>
-          </p:spPr>
-        </p:cxnSp>
-      </p:grpSp>
-      <p:sp>
-        <p:nvSpPr>
-          <p:cNvPr id="350" name="Google Shape;350;p15"/>
-          <p:cNvSpPr txBox="1"/>
-          <p:nvPr>
-            <p:ph type="title"/>
-          </p:nvPr>
-        </p:nvSpPr>
-        <p:spPr>
-          <a:xfrm>
-            <a:off x="429253" y="2291422"/>
-            <a:ext cx="7827335" cy="1876890"/>
-          </a:xfrm>
-          <a:prstGeom prst="rect">
-            <a:avLst/>
-          </a:prstGeom>
-          <a:noFill/>
-          <a:ln>
-            <a:noFill/>
-          </a:ln>
-        </p:spPr>
-        <p:txBody>
-          <a:bodyPr anchorCtr="0" anchor="ctr" bIns="0" lIns="0" spcFirstLastPara="1" rIns="0" wrap="square" tIns="0">
-            <a:noAutofit/>
-          </a:bodyPr>
-          <a:lstStyle>
-            <a:lvl1pPr lvl="0" algn="l">
-              <a:lnSpc>
-                <a:spcPct val="90000"/>
-              </a:lnSpc>
-              <a:spcBef>
-                <a:spcPts val="0"/>
-              </a:spcBef>
-              <a:spcAft>
-                <a:spcPts val="0"/>
-              </a:spcAft>
-              <a:buClr>
-                <a:schemeClr val="lt1"/>
-              </a:buClr>
-              <a:buSzPts val="5400"/>
-              <a:buFont typeface="Play"/>
-              <a:buNone/>
-              <a:defRPr b="0" i="0" sz="5400">
-                <a:solidFill>
-                  <a:schemeClr val="lt1"/>
-                </a:solidFill>
-                <a:latin typeface="Play"/>
-                <a:ea typeface="Play"/>
-                <a:cs typeface="Play"/>
-                <a:sym typeface="Play"/>
-              </a:defRPr>
-            </a:lvl1pPr>
-            <a:lvl2pPr lvl="1">
-              <a:spcBef>
-                <a:spcPts val="0"/>
-              </a:spcBef>
-              <a:spcAft>
-                <a:spcPts val="0"/>
-              </a:spcAft>
-              <a:buSzPts val="1400"/>
-              <a:buNone/>
-              <a:defRPr/>
-            </a:lvl2pPr>
-            <a:lvl3pPr lvl="2">
-              <a:spcBef>
-                <a:spcPts val="0"/>
-              </a:spcBef>
-              <a:spcAft>
-                <a:spcPts val="0"/>
-              </a:spcAft>
-              <a:buSzPts val="1400"/>
-              <a:buNone/>
-              <a:defRPr/>
-            </a:lvl3pPr>
-            <a:lvl4pPr lvl="3">
-              <a:spcBef>
-                <a:spcPts val="0"/>
-              </a:spcBef>
-              <a:spcAft>
-                <a:spcPts val="0"/>
-              </a:spcAft>
-              <a:buSzPts val="1400"/>
-              <a:buNone/>
-              <a:defRPr/>
-            </a:lvl4pPr>
-            <a:lvl5pPr lvl="4">
-              <a:spcBef>
-                <a:spcPts val="0"/>
-              </a:spcBef>
-              <a:spcAft>
-                <a:spcPts val="0"/>
-              </a:spcAft>
-              <a:buSzPts val="1400"/>
-              <a:buNone/>
-              <a:defRPr/>
-            </a:lvl5pPr>
-            <a:lvl6pPr lvl="5">
-              <a:spcBef>
-                <a:spcPts val="0"/>
-              </a:spcBef>
-              <a:spcAft>
-                <a:spcPts val="0"/>
-              </a:spcAft>
-              <a:buSzPts val="1400"/>
-              <a:buNone/>
-              <a:defRPr/>
-            </a:lvl6pPr>
-            <a:lvl7pPr lvl="6">
-              <a:spcBef>
-                <a:spcPts val="0"/>
-              </a:spcBef>
-              <a:spcAft>
-                <a:spcPts val="0"/>
-              </a:spcAft>
-              <a:buSzPts val="1400"/>
-              <a:buNone/>
-              <a:defRPr/>
-            </a:lvl7pPr>
-            <a:lvl8pPr lvl="7">
-              <a:spcBef>
-                <a:spcPts val="0"/>
-              </a:spcBef>
-              <a:spcAft>
-                <a:spcPts val="0"/>
-              </a:spcAft>
-              <a:buSzPts val="1400"/>
-              <a:buNone/>
-              <a:defRPr/>
-            </a:lvl8pPr>
-            <a:lvl9pPr lvl="8">
-              <a:spcBef>
-                <a:spcPts val="0"/>
-              </a:spcBef>
-              <a:spcAft>
-                <a:spcPts val="0"/>
-              </a:spcAft>
-              <a:buSzPts val="1400"/>
-              <a:buNone/>
-              <a:defRPr/>
-            </a:lvl9pPr>
-          </a:lstStyle>
-          <a:p/>
-        </p:txBody>
-      </p:sp>
-      <p:pic>
-        <p:nvPicPr>
-          <p:cNvPr id="351" name="Google Shape;351;p15"/>
-          <p:cNvPicPr preferRelativeResize="0"/>
-          <p:nvPr/>
-        </p:nvPicPr>
-        <p:blipFill rotWithShape="1">
-          <a:blip r:embed="rId3">
-            <a:alphaModFix/>
-          </a:blip>
-          <a:srcRect b="0" l="0" r="0" t="0"/>
-          <a:stretch/>
-        </p:blipFill>
-        <p:spPr>
-          <a:xfrm>
-            <a:off x="398723" y="5895936"/>
-            <a:ext cx="3536690" cy="557252"/>
-          </a:xfrm>
-          <a:prstGeom prst="rect">
-            <a:avLst/>
-          </a:prstGeom>
-          <a:noFill/>
-          <a:ln>
-            <a:noFill/>
-          </a:ln>
-        </p:spPr>
-      </p:pic>
-      <p:pic>
-        <p:nvPicPr>
-          <p:cNvPr descr=" " id="352" name="Google Shape;352;p15"/>
-          <p:cNvPicPr preferRelativeResize="0"/>
-          <p:nvPr/>
-        </p:nvPicPr>
-        <p:blipFill rotWithShape="1">
-          <a:blip r:embed="rId4">
-            <a:alphaModFix/>
-          </a:blip>
-          <a:srcRect b="0" l="0" r="0" t="0"/>
-          <a:stretch/>
-        </p:blipFill>
-        <p:spPr>
-          <a:xfrm>
-            <a:off x="10858522" y="6160788"/>
-            <a:ext cx="934755" cy="292400"/>
-          </a:xfrm>
-          <a:prstGeom prst="rect">
-            <a:avLst/>
-          </a:prstGeom>
-          <a:noFill/>
-          <a:ln>
-            <a:noFill/>
-          </a:ln>
-        </p:spPr>
-      </p:pic>
-    </p:spTree>
-  </p:cSld>
-  <p:clrMapOvr>
-    <a:masterClrMapping/>
-  </p:clrMapOvr>
-</p:sldLayout>
-</file>
-
 <file path=ppt/slideLayouts/slideLayout6.xml><?xml version="1.0" encoding="utf-8"?>
 <p:sldLayout xmlns:a="http://schemas.openxmlformats.org/drawingml/2006/main" xmlns:r="http://schemas.openxmlformats.org/officeDocument/2006/relationships" xmlns:mc="http://schemas.openxmlformats.org/markup-compatibility/2006" xmlns:mv="urn:schemas-microsoft-com:mac:vml" xmlns:p="http://schemas.openxmlformats.org/presentationml/2006/main" xmlns:c="http://schemas.openxmlformats.org/drawingml/2006/chart" xmlns:dgm="http://schemas.openxmlformats.org/drawingml/2006/diagram" xmlns:o="urn:schemas-microsoft-com:office:office" xmlns:v="urn:schemas-microsoft-com:vml" xmlns:pvml="urn:schemas-microsoft-com:office:powerpoint" xmlns:com="http://schemas.openxmlformats.org/drawingml/2006/compatibility" xmlns:p14="http://schemas.microsoft.com/office/powerpoint/2010/main" xmlns:p15="http://schemas.microsoft.com/office/powerpoint/2012/main" xmlns:ahyp="http://schemas.microsoft.com/office/drawing/2018/hyperlinkcolor" matchingName="13_Титульный слайд">
   <p:cSld name="13_Титульный слайд">
@@ -6570,7 +5942,6 @@
   <p:sldLayoutIdLst>
     <p:sldLayoutId id="2147483653" r:id="rId7"/>
     <p:sldLayoutId id="2147483655" r:id="rId9"/>
-    <p:sldLayoutId id="2147483661" r:id="rId15"/>
   </p:sldLayoutIdLst>
   <p:hf dt="0" ftr="0" hdr="0" sldNum="0"/>
   <p:txStyles>
@@ -7380,7 +6751,7 @@
                 <a:ea typeface="Play"/>
                 <a:cs typeface="Play"/>
               </a:rPr>
-              <a:t>Автоматическая вёрстка презентаций: ускоряем работу команды</a:t>
+              <a:t>Защита инициативы: сервис автоматической вёрстки презентаций</a:t>
             </a:r>
           </a:p>
         </p:txBody>
@@ -7394,6 +6765,244 @@
 </file>
 
 <file path=ppt/slides/slide31.xml><?xml version="1.0" encoding="utf-8"?>
+<p:sld xmlns:a="http://schemas.openxmlformats.org/drawingml/2006/main" xmlns:p="http://schemas.openxmlformats.org/presentationml/2006/main" xmlns:r="http://schemas.openxmlformats.org/officeDocument/2006/relationships">
+  <p:cSld>
+    <p:spTree>
+      <p:nvGrpSpPr>
+        <p:cNvPr id="1" name=""/>
+        <p:cNvGrpSpPr/>
+        <p:nvPr/>
+      </p:nvGrpSpPr>
+      <p:grpSpPr/>
+      <p:sp>
+        <p:nvSpPr>
+          <p:cNvPr id="2" name="title"/>
+          <p:cNvSpPr txBox="1"/>
+          <p:nvPr/>
+        </p:nvSpPr>
+        <p:spPr>
+          <a:xfrm>
+            <a:off x="429280" y="424715"/>
+            <a:ext cx="7827264" cy="822960"/>
+          </a:xfrm>
+          <a:prstGeom prst="rect">
+            <a:avLst/>
+          </a:prstGeom>
+          <a:noFill/>
+        </p:spPr>
+        <p:txBody>
+          <a:bodyPr wrap="square" lIns="76200" rIns="76200" tIns="50800" bIns="50800">
+            <a:spAutoFit/>
+          </a:bodyPr>
+          <a:lstStyle/>
+          <a:p>
+            <a:pPr algn="l">
+              <a:spcAft>
+                <a:spcPts val="300"/>
+              </a:spcAft>
+              <a:defRPr sz="3200">
+                <a:solidFill>
+                  <a:srgbClr val="FFFFFF"/>
+                </a:solidFill>
+                <a:latin typeface="Play"/>
+                <a:ea typeface="Play"/>
+                <a:cs typeface="Play"/>
+              </a:defRPr>
+            </a:pPr>
+            <a:r>
+              <a:rPr sz="3200">
+                <a:solidFill>
+                  <a:srgbClr val="FFFFFF"/>
+                </a:solidFill>
+                <a:latin typeface="Play"/>
+                <a:ea typeface="Play"/>
+                <a:cs typeface="Play"/>
+              </a:rPr>
+              <a:t>Контекст и возможность</a:t>
+            </a:r>
+          </a:p>
+        </p:txBody>
+      </p:sp>
+      <p:graphicFrame>
+        <p:nvGraphicFramePr>
+          <p:cNvPr id="3" name="Chart 2"/>
+          <p:cNvGraphicFramePr>
+            <a:graphicFrameLocks noGrp="1"/>
+          </p:cNvGraphicFramePr>
+          <p:nvPr/>
+        </p:nvGraphicFramePr>
+        <p:xfrm>
+          <a:off x="429280" y="1592290"/>
+          <a:ext cx="11310884" cy="2337343"/>
+        </p:xfrm>
+        <a:graphic>
+          <a:graphicData uri="http://schemas.openxmlformats.org/drawingml/2006/chart">
+            <c:chart xmlns:c="http://schemas.openxmlformats.org/drawingml/2006/chart" r:id="rId2"/>
+          </a:graphicData>
+        </a:graphic>
+      </p:graphicFrame>
+      <p:sp>
+        <p:nvSpPr>
+          <p:cNvPr id="4" name="body"/>
+          <p:cNvSpPr txBox="1"/>
+          <p:nvPr/>
+        </p:nvSpPr>
+        <p:spPr>
+          <a:xfrm>
+            <a:off x="429280" y="4101083"/>
+            <a:ext cx="11310884" cy="1672529"/>
+          </a:xfrm>
+          <a:prstGeom prst="rect">
+            <a:avLst/>
+          </a:prstGeom>
+          <a:noFill/>
+        </p:spPr>
+        <p:txBody>
+          <a:bodyPr wrap="square" lIns="76200" rIns="76200" tIns="50800" bIns="50800">
+            <a:spAutoFit/>
+          </a:bodyPr>
+          <a:lstStyle/>
+          <a:p>
+            <a:pPr algn="l">
+              <a:spcAft>
+                <a:spcPts val="300"/>
+              </a:spcAft>
+              <a:defRPr sz="1600">
+                <a:solidFill>
+                  <a:srgbClr val="FFFFFF"/>
+                </a:solidFill>
+                <a:latin typeface="Play"/>
+                <a:ea typeface="Play"/>
+                <a:cs typeface="Play"/>
+              </a:defRPr>
+            </a:pPr>
+            <a:r>
+              <a:rPr sz="1600">
+                <a:solidFill>
+                  <a:srgbClr val="FFFFFF"/>
+                </a:solidFill>
+                <a:latin typeface="Play"/>
+                <a:ea typeface="Play"/>
+                <a:cs typeface="Play"/>
+              </a:rPr>
+              <a:t>• 12‑слайдная колода занимает 186 мин</a:t>
+            </a:r>
+          </a:p>
+          <a:p>
+            <a:pPr algn="l">
+              <a:spcAft>
+                <a:spcPts val="300"/>
+              </a:spcAft>
+              <a:defRPr sz="1600">
+                <a:solidFill>
+                  <a:srgbClr val="FFFFFF"/>
+                </a:solidFill>
+                <a:latin typeface="Play"/>
+                <a:ea typeface="Play"/>
+                <a:cs typeface="Play"/>
+              </a:defRPr>
+            </a:pPr>
+            <a:r>
+              <a:rPr sz="1600">
+                <a:solidFill>
+                  <a:srgbClr val="FFFFFF"/>
+                </a:solidFill>
+                <a:latin typeface="Play"/>
+                <a:ea typeface="Play"/>
+                <a:cs typeface="Play"/>
+              </a:rPr>
+              <a:t>• 74 мин на правки после ревью</a:t>
+            </a:r>
+          </a:p>
+          <a:p>
+            <a:pPr algn="l">
+              <a:spcAft>
+                <a:spcPts val="300"/>
+              </a:spcAft>
+              <a:defRPr sz="1600">
+                <a:solidFill>
+                  <a:srgbClr val="FFFFFF"/>
+                </a:solidFill>
+                <a:latin typeface="Play"/>
+                <a:ea typeface="Play"/>
+                <a:cs typeface="Play"/>
+              </a:defRPr>
+            </a:pPr>
+            <a:r>
+              <a:rPr sz="1600">
+                <a:solidFill>
+                  <a:srgbClr val="FFFFFF"/>
+                </a:solidFill>
+                <a:latin typeface="Play"/>
+                <a:ea typeface="Play"/>
+                <a:cs typeface="Play"/>
+              </a:rPr>
+              <a:t>• 19 из 42 колод нарушают фирменный стиль</a:t>
+            </a:r>
+          </a:p>
+          <a:p>
+            <a:pPr algn="l">
+              <a:spcAft>
+                <a:spcPts val="300"/>
+              </a:spcAft>
+              <a:defRPr sz="1600">
+                <a:solidFill>
+                  <a:srgbClr val="FFFFFF"/>
+                </a:solidFill>
+                <a:latin typeface="Play"/>
+                <a:ea typeface="Play"/>
+                <a:cs typeface="Play"/>
+              </a:defRPr>
+            </a:pPr>
+            <a:r>
+              <a:rPr sz="1600">
+                <a:solidFill>
+                  <a:srgbClr val="FFFFFF"/>
+                </a:solidFill>
+                <a:latin typeface="Play"/>
+                <a:ea typeface="Play"/>
+                <a:cs typeface="Play"/>
+              </a:rPr>
+              <a:t>• 4 чел. закрывают 11 запросов/нед</a:t>
+            </a:r>
+          </a:p>
+          <a:p>
+            <a:pPr algn="l">
+              <a:spcAft>
+                <a:spcPts val="300"/>
+              </a:spcAft>
+              <a:defRPr sz="1600">
+                <a:solidFill>
+                  <a:srgbClr val="FFFFFF"/>
+                </a:solidFill>
+                <a:latin typeface="Play"/>
+                <a:ea typeface="Play"/>
+                <a:cs typeface="Play"/>
+              </a:defRPr>
+            </a:pPr>
+            <a:r>
+              <a:rPr sz="1600">
+                <a:solidFill>
+                  <a:srgbClr val="FFFFFF"/>
+                </a:solidFill>
+                <a:latin typeface="Play"/>
+                <a:ea typeface="Play"/>
+                <a:cs typeface="Play"/>
+              </a:rPr>
+              <a:t>• Средний срок ожидания 6 рабочих дней</a:t>
+            </a:r>
+          </a:p>
+        </p:txBody>
+      </p:sp>
+    </p:spTree>
+  </p:cSld>
+  <p:clrMapOvr>
+    <a:masterClrMapping/>
+  </p:clrMapOvr>
+</p:sld>
+</file>
+
+<file path=ppt/slides/slide32.xml><?xml version="1.0" encoding="utf-8"?>
 <p:sld xmlns:a="http://schemas.openxmlformats.org/drawingml/2006/main" xmlns:p="http://schemas.openxmlformats.org/presentationml/2006/main" xmlns:r="http://schemas.openxmlformats.org/officeDocument/2006/relationships">
   <p:cSld>
     <p:spTree>
@@ -7476,499 +7085,7 @@
         <p:spPr>
           <a:xfrm>
             <a:off x="300817" y="297715"/>
-            <a:ext cx="10435112" cy="4297757"/>
-          </a:xfrm>
-          <a:prstGeom prst="roundRect">
-            <a:avLst/>
-          </a:prstGeom>
-          <a:solidFill>
-            <a:srgbClr val="111111">
-              <a:alpha val="85000"/>
-            </a:srgbClr>
-          </a:solidFill>
-          <a:ln>
-            <a:noFill/>
-          </a:ln>
-          <a:effectLst/>
-        </p:spPr>
-        <p:style>
-          <a:lnRef idx="1">
-            <a:schemeClr val="accent1"/>
-          </a:lnRef>
-          <a:fillRef idx="3">
-            <a:schemeClr val="accent1"/>
-          </a:fillRef>
-          <a:effectRef idx="2">
-            <a:schemeClr val="accent1"/>
-          </a:effectRef>
-          <a:fontRef idx="minor">
-            <a:schemeClr val="lt1"/>
-          </a:fontRef>
-        </p:style>
-        <p:txBody>
-          <a:bodyPr rtlCol="0" anchor="ctr"/>
-          <a:lstStyle/>
-          <a:p>
-            <a:pPr algn="ctr"/>
-          </a:p>
-        </p:txBody>
-      </p:sp>
-      <p:sp>
-        <p:nvSpPr>
-          <p:cNvPr id="681" name="title"/>
-          <p:cNvSpPr txBox="1"/>
-          <p:nvPr/>
-        </p:nvSpPr>
-        <p:spPr>
-          <a:xfrm>
-            <a:off x="427817" y="424715"/>
-            <a:ext cx="7827264" cy="1183640"/>
-          </a:xfrm>
-          <a:prstGeom prst="rect">
-            <a:avLst/>
-          </a:prstGeom>
-          <a:noFill/>
-        </p:spPr>
-        <p:txBody>
-          <a:bodyPr wrap="square" lIns="76200" rIns="76200" tIns="50800" bIns="50800">
-            <a:spAutoFit/>
-          </a:bodyPr>
-          <a:lstStyle/>
-          <a:p>
-            <a:pPr algn="l">
-              <a:spcAft>
-                <a:spcPts val="300"/>
-              </a:spcAft>
-              <a:defRPr sz="3200">
-                <a:solidFill>
-                  <a:srgbClr val="FFFFFF"/>
-                </a:solidFill>
-                <a:latin typeface="Play"/>
-                <a:ea typeface="Play"/>
-                <a:cs typeface="Play"/>
-              </a:defRPr>
-            </a:pPr>
-            <a:r>
-              <a:rPr sz="3200">
-                <a:solidFill>
-                  <a:srgbClr val="FFFFFF"/>
-                </a:solidFill>
-                <a:latin typeface="Play"/>
-                <a:ea typeface="Play"/>
-                <a:cs typeface="Play"/>
-              </a:rPr>
-              <a:t>Текущие затраты времени на создание колод</a:t>
-            </a:r>
-          </a:p>
-        </p:txBody>
-      </p:sp>
-      <p:sp>
-        <p:nvSpPr>
-          <p:cNvPr id="682" name="lead"/>
-          <p:cNvSpPr txBox="1"/>
-          <p:nvPr/>
-        </p:nvSpPr>
-        <p:spPr>
-          <a:xfrm>
-            <a:off x="1559052" y="1837052"/>
-            <a:ext cx="9049877" cy="1227650"/>
-          </a:xfrm>
-          <a:prstGeom prst="rect">
-            <a:avLst/>
-          </a:prstGeom>
-          <a:noFill/>
-        </p:spPr>
-        <p:txBody>
-          <a:bodyPr wrap="square" lIns="76200" rIns="76200" tIns="50800" bIns="50800">
-            <a:spAutoFit/>
-          </a:bodyPr>
-          <a:lstStyle/>
-          <a:p>
-            <a:pPr algn="l">
-              <a:spcAft>
-                <a:spcPts val="300"/>
-              </a:spcAft>
-              <a:defRPr sz="3200">
-                <a:solidFill>
-                  <a:srgbClr val="FFFFFF"/>
-                </a:solidFill>
-                <a:latin typeface="Play"/>
-                <a:ea typeface="Play"/>
-                <a:cs typeface="Play"/>
-              </a:defRPr>
-            </a:pPr>
-            <a:r>
-              <a:rPr sz="3200">
-                <a:solidFill>
-                  <a:srgbClr val="FFFFFF"/>
-                </a:solidFill>
-                <a:latin typeface="Play"/>
-                <a:ea typeface="Play"/>
-                <a:cs typeface="Play"/>
-              </a:rPr>
-              <a:t>42 колоды за Q1 2026: 186 минут на 12 слайдов</a:t>
-            </a:r>
-          </a:p>
-        </p:txBody>
-      </p:sp>
-      <p:sp>
-        <p:nvSpPr>
-          <p:cNvPr id="683" name="body"/>
-          <p:cNvSpPr txBox="1"/>
-          <p:nvPr/>
-        </p:nvSpPr>
-        <p:spPr>
-          <a:xfrm>
-            <a:off x="1559052" y="3310233"/>
-            <a:ext cx="9049877" cy="2618987"/>
-          </a:xfrm>
-          <a:prstGeom prst="rect">
-            <a:avLst/>
-          </a:prstGeom>
-          <a:noFill/>
-        </p:spPr>
-        <p:txBody>
-          <a:bodyPr wrap="square" lIns="76200" rIns="76200" tIns="50800" bIns="50800">
-            <a:spAutoFit/>
-          </a:bodyPr>
-          <a:lstStyle/>
-          <a:p>
-            <a:pPr algn="l">
-              <a:spcAft>
-                <a:spcPts val="300"/>
-              </a:spcAft>
-              <a:defRPr sz="3200">
-                <a:solidFill>
-                  <a:srgbClr val="FFFFFF"/>
-                </a:solidFill>
-                <a:latin typeface="Play"/>
-                <a:ea typeface="Play"/>
-                <a:cs typeface="Play"/>
-              </a:defRPr>
-            </a:pPr>
-            <a:r>
-              <a:rPr sz="3200">
-                <a:solidFill>
-                  <a:srgbClr val="FFFFFF"/>
-                </a:solidFill>
-                <a:latin typeface="Play"/>
-                <a:ea typeface="Play"/>
-                <a:cs typeface="Play"/>
-              </a:rPr>
-              <a:t>• 74 минуты на правки после ревью</a:t>
-            </a:r>
-          </a:p>
-          <a:p>
-            <a:pPr algn="l">
-              <a:spcAft>
-                <a:spcPts val="300"/>
-              </a:spcAft>
-              <a:defRPr sz="3200">
-                <a:solidFill>
-                  <a:srgbClr val="FFFFFF"/>
-                </a:solidFill>
-                <a:latin typeface="Play"/>
-                <a:ea typeface="Play"/>
-                <a:cs typeface="Play"/>
-              </a:defRPr>
-            </a:pPr>
-            <a:r>
-              <a:rPr sz="3200">
-                <a:solidFill>
-                  <a:srgbClr val="FFFFFF"/>
-                </a:solidFill>
-                <a:latin typeface="Play"/>
-                <a:ea typeface="Play"/>
-                <a:cs typeface="Play"/>
-              </a:rPr>
-              <a:t>• 19 колод нарушили фирменный стиль</a:t>
-            </a:r>
-          </a:p>
-        </p:txBody>
-      </p:sp>
-    </p:spTree>
-  </p:cSld>
-  <p:clrMapOvr>
-    <a:masterClrMapping/>
-  </p:clrMapOvr>
-</p:sld>
-</file>
-
-<file path=ppt/slides/slide32.xml><?xml version="1.0" encoding="utf-8"?>
-<p:sld xmlns:a="http://schemas.openxmlformats.org/drawingml/2006/main" xmlns:p="http://schemas.openxmlformats.org/presentationml/2006/main" xmlns:r="http://schemas.openxmlformats.org/officeDocument/2006/relationships">
-  <p:cSld>
-    <p:spTree>
-      <p:nvGrpSpPr>
-        <p:cNvPr id="1" name=""/>
-        <p:cNvGrpSpPr/>
-        <p:nvPr/>
-      </p:nvGrpSpPr>
-      <p:grpSpPr/>
-      <p:sp>
-        <p:nvSpPr>
-          <p:cNvPr id="2" name="title"/>
-          <p:cNvSpPr txBox="1"/>
-          <p:nvPr/>
-        </p:nvSpPr>
-        <p:spPr>
-          <a:xfrm>
-            <a:off x="429280" y="424715"/>
-            <a:ext cx="7827264" cy="822960"/>
-          </a:xfrm>
-          <a:prstGeom prst="rect">
-            <a:avLst/>
-          </a:prstGeom>
-          <a:noFill/>
-        </p:spPr>
-        <p:txBody>
-          <a:bodyPr wrap="square" lIns="76200" rIns="76200" tIns="50800" bIns="50800">
-            <a:spAutoFit/>
-          </a:bodyPr>
-          <a:lstStyle/>
-          <a:p>
-            <a:pPr algn="l">
-              <a:spcAft>
-                <a:spcPts val="300"/>
-              </a:spcAft>
-              <a:defRPr sz="4000">
-                <a:solidFill>
-                  <a:srgbClr val="FFFFFF"/>
-                </a:solidFill>
-                <a:latin typeface="Play"/>
-                <a:ea typeface="Play"/>
-                <a:cs typeface="Play"/>
-              </a:defRPr>
-            </a:pPr>
-            <a:r>
-              <a:rPr sz="4000">
-                <a:solidFill>
-                  <a:srgbClr val="FFFFFF"/>
-                </a:solidFill>
-                <a:latin typeface="Play"/>
-                <a:ea typeface="Play"/>
-                <a:cs typeface="Play"/>
-              </a:rPr>
-              <a:t>Проблемы дизайна и ожидания</a:t>
-            </a:r>
-          </a:p>
-        </p:txBody>
-      </p:sp>
-      <p:sp>
-        <p:nvSpPr>
-          <p:cNvPr id="3" name="lead"/>
-          <p:cNvSpPr txBox="1"/>
-          <p:nvPr/>
-        </p:nvSpPr>
-        <p:spPr>
-          <a:xfrm>
-            <a:off x="1560368" y="1592290"/>
-            <a:ext cx="9048707" cy="1254396"/>
-          </a:xfrm>
-          <a:prstGeom prst="rect">
-            <a:avLst/>
-          </a:prstGeom>
-          <a:noFill/>
-        </p:spPr>
-        <p:txBody>
-          <a:bodyPr wrap="square" lIns="76200" rIns="76200" tIns="50800" bIns="50800">
-            <a:spAutoFit/>
-          </a:bodyPr>
-          <a:lstStyle/>
-          <a:p>
-            <a:pPr algn="ctr">
-              <a:spcAft>
-                <a:spcPts val="300"/>
-              </a:spcAft>
-              <a:defRPr sz="2800">
-                <a:solidFill>
-                  <a:srgbClr val="FFFFFF"/>
-                </a:solidFill>
-                <a:latin typeface="Play"/>
-                <a:ea typeface="Play"/>
-                <a:cs typeface="Play"/>
-              </a:defRPr>
-            </a:pPr>
-            <a:r>
-              <a:rPr sz="2800">
-                <a:solidFill>
-                  <a:srgbClr val="FFFFFF"/>
-                </a:solidFill>
-                <a:latin typeface="Play"/>
-                <a:ea typeface="Play"/>
-                <a:cs typeface="Play"/>
-              </a:rPr>
-              <a:t>Дизайн-отдел из 4 человек закрывает 11 запросов/неделю из 27</a:t>
-            </a:r>
-          </a:p>
-        </p:txBody>
-      </p:sp>
-      <p:sp>
-        <p:nvSpPr>
-          <p:cNvPr id="4" name="body"/>
-          <p:cNvSpPr txBox="1"/>
-          <p:nvPr/>
-        </p:nvSpPr>
-        <p:spPr>
-          <a:xfrm>
-            <a:off x="1560368" y="3097566"/>
-            <a:ext cx="9048707" cy="2676046"/>
-          </a:xfrm>
-          <a:prstGeom prst="rect">
-            <a:avLst/>
-          </a:prstGeom>
-          <a:noFill/>
-        </p:spPr>
-        <p:txBody>
-          <a:bodyPr wrap="square" lIns="76200" rIns="76200" tIns="50800" bIns="50800">
-            <a:spAutoFit/>
-          </a:bodyPr>
-          <a:lstStyle/>
-          <a:p>
-            <a:pPr algn="l">
-              <a:spcAft>
-                <a:spcPts val="300"/>
-              </a:spcAft>
-              <a:defRPr sz="2800">
-                <a:solidFill>
-                  <a:srgbClr val="FFFFFF"/>
-                </a:solidFill>
-                <a:latin typeface="Play"/>
-                <a:ea typeface="Play"/>
-                <a:cs typeface="Play"/>
-              </a:defRPr>
-            </a:pPr>
-            <a:r>
-              <a:rPr sz="2800">
-                <a:solidFill>
-                  <a:srgbClr val="FFFFFF"/>
-                </a:solidFill>
-                <a:latin typeface="Play"/>
-                <a:ea typeface="Play"/>
-                <a:cs typeface="Play"/>
-              </a:rPr>
-              <a:t>• Средний срок ожидания 6 рабочих дней</a:t>
-            </a:r>
-          </a:p>
-          <a:p>
-            <a:pPr algn="l">
-              <a:spcAft>
-                <a:spcPts val="300"/>
-              </a:spcAft>
-              <a:defRPr sz="2800">
-                <a:solidFill>
-                  <a:srgbClr val="FFFFFF"/>
-                </a:solidFill>
-                <a:latin typeface="Play"/>
-                <a:ea typeface="Play"/>
-                <a:cs typeface="Play"/>
-              </a:defRPr>
-            </a:pPr>
-            <a:r>
-              <a:rPr sz="2800">
-                <a:solidFill>
-                  <a:srgbClr val="FFFFFF"/>
-                </a:solidFill>
-                <a:latin typeface="Play"/>
-                <a:ea typeface="Play"/>
-                <a:cs typeface="Play"/>
-              </a:rPr>
-              <a:t>• 19 колод с нарушением стиля</a:t>
-            </a:r>
-          </a:p>
-        </p:txBody>
-      </p:sp>
-    </p:spTree>
-  </p:cSld>
-  <p:clrMapOvr>
-    <a:masterClrMapping/>
-  </p:clrMapOvr>
-</p:sld>
-</file>
-
-<file path=ppt/slides/slide33.xml><?xml version="1.0" encoding="utf-8"?>
-<p:sld xmlns:a="http://schemas.openxmlformats.org/drawingml/2006/main" xmlns:p="http://schemas.openxmlformats.org/presentationml/2006/main" xmlns:r="http://schemas.openxmlformats.org/officeDocument/2006/relationships">
-  <p:cSld>
-    <p:spTree>
-      <p:nvGrpSpPr>
-        <p:cNvPr id="1" name=""/>
-        <p:cNvGrpSpPr/>
-        <p:nvPr/>
-      </p:nvGrpSpPr>
-      <p:grpSpPr/>
-      <p:sp>
-        <p:nvSpPr>
-          <p:cNvPr id="679" name="Google Shape;679;p31"/>
-          <p:cNvSpPr/>
-          <p:nvPr/>
-        </p:nvSpPr>
-        <p:spPr>
-          <a:xfrm>
-            <a:off x="0" y="4748271"/>
-            <a:ext cx="12192000" cy="2109730"/>
-          </a:xfrm>
-          <a:prstGeom prst="rect">
-            <a:avLst/>
-          </a:prstGeom>
-          <a:gradFill>
-            <a:gsLst>
-              <a:gs pos="0">
-                <a:srgbClr val="0077FF">
-                  <a:alpha val="61961"/>
-                </a:srgbClr>
-              </a:gs>
-              <a:gs pos="99000">
-                <a:srgbClr val="00AEE8"/>
-              </a:gs>
-              <a:gs pos="100000">
-                <a:srgbClr val="00AEE8"/>
-              </a:gs>
-            </a:gsLst>
-            <a:lin ang="14400000" scaled="0"/>
-          </a:gradFill>
-          <a:ln>
-            <a:noFill/>
-          </a:ln>
-        </p:spPr>
-        <p:txBody>
-          <a:bodyPr anchorCtr="0" anchor="ctr" bIns="0" lIns="108000" spcFirstLastPara="1" rIns="91425" wrap="square" tIns="0">
-            <a:noAutofit/>
-          </a:bodyPr>
-          <a:lstStyle/>
-          <a:p>
-            <a:pPr indent="0" lvl="0" marL="0" marR="0" rtl="0" algn="l">
-              <a:spcBef>
-                <a:spcPts val="0"/>
-              </a:spcBef>
-              <a:spcAft>
-                <a:spcPts val="0"/>
-              </a:spcAft>
-              <a:buNone/>
-            </a:pPr>
-            <a:r>
-              <a:t/>
-            </a:r>
-            <a:endParaRPr sz="1100">
-              <a:solidFill>
-                <a:schemeClr val="lt1"/>
-              </a:solidFill>
-              <a:latin typeface="Play"/>
-              <a:ea typeface="Play"/>
-              <a:cs typeface="Play"/>
-              <a:sym typeface="Play"/>
-            </a:endParaRPr>
-          </a:p>
-        </p:txBody>
-      </p:sp>
-      <p:sp>
-        <p:nvSpPr>
-          <p:cNvPr id="680" name="Rounded Rectangle 679"/>
-          <p:cNvSpPr/>
-          <p:nvPr/>
-        </p:nvSpPr>
-        <p:spPr>
-          <a:xfrm>
-            <a:off x="300817" y="297715"/>
-            <a:ext cx="10435112" cy="4826077"/>
+            <a:ext cx="11566347" cy="5411957"/>
           </a:xfrm>
           <a:prstGeom prst="roundRect">
             <a:avLst/>
@@ -8049,21 +7166,399 @@
                 <a:ea typeface="Play"/>
                 <a:cs typeface="Play"/>
               </a:rPr>
-              <a:t>Сервис автоматической вёрстки</a:t>
+              <a:t>Предложение</a:t>
             </a:r>
           </a:p>
         </p:txBody>
       </p:sp>
       <p:sp>
         <p:nvSpPr>
-          <p:cNvPr id="682" name="lead"/>
+          <p:cNvPr id="682" name="Pentagon 681"/>
+          <p:cNvSpPr/>
+          <p:nvPr/>
+        </p:nvSpPr>
+        <p:spPr>
+          <a:xfrm>
+            <a:off x="427817" y="2429574"/>
+            <a:ext cx="1772267" cy="1098805"/>
+          </a:xfrm>
+          <a:prstGeom prst="homePlate">
+            <a:avLst/>
+          </a:prstGeom>
+          <a:solidFill>
+            <a:srgbClr val="0077FF"/>
+          </a:solidFill>
+          <a:ln>
+            <a:noFill/>
+          </a:ln>
+        </p:spPr>
+        <p:style>
+          <a:lnRef idx="1">
+            <a:schemeClr val="accent1"/>
+          </a:lnRef>
+          <a:fillRef idx="3">
+            <a:schemeClr val="accent1"/>
+          </a:fillRef>
+          <a:effectRef idx="2">
+            <a:schemeClr val="accent1"/>
+          </a:effectRef>
+          <a:fontRef idx="minor">
+            <a:schemeClr val="lt1"/>
+          </a:fontRef>
+        </p:style>
+        <p:txBody>
+          <a:bodyPr rtlCol="0" anchor="ctr" wrap="square" lIns="12700" rIns="12700" tIns="12700" bIns="12700"/>
+          <a:lstStyle/>
+          <a:p>
+            <a:pPr algn="ctr">
+              <a:defRPr sz="868" b="0">
+                <a:solidFill>
+                  <a:srgbClr val="FFFFFF"/>
+                </a:solidFill>
+                <a:latin typeface="Play"/>
+                <a:ea typeface="Play"/>
+                <a:cs typeface="Play"/>
+              </a:defRPr>
+            </a:pPr>
+            <a:r>
+              <a:rPr sz="868" b="0">
+                <a:solidFill>
+                  <a:srgbClr val="FFFFFF"/>
+                </a:solidFill>
+                <a:latin typeface="Play"/>
+                <a:ea typeface="Play"/>
+                <a:cs typeface="Play"/>
+              </a:rPr>
+              <a:t>Загрузка шаблона</a:t>
+            </a:r>
+          </a:p>
+        </p:txBody>
+      </p:sp>
+      <p:sp>
+        <p:nvSpPr>
+          <p:cNvPr id="683" name="Chevron 682"/>
+          <p:cNvSpPr/>
+          <p:nvPr/>
+        </p:nvSpPr>
+        <p:spPr>
+          <a:xfrm>
+            <a:off x="2335832" y="2429574"/>
+            <a:ext cx="1772267" cy="1098805"/>
+          </a:xfrm>
+          <a:prstGeom prst="chevron">
+            <a:avLst/>
+          </a:prstGeom>
+          <a:solidFill>
+            <a:srgbClr val="0077FF"/>
+          </a:solidFill>
+          <a:ln>
+            <a:noFill/>
+          </a:ln>
+        </p:spPr>
+        <p:style>
+          <a:lnRef idx="1">
+            <a:schemeClr val="accent1"/>
+          </a:lnRef>
+          <a:fillRef idx="3">
+            <a:schemeClr val="accent1"/>
+          </a:fillRef>
+          <a:effectRef idx="2">
+            <a:schemeClr val="accent1"/>
+          </a:effectRef>
+          <a:fontRef idx="minor">
+            <a:schemeClr val="lt1"/>
+          </a:fontRef>
+        </p:style>
+        <p:txBody>
+          <a:bodyPr rtlCol="0" anchor="ctr" wrap="square" lIns="12700" rIns="12700" tIns="12700" bIns="12700"/>
+          <a:lstStyle/>
+          <a:p>
+            <a:pPr algn="ctr">
+              <a:defRPr sz="600" b="0">
+                <a:solidFill>
+                  <a:srgbClr val="FFFFFF"/>
+                </a:solidFill>
+                <a:latin typeface="Play"/>
+                <a:ea typeface="Play"/>
+                <a:cs typeface="Play"/>
+              </a:defRPr>
+            </a:pPr>
+            <a:r>
+              <a:rPr sz="600" b="0">
+                <a:solidFill>
+                  <a:srgbClr val="FFFFFF"/>
+                </a:solidFill>
+                <a:latin typeface="Play"/>
+                <a:ea typeface="Play"/>
+                <a:cs typeface="Play"/>
+              </a:rPr>
+              <a:t>Разбор дизайн‑системы</a:t>
+            </a:r>
+          </a:p>
+        </p:txBody>
+      </p:sp>
+      <p:sp>
+        <p:nvSpPr>
+          <p:cNvPr id="684" name="Chevron 683"/>
+          <p:cNvSpPr/>
+          <p:nvPr/>
+        </p:nvSpPr>
+        <p:spPr>
+          <a:xfrm>
+            <a:off x="4243848" y="2429574"/>
+            <a:ext cx="1772267" cy="1098805"/>
+          </a:xfrm>
+          <a:prstGeom prst="chevron">
+            <a:avLst/>
+          </a:prstGeom>
+          <a:solidFill>
+            <a:srgbClr val="0077FF"/>
+          </a:solidFill>
+          <a:ln>
+            <a:noFill/>
+          </a:ln>
+        </p:spPr>
+        <p:style>
+          <a:lnRef idx="1">
+            <a:schemeClr val="accent1"/>
+          </a:lnRef>
+          <a:fillRef idx="3">
+            <a:schemeClr val="accent1"/>
+          </a:fillRef>
+          <a:effectRef idx="2">
+            <a:schemeClr val="accent1"/>
+          </a:effectRef>
+          <a:fontRef idx="minor">
+            <a:schemeClr val="lt1"/>
+          </a:fontRef>
+        </p:style>
+        <p:txBody>
+          <a:bodyPr rtlCol="0" anchor="ctr" wrap="square" lIns="12700" rIns="12700" tIns="12700" bIns="12700"/>
+          <a:lstStyle/>
+          <a:p>
+            <a:pPr algn="ctr">
+              <a:defRPr sz="694" b="0">
+                <a:solidFill>
+                  <a:srgbClr val="FFFFFF"/>
+                </a:solidFill>
+                <a:latin typeface="Play"/>
+                <a:ea typeface="Play"/>
+                <a:cs typeface="Play"/>
+              </a:defRPr>
+            </a:pPr>
+            <a:r>
+              <a:rPr sz="694" b="0">
+                <a:solidFill>
+                  <a:srgbClr val="FFFFFF"/>
+                </a:solidFill>
+                <a:latin typeface="Play"/>
+                <a:ea typeface="Play"/>
+                <a:cs typeface="Play"/>
+              </a:rPr>
+              <a:t>Построение плана колоды</a:t>
+            </a:r>
+          </a:p>
+        </p:txBody>
+      </p:sp>
+      <p:sp>
+        <p:nvSpPr>
+          <p:cNvPr id="685" name="Chevron 684"/>
+          <p:cNvSpPr/>
+          <p:nvPr/>
+        </p:nvSpPr>
+        <p:spPr>
+          <a:xfrm>
+            <a:off x="6151864" y="2429574"/>
+            <a:ext cx="1772267" cy="1098805"/>
+          </a:xfrm>
+          <a:prstGeom prst="chevron">
+            <a:avLst/>
+          </a:prstGeom>
+          <a:solidFill>
+            <a:srgbClr val="0077FF"/>
+          </a:solidFill>
+          <a:ln>
+            <a:noFill/>
+          </a:ln>
+        </p:spPr>
+        <p:style>
+          <a:lnRef idx="1">
+            <a:schemeClr val="accent1"/>
+          </a:lnRef>
+          <a:fillRef idx="3">
+            <a:schemeClr val="accent1"/>
+          </a:fillRef>
+          <a:effectRef idx="2">
+            <a:schemeClr val="accent1"/>
+          </a:effectRef>
+          <a:fontRef idx="minor">
+            <a:schemeClr val="lt1"/>
+          </a:fontRef>
+        </p:style>
+        <p:txBody>
+          <a:bodyPr rtlCol="0" anchor="ctr" wrap="square" lIns="12700" rIns="12700" tIns="12700" bIns="12700"/>
+          <a:lstStyle/>
+          <a:p>
+            <a:pPr algn="ctr">
+              <a:defRPr sz="600" b="0">
+                <a:solidFill>
+                  <a:srgbClr val="FFFFFF"/>
+                </a:solidFill>
+                <a:latin typeface="Play"/>
+                <a:ea typeface="Play"/>
+                <a:cs typeface="Play"/>
+              </a:defRPr>
+            </a:pPr>
+            <a:r>
+              <a:rPr sz="600" b="0">
+                <a:solidFill>
+                  <a:srgbClr val="FFFFFF"/>
+                </a:solidFill>
+                <a:latin typeface="Play"/>
+                <a:ea typeface="Play"/>
+                <a:cs typeface="Play"/>
+              </a:rPr>
+              <a:t>Авто‑верстка</a:t>
+            </a:r>
+          </a:p>
+        </p:txBody>
+      </p:sp>
+      <p:sp>
+        <p:nvSpPr>
+          <p:cNvPr id="686" name="Chevron 685"/>
+          <p:cNvSpPr/>
+          <p:nvPr/>
+        </p:nvSpPr>
+        <p:spPr>
+          <a:xfrm>
+            <a:off x="8059880" y="2429574"/>
+            <a:ext cx="1772267" cy="1098805"/>
+          </a:xfrm>
+          <a:prstGeom prst="chevron">
+            <a:avLst/>
+          </a:prstGeom>
+          <a:solidFill>
+            <a:srgbClr val="0077FF"/>
+          </a:solidFill>
+          <a:ln>
+            <a:noFill/>
+          </a:ln>
+        </p:spPr>
+        <p:style>
+          <a:lnRef idx="1">
+            <a:schemeClr val="accent1"/>
+          </a:lnRef>
+          <a:fillRef idx="3">
+            <a:schemeClr val="accent1"/>
+          </a:fillRef>
+          <a:effectRef idx="2">
+            <a:schemeClr val="accent1"/>
+          </a:effectRef>
+          <a:fontRef idx="minor">
+            <a:schemeClr val="lt1"/>
+          </a:fontRef>
+        </p:style>
+        <p:txBody>
+          <a:bodyPr rtlCol="0" anchor="ctr" wrap="square" lIns="12700" rIns="12700" tIns="12700" bIns="12700"/>
+          <a:lstStyle/>
+          <a:p>
+            <a:pPr algn="ctr">
+              <a:defRPr sz="868" b="0">
+                <a:solidFill>
+                  <a:srgbClr val="FFFFFF"/>
+                </a:solidFill>
+                <a:latin typeface="Play"/>
+                <a:ea typeface="Play"/>
+                <a:cs typeface="Play"/>
+              </a:defRPr>
+            </a:pPr>
+            <a:r>
+              <a:rPr sz="868" b="0">
+                <a:solidFill>
+                  <a:srgbClr val="FFFFFF"/>
+                </a:solidFill>
+                <a:latin typeface="Play"/>
+                <a:ea typeface="Play"/>
+                <a:cs typeface="Play"/>
+              </a:rPr>
+              <a:t>Аудит качества</a:t>
+            </a:r>
+          </a:p>
+        </p:txBody>
+      </p:sp>
+      <p:sp>
+        <p:nvSpPr>
+          <p:cNvPr id="687" name="Chevron 686"/>
+          <p:cNvSpPr/>
+          <p:nvPr/>
+        </p:nvSpPr>
+        <p:spPr>
+          <a:xfrm>
+            <a:off x="9967896" y="2429574"/>
+            <a:ext cx="1772267" cy="1098805"/>
+          </a:xfrm>
+          <a:prstGeom prst="chevron">
+            <a:avLst/>
+          </a:prstGeom>
+          <a:solidFill>
+            <a:srgbClr val="0077FF"/>
+          </a:solidFill>
+          <a:ln>
+            <a:noFill/>
+          </a:ln>
+        </p:spPr>
+        <p:style>
+          <a:lnRef idx="1">
+            <a:schemeClr val="accent1"/>
+          </a:lnRef>
+          <a:fillRef idx="3">
+            <a:schemeClr val="accent1"/>
+          </a:fillRef>
+          <a:effectRef idx="2">
+            <a:schemeClr val="accent1"/>
+          </a:effectRef>
+          <a:fontRef idx="minor">
+            <a:schemeClr val="lt1"/>
+          </a:fontRef>
+        </p:style>
+        <p:txBody>
+          <a:bodyPr rtlCol="0" anchor="ctr" wrap="square" lIns="12700" rIns="12700" tIns="12700" bIns="12700"/>
+          <a:lstStyle/>
+          <a:p>
+            <a:pPr algn="ctr">
+              <a:defRPr sz="694" b="0">
+                <a:solidFill>
+                  <a:srgbClr val="FFFFFF"/>
+                </a:solidFill>
+                <a:latin typeface="Play"/>
+                <a:ea typeface="Play"/>
+                <a:cs typeface="Play"/>
+              </a:defRPr>
+            </a:pPr>
+            <a:r>
+              <a:rPr sz="694" b="0">
+                <a:solidFill>
+                  <a:srgbClr val="FFFFFF"/>
+                </a:solidFill>
+                <a:latin typeface="Play"/>
+                <a:ea typeface="Play"/>
+                <a:cs typeface="Play"/>
+              </a:rPr>
+              <a:t>Экспорт результата</a:t>
+            </a:r>
+          </a:p>
+        </p:txBody>
+      </p:sp>
+      <p:sp>
+        <p:nvSpPr>
+          <p:cNvPr id="688" name="body"/>
           <p:cNvSpPr txBox="1"/>
           <p:nvPr/>
         </p:nvSpPr>
         <p:spPr>
           <a:xfrm>
-            <a:off x="1559052" y="1837052"/>
-            <a:ext cx="9049877" cy="1227650"/>
+            <a:off x="427817" y="4292353"/>
+            <a:ext cx="11312347" cy="1636867"/>
           </a:xfrm>
           <a:prstGeom prst="rect">
             <a:avLst/>
@@ -8080,7 +7575,7 @@
               <a:spcAft>
                 <a:spcPts val="300"/>
               </a:spcAft>
-              <a:defRPr sz="3200">
+              <a:defRPr sz="1800">
                 <a:solidFill>
                   <a:srgbClr val="FFFFFF"/>
                 </a:solidFill>
@@ -8090,7 +7585,7 @@
               </a:defRPr>
             </a:pPr>
             <a:r>
-              <a:rPr sz="3200">
+              <a:rPr sz="1800">
                 <a:solidFill>
                   <a:srgbClr val="FFFFFF"/>
                 </a:solidFill>
@@ -8098,38 +7593,15 @@
                 <a:ea typeface="Play"/>
                 <a:cs typeface="Play"/>
               </a:rPr>
-              <a:t>Принимает шаблон pptx и материалы</a:t>
+              <a:t>• Сервис принимает pptx, документы, таблицы, заметки</a:t>
             </a:r>
           </a:p>
-        </p:txBody>
-      </p:sp>
-      <p:sp>
-        <p:nvSpPr>
-          <p:cNvPr id="683" name="body"/>
-          <p:cNvSpPr txBox="1"/>
-          <p:nvPr/>
-        </p:nvSpPr>
-        <p:spPr>
-          <a:xfrm>
-            <a:off x="1559052" y="3310233"/>
-            <a:ext cx="9049877" cy="2618987"/>
-          </a:xfrm>
-          <a:prstGeom prst="rect">
-            <a:avLst/>
-          </a:prstGeom>
-          <a:noFill/>
-        </p:spPr>
-        <p:txBody>
-          <a:bodyPr wrap="square" lIns="76200" rIns="76200" tIns="50800" bIns="50800">
-            <a:spAutoFit/>
-          </a:bodyPr>
-          <a:lstStyle/>
           <a:p>
             <a:pPr algn="l">
               <a:spcAft>
                 <a:spcPts val="300"/>
               </a:spcAft>
-              <a:defRPr sz="3200">
+              <a:defRPr sz="1800">
                 <a:solidFill>
                   <a:srgbClr val="FFFFFF"/>
                 </a:solidFill>
@@ -8139,7 +7611,7 @@
               </a:defRPr>
             </a:pPr>
             <a:r>
-              <a:rPr sz="3200">
+              <a:rPr sz="1800">
                 <a:solidFill>
                   <a:srgbClr val="FFFFFF"/>
                 </a:solidFill>
@@ -8147,7 +7619,7 @@
                 <a:ea typeface="Play"/>
                 <a:cs typeface="Play"/>
               </a:rPr>
-              <a:t>• Автоматически формирует план колоды и вёрстку</a:t>
+              <a:t>• Автоматически строит дизайн‑систему и план колоды</a:t>
             </a:r>
           </a:p>
           <a:p>
@@ -8155,7 +7627,7 @@
               <a:spcAft>
                 <a:spcPts val="300"/>
               </a:spcAft>
-              <a:defRPr sz="3200">
+              <a:defRPr sz="1800">
                 <a:solidFill>
                   <a:srgbClr val="FFFFFF"/>
                 </a:solidFill>
@@ -8165,7 +7637,7 @@
               </a:defRPr>
             </a:pPr>
             <a:r>
-              <a:rPr sz="3200">
+              <a:rPr sz="1800">
                 <a:solidFill>
                   <a:srgbClr val="FFFFFF"/>
                 </a:solidFill>
@@ -8173,7 +7645,33 @@
                 <a:ea typeface="Play"/>
                 <a:cs typeface="Play"/>
               </a:rPr>
-              <a:t>• Экспорт в pptx, pdf, html</a:t>
+              <a:t>• Экспорт в pptx, pdf, html с редактируемыми слайдами</a:t>
+            </a:r>
+          </a:p>
+          <a:p>
+            <a:pPr algn="l">
+              <a:spcAft>
+                <a:spcPts val="300"/>
+              </a:spcAft>
+              <a:defRPr sz="1800">
+                <a:solidFill>
+                  <a:srgbClr val="FFFFFF"/>
+                </a:solidFill>
+                <a:latin typeface="Play"/>
+                <a:ea typeface="Play"/>
+                <a:cs typeface="Play"/>
+              </a:defRPr>
+            </a:pPr>
+            <a:r>
+              <a:rPr sz="1800">
+                <a:solidFill>
+                  <a:srgbClr val="FFFFFF"/>
+                </a:solidFill>
+                <a:latin typeface="Play"/>
+                <a:ea typeface="Play"/>
+                <a:cs typeface="Play"/>
+              </a:rPr>
+              <a:t>• Аудит качества проверяет стиль и данные до выдачи</a:t>
             </a:r>
           </a:p>
         </p:txBody>
@@ -8186,7 +7684,7 @@
 </p:sld>
 </file>
 
-<file path=ppt/slides/slide34.xml><?xml version="1.0" encoding="utf-8"?>
+<file path=ppt/slides/slide33.xml><?xml version="1.0" encoding="utf-8"?>
 <p:sld xmlns:a="http://schemas.openxmlformats.org/drawingml/2006/main" xmlns:p="http://schemas.openxmlformats.org/presentationml/2006/main" xmlns:r="http://schemas.openxmlformats.org/officeDocument/2006/relationships">
   <p:cSld>
     <p:spTree>
@@ -8196,117 +7694,6 @@
         <p:nvPr/>
       </p:nvGrpSpPr>
       <p:grpSpPr/>
-      <p:grpSp>
-        <p:nvGrpSpPr>
-          <p:cNvPr id="617" name="Google Shape;617;p28"/>
-          <p:cNvGrpSpPr/>
-          <p:nvPr/>
-        </p:nvGrpSpPr>
-        <p:grpSpPr>
-          <a:xfrm>
-            <a:off x="427865" y="1988423"/>
-            <a:ext cx="476638" cy="474884"/>
-            <a:chOff x="427865" y="2634106"/>
-            <a:chExt cx="476638" cy="474884"/>
-          </a:xfrm>
-        </p:grpSpPr>
-        <p:sp>
-          <p:nvSpPr>
-            <p:cNvPr id="618" name="Google Shape;618;p28"/>
-            <p:cNvSpPr/>
-            <p:nvPr/>
-          </p:nvSpPr>
-          <p:spPr>
-            <a:xfrm>
-              <a:off x="427865" y="2634106"/>
-              <a:ext cx="476638" cy="474884"/>
-            </a:xfrm>
-            <a:prstGeom prst="roundRect">
-              <a:avLst>
-                <a:gd fmla="val 30745" name="adj"/>
-              </a:avLst>
-            </a:prstGeom>
-            <a:gradFill>
-              <a:gsLst>
-                <a:gs pos="0">
-                  <a:srgbClr val="00AEE8"/>
-                </a:gs>
-                <a:gs pos="100000">
-                  <a:srgbClr val="0077FF"/>
-                </a:gs>
-              </a:gsLst>
-              <a:lin ang="8100000" scaled="0"/>
-            </a:gradFill>
-            <a:ln>
-              <a:noFill/>
-            </a:ln>
-          </p:spPr>
-          <p:txBody>
-            <a:bodyPr anchorCtr="0" anchor="ctr" bIns="45700" lIns="36000" spcFirstLastPara="1" rIns="36000" wrap="square" tIns="45700">
-              <a:noAutofit/>
-            </a:bodyPr>
-            <a:lstStyle/>
-            <a:p>
-              <a:pPr indent="0" lvl="0" marL="0" marR="0" rtl="0" algn="ctr">
-                <a:lnSpc>
-                  <a:spcPct val="100000"/>
-                </a:lnSpc>
-                <a:spcBef>
-                  <a:spcPts val="0"/>
-                </a:spcBef>
-                <a:spcAft>
-                  <a:spcPts val="0"/>
-                </a:spcAft>
-                <a:buClr>
-                  <a:srgbClr val="000000"/>
-                </a:buClr>
-                <a:buSzPts val="1200"/>
-                <a:buFont typeface="Arial"/>
-                <a:buNone/>
-              </a:pPr>
-              <a:r>
-                <a:t/>
-              </a:r>
-              <a:endParaRPr sz="1400" u="none" cap="none" strike="noStrike">
-                <a:solidFill>
-                  <a:srgbClr val="00D3E3"/>
-                </a:solidFill>
-                <a:latin typeface="Play"/>
-                <a:ea typeface="Play"/>
-                <a:cs typeface="Play"/>
-                <a:sym typeface="Play"/>
-              </a:endParaRPr>
-            </a:p>
-          </p:txBody>
-        </p:sp>
-        <p:pic>
-          <p:nvPicPr>
-            <p:cNvPr id="619" name="Google Shape;619;p28"/>
-            <p:cNvPicPr preferRelativeResize="0"/>
-            <p:nvPr/>
-          </p:nvPicPr>
-          <p:blipFill rotWithShape="1">
-            <a:blip r:embed="rId2">
-              <a:alphaModFix/>
-            </a:blip>
-            <a:srcRect b="0" l="0" r="0" t="0"/>
-            <a:stretch/>
-          </p:blipFill>
-          <p:spPr>
-            <a:xfrm>
-              <a:off x="558184" y="2763548"/>
-              <a:ext cx="216000" cy="216000"/>
-            </a:xfrm>
-            <a:prstGeom prst="rect">
-              <a:avLst/>
-            </a:prstGeom>
-            <a:noFill/>
-            <a:ln>
-              <a:noFill/>
-            </a:ln>
-          </p:spPr>
-        </p:pic>
-      </p:grpSp>
       <p:pic>
         <p:nvPicPr>
           <p:cNvPr id="620" name="Google Shape;620;p28"/>
@@ -8361,342 +7748,9 @@
           </a:ln>
         </p:spPr>
       </p:pic>
-      <p:grpSp>
-        <p:nvGrpSpPr>
-          <p:cNvPr id="633" name="Google Shape;633;p28"/>
-          <p:cNvGrpSpPr/>
-          <p:nvPr/>
-        </p:nvGrpSpPr>
-        <p:grpSpPr>
-          <a:xfrm>
-            <a:off x="3323465" y="1988423"/>
-            <a:ext cx="476638" cy="474884"/>
-            <a:chOff x="427865" y="2634106"/>
-            <a:chExt cx="476638" cy="474884"/>
-          </a:xfrm>
-        </p:grpSpPr>
-        <p:sp>
-          <p:nvSpPr>
-            <p:cNvPr id="634" name="Google Shape;634;p28"/>
-            <p:cNvSpPr/>
-            <p:nvPr/>
-          </p:nvSpPr>
-          <p:spPr>
-            <a:xfrm>
-              <a:off x="427865" y="2634106"/>
-              <a:ext cx="476638" cy="474884"/>
-            </a:xfrm>
-            <a:prstGeom prst="roundRect">
-              <a:avLst>
-                <a:gd fmla="val 30745" name="adj"/>
-              </a:avLst>
-            </a:prstGeom>
-            <a:gradFill>
-              <a:gsLst>
-                <a:gs pos="0">
-                  <a:srgbClr val="00AEE8"/>
-                </a:gs>
-                <a:gs pos="100000">
-                  <a:srgbClr val="0077FF"/>
-                </a:gs>
-              </a:gsLst>
-              <a:lin ang="8100000" scaled="0"/>
-            </a:gradFill>
-            <a:ln>
-              <a:noFill/>
-            </a:ln>
-          </p:spPr>
-          <p:txBody>
-            <a:bodyPr anchorCtr="0" anchor="ctr" bIns="45700" lIns="36000" spcFirstLastPara="1" rIns="36000" wrap="square" tIns="45700">
-              <a:noAutofit/>
-            </a:bodyPr>
-            <a:lstStyle/>
-            <a:p>
-              <a:pPr indent="0" lvl="0" marL="0" marR="0" rtl="0" algn="ctr">
-                <a:lnSpc>
-                  <a:spcPct val="100000"/>
-                </a:lnSpc>
-                <a:spcBef>
-                  <a:spcPts val="0"/>
-                </a:spcBef>
-                <a:spcAft>
-                  <a:spcPts val="0"/>
-                </a:spcAft>
-                <a:buClr>
-                  <a:srgbClr val="000000"/>
-                </a:buClr>
-                <a:buSzPts val="1200"/>
-                <a:buFont typeface="Arial"/>
-                <a:buNone/>
-              </a:pPr>
-              <a:r>
-                <a:t/>
-              </a:r>
-              <a:endParaRPr sz="1400" u="none" cap="none" strike="noStrike">
-                <a:solidFill>
-                  <a:srgbClr val="00D3E3"/>
-                </a:solidFill>
-                <a:latin typeface="Play"/>
-                <a:ea typeface="Play"/>
-                <a:cs typeface="Play"/>
-                <a:sym typeface="Play"/>
-              </a:endParaRPr>
-            </a:p>
-          </p:txBody>
-        </p:sp>
-        <p:pic>
-          <p:nvPicPr>
-            <p:cNvPr id="635" name="Google Shape;635;p28"/>
-            <p:cNvPicPr preferRelativeResize="0"/>
-            <p:nvPr/>
-          </p:nvPicPr>
-          <p:blipFill rotWithShape="1">
-            <a:blip r:embed="rId2">
-              <a:alphaModFix/>
-            </a:blip>
-            <a:srcRect b="0" l="0" r="0" t="0"/>
-            <a:stretch/>
-          </p:blipFill>
-          <p:spPr>
-            <a:xfrm>
-              <a:off x="558184" y="2763548"/>
-              <a:ext cx="216000" cy="216000"/>
-            </a:xfrm>
-            <a:prstGeom prst="rect">
-              <a:avLst/>
-            </a:prstGeom>
-            <a:noFill/>
-            <a:ln>
-              <a:noFill/>
-            </a:ln>
-          </p:spPr>
-        </p:pic>
-      </p:grpSp>
-      <p:grpSp>
-        <p:nvGrpSpPr>
-          <p:cNvPr id="636" name="Google Shape;636;p28"/>
-          <p:cNvGrpSpPr/>
-          <p:nvPr/>
-        </p:nvGrpSpPr>
-        <p:grpSpPr>
-          <a:xfrm>
-            <a:off x="6094374" y="1988423"/>
-            <a:ext cx="476638" cy="474884"/>
-            <a:chOff x="427865" y="2634106"/>
-            <a:chExt cx="476638" cy="474884"/>
-          </a:xfrm>
-        </p:grpSpPr>
-        <p:sp>
-          <p:nvSpPr>
-            <p:cNvPr id="637" name="Google Shape;637;p28"/>
-            <p:cNvSpPr/>
-            <p:nvPr/>
-          </p:nvSpPr>
-          <p:spPr>
-            <a:xfrm>
-              <a:off x="427865" y="2634106"/>
-              <a:ext cx="476638" cy="474884"/>
-            </a:xfrm>
-            <a:prstGeom prst="roundRect">
-              <a:avLst>
-                <a:gd fmla="val 30745" name="adj"/>
-              </a:avLst>
-            </a:prstGeom>
-            <a:gradFill>
-              <a:gsLst>
-                <a:gs pos="0">
-                  <a:srgbClr val="00AEE8"/>
-                </a:gs>
-                <a:gs pos="100000">
-                  <a:srgbClr val="0077FF"/>
-                </a:gs>
-              </a:gsLst>
-              <a:lin ang="8100000" scaled="0"/>
-            </a:gradFill>
-            <a:ln>
-              <a:noFill/>
-            </a:ln>
-          </p:spPr>
-          <p:txBody>
-            <a:bodyPr anchorCtr="0" anchor="ctr" bIns="45700" lIns="36000" spcFirstLastPara="1" rIns="36000" wrap="square" tIns="45700">
-              <a:noAutofit/>
-            </a:bodyPr>
-            <a:lstStyle/>
-            <a:p>
-              <a:pPr indent="0" lvl="0" marL="0" marR="0" rtl="0" algn="ctr">
-                <a:lnSpc>
-                  <a:spcPct val="100000"/>
-                </a:lnSpc>
-                <a:spcBef>
-                  <a:spcPts val="0"/>
-                </a:spcBef>
-                <a:spcAft>
-                  <a:spcPts val="0"/>
-                </a:spcAft>
-                <a:buClr>
-                  <a:srgbClr val="000000"/>
-                </a:buClr>
-                <a:buSzPts val="1200"/>
-                <a:buFont typeface="Arial"/>
-                <a:buNone/>
-              </a:pPr>
-              <a:r>
-                <a:t/>
-              </a:r>
-              <a:endParaRPr sz="1400" u="none" cap="none" strike="noStrike">
-                <a:solidFill>
-                  <a:srgbClr val="00D3E3"/>
-                </a:solidFill>
-                <a:latin typeface="Play"/>
-                <a:ea typeface="Play"/>
-                <a:cs typeface="Play"/>
-                <a:sym typeface="Play"/>
-              </a:endParaRPr>
-            </a:p>
-          </p:txBody>
-        </p:sp>
-        <p:pic>
-          <p:nvPicPr>
-            <p:cNvPr id="638" name="Google Shape;638;p28"/>
-            <p:cNvPicPr preferRelativeResize="0"/>
-            <p:nvPr/>
-          </p:nvPicPr>
-          <p:blipFill rotWithShape="1">
-            <a:blip r:embed="rId2">
-              <a:alphaModFix/>
-            </a:blip>
-            <a:srcRect b="0" l="0" r="0" t="0"/>
-            <a:stretch/>
-          </p:blipFill>
-          <p:spPr>
-            <a:xfrm>
-              <a:off x="558184" y="2763548"/>
-              <a:ext cx="216000" cy="216000"/>
-            </a:xfrm>
-            <a:prstGeom prst="rect">
-              <a:avLst/>
-            </a:prstGeom>
-            <a:noFill/>
-            <a:ln>
-              <a:noFill/>
-            </a:ln>
-          </p:spPr>
-        </p:pic>
-      </p:grpSp>
-      <p:grpSp>
-        <p:nvGrpSpPr>
-          <p:cNvPr id="639" name="Google Shape;639;p28"/>
-          <p:cNvGrpSpPr/>
-          <p:nvPr/>
-        </p:nvGrpSpPr>
-        <p:grpSpPr>
-          <a:xfrm>
-            <a:off x="8989974" y="1988423"/>
-            <a:ext cx="476638" cy="474884"/>
-            <a:chOff x="427865" y="2634106"/>
-            <a:chExt cx="476638" cy="474884"/>
-          </a:xfrm>
-        </p:grpSpPr>
-        <p:sp>
-          <p:nvSpPr>
-            <p:cNvPr id="640" name="Google Shape;640;p28"/>
-            <p:cNvSpPr/>
-            <p:nvPr/>
-          </p:nvSpPr>
-          <p:spPr>
-            <a:xfrm>
-              <a:off x="427865" y="2634106"/>
-              <a:ext cx="476638" cy="474884"/>
-            </a:xfrm>
-            <a:prstGeom prst="roundRect">
-              <a:avLst>
-                <a:gd fmla="val 30745" name="adj"/>
-              </a:avLst>
-            </a:prstGeom>
-            <a:gradFill>
-              <a:gsLst>
-                <a:gs pos="0">
-                  <a:srgbClr val="00AEE8"/>
-                </a:gs>
-                <a:gs pos="100000">
-                  <a:srgbClr val="0077FF"/>
-                </a:gs>
-              </a:gsLst>
-              <a:lin ang="8100000" scaled="0"/>
-            </a:gradFill>
-            <a:ln>
-              <a:noFill/>
-            </a:ln>
-          </p:spPr>
-          <p:txBody>
-            <a:bodyPr anchorCtr="0" anchor="ctr" bIns="45700" lIns="36000" spcFirstLastPara="1" rIns="36000" wrap="square" tIns="45700">
-              <a:noAutofit/>
-            </a:bodyPr>
-            <a:lstStyle/>
-            <a:p>
-              <a:pPr indent="0" lvl="0" marL="0" marR="0" rtl="0" algn="ctr">
-                <a:lnSpc>
-                  <a:spcPct val="100000"/>
-                </a:lnSpc>
-                <a:spcBef>
-                  <a:spcPts val="0"/>
-                </a:spcBef>
-                <a:spcAft>
-                  <a:spcPts val="0"/>
-                </a:spcAft>
-                <a:buClr>
-                  <a:srgbClr val="000000"/>
-                </a:buClr>
-                <a:buSzPts val="1200"/>
-                <a:buFont typeface="Arial"/>
-                <a:buNone/>
-              </a:pPr>
-              <a:r>
-                <a:t/>
-              </a:r>
-              <a:endParaRPr sz="1400" u="none" cap="none" strike="noStrike">
-                <a:solidFill>
-                  <a:srgbClr val="00D3E3"/>
-                </a:solidFill>
-                <a:latin typeface="Play"/>
-                <a:ea typeface="Play"/>
-                <a:cs typeface="Play"/>
-                <a:sym typeface="Play"/>
-              </a:endParaRPr>
-            </a:p>
-          </p:txBody>
-        </p:sp>
-        <p:pic>
-          <p:nvPicPr>
-            <p:cNvPr id="641" name="Google Shape;641;p28"/>
-            <p:cNvPicPr preferRelativeResize="0"/>
-            <p:nvPr/>
-          </p:nvPicPr>
-          <p:blipFill rotWithShape="1">
-            <a:blip r:embed="rId2">
-              <a:alphaModFix/>
-            </a:blip>
-            <a:srcRect b="0" l="0" r="0" t="0"/>
-            <a:stretch/>
-          </p:blipFill>
-          <p:spPr>
-            <a:xfrm>
-              <a:off x="558184" y="2763548"/>
-              <a:ext cx="216000" cy="216000"/>
-            </a:xfrm>
-            <a:prstGeom prst="rect">
-              <a:avLst/>
-            </a:prstGeom>
-            <a:noFill/>
-            <a:ln>
-              <a:noFill/>
-            </a:ln>
-          </p:spPr>
-        </p:pic>
-      </p:grpSp>
       <p:sp>
         <p:nvSpPr>
-          <p:cNvPr id="642" name="title"/>
+          <p:cNvPr id="622" name="title"/>
           <p:cNvSpPr txBox="1"/>
           <p:nvPr/>
         </p:nvSpPr>
@@ -8720,7 +7774,7 @@
               <a:spcAft>
                 <a:spcPts val="300"/>
               </a:spcAft>
-              <a:defRPr sz="4000">
+              <a:defRPr sz="3200">
                 <a:solidFill>
                   <a:srgbClr val="FFFFFF"/>
                 </a:solidFill>
@@ -8730,7 +7784,7 @@
               </a:defRPr>
             </a:pPr>
             <a:r>
-              <a:rPr sz="4000">
+              <a:rPr sz="3200">
                 <a:solidFill>
                   <a:srgbClr val="FFFFFF"/>
                 </a:solidFill>
@@ -8738,21 +7792,39 @@
                 <a:ea typeface="Play"/>
                 <a:cs typeface="Play"/>
               </a:rPr>
-              <a:t>Качество и аудит</a:t>
+              <a:t>Ожидаемый эффект – Время</a:t>
             </a:r>
           </a:p>
         </p:txBody>
       </p:sp>
+      <p:graphicFrame>
+        <p:nvGraphicFramePr>
+          <p:cNvPr id="623" name="Chart 622"/>
+          <p:cNvGraphicFramePr>
+            <a:graphicFrameLocks noGrp="1"/>
+          </p:cNvGraphicFramePr>
+          <p:nvPr/>
+        </p:nvGraphicFramePr>
+        <p:xfrm>
+          <a:off x="429280" y="1504165"/>
+          <a:ext cx="11310884" cy="2790398"/>
+        </p:xfrm>
+        <a:graphic>
+          <a:graphicData uri="http://schemas.openxmlformats.org/drawingml/2006/chart">
+            <c:chart xmlns:c="http://schemas.openxmlformats.org/drawingml/2006/chart" r:id="rId5"/>
+          </a:graphicData>
+        </a:graphic>
+      </p:graphicFrame>
       <p:sp>
         <p:nvSpPr>
-          <p:cNvPr id="643" name="lead"/>
+          <p:cNvPr id="624" name="body"/>
           <p:cNvSpPr txBox="1"/>
           <p:nvPr/>
         </p:nvSpPr>
         <p:spPr>
           <a:xfrm>
-            <a:off x="1560368" y="2463325"/>
-            <a:ext cx="9048707" cy="884270"/>
+            <a:off x="429280" y="4466013"/>
+            <a:ext cx="11310884" cy="944880"/>
           </a:xfrm>
           <a:prstGeom prst="rect">
             <a:avLst/>
@@ -8769,7 +7841,7 @@
               <a:spcAft>
                 <a:spcPts val="300"/>
               </a:spcAft>
-              <a:defRPr sz="4000">
+              <a:defRPr sz="2000">
                 <a:solidFill>
                   <a:srgbClr val="FFFFFF"/>
                 </a:solidFill>
@@ -8779,7 +7851,7 @@
               </a:defRPr>
             </a:pPr>
             <a:r>
-              <a:rPr sz="4000">
+              <a:rPr sz="2000">
                 <a:solidFill>
                   <a:srgbClr val="FFFFFF"/>
                 </a:solidFill>
@@ -8787,38 +7859,15 @@
                 <a:ea typeface="Play"/>
                 <a:cs typeface="Play"/>
               </a:rPr>
-              <a:t>Аудит качества до публикации</a:t>
+              <a:t>• Время сборки колоды 12 слайдов сократилось с 186 до 4 мин</a:t>
             </a:r>
           </a:p>
-        </p:txBody>
-      </p:sp>
-      <p:sp>
-        <p:nvSpPr>
-          <p:cNvPr id="644" name="body"/>
-          <p:cNvSpPr txBox="1"/>
-          <p:nvPr/>
-        </p:nvSpPr>
-        <p:spPr>
-          <a:xfrm>
-            <a:off x="1560368" y="3524449"/>
-            <a:ext cx="9048707" cy="1886443"/>
-          </a:xfrm>
-          <a:prstGeom prst="rect">
-            <a:avLst/>
-          </a:prstGeom>
-          <a:noFill/>
-        </p:spPr>
-        <p:txBody>
-          <a:bodyPr wrap="square" lIns="76200" rIns="76200" tIns="50800" bIns="50800">
-            <a:spAutoFit/>
-          </a:bodyPr>
-          <a:lstStyle/>
           <a:p>
             <a:pPr algn="l">
               <a:spcAft>
                 <a:spcPts val="300"/>
               </a:spcAft>
-              <a:defRPr sz="3200">
+              <a:defRPr sz="2000">
                 <a:solidFill>
                   <a:srgbClr val="FFFFFF"/>
                 </a:solidFill>
@@ -8828,7 +7877,7 @@
               </a:defRPr>
             </a:pPr>
             <a:r>
-              <a:rPr sz="3200">
+              <a:rPr sz="2000">
                 <a:solidFill>
                   <a:srgbClr val="FFFFFF"/>
                 </a:solidFill>
@@ -8836,33 +7885,7 @@
                 <a:ea typeface="Play"/>
                 <a:cs typeface="Play"/>
               </a:rPr>
-              <a:t>• Автоматические правки нарушений стиля</a:t>
-            </a:r>
-          </a:p>
-          <a:p>
-            <a:pPr algn="l">
-              <a:spcAft>
-                <a:spcPts val="300"/>
-              </a:spcAft>
-              <a:defRPr sz="3200">
-                <a:solidFill>
-                  <a:srgbClr val="FFFFFF"/>
-                </a:solidFill>
-                <a:latin typeface="Play"/>
-                <a:ea typeface="Play"/>
-                <a:cs typeface="Play"/>
-              </a:defRPr>
-            </a:pPr>
-            <a:r>
-              <a:rPr sz="3200">
-                <a:solidFill>
-                  <a:srgbClr val="FFFFFF"/>
-                </a:solidFill>
-                <a:latin typeface="Play"/>
-                <a:ea typeface="Play"/>
-                <a:cs typeface="Play"/>
-              </a:rPr>
-              <a:t>• Слайды остаются редактируемыми</a:t>
+              <a:t>• Первый готовый вариант доступен за 1 день вместо 6</a:t>
             </a:r>
           </a:p>
         </p:txBody>
@@ -8875,7 +7898,7 @@
 </p:sld>
 </file>
 
-<file path=ppt/slides/slide35.xml><?xml version="1.0" encoding="utf-8"?>
+<file path=ppt/slides/slide34.xml><?xml version="1.0" encoding="utf-8"?>
 <p:sld xmlns:a="http://schemas.openxmlformats.org/drawingml/2006/main" xmlns:p="http://schemas.openxmlformats.org/presentationml/2006/main" xmlns:r="http://schemas.openxmlformats.org/officeDocument/2006/relationships">
   <p:cSld>
     <p:spTree>
@@ -8929,7 +7952,7 @@
                 <a:ea typeface="Play"/>
                 <a:cs typeface="Play"/>
               </a:rPr>
-              <a:t>Эффект пилота</a:t>
+              <a:t>Ожидаемый эффект – Нарушения</a:t>
             </a:r>
           </a:p>
         </p:txBody>
@@ -8944,7 +7967,7 @@
         </p:nvGraphicFramePr>
         <p:xfrm>
           <a:off x="429280" y="1492575"/>
-          <a:ext cx="11310884" cy="2237312"/>
+          <a:ext cx="11310884" cy="2898274"/>
         </p:xfrm>
         <a:graphic>
           <a:graphicData uri="http://schemas.openxmlformats.org/drawingml/2006/chart">
@@ -8960,8 +7983,8 @@
         </p:nvSpPr>
         <p:spPr>
           <a:xfrm>
-            <a:off x="429280" y="3901337"/>
-            <a:ext cx="11310884" cy="1605841"/>
+            <a:off x="429280" y="4562299"/>
+            <a:ext cx="11310884" cy="944880"/>
           </a:xfrm>
           <a:prstGeom prst="rect">
             <a:avLst/>
@@ -8996,7 +8019,7 @@
                 <a:ea typeface="Play"/>
                 <a:cs typeface="Play"/>
               </a:rPr>
-              <a:t>• Средняя сборка 4 минуты вместо 186</a:t>
+              <a:t>• Нарушений фирменного стиля в пилоте – 2 из 68 колод</a:t>
             </a:r>
           </a:p>
           <a:p>
@@ -9022,59 +8045,7 @@
                 <a:ea typeface="Play"/>
                 <a:cs typeface="Play"/>
               </a:rPr>
-              <a:t>• Время до первой версии сократилось с 6 дней до 1</a:t>
-            </a:r>
-          </a:p>
-          <a:p>
-            <a:pPr algn="l">
-              <a:spcAft>
-                <a:spcPts val="300"/>
-              </a:spcAft>
-              <a:defRPr sz="1600">
-                <a:solidFill>
-                  <a:srgbClr val="FFFFFF"/>
-                </a:solidFill>
-                <a:latin typeface="Play"/>
-                <a:ea typeface="Play"/>
-                <a:cs typeface="Play"/>
-              </a:defRPr>
-            </a:pPr>
-            <a:r>
-              <a:rPr sz="1600">
-                <a:solidFill>
-                  <a:srgbClr val="FFFFFF"/>
-                </a:solidFill>
-                <a:latin typeface="Play"/>
-                <a:ea typeface="Play"/>
-                <a:cs typeface="Play"/>
-              </a:rPr>
-              <a:t>• Нарушений стиля 2 из 68</a:t>
-            </a:r>
-          </a:p>
-          <a:p>
-            <a:pPr algn="l">
-              <a:spcAft>
-                <a:spcPts val="300"/>
-              </a:spcAft>
-              <a:defRPr sz="1600">
-                <a:solidFill>
-                  <a:srgbClr val="FFFFFF"/>
-                </a:solidFill>
-                <a:latin typeface="Play"/>
-                <a:ea typeface="Play"/>
-                <a:cs typeface="Play"/>
-              </a:defRPr>
-            </a:pPr>
-            <a:r>
-              <a:rPr sz="1600">
-                <a:solidFill>
-                  <a:srgbClr val="FFFFFF"/>
-                </a:solidFill>
-                <a:latin typeface="Play"/>
-                <a:ea typeface="Play"/>
-                <a:cs typeface="Play"/>
-              </a:rPr>
-              <a:t>• Дизайнеры закрыли 38 запросов вместо 11</a:t>
+              <a:t>• Все нарушения автоматически исправлены аудитором</a:t>
             </a:r>
           </a:p>
         </p:txBody>
@@ -9087,7 +8058,7 @@
 </p:sld>
 </file>
 
-<file path=ppt/slides/slide36.xml><?xml version="1.0" encoding="utf-8"?>
+<file path=ppt/slides/slide35.xml><?xml version="1.0" encoding="utf-8"?>
 <p:sld xmlns:a="http://schemas.openxmlformats.org/drawingml/2006/main" xmlns:p="http://schemas.openxmlformats.org/presentationml/2006/main" xmlns:r="http://schemas.openxmlformats.org/officeDocument/2006/relationships">
   <p:cSld>
     <p:spTree>
@@ -9099,91 +8070,73 @@
       <p:grpSpPr/>
       <p:sp>
         <p:nvSpPr>
-          <p:cNvPr id="679" name="Google Shape;679;p31"/>
+          <p:cNvPr id="2" name="title"/>
+          <p:cNvSpPr txBox="1"/>
+          <p:nvPr/>
+        </p:nvSpPr>
+        <p:spPr>
+          <a:xfrm>
+            <a:off x="429280" y="424715"/>
+            <a:ext cx="7827264" cy="1183640"/>
+          </a:xfrm>
+          <a:prstGeom prst="rect">
+            <a:avLst/>
+          </a:prstGeom>
+          <a:noFill/>
+        </p:spPr>
+        <p:txBody>
+          <a:bodyPr wrap="square" lIns="76200" rIns="76200" tIns="50800" bIns="50800">
+            <a:spAutoFit/>
+          </a:bodyPr>
+          <a:lstStyle/>
+          <a:p>
+            <a:pPr algn="l">
+              <a:spcAft>
+                <a:spcPts val="300"/>
+              </a:spcAft>
+              <a:defRPr sz="3200">
+                <a:solidFill>
+                  <a:srgbClr val="FFFFFF"/>
+                </a:solidFill>
+                <a:latin typeface="Play"/>
+                <a:ea typeface="Play"/>
+                <a:cs typeface="Play"/>
+              </a:defRPr>
+            </a:pPr>
+            <a:r>
+              <a:rPr sz="3200">
+                <a:solidFill>
+                  <a:srgbClr val="FFFFFF"/>
+                </a:solidFill>
+                <a:latin typeface="Play"/>
+                <a:ea typeface="Play"/>
+                <a:cs typeface="Play"/>
+              </a:rPr>
+              <a:t>Что потребуется: ресурсы и сроки</a:t>
+            </a:r>
+          </a:p>
+        </p:txBody>
+      </p:sp>
+      <p:sp>
+        <p:nvSpPr>
+          <p:cNvPr id="3" name="Rectangle 2"/>
           <p:cNvSpPr/>
           <p:nvPr/>
         </p:nvSpPr>
         <p:spPr>
           <a:xfrm>
-            <a:off x="0" y="4748271"/>
-            <a:ext cx="12192000" cy="2109730"/>
+            <a:off x="429280" y="2680184"/>
+            <a:ext cx="11310884" cy="60956"/>
           </a:xfrm>
           <a:prstGeom prst="rect">
             <a:avLst/>
           </a:prstGeom>
-          <a:gradFill>
-            <a:gsLst>
-              <a:gs pos="0">
-                <a:srgbClr val="0077FF">
-                  <a:alpha val="61961"/>
-                </a:srgbClr>
-              </a:gs>
-              <a:gs pos="99000">
-                <a:srgbClr val="00AEE8"/>
-              </a:gs>
-              <a:gs pos="100000">
-                <a:srgbClr val="00AEE8"/>
-              </a:gs>
-            </a:gsLst>
-            <a:lin ang="14400000" scaled="0"/>
-          </a:gradFill>
-          <a:ln>
-            <a:noFill/>
-          </a:ln>
-        </p:spPr>
-        <p:txBody>
-          <a:bodyPr anchorCtr="0" anchor="ctr" bIns="0" lIns="108000" spcFirstLastPara="1" rIns="91425" wrap="square" tIns="0">
-            <a:noAutofit/>
-          </a:bodyPr>
-          <a:lstStyle/>
-          <a:p>
-            <a:pPr indent="0" lvl="0" marL="0" marR="0" rtl="0" algn="l">
-              <a:spcBef>
-                <a:spcPts val="0"/>
-              </a:spcBef>
-              <a:spcAft>
-                <a:spcPts val="0"/>
-              </a:spcAft>
-              <a:buNone/>
-            </a:pPr>
-            <a:r>
-              <a:t/>
-            </a:r>
-            <a:endParaRPr sz="1100">
-              <a:solidFill>
-                <a:schemeClr val="lt1"/>
-              </a:solidFill>
-              <a:latin typeface="Play"/>
-              <a:ea typeface="Play"/>
-              <a:cs typeface="Play"/>
-              <a:sym typeface="Play"/>
-            </a:endParaRPr>
-          </a:p>
-        </p:txBody>
-      </p:sp>
-      <p:sp>
-        <p:nvSpPr>
-          <p:cNvPr id="680" name="Rounded Rectangle 679"/>
-          <p:cNvSpPr/>
-          <p:nvPr/>
-        </p:nvSpPr>
-        <p:spPr>
-          <a:xfrm>
-            <a:off x="300817" y="297715"/>
-            <a:ext cx="10435112" cy="5354397"/>
-          </a:xfrm>
-          <a:prstGeom prst="roundRect">
-            <a:avLst/>
-          </a:prstGeom>
           <a:solidFill>
-            <a:srgbClr val="111111">
-              <a:alpha val="85000"/>
-            </a:srgbClr>
+            <a:srgbClr val="0077FF"/>
           </a:solidFill>
           <a:ln>
             <a:noFill/>
           </a:ln>
-          <a:effectLst/>
         </p:spPr>
         <p:style>
           <a:lnRef idx="1">
@@ -9209,14 +8162,281 @@
       </p:sp>
       <p:sp>
         <p:nvSpPr>
-          <p:cNvPr id="681" name="title"/>
+          <p:cNvPr id="4" name="Oval 3"/>
+          <p:cNvSpPr/>
+          <p:nvPr/>
+        </p:nvSpPr>
+        <p:spPr>
+          <a:xfrm>
+            <a:off x="2090919" y="2487155"/>
+            <a:ext cx="447016" cy="447016"/>
+          </a:xfrm>
+          <a:prstGeom prst="ellipse">
+            <a:avLst/>
+          </a:prstGeom>
+          <a:solidFill>
+            <a:srgbClr val="0077FF"/>
+          </a:solidFill>
+          <a:ln>
+            <a:noFill/>
+          </a:ln>
+        </p:spPr>
+        <p:style>
+          <a:lnRef idx="1">
+            <a:schemeClr val="accent1"/>
+          </a:lnRef>
+          <a:fillRef idx="3">
+            <a:schemeClr val="accent1"/>
+          </a:fillRef>
+          <a:effectRef idx="2">
+            <a:schemeClr val="accent1"/>
+          </a:effectRef>
+          <a:fontRef idx="minor">
+            <a:schemeClr val="lt1"/>
+          </a:fontRef>
+        </p:style>
+        <p:txBody>
+          <a:bodyPr rtlCol="0" anchor="ctr"/>
+          <a:lstStyle/>
+          <a:p>
+            <a:pPr algn="ctr"/>
+          </a:p>
+        </p:txBody>
+      </p:sp>
+      <p:sp>
+        <p:nvSpPr>
+          <p:cNvPr id="5" name="TextBox 4"/>
           <p:cNvSpPr txBox="1"/>
           <p:nvPr/>
         </p:nvSpPr>
         <p:spPr>
           <a:xfrm>
-            <a:off x="427817" y="424715"/>
-            <a:ext cx="7827264" cy="822960"/>
+            <a:off x="429279" y="1745515"/>
+            <a:ext cx="3770294" cy="772118"/>
+          </a:xfrm>
+          <a:prstGeom prst="rect">
+            <a:avLst/>
+          </a:prstGeom>
+          <a:noFill/>
+        </p:spPr>
+        <p:txBody>
+          <a:bodyPr wrap="square">
+            <a:spAutoFit/>
+          </a:bodyPr>
+          <a:lstStyle/>
+          <a:p>
+            <a:pPr algn="ctr">
+              <a:defRPr sz="1200" b="0">
+                <a:solidFill>
+                  <a:srgbClr val="FFFFFF"/>
+                </a:solidFill>
+                <a:latin typeface="Play"/>
+                <a:ea typeface="Play"/>
+                <a:cs typeface="Play"/>
+              </a:defRPr>
+            </a:pPr>
+            <a:r>
+              <a:rPr sz="1200" b="0">
+                <a:solidFill>
+                  <a:srgbClr val="FFFFFF"/>
+                </a:solidFill>
+                <a:latin typeface="Play"/>
+                <a:ea typeface="Play"/>
+                <a:cs typeface="Play"/>
+              </a:rPr>
+              <a:t>3 квартал 2026: подключение 4 команд</a:t>
+            </a:r>
+          </a:p>
+        </p:txBody>
+      </p:sp>
+      <p:sp>
+        <p:nvSpPr>
+          <p:cNvPr id="6" name="Oval 5"/>
+          <p:cNvSpPr/>
+          <p:nvPr/>
+        </p:nvSpPr>
+        <p:spPr>
+          <a:xfrm>
+            <a:off x="5861213" y="2487155"/>
+            <a:ext cx="447016" cy="447016"/>
+          </a:xfrm>
+          <a:prstGeom prst="ellipse">
+            <a:avLst/>
+          </a:prstGeom>
+          <a:solidFill>
+            <a:srgbClr val="0077FF"/>
+          </a:solidFill>
+          <a:ln>
+            <a:noFill/>
+          </a:ln>
+        </p:spPr>
+        <p:style>
+          <a:lnRef idx="1">
+            <a:schemeClr val="accent1"/>
+          </a:lnRef>
+          <a:fillRef idx="3">
+            <a:schemeClr val="accent1"/>
+          </a:fillRef>
+          <a:effectRef idx="2">
+            <a:schemeClr val="accent1"/>
+          </a:effectRef>
+          <a:fontRef idx="minor">
+            <a:schemeClr val="lt1"/>
+          </a:fontRef>
+        </p:style>
+        <p:txBody>
+          <a:bodyPr rtlCol="0" anchor="ctr"/>
+          <a:lstStyle/>
+          <a:p>
+            <a:pPr algn="ctr"/>
+          </a:p>
+        </p:txBody>
+      </p:sp>
+      <p:sp>
+        <p:nvSpPr>
+          <p:cNvPr id="7" name="TextBox 6"/>
+          <p:cNvSpPr txBox="1"/>
+          <p:nvPr/>
+        </p:nvSpPr>
+        <p:spPr>
+          <a:xfrm>
+            <a:off x="4199574" y="3127200"/>
+            <a:ext cx="3770294" cy="772118"/>
+          </a:xfrm>
+          <a:prstGeom prst="rect">
+            <a:avLst/>
+          </a:prstGeom>
+          <a:noFill/>
+        </p:spPr>
+        <p:txBody>
+          <a:bodyPr wrap="square">
+            <a:spAutoFit/>
+          </a:bodyPr>
+          <a:lstStyle/>
+          <a:p>
+            <a:pPr algn="ctr">
+              <a:defRPr sz="1200" b="0">
+                <a:solidFill>
+                  <a:srgbClr val="FFFFFF"/>
+                </a:solidFill>
+                <a:latin typeface="Play"/>
+                <a:ea typeface="Play"/>
+                <a:cs typeface="Play"/>
+              </a:defRPr>
+            </a:pPr>
+            <a:r>
+              <a:rPr sz="1200" b="0">
+                <a:solidFill>
+                  <a:srgbClr val="FFFFFF"/>
+                </a:solidFill>
+                <a:latin typeface="Play"/>
+                <a:ea typeface="Play"/>
+                <a:cs typeface="Play"/>
+              </a:rPr>
+              <a:t>4 квартал 2026: доступ для всей компании</a:t>
+            </a:r>
+          </a:p>
+        </p:txBody>
+      </p:sp>
+      <p:sp>
+        <p:nvSpPr>
+          <p:cNvPr id="8" name="Oval 7"/>
+          <p:cNvSpPr/>
+          <p:nvPr/>
+        </p:nvSpPr>
+        <p:spPr>
+          <a:xfrm>
+            <a:off x="9631508" y="2487155"/>
+            <a:ext cx="447016" cy="447016"/>
+          </a:xfrm>
+          <a:prstGeom prst="ellipse">
+            <a:avLst/>
+          </a:prstGeom>
+          <a:solidFill>
+            <a:srgbClr val="0077FF"/>
+          </a:solidFill>
+          <a:ln>
+            <a:noFill/>
+          </a:ln>
+        </p:spPr>
+        <p:style>
+          <a:lnRef idx="1">
+            <a:schemeClr val="accent1"/>
+          </a:lnRef>
+          <a:fillRef idx="3">
+            <a:schemeClr val="accent1"/>
+          </a:fillRef>
+          <a:effectRef idx="2">
+            <a:schemeClr val="accent1"/>
+          </a:effectRef>
+          <a:fontRef idx="minor">
+            <a:schemeClr val="lt1"/>
+          </a:fontRef>
+        </p:style>
+        <p:txBody>
+          <a:bodyPr rtlCol="0" anchor="ctr"/>
+          <a:lstStyle/>
+          <a:p>
+            <a:pPr algn="ctr"/>
+          </a:p>
+        </p:txBody>
+      </p:sp>
+      <p:sp>
+        <p:nvSpPr>
+          <p:cNvPr id="9" name="TextBox 8"/>
+          <p:cNvSpPr txBox="1"/>
+          <p:nvPr/>
+        </p:nvSpPr>
+        <p:spPr>
+          <a:xfrm>
+            <a:off x="7969869" y="1745515"/>
+            <a:ext cx="3770294" cy="772118"/>
+          </a:xfrm>
+          <a:prstGeom prst="rect">
+            <a:avLst/>
+          </a:prstGeom>
+          <a:noFill/>
+        </p:spPr>
+        <p:txBody>
+          <a:bodyPr wrap="square">
+            <a:spAutoFit/>
+          </a:bodyPr>
+          <a:lstStyle/>
+          <a:p>
+            <a:pPr algn="ctr">
+              <a:defRPr sz="1200" b="0">
+                <a:solidFill>
+                  <a:srgbClr val="FFFFFF"/>
+                </a:solidFill>
+                <a:latin typeface="Play"/>
+                <a:ea typeface="Play"/>
+                <a:cs typeface="Play"/>
+              </a:defRPr>
+            </a:pPr>
+            <a:r>
+              <a:rPr sz="1200" b="0">
+                <a:solidFill>
+                  <a:srgbClr val="FFFFFF"/>
+                </a:solidFill>
+                <a:latin typeface="Play"/>
+                <a:ea typeface="Play"/>
+                <a:cs typeface="Play"/>
+              </a:rPr>
+              <a:t>1 квартал 2027: генерация иллюстраций</a:t>
+            </a:r>
+          </a:p>
+        </p:txBody>
+      </p:sp>
+      <p:sp>
+        <p:nvSpPr>
+          <p:cNvPr id="10" name="body"/>
+          <p:cNvSpPr txBox="1"/>
+          <p:nvPr/>
+        </p:nvSpPr>
+        <p:spPr>
+          <a:xfrm>
+            <a:off x="429280" y="3948857"/>
+            <a:ext cx="11310884" cy="1468894"/>
           </a:xfrm>
           <a:prstGeom prst="rect">
             <a:avLst/>
@@ -9233,7 +8453,7 @@
               <a:spcAft>
                 <a:spcPts val="300"/>
               </a:spcAft>
-              <a:defRPr sz="4000">
+              <a:defRPr sz="1600">
                 <a:solidFill>
                   <a:srgbClr val="FFFFFF"/>
                 </a:solidFill>
@@ -9243,7 +8463,7 @@
               </a:defRPr>
             </a:pPr>
             <a:r>
-              <a:rPr sz="4000">
+              <a:rPr sz="1600">
                 <a:solidFill>
                   <a:srgbClr val="FFFFFF"/>
                 </a:solidFill>
@@ -9251,38 +8471,15 @@
                 <a:ea typeface="Play"/>
                 <a:cs typeface="Play"/>
               </a:rPr>
-              <a:t>Ресурсы и сроки</a:t>
+              <a:t>• Сервис работает на 2 vCPU / 2 GB RAM</a:t>
             </a:r>
           </a:p>
-        </p:txBody>
-      </p:sp>
-      <p:sp>
-        <p:nvSpPr>
-          <p:cNvPr id="682" name="lead"/>
-          <p:cNvSpPr txBox="1"/>
-          <p:nvPr/>
-        </p:nvSpPr>
-        <p:spPr>
-          <a:xfrm>
-            <a:off x="1559052" y="1837052"/>
-            <a:ext cx="9049877" cy="1227650"/>
-          </a:xfrm>
-          <a:prstGeom prst="rect">
-            <a:avLst/>
-          </a:prstGeom>
-          <a:noFill/>
-        </p:spPr>
-        <p:txBody>
-          <a:bodyPr wrap="square" lIns="76200" rIns="76200" tIns="50800" bIns="50800">
-            <a:spAutoFit/>
-          </a:bodyPr>
-          <a:lstStyle/>
           <a:p>
             <a:pPr algn="l">
               <a:spcAft>
                 <a:spcPts val="300"/>
               </a:spcAft>
-              <a:defRPr sz="3200">
+              <a:defRPr sz="1600">
                 <a:solidFill>
                   <a:srgbClr val="FFFFFF"/>
                 </a:solidFill>
@@ -9292,7 +8489,7 @@
               </a:defRPr>
             </a:pPr>
             <a:r>
-              <a:rPr sz="3200">
+              <a:rPr sz="1600">
                 <a:solidFill>
                   <a:srgbClr val="FFFFFF"/>
                 </a:solidFill>
@@ -9300,38 +8497,15 @@
                 <a:ea typeface="Play"/>
                 <a:cs typeface="Play"/>
               </a:rPr>
-              <a:t>Сервис работает на 2 vCPU / 2 GB RAM</a:t>
+              <a:t>• Инференс за 6 недель пилота – 1 400 руб</a:t>
             </a:r>
           </a:p>
-        </p:txBody>
-      </p:sp>
-      <p:sp>
-        <p:nvSpPr>
-          <p:cNvPr id="683" name="body"/>
-          <p:cNvSpPr txBox="1"/>
-          <p:nvPr/>
-        </p:nvSpPr>
-        <p:spPr>
-          <a:xfrm>
-            <a:off x="1559052" y="3310233"/>
-            <a:ext cx="9049877" cy="2618987"/>
-          </a:xfrm>
-          <a:prstGeom prst="rect">
-            <a:avLst/>
-          </a:prstGeom>
-          <a:noFill/>
-        </p:spPr>
-        <p:txBody>
-          <a:bodyPr wrap="square" lIns="76200" rIns="76200" tIns="50800" bIns="50800">
-            <a:spAutoFit/>
-          </a:bodyPr>
-          <a:lstStyle/>
           <a:p>
             <a:pPr algn="l">
               <a:spcAft>
                 <a:spcPts val="300"/>
               </a:spcAft>
-              <a:defRPr sz="3200">
+              <a:defRPr sz="1600">
                 <a:solidFill>
                   <a:srgbClr val="FFFFFF"/>
                 </a:solidFill>
@@ -9341,7 +8515,7 @@
               </a:defRPr>
             </a:pPr>
             <a:r>
-              <a:rPr sz="3200">
+              <a:rPr sz="1600">
                 <a:solidFill>
                   <a:srgbClr val="FFFFFF"/>
                 </a:solidFill>
@@ -9349,7 +8523,7 @@
                 <a:ea typeface="Play"/>
                 <a:cs typeface="Play"/>
               </a:rPr>
-              <a:t>• Стоимость инференса 1 400 рублей за 6 недель</a:t>
+              <a:t>• 3 квартал 2026: подключение 4 команд</a:t>
             </a:r>
           </a:p>
           <a:p>
@@ -9357,7 +8531,7 @@
               <a:spcAft>
                 <a:spcPts val="300"/>
               </a:spcAft>
-              <a:defRPr sz="3200">
+              <a:defRPr sz="1600">
                 <a:solidFill>
                   <a:srgbClr val="FFFFFF"/>
                 </a:solidFill>
@@ -9367,7 +8541,7 @@
               </a:defRPr>
             </a:pPr>
             <a:r>
-              <a:rPr sz="3200">
+              <a:rPr sz="1600">
                 <a:solidFill>
                   <a:srgbClr val="FFFFFF"/>
                 </a:solidFill>
@@ -9375,7 +8549,33 @@
                 <a:ea typeface="Play"/>
                 <a:cs typeface="Play"/>
               </a:rPr>
-              <a:t>• План: Q3 2026 подключение 4 команд, Q4 2026 доступ для всей компании</a:t>
+              <a:t>• 4 квартал 2026: доступ для всей компании</a:t>
+            </a:r>
+          </a:p>
+          <a:p>
+            <a:pPr algn="l">
+              <a:spcAft>
+                <a:spcPts val="300"/>
+              </a:spcAft>
+              <a:defRPr sz="1600">
+                <a:solidFill>
+                  <a:srgbClr val="FFFFFF"/>
+                </a:solidFill>
+                <a:latin typeface="Play"/>
+                <a:ea typeface="Play"/>
+                <a:cs typeface="Play"/>
+              </a:defRPr>
+            </a:pPr>
+            <a:r>
+              <a:rPr sz="1600">
+                <a:solidFill>
+                  <a:srgbClr val="FFFFFF"/>
+                </a:solidFill>
+                <a:latin typeface="Play"/>
+                <a:ea typeface="Play"/>
+                <a:cs typeface="Play"/>
+              </a:rPr>
+              <a:t>• 1 квартал 2027: генерация иллюстраций</a:t>
             </a:r>
           </a:p>
         </p:txBody>
@@ -9388,7 +8588,7 @@
 </p:sld>
 </file>
 
-<file path=ppt/slides/slide37.xml><?xml version="1.0" encoding="utf-8"?>
+<file path=ppt/slides/slide36.xml><?xml version="1.0" encoding="utf-8"?>
 <p:sld xmlns:a="http://schemas.openxmlformats.org/drawingml/2006/main" xmlns:p="http://schemas.openxmlformats.org/presentationml/2006/main" xmlns:r="http://schemas.openxmlformats.org/officeDocument/2006/relationships">
   <p:cSld>
     <p:spTree>
@@ -9424,7 +8624,7 @@
               <a:spcAft>
                 <a:spcPts val="300"/>
               </a:spcAft>
-              <a:defRPr sz="4000">
+              <a:defRPr sz="3200">
                 <a:solidFill>
                   <a:srgbClr val="FFFFFF"/>
                 </a:solidFill>
@@ -9434,7 +8634,7 @@
               </a:defRPr>
             </a:pPr>
             <a:r>
-              <a:rPr sz="4000">
+              <a:rPr sz="3200">
                 <a:solidFill>
                   <a:srgbClr val="FFFFFF"/>
                 </a:solidFill>
@@ -9447,55 +8647,433 @@
           </a:p>
         </p:txBody>
       </p:sp>
-      <p:sp>
-        <p:nvSpPr>
-          <p:cNvPr id="3" name="lead"/>
-          <p:cNvSpPr txBox="1"/>
+      <p:graphicFrame>
+        <p:nvGraphicFramePr>
+          <p:cNvPr id="3" name="Table 2"/>
+          <p:cNvGraphicFramePr>
+            <a:graphicFrameLocks noGrp="1"/>
+          </p:cNvGraphicFramePr>
           <p:nvPr/>
-        </p:nvSpPr>
-        <p:spPr>
-          <a:xfrm>
-            <a:off x="1560368" y="1592290"/>
-            <a:ext cx="9048707" cy="1254396"/>
-          </a:xfrm>
-          <a:prstGeom prst="rect">
-            <a:avLst/>
-          </a:prstGeom>
-          <a:noFill/>
-        </p:spPr>
-        <p:txBody>
-          <a:bodyPr wrap="square" lIns="76200" rIns="76200" tIns="50800" bIns="50800">
-            <a:spAutoFit/>
-          </a:bodyPr>
-          <a:lstStyle/>
-          <a:p>
-            <a:pPr algn="ctr">
-              <a:spcAft>
-                <a:spcPts val="300"/>
-              </a:spcAft>
-              <a:defRPr sz="2800">
-                <a:solidFill>
-                  <a:srgbClr val="FFFFFF"/>
-                </a:solidFill>
-                <a:latin typeface="Play"/>
-                <a:ea typeface="Play"/>
-                <a:cs typeface="Play"/>
-              </a:defRPr>
-            </a:pPr>
-            <a:r>
-              <a:rPr sz="2800">
-                <a:solidFill>
-                  <a:srgbClr val="FFFFFF"/>
-                </a:solidFill>
-                <a:latin typeface="Play"/>
-                <a:ea typeface="Play"/>
-                <a:cs typeface="Play"/>
-              </a:rPr>
-              <a:t>6 недель на 2 командах, 68 презентаций</a:t>
-            </a:r>
-          </a:p>
-        </p:txBody>
-      </p:sp>
+        </p:nvGraphicFramePr>
+        <p:xfrm>
+          <a:off x="429280" y="1592290"/>
+          <a:ext cx="11310884" cy="2668752"/>
+        </p:xfrm>
+        <a:graphic>
+          <a:graphicData uri="http://schemas.openxmlformats.org/drawingml/2006/table">
+            <a:tbl>
+              <a:tblPr firstRow="1" bandRow="1">
+                <a:tableStyleId>{5C22544A-7EE6-4342-B048-85BDC9FD1C3A}</a:tableStyleId>
+              </a:tblPr>
+              <a:tblGrid>
+                <a:gridCol w="3770294"/>
+                <a:gridCol w="3770294"/>
+                <a:gridCol w="3770296"/>
+              </a:tblGrid>
+              <a:tr h="533750">
+                <a:tc>
+                  <a:txBody>
+                    <a:bodyPr/>
+                    <a:lstStyle/>
+                    <a:p>
+                      <a:pPr>
+                        <a:defRPr sz="1300" b="1">
+                          <a:solidFill>
+                            <a:srgbClr val="FFFFFF"/>
+                          </a:solidFill>
+                          <a:latin typeface="Play"/>
+                          <a:ea typeface="Play"/>
+                          <a:cs typeface="Play"/>
+                        </a:defRPr>
+                      </a:pPr>
+                      <a:r>
+                        <a:t>Метрика</a:t>
+                      </a:r>
+                    </a:p>
+                  </a:txBody>
+                  <a:tcPr>
+                    <a:solidFill>
+                      <a:srgbClr val="0077FF"/>
+                    </a:solidFill>
+                  </a:tcPr>
+                </a:tc>
+                <a:tc>
+                  <a:txBody>
+                    <a:bodyPr/>
+                    <a:lstStyle/>
+                    <a:p>
+                      <a:pPr>
+                        <a:defRPr sz="1300" b="1">
+                          <a:solidFill>
+                            <a:srgbClr val="FFFFFF"/>
+                          </a:solidFill>
+                          <a:latin typeface="Play"/>
+                          <a:ea typeface="Play"/>
+                          <a:cs typeface="Play"/>
+                        </a:defRPr>
+                      </a:pPr>
+                      <a:r>
+                        <a:t>Ручной</a:t>
+                      </a:r>
+                    </a:p>
+                  </a:txBody>
+                  <a:tcPr>
+                    <a:solidFill>
+                      <a:srgbClr val="0077FF"/>
+                    </a:solidFill>
+                  </a:tcPr>
+                </a:tc>
+                <a:tc>
+                  <a:txBody>
+                    <a:bodyPr/>
+                    <a:lstStyle/>
+                    <a:p>
+                      <a:pPr>
+                        <a:defRPr sz="1300" b="1">
+                          <a:solidFill>
+                            <a:srgbClr val="FFFFFF"/>
+                          </a:solidFill>
+                          <a:latin typeface="Play"/>
+                          <a:ea typeface="Play"/>
+                          <a:cs typeface="Play"/>
+                        </a:defRPr>
+                      </a:pPr>
+                      <a:r>
+                        <a:t>Пилот</a:t>
+                      </a:r>
+                    </a:p>
+                  </a:txBody>
+                  <a:tcPr>
+                    <a:solidFill>
+                      <a:srgbClr val="0077FF"/>
+                    </a:solidFill>
+                  </a:tcPr>
+                </a:tc>
+              </a:tr>
+              <a:tr h="533750">
+                <a:tc>
+                  <a:txBody>
+                    <a:bodyPr/>
+                    <a:lstStyle/>
+                    <a:p>
+                      <a:pPr>
+                        <a:defRPr sz="1300" b="0">
+                          <a:solidFill>
+                            <a:srgbClr val="FFFFFF"/>
+                          </a:solidFill>
+                          <a:latin typeface="Play"/>
+                          <a:ea typeface="Play"/>
+                          <a:cs typeface="Play"/>
+                        </a:defRPr>
+                      </a:pPr>
+                      <a:r>
+                        <a:t>Кол-во презентаций</a:t>
+                      </a:r>
+                    </a:p>
+                  </a:txBody>
+                  <a:tcPr>
+                    <a:solidFill>
+                      <a:srgbClr val="111111"/>
+                    </a:solidFill>
+                  </a:tcPr>
+                </a:tc>
+                <a:tc>
+                  <a:txBody>
+                    <a:bodyPr/>
+                    <a:lstStyle/>
+                    <a:p>
+                      <a:pPr>
+                        <a:defRPr sz="1300" b="0">
+                          <a:solidFill>
+                            <a:srgbClr val="FFFFFF"/>
+                          </a:solidFill>
+                          <a:latin typeface="Play"/>
+                          <a:ea typeface="Play"/>
+                          <a:cs typeface="Play"/>
+                        </a:defRPr>
+                      </a:pPr>
+                      <a:r>
+                        <a:t>42</a:t>
+                      </a:r>
+                    </a:p>
+                  </a:txBody>
+                  <a:tcPr>
+                    <a:solidFill>
+                      <a:srgbClr val="111111"/>
+                    </a:solidFill>
+                  </a:tcPr>
+                </a:tc>
+                <a:tc>
+                  <a:txBody>
+                    <a:bodyPr/>
+                    <a:lstStyle/>
+                    <a:p>
+                      <a:pPr>
+                        <a:defRPr sz="1300" b="0">
+                          <a:solidFill>
+                            <a:srgbClr val="FFFFFF"/>
+                          </a:solidFill>
+                          <a:latin typeface="Play"/>
+                          <a:ea typeface="Play"/>
+                          <a:cs typeface="Play"/>
+                        </a:defRPr>
+                      </a:pPr>
+                      <a:r>
+                        <a:t>68</a:t>
+                      </a:r>
+                    </a:p>
+                  </a:txBody>
+                  <a:tcPr>
+                    <a:solidFill>
+                      <a:srgbClr val="111111"/>
+                    </a:solidFill>
+                  </a:tcPr>
+                </a:tc>
+              </a:tr>
+              <a:tr h="533750">
+                <a:tc>
+                  <a:txBody>
+                    <a:bodyPr/>
+                    <a:lstStyle/>
+                    <a:p>
+                      <a:pPr>
+                        <a:defRPr sz="1300" b="0">
+                          <a:solidFill>
+                            <a:srgbClr val="FFFFFF"/>
+                          </a:solidFill>
+                          <a:latin typeface="Play"/>
+                          <a:ea typeface="Play"/>
+                          <a:cs typeface="Play"/>
+                        </a:defRPr>
+                      </a:pPr>
+                      <a:r>
+                        <a:t>Время сборки (мин)</a:t>
+                      </a:r>
+                    </a:p>
+                  </a:txBody>
+                  <a:tcPr>
+                    <a:solidFill>
+                      <a:srgbClr val="111111"/>
+                    </a:solidFill>
+                  </a:tcPr>
+                </a:tc>
+                <a:tc>
+                  <a:txBody>
+                    <a:bodyPr/>
+                    <a:lstStyle/>
+                    <a:p>
+                      <a:pPr>
+                        <a:defRPr sz="1300" b="0">
+                          <a:solidFill>
+                            <a:srgbClr val="FFFFFF"/>
+                          </a:solidFill>
+                          <a:latin typeface="Play"/>
+                          <a:ea typeface="Play"/>
+                          <a:cs typeface="Play"/>
+                        </a:defRPr>
+                      </a:pPr>
+                      <a:r>
+                        <a:t>186</a:t>
+                      </a:r>
+                    </a:p>
+                  </a:txBody>
+                  <a:tcPr>
+                    <a:solidFill>
+                      <a:srgbClr val="111111"/>
+                    </a:solidFill>
+                  </a:tcPr>
+                </a:tc>
+                <a:tc>
+                  <a:txBody>
+                    <a:bodyPr/>
+                    <a:lstStyle/>
+                    <a:p>
+                      <a:pPr>
+                        <a:defRPr sz="1300" b="0">
+                          <a:solidFill>
+                            <a:srgbClr val="FFFFFF"/>
+                          </a:solidFill>
+                          <a:latin typeface="Play"/>
+                          <a:ea typeface="Play"/>
+                          <a:cs typeface="Play"/>
+                        </a:defRPr>
+                      </a:pPr>
+                      <a:r>
+                        <a:t>4</a:t>
+                      </a:r>
+                    </a:p>
+                  </a:txBody>
+                  <a:tcPr>
+                    <a:solidFill>
+                      <a:srgbClr val="111111"/>
+                    </a:solidFill>
+                  </a:tcPr>
+                </a:tc>
+              </a:tr>
+              <a:tr h="533750">
+                <a:tc>
+                  <a:txBody>
+                    <a:bodyPr/>
+                    <a:lstStyle/>
+                    <a:p>
+                      <a:pPr>
+                        <a:defRPr sz="1300" b="0">
+                          <a:solidFill>
+                            <a:srgbClr val="FFFFFF"/>
+                          </a:solidFill>
+                          <a:latin typeface="Play"/>
+                          <a:ea typeface="Play"/>
+                          <a:cs typeface="Play"/>
+                        </a:defRPr>
+                      </a:pPr>
+                      <a:r>
+                        <a:t>Запросы на вёрстку/нед</a:t>
+                      </a:r>
+                    </a:p>
+                  </a:txBody>
+                  <a:tcPr>
+                    <a:solidFill>
+                      <a:srgbClr val="111111"/>
+                    </a:solidFill>
+                  </a:tcPr>
+                </a:tc>
+                <a:tc>
+                  <a:txBody>
+                    <a:bodyPr/>
+                    <a:lstStyle/>
+                    <a:p>
+                      <a:pPr>
+                        <a:defRPr sz="1300" b="0">
+                          <a:solidFill>
+                            <a:srgbClr val="FFFFFF"/>
+                          </a:solidFill>
+                          <a:latin typeface="Play"/>
+                          <a:ea typeface="Play"/>
+                          <a:cs typeface="Play"/>
+                        </a:defRPr>
+                      </a:pPr>
+                      <a:r>
+                        <a:t>11</a:t>
+                      </a:r>
+                    </a:p>
+                  </a:txBody>
+                  <a:tcPr>
+                    <a:solidFill>
+                      <a:srgbClr val="111111"/>
+                    </a:solidFill>
+                  </a:tcPr>
+                </a:tc>
+                <a:tc>
+                  <a:txBody>
+                    <a:bodyPr/>
+                    <a:lstStyle/>
+                    <a:p>
+                      <a:pPr>
+                        <a:defRPr sz="1300" b="0">
+                          <a:solidFill>
+                            <a:srgbClr val="FFFFFF"/>
+                          </a:solidFill>
+                          <a:latin typeface="Play"/>
+                          <a:ea typeface="Play"/>
+                          <a:cs typeface="Play"/>
+                        </a:defRPr>
+                      </a:pPr>
+                      <a:r>
+                        <a:t>38</a:t>
+                      </a:r>
+                    </a:p>
+                  </a:txBody>
+                  <a:tcPr>
+                    <a:solidFill>
+                      <a:srgbClr val="111111"/>
+                    </a:solidFill>
+                  </a:tcPr>
+                </a:tc>
+              </a:tr>
+              <a:tr h="533752">
+                <a:tc>
+                  <a:txBody>
+                    <a:bodyPr/>
+                    <a:lstStyle/>
+                    <a:p>
+                      <a:pPr>
+                        <a:defRPr sz="1300" b="0">
+                          <a:solidFill>
+                            <a:srgbClr val="FFFFFF"/>
+                          </a:solidFill>
+                          <a:latin typeface="Play"/>
+                          <a:ea typeface="Play"/>
+                          <a:cs typeface="Play"/>
+                        </a:defRPr>
+                      </a:pPr>
+                      <a:r>
+                        <a:t>Нарушения стиля</a:t>
+                      </a:r>
+                    </a:p>
+                  </a:txBody>
+                  <a:tcPr>
+                    <a:solidFill>
+                      <a:srgbClr val="111111"/>
+                    </a:solidFill>
+                  </a:tcPr>
+                </a:tc>
+                <a:tc>
+                  <a:txBody>
+                    <a:bodyPr/>
+                    <a:lstStyle/>
+                    <a:p>
+                      <a:pPr>
+                        <a:defRPr sz="1300" b="0">
+                          <a:solidFill>
+                            <a:srgbClr val="FFFFFF"/>
+                          </a:solidFill>
+                          <a:latin typeface="Play"/>
+                          <a:ea typeface="Play"/>
+                          <a:cs typeface="Play"/>
+                        </a:defRPr>
+                      </a:pPr>
+                      <a:r>
+                        <a:t>19</a:t>
+                      </a:r>
+                    </a:p>
+                  </a:txBody>
+                  <a:tcPr>
+                    <a:solidFill>
+                      <a:srgbClr val="111111"/>
+                    </a:solidFill>
+                  </a:tcPr>
+                </a:tc>
+                <a:tc>
+                  <a:txBody>
+                    <a:bodyPr/>
+                    <a:lstStyle/>
+                    <a:p>
+                      <a:pPr>
+                        <a:defRPr sz="1300" b="0">
+                          <a:solidFill>
+                            <a:srgbClr val="FFFFFF"/>
+                          </a:solidFill>
+                          <a:latin typeface="Play"/>
+                          <a:ea typeface="Play"/>
+                          <a:cs typeface="Play"/>
+                        </a:defRPr>
+                      </a:pPr>
+                      <a:r>
+                        <a:t>2</a:t>
+                      </a:r>
+                    </a:p>
+                  </a:txBody>
+                  <a:tcPr>
+                    <a:solidFill>
+                      <a:srgbClr val="111111"/>
+                    </a:solidFill>
+                  </a:tcPr>
+                </a:tc>
+              </a:tr>
+            </a:tbl>
+          </a:graphicData>
+        </a:graphic>
+      </p:graphicFrame>
       <p:sp>
         <p:nvSpPr>
           <p:cNvPr id="4" name="body"/>
@@ -9504,8 +9082,8 @@
         </p:nvSpPr>
         <p:spPr>
           <a:xfrm>
-            <a:off x="1560368" y="3097566"/>
-            <a:ext cx="9048707" cy="2676046"/>
+            <a:off x="429280" y="4432493"/>
+            <a:ext cx="11310884" cy="1341120"/>
           </a:xfrm>
           <a:prstGeom prst="rect">
             <a:avLst/>
@@ -9522,7 +9100,7 @@
               <a:spcAft>
                 <a:spcPts val="300"/>
               </a:spcAft>
-              <a:defRPr sz="2800">
+              <a:defRPr sz="1600">
                 <a:solidFill>
                   <a:srgbClr val="FFFFFF"/>
                 </a:solidFill>
@@ -9532,7 +9110,7 @@
               </a:defRPr>
             </a:pPr>
             <a:r>
-              <a:rPr sz="2800">
+              <a:rPr sz="1600">
                 <a:solidFill>
                   <a:srgbClr val="FFFFFF"/>
                 </a:solidFill>
@@ -9540,7 +9118,7 @@
                 <a:ea typeface="Play"/>
                 <a:cs typeface="Play"/>
               </a:rPr>
-              <a:t>• План колоды из 12 слайдов</a:t>
+              <a:t>• 6 недель, 2 команды, 68 презентаций</a:t>
             </a:r>
           </a:p>
           <a:p>
@@ -9548,7 +9126,7 @@
               <a:spcAft>
                 <a:spcPts val="300"/>
               </a:spcAft>
-              <a:defRPr sz="2800">
+              <a:defRPr sz="1600">
                 <a:solidFill>
                   <a:srgbClr val="FFFFFF"/>
                 </a:solidFill>
@@ -9558,7 +9136,7 @@
               </a:defRPr>
             </a:pPr>
             <a:r>
-              <a:rPr sz="2800">
+              <a:rPr sz="1600">
                 <a:solidFill>
                   <a:srgbClr val="FFFFFF"/>
                 </a:solidFill>
@@ -9566,204 +9144,15 @@
                 <a:ea typeface="Play"/>
                 <a:cs typeface="Play"/>
               </a:rPr>
-              <a:t>• Автоматический аудит</a:t>
+              <a:t>• Время сборки 4 мин, 38 запросов закрыто</a:t>
             </a:r>
           </a:p>
-        </p:txBody>
-      </p:sp>
-    </p:spTree>
-  </p:cSld>
-  <p:clrMapOvr>
-    <a:masterClrMapping/>
-  </p:clrMapOvr>
-</p:sld>
-</file>
-
-<file path=ppt/slides/slide38.xml><?xml version="1.0" encoding="utf-8"?>
-<p:sld xmlns:a="http://schemas.openxmlformats.org/drawingml/2006/main" xmlns:p="http://schemas.openxmlformats.org/presentationml/2006/main" xmlns:r="http://schemas.openxmlformats.org/officeDocument/2006/relationships">
-  <p:cSld>
-    <p:spTree>
-      <p:nvGrpSpPr>
-        <p:cNvPr id="1" name=""/>
-        <p:cNvGrpSpPr/>
-        <p:nvPr/>
-      </p:nvGrpSpPr>
-      <p:grpSpPr/>
-      <p:sp>
-        <p:nvSpPr>
-          <p:cNvPr id="881" name="Google Shape;881;p45"/>
-          <p:cNvSpPr/>
-          <p:nvPr/>
-        </p:nvSpPr>
-        <p:spPr>
-          <a:xfrm>
-            <a:off x="429254" y="4567907"/>
-            <a:ext cx="834282" cy="834282"/>
-          </a:xfrm>
-          <a:prstGeom prst="ellipse">
-            <a:avLst/>
-          </a:prstGeom>
-          <a:solidFill>
-            <a:srgbClr val="5A6775"/>
-          </a:solidFill>
-          <a:ln>
-            <a:noFill/>
-          </a:ln>
-        </p:spPr>
-        <p:txBody>
-          <a:bodyPr anchorCtr="0" anchor="ctr" bIns="45700" lIns="91425" spcFirstLastPara="1" rIns="91425" wrap="square" tIns="45700">
-            <a:noAutofit/>
-          </a:bodyPr>
-          <a:lstStyle/>
-          <a:p>
-            <a:pPr indent="0" lvl="0" marL="0" marR="0" rtl="0" algn="ctr">
-              <a:spcBef>
-                <a:spcPts val="0"/>
-              </a:spcBef>
-              <a:spcAft>
-                <a:spcPts val="0"/>
-              </a:spcAft>
-              <a:buNone/>
-            </a:pPr>
-            <a:r>
-              <a:t/>
-            </a:r>
-            <a:endParaRPr sz="1800">
-              <a:solidFill>
-                <a:schemeClr val="lt1"/>
-              </a:solidFill>
-              <a:latin typeface="Arial"/>
-              <a:ea typeface="Arial"/>
-              <a:cs typeface="Arial"/>
-              <a:sym typeface="Arial"/>
-            </a:endParaRPr>
-          </a:p>
-        </p:txBody>
-      </p:sp>
-      <p:sp>
-        <p:nvSpPr>
-          <p:cNvPr id="883" name="Google Shape;883;p45"/>
-          <p:cNvSpPr/>
-          <p:nvPr/>
-        </p:nvSpPr>
-        <p:spPr>
-          <a:xfrm>
-            <a:off x="3499026" y="4567907"/>
-            <a:ext cx="834282" cy="834282"/>
-          </a:xfrm>
-          <a:prstGeom prst="ellipse">
-            <a:avLst/>
-          </a:prstGeom>
-          <a:solidFill>
-            <a:srgbClr val="5A6775"/>
-          </a:solidFill>
-          <a:ln>
-            <a:noFill/>
-          </a:ln>
-        </p:spPr>
-        <p:txBody>
-          <a:bodyPr anchorCtr="0" anchor="ctr" bIns="45700" lIns="91425" spcFirstLastPara="1" rIns="91425" wrap="square" tIns="45700">
-            <a:noAutofit/>
-          </a:bodyPr>
-          <a:lstStyle/>
-          <a:p>
-            <a:pPr indent="0" lvl="0" marL="0" marR="0" rtl="0" algn="ctr">
-              <a:spcBef>
-                <a:spcPts val="0"/>
-              </a:spcBef>
-              <a:spcAft>
-                <a:spcPts val="0"/>
-              </a:spcAft>
-              <a:buNone/>
-            </a:pPr>
-            <a:r>
-              <a:t/>
-            </a:r>
-            <a:endParaRPr sz="1800">
-              <a:solidFill>
-                <a:schemeClr val="lt1"/>
-              </a:solidFill>
-              <a:latin typeface="Arial"/>
-              <a:ea typeface="Arial"/>
-              <a:cs typeface="Arial"/>
-              <a:sym typeface="Arial"/>
-            </a:endParaRPr>
-          </a:p>
-        </p:txBody>
-      </p:sp>
-      <p:sp>
-        <p:nvSpPr>
-          <p:cNvPr id="884" name="Rounded Rectangle 883"/>
-          <p:cNvSpPr/>
-          <p:nvPr/>
-        </p:nvSpPr>
-        <p:spPr>
-          <a:xfrm>
-            <a:off x="302280" y="2164394"/>
-            <a:ext cx="10433795" cy="2511591"/>
-          </a:xfrm>
-          <a:prstGeom prst="roundRect">
-            <a:avLst/>
-          </a:prstGeom>
-          <a:solidFill>
-            <a:srgbClr val="111111">
-              <a:alpha val="85000"/>
-            </a:srgbClr>
-          </a:solidFill>
-          <a:ln>
-            <a:noFill/>
-          </a:ln>
-          <a:effectLst/>
-        </p:spPr>
-        <p:style>
-          <a:lnRef idx="1">
-            <a:schemeClr val="accent1"/>
-          </a:lnRef>
-          <a:fillRef idx="3">
-            <a:schemeClr val="accent1"/>
-          </a:fillRef>
-          <a:effectRef idx="2">
-            <a:schemeClr val="accent1"/>
-          </a:effectRef>
-          <a:fontRef idx="minor">
-            <a:schemeClr val="lt1"/>
-          </a:fontRef>
-        </p:style>
-        <p:txBody>
-          <a:bodyPr rtlCol="0" anchor="ctr"/>
-          <a:lstStyle/>
-          <a:p>
-            <a:pPr algn="ctr"/>
-          </a:p>
-        </p:txBody>
-      </p:sp>
-      <p:sp>
-        <p:nvSpPr>
-          <p:cNvPr id="885" name="title"/>
-          <p:cNvSpPr txBox="1"/>
-          <p:nvPr/>
-        </p:nvSpPr>
-        <p:spPr>
-          <a:xfrm>
-            <a:off x="429280" y="2291394"/>
-            <a:ext cx="7827385" cy="919480"/>
-          </a:xfrm>
-          <a:prstGeom prst="rect">
-            <a:avLst/>
-          </a:prstGeom>
-          <a:noFill/>
-        </p:spPr>
-        <p:txBody>
-          <a:bodyPr wrap="square" lIns="76200" rIns="76200" tIns="50800" bIns="50800">
-            <a:spAutoFit/>
-          </a:bodyPr>
-          <a:lstStyle/>
           <a:p>
             <a:pPr algn="l">
               <a:spcAft>
                 <a:spcPts val="300"/>
               </a:spcAft>
-              <a:defRPr sz="4800">
+              <a:defRPr sz="1600">
                 <a:solidFill>
                   <a:srgbClr val="FFFFFF"/>
                 </a:solidFill>
@@ -9773,7 +9162,7 @@
               </a:defRPr>
             </a:pPr>
             <a:r>
-              <a:rPr sz="4800">
+              <a:rPr sz="1600">
                 <a:solidFill>
                   <a:srgbClr val="FFFFFF"/>
                 </a:solidFill>
@@ -9781,131 +9170,7 @@
                 <a:ea typeface="Play"/>
                 <a:cs typeface="Play"/>
               </a:rPr>
-              <a:t>Что мы просим решить</a:t>
-            </a:r>
-          </a:p>
-        </p:txBody>
-      </p:sp>
-      <p:sp>
-        <p:nvSpPr>
-          <p:cNvPr id="886" name="lead"/>
-          <p:cNvSpPr txBox="1"/>
-          <p:nvPr/>
-        </p:nvSpPr>
-        <p:spPr>
-          <a:xfrm>
-            <a:off x="1560368" y="3450904"/>
-            <a:ext cx="9048707" cy="335100"/>
-          </a:xfrm>
-          <a:prstGeom prst="rect">
-            <a:avLst/>
-          </a:prstGeom>
-          <a:noFill/>
-        </p:spPr>
-        <p:txBody>
-          <a:bodyPr wrap="square" lIns="76200" rIns="76200" tIns="50800" bIns="50800">
-            <a:spAutoFit/>
-          </a:bodyPr>
-          <a:lstStyle/>
-          <a:p>
-            <a:pPr algn="ctr">
-              <a:spcAft>
-                <a:spcPts val="300"/>
-              </a:spcAft>
-              <a:defRPr sz="1400" b="1">
-                <a:solidFill>
-                  <a:srgbClr val="FFFFFF"/>
-                </a:solidFill>
-                <a:latin typeface="Play"/>
-                <a:ea typeface="Play"/>
-                <a:cs typeface="Play"/>
-              </a:defRPr>
-            </a:pPr>
-            <a:r>
-              <a:rPr sz="1400" b="1">
-                <a:solidFill>
-                  <a:srgbClr val="FFFFFF"/>
-                </a:solidFill>
-                <a:latin typeface="Play"/>
-                <a:ea typeface="Play"/>
-                <a:cs typeface="Play"/>
-              </a:rPr>
-              <a:t>Одобрить запуск сервиса на всю компанию</a:t>
-            </a:r>
-          </a:p>
-        </p:txBody>
-      </p:sp>
-      <p:sp>
-        <p:nvSpPr>
-          <p:cNvPr id="887" name="body"/>
-          <p:cNvSpPr txBox="1"/>
-          <p:nvPr/>
-        </p:nvSpPr>
-        <p:spPr>
-          <a:xfrm>
-            <a:off x="1560368" y="3853026"/>
-            <a:ext cx="9048707" cy="714881"/>
-          </a:xfrm>
-          <a:prstGeom prst="rect">
-            <a:avLst/>
-          </a:prstGeom>
-          <a:noFill/>
-        </p:spPr>
-        <p:txBody>
-          <a:bodyPr wrap="square" lIns="76200" rIns="76200" tIns="50800" bIns="50800">
-            <a:spAutoFit/>
-          </a:bodyPr>
-          <a:lstStyle/>
-          <a:p>
-            <a:pPr algn="l">
-              <a:spcAft>
-                <a:spcPts val="300"/>
-              </a:spcAft>
-              <a:defRPr sz="1800" b="1">
-                <a:solidFill>
-                  <a:srgbClr val="FFFFFF"/>
-                </a:solidFill>
-                <a:latin typeface="Play"/>
-                <a:ea typeface="Play"/>
-                <a:cs typeface="Play"/>
-              </a:defRPr>
-            </a:pPr>
-            <a:r>
-              <a:rPr sz="1800" b="1">
-                <a:solidFill>
-                  <a:srgbClr val="FFFFFF"/>
-                </a:solidFill>
-                <a:latin typeface="Play"/>
-                <a:ea typeface="Play"/>
-                <a:cs typeface="Play"/>
-              </a:rPr>
-              <a:t>• Предоставить ресурсы для масштабирования</a:t>
-            </a:r>
-          </a:p>
-          <a:p>
-            <a:pPr algn="l">
-              <a:spcAft>
-                <a:spcPts val="300"/>
-              </a:spcAft>
-              <a:defRPr sz="1800" b="1">
-                <a:solidFill>
-                  <a:srgbClr val="FFFFFF"/>
-                </a:solidFill>
-                <a:latin typeface="Play"/>
-                <a:ea typeface="Play"/>
-                <a:cs typeface="Play"/>
-              </a:defRPr>
-            </a:pPr>
-            <a:r>
-              <a:rPr sz="1800" b="1">
-                <a:solidFill>
-                  <a:srgbClr val="FFFFFF"/>
-                </a:solidFill>
-                <a:latin typeface="Play"/>
-                <a:ea typeface="Play"/>
-                <a:cs typeface="Play"/>
-              </a:rPr>
-              <a:t>• Поддержать интеграцию с хранилищем документов</a:t>
+              <a:t>• Нарушений – 2 из 68</a:t>
             </a:r>
           </a:p>
         </p:txBody>

--- a/samples/VK_WorkSpace_Клиентская_конференция_Шабл__focus.pptx
+++ b/samples/VK_WorkSpace_Клиентская_конференция_Шабл__focus.pptx
@@ -15,6 +15,9 @@
     <p:sldId id="289" r:id="rId42"/>
     <p:sldId id="290" r:id="rId43"/>
     <p:sldId id="291" r:id="rId44"/>
+    <p:sldId id="292" r:id="rId45"/>
+    <p:sldId id="293" r:id="rId46"/>
+    <p:sldId id="294" r:id="rId47"/>
   </p:sldIdLst>
   <p:sldSz cy="6858000" cx="12192000"/>
   <p:notesSz cx="6858000" cy="9144000"/>
@@ -281,567 +284,6 @@
     </p:ext>
   </p:extLst>
 </p:presentation>
-</file>
-
-<file path=ppt/charts/chart1.xml><?xml version="1.0" encoding="utf-8"?>
-<c:chartSpace xmlns:c="http://schemas.openxmlformats.org/drawingml/2006/chart" xmlns:a="http://schemas.openxmlformats.org/drawingml/2006/main" xmlns:r="http://schemas.openxmlformats.org/officeDocument/2006/relationships">
-  <c:date1904 val="0"/>
-  <c:chart>
-    <c:autoTitleDeleted val="1"/>
-    <c:plotArea>
-      <c:barChart>
-        <c:barDir val="col"/>
-        <c:grouping val="clustered"/>
-        <c:ser>
-          <c:idx val="0"/>
-          <c:order val="0"/>
-          <c:tx>
-            <c:strRef>
-              <c:f>Sheet1!$B$1</c:f>
-              <c:strCache>
-                <c:ptCount val="1"/>
-                <c:pt idx="0">
-                  <c:v>Время (мин)</c:v>
-                </c:pt>
-              </c:strCache>
-            </c:strRef>
-          </c:tx>
-          <c:spPr>
-            <a:solidFill>
-              <a:srgbClr val="0077FF"/>
-            </a:solidFill>
-            <a:ln>
-              <a:solidFill>
-                <a:srgbClr val="0077FF"/>
-              </a:solidFill>
-            </a:ln>
-          </c:spPr>
-          <c:cat>
-            <c:strRef>
-              <c:f>Sheet1!$A$2:$A$3</c:f>
-              <c:strCache>
-                <c:ptCount val="2"/>
-                <c:pt idx="0">
-                  <c:v>Ручной</c:v>
-                </c:pt>
-                <c:pt idx="1">
-                  <c:v>Автоматический</c:v>
-                </c:pt>
-              </c:strCache>
-            </c:strRef>
-          </c:cat>
-          <c:val>
-            <c:numRef>
-              <c:f>Sheet1!$B$2:$B$3</c:f>
-              <c:numCache>
-                <c:formatCode>General</c:formatCode>
-                <c:ptCount val="2"/>
-                <c:pt idx="0">
-                  <c:v>186.0</c:v>
-                </c:pt>
-                <c:pt idx="1">
-                  <c:v>4.0</c:v>
-                </c:pt>
-              </c:numCache>
-            </c:numRef>
-          </c:val>
-        </c:ser>
-        <c:gapWidth val="60"/>
-        <c:axId val="-2068027336"/>
-        <c:axId val="-2113994440"/>
-      </c:barChart>
-      <c:catAx>
-        <c:axId val="-2068027336"/>
-        <c:scaling>
-          <c:orientation val="minMax"/>
-        </c:scaling>
-        <c:delete val="0"/>
-        <c:axPos val="b"/>
-        <c:majorTickMark val="out"/>
-        <c:minorTickMark val="none"/>
-        <c:tickLblPos val="nextTo"/>
-        <c:txPr>
-          <a:bodyPr/>
-          <a:lstStyle/>
-          <a:p>
-            <a:pPr>
-              <a:defRPr sz="1100" b="0">
-                <a:solidFill>
-                  <a:srgbClr val="FFFFFF"/>
-                </a:solidFill>
-                <a:latin typeface="Play"/>
-                <a:ea typeface="Play"/>
-                <a:cs typeface="Play"/>
-              </a:defRPr>
-            </a:pPr>
-          </a:p>
-        </c:txPr>
-        <c:crossAx val="-2113994440"/>
-        <c:crosses val="autoZero"/>
-        <c:auto val="1"/>
-        <c:lblAlgn val="ctr"/>
-        <c:lblOffset val="100"/>
-        <c:noMultiLvlLbl val="0"/>
-      </c:catAx>
-      <c:valAx>
-        <c:axId val="-2113994440"/>
-        <c:scaling/>
-        <c:delete val="0"/>
-        <c:axPos val="l"/>
-        <c:majorGridlines>
-          <c:spPr>
-            <a:ln w="9525">
-              <a:solidFill>
-                <a:srgbClr val="3C3C3C"/>
-              </a:solidFill>
-            </a:ln>
-          </c:spPr>
-        </c:majorGridlines>
-        <c:title>
-          <c:tx>
-            <c:rich>
-              <a:bodyPr/>
-              <a:lstStyle/>
-              <a:p>
-                <a:pPr>
-                  <a:defRPr sz="1100" b="0">
-                    <a:solidFill>
-                      <a:srgbClr val="FFFFFF"/>
-                    </a:solidFill>
-                    <a:latin typeface="Play"/>
-                    <a:ea typeface="Play"/>
-                    <a:cs typeface="Play"/>
-                  </a:defRPr>
-                </a:pPr>
-                <a:r>
-                  <a:t>мин</a:t>
-                </a:r>
-              </a:p>
-            </c:rich>
-          </c:tx>
-          <c:layout/>
-          <c:overlay val="0"/>
-        </c:title>
-        <c:majorTickMark val="out"/>
-        <c:minorTickMark val="none"/>
-        <c:tickLblPos val="nextTo"/>
-        <c:txPr>
-          <a:bodyPr/>
-          <a:lstStyle/>
-          <a:p>
-            <a:pPr>
-              <a:defRPr sz="1100" b="0">
-                <a:solidFill>
-                  <a:srgbClr val="FFFFFF"/>
-                </a:solidFill>
-                <a:latin typeface="Play"/>
-                <a:ea typeface="Play"/>
-                <a:cs typeface="Play"/>
-              </a:defRPr>
-            </a:pPr>
-          </a:p>
-        </c:txPr>
-        <c:crossAx val="-2068027336"/>
-        <c:crosses val="autoZero"/>
-      </c:valAx>
-    </c:plotArea>
-    <c:dispBlanksAs val="gap"/>
-  </c:chart>
-  <c:txPr>
-    <a:bodyPr/>
-    <a:lstStyle/>
-    <a:p>
-      <a:pPr>
-        <a:defRPr sz="1200" b="0">
-          <a:solidFill>
-            <a:srgbClr val="FFFFFF"/>
-          </a:solidFill>
-          <a:latin typeface="Play"/>
-          <a:ea typeface="Play"/>
-          <a:cs typeface="Play"/>
-        </a:defRPr>
-      </a:pPr>
-      <a:endParaRPr lang="en-US"/>
-    </a:p>
-  </c:txPr>
-  <c:externalData r:id="rId1">
-    <c:autoUpdate val="0"/>
-  </c:externalData>
-</c:chartSpace>
-</file>
-
-<file path=ppt/charts/chart2.xml><?xml version="1.0" encoding="utf-8"?>
-<c:chartSpace xmlns:c="http://schemas.openxmlformats.org/drawingml/2006/chart" xmlns:a="http://schemas.openxmlformats.org/drawingml/2006/main" xmlns:r="http://schemas.openxmlformats.org/officeDocument/2006/relationships">
-  <c:date1904 val="0"/>
-  <c:chart>
-    <c:autoTitleDeleted val="1"/>
-    <c:plotArea>
-      <c:barChart>
-        <c:barDir val="col"/>
-        <c:grouping val="clustered"/>
-        <c:ser>
-          <c:idx val="0"/>
-          <c:order val="0"/>
-          <c:tx>
-            <c:strRef>
-              <c:f>Sheet1!$B$1</c:f>
-              <c:strCache>
-                <c:ptCount val="1"/>
-                <c:pt idx="0">
-                  <c:v>Время (мин)</c:v>
-                </c:pt>
-              </c:strCache>
-            </c:strRef>
-          </c:tx>
-          <c:spPr>
-            <a:solidFill>
-              <a:srgbClr val="0077FF"/>
-            </a:solidFill>
-            <a:ln>
-              <a:solidFill>
-                <a:srgbClr val="0077FF"/>
-              </a:solidFill>
-            </a:ln>
-          </c:spPr>
-          <c:cat>
-            <c:strRef>
-              <c:f>Sheet1!$A$2:$A$3</c:f>
-              <c:strCache>
-                <c:ptCount val="2"/>
-                <c:pt idx="0">
-                  <c:v>Ручной</c:v>
-                </c:pt>
-                <c:pt idx="1">
-                  <c:v>Автоматический</c:v>
-                </c:pt>
-              </c:strCache>
-            </c:strRef>
-          </c:cat>
-          <c:val>
-            <c:numRef>
-              <c:f>Sheet1!$B$2:$B$3</c:f>
-              <c:numCache>
-                <c:formatCode>General</c:formatCode>
-                <c:ptCount val="2"/>
-                <c:pt idx="0">
-                  <c:v>186.0</c:v>
-                </c:pt>
-                <c:pt idx="1">
-                  <c:v>4.0</c:v>
-                </c:pt>
-              </c:numCache>
-            </c:numRef>
-          </c:val>
-        </c:ser>
-        <c:gapWidth val="60"/>
-        <c:axId val="-2068027336"/>
-        <c:axId val="-2113994440"/>
-      </c:barChart>
-      <c:catAx>
-        <c:axId val="-2068027336"/>
-        <c:scaling>
-          <c:orientation val="minMax"/>
-        </c:scaling>
-        <c:delete val="0"/>
-        <c:axPos val="b"/>
-        <c:majorTickMark val="out"/>
-        <c:minorTickMark val="none"/>
-        <c:tickLblPos val="nextTo"/>
-        <c:txPr>
-          <a:bodyPr/>
-          <a:lstStyle/>
-          <a:p>
-            <a:pPr>
-              <a:defRPr sz="1100" b="0">
-                <a:solidFill>
-                  <a:srgbClr val="FFFFFF"/>
-                </a:solidFill>
-                <a:latin typeface="Play"/>
-                <a:ea typeface="Play"/>
-                <a:cs typeface="Play"/>
-              </a:defRPr>
-            </a:pPr>
-          </a:p>
-        </c:txPr>
-        <c:crossAx val="-2113994440"/>
-        <c:crosses val="autoZero"/>
-        <c:auto val="1"/>
-        <c:lblAlgn val="ctr"/>
-        <c:lblOffset val="100"/>
-        <c:noMultiLvlLbl val="0"/>
-      </c:catAx>
-      <c:valAx>
-        <c:axId val="-2113994440"/>
-        <c:scaling/>
-        <c:delete val="0"/>
-        <c:axPos val="l"/>
-        <c:majorGridlines>
-          <c:spPr>
-            <a:ln w="9525">
-              <a:solidFill>
-                <a:srgbClr val="3C3C3C"/>
-              </a:solidFill>
-            </a:ln>
-          </c:spPr>
-        </c:majorGridlines>
-        <c:title>
-          <c:tx>
-            <c:rich>
-              <a:bodyPr/>
-              <a:lstStyle/>
-              <a:p>
-                <a:pPr>
-                  <a:defRPr sz="1100" b="0">
-                    <a:solidFill>
-                      <a:srgbClr val="FFFFFF"/>
-                    </a:solidFill>
-                    <a:latin typeface="Play"/>
-                    <a:ea typeface="Play"/>
-                    <a:cs typeface="Play"/>
-                  </a:defRPr>
-                </a:pPr>
-                <a:r>
-                  <a:t>мин</a:t>
-                </a:r>
-              </a:p>
-            </c:rich>
-          </c:tx>
-          <c:layout/>
-          <c:overlay val="0"/>
-        </c:title>
-        <c:majorTickMark val="out"/>
-        <c:minorTickMark val="none"/>
-        <c:tickLblPos val="nextTo"/>
-        <c:txPr>
-          <a:bodyPr/>
-          <a:lstStyle/>
-          <a:p>
-            <a:pPr>
-              <a:defRPr sz="1100" b="0">
-                <a:solidFill>
-                  <a:srgbClr val="FFFFFF"/>
-                </a:solidFill>
-                <a:latin typeface="Play"/>
-                <a:ea typeface="Play"/>
-                <a:cs typeface="Play"/>
-              </a:defRPr>
-            </a:pPr>
-          </a:p>
-        </c:txPr>
-        <c:crossAx val="-2068027336"/>
-        <c:crosses val="autoZero"/>
-      </c:valAx>
-    </c:plotArea>
-    <c:dispBlanksAs val="gap"/>
-  </c:chart>
-  <c:txPr>
-    <a:bodyPr/>
-    <a:lstStyle/>
-    <a:p>
-      <a:pPr>
-        <a:defRPr sz="1200" b="0">
-          <a:solidFill>
-            <a:srgbClr val="FFFFFF"/>
-          </a:solidFill>
-          <a:latin typeface="Play"/>
-          <a:ea typeface="Play"/>
-          <a:cs typeface="Play"/>
-        </a:defRPr>
-      </a:pPr>
-      <a:endParaRPr lang="en-US"/>
-    </a:p>
-  </c:txPr>
-  <c:externalData r:id="rId1">
-    <c:autoUpdate val="0"/>
-  </c:externalData>
-</c:chartSpace>
-</file>
-
-<file path=ppt/charts/chart3.xml><?xml version="1.0" encoding="utf-8"?>
-<c:chartSpace xmlns:c="http://schemas.openxmlformats.org/drawingml/2006/chart" xmlns:a="http://schemas.openxmlformats.org/drawingml/2006/main" xmlns:r="http://schemas.openxmlformats.org/officeDocument/2006/relationships">
-  <c:date1904 val="0"/>
-  <c:chart>
-    <c:autoTitleDeleted val="1"/>
-    <c:plotArea>
-      <c:barChart>
-        <c:barDir val="col"/>
-        <c:grouping val="clustered"/>
-        <c:ser>
-          <c:idx val="0"/>
-          <c:order val="0"/>
-          <c:tx>
-            <c:strRef>
-              <c:f>Sheet1!$B$1</c:f>
-              <c:strCache>
-                <c:ptCount val="1"/>
-                <c:pt idx="0">
-                  <c:v>Нарушения (колоды)</c:v>
-                </c:pt>
-              </c:strCache>
-            </c:strRef>
-          </c:tx>
-          <c:spPr>
-            <a:solidFill>
-              <a:srgbClr val="0077FF"/>
-            </a:solidFill>
-            <a:ln>
-              <a:solidFill>
-                <a:srgbClr val="0077FF"/>
-              </a:solidFill>
-            </a:ln>
-          </c:spPr>
-          <c:cat>
-            <c:strRef>
-              <c:f>Sheet1!$A$2:$A$3</c:f>
-              <c:strCache>
-                <c:ptCount val="2"/>
-                <c:pt idx="0">
-                  <c:v>Ручной</c:v>
-                </c:pt>
-                <c:pt idx="1">
-                  <c:v>Автоматический</c:v>
-                </c:pt>
-              </c:strCache>
-            </c:strRef>
-          </c:cat>
-          <c:val>
-            <c:numRef>
-              <c:f>Sheet1!$B$2:$B$3</c:f>
-              <c:numCache>
-                <c:formatCode>General</c:formatCode>
-                <c:ptCount val="2"/>
-                <c:pt idx="0">
-                  <c:v>19.0</c:v>
-                </c:pt>
-                <c:pt idx="1">
-                  <c:v>2.0</c:v>
-                </c:pt>
-              </c:numCache>
-            </c:numRef>
-          </c:val>
-        </c:ser>
-        <c:gapWidth val="60"/>
-        <c:axId val="-2068027336"/>
-        <c:axId val="-2113994440"/>
-      </c:barChart>
-      <c:catAx>
-        <c:axId val="-2068027336"/>
-        <c:scaling>
-          <c:orientation val="minMax"/>
-        </c:scaling>
-        <c:delete val="0"/>
-        <c:axPos val="b"/>
-        <c:majorTickMark val="out"/>
-        <c:minorTickMark val="none"/>
-        <c:tickLblPos val="nextTo"/>
-        <c:txPr>
-          <a:bodyPr/>
-          <a:lstStyle/>
-          <a:p>
-            <a:pPr>
-              <a:defRPr sz="1100" b="0">
-                <a:solidFill>
-                  <a:srgbClr val="FFFFFF"/>
-                </a:solidFill>
-                <a:latin typeface="Play"/>
-                <a:ea typeface="Play"/>
-                <a:cs typeface="Play"/>
-              </a:defRPr>
-            </a:pPr>
-          </a:p>
-        </c:txPr>
-        <c:crossAx val="-2113994440"/>
-        <c:crosses val="autoZero"/>
-        <c:auto val="1"/>
-        <c:lblAlgn val="ctr"/>
-        <c:lblOffset val="100"/>
-        <c:noMultiLvlLbl val="0"/>
-      </c:catAx>
-      <c:valAx>
-        <c:axId val="-2113994440"/>
-        <c:scaling/>
-        <c:delete val="0"/>
-        <c:axPos val="l"/>
-        <c:majorGridlines>
-          <c:spPr>
-            <a:ln w="9525">
-              <a:solidFill>
-                <a:srgbClr val="3C3C3C"/>
-              </a:solidFill>
-            </a:ln>
-          </c:spPr>
-        </c:majorGridlines>
-        <c:title>
-          <c:tx>
-            <c:rich>
-              <a:bodyPr/>
-              <a:lstStyle/>
-              <a:p>
-                <a:pPr>
-                  <a:defRPr sz="1100" b="0">
-                    <a:solidFill>
-                      <a:srgbClr val="FFFFFF"/>
-                    </a:solidFill>
-                    <a:latin typeface="Play"/>
-                    <a:ea typeface="Play"/>
-                    <a:cs typeface="Play"/>
-                  </a:defRPr>
-                </a:pPr>
-                <a:r>
-                  <a:t>колоды</a:t>
-                </a:r>
-              </a:p>
-            </c:rich>
-          </c:tx>
-          <c:layout/>
-          <c:overlay val="0"/>
-        </c:title>
-        <c:majorTickMark val="out"/>
-        <c:minorTickMark val="none"/>
-        <c:tickLblPos val="nextTo"/>
-        <c:txPr>
-          <a:bodyPr/>
-          <a:lstStyle/>
-          <a:p>
-            <a:pPr>
-              <a:defRPr sz="1100" b="0">
-                <a:solidFill>
-                  <a:srgbClr val="FFFFFF"/>
-                </a:solidFill>
-                <a:latin typeface="Play"/>
-                <a:ea typeface="Play"/>
-                <a:cs typeface="Play"/>
-              </a:defRPr>
-            </a:pPr>
-          </a:p>
-        </c:txPr>
-        <c:crossAx val="-2068027336"/>
-        <c:crosses val="autoZero"/>
-      </c:valAx>
-    </c:plotArea>
-    <c:dispBlanksAs val="gap"/>
-  </c:chart>
-  <c:txPr>
-    <a:bodyPr/>
-    <a:lstStyle/>
-    <a:p>
-      <a:pPr>
-        <a:defRPr sz="1200" b="0">
-          <a:solidFill>
-            <a:srgbClr val="FFFFFF"/>
-          </a:solidFill>
-          <a:latin typeface="Play"/>
-          <a:ea typeface="Play"/>
-          <a:cs typeface="Play"/>
-        </a:defRPr>
-      </a:pPr>
-      <a:endParaRPr lang="en-US"/>
-    </a:p>
-  </c:txPr>
-  <c:externalData r:id="rId1">
-    <c:autoUpdate val="0"/>
-  </c:externalData>
-</c:chartSpace>
 </file>
 
 <file path=ppt/notesMasters/notesMaster1.xml><?xml version="1.0" encoding="utf-8"?>
@@ -2409,6 +1851,204 @@
 </file>
 
 <file path=ppt/notesSlides/notesSlide36.xml><?xml version="1.0" encoding="utf-8"?>
+<p:notes xmlns:a="http://schemas.openxmlformats.org/drawingml/2006/main" xmlns:p="http://schemas.openxmlformats.org/presentationml/2006/main" xmlns:r="http://schemas.openxmlformats.org/officeDocument/2006/relationships">
+  <p:cSld>
+    <p:spTree>
+      <p:nvGrpSpPr>
+        <p:cNvPr id="1" name=""/>
+        <p:cNvGrpSpPr/>
+        <p:nvPr/>
+      </p:nvGrpSpPr>
+      <p:grpSpPr>
+        <a:xfrm>
+          <a:off x="0" y="0"/>
+          <a:ext cx="0" cy="0"/>
+          <a:chOff x="0" y="0"/>
+          <a:chExt cx="0" cy="0"/>
+        </a:xfrm>
+      </p:grpSpPr>
+      <p:sp>
+        <p:nvSpPr>
+          <p:cNvPr id="2" name="Slide Image Placeholder 1"/>
+          <p:cNvSpPr>
+            <a:spLocks noGrp="1"/>
+          </p:cNvSpPr>
+          <p:nvPr>
+            <p:ph type="sldImg" idx="3"/>
+          </p:nvPr>
+        </p:nvSpPr>
+        <p:spPr/>
+      </p:sp>
+      <p:sp>
+        <p:nvSpPr>
+          <p:cNvPr id="3" name="Notes Placeholder 2"/>
+          <p:cNvSpPr>
+            <a:spLocks noGrp="1"/>
+          </p:cNvSpPr>
+          <p:nvPr>
+            <p:ph type="body" idx="1"/>
+          </p:nvPr>
+        </p:nvSpPr>
+        <p:spPr/>
+        <p:txBody>
+          <a:bodyPr/>
+          <a:lstStyle/>
+          <a:p/>
+        </p:txBody>
+      </p:sp>
+      <p:sp>
+        <p:nvSpPr>
+          <p:cNvPr id="4" name="Slide Number Placeholder 3"/>
+          <p:cNvSpPr>
+            <a:spLocks noGrp="1"/>
+          </p:cNvSpPr>
+          <p:nvPr>
+            <p:ph type="sldNum" idx="12"/>
+          </p:nvPr>
+        </p:nvSpPr>
+        <p:spPr/>
+      </p:sp>
+    </p:spTree>
+  </p:cSld>
+  <p:clrMapOvr>
+    <a:masterClrMapping/>
+  </p:clrMapOvr>
+</p:notes>
+</file>
+
+<file path=ppt/notesSlides/notesSlide37.xml><?xml version="1.0" encoding="utf-8"?>
+<p:notes xmlns:a="http://schemas.openxmlformats.org/drawingml/2006/main" xmlns:p="http://schemas.openxmlformats.org/presentationml/2006/main" xmlns:r="http://schemas.openxmlformats.org/officeDocument/2006/relationships">
+  <p:cSld>
+    <p:spTree>
+      <p:nvGrpSpPr>
+        <p:cNvPr id="1" name=""/>
+        <p:cNvGrpSpPr/>
+        <p:nvPr/>
+      </p:nvGrpSpPr>
+      <p:grpSpPr>
+        <a:xfrm>
+          <a:off x="0" y="0"/>
+          <a:ext cx="0" cy="0"/>
+          <a:chOff x="0" y="0"/>
+          <a:chExt cx="0" cy="0"/>
+        </a:xfrm>
+      </p:grpSpPr>
+      <p:sp>
+        <p:nvSpPr>
+          <p:cNvPr id="2" name="Slide Image Placeholder 1"/>
+          <p:cNvSpPr>
+            <a:spLocks noGrp="1"/>
+          </p:cNvSpPr>
+          <p:nvPr>
+            <p:ph type="sldImg" idx="3"/>
+          </p:nvPr>
+        </p:nvSpPr>
+        <p:spPr/>
+      </p:sp>
+      <p:sp>
+        <p:nvSpPr>
+          <p:cNvPr id="3" name="Notes Placeholder 2"/>
+          <p:cNvSpPr>
+            <a:spLocks noGrp="1"/>
+          </p:cNvSpPr>
+          <p:nvPr>
+            <p:ph type="body" idx="1"/>
+          </p:nvPr>
+        </p:nvSpPr>
+        <p:spPr/>
+        <p:txBody>
+          <a:bodyPr/>
+          <a:lstStyle/>
+          <a:p/>
+        </p:txBody>
+      </p:sp>
+      <p:sp>
+        <p:nvSpPr>
+          <p:cNvPr id="4" name="Slide Number Placeholder 3"/>
+          <p:cNvSpPr>
+            <a:spLocks noGrp="1"/>
+          </p:cNvSpPr>
+          <p:nvPr>
+            <p:ph type="sldNum" idx="12"/>
+          </p:nvPr>
+        </p:nvSpPr>
+        <p:spPr/>
+      </p:sp>
+    </p:spTree>
+  </p:cSld>
+  <p:clrMapOvr>
+    <a:masterClrMapping/>
+  </p:clrMapOvr>
+</p:notes>
+</file>
+
+<file path=ppt/notesSlides/notesSlide38.xml><?xml version="1.0" encoding="utf-8"?>
+<p:notes xmlns:a="http://schemas.openxmlformats.org/drawingml/2006/main" xmlns:p="http://schemas.openxmlformats.org/presentationml/2006/main" xmlns:r="http://schemas.openxmlformats.org/officeDocument/2006/relationships">
+  <p:cSld>
+    <p:spTree>
+      <p:nvGrpSpPr>
+        <p:cNvPr id="1" name=""/>
+        <p:cNvGrpSpPr/>
+        <p:nvPr/>
+      </p:nvGrpSpPr>
+      <p:grpSpPr>
+        <a:xfrm>
+          <a:off x="0" y="0"/>
+          <a:ext cx="0" cy="0"/>
+          <a:chOff x="0" y="0"/>
+          <a:chExt cx="0" cy="0"/>
+        </a:xfrm>
+      </p:grpSpPr>
+      <p:sp>
+        <p:nvSpPr>
+          <p:cNvPr id="2" name="Slide Image Placeholder 1"/>
+          <p:cNvSpPr>
+            <a:spLocks noGrp="1"/>
+          </p:cNvSpPr>
+          <p:nvPr>
+            <p:ph type="sldImg" idx="3"/>
+          </p:nvPr>
+        </p:nvSpPr>
+        <p:spPr/>
+      </p:sp>
+      <p:sp>
+        <p:nvSpPr>
+          <p:cNvPr id="3" name="Notes Placeholder 2"/>
+          <p:cNvSpPr>
+            <a:spLocks noGrp="1"/>
+          </p:cNvSpPr>
+          <p:nvPr>
+            <p:ph type="body" idx="1"/>
+          </p:nvPr>
+        </p:nvSpPr>
+        <p:spPr/>
+        <p:txBody>
+          <a:bodyPr/>
+          <a:lstStyle/>
+          <a:p/>
+        </p:txBody>
+      </p:sp>
+      <p:sp>
+        <p:nvSpPr>
+          <p:cNvPr id="4" name="Slide Number Placeholder 3"/>
+          <p:cNvSpPr>
+            <a:spLocks noGrp="1"/>
+          </p:cNvSpPr>
+          <p:nvPr>
+            <p:ph type="sldNum" idx="12"/>
+          </p:nvPr>
+        </p:nvSpPr>
+        <p:spPr/>
+      </p:sp>
+    </p:spTree>
+  </p:cSld>
+  <p:clrMapOvr>
+    <a:masterClrMapping/>
+  </p:clrMapOvr>
+</p:notes>
+</file>
+
+<file path=ppt/notesSlides/notesSlide39.xml><?xml version="1.0" encoding="utf-8"?>
 <p:notes xmlns:a="http://schemas.openxmlformats.org/drawingml/2006/main" xmlns:p="http://schemas.openxmlformats.org/presentationml/2006/main" xmlns:r="http://schemas.openxmlformats.org/officeDocument/2006/relationships">
   <p:cSld>
     <p:spTree>
@@ -6751,7 +6391,7 @@
                 <a:ea typeface="Play"/>
                 <a:cs typeface="Play"/>
               </a:rPr>
-              <a:t>Защита инициативы: сервис автоматической вёрстки презентаций</a:t>
+              <a:t>Автоматическая вёрстка презентаций</a:t>
             </a:r>
           </a:p>
         </p:txBody>
@@ -6825,7 +6465,7 @@
       </p:sp>
       <p:graphicFrame>
         <p:nvGraphicFramePr>
-          <p:cNvPr id="3" name="Chart 2"/>
+          <p:cNvPr id="3" name="Table 2"/>
           <p:cNvGraphicFramePr>
             <a:graphicFrameLocks noGrp="1"/>
           </p:cNvGraphicFramePr>
@@ -6836,8 +6476,340 @@
           <a:ext cx="11310884" cy="2337343"/>
         </p:xfrm>
         <a:graphic>
-          <a:graphicData uri="http://schemas.openxmlformats.org/drawingml/2006/chart">
-            <c:chart xmlns:c="http://schemas.openxmlformats.org/drawingml/2006/chart" r:id="rId2"/>
+          <a:graphicData uri="http://schemas.openxmlformats.org/drawingml/2006/table">
+            <a:tbl>
+              <a:tblPr firstRow="1" bandRow="1">
+                <a:tableStyleId>{5C22544A-7EE6-4342-B048-85BDC9FD1C3A}</a:tableStyleId>
+              </a:tblPr>
+              <a:tblGrid>
+                <a:gridCol w="5655442"/>
+                <a:gridCol w="5655442"/>
+              </a:tblGrid>
+              <a:tr h="389557">
+                <a:tc>
+                  <a:txBody>
+                    <a:bodyPr/>
+                    <a:lstStyle/>
+                    <a:p>
+                      <a:pPr>
+                        <a:defRPr sz="1300" b="1">
+                          <a:solidFill>
+                            <a:srgbClr val="FFFFFF"/>
+                          </a:solidFill>
+                          <a:latin typeface="Play"/>
+                          <a:ea typeface="Play"/>
+                          <a:cs typeface="Play"/>
+                        </a:defRPr>
+                      </a:pPr>
+                      <a:r>
+                        <a:t>Показатель</a:t>
+                      </a:r>
+                    </a:p>
+                  </a:txBody>
+                  <a:tcPr>
+                    <a:solidFill>
+                      <a:srgbClr val="0077FF"/>
+                    </a:solidFill>
+                  </a:tcPr>
+                </a:tc>
+                <a:tc>
+                  <a:txBody>
+                    <a:bodyPr/>
+                    <a:lstStyle/>
+                    <a:p>
+                      <a:pPr>
+                        <a:defRPr sz="1300" b="1">
+                          <a:solidFill>
+                            <a:srgbClr val="FFFFFF"/>
+                          </a:solidFill>
+                          <a:latin typeface="Play"/>
+                          <a:ea typeface="Play"/>
+                          <a:cs typeface="Play"/>
+                        </a:defRPr>
+                      </a:pPr>
+                      <a:r>
+                        <a:t>Значение</a:t>
+                      </a:r>
+                    </a:p>
+                  </a:txBody>
+                  <a:tcPr>
+                    <a:solidFill>
+                      <a:srgbClr val="0077FF"/>
+                    </a:solidFill>
+                  </a:tcPr>
+                </a:tc>
+              </a:tr>
+              <a:tr h="389557">
+                <a:tc>
+                  <a:txBody>
+                    <a:bodyPr/>
+                    <a:lstStyle/>
+                    <a:p>
+                      <a:pPr>
+                        <a:defRPr sz="1300" b="0">
+                          <a:solidFill>
+                            <a:srgbClr val="FFFFFF"/>
+                          </a:solidFill>
+                          <a:latin typeface="Play"/>
+                          <a:ea typeface="Play"/>
+                          <a:cs typeface="Play"/>
+                        </a:defRPr>
+                      </a:pPr>
+                      <a:r>
+                        <a:t>Сборка</a:t>
+                      </a:r>
+                    </a:p>
+                  </a:txBody>
+                  <a:tcPr>
+                    <a:solidFill>
+                      <a:srgbClr val="111111"/>
+                    </a:solidFill>
+                  </a:tcPr>
+                </a:tc>
+                <a:tc>
+                  <a:txBody>
+                    <a:bodyPr/>
+                    <a:lstStyle/>
+                    <a:p>
+                      <a:pPr>
+                        <a:defRPr sz="1300" b="0">
+                          <a:solidFill>
+                            <a:srgbClr val="FFFFFF"/>
+                          </a:solidFill>
+                          <a:latin typeface="Play"/>
+                          <a:ea typeface="Play"/>
+                          <a:cs typeface="Play"/>
+                        </a:defRPr>
+                      </a:pPr>
+                      <a:r>
+                        <a:t>186 мин</a:t>
+                      </a:r>
+                    </a:p>
+                  </a:txBody>
+                  <a:tcPr>
+                    <a:solidFill>
+                      <a:srgbClr val="111111"/>
+                    </a:solidFill>
+                  </a:tcPr>
+                </a:tc>
+              </a:tr>
+              <a:tr h="389557">
+                <a:tc>
+                  <a:txBody>
+                    <a:bodyPr/>
+                    <a:lstStyle/>
+                    <a:p>
+                      <a:pPr>
+                        <a:defRPr sz="1300" b="0">
+                          <a:solidFill>
+                            <a:srgbClr val="FFFFFF"/>
+                          </a:solidFill>
+                          <a:latin typeface="Play"/>
+                          <a:ea typeface="Play"/>
+                          <a:cs typeface="Play"/>
+                        </a:defRPr>
+                      </a:pPr>
+                      <a:r>
+                        <a:t>Правки</a:t>
+                      </a:r>
+                    </a:p>
+                  </a:txBody>
+                  <a:tcPr>
+                    <a:solidFill>
+                      <a:srgbClr val="111111"/>
+                    </a:solidFill>
+                  </a:tcPr>
+                </a:tc>
+                <a:tc>
+                  <a:txBody>
+                    <a:bodyPr/>
+                    <a:lstStyle/>
+                    <a:p>
+                      <a:pPr>
+                        <a:defRPr sz="1300" b="0">
+                          <a:solidFill>
+                            <a:srgbClr val="FFFFFF"/>
+                          </a:solidFill>
+                          <a:latin typeface="Play"/>
+                          <a:ea typeface="Play"/>
+                          <a:cs typeface="Play"/>
+                        </a:defRPr>
+                      </a:pPr>
+                      <a:r>
+                        <a:t>74 мин</a:t>
+                      </a:r>
+                    </a:p>
+                  </a:txBody>
+                  <a:tcPr>
+                    <a:solidFill>
+                      <a:srgbClr val="111111"/>
+                    </a:solidFill>
+                  </a:tcPr>
+                </a:tc>
+              </a:tr>
+              <a:tr h="389557">
+                <a:tc>
+                  <a:txBody>
+                    <a:bodyPr/>
+                    <a:lstStyle/>
+                    <a:p>
+                      <a:pPr>
+                        <a:defRPr sz="1300" b="0">
+                          <a:solidFill>
+                            <a:srgbClr val="FFFFFF"/>
+                          </a:solidFill>
+                          <a:latin typeface="Play"/>
+                          <a:ea typeface="Play"/>
+                          <a:cs typeface="Play"/>
+                        </a:defRPr>
+                      </a:pPr>
+                      <a:r>
+                        <a:t>Нарушения</a:t>
+                      </a:r>
+                    </a:p>
+                  </a:txBody>
+                  <a:tcPr>
+                    <a:solidFill>
+                      <a:srgbClr val="111111"/>
+                    </a:solidFill>
+                  </a:tcPr>
+                </a:tc>
+                <a:tc>
+                  <a:txBody>
+                    <a:bodyPr/>
+                    <a:lstStyle/>
+                    <a:p>
+                      <a:pPr>
+                        <a:defRPr sz="1300" b="0">
+                          <a:solidFill>
+                            <a:srgbClr val="FFFFFF"/>
+                          </a:solidFill>
+                          <a:latin typeface="Play"/>
+                          <a:ea typeface="Play"/>
+                          <a:cs typeface="Play"/>
+                        </a:defRPr>
+                      </a:pPr>
+                      <a:r>
+                        <a:t>19 из 42</a:t>
+                      </a:r>
+                    </a:p>
+                  </a:txBody>
+                  <a:tcPr>
+                    <a:solidFill>
+                      <a:srgbClr val="111111"/>
+                    </a:solidFill>
+                  </a:tcPr>
+                </a:tc>
+              </a:tr>
+              <a:tr h="389557">
+                <a:tc>
+                  <a:txBody>
+                    <a:bodyPr/>
+                    <a:lstStyle/>
+                    <a:p>
+                      <a:pPr>
+                        <a:defRPr sz="1300" b="0">
+                          <a:solidFill>
+                            <a:srgbClr val="FFFFFF"/>
+                          </a:solidFill>
+                          <a:latin typeface="Play"/>
+                          <a:ea typeface="Play"/>
+                          <a:cs typeface="Play"/>
+                        </a:defRPr>
+                      </a:pPr>
+                      <a:r>
+                        <a:t>Запросы</a:t>
+                      </a:r>
+                    </a:p>
+                  </a:txBody>
+                  <a:tcPr>
+                    <a:solidFill>
+                      <a:srgbClr val="111111"/>
+                    </a:solidFill>
+                  </a:tcPr>
+                </a:tc>
+                <a:tc>
+                  <a:txBody>
+                    <a:bodyPr/>
+                    <a:lstStyle/>
+                    <a:p>
+                      <a:pPr>
+                        <a:defRPr sz="1300" b="0">
+                          <a:solidFill>
+                            <a:srgbClr val="FFFFFF"/>
+                          </a:solidFill>
+                          <a:latin typeface="Play"/>
+                          <a:ea typeface="Play"/>
+                          <a:cs typeface="Play"/>
+                        </a:defRPr>
+                      </a:pPr>
+                      <a:r>
+                        <a:t>11/нед</a:t>
+                      </a:r>
+                    </a:p>
+                  </a:txBody>
+                  <a:tcPr>
+                    <a:solidFill>
+                      <a:srgbClr val="111111"/>
+                    </a:solidFill>
+                  </a:tcPr>
+                </a:tc>
+              </a:tr>
+              <a:tr h="389558">
+                <a:tc>
+                  <a:txBody>
+                    <a:bodyPr/>
+                    <a:lstStyle/>
+                    <a:p>
+                      <a:pPr>
+                        <a:defRPr sz="1300" b="0">
+                          <a:solidFill>
+                            <a:srgbClr val="FFFFFF"/>
+                          </a:solidFill>
+                          <a:latin typeface="Play"/>
+                          <a:ea typeface="Play"/>
+                          <a:cs typeface="Play"/>
+                        </a:defRPr>
+                      </a:pPr>
+                      <a:r>
+                        <a:t>Ожидание</a:t>
+                      </a:r>
+                    </a:p>
+                  </a:txBody>
+                  <a:tcPr>
+                    <a:solidFill>
+                      <a:srgbClr val="111111"/>
+                    </a:solidFill>
+                  </a:tcPr>
+                </a:tc>
+                <a:tc>
+                  <a:txBody>
+                    <a:bodyPr/>
+                    <a:lstStyle/>
+                    <a:p>
+                      <a:pPr>
+                        <a:defRPr sz="1300" b="0">
+                          <a:solidFill>
+                            <a:srgbClr val="FFFFFF"/>
+                          </a:solidFill>
+                          <a:latin typeface="Play"/>
+                          <a:ea typeface="Play"/>
+                          <a:cs typeface="Play"/>
+                        </a:defRPr>
+                      </a:pPr>
+                      <a:r>
+                        <a:t>6 дней</a:t>
+                      </a:r>
+                    </a:p>
+                  </a:txBody>
+                  <a:tcPr>
+                    <a:solidFill>
+                      <a:srgbClr val="111111"/>
+                    </a:solidFill>
+                  </a:tcPr>
+                </a:tc>
+              </a:tr>
+            </a:tbl>
           </a:graphicData>
         </a:graphic>
       </p:graphicFrame>
@@ -6885,7 +6857,7 @@
                 <a:ea typeface="Play"/>
                 <a:cs typeface="Play"/>
               </a:rPr>
-              <a:t>• 12‑слайдная колода занимает 186 мин</a:t>
+              <a:t>• 42 колоды, 186 мин сборки</a:t>
             </a:r>
           </a:p>
           <a:p>
@@ -6911,7 +6883,7 @@
                 <a:ea typeface="Play"/>
                 <a:cs typeface="Play"/>
               </a:rPr>
-              <a:t>• 74 мин на правки после ревью</a:t>
+              <a:t>• 74 мин правок</a:t>
             </a:r>
           </a:p>
           <a:p>
@@ -6937,7 +6909,7 @@
                 <a:ea typeface="Play"/>
                 <a:cs typeface="Play"/>
               </a:rPr>
-              <a:t>• 19 из 42 колод нарушают фирменный стиль</a:t>
+              <a:t>• 19 нарушений фирменного стиля</a:t>
             </a:r>
           </a:p>
           <a:p>
@@ -6963,33 +6935,7 @@
                 <a:ea typeface="Play"/>
                 <a:cs typeface="Play"/>
               </a:rPr>
-              <a:t>• 4 чел. закрывают 11 запросов/нед</a:t>
-            </a:r>
-          </a:p>
-          <a:p>
-            <a:pPr algn="l">
-              <a:spcAft>
-                <a:spcPts val="300"/>
-              </a:spcAft>
-              <a:defRPr sz="1600">
-                <a:solidFill>
-                  <a:srgbClr val="FFFFFF"/>
-                </a:solidFill>
-                <a:latin typeface="Play"/>
-                <a:ea typeface="Play"/>
-                <a:cs typeface="Play"/>
-              </a:defRPr>
-            </a:pPr>
-            <a:r>
-              <a:rPr sz="1600">
-                <a:solidFill>
-                  <a:srgbClr val="FFFFFF"/>
-                </a:solidFill>
-                <a:latin typeface="Play"/>
-                <a:ea typeface="Play"/>
-                <a:cs typeface="Play"/>
-              </a:rPr>
-              <a:t>• Средний срок ожидания 6 рабочих дней</a:t>
+              <a:t>• 4 человека, 11 запросов/нед, 6 дней ожидания</a:t>
             </a:r>
           </a:p>
         </p:txBody>
@@ -7085,7 +7031,7 @@
         <p:spPr>
           <a:xfrm>
             <a:off x="300817" y="297715"/>
-            <a:ext cx="11566347" cy="5411957"/>
+            <a:ext cx="11566347" cy="5311465"/>
           </a:xfrm>
           <a:prstGeom prst="roundRect">
             <a:avLst/>
@@ -7179,8 +7125,8 @@
         </p:nvSpPr>
         <p:spPr>
           <a:xfrm>
-            <a:off x="427817" y="2429574"/>
-            <a:ext cx="1772267" cy="1098805"/>
+            <a:off x="427817" y="2459151"/>
+            <a:ext cx="2153870" cy="1335399"/>
           </a:xfrm>
           <a:prstGeom prst="homePlate">
             <a:avLst/>
@@ -7211,7 +7157,7 @@
           <a:lstStyle/>
           <a:p>
             <a:pPr algn="ctr">
-              <a:defRPr sz="868" b="0">
+              <a:defRPr sz="1143" b="0">
                 <a:solidFill>
                   <a:srgbClr val="FFFFFF"/>
                 </a:solidFill>
@@ -7221,7 +7167,7 @@
               </a:defRPr>
             </a:pPr>
             <a:r>
-              <a:rPr sz="868" b="0">
+              <a:rPr sz="1143" b="0">
                 <a:solidFill>
                   <a:srgbClr val="FFFFFF"/>
                 </a:solidFill>
@@ -7229,7 +7175,7 @@
                 <a:ea typeface="Play"/>
                 <a:cs typeface="Play"/>
               </a:rPr>
-              <a:t>Загрузка шаблона</a:t>
+              <a:t>Шаблон</a:t>
             </a:r>
           </a:p>
         </p:txBody>
@@ -7242,8 +7188,8 @@
         </p:nvSpPr>
         <p:spPr>
           <a:xfrm>
-            <a:off x="2335832" y="2429574"/>
-            <a:ext cx="1772267" cy="1098805"/>
+            <a:off x="2717436" y="2459151"/>
+            <a:ext cx="2153870" cy="1335399"/>
           </a:xfrm>
           <a:prstGeom prst="chevron">
             <a:avLst/>
@@ -7274,7 +7220,7 @@
           <a:lstStyle/>
           <a:p>
             <a:pPr algn="ctr">
-              <a:defRPr sz="600" b="0">
+              <a:defRPr sz="1143" b="0">
                 <a:solidFill>
                   <a:srgbClr val="FFFFFF"/>
                 </a:solidFill>
@@ -7284,7 +7230,7 @@
               </a:defRPr>
             </a:pPr>
             <a:r>
-              <a:rPr sz="600" b="0">
+              <a:rPr sz="1143" b="0">
                 <a:solidFill>
                   <a:srgbClr val="FFFFFF"/>
                 </a:solidFill>
@@ -7292,7 +7238,7 @@
                 <a:ea typeface="Play"/>
                 <a:cs typeface="Play"/>
               </a:rPr>
-              <a:t>Разбор дизайн‑системы</a:t>
+              <a:t>План колоды</a:t>
             </a:r>
           </a:p>
         </p:txBody>
@@ -7305,8 +7251,8 @@
         </p:nvSpPr>
         <p:spPr>
           <a:xfrm>
-            <a:off x="4243848" y="2429574"/>
-            <a:ext cx="1772267" cy="1098805"/>
+            <a:off x="5007055" y="2459151"/>
+            <a:ext cx="2153870" cy="1335399"/>
           </a:xfrm>
           <a:prstGeom prst="chevron">
             <a:avLst/>
@@ -7337,7 +7283,7 @@
           <a:lstStyle/>
           <a:p>
             <a:pPr algn="ctr">
-              <a:defRPr sz="694" b="0">
+              <a:defRPr sz="1143" b="0">
                 <a:solidFill>
                   <a:srgbClr val="FFFFFF"/>
                 </a:solidFill>
@@ -7347,7 +7293,7 @@
               </a:defRPr>
             </a:pPr>
             <a:r>
-              <a:rPr sz="694" b="0">
+              <a:rPr sz="1143" b="0">
                 <a:solidFill>
                   <a:srgbClr val="FFFFFF"/>
                 </a:solidFill>
@@ -7355,7 +7301,7 @@
                 <a:ea typeface="Play"/>
                 <a:cs typeface="Play"/>
               </a:rPr>
-              <a:t>Построение плана колоды</a:t>
+              <a:t>Вёрстка</a:t>
             </a:r>
           </a:p>
         </p:txBody>
@@ -7368,8 +7314,8 @@
         </p:nvSpPr>
         <p:spPr>
           <a:xfrm>
-            <a:off x="6151864" y="2429574"/>
-            <a:ext cx="1772267" cy="1098805"/>
+            <a:off x="7296674" y="2459151"/>
+            <a:ext cx="2153870" cy="1335399"/>
           </a:xfrm>
           <a:prstGeom prst="chevron">
             <a:avLst/>
@@ -7400,7 +7346,7 @@
           <a:lstStyle/>
           <a:p>
             <a:pPr algn="ctr">
-              <a:defRPr sz="600" b="0">
+              <a:defRPr sz="1143" b="0">
                 <a:solidFill>
                   <a:srgbClr val="FFFFFF"/>
                 </a:solidFill>
@@ -7410,7 +7356,7 @@
               </a:defRPr>
             </a:pPr>
             <a:r>
-              <a:rPr sz="600" b="0">
+              <a:rPr sz="1143" b="0">
                 <a:solidFill>
                   <a:srgbClr val="FFFFFF"/>
                 </a:solidFill>
@@ -7418,7 +7364,7 @@
                 <a:ea typeface="Play"/>
                 <a:cs typeface="Play"/>
               </a:rPr>
-              <a:t>Авто‑верстка</a:t>
+              <a:t>Аудит</a:t>
             </a:r>
           </a:p>
         </p:txBody>
@@ -7431,8 +7377,8 @@
         </p:nvSpPr>
         <p:spPr>
           <a:xfrm>
-            <a:off x="8059880" y="2429574"/>
-            <a:ext cx="1772267" cy="1098805"/>
+            <a:off x="9586293" y="2459151"/>
+            <a:ext cx="2153870" cy="1335399"/>
           </a:xfrm>
           <a:prstGeom prst="chevron">
             <a:avLst/>
@@ -7463,7 +7409,7 @@
           <a:lstStyle/>
           <a:p>
             <a:pPr algn="ctr">
-              <a:defRPr sz="868" b="0">
+              <a:defRPr sz="1143" b="0">
                 <a:solidFill>
                   <a:srgbClr val="FFFFFF"/>
                 </a:solidFill>
@@ -7473,7 +7419,7 @@
               </a:defRPr>
             </a:pPr>
             <a:r>
-              <a:rPr sz="868" b="0">
+              <a:rPr sz="1143" b="0">
                 <a:solidFill>
                   <a:srgbClr val="FFFFFF"/>
                 </a:solidFill>
@@ -7481,84 +7427,21 @@
                 <a:ea typeface="Play"/>
                 <a:cs typeface="Play"/>
               </a:rPr>
-              <a:t>Аудит качества</a:t>
+              <a:t>Экспорт</a:t>
             </a:r>
           </a:p>
         </p:txBody>
       </p:sp>
       <p:sp>
         <p:nvSpPr>
-          <p:cNvPr id="687" name="Chevron 686"/>
-          <p:cNvSpPr/>
-          <p:nvPr/>
-        </p:nvSpPr>
-        <p:spPr>
-          <a:xfrm>
-            <a:off x="9967896" y="2429574"/>
-            <a:ext cx="1772267" cy="1098805"/>
-          </a:xfrm>
-          <a:prstGeom prst="chevron">
-            <a:avLst/>
-          </a:prstGeom>
-          <a:solidFill>
-            <a:srgbClr val="0077FF"/>
-          </a:solidFill>
-          <a:ln>
-            <a:noFill/>
-          </a:ln>
-        </p:spPr>
-        <p:style>
-          <a:lnRef idx="1">
-            <a:schemeClr val="accent1"/>
-          </a:lnRef>
-          <a:fillRef idx="3">
-            <a:schemeClr val="accent1"/>
-          </a:fillRef>
-          <a:effectRef idx="2">
-            <a:schemeClr val="accent1"/>
-          </a:effectRef>
-          <a:fontRef idx="minor">
-            <a:schemeClr val="lt1"/>
-          </a:fontRef>
-        </p:style>
-        <p:txBody>
-          <a:bodyPr rtlCol="0" anchor="ctr" wrap="square" lIns="12700" rIns="12700" tIns="12700" bIns="12700"/>
-          <a:lstStyle/>
-          <a:p>
-            <a:pPr algn="ctr">
-              <a:defRPr sz="694" b="0">
-                <a:solidFill>
-                  <a:srgbClr val="FFFFFF"/>
-                </a:solidFill>
-                <a:latin typeface="Play"/>
-                <a:ea typeface="Play"/>
-                <a:cs typeface="Play"/>
-              </a:defRPr>
-            </a:pPr>
-            <a:r>
-              <a:rPr sz="694" b="0">
-                <a:solidFill>
-                  <a:srgbClr val="FFFFFF"/>
-                </a:solidFill>
-                <a:latin typeface="Play"/>
-                <a:ea typeface="Play"/>
-                <a:cs typeface="Play"/>
-              </a:rPr>
-              <a:t>Экспорт результата</a:t>
-            </a:r>
-          </a:p>
-        </p:txBody>
-      </p:sp>
-      <p:sp>
-        <p:nvSpPr>
-          <p:cNvPr id="688" name="body"/>
+          <p:cNvPr id="687" name="body"/>
           <p:cNvSpPr txBox="1"/>
           <p:nvPr/>
         </p:nvSpPr>
         <p:spPr>
           <a:xfrm>
-            <a:off x="427817" y="4292353"/>
-            <a:ext cx="11312347" cy="1636867"/>
+            <a:off x="427817" y="4588101"/>
+            <a:ext cx="11312347" cy="1341120"/>
           </a:xfrm>
           <a:prstGeom prst="rect">
             <a:avLst/>
@@ -7575,7 +7458,7 @@
               <a:spcAft>
                 <a:spcPts val="300"/>
               </a:spcAft>
-              <a:defRPr sz="1800">
+              <a:defRPr sz="1600">
                 <a:solidFill>
                   <a:srgbClr val="FFFFFF"/>
                 </a:solidFill>
@@ -7585,7 +7468,7 @@
               </a:defRPr>
             </a:pPr>
             <a:r>
-              <a:rPr sz="1800">
+              <a:rPr sz="1600">
                 <a:solidFill>
                   <a:srgbClr val="FFFFFF"/>
                 </a:solidFill>
@@ -7593,7 +7476,7 @@
                 <a:ea typeface="Play"/>
                 <a:cs typeface="Play"/>
               </a:rPr>
-              <a:t>• Сервис принимает pptx, документы, таблицы, заметки</a:t>
+              <a:t>• Сервис принимает pptx, материалы, применяет дизайн‑систему</a:t>
             </a:r>
           </a:p>
           <a:p>
@@ -7601,7 +7484,7 @@
               <a:spcAft>
                 <a:spcPts val="300"/>
               </a:spcAft>
-              <a:defRPr sz="1800">
+              <a:defRPr sz="1600">
                 <a:solidFill>
                   <a:srgbClr val="FFFFFF"/>
                 </a:solidFill>
@@ -7611,7 +7494,7 @@
               </a:defRPr>
             </a:pPr>
             <a:r>
-              <a:rPr sz="1800">
+              <a:rPr sz="1600">
                 <a:solidFill>
                   <a:srgbClr val="FFFFFF"/>
                 </a:solidFill>
@@ -7619,7 +7502,7 @@
                 <a:ea typeface="Play"/>
                 <a:cs typeface="Play"/>
               </a:rPr>
-              <a:t>• Автоматически строит дизайн‑систему и план колоды</a:t>
+              <a:t>• Экспорт в pptx, pdf, html, слайды редактируемы</a:t>
             </a:r>
           </a:p>
           <a:p>
@@ -7627,7 +7510,7 @@
               <a:spcAft>
                 <a:spcPts val="300"/>
               </a:spcAft>
-              <a:defRPr sz="1800">
+              <a:defRPr sz="1600">
                 <a:solidFill>
                   <a:srgbClr val="FFFFFF"/>
                 </a:solidFill>
@@ -7637,7 +7520,7 @@
               </a:defRPr>
             </a:pPr>
             <a:r>
-              <a:rPr sz="1800">
+              <a:rPr sz="1600">
                 <a:solidFill>
                   <a:srgbClr val="FFFFFF"/>
                 </a:solidFill>
@@ -7645,33 +7528,7 @@
                 <a:ea typeface="Play"/>
                 <a:cs typeface="Play"/>
               </a:rPr>
-              <a:t>• Экспорт в pptx, pdf, html с редактируемыми слайдами</a:t>
-            </a:r>
-          </a:p>
-          <a:p>
-            <a:pPr algn="l">
-              <a:spcAft>
-                <a:spcPts val="300"/>
-              </a:spcAft>
-              <a:defRPr sz="1800">
-                <a:solidFill>
-                  <a:srgbClr val="FFFFFF"/>
-                </a:solidFill>
-                <a:latin typeface="Play"/>
-                <a:ea typeface="Play"/>
-                <a:cs typeface="Play"/>
-              </a:defRPr>
-            </a:pPr>
-            <a:r>
-              <a:rPr sz="1800">
-                <a:solidFill>
-                  <a:srgbClr val="FFFFFF"/>
-                </a:solidFill>
-                <a:latin typeface="Play"/>
-                <a:ea typeface="Play"/>
-                <a:cs typeface="Play"/>
-              </a:rPr>
-              <a:t>• Аудит качества проверяет стиль и данные до выдачи</a:t>
+              <a:t>• Аудит качества устраняет нарушения стиля</a:t>
             </a:r>
           </a:p>
         </p:txBody>
@@ -7774,7 +7631,7 @@
               <a:spcAft>
                 <a:spcPts val="300"/>
               </a:spcAft>
-              <a:defRPr sz="3200">
+              <a:defRPr sz="4000">
                 <a:solidFill>
                   <a:srgbClr val="FFFFFF"/>
                 </a:solidFill>
@@ -7784,7 +7641,7 @@
               </a:defRPr>
             </a:pPr>
             <a:r>
-              <a:rPr sz="3200">
+              <a:rPr sz="4000">
                 <a:solidFill>
                   <a:srgbClr val="FFFFFF"/>
                 </a:solidFill>
@@ -7792,39 +7649,21 @@
                 <a:ea typeface="Play"/>
                 <a:cs typeface="Play"/>
               </a:rPr>
-              <a:t>Ожидаемый эффект – Время</a:t>
+              <a:t>План пилота</a:t>
             </a:r>
           </a:p>
         </p:txBody>
       </p:sp>
-      <p:graphicFrame>
-        <p:nvGraphicFramePr>
-          <p:cNvPr id="623" name="Chart 622"/>
-          <p:cNvGraphicFramePr>
-            <a:graphicFrameLocks noGrp="1"/>
-          </p:cNvGraphicFramePr>
-          <p:nvPr/>
-        </p:nvGraphicFramePr>
-        <p:xfrm>
-          <a:off x="429280" y="1504165"/>
-          <a:ext cx="11310884" cy="2790398"/>
-        </p:xfrm>
-        <a:graphic>
-          <a:graphicData uri="http://schemas.openxmlformats.org/drawingml/2006/chart">
-            <c:chart xmlns:c="http://schemas.openxmlformats.org/drawingml/2006/chart" r:id="rId5"/>
-          </a:graphicData>
-        </a:graphic>
-      </p:graphicFrame>
       <p:sp>
         <p:nvSpPr>
-          <p:cNvPr id="624" name="body"/>
+          <p:cNvPr id="623" name="lead"/>
           <p:cNvSpPr txBox="1"/>
           <p:nvPr/>
         </p:nvSpPr>
         <p:spPr>
           <a:xfrm>
-            <a:off x="429280" y="4466013"/>
-            <a:ext cx="11310884" cy="944880"/>
+            <a:off x="429280" y="1504165"/>
+            <a:ext cx="7827264" cy="1476995"/>
           </a:xfrm>
           <a:prstGeom prst="rect">
             <a:avLst/>
@@ -7841,7 +7680,7 @@
               <a:spcAft>
                 <a:spcPts val="300"/>
               </a:spcAft>
-              <a:defRPr sz="2000">
+              <a:defRPr sz="5400">
                 <a:solidFill>
                   <a:srgbClr val="FFFFFF"/>
                 </a:solidFill>
@@ -7851,7 +7690,7 @@
               </a:defRPr>
             </a:pPr>
             <a:r>
-              <a:rPr sz="2000">
+              <a:rPr sz="5400">
                 <a:solidFill>
                   <a:srgbClr val="FFFFFF"/>
                 </a:solidFill>
@@ -7859,15 +7698,38 @@
                 <a:ea typeface="Play"/>
                 <a:cs typeface="Play"/>
               </a:rPr>
-              <a:t>• Время сборки колоды 12 слайдов сократилось с 186 до 4 мин</a:t>
+              <a:t>6 недель</a:t>
             </a:r>
           </a:p>
+        </p:txBody>
+      </p:sp>
+      <p:sp>
+        <p:nvSpPr>
+          <p:cNvPr id="624" name="body"/>
+          <p:cNvSpPr txBox="1"/>
+          <p:nvPr/>
+        </p:nvSpPr>
+        <p:spPr>
+          <a:xfrm>
+            <a:off x="429280" y="3215564"/>
+            <a:ext cx="7827264" cy="2195329"/>
+          </a:xfrm>
+          <a:prstGeom prst="rect">
+            <a:avLst/>
+          </a:prstGeom>
+          <a:noFill/>
+        </p:spPr>
+        <p:txBody>
+          <a:bodyPr wrap="square" lIns="76200" rIns="76200" tIns="50800" bIns="50800">
+            <a:spAutoFit/>
+          </a:bodyPr>
+          <a:lstStyle/>
           <a:p>
             <a:pPr algn="l">
               <a:spcAft>
                 <a:spcPts val="300"/>
               </a:spcAft>
-              <a:defRPr sz="2000">
+              <a:defRPr sz="4000">
                 <a:solidFill>
                   <a:srgbClr val="FFFFFF"/>
                 </a:solidFill>
@@ -7877,7 +7739,7 @@
               </a:defRPr>
             </a:pPr>
             <a:r>
-              <a:rPr sz="2000">
+              <a:rPr sz="4000">
                 <a:solidFill>
                   <a:srgbClr val="FFFFFF"/>
                 </a:solidFill>
@@ -7885,7 +7747,33 @@
                 <a:ea typeface="Play"/>
                 <a:cs typeface="Play"/>
               </a:rPr>
-              <a:t>• Первый готовый вариант доступен за 1 день вместо 6</a:t>
+              <a:t>• 2 команды</a:t>
+            </a:r>
+          </a:p>
+          <a:p>
+            <a:pPr algn="l">
+              <a:spcAft>
+                <a:spcPts val="300"/>
+              </a:spcAft>
+              <a:defRPr sz="4000">
+                <a:solidFill>
+                  <a:srgbClr val="FFFFFF"/>
+                </a:solidFill>
+                <a:latin typeface="Play"/>
+                <a:ea typeface="Play"/>
+                <a:cs typeface="Play"/>
+              </a:defRPr>
+            </a:pPr>
+            <a:r>
+              <a:rPr sz="4000">
+                <a:solidFill>
+                  <a:srgbClr val="FFFFFF"/>
+                </a:solidFill>
+                <a:latin typeface="Play"/>
+                <a:ea typeface="Play"/>
+                <a:cs typeface="Play"/>
+              </a:rPr>
+              <a:t>• 68 презентаций</a:t>
             </a:r>
           </a:p>
         </p:txBody>
@@ -7952,14 +7840,14 @@
                 <a:ea typeface="Play"/>
                 <a:cs typeface="Play"/>
               </a:rPr>
-              <a:t>Ожидаемый эффект – Нарушения</a:t>
+              <a:t>Результаты пилота</a:t>
             </a:r>
           </a:p>
         </p:txBody>
       </p:sp>
       <p:graphicFrame>
         <p:nvGraphicFramePr>
-          <p:cNvPr id="3" name="Chart 2"/>
+          <p:cNvPr id="3" name="Table 2"/>
           <p:cNvGraphicFramePr>
             <a:graphicFrameLocks noGrp="1"/>
           </p:cNvGraphicFramePr>
@@ -7967,11 +7855,420 @@
         </p:nvGraphicFramePr>
         <p:xfrm>
           <a:off x="429280" y="1492575"/>
-          <a:ext cx="11310884" cy="2898274"/>
+          <a:ext cx="11310884" cy="2237312"/>
         </p:xfrm>
         <a:graphic>
-          <a:graphicData uri="http://schemas.openxmlformats.org/drawingml/2006/chart">
-            <c:chart xmlns:c="http://schemas.openxmlformats.org/drawingml/2006/chart" r:id="rId4"/>
+          <a:graphicData uri="http://schemas.openxmlformats.org/drawingml/2006/table">
+            <a:tbl>
+              <a:tblPr firstRow="1" bandRow="1">
+                <a:tableStyleId>{5C22544A-7EE6-4342-B048-85BDC9FD1C3A}</a:tableStyleId>
+              </a:tblPr>
+              <a:tblGrid>
+                <a:gridCol w="3770294"/>
+                <a:gridCol w="3770294"/>
+                <a:gridCol w="3770296"/>
+              </a:tblGrid>
+              <a:tr h="447462">
+                <a:tc>
+                  <a:txBody>
+                    <a:bodyPr/>
+                    <a:lstStyle/>
+                    <a:p>
+                      <a:pPr>
+                        <a:defRPr sz="1300" b="1">
+                          <a:solidFill>
+                            <a:srgbClr val="FFFFFF"/>
+                          </a:solidFill>
+                          <a:latin typeface="Play"/>
+                          <a:ea typeface="Play"/>
+                          <a:cs typeface="Play"/>
+                        </a:defRPr>
+                      </a:pPr>
+                      <a:r>
+                        <a:t>Показатель</a:t>
+                      </a:r>
+                    </a:p>
+                  </a:txBody>
+                  <a:tcPr>
+                    <a:solidFill>
+                      <a:srgbClr val="0077FF"/>
+                    </a:solidFill>
+                  </a:tcPr>
+                </a:tc>
+                <a:tc>
+                  <a:txBody>
+                    <a:bodyPr/>
+                    <a:lstStyle/>
+                    <a:p>
+                      <a:pPr>
+                        <a:defRPr sz="1300" b="1">
+                          <a:solidFill>
+                            <a:srgbClr val="FFFFFF"/>
+                          </a:solidFill>
+                          <a:latin typeface="Play"/>
+                          <a:ea typeface="Play"/>
+                          <a:cs typeface="Play"/>
+                        </a:defRPr>
+                      </a:pPr>
+                      <a:r>
+                        <a:t>До пилота</a:t>
+                      </a:r>
+                    </a:p>
+                  </a:txBody>
+                  <a:tcPr>
+                    <a:solidFill>
+                      <a:srgbClr val="0077FF"/>
+                    </a:solidFill>
+                  </a:tcPr>
+                </a:tc>
+                <a:tc>
+                  <a:txBody>
+                    <a:bodyPr/>
+                    <a:lstStyle/>
+                    <a:p>
+                      <a:pPr>
+                        <a:defRPr sz="1300" b="1">
+                          <a:solidFill>
+                            <a:srgbClr val="FFFFFF"/>
+                          </a:solidFill>
+                          <a:latin typeface="Play"/>
+                          <a:ea typeface="Play"/>
+                          <a:cs typeface="Play"/>
+                        </a:defRPr>
+                      </a:pPr>
+                      <a:r>
+                        <a:t>После пилота</a:t>
+                      </a:r>
+                    </a:p>
+                  </a:txBody>
+                  <a:tcPr>
+                    <a:solidFill>
+                      <a:srgbClr val="0077FF"/>
+                    </a:solidFill>
+                  </a:tcPr>
+                </a:tc>
+              </a:tr>
+              <a:tr h="447462">
+                <a:tc>
+                  <a:txBody>
+                    <a:bodyPr/>
+                    <a:lstStyle/>
+                    <a:p>
+                      <a:pPr>
+                        <a:defRPr sz="1300" b="0">
+                          <a:solidFill>
+                            <a:srgbClr val="FFFFFF"/>
+                          </a:solidFill>
+                          <a:latin typeface="Play"/>
+                          <a:ea typeface="Play"/>
+                          <a:cs typeface="Play"/>
+                        </a:defRPr>
+                      </a:pPr>
+                      <a:r>
+                        <a:t>Сборка</a:t>
+                      </a:r>
+                    </a:p>
+                  </a:txBody>
+                  <a:tcPr>
+                    <a:solidFill>
+                      <a:srgbClr val="111111"/>
+                    </a:solidFill>
+                  </a:tcPr>
+                </a:tc>
+                <a:tc>
+                  <a:txBody>
+                    <a:bodyPr/>
+                    <a:lstStyle/>
+                    <a:p>
+                      <a:pPr>
+                        <a:defRPr sz="1300" b="0">
+                          <a:solidFill>
+                            <a:srgbClr val="FFFFFF"/>
+                          </a:solidFill>
+                          <a:latin typeface="Play"/>
+                          <a:ea typeface="Play"/>
+                          <a:cs typeface="Play"/>
+                        </a:defRPr>
+                      </a:pPr>
+                      <a:r>
+                        <a:t>186 мин</a:t>
+                      </a:r>
+                    </a:p>
+                  </a:txBody>
+                  <a:tcPr>
+                    <a:solidFill>
+                      <a:srgbClr val="111111"/>
+                    </a:solidFill>
+                  </a:tcPr>
+                </a:tc>
+                <a:tc>
+                  <a:txBody>
+                    <a:bodyPr/>
+                    <a:lstStyle/>
+                    <a:p>
+                      <a:pPr>
+                        <a:defRPr sz="1300" b="0">
+                          <a:solidFill>
+                            <a:srgbClr val="FFFFFF"/>
+                          </a:solidFill>
+                          <a:latin typeface="Play"/>
+                          <a:ea typeface="Play"/>
+                          <a:cs typeface="Play"/>
+                        </a:defRPr>
+                      </a:pPr>
+                      <a:r>
+                        <a:t>4 мин</a:t>
+                      </a:r>
+                    </a:p>
+                  </a:txBody>
+                  <a:tcPr>
+                    <a:solidFill>
+                      <a:srgbClr val="111111"/>
+                    </a:solidFill>
+                  </a:tcPr>
+                </a:tc>
+              </a:tr>
+              <a:tr h="447462">
+                <a:tc>
+                  <a:txBody>
+                    <a:bodyPr/>
+                    <a:lstStyle/>
+                    <a:p>
+                      <a:pPr>
+                        <a:defRPr sz="1300" b="0">
+                          <a:solidFill>
+                            <a:srgbClr val="FFFFFF"/>
+                          </a:solidFill>
+                          <a:latin typeface="Play"/>
+                          <a:ea typeface="Play"/>
+                          <a:cs typeface="Play"/>
+                        </a:defRPr>
+                      </a:pPr>
+                      <a:r>
+                        <a:t>Время до первой версии</a:t>
+                      </a:r>
+                    </a:p>
+                  </a:txBody>
+                  <a:tcPr>
+                    <a:solidFill>
+                      <a:srgbClr val="111111"/>
+                    </a:solidFill>
+                  </a:tcPr>
+                </a:tc>
+                <a:tc>
+                  <a:txBody>
+                    <a:bodyPr/>
+                    <a:lstStyle/>
+                    <a:p>
+                      <a:pPr>
+                        <a:defRPr sz="1300" b="0">
+                          <a:solidFill>
+                            <a:srgbClr val="FFFFFF"/>
+                          </a:solidFill>
+                          <a:latin typeface="Play"/>
+                          <a:ea typeface="Play"/>
+                          <a:cs typeface="Play"/>
+                        </a:defRPr>
+                      </a:pPr>
+                      <a:r>
+                        <a:t>6 дней</a:t>
+                      </a:r>
+                    </a:p>
+                  </a:txBody>
+                  <a:tcPr>
+                    <a:solidFill>
+                      <a:srgbClr val="111111"/>
+                    </a:solidFill>
+                  </a:tcPr>
+                </a:tc>
+                <a:tc>
+                  <a:txBody>
+                    <a:bodyPr/>
+                    <a:lstStyle/>
+                    <a:p>
+                      <a:pPr>
+                        <a:defRPr sz="1300" b="0">
+                          <a:solidFill>
+                            <a:srgbClr val="FFFFFF"/>
+                          </a:solidFill>
+                          <a:latin typeface="Play"/>
+                          <a:ea typeface="Play"/>
+                          <a:cs typeface="Play"/>
+                        </a:defRPr>
+                      </a:pPr>
+                      <a:r>
+                        <a:t>1 день</a:t>
+                      </a:r>
+                    </a:p>
+                  </a:txBody>
+                  <a:tcPr>
+                    <a:solidFill>
+                      <a:srgbClr val="111111"/>
+                    </a:solidFill>
+                  </a:tcPr>
+                </a:tc>
+              </a:tr>
+              <a:tr h="447462">
+                <a:tc>
+                  <a:txBody>
+                    <a:bodyPr/>
+                    <a:lstStyle/>
+                    <a:p>
+                      <a:pPr>
+                        <a:defRPr sz="1300" b="0">
+                          <a:solidFill>
+                            <a:srgbClr val="FFFFFF"/>
+                          </a:solidFill>
+                          <a:latin typeface="Play"/>
+                          <a:ea typeface="Play"/>
+                          <a:cs typeface="Play"/>
+                        </a:defRPr>
+                      </a:pPr>
+                      <a:r>
+                        <a:t>Нарушения</a:t>
+                      </a:r>
+                    </a:p>
+                  </a:txBody>
+                  <a:tcPr>
+                    <a:solidFill>
+                      <a:srgbClr val="111111"/>
+                    </a:solidFill>
+                  </a:tcPr>
+                </a:tc>
+                <a:tc>
+                  <a:txBody>
+                    <a:bodyPr/>
+                    <a:lstStyle/>
+                    <a:p>
+                      <a:pPr>
+                        <a:defRPr sz="1300" b="0">
+                          <a:solidFill>
+                            <a:srgbClr val="FFFFFF"/>
+                          </a:solidFill>
+                          <a:latin typeface="Play"/>
+                          <a:ea typeface="Play"/>
+                          <a:cs typeface="Play"/>
+                        </a:defRPr>
+                      </a:pPr>
+                      <a:r>
+                        <a:t>19 из 42</a:t>
+                      </a:r>
+                    </a:p>
+                  </a:txBody>
+                  <a:tcPr>
+                    <a:solidFill>
+                      <a:srgbClr val="111111"/>
+                    </a:solidFill>
+                  </a:tcPr>
+                </a:tc>
+                <a:tc>
+                  <a:txBody>
+                    <a:bodyPr/>
+                    <a:lstStyle/>
+                    <a:p>
+                      <a:pPr>
+                        <a:defRPr sz="1300" b="0">
+                          <a:solidFill>
+                            <a:srgbClr val="FFFFFF"/>
+                          </a:solidFill>
+                          <a:latin typeface="Play"/>
+                          <a:ea typeface="Play"/>
+                          <a:cs typeface="Play"/>
+                        </a:defRPr>
+                      </a:pPr>
+                      <a:r>
+                        <a:t>2 из 68</a:t>
+                      </a:r>
+                    </a:p>
+                  </a:txBody>
+                  <a:tcPr>
+                    <a:solidFill>
+                      <a:srgbClr val="111111"/>
+                    </a:solidFill>
+                  </a:tcPr>
+                </a:tc>
+              </a:tr>
+              <a:tr h="447464">
+                <a:tc>
+                  <a:txBody>
+                    <a:bodyPr/>
+                    <a:lstStyle/>
+                    <a:p>
+                      <a:pPr>
+                        <a:defRPr sz="1300" b="0">
+                          <a:solidFill>
+                            <a:srgbClr val="FFFFFF"/>
+                          </a:solidFill>
+                          <a:latin typeface="Play"/>
+                          <a:ea typeface="Play"/>
+                          <a:cs typeface="Play"/>
+                        </a:defRPr>
+                      </a:pPr>
+                      <a:r>
+                        <a:t>Запросы</a:t>
+                      </a:r>
+                    </a:p>
+                  </a:txBody>
+                  <a:tcPr>
+                    <a:solidFill>
+                      <a:srgbClr val="111111"/>
+                    </a:solidFill>
+                  </a:tcPr>
+                </a:tc>
+                <a:tc>
+                  <a:txBody>
+                    <a:bodyPr/>
+                    <a:lstStyle/>
+                    <a:p>
+                      <a:pPr>
+                        <a:defRPr sz="1300" b="0">
+                          <a:solidFill>
+                            <a:srgbClr val="FFFFFF"/>
+                          </a:solidFill>
+                          <a:latin typeface="Play"/>
+                          <a:ea typeface="Play"/>
+                          <a:cs typeface="Play"/>
+                        </a:defRPr>
+                      </a:pPr>
+                      <a:r>
+                        <a:t>11/нед</a:t>
+                      </a:r>
+                    </a:p>
+                  </a:txBody>
+                  <a:tcPr>
+                    <a:solidFill>
+                      <a:srgbClr val="111111"/>
+                    </a:solidFill>
+                  </a:tcPr>
+                </a:tc>
+                <a:tc>
+                  <a:txBody>
+                    <a:bodyPr/>
+                    <a:lstStyle/>
+                    <a:p>
+                      <a:pPr>
+                        <a:defRPr sz="1300" b="0">
+                          <a:solidFill>
+                            <a:srgbClr val="FFFFFF"/>
+                          </a:solidFill>
+                          <a:latin typeface="Play"/>
+                          <a:ea typeface="Play"/>
+                          <a:cs typeface="Play"/>
+                        </a:defRPr>
+                      </a:pPr>
+                      <a:r>
+                        <a:t>38/нед</a:t>
+                      </a:r>
+                    </a:p>
+                  </a:txBody>
+                  <a:tcPr>
+                    <a:solidFill>
+                      <a:srgbClr val="111111"/>
+                    </a:solidFill>
+                  </a:tcPr>
+                </a:tc>
+              </a:tr>
+            </a:tbl>
           </a:graphicData>
         </a:graphic>
       </p:graphicFrame>
@@ -7983,8 +8280,8 @@
         </p:nvSpPr>
         <p:spPr>
           <a:xfrm>
-            <a:off x="429280" y="4562299"/>
-            <a:ext cx="11310884" cy="944880"/>
+            <a:off x="429280" y="3901337"/>
+            <a:ext cx="11310884" cy="1605841"/>
           </a:xfrm>
           <a:prstGeom prst="rect">
             <a:avLst/>
@@ -8019,7 +8316,7 @@
                 <a:ea typeface="Play"/>
                 <a:cs typeface="Play"/>
               </a:rPr>
-              <a:t>• Нарушений фирменного стиля в пилоте – 2 из 68 колод</a:t>
+              <a:t>• Сборка 4 мин вместо 186</a:t>
             </a:r>
           </a:p>
           <a:p>
@@ -8045,7 +8342,59 @@
                 <a:ea typeface="Play"/>
                 <a:cs typeface="Play"/>
               </a:rPr>
-              <a:t>• Все нарушения автоматически исправлены аудитором</a:t>
+              <a:t>• 1 день до первой версии вместо 6</a:t>
+            </a:r>
+          </a:p>
+          <a:p>
+            <a:pPr algn="l">
+              <a:spcAft>
+                <a:spcPts val="300"/>
+              </a:spcAft>
+              <a:defRPr sz="1600">
+                <a:solidFill>
+                  <a:srgbClr val="FFFFFF"/>
+                </a:solidFill>
+                <a:latin typeface="Play"/>
+                <a:ea typeface="Play"/>
+                <a:cs typeface="Play"/>
+              </a:defRPr>
+            </a:pPr>
+            <a:r>
+              <a:rPr sz="1600">
+                <a:solidFill>
+                  <a:srgbClr val="FFFFFF"/>
+                </a:solidFill>
+                <a:latin typeface="Play"/>
+                <a:ea typeface="Play"/>
+                <a:cs typeface="Play"/>
+              </a:rPr>
+              <a:t>• 2 нарушения из 68 вместо 19</a:t>
+            </a:r>
+          </a:p>
+          <a:p>
+            <a:pPr algn="l">
+              <a:spcAft>
+                <a:spcPts val="300"/>
+              </a:spcAft>
+              <a:defRPr sz="1600">
+                <a:solidFill>
+                  <a:srgbClr val="FFFFFF"/>
+                </a:solidFill>
+                <a:latin typeface="Play"/>
+                <a:ea typeface="Play"/>
+                <a:cs typeface="Play"/>
+              </a:defRPr>
+            </a:pPr>
+            <a:r>
+              <a:rPr sz="1600">
+                <a:solidFill>
+                  <a:srgbClr val="FFFFFF"/>
+                </a:solidFill>
+                <a:latin typeface="Play"/>
+                <a:ea typeface="Play"/>
+                <a:cs typeface="Play"/>
+              </a:rPr>
+              <a:t>• 38 запросов вместо 11</a:t>
             </a:r>
           </a:p>
         </p:txBody>
@@ -8059,6 +8408,223 @@
 </file>
 
 <file path=ppt/slides/slide35.xml><?xml version="1.0" encoding="utf-8"?>
+<p:sld xmlns:a="http://schemas.openxmlformats.org/drawingml/2006/main" xmlns:p="http://schemas.openxmlformats.org/presentationml/2006/main" xmlns:r="http://schemas.openxmlformats.org/officeDocument/2006/relationships">
+  <p:cSld>
+    <p:spTree>
+      <p:nvGrpSpPr>
+        <p:cNvPr id="1" name=""/>
+        <p:cNvGrpSpPr/>
+        <p:nvPr/>
+      </p:nvGrpSpPr>
+      <p:grpSpPr/>
+      <p:sp>
+        <p:nvSpPr>
+          <p:cNvPr id="2" name="title"/>
+          <p:cNvSpPr txBox="1"/>
+          <p:nvPr/>
+        </p:nvSpPr>
+        <p:spPr>
+          <a:xfrm>
+            <a:off x="429280" y="424715"/>
+            <a:ext cx="7827264" cy="822960"/>
+          </a:xfrm>
+          <a:prstGeom prst="rect">
+            <a:avLst/>
+          </a:prstGeom>
+          <a:noFill/>
+        </p:spPr>
+        <p:txBody>
+          <a:bodyPr wrap="square" lIns="76200" rIns="76200" tIns="50800" bIns="50800">
+            <a:spAutoFit/>
+          </a:bodyPr>
+          <a:lstStyle/>
+          <a:p>
+            <a:pPr algn="l">
+              <a:spcAft>
+                <a:spcPts val="300"/>
+              </a:spcAft>
+              <a:defRPr sz="4000">
+                <a:solidFill>
+                  <a:srgbClr val="FFFFFF"/>
+                </a:solidFill>
+                <a:latin typeface="Play"/>
+                <a:ea typeface="Play"/>
+                <a:cs typeface="Play"/>
+              </a:defRPr>
+            </a:pPr>
+            <a:r>
+              <a:rPr sz="4000">
+                <a:solidFill>
+                  <a:srgbClr val="FFFFFF"/>
+                </a:solidFill>
+                <a:latin typeface="Play"/>
+                <a:ea typeface="Play"/>
+                <a:cs typeface="Play"/>
+              </a:rPr>
+              <a:t>Ожидаемый эффект</a:t>
+            </a:r>
+          </a:p>
+        </p:txBody>
+      </p:sp>
+      <p:sp>
+        <p:nvSpPr>
+          <p:cNvPr id="3" name="lead"/>
+          <p:cNvSpPr txBox="1"/>
+          <p:nvPr/>
+        </p:nvSpPr>
+        <p:spPr>
+          <a:xfrm>
+            <a:off x="429280" y="1592290"/>
+            <a:ext cx="7827264" cy="1493206"/>
+          </a:xfrm>
+          <a:prstGeom prst="rect">
+            <a:avLst/>
+          </a:prstGeom>
+          <a:noFill/>
+        </p:spPr>
+        <p:txBody>
+          <a:bodyPr wrap="square" lIns="76200" rIns="76200" tIns="50800" bIns="50800">
+            <a:spAutoFit/>
+          </a:bodyPr>
+          <a:lstStyle/>
+          <a:p>
+            <a:pPr algn="ctr">
+              <a:spcAft>
+                <a:spcPts val="300"/>
+              </a:spcAft>
+              <a:defRPr sz="4000">
+                <a:solidFill>
+                  <a:srgbClr val="FFFFFF"/>
+                </a:solidFill>
+                <a:latin typeface="Play"/>
+                <a:ea typeface="Play"/>
+                <a:cs typeface="Play"/>
+              </a:defRPr>
+            </a:pPr>
+            <a:r>
+              <a:rPr sz="4000">
+                <a:solidFill>
+                  <a:srgbClr val="FFFFFF"/>
+                </a:solidFill>
+                <a:latin typeface="Play"/>
+                <a:ea typeface="Play"/>
+                <a:cs typeface="Play"/>
+              </a:rPr>
+              <a:t>Сборка 4 мин вместо 186</a:t>
+            </a:r>
+          </a:p>
+        </p:txBody>
+      </p:sp>
+      <p:sp>
+        <p:nvSpPr>
+          <p:cNvPr id="4" name="body"/>
+          <p:cNvSpPr txBox="1"/>
+          <p:nvPr/>
+        </p:nvSpPr>
+        <p:spPr>
+          <a:xfrm>
+            <a:off x="429280" y="3336376"/>
+            <a:ext cx="7827264" cy="2437236"/>
+          </a:xfrm>
+          <a:prstGeom prst="rect">
+            <a:avLst/>
+          </a:prstGeom>
+          <a:noFill/>
+        </p:spPr>
+        <p:txBody>
+          <a:bodyPr wrap="square" lIns="76200" rIns="76200" tIns="50800" bIns="50800">
+            <a:spAutoFit/>
+          </a:bodyPr>
+          <a:lstStyle/>
+          <a:p>
+            <a:pPr algn="l">
+              <a:spcAft>
+                <a:spcPts val="300"/>
+              </a:spcAft>
+              <a:defRPr sz="3200">
+                <a:solidFill>
+                  <a:srgbClr val="FFFFFF"/>
+                </a:solidFill>
+                <a:latin typeface="Play"/>
+                <a:ea typeface="Play"/>
+                <a:cs typeface="Play"/>
+              </a:defRPr>
+            </a:pPr>
+            <a:r>
+              <a:rPr sz="3200">
+                <a:solidFill>
+                  <a:srgbClr val="FFFFFF"/>
+                </a:solidFill>
+                <a:latin typeface="Play"/>
+                <a:ea typeface="Play"/>
+                <a:cs typeface="Play"/>
+              </a:rPr>
+              <a:t>• 1 день до первой версии вместо 6</a:t>
+            </a:r>
+          </a:p>
+          <a:p>
+            <a:pPr algn="l">
+              <a:spcAft>
+                <a:spcPts val="300"/>
+              </a:spcAft>
+              <a:defRPr sz="3200">
+                <a:solidFill>
+                  <a:srgbClr val="FFFFFF"/>
+                </a:solidFill>
+                <a:latin typeface="Play"/>
+                <a:ea typeface="Play"/>
+                <a:cs typeface="Play"/>
+              </a:defRPr>
+            </a:pPr>
+            <a:r>
+              <a:rPr sz="3200">
+                <a:solidFill>
+                  <a:srgbClr val="FFFFFF"/>
+                </a:solidFill>
+                <a:latin typeface="Play"/>
+                <a:ea typeface="Play"/>
+                <a:cs typeface="Play"/>
+              </a:rPr>
+              <a:t>• 2 нарушения вместо 19</a:t>
+            </a:r>
+          </a:p>
+          <a:p>
+            <a:pPr algn="l">
+              <a:spcAft>
+                <a:spcPts val="300"/>
+              </a:spcAft>
+              <a:defRPr sz="3200">
+                <a:solidFill>
+                  <a:srgbClr val="FFFFFF"/>
+                </a:solidFill>
+                <a:latin typeface="Play"/>
+                <a:ea typeface="Play"/>
+                <a:cs typeface="Play"/>
+              </a:defRPr>
+            </a:pPr>
+            <a:r>
+              <a:rPr sz="3200">
+                <a:solidFill>
+                  <a:srgbClr val="FFFFFF"/>
+                </a:solidFill>
+                <a:latin typeface="Play"/>
+                <a:ea typeface="Play"/>
+                <a:cs typeface="Play"/>
+              </a:rPr>
+              <a:t>• 38 запросов вместо 11</a:t>
+            </a:r>
+          </a:p>
+        </p:txBody>
+      </p:sp>
+    </p:spTree>
+  </p:cSld>
+  <p:clrMapOvr>
+    <a:masterClrMapping/>
+  </p:clrMapOvr>
+</p:sld>
+</file>
+
+<file path=ppt/slides/slide36.xml><?xml version="1.0" encoding="utf-8"?>
 <p:sld xmlns:a="http://schemas.openxmlformats.org/drawingml/2006/main" xmlns:p="http://schemas.openxmlformats.org/presentationml/2006/main" xmlns:r="http://schemas.openxmlformats.org/officeDocument/2006/relationships">
   <p:cSld>
     <p:spTree>
@@ -8211,8 +8777,8 @@
         </p:nvSpPr>
         <p:spPr>
           <a:xfrm>
-            <a:off x="429279" y="1745515"/>
-            <a:ext cx="3770294" cy="772118"/>
+            <a:off x="429280" y="1745515"/>
+            <a:ext cx="5655442" cy="772118"/>
           </a:xfrm>
           <a:prstGeom prst="rect">
             <a:avLst/>
@@ -8220,13 +8786,13 @@
           <a:noFill/>
         </p:spPr>
         <p:txBody>
-          <a:bodyPr wrap="square">
+          <a:bodyPr wrap="square" lIns="12700" rIns="12700" tIns="12700" bIns="12700">
             <a:spAutoFit/>
           </a:bodyPr>
           <a:lstStyle/>
           <a:p>
             <a:pPr algn="ctr">
-              <a:defRPr sz="1200" b="0">
+              <a:defRPr sz="1400" b="0">
                 <a:solidFill>
                   <a:srgbClr val="FFFFFF"/>
                 </a:solidFill>
@@ -8236,7 +8802,7 @@
               </a:defRPr>
             </a:pPr>
             <a:r>
-              <a:rPr sz="1200" b="0">
+              <a:rPr sz="1400" b="0">
                 <a:solidFill>
                   <a:srgbClr val="FFFFFF"/>
                 </a:solidFill>
@@ -8244,7 +8810,7 @@
                 <a:ea typeface="Play"/>
                 <a:cs typeface="Play"/>
               </a:rPr>
-              <a:t>3 квартал 2026: подключение 4 команд</a:t>
+              <a:t>Третий квартал 2026</a:t>
             </a:r>
           </a:p>
         </p:txBody>
@@ -8300,8 +8866,8 @@
         </p:nvSpPr>
         <p:spPr>
           <a:xfrm>
-            <a:off x="4199574" y="3127200"/>
-            <a:ext cx="3770294" cy="772118"/>
+            <a:off x="3257001" y="3127200"/>
+            <a:ext cx="5655442" cy="772118"/>
           </a:xfrm>
           <a:prstGeom prst="rect">
             <a:avLst/>
@@ -8309,13 +8875,13 @@
           <a:noFill/>
         </p:spPr>
         <p:txBody>
-          <a:bodyPr wrap="square">
+          <a:bodyPr wrap="square" lIns="12700" rIns="12700" tIns="12700" bIns="12700">
             <a:spAutoFit/>
           </a:bodyPr>
           <a:lstStyle/>
           <a:p>
             <a:pPr algn="ctr">
-              <a:defRPr sz="1200" b="0">
+              <a:defRPr sz="1400" b="0">
                 <a:solidFill>
                   <a:srgbClr val="FFFFFF"/>
                 </a:solidFill>
@@ -8325,7 +8891,7 @@
               </a:defRPr>
             </a:pPr>
             <a:r>
-              <a:rPr sz="1200" b="0">
+              <a:rPr sz="1400" b="0">
                 <a:solidFill>
                   <a:srgbClr val="FFFFFF"/>
                 </a:solidFill>
@@ -8333,7 +8899,7 @@
                 <a:ea typeface="Play"/>
                 <a:cs typeface="Play"/>
               </a:rPr>
-              <a:t>4 квартал 2026: доступ для всей компании</a:t>
+              <a:t>Четвёртый квартал 2026</a:t>
             </a:r>
           </a:p>
         </p:txBody>
@@ -8389,8 +8955,8 @@
         </p:nvSpPr>
         <p:spPr>
           <a:xfrm>
-            <a:off x="7969869" y="1745515"/>
-            <a:ext cx="3770294" cy="772118"/>
+            <a:off x="6084722" y="1745515"/>
+            <a:ext cx="5655442" cy="772118"/>
           </a:xfrm>
           <a:prstGeom prst="rect">
             <a:avLst/>
@@ -8398,13 +8964,13 @@
           <a:noFill/>
         </p:spPr>
         <p:txBody>
-          <a:bodyPr wrap="square">
+          <a:bodyPr wrap="square" lIns="12700" rIns="12700" tIns="12700" bIns="12700">
             <a:spAutoFit/>
           </a:bodyPr>
           <a:lstStyle/>
           <a:p>
             <a:pPr algn="ctr">
-              <a:defRPr sz="1200" b="0">
+              <a:defRPr sz="1400" b="0">
                 <a:solidFill>
                   <a:srgbClr val="FFFFFF"/>
                 </a:solidFill>
@@ -8414,7 +8980,7 @@
               </a:defRPr>
             </a:pPr>
             <a:r>
-              <a:rPr sz="1200" b="0">
+              <a:rPr sz="1400" b="0">
                 <a:solidFill>
                   <a:srgbClr val="FFFFFF"/>
                 </a:solidFill>
@@ -8422,7 +8988,7 @@
                 <a:ea typeface="Play"/>
                 <a:cs typeface="Play"/>
               </a:rPr>
-              <a:t>1 квартал 2027: генерация иллюстраций</a:t>
+              <a:t>Первый квартал 2027</a:t>
             </a:r>
           </a:p>
         </p:txBody>
@@ -8471,7 +9037,7 @@
                 <a:ea typeface="Play"/>
                 <a:cs typeface="Play"/>
               </a:rPr>
-              <a:t>• Сервис работает на 2 vCPU / 2 GB RAM</a:t>
+              <a:t>• 2 vCPU / 2 ГБ RAM</a:t>
             </a:r>
           </a:p>
           <a:p>
@@ -8497,7 +9063,7 @@
                 <a:ea typeface="Play"/>
                 <a:cs typeface="Play"/>
               </a:rPr>
-              <a:t>• Инференс за 6 недель пилота – 1 400 руб</a:t>
+              <a:t>• 1 400 руб инференс</a:t>
             </a:r>
           </a:p>
           <a:p>
@@ -8523,7 +9089,7 @@
                 <a:ea typeface="Play"/>
                 <a:cs typeface="Play"/>
               </a:rPr>
-              <a:t>• 3 квартал 2026: подключение 4 команд</a:t>
+              <a:t>• Gpt-oss-20b, OpenAI‑совместим</a:t>
             </a:r>
           </a:p>
           <a:p>
@@ -8549,33 +9115,7 @@
                 <a:ea typeface="Play"/>
                 <a:cs typeface="Play"/>
               </a:rPr>
-              <a:t>• 4 квартал 2026: доступ для всей компании</a:t>
-            </a:r>
-          </a:p>
-          <a:p>
-            <a:pPr algn="l">
-              <a:spcAft>
-                <a:spcPts val="300"/>
-              </a:spcAft>
-              <a:defRPr sz="1600">
-                <a:solidFill>
-                  <a:srgbClr val="FFFFFF"/>
-                </a:solidFill>
-                <a:latin typeface="Play"/>
-                <a:ea typeface="Play"/>
-                <a:cs typeface="Play"/>
-              </a:defRPr>
-            </a:pPr>
-            <a:r>
-              <a:rPr sz="1600">
-                <a:solidFill>
-                  <a:srgbClr val="FFFFFF"/>
-                </a:solidFill>
-                <a:latin typeface="Play"/>
-                <a:ea typeface="Play"/>
-                <a:cs typeface="Play"/>
-              </a:rPr>
-              <a:t>• 1 квартал 2027: генерация иллюстраций</a:t>
+              <a:t>• Дизайн‑отдел 4 человека</a:t>
             </a:r>
           </a:p>
         </p:txBody>
@@ -8588,7 +9128,553 @@
 </p:sld>
 </file>
 
-<file path=ppt/slides/slide36.xml><?xml version="1.0" encoding="utf-8"?>
+<file path=ppt/slides/slide37.xml><?xml version="1.0" encoding="utf-8"?>
+<p:sld xmlns:a="http://schemas.openxmlformats.org/drawingml/2006/main" xmlns:p="http://schemas.openxmlformats.org/presentationml/2006/main" xmlns:r="http://schemas.openxmlformats.org/officeDocument/2006/relationships">
+  <p:cSld>
+    <p:spTree>
+      <p:nvGrpSpPr>
+        <p:cNvPr id="1" name=""/>
+        <p:cNvGrpSpPr/>
+        <p:nvPr/>
+      </p:nvGrpSpPr>
+      <p:grpSpPr/>
+      <p:sp>
+        <p:nvSpPr>
+          <p:cNvPr id="679" name="Google Shape;679;p31"/>
+          <p:cNvSpPr/>
+          <p:nvPr/>
+        </p:nvSpPr>
+        <p:spPr>
+          <a:xfrm>
+            <a:off x="0" y="4748271"/>
+            <a:ext cx="12192000" cy="2109730"/>
+          </a:xfrm>
+          <a:prstGeom prst="rect">
+            <a:avLst/>
+          </a:prstGeom>
+          <a:gradFill>
+            <a:gsLst>
+              <a:gs pos="0">
+                <a:srgbClr val="0077FF">
+                  <a:alpha val="61961"/>
+                </a:srgbClr>
+              </a:gs>
+              <a:gs pos="99000">
+                <a:srgbClr val="00AEE8"/>
+              </a:gs>
+              <a:gs pos="100000">
+                <a:srgbClr val="00AEE8"/>
+              </a:gs>
+            </a:gsLst>
+            <a:lin ang="14400000" scaled="0"/>
+          </a:gradFill>
+          <a:ln>
+            <a:noFill/>
+          </a:ln>
+        </p:spPr>
+        <p:txBody>
+          <a:bodyPr anchorCtr="0" anchor="ctr" bIns="0" lIns="108000" spcFirstLastPara="1" rIns="91425" wrap="square" tIns="0">
+            <a:noAutofit/>
+          </a:bodyPr>
+          <a:lstStyle/>
+          <a:p>
+            <a:pPr indent="0" lvl="0" marL="0" marR="0" rtl="0" algn="l">
+              <a:spcBef>
+                <a:spcPts val="0"/>
+              </a:spcBef>
+              <a:spcAft>
+                <a:spcPts val="0"/>
+              </a:spcAft>
+              <a:buNone/>
+            </a:pPr>
+            <a:r>
+              <a:t/>
+            </a:r>
+            <a:endParaRPr sz="1100">
+              <a:solidFill>
+                <a:schemeClr val="lt1"/>
+              </a:solidFill>
+              <a:latin typeface="Play"/>
+              <a:ea typeface="Play"/>
+              <a:cs typeface="Play"/>
+              <a:sym typeface="Play"/>
+            </a:endParaRPr>
+          </a:p>
+        </p:txBody>
+      </p:sp>
+      <p:sp>
+        <p:nvSpPr>
+          <p:cNvPr id="680" name="Rounded Rectangle 679"/>
+          <p:cNvSpPr/>
+          <p:nvPr/>
+        </p:nvSpPr>
+        <p:spPr>
+          <a:xfrm>
+            <a:off x="300817" y="297715"/>
+            <a:ext cx="8081264" cy="5565466"/>
+          </a:xfrm>
+          <a:prstGeom prst="roundRect">
+            <a:avLst/>
+          </a:prstGeom>
+          <a:solidFill>
+            <a:srgbClr val="111111">
+              <a:alpha val="85000"/>
+            </a:srgbClr>
+          </a:solidFill>
+          <a:ln>
+            <a:noFill/>
+          </a:ln>
+          <a:effectLst/>
+        </p:spPr>
+        <p:style>
+          <a:lnRef idx="1">
+            <a:schemeClr val="accent1"/>
+          </a:lnRef>
+          <a:fillRef idx="3">
+            <a:schemeClr val="accent1"/>
+          </a:fillRef>
+          <a:effectRef idx="2">
+            <a:schemeClr val="accent1"/>
+          </a:effectRef>
+          <a:fontRef idx="minor">
+            <a:schemeClr val="lt1"/>
+          </a:fontRef>
+        </p:style>
+        <p:txBody>
+          <a:bodyPr rtlCol="0" anchor="ctr"/>
+          <a:lstStyle/>
+          <a:p>
+            <a:pPr algn="ctr"/>
+          </a:p>
+        </p:txBody>
+      </p:sp>
+      <p:sp>
+        <p:nvSpPr>
+          <p:cNvPr id="681" name="title"/>
+          <p:cNvSpPr txBox="1"/>
+          <p:nvPr/>
+        </p:nvSpPr>
+        <p:spPr>
+          <a:xfrm>
+            <a:off x="427817" y="424715"/>
+            <a:ext cx="7827264" cy="822960"/>
+          </a:xfrm>
+          <a:prstGeom prst="rect">
+            <a:avLst/>
+          </a:prstGeom>
+          <a:noFill/>
+        </p:spPr>
+        <p:txBody>
+          <a:bodyPr wrap="square" lIns="76200" rIns="76200" tIns="50800" bIns="50800">
+            <a:spAutoFit/>
+          </a:bodyPr>
+          <a:lstStyle/>
+          <a:p>
+            <a:pPr algn="l">
+              <a:spcAft>
+                <a:spcPts val="300"/>
+              </a:spcAft>
+              <a:defRPr sz="4000">
+                <a:solidFill>
+                  <a:srgbClr val="FFFFFF"/>
+                </a:solidFill>
+                <a:latin typeface="Play"/>
+                <a:ea typeface="Play"/>
+                <a:cs typeface="Play"/>
+              </a:defRPr>
+            </a:pPr>
+            <a:r>
+              <a:rPr sz="4000">
+                <a:solidFill>
+                  <a:srgbClr val="FFFFFF"/>
+                </a:solidFill>
+                <a:latin typeface="Play"/>
+                <a:ea typeface="Play"/>
+                <a:cs typeface="Play"/>
+              </a:rPr>
+              <a:t>Что мы просим решить</a:t>
+            </a:r>
+          </a:p>
+        </p:txBody>
+      </p:sp>
+      <p:sp>
+        <p:nvSpPr>
+          <p:cNvPr id="682" name="lead"/>
+          <p:cNvSpPr txBox="1"/>
+          <p:nvPr/>
+        </p:nvSpPr>
+        <p:spPr>
+          <a:xfrm>
+            <a:off x="427817" y="1837052"/>
+            <a:ext cx="7827264" cy="1438720"/>
+          </a:xfrm>
+          <a:prstGeom prst="rect">
+            <a:avLst/>
+          </a:prstGeom>
+          <a:noFill/>
+        </p:spPr>
+        <p:txBody>
+          <a:bodyPr wrap="square" lIns="76200" rIns="76200" tIns="50800" bIns="50800">
+            <a:spAutoFit/>
+          </a:bodyPr>
+          <a:lstStyle/>
+          <a:p>
+            <a:pPr algn="l">
+              <a:spcAft>
+                <a:spcPts val="300"/>
+              </a:spcAft>
+              <a:defRPr sz="4000">
+                <a:solidFill>
+                  <a:srgbClr val="FFFFFF"/>
+                </a:solidFill>
+                <a:latin typeface="Play"/>
+                <a:ea typeface="Play"/>
+                <a:cs typeface="Play"/>
+              </a:defRPr>
+            </a:pPr>
+            <a:r>
+              <a:rPr sz="4000">
+                <a:solidFill>
+                  <a:srgbClr val="FFFFFF"/>
+                </a:solidFill>
+                <a:latin typeface="Play"/>
+                <a:ea typeface="Play"/>
+                <a:cs typeface="Play"/>
+              </a:rPr>
+              <a:t>Запуск на всю компанию</a:t>
+            </a:r>
+          </a:p>
+        </p:txBody>
+      </p:sp>
+      <p:sp>
+        <p:nvSpPr>
+          <p:cNvPr id="683" name="body"/>
+          <p:cNvSpPr txBox="1"/>
+          <p:nvPr/>
+        </p:nvSpPr>
+        <p:spPr>
+          <a:xfrm>
+            <a:off x="427817" y="3521302"/>
+            <a:ext cx="7827264" cy="2407918"/>
+          </a:xfrm>
+          <a:prstGeom prst="rect">
+            <a:avLst/>
+          </a:prstGeom>
+          <a:noFill/>
+        </p:spPr>
+        <p:txBody>
+          <a:bodyPr wrap="square" lIns="76200" rIns="76200" tIns="50800" bIns="50800">
+            <a:spAutoFit/>
+          </a:bodyPr>
+          <a:lstStyle/>
+          <a:p>
+            <a:pPr algn="l">
+              <a:spcAft>
+                <a:spcPts val="300"/>
+              </a:spcAft>
+              <a:defRPr sz="3200">
+                <a:solidFill>
+                  <a:srgbClr val="FFFFFF"/>
+                </a:solidFill>
+                <a:latin typeface="Play"/>
+                <a:ea typeface="Play"/>
+                <a:cs typeface="Play"/>
+              </a:defRPr>
+            </a:pPr>
+            <a:r>
+              <a:rPr sz="3200">
+                <a:solidFill>
+                  <a:srgbClr val="FFFFFF"/>
+                </a:solidFill>
+                <a:latin typeface="Play"/>
+                <a:ea typeface="Play"/>
+                <a:cs typeface="Play"/>
+              </a:rPr>
+              <a:t>• Бюджет на расширение инфраструктуры</a:t>
+            </a:r>
+          </a:p>
+          <a:p>
+            <a:pPr algn="l">
+              <a:spcAft>
+                <a:spcPts val="300"/>
+              </a:spcAft>
+              <a:defRPr sz="3200">
+                <a:solidFill>
+                  <a:srgbClr val="FFFFFF"/>
+                </a:solidFill>
+                <a:latin typeface="Play"/>
+                <a:ea typeface="Play"/>
+                <a:cs typeface="Play"/>
+              </a:defRPr>
+            </a:pPr>
+            <a:r>
+              <a:rPr sz="3200">
+                <a:solidFill>
+                  <a:srgbClr val="FFFFFF"/>
+                </a:solidFill>
+                <a:latin typeface="Play"/>
+                <a:ea typeface="Play"/>
+                <a:cs typeface="Play"/>
+              </a:rPr>
+              <a:t>• Назначение ответственных за интеграцию</a:t>
+            </a:r>
+          </a:p>
+        </p:txBody>
+      </p:sp>
+    </p:spTree>
+  </p:cSld>
+  <p:clrMapOvr>
+    <a:masterClrMapping/>
+  </p:clrMapOvr>
+</p:sld>
+</file>
+
+<file path=ppt/slides/slide38.xml><?xml version="1.0" encoding="utf-8"?>
+<p:sld xmlns:a="http://schemas.openxmlformats.org/drawingml/2006/main" xmlns:p="http://schemas.openxmlformats.org/presentationml/2006/main" xmlns:r="http://schemas.openxmlformats.org/officeDocument/2006/relationships">
+  <p:cSld>
+    <p:spTree>
+      <p:nvGrpSpPr>
+        <p:cNvPr id="1" name=""/>
+        <p:cNvGrpSpPr/>
+        <p:nvPr/>
+      </p:nvGrpSpPr>
+      <p:grpSpPr/>
+      <p:pic>
+        <p:nvPicPr>
+          <p:cNvPr id="620" name="Google Shape;620;p28"/>
+          <p:cNvPicPr preferRelativeResize="0"/>
+          <p:nvPr/>
+        </p:nvPicPr>
+        <p:blipFill rotWithShape="1">
+          <a:blip r:embed="rId3">
+            <a:alphaModFix/>
+          </a:blip>
+          <a:srcRect b="0" l="0" r="0" t="0"/>
+          <a:stretch/>
+        </p:blipFill>
+        <p:spPr>
+          <a:xfrm>
+            <a:off x="398723" y="6160516"/>
+            <a:ext cx="1857481" cy="292671"/>
+          </a:xfrm>
+          <a:prstGeom prst="rect">
+            <a:avLst/>
+          </a:prstGeom>
+          <a:noFill/>
+          <a:ln>
+            <a:noFill/>
+          </a:ln>
+        </p:spPr>
+      </p:pic>
+      <p:pic>
+        <p:nvPicPr>
+          <p:cNvPr descr=" " id="621" name="Google Shape;621;p28"/>
+          <p:cNvPicPr preferRelativeResize="0"/>
+          <p:nvPr/>
+        </p:nvPicPr>
+        <p:blipFill rotWithShape="1">
+          <a:blip r:embed="rId4">
+            <a:alphaModFix/>
+          </a:blip>
+          <a:srcRect b="0" l="0" r="0" t="0"/>
+          <a:stretch/>
+        </p:blipFill>
+        <p:spPr>
+          <a:xfrm>
+            <a:off x="11093496" y="6238282"/>
+            <a:ext cx="690517" cy="216000"/>
+          </a:xfrm>
+          <a:prstGeom prst="rect">
+            <a:avLst/>
+          </a:prstGeom>
+          <a:noFill/>
+          <a:ln>
+            <a:noFill/>
+          </a:ln>
+        </p:spPr>
+      </p:pic>
+      <p:sp>
+        <p:nvSpPr>
+          <p:cNvPr id="622" name="title"/>
+          <p:cNvSpPr txBox="1"/>
+          <p:nvPr/>
+        </p:nvSpPr>
+        <p:spPr>
+          <a:xfrm>
+            <a:off x="429280" y="424715"/>
+            <a:ext cx="7827264" cy="822960"/>
+          </a:xfrm>
+          <a:prstGeom prst="rect">
+            <a:avLst/>
+          </a:prstGeom>
+          <a:noFill/>
+        </p:spPr>
+        <p:txBody>
+          <a:bodyPr wrap="square" lIns="76200" rIns="76200" tIns="50800" bIns="50800">
+            <a:spAutoFit/>
+          </a:bodyPr>
+          <a:lstStyle/>
+          <a:p>
+            <a:pPr algn="l">
+              <a:spcAft>
+                <a:spcPts val="300"/>
+              </a:spcAft>
+              <a:defRPr sz="4000">
+                <a:solidFill>
+                  <a:srgbClr val="FFFFFF"/>
+                </a:solidFill>
+                <a:latin typeface="Play"/>
+                <a:ea typeface="Play"/>
+                <a:cs typeface="Play"/>
+              </a:defRPr>
+            </a:pPr>
+            <a:r>
+              <a:rPr sz="4000">
+                <a:solidFill>
+                  <a:srgbClr val="FFFFFF"/>
+                </a:solidFill>
+                <a:latin typeface="Play"/>
+                <a:ea typeface="Play"/>
+                <a:cs typeface="Play"/>
+              </a:rPr>
+              <a:t>Риски</a:t>
+            </a:r>
+          </a:p>
+        </p:txBody>
+      </p:sp>
+      <p:sp>
+        <p:nvSpPr>
+          <p:cNvPr id="623" name="lead"/>
+          <p:cNvSpPr txBox="1"/>
+          <p:nvPr/>
+        </p:nvSpPr>
+        <p:spPr>
+          <a:xfrm>
+            <a:off x="429280" y="1504165"/>
+            <a:ext cx="7827264" cy="1514703"/>
+          </a:xfrm>
+          <a:prstGeom prst="rect">
+            <a:avLst/>
+          </a:prstGeom>
+          <a:noFill/>
+        </p:spPr>
+        <p:txBody>
+          <a:bodyPr wrap="square" lIns="76200" rIns="76200" tIns="50800" bIns="50800">
+            <a:spAutoFit/>
+          </a:bodyPr>
+          <a:lstStyle/>
+          <a:p>
+            <a:pPr algn="l">
+              <a:spcAft>
+                <a:spcPts val="300"/>
+              </a:spcAft>
+              <a:defRPr sz="4000">
+                <a:solidFill>
+                  <a:srgbClr val="FFFFFF"/>
+                </a:solidFill>
+                <a:latin typeface="Play"/>
+                <a:ea typeface="Play"/>
+                <a:cs typeface="Play"/>
+              </a:defRPr>
+            </a:pPr>
+            <a:r>
+              <a:rPr sz="4000">
+                <a:solidFill>
+                  <a:srgbClr val="FFFFFF"/>
+                </a:solidFill>
+                <a:latin typeface="Play"/>
+                <a:ea typeface="Play"/>
+                <a:cs typeface="Play"/>
+              </a:rPr>
+              <a:t>Слабая модель может выдумать цифры</a:t>
+            </a:r>
+          </a:p>
+        </p:txBody>
+      </p:sp>
+      <p:sp>
+        <p:nvSpPr>
+          <p:cNvPr id="624" name="body"/>
+          <p:cNvSpPr txBox="1"/>
+          <p:nvPr/>
+        </p:nvSpPr>
+        <p:spPr>
+          <a:xfrm>
+            <a:off x="429280" y="3253271"/>
+            <a:ext cx="7827264" cy="2157621"/>
+          </a:xfrm>
+          <a:prstGeom prst="rect">
+            <a:avLst/>
+          </a:prstGeom>
+          <a:noFill/>
+        </p:spPr>
+        <p:txBody>
+          <a:bodyPr wrap="square" lIns="76200" rIns="76200" tIns="50800" bIns="50800">
+            <a:spAutoFit/>
+          </a:bodyPr>
+          <a:lstStyle/>
+          <a:p>
+            <a:pPr algn="l">
+              <a:spcAft>
+                <a:spcPts val="300"/>
+              </a:spcAft>
+              <a:defRPr sz="2800">
+                <a:solidFill>
+                  <a:srgbClr val="FFFFFF"/>
+                </a:solidFill>
+                <a:latin typeface="Play"/>
+                <a:ea typeface="Play"/>
+                <a:cs typeface="Play"/>
+              </a:defRPr>
+            </a:pPr>
+            <a:r>
+              <a:rPr sz="2800">
+                <a:solidFill>
+                  <a:srgbClr val="FFFFFF"/>
+                </a:solidFill>
+                <a:latin typeface="Play"/>
+                <a:ea typeface="Play"/>
+                <a:cs typeface="Play"/>
+              </a:rPr>
+              <a:t>• Плохой шаблон может привести к некорректной вёрстке</a:t>
+            </a:r>
+          </a:p>
+          <a:p>
+            <a:pPr algn="l">
+              <a:spcAft>
+                <a:spcPts val="300"/>
+              </a:spcAft>
+              <a:defRPr sz="2800">
+                <a:solidFill>
+                  <a:srgbClr val="FFFFFF"/>
+                </a:solidFill>
+                <a:latin typeface="Play"/>
+                <a:ea typeface="Play"/>
+                <a:cs typeface="Play"/>
+              </a:defRPr>
+            </a:pPr>
+            <a:r>
+              <a:rPr sz="2800">
+                <a:solidFill>
+                  <a:srgbClr val="FFFFFF"/>
+                </a:solidFill>
+                <a:latin typeface="Play"/>
+                <a:ea typeface="Play"/>
+                <a:cs typeface="Play"/>
+              </a:rPr>
+              <a:t>• Нагрузка &gt;20 задач требует внешней очереди</a:t>
+            </a:r>
+          </a:p>
+        </p:txBody>
+      </p:sp>
+    </p:spTree>
+  </p:cSld>
+  <p:clrMapOvr>
+    <a:masterClrMapping/>
+  </p:clrMapOvr>
+</p:sld>
+</file>
+
+<file path=ppt/slides/slide39.xml><?xml version="1.0" encoding="utf-8"?>
 <p:sld xmlns:a="http://schemas.openxmlformats.org/drawingml/2006/main" xmlns:p="http://schemas.openxmlformats.org/presentationml/2006/main" xmlns:r="http://schemas.openxmlformats.org/officeDocument/2006/relationships">
   <p:cSld>
     <p:spTree>
@@ -8642,7 +9728,7 @@
                 <a:ea typeface="Play"/>
                 <a:cs typeface="Play"/>
               </a:rPr>
-              <a:t>План пилота</a:t>
+              <a:t>Команда</a:t>
             </a:r>
           </a:p>
         </p:txBody>
@@ -8656,8 +9742,8 @@
           <p:nvPr/>
         </p:nvGraphicFramePr>
         <p:xfrm>
-          <a:off x="429280" y="1592290"/>
-          <a:ext cx="11310884" cy="2668752"/>
+          <a:off x="429280" y="1492575"/>
+          <a:ext cx="11310884" cy="2898274"/>
         </p:xfrm>
         <a:graphic>
           <a:graphicData uri="http://schemas.openxmlformats.org/drawingml/2006/table">
@@ -8666,11 +9752,10 @@
                 <a:tableStyleId>{5C22544A-7EE6-4342-B048-85BDC9FD1C3A}</a:tableStyleId>
               </a:tblPr>
               <a:tblGrid>
-                <a:gridCol w="3770294"/>
-                <a:gridCol w="3770294"/>
-                <a:gridCol w="3770296"/>
+                <a:gridCol w="5655442"/>
+                <a:gridCol w="5655442"/>
               </a:tblGrid>
-              <a:tr h="533750">
+              <a:tr h="483045">
                 <a:tc>
                   <a:txBody>
                     <a:bodyPr/>
@@ -8687,7 +9772,7 @@
                         </a:defRPr>
                       </a:pPr>
                       <a:r>
-                        <a:t>Метрика</a:t>
+                        <a:t>Роль</a:t>
                       </a:r>
                     </a:p>
                   </a:txBody>
@@ -8713,33 +9798,7 @@
                         </a:defRPr>
                       </a:pPr>
                       <a:r>
-                        <a:t>Ручной</a:t>
-                      </a:r>
-                    </a:p>
-                  </a:txBody>
-                  <a:tcPr>
-                    <a:solidFill>
-                      <a:srgbClr val="0077FF"/>
-                    </a:solidFill>
-                  </a:tcPr>
-                </a:tc>
-                <a:tc>
-                  <a:txBody>
-                    <a:bodyPr/>
-                    <a:lstStyle/>
-                    <a:p>
-                      <a:pPr>
-                        <a:defRPr sz="1300" b="1">
-                          <a:solidFill>
-                            <a:srgbClr val="FFFFFF"/>
-                          </a:solidFill>
-                          <a:latin typeface="Play"/>
-                          <a:ea typeface="Play"/>
-                          <a:cs typeface="Play"/>
-                        </a:defRPr>
-                      </a:pPr>
-                      <a:r>
-                        <a:t>Пилот</a:t>
+                        <a:t>Количество</a:t>
                       </a:r>
                     </a:p>
                   </a:txBody>
@@ -8750,7 +9809,7 @@
                   </a:tcPr>
                 </a:tc>
               </a:tr>
-              <a:tr h="533750">
+              <a:tr h="483045">
                 <a:tc>
                   <a:txBody>
                     <a:bodyPr/>
@@ -8767,7 +9826,7 @@
                         </a:defRPr>
                       </a:pPr>
                       <a:r>
-                        <a:t>Кол-во презентаций</a:t>
+                        <a:t>Дизайн‑отдел</a:t>
                       </a:r>
                     </a:p>
                   </a:txBody>
@@ -8793,7 +9852,197 @@
                         </a:defRPr>
                       </a:pPr>
                       <a:r>
-                        <a:t>42</a:t>
+                        <a:t>4 человека</a:t>
+                      </a:r>
+                    </a:p>
+                  </a:txBody>
+                  <a:tcPr>
+                    <a:solidFill>
+                      <a:srgbClr val="111111"/>
+                    </a:solidFill>
+                  </a:tcPr>
+                </a:tc>
+              </a:tr>
+              <a:tr h="483045">
+                <a:tc>
+                  <a:txBody>
+                    <a:bodyPr/>
+                    <a:lstStyle/>
+                    <a:p>
+                      <a:pPr>
+                        <a:defRPr sz="1300" b="0">
+                          <a:solidFill>
+                            <a:srgbClr val="FFFFFF"/>
+                          </a:solidFill>
+                          <a:latin typeface="Play"/>
+                          <a:ea typeface="Play"/>
+                          <a:cs typeface="Play"/>
+                        </a:defRPr>
+                      </a:pPr>
+                      <a:r>
+                        <a:t>Запросы</a:t>
+                      </a:r>
+                    </a:p>
+                  </a:txBody>
+                  <a:tcPr>
+                    <a:solidFill>
+                      <a:srgbClr val="111111"/>
+                    </a:solidFill>
+                  </a:tcPr>
+                </a:tc>
+                <a:tc>
+                  <a:txBody>
+                    <a:bodyPr/>
+                    <a:lstStyle/>
+                    <a:p>
+                      <a:pPr>
+                        <a:defRPr sz="1300" b="0">
+                          <a:solidFill>
+                            <a:srgbClr val="FFFFFF"/>
+                          </a:solidFill>
+                          <a:latin typeface="Play"/>
+                          <a:ea typeface="Play"/>
+                          <a:cs typeface="Play"/>
+                        </a:defRPr>
+                      </a:pPr>
+                      <a:r>
+                        <a:t>11/нед</a:t>
+                      </a:r>
+                    </a:p>
+                  </a:txBody>
+                  <a:tcPr>
+                    <a:solidFill>
+                      <a:srgbClr val="111111"/>
+                    </a:solidFill>
+                  </a:tcPr>
+                </a:tc>
+              </a:tr>
+              <a:tr h="483045">
+                <a:tc>
+                  <a:txBody>
+                    <a:bodyPr/>
+                    <a:lstStyle/>
+                    <a:p>
+                      <a:pPr>
+                        <a:defRPr sz="1300" b="0">
+                          <a:solidFill>
+                            <a:srgbClr val="FFFFFF"/>
+                          </a:solidFill>
+                          <a:latin typeface="Play"/>
+                          <a:ea typeface="Play"/>
+                          <a:cs typeface="Play"/>
+                        </a:defRPr>
+                      </a:pPr>
+                      <a:r>
+                        <a:t>Ожидание</a:t>
+                      </a:r>
+                    </a:p>
+                  </a:txBody>
+                  <a:tcPr>
+                    <a:solidFill>
+                      <a:srgbClr val="111111"/>
+                    </a:solidFill>
+                  </a:tcPr>
+                </a:tc>
+                <a:tc>
+                  <a:txBody>
+                    <a:bodyPr/>
+                    <a:lstStyle/>
+                    <a:p>
+                      <a:pPr>
+                        <a:defRPr sz="1300" b="0">
+                          <a:solidFill>
+                            <a:srgbClr val="FFFFFF"/>
+                          </a:solidFill>
+                          <a:latin typeface="Play"/>
+                          <a:ea typeface="Play"/>
+                          <a:cs typeface="Play"/>
+                        </a:defRPr>
+                      </a:pPr>
+                      <a:r>
+                        <a:t>6 дней</a:t>
+                      </a:r>
+                    </a:p>
+                  </a:txBody>
+                  <a:tcPr>
+                    <a:solidFill>
+                      <a:srgbClr val="111111"/>
+                    </a:solidFill>
+                  </a:tcPr>
+                </a:tc>
+              </a:tr>
+              <a:tr h="483045">
+                <a:tc>
+                  <a:txBody>
+                    <a:bodyPr/>
+                    <a:lstStyle/>
+                    <a:p>
+                      <a:pPr>
+                        <a:defRPr sz="1300" b="0">
+                          <a:solidFill>
+                            <a:srgbClr val="FFFFFF"/>
+                          </a:solidFill>
+                          <a:latin typeface="Play"/>
+                          <a:ea typeface="Play"/>
+                          <a:cs typeface="Play"/>
+                        </a:defRPr>
+                      </a:pPr>
+                      <a:r>
+                        <a:t>Пилотные команды</a:t>
+                      </a:r>
+                    </a:p>
+                  </a:txBody>
+                  <a:tcPr>
+                    <a:solidFill>
+                      <a:srgbClr val="111111"/>
+                    </a:solidFill>
+                  </a:tcPr>
+                </a:tc>
+                <a:tc>
+                  <a:txBody>
+                    <a:bodyPr/>
+                    <a:lstStyle/>
+                    <a:p>
+                      <a:pPr>
+                        <a:defRPr sz="1300" b="0">
+                          <a:solidFill>
+                            <a:srgbClr val="FFFFFF"/>
+                          </a:solidFill>
+                          <a:latin typeface="Play"/>
+                          <a:ea typeface="Play"/>
+                          <a:cs typeface="Play"/>
+                        </a:defRPr>
+                      </a:pPr>
+                      <a:r>
+                        <a:t>2</a:t>
+                      </a:r>
+                    </a:p>
+                  </a:txBody>
+                  <a:tcPr>
+                    <a:solidFill>
+                      <a:srgbClr val="111111"/>
+                    </a:solidFill>
+                  </a:tcPr>
+                </a:tc>
+              </a:tr>
+              <a:tr h="483049">
+                <a:tc>
+                  <a:txBody>
+                    <a:bodyPr/>
+                    <a:lstStyle/>
+                    <a:p>
+                      <a:pPr>
+                        <a:defRPr sz="1300" b="0">
+                          <a:solidFill>
+                            <a:srgbClr val="FFFFFF"/>
+                          </a:solidFill>
+                          <a:latin typeface="Play"/>
+                          <a:ea typeface="Play"/>
+                          <a:cs typeface="Play"/>
+                        </a:defRPr>
+                      </a:pPr>
+                      <a:r>
+                        <a:t>Презентации</a:t>
                       </a:r>
                     </a:p>
                   </a:txBody>
@@ -8830,246 +10079,6 @@
                   </a:tcPr>
                 </a:tc>
               </a:tr>
-              <a:tr h="533750">
-                <a:tc>
-                  <a:txBody>
-                    <a:bodyPr/>
-                    <a:lstStyle/>
-                    <a:p>
-                      <a:pPr>
-                        <a:defRPr sz="1300" b="0">
-                          <a:solidFill>
-                            <a:srgbClr val="FFFFFF"/>
-                          </a:solidFill>
-                          <a:latin typeface="Play"/>
-                          <a:ea typeface="Play"/>
-                          <a:cs typeface="Play"/>
-                        </a:defRPr>
-                      </a:pPr>
-                      <a:r>
-                        <a:t>Время сборки (мин)</a:t>
-                      </a:r>
-                    </a:p>
-                  </a:txBody>
-                  <a:tcPr>
-                    <a:solidFill>
-                      <a:srgbClr val="111111"/>
-                    </a:solidFill>
-                  </a:tcPr>
-                </a:tc>
-                <a:tc>
-                  <a:txBody>
-                    <a:bodyPr/>
-                    <a:lstStyle/>
-                    <a:p>
-                      <a:pPr>
-                        <a:defRPr sz="1300" b="0">
-                          <a:solidFill>
-                            <a:srgbClr val="FFFFFF"/>
-                          </a:solidFill>
-                          <a:latin typeface="Play"/>
-                          <a:ea typeface="Play"/>
-                          <a:cs typeface="Play"/>
-                        </a:defRPr>
-                      </a:pPr>
-                      <a:r>
-                        <a:t>186</a:t>
-                      </a:r>
-                    </a:p>
-                  </a:txBody>
-                  <a:tcPr>
-                    <a:solidFill>
-                      <a:srgbClr val="111111"/>
-                    </a:solidFill>
-                  </a:tcPr>
-                </a:tc>
-                <a:tc>
-                  <a:txBody>
-                    <a:bodyPr/>
-                    <a:lstStyle/>
-                    <a:p>
-                      <a:pPr>
-                        <a:defRPr sz="1300" b="0">
-                          <a:solidFill>
-                            <a:srgbClr val="FFFFFF"/>
-                          </a:solidFill>
-                          <a:latin typeface="Play"/>
-                          <a:ea typeface="Play"/>
-                          <a:cs typeface="Play"/>
-                        </a:defRPr>
-                      </a:pPr>
-                      <a:r>
-                        <a:t>4</a:t>
-                      </a:r>
-                    </a:p>
-                  </a:txBody>
-                  <a:tcPr>
-                    <a:solidFill>
-                      <a:srgbClr val="111111"/>
-                    </a:solidFill>
-                  </a:tcPr>
-                </a:tc>
-              </a:tr>
-              <a:tr h="533750">
-                <a:tc>
-                  <a:txBody>
-                    <a:bodyPr/>
-                    <a:lstStyle/>
-                    <a:p>
-                      <a:pPr>
-                        <a:defRPr sz="1300" b="0">
-                          <a:solidFill>
-                            <a:srgbClr val="FFFFFF"/>
-                          </a:solidFill>
-                          <a:latin typeface="Play"/>
-                          <a:ea typeface="Play"/>
-                          <a:cs typeface="Play"/>
-                        </a:defRPr>
-                      </a:pPr>
-                      <a:r>
-                        <a:t>Запросы на вёрстку/нед</a:t>
-                      </a:r>
-                    </a:p>
-                  </a:txBody>
-                  <a:tcPr>
-                    <a:solidFill>
-                      <a:srgbClr val="111111"/>
-                    </a:solidFill>
-                  </a:tcPr>
-                </a:tc>
-                <a:tc>
-                  <a:txBody>
-                    <a:bodyPr/>
-                    <a:lstStyle/>
-                    <a:p>
-                      <a:pPr>
-                        <a:defRPr sz="1300" b="0">
-                          <a:solidFill>
-                            <a:srgbClr val="FFFFFF"/>
-                          </a:solidFill>
-                          <a:latin typeface="Play"/>
-                          <a:ea typeface="Play"/>
-                          <a:cs typeface="Play"/>
-                        </a:defRPr>
-                      </a:pPr>
-                      <a:r>
-                        <a:t>11</a:t>
-                      </a:r>
-                    </a:p>
-                  </a:txBody>
-                  <a:tcPr>
-                    <a:solidFill>
-                      <a:srgbClr val="111111"/>
-                    </a:solidFill>
-                  </a:tcPr>
-                </a:tc>
-                <a:tc>
-                  <a:txBody>
-                    <a:bodyPr/>
-                    <a:lstStyle/>
-                    <a:p>
-                      <a:pPr>
-                        <a:defRPr sz="1300" b="0">
-                          <a:solidFill>
-                            <a:srgbClr val="FFFFFF"/>
-                          </a:solidFill>
-                          <a:latin typeface="Play"/>
-                          <a:ea typeface="Play"/>
-                          <a:cs typeface="Play"/>
-                        </a:defRPr>
-                      </a:pPr>
-                      <a:r>
-                        <a:t>38</a:t>
-                      </a:r>
-                    </a:p>
-                  </a:txBody>
-                  <a:tcPr>
-                    <a:solidFill>
-                      <a:srgbClr val="111111"/>
-                    </a:solidFill>
-                  </a:tcPr>
-                </a:tc>
-              </a:tr>
-              <a:tr h="533752">
-                <a:tc>
-                  <a:txBody>
-                    <a:bodyPr/>
-                    <a:lstStyle/>
-                    <a:p>
-                      <a:pPr>
-                        <a:defRPr sz="1300" b="0">
-                          <a:solidFill>
-                            <a:srgbClr val="FFFFFF"/>
-                          </a:solidFill>
-                          <a:latin typeface="Play"/>
-                          <a:ea typeface="Play"/>
-                          <a:cs typeface="Play"/>
-                        </a:defRPr>
-                      </a:pPr>
-                      <a:r>
-                        <a:t>Нарушения стиля</a:t>
-                      </a:r>
-                    </a:p>
-                  </a:txBody>
-                  <a:tcPr>
-                    <a:solidFill>
-                      <a:srgbClr val="111111"/>
-                    </a:solidFill>
-                  </a:tcPr>
-                </a:tc>
-                <a:tc>
-                  <a:txBody>
-                    <a:bodyPr/>
-                    <a:lstStyle/>
-                    <a:p>
-                      <a:pPr>
-                        <a:defRPr sz="1300" b="0">
-                          <a:solidFill>
-                            <a:srgbClr val="FFFFFF"/>
-                          </a:solidFill>
-                          <a:latin typeface="Play"/>
-                          <a:ea typeface="Play"/>
-                          <a:cs typeface="Play"/>
-                        </a:defRPr>
-                      </a:pPr>
-                      <a:r>
-                        <a:t>19</a:t>
-                      </a:r>
-                    </a:p>
-                  </a:txBody>
-                  <a:tcPr>
-                    <a:solidFill>
-                      <a:srgbClr val="111111"/>
-                    </a:solidFill>
-                  </a:tcPr>
-                </a:tc>
-                <a:tc>
-                  <a:txBody>
-                    <a:bodyPr/>
-                    <a:lstStyle/>
-                    <a:p>
-                      <a:pPr>
-                        <a:defRPr sz="1300" b="0">
-                          <a:solidFill>
-                            <a:srgbClr val="FFFFFF"/>
-                          </a:solidFill>
-                          <a:latin typeface="Play"/>
-                          <a:ea typeface="Play"/>
-                          <a:cs typeface="Play"/>
-                        </a:defRPr>
-                      </a:pPr>
-                      <a:r>
-                        <a:t>2</a:t>
-                      </a:r>
-                    </a:p>
-                  </a:txBody>
-                  <a:tcPr>
-                    <a:solidFill>
-                      <a:srgbClr val="111111"/>
-                    </a:solidFill>
-                  </a:tcPr>
-                </a:tc>
-              </a:tr>
             </a:tbl>
           </a:graphicData>
         </a:graphic>
@@ -9082,8 +10091,8 @@
         </p:nvSpPr>
         <p:spPr>
           <a:xfrm>
-            <a:off x="429280" y="4432493"/>
-            <a:ext cx="11310884" cy="1341120"/>
+            <a:off x="429280" y="4562299"/>
+            <a:ext cx="11310884" cy="944880"/>
           </a:xfrm>
           <a:prstGeom prst="rect">
             <a:avLst/>
@@ -9118,7 +10127,7 @@
                 <a:ea typeface="Play"/>
                 <a:cs typeface="Play"/>
               </a:rPr>
-              <a:t>• 6 недель, 2 команды, 68 презентаций</a:t>
+              <a:t>• Дизайн‑отдел 4 человека, 11 запросов/нед, 6 дней ожидания</a:t>
             </a:r>
           </a:p>
           <a:p>
@@ -9144,33 +10153,7 @@
                 <a:ea typeface="Play"/>
                 <a:cs typeface="Play"/>
               </a:rPr>
-              <a:t>• Время сборки 4 мин, 38 запросов закрыто</a:t>
-            </a:r>
-          </a:p>
-          <a:p>
-            <a:pPr algn="l">
-              <a:spcAft>
-                <a:spcPts val="300"/>
-              </a:spcAft>
-              <a:defRPr sz="1600">
-                <a:solidFill>
-                  <a:srgbClr val="FFFFFF"/>
-                </a:solidFill>
-                <a:latin typeface="Play"/>
-                <a:ea typeface="Play"/>
-                <a:cs typeface="Play"/>
-              </a:defRPr>
-            </a:pPr>
-            <a:r>
-              <a:rPr sz="1600">
-                <a:solidFill>
-                  <a:srgbClr val="FFFFFF"/>
-                </a:solidFill>
-                <a:latin typeface="Play"/>
-                <a:ea typeface="Play"/>
-                <a:cs typeface="Play"/>
-              </a:rPr>
-              <a:t>• Нарушений – 2 из 68</a:t>
+              <a:t>• Пилотные команды 2, 68 презентаций</a:t>
             </a:r>
           </a:p>
         </p:txBody>

--- a/samples/VK_WorkSpace_Клиентская_конференция_Шабл__focus.pptx
+++ b/samples/VK_WorkSpace_Клиентская_конференция_Шабл__focus.pptx
@@ -284,6 +284,220 @@
     </p:ext>
   </p:extLst>
 </p:presentation>
+</file>
+
+<file path=ppt/charts/chart1.xml><?xml version="1.0" encoding="utf-8"?>
+<c:chartSpace xmlns:c="http://schemas.openxmlformats.org/drawingml/2006/chart" xmlns:a="http://schemas.openxmlformats.org/drawingml/2006/main" xmlns:r="http://schemas.openxmlformats.org/officeDocument/2006/relationships">
+  <c:date1904 val="0"/>
+  <c:chart>
+    <c:autoTitleDeleted val="1"/>
+    <c:plotArea>
+      <c:barChart>
+        <c:barDir val="col"/>
+        <c:grouping val="clustered"/>
+        <c:ser>
+          <c:idx val="0"/>
+          <c:order val="0"/>
+          <c:tx>
+            <c:strRef>
+              <c:f>Sheet1!$B$1</c:f>
+              <c:strCache>
+                <c:ptCount val="1"/>
+                <c:pt idx="0">
+                  <c:v>Время</c:v>
+                </c:pt>
+              </c:strCache>
+            </c:strRef>
+          </c:tx>
+          <c:spPr>
+            <a:solidFill>
+              <a:srgbClr val="0077FF"/>
+            </a:solidFill>
+            <a:ln>
+              <a:solidFill>
+                <a:srgbClr val="0077FF"/>
+              </a:solidFill>
+            </a:ln>
+          </c:spPr>
+          <c:cat>
+            <c:strRef>
+              <c:f>Sheet1!$A$2:$A$3</c:f>
+              <c:strCache>
+                <c:ptCount val="2"/>
+                <c:pt idx="0">
+                  <c:v>Текущая сборка</c:v>
+                </c:pt>
+                <c:pt idx="1">
+                  <c:v>Пилот</c:v>
+                </c:pt>
+              </c:strCache>
+            </c:strRef>
+          </c:cat>
+          <c:val>
+            <c:numRef>
+              <c:f>Sheet1!$B$2:$B$3</c:f>
+              <c:numCache>
+                <c:formatCode>General</c:formatCode>
+                <c:ptCount val="2"/>
+                <c:pt idx="0">
+                  <c:v>186.0</c:v>
+                </c:pt>
+                <c:pt idx="1">
+                  <c:v>4.0</c:v>
+                </c:pt>
+              </c:numCache>
+            </c:numRef>
+          </c:val>
+        </c:ser>
+        <c:dLbls>
+          <c:numFmt formatCode="0&quot; минут&quot;" sourceLinked="0"/>
+          <c:txPr>
+            <a:bodyPr wrap="none"/>
+            <a:lstStyle/>
+            <a:p>
+              <a:pPr>
+                <a:defRPr sz="1100" b="0">
+                  <a:solidFill>
+                    <a:srgbClr val="FFFFFF"/>
+                  </a:solidFill>
+                  <a:latin typeface="Play"/>
+                  <a:ea typeface="Play"/>
+                  <a:cs typeface="Play"/>
+                </a:defRPr>
+              </a:pPr>
+            </a:p>
+          </c:txPr>
+          <c:dLblPos val="outEnd"/>
+          <c:showLegendKey val="0"/>
+          <c:showVal val="1"/>
+          <c:showCatName val="0"/>
+          <c:showSerName val="0"/>
+          <c:showPercent val="0"/>
+          <c:showBubbleSize val="0"/>
+          <c:showLeaderLines val="1"/>
+        </c:dLbls>
+        <c:gapWidth val="60"/>
+        <c:axId val="-2068027336"/>
+        <c:axId val="-2113994440"/>
+      </c:barChart>
+      <c:catAx>
+        <c:axId val="-2068027336"/>
+        <c:scaling>
+          <c:orientation val="minMax"/>
+        </c:scaling>
+        <c:delete val="0"/>
+        <c:axPos val="b"/>
+        <c:majorTickMark val="out"/>
+        <c:minorTickMark val="none"/>
+        <c:tickLblPos val="nextTo"/>
+        <c:txPr>
+          <a:bodyPr/>
+          <a:lstStyle/>
+          <a:p>
+            <a:pPr>
+              <a:defRPr sz="1100" b="0">
+                <a:solidFill>
+                  <a:srgbClr val="FFFFFF"/>
+                </a:solidFill>
+                <a:latin typeface="Play"/>
+                <a:ea typeface="Play"/>
+                <a:cs typeface="Play"/>
+              </a:defRPr>
+            </a:pPr>
+          </a:p>
+        </c:txPr>
+        <c:crossAx val="-2113994440"/>
+        <c:crosses val="autoZero"/>
+        <c:auto val="1"/>
+        <c:lblAlgn val="ctr"/>
+        <c:lblOffset val="100"/>
+        <c:noMultiLvlLbl val="0"/>
+      </c:catAx>
+      <c:valAx>
+        <c:axId val="-2113994440"/>
+        <c:scaling/>
+        <c:delete val="0"/>
+        <c:axPos val="l"/>
+        <c:majorGridlines>
+          <c:spPr>
+            <a:ln w="9525">
+              <a:solidFill>
+                <a:srgbClr val="3C3C3C"/>
+              </a:solidFill>
+            </a:ln>
+          </c:spPr>
+        </c:majorGridlines>
+        <c:title>
+          <c:tx>
+            <c:rich>
+              <a:bodyPr rot="0" vert="horz"/>
+              <a:lstStyle/>
+              <a:p>
+                <a:pPr>
+                  <a:defRPr sz="1100" b="0">
+                    <a:solidFill>
+                      <a:srgbClr val="FFFFFF"/>
+                    </a:solidFill>
+                    <a:latin typeface="Play"/>
+                    <a:ea typeface="Play"/>
+                    <a:cs typeface="Play"/>
+                  </a:defRPr>
+                </a:pPr>
+                <a:r>
+                  <a:t>Время, минут</a:t>
+                </a:r>
+              </a:p>
+            </c:rich>
+          </c:tx>
+          <c:layout/>
+          <c:overlay val="0"/>
+        </c:title>
+        <c:majorTickMark val="out"/>
+        <c:minorTickMark val="none"/>
+        <c:tickLblPos val="nextTo"/>
+        <c:txPr>
+          <a:bodyPr/>
+          <a:lstStyle/>
+          <a:p>
+            <a:pPr>
+              <a:defRPr sz="1100" b="0">
+                <a:solidFill>
+                  <a:srgbClr val="FFFFFF"/>
+                </a:solidFill>
+                <a:latin typeface="Play"/>
+                <a:ea typeface="Play"/>
+                <a:cs typeface="Play"/>
+              </a:defRPr>
+            </a:pPr>
+          </a:p>
+        </c:txPr>
+        <c:crossAx val="-2068027336"/>
+        <c:crosses val="autoZero"/>
+      </c:valAx>
+    </c:plotArea>
+    <c:dispBlanksAs val="gap"/>
+  </c:chart>
+  <c:txPr>
+    <a:bodyPr/>
+    <a:lstStyle/>
+    <a:p>
+      <a:pPr>
+        <a:defRPr sz="1200" b="0">
+          <a:solidFill>
+            <a:srgbClr val="FFFFFF"/>
+          </a:solidFill>
+          <a:latin typeface="Play"/>
+          <a:ea typeface="Play"/>
+          <a:cs typeface="Play"/>
+        </a:defRPr>
+      </a:pPr>
+      <a:endParaRPr lang="en-US"/>
+    </a:p>
+  </c:txPr>
+  <c:externalData r:id="rId1">
+    <c:autoUpdate val="0"/>
+  </c:externalData>
+</c:chartSpace>
 </file>
 
 <file path=ppt/notesMasters/notesMaster1.xml><?xml version="1.0" encoding="utf-8"?>
@@ -6391,7 +6605,7 @@
                 <a:ea typeface="Play"/>
                 <a:cs typeface="Play"/>
               </a:rPr>
-              <a:t>Автоматическая вёрстка презентаций</a:t>
+              <a:t>Защита инициативы: сервис автоматической вёрстки презентаций</a:t>
             </a:r>
           </a:p>
         </p:txBody>
@@ -6405,550 +6619,6 @@
 </file>
 
 <file path=ppt/slides/slide31.xml><?xml version="1.0" encoding="utf-8"?>
-<p:sld xmlns:a="http://schemas.openxmlformats.org/drawingml/2006/main" xmlns:p="http://schemas.openxmlformats.org/presentationml/2006/main" xmlns:r="http://schemas.openxmlformats.org/officeDocument/2006/relationships">
-  <p:cSld>
-    <p:spTree>
-      <p:nvGrpSpPr>
-        <p:cNvPr id="1" name=""/>
-        <p:cNvGrpSpPr/>
-        <p:nvPr/>
-      </p:nvGrpSpPr>
-      <p:grpSpPr/>
-      <p:sp>
-        <p:nvSpPr>
-          <p:cNvPr id="2" name="title"/>
-          <p:cNvSpPr txBox="1"/>
-          <p:nvPr/>
-        </p:nvSpPr>
-        <p:spPr>
-          <a:xfrm>
-            <a:off x="429280" y="424715"/>
-            <a:ext cx="7827264" cy="822960"/>
-          </a:xfrm>
-          <a:prstGeom prst="rect">
-            <a:avLst/>
-          </a:prstGeom>
-          <a:noFill/>
-        </p:spPr>
-        <p:txBody>
-          <a:bodyPr wrap="square" lIns="76200" rIns="76200" tIns="50800" bIns="50800">
-            <a:spAutoFit/>
-          </a:bodyPr>
-          <a:lstStyle/>
-          <a:p>
-            <a:pPr algn="l">
-              <a:spcAft>
-                <a:spcPts val="300"/>
-              </a:spcAft>
-              <a:defRPr sz="3200">
-                <a:solidFill>
-                  <a:srgbClr val="FFFFFF"/>
-                </a:solidFill>
-                <a:latin typeface="Play"/>
-                <a:ea typeface="Play"/>
-                <a:cs typeface="Play"/>
-              </a:defRPr>
-            </a:pPr>
-            <a:r>
-              <a:rPr sz="3200">
-                <a:solidFill>
-                  <a:srgbClr val="FFFFFF"/>
-                </a:solidFill>
-                <a:latin typeface="Play"/>
-                <a:ea typeface="Play"/>
-                <a:cs typeface="Play"/>
-              </a:rPr>
-              <a:t>Контекст и возможность</a:t>
-            </a:r>
-          </a:p>
-        </p:txBody>
-      </p:sp>
-      <p:graphicFrame>
-        <p:nvGraphicFramePr>
-          <p:cNvPr id="3" name="Table 2"/>
-          <p:cNvGraphicFramePr>
-            <a:graphicFrameLocks noGrp="1"/>
-          </p:cNvGraphicFramePr>
-          <p:nvPr/>
-        </p:nvGraphicFramePr>
-        <p:xfrm>
-          <a:off x="429280" y="1592290"/>
-          <a:ext cx="11310884" cy="2337343"/>
-        </p:xfrm>
-        <a:graphic>
-          <a:graphicData uri="http://schemas.openxmlformats.org/drawingml/2006/table">
-            <a:tbl>
-              <a:tblPr firstRow="1" bandRow="1">
-                <a:tableStyleId>{5C22544A-7EE6-4342-B048-85BDC9FD1C3A}</a:tableStyleId>
-              </a:tblPr>
-              <a:tblGrid>
-                <a:gridCol w="5655442"/>
-                <a:gridCol w="5655442"/>
-              </a:tblGrid>
-              <a:tr h="389557">
-                <a:tc>
-                  <a:txBody>
-                    <a:bodyPr/>
-                    <a:lstStyle/>
-                    <a:p>
-                      <a:pPr>
-                        <a:defRPr sz="1300" b="1">
-                          <a:solidFill>
-                            <a:srgbClr val="FFFFFF"/>
-                          </a:solidFill>
-                          <a:latin typeface="Play"/>
-                          <a:ea typeface="Play"/>
-                          <a:cs typeface="Play"/>
-                        </a:defRPr>
-                      </a:pPr>
-                      <a:r>
-                        <a:t>Показатель</a:t>
-                      </a:r>
-                    </a:p>
-                  </a:txBody>
-                  <a:tcPr>
-                    <a:solidFill>
-                      <a:srgbClr val="0077FF"/>
-                    </a:solidFill>
-                  </a:tcPr>
-                </a:tc>
-                <a:tc>
-                  <a:txBody>
-                    <a:bodyPr/>
-                    <a:lstStyle/>
-                    <a:p>
-                      <a:pPr>
-                        <a:defRPr sz="1300" b="1">
-                          <a:solidFill>
-                            <a:srgbClr val="FFFFFF"/>
-                          </a:solidFill>
-                          <a:latin typeface="Play"/>
-                          <a:ea typeface="Play"/>
-                          <a:cs typeface="Play"/>
-                        </a:defRPr>
-                      </a:pPr>
-                      <a:r>
-                        <a:t>Значение</a:t>
-                      </a:r>
-                    </a:p>
-                  </a:txBody>
-                  <a:tcPr>
-                    <a:solidFill>
-                      <a:srgbClr val="0077FF"/>
-                    </a:solidFill>
-                  </a:tcPr>
-                </a:tc>
-              </a:tr>
-              <a:tr h="389557">
-                <a:tc>
-                  <a:txBody>
-                    <a:bodyPr/>
-                    <a:lstStyle/>
-                    <a:p>
-                      <a:pPr>
-                        <a:defRPr sz="1300" b="0">
-                          <a:solidFill>
-                            <a:srgbClr val="FFFFFF"/>
-                          </a:solidFill>
-                          <a:latin typeface="Play"/>
-                          <a:ea typeface="Play"/>
-                          <a:cs typeface="Play"/>
-                        </a:defRPr>
-                      </a:pPr>
-                      <a:r>
-                        <a:t>Сборка</a:t>
-                      </a:r>
-                    </a:p>
-                  </a:txBody>
-                  <a:tcPr>
-                    <a:solidFill>
-                      <a:srgbClr val="111111"/>
-                    </a:solidFill>
-                  </a:tcPr>
-                </a:tc>
-                <a:tc>
-                  <a:txBody>
-                    <a:bodyPr/>
-                    <a:lstStyle/>
-                    <a:p>
-                      <a:pPr>
-                        <a:defRPr sz="1300" b="0">
-                          <a:solidFill>
-                            <a:srgbClr val="FFFFFF"/>
-                          </a:solidFill>
-                          <a:latin typeface="Play"/>
-                          <a:ea typeface="Play"/>
-                          <a:cs typeface="Play"/>
-                        </a:defRPr>
-                      </a:pPr>
-                      <a:r>
-                        <a:t>186 мин</a:t>
-                      </a:r>
-                    </a:p>
-                  </a:txBody>
-                  <a:tcPr>
-                    <a:solidFill>
-                      <a:srgbClr val="111111"/>
-                    </a:solidFill>
-                  </a:tcPr>
-                </a:tc>
-              </a:tr>
-              <a:tr h="389557">
-                <a:tc>
-                  <a:txBody>
-                    <a:bodyPr/>
-                    <a:lstStyle/>
-                    <a:p>
-                      <a:pPr>
-                        <a:defRPr sz="1300" b="0">
-                          <a:solidFill>
-                            <a:srgbClr val="FFFFFF"/>
-                          </a:solidFill>
-                          <a:latin typeface="Play"/>
-                          <a:ea typeface="Play"/>
-                          <a:cs typeface="Play"/>
-                        </a:defRPr>
-                      </a:pPr>
-                      <a:r>
-                        <a:t>Правки</a:t>
-                      </a:r>
-                    </a:p>
-                  </a:txBody>
-                  <a:tcPr>
-                    <a:solidFill>
-                      <a:srgbClr val="111111"/>
-                    </a:solidFill>
-                  </a:tcPr>
-                </a:tc>
-                <a:tc>
-                  <a:txBody>
-                    <a:bodyPr/>
-                    <a:lstStyle/>
-                    <a:p>
-                      <a:pPr>
-                        <a:defRPr sz="1300" b="0">
-                          <a:solidFill>
-                            <a:srgbClr val="FFFFFF"/>
-                          </a:solidFill>
-                          <a:latin typeface="Play"/>
-                          <a:ea typeface="Play"/>
-                          <a:cs typeface="Play"/>
-                        </a:defRPr>
-                      </a:pPr>
-                      <a:r>
-                        <a:t>74 мин</a:t>
-                      </a:r>
-                    </a:p>
-                  </a:txBody>
-                  <a:tcPr>
-                    <a:solidFill>
-                      <a:srgbClr val="111111"/>
-                    </a:solidFill>
-                  </a:tcPr>
-                </a:tc>
-              </a:tr>
-              <a:tr h="389557">
-                <a:tc>
-                  <a:txBody>
-                    <a:bodyPr/>
-                    <a:lstStyle/>
-                    <a:p>
-                      <a:pPr>
-                        <a:defRPr sz="1300" b="0">
-                          <a:solidFill>
-                            <a:srgbClr val="FFFFFF"/>
-                          </a:solidFill>
-                          <a:latin typeface="Play"/>
-                          <a:ea typeface="Play"/>
-                          <a:cs typeface="Play"/>
-                        </a:defRPr>
-                      </a:pPr>
-                      <a:r>
-                        <a:t>Нарушения</a:t>
-                      </a:r>
-                    </a:p>
-                  </a:txBody>
-                  <a:tcPr>
-                    <a:solidFill>
-                      <a:srgbClr val="111111"/>
-                    </a:solidFill>
-                  </a:tcPr>
-                </a:tc>
-                <a:tc>
-                  <a:txBody>
-                    <a:bodyPr/>
-                    <a:lstStyle/>
-                    <a:p>
-                      <a:pPr>
-                        <a:defRPr sz="1300" b="0">
-                          <a:solidFill>
-                            <a:srgbClr val="FFFFFF"/>
-                          </a:solidFill>
-                          <a:latin typeface="Play"/>
-                          <a:ea typeface="Play"/>
-                          <a:cs typeface="Play"/>
-                        </a:defRPr>
-                      </a:pPr>
-                      <a:r>
-                        <a:t>19 из 42</a:t>
-                      </a:r>
-                    </a:p>
-                  </a:txBody>
-                  <a:tcPr>
-                    <a:solidFill>
-                      <a:srgbClr val="111111"/>
-                    </a:solidFill>
-                  </a:tcPr>
-                </a:tc>
-              </a:tr>
-              <a:tr h="389557">
-                <a:tc>
-                  <a:txBody>
-                    <a:bodyPr/>
-                    <a:lstStyle/>
-                    <a:p>
-                      <a:pPr>
-                        <a:defRPr sz="1300" b="0">
-                          <a:solidFill>
-                            <a:srgbClr val="FFFFFF"/>
-                          </a:solidFill>
-                          <a:latin typeface="Play"/>
-                          <a:ea typeface="Play"/>
-                          <a:cs typeface="Play"/>
-                        </a:defRPr>
-                      </a:pPr>
-                      <a:r>
-                        <a:t>Запросы</a:t>
-                      </a:r>
-                    </a:p>
-                  </a:txBody>
-                  <a:tcPr>
-                    <a:solidFill>
-                      <a:srgbClr val="111111"/>
-                    </a:solidFill>
-                  </a:tcPr>
-                </a:tc>
-                <a:tc>
-                  <a:txBody>
-                    <a:bodyPr/>
-                    <a:lstStyle/>
-                    <a:p>
-                      <a:pPr>
-                        <a:defRPr sz="1300" b="0">
-                          <a:solidFill>
-                            <a:srgbClr val="FFFFFF"/>
-                          </a:solidFill>
-                          <a:latin typeface="Play"/>
-                          <a:ea typeface="Play"/>
-                          <a:cs typeface="Play"/>
-                        </a:defRPr>
-                      </a:pPr>
-                      <a:r>
-                        <a:t>11/нед</a:t>
-                      </a:r>
-                    </a:p>
-                  </a:txBody>
-                  <a:tcPr>
-                    <a:solidFill>
-                      <a:srgbClr val="111111"/>
-                    </a:solidFill>
-                  </a:tcPr>
-                </a:tc>
-              </a:tr>
-              <a:tr h="389558">
-                <a:tc>
-                  <a:txBody>
-                    <a:bodyPr/>
-                    <a:lstStyle/>
-                    <a:p>
-                      <a:pPr>
-                        <a:defRPr sz="1300" b="0">
-                          <a:solidFill>
-                            <a:srgbClr val="FFFFFF"/>
-                          </a:solidFill>
-                          <a:latin typeface="Play"/>
-                          <a:ea typeface="Play"/>
-                          <a:cs typeface="Play"/>
-                        </a:defRPr>
-                      </a:pPr>
-                      <a:r>
-                        <a:t>Ожидание</a:t>
-                      </a:r>
-                    </a:p>
-                  </a:txBody>
-                  <a:tcPr>
-                    <a:solidFill>
-                      <a:srgbClr val="111111"/>
-                    </a:solidFill>
-                  </a:tcPr>
-                </a:tc>
-                <a:tc>
-                  <a:txBody>
-                    <a:bodyPr/>
-                    <a:lstStyle/>
-                    <a:p>
-                      <a:pPr>
-                        <a:defRPr sz="1300" b="0">
-                          <a:solidFill>
-                            <a:srgbClr val="FFFFFF"/>
-                          </a:solidFill>
-                          <a:latin typeface="Play"/>
-                          <a:ea typeface="Play"/>
-                          <a:cs typeface="Play"/>
-                        </a:defRPr>
-                      </a:pPr>
-                      <a:r>
-                        <a:t>6 дней</a:t>
-                      </a:r>
-                    </a:p>
-                  </a:txBody>
-                  <a:tcPr>
-                    <a:solidFill>
-                      <a:srgbClr val="111111"/>
-                    </a:solidFill>
-                  </a:tcPr>
-                </a:tc>
-              </a:tr>
-            </a:tbl>
-          </a:graphicData>
-        </a:graphic>
-      </p:graphicFrame>
-      <p:sp>
-        <p:nvSpPr>
-          <p:cNvPr id="4" name="body"/>
-          <p:cNvSpPr txBox="1"/>
-          <p:nvPr/>
-        </p:nvSpPr>
-        <p:spPr>
-          <a:xfrm>
-            <a:off x="429280" y="4101083"/>
-            <a:ext cx="11310884" cy="1672529"/>
-          </a:xfrm>
-          <a:prstGeom prst="rect">
-            <a:avLst/>
-          </a:prstGeom>
-          <a:noFill/>
-        </p:spPr>
-        <p:txBody>
-          <a:bodyPr wrap="square" lIns="76200" rIns="76200" tIns="50800" bIns="50800">
-            <a:spAutoFit/>
-          </a:bodyPr>
-          <a:lstStyle/>
-          <a:p>
-            <a:pPr algn="l">
-              <a:spcAft>
-                <a:spcPts val="300"/>
-              </a:spcAft>
-              <a:defRPr sz="1600">
-                <a:solidFill>
-                  <a:srgbClr val="FFFFFF"/>
-                </a:solidFill>
-                <a:latin typeface="Play"/>
-                <a:ea typeface="Play"/>
-                <a:cs typeface="Play"/>
-              </a:defRPr>
-            </a:pPr>
-            <a:r>
-              <a:rPr sz="1600">
-                <a:solidFill>
-                  <a:srgbClr val="FFFFFF"/>
-                </a:solidFill>
-                <a:latin typeface="Play"/>
-                <a:ea typeface="Play"/>
-                <a:cs typeface="Play"/>
-              </a:rPr>
-              <a:t>• 42 колоды, 186 мин сборки</a:t>
-            </a:r>
-          </a:p>
-          <a:p>
-            <a:pPr algn="l">
-              <a:spcAft>
-                <a:spcPts val="300"/>
-              </a:spcAft>
-              <a:defRPr sz="1600">
-                <a:solidFill>
-                  <a:srgbClr val="FFFFFF"/>
-                </a:solidFill>
-                <a:latin typeface="Play"/>
-                <a:ea typeface="Play"/>
-                <a:cs typeface="Play"/>
-              </a:defRPr>
-            </a:pPr>
-            <a:r>
-              <a:rPr sz="1600">
-                <a:solidFill>
-                  <a:srgbClr val="FFFFFF"/>
-                </a:solidFill>
-                <a:latin typeface="Play"/>
-                <a:ea typeface="Play"/>
-                <a:cs typeface="Play"/>
-              </a:rPr>
-              <a:t>• 74 мин правок</a:t>
-            </a:r>
-          </a:p>
-          <a:p>
-            <a:pPr algn="l">
-              <a:spcAft>
-                <a:spcPts val="300"/>
-              </a:spcAft>
-              <a:defRPr sz="1600">
-                <a:solidFill>
-                  <a:srgbClr val="FFFFFF"/>
-                </a:solidFill>
-                <a:latin typeface="Play"/>
-                <a:ea typeface="Play"/>
-                <a:cs typeface="Play"/>
-              </a:defRPr>
-            </a:pPr>
-            <a:r>
-              <a:rPr sz="1600">
-                <a:solidFill>
-                  <a:srgbClr val="FFFFFF"/>
-                </a:solidFill>
-                <a:latin typeface="Play"/>
-                <a:ea typeface="Play"/>
-                <a:cs typeface="Play"/>
-              </a:rPr>
-              <a:t>• 19 нарушений фирменного стиля</a:t>
-            </a:r>
-          </a:p>
-          <a:p>
-            <a:pPr algn="l">
-              <a:spcAft>
-                <a:spcPts val="300"/>
-              </a:spcAft>
-              <a:defRPr sz="1600">
-                <a:solidFill>
-                  <a:srgbClr val="FFFFFF"/>
-                </a:solidFill>
-                <a:latin typeface="Play"/>
-                <a:ea typeface="Play"/>
-                <a:cs typeface="Play"/>
-              </a:defRPr>
-            </a:pPr>
-            <a:r>
-              <a:rPr sz="1600">
-                <a:solidFill>
-                  <a:srgbClr val="FFFFFF"/>
-                </a:solidFill>
-                <a:latin typeface="Play"/>
-                <a:ea typeface="Play"/>
-                <a:cs typeface="Play"/>
-              </a:rPr>
-              <a:t>• 4 человека, 11 запросов/нед, 6 дней ожидания</a:t>
-            </a:r>
-          </a:p>
-        </p:txBody>
-      </p:sp>
-    </p:spTree>
-  </p:cSld>
-  <p:clrMapOvr>
-    <a:masterClrMapping/>
-  </p:clrMapOvr>
-</p:sld>
-</file>
-
-<file path=ppt/slides/slide32.xml><?xml version="1.0" encoding="utf-8"?>
 <p:sld xmlns:a="http://schemas.openxmlformats.org/drawingml/2006/main" xmlns:p="http://schemas.openxmlformats.org/presentationml/2006/main" xmlns:r="http://schemas.openxmlformats.org/officeDocument/2006/relationships">
   <p:cSld>
     <p:spTree>
@@ -7031,7 +6701,7 @@
         <p:spPr>
           <a:xfrm>
             <a:off x="300817" y="297715"/>
-            <a:ext cx="11566347" cy="5311465"/>
+            <a:ext cx="8081264" cy="5544651"/>
           </a:xfrm>
           <a:prstGeom prst="roundRect">
             <a:avLst/>
@@ -7094,7 +6764,7 @@
               <a:spcAft>
                 <a:spcPts val="300"/>
               </a:spcAft>
-              <a:defRPr sz="3200">
+              <a:defRPr sz="4000">
                 <a:solidFill>
                   <a:srgbClr val="FFFFFF"/>
                 </a:solidFill>
@@ -7104,7 +6774,7 @@
               </a:defRPr>
             </a:pPr>
             <a:r>
-              <a:rPr sz="3200">
+              <a:rPr sz="4000">
                 <a:solidFill>
                   <a:srgbClr val="FFFFFF"/>
                 </a:solidFill>
@@ -7112,336 +6782,21 @@
                 <a:ea typeface="Play"/>
                 <a:cs typeface="Play"/>
               </a:rPr>
-              <a:t>Предложение</a:t>
+              <a:t>Контекст и возможность</a:t>
             </a:r>
           </a:p>
         </p:txBody>
       </p:sp>
       <p:sp>
         <p:nvSpPr>
-          <p:cNvPr id="682" name="Pentagon 681"/>
-          <p:cNvSpPr/>
-          <p:nvPr/>
-        </p:nvSpPr>
-        <p:spPr>
-          <a:xfrm>
-            <a:off x="427817" y="2459151"/>
-            <a:ext cx="2153870" cy="1335399"/>
-          </a:xfrm>
-          <a:prstGeom prst="homePlate">
-            <a:avLst/>
-          </a:prstGeom>
-          <a:solidFill>
-            <a:srgbClr val="0077FF"/>
-          </a:solidFill>
-          <a:ln>
-            <a:noFill/>
-          </a:ln>
-        </p:spPr>
-        <p:style>
-          <a:lnRef idx="1">
-            <a:schemeClr val="accent1"/>
-          </a:lnRef>
-          <a:fillRef idx="3">
-            <a:schemeClr val="accent1"/>
-          </a:fillRef>
-          <a:effectRef idx="2">
-            <a:schemeClr val="accent1"/>
-          </a:effectRef>
-          <a:fontRef idx="minor">
-            <a:schemeClr val="lt1"/>
-          </a:fontRef>
-        </p:style>
-        <p:txBody>
-          <a:bodyPr rtlCol="0" anchor="ctr" wrap="square" lIns="12700" rIns="12700" tIns="12700" bIns="12700"/>
-          <a:lstStyle/>
-          <a:p>
-            <a:pPr algn="ctr">
-              <a:defRPr sz="1143" b="0">
-                <a:solidFill>
-                  <a:srgbClr val="FFFFFF"/>
-                </a:solidFill>
-                <a:latin typeface="Play"/>
-                <a:ea typeface="Play"/>
-                <a:cs typeface="Play"/>
-              </a:defRPr>
-            </a:pPr>
-            <a:r>
-              <a:rPr sz="1143" b="0">
-                <a:solidFill>
-                  <a:srgbClr val="FFFFFF"/>
-                </a:solidFill>
-                <a:latin typeface="Play"/>
-                <a:ea typeface="Play"/>
-                <a:cs typeface="Play"/>
-              </a:rPr>
-              <a:t>Шаблон</a:t>
-            </a:r>
-          </a:p>
-        </p:txBody>
-      </p:sp>
-      <p:sp>
-        <p:nvSpPr>
-          <p:cNvPr id="683" name="Chevron 682"/>
-          <p:cNvSpPr/>
-          <p:nvPr/>
-        </p:nvSpPr>
-        <p:spPr>
-          <a:xfrm>
-            <a:off x="2717436" y="2459151"/>
-            <a:ext cx="2153870" cy="1335399"/>
-          </a:xfrm>
-          <a:prstGeom prst="chevron">
-            <a:avLst/>
-          </a:prstGeom>
-          <a:solidFill>
-            <a:srgbClr val="0077FF"/>
-          </a:solidFill>
-          <a:ln>
-            <a:noFill/>
-          </a:ln>
-        </p:spPr>
-        <p:style>
-          <a:lnRef idx="1">
-            <a:schemeClr val="accent1"/>
-          </a:lnRef>
-          <a:fillRef idx="3">
-            <a:schemeClr val="accent1"/>
-          </a:fillRef>
-          <a:effectRef idx="2">
-            <a:schemeClr val="accent1"/>
-          </a:effectRef>
-          <a:fontRef idx="minor">
-            <a:schemeClr val="lt1"/>
-          </a:fontRef>
-        </p:style>
-        <p:txBody>
-          <a:bodyPr rtlCol="0" anchor="ctr" wrap="square" lIns="12700" rIns="12700" tIns="12700" bIns="12700"/>
-          <a:lstStyle/>
-          <a:p>
-            <a:pPr algn="ctr">
-              <a:defRPr sz="1143" b="0">
-                <a:solidFill>
-                  <a:srgbClr val="FFFFFF"/>
-                </a:solidFill>
-                <a:latin typeface="Play"/>
-                <a:ea typeface="Play"/>
-                <a:cs typeface="Play"/>
-              </a:defRPr>
-            </a:pPr>
-            <a:r>
-              <a:rPr sz="1143" b="0">
-                <a:solidFill>
-                  <a:srgbClr val="FFFFFF"/>
-                </a:solidFill>
-                <a:latin typeface="Play"/>
-                <a:ea typeface="Play"/>
-                <a:cs typeface="Play"/>
-              </a:rPr>
-              <a:t>План колоды</a:t>
-            </a:r>
-          </a:p>
-        </p:txBody>
-      </p:sp>
-      <p:sp>
-        <p:nvSpPr>
-          <p:cNvPr id="684" name="Chevron 683"/>
-          <p:cNvSpPr/>
-          <p:nvPr/>
-        </p:nvSpPr>
-        <p:spPr>
-          <a:xfrm>
-            <a:off x="5007055" y="2459151"/>
-            <a:ext cx="2153870" cy="1335399"/>
-          </a:xfrm>
-          <a:prstGeom prst="chevron">
-            <a:avLst/>
-          </a:prstGeom>
-          <a:solidFill>
-            <a:srgbClr val="0077FF"/>
-          </a:solidFill>
-          <a:ln>
-            <a:noFill/>
-          </a:ln>
-        </p:spPr>
-        <p:style>
-          <a:lnRef idx="1">
-            <a:schemeClr val="accent1"/>
-          </a:lnRef>
-          <a:fillRef idx="3">
-            <a:schemeClr val="accent1"/>
-          </a:fillRef>
-          <a:effectRef idx="2">
-            <a:schemeClr val="accent1"/>
-          </a:effectRef>
-          <a:fontRef idx="minor">
-            <a:schemeClr val="lt1"/>
-          </a:fontRef>
-        </p:style>
-        <p:txBody>
-          <a:bodyPr rtlCol="0" anchor="ctr" wrap="square" lIns="12700" rIns="12700" tIns="12700" bIns="12700"/>
-          <a:lstStyle/>
-          <a:p>
-            <a:pPr algn="ctr">
-              <a:defRPr sz="1143" b="0">
-                <a:solidFill>
-                  <a:srgbClr val="FFFFFF"/>
-                </a:solidFill>
-                <a:latin typeface="Play"/>
-                <a:ea typeface="Play"/>
-                <a:cs typeface="Play"/>
-              </a:defRPr>
-            </a:pPr>
-            <a:r>
-              <a:rPr sz="1143" b="0">
-                <a:solidFill>
-                  <a:srgbClr val="FFFFFF"/>
-                </a:solidFill>
-                <a:latin typeface="Play"/>
-                <a:ea typeface="Play"/>
-                <a:cs typeface="Play"/>
-              </a:rPr>
-              <a:t>Вёрстка</a:t>
-            </a:r>
-          </a:p>
-        </p:txBody>
-      </p:sp>
-      <p:sp>
-        <p:nvSpPr>
-          <p:cNvPr id="685" name="Chevron 684"/>
-          <p:cNvSpPr/>
-          <p:nvPr/>
-        </p:nvSpPr>
-        <p:spPr>
-          <a:xfrm>
-            <a:off x="7296674" y="2459151"/>
-            <a:ext cx="2153870" cy="1335399"/>
-          </a:xfrm>
-          <a:prstGeom prst="chevron">
-            <a:avLst/>
-          </a:prstGeom>
-          <a:solidFill>
-            <a:srgbClr val="0077FF"/>
-          </a:solidFill>
-          <a:ln>
-            <a:noFill/>
-          </a:ln>
-        </p:spPr>
-        <p:style>
-          <a:lnRef idx="1">
-            <a:schemeClr val="accent1"/>
-          </a:lnRef>
-          <a:fillRef idx="3">
-            <a:schemeClr val="accent1"/>
-          </a:fillRef>
-          <a:effectRef idx="2">
-            <a:schemeClr val="accent1"/>
-          </a:effectRef>
-          <a:fontRef idx="minor">
-            <a:schemeClr val="lt1"/>
-          </a:fontRef>
-        </p:style>
-        <p:txBody>
-          <a:bodyPr rtlCol="0" anchor="ctr" wrap="square" lIns="12700" rIns="12700" tIns="12700" bIns="12700"/>
-          <a:lstStyle/>
-          <a:p>
-            <a:pPr algn="ctr">
-              <a:defRPr sz="1143" b="0">
-                <a:solidFill>
-                  <a:srgbClr val="FFFFFF"/>
-                </a:solidFill>
-                <a:latin typeface="Play"/>
-                <a:ea typeface="Play"/>
-                <a:cs typeface="Play"/>
-              </a:defRPr>
-            </a:pPr>
-            <a:r>
-              <a:rPr sz="1143" b="0">
-                <a:solidFill>
-                  <a:srgbClr val="FFFFFF"/>
-                </a:solidFill>
-                <a:latin typeface="Play"/>
-                <a:ea typeface="Play"/>
-                <a:cs typeface="Play"/>
-              </a:rPr>
-              <a:t>Аудит</a:t>
-            </a:r>
-          </a:p>
-        </p:txBody>
-      </p:sp>
-      <p:sp>
-        <p:nvSpPr>
-          <p:cNvPr id="686" name="Chevron 685"/>
-          <p:cNvSpPr/>
-          <p:nvPr/>
-        </p:nvSpPr>
-        <p:spPr>
-          <a:xfrm>
-            <a:off x="9586293" y="2459151"/>
-            <a:ext cx="2153870" cy="1335399"/>
-          </a:xfrm>
-          <a:prstGeom prst="chevron">
-            <a:avLst/>
-          </a:prstGeom>
-          <a:solidFill>
-            <a:srgbClr val="0077FF"/>
-          </a:solidFill>
-          <a:ln>
-            <a:noFill/>
-          </a:ln>
-        </p:spPr>
-        <p:style>
-          <a:lnRef idx="1">
-            <a:schemeClr val="accent1"/>
-          </a:lnRef>
-          <a:fillRef idx="3">
-            <a:schemeClr val="accent1"/>
-          </a:fillRef>
-          <a:effectRef idx="2">
-            <a:schemeClr val="accent1"/>
-          </a:effectRef>
-          <a:fontRef idx="minor">
-            <a:schemeClr val="lt1"/>
-          </a:fontRef>
-        </p:style>
-        <p:txBody>
-          <a:bodyPr rtlCol="0" anchor="ctr" wrap="square" lIns="12700" rIns="12700" tIns="12700" bIns="12700"/>
-          <a:lstStyle/>
-          <a:p>
-            <a:pPr algn="ctr">
-              <a:defRPr sz="1143" b="0">
-                <a:solidFill>
-                  <a:srgbClr val="FFFFFF"/>
-                </a:solidFill>
-                <a:latin typeface="Play"/>
-                <a:ea typeface="Play"/>
-                <a:cs typeface="Play"/>
-              </a:defRPr>
-            </a:pPr>
-            <a:r>
-              <a:rPr sz="1143" b="0">
-                <a:solidFill>
-                  <a:srgbClr val="FFFFFF"/>
-                </a:solidFill>
-                <a:latin typeface="Play"/>
-                <a:ea typeface="Play"/>
-                <a:cs typeface="Play"/>
-              </a:rPr>
-              <a:t>Экспорт</a:t>
-            </a:r>
-          </a:p>
-        </p:txBody>
-      </p:sp>
-      <p:sp>
-        <p:nvSpPr>
-          <p:cNvPr id="687" name="body"/>
+          <p:cNvPr id="682" name="lead"/>
           <p:cNvSpPr txBox="1"/>
           <p:nvPr/>
         </p:nvSpPr>
         <p:spPr>
           <a:xfrm>
-            <a:off x="427817" y="4588101"/>
-            <a:ext cx="11312347" cy="1341120"/>
+            <a:off x="427817" y="1837052"/>
+            <a:ext cx="7827264" cy="1682064"/>
           </a:xfrm>
           <a:prstGeom prst="rect">
             <a:avLst/>
@@ -7458,7 +6813,7 @@
               <a:spcAft>
                 <a:spcPts val="300"/>
               </a:spcAft>
-              <a:defRPr sz="1600">
+              <a:defRPr sz="4000">
                 <a:solidFill>
                   <a:srgbClr val="FFFFFF"/>
                 </a:solidFill>
@@ -7468,7 +6823,7 @@
               </a:defRPr>
             </a:pPr>
             <a:r>
-              <a:rPr sz="1600">
+              <a:rPr sz="4000">
                 <a:solidFill>
                   <a:srgbClr val="FFFFFF"/>
                 </a:solidFill>
@@ -7476,15 +6831,38 @@
                 <a:ea typeface="Play"/>
                 <a:cs typeface="Play"/>
               </a:rPr>
-              <a:t>• Сервис принимает pptx, материалы, применяет дизайн‑систему</a:t>
+              <a:t>42 колоды, 12 слайдов, 186 минут сборки</a:t>
             </a:r>
           </a:p>
+        </p:txBody>
+      </p:sp>
+      <p:sp>
+        <p:nvSpPr>
+          <p:cNvPr id="683" name="body"/>
+          <p:cNvSpPr txBox="1"/>
+          <p:nvPr/>
+        </p:nvSpPr>
+        <p:spPr>
+          <a:xfrm>
+            <a:off x="427817" y="3764647"/>
+            <a:ext cx="7827264" cy="2164573"/>
+          </a:xfrm>
+          <a:prstGeom prst="rect">
+            <a:avLst/>
+          </a:prstGeom>
+          <a:noFill/>
+        </p:spPr>
+        <p:txBody>
+          <a:bodyPr wrap="square" lIns="76200" rIns="76200" tIns="50800" bIns="50800">
+            <a:spAutoFit/>
+          </a:bodyPr>
+          <a:lstStyle/>
           <a:p>
             <a:pPr algn="l">
               <a:spcAft>
                 <a:spcPts val="300"/>
               </a:spcAft>
-              <a:defRPr sz="1600">
+              <a:defRPr sz="2800">
                 <a:solidFill>
                   <a:srgbClr val="FFFFFF"/>
                 </a:solidFill>
@@ -7494,7 +6872,7 @@
               </a:defRPr>
             </a:pPr>
             <a:r>
-              <a:rPr sz="1600">
+              <a:rPr sz="2800">
                 <a:solidFill>
                   <a:srgbClr val="FFFFFF"/>
                 </a:solidFill>
@@ -7502,7 +6880,7 @@
                 <a:ea typeface="Play"/>
                 <a:cs typeface="Play"/>
               </a:rPr>
-              <a:t>• Экспорт в pptx, pdf, html, слайды редактируемы</a:t>
+              <a:t>• 74 минуты правки, 19 нарушений фирменного стиля</a:t>
             </a:r>
           </a:p>
           <a:p>
@@ -7510,7 +6888,7 @@
               <a:spcAft>
                 <a:spcPts val="300"/>
               </a:spcAft>
-              <a:defRPr sz="1600">
+              <a:defRPr sz="2800">
                 <a:solidFill>
                   <a:srgbClr val="FFFFFF"/>
                 </a:solidFill>
@@ -7520,7 +6898,7 @@
               </a:defRPr>
             </a:pPr>
             <a:r>
-              <a:rPr sz="1600">
+              <a:rPr sz="2800">
                 <a:solidFill>
                   <a:srgbClr val="FFFFFF"/>
                 </a:solidFill>
@@ -7528,7 +6906,198 @@
                 <a:ea typeface="Play"/>
                 <a:cs typeface="Play"/>
               </a:rPr>
-              <a:t>• Аудит качества устраняет нарушения стиля</a:t>
+              <a:t>• 4 дизайнера, 11 запросов/неделя, 6 дней ожидания</a:t>
+            </a:r>
+          </a:p>
+        </p:txBody>
+      </p:sp>
+    </p:spTree>
+  </p:cSld>
+  <p:clrMapOvr>
+    <a:masterClrMapping/>
+  </p:clrMapOvr>
+</p:sld>
+</file>
+
+<file path=ppt/slides/slide32.xml><?xml version="1.0" encoding="utf-8"?>
+<p:sld xmlns:a="http://schemas.openxmlformats.org/drawingml/2006/main" xmlns:p="http://schemas.openxmlformats.org/presentationml/2006/main" xmlns:r="http://schemas.openxmlformats.org/officeDocument/2006/relationships">
+  <p:cSld>
+    <p:spTree>
+      <p:nvGrpSpPr>
+        <p:cNvPr id="1" name=""/>
+        <p:cNvGrpSpPr/>
+        <p:nvPr/>
+      </p:nvGrpSpPr>
+      <p:grpSpPr/>
+      <p:sp>
+        <p:nvSpPr>
+          <p:cNvPr id="2" name="title"/>
+          <p:cNvSpPr txBox="1"/>
+          <p:nvPr/>
+        </p:nvSpPr>
+        <p:spPr>
+          <a:xfrm>
+            <a:off x="429280" y="424715"/>
+            <a:ext cx="7827264" cy="822960"/>
+          </a:xfrm>
+          <a:prstGeom prst="rect">
+            <a:avLst/>
+          </a:prstGeom>
+          <a:noFill/>
+        </p:spPr>
+        <p:txBody>
+          <a:bodyPr wrap="square" lIns="76200" rIns="76200" tIns="50800" bIns="50800">
+            <a:spAutoFit/>
+          </a:bodyPr>
+          <a:lstStyle/>
+          <a:p>
+            <a:pPr algn="l">
+              <a:spcAft>
+                <a:spcPts val="300"/>
+              </a:spcAft>
+              <a:defRPr sz="4000">
+                <a:solidFill>
+                  <a:srgbClr val="FFFFFF"/>
+                </a:solidFill>
+                <a:latin typeface="Play"/>
+                <a:ea typeface="Play"/>
+                <a:cs typeface="Play"/>
+              </a:defRPr>
+            </a:pPr>
+            <a:r>
+              <a:rPr sz="4000">
+                <a:solidFill>
+                  <a:srgbClr val="FFFFFF"/>
+                </a:solidFill>
+                <a:latin typeface="Play"/>
+                <a:ea typeface="Play"/>
+                <a:cs typeface="Play"/>
+              </a:rPr>
+              <a:t>Предложение</a:t>
+            </a:r>
+          </a:p>
+        </p:txBody>
+      </p:sp>
+      <p:sp>
+        <p:nvSpPr>
+          <p:cNvPr id="3" name="lead"/>
+          <p:cNvSpPr txBox="1"/>
+          <p:nvPr/>
+        </p:nvSpPr>
+        <p:spPr>
+          <a:xfrm>
+            <a:off x="429280" y="1592290"/>
+            <a:ext cx="7827264" cy="1768826"/>
+          </a:xfrm>
+          <a:prstGeom prst="rect">
+            <a:avLst/>
+          </a:prstGeom>
+          <a:noFill/>
+        </p:spPr>
+        <p:txBody>
+          <a:bodyPr wrap="square" lIns="76200" rIns="76200" tIns="50800" bIns="50800">
+            <a:spAutoFit/>
+          </a:bodyPr>
+          <a:lstStyle/>
+          <a:p>
+            <a:pPr algn="ctr">
+              <a:spcAft>
+                <a:spcPts val="300"/>
+              </a:spcAft>
+              <a:defRPr sz="4000">
+                <a:solidFill>
+                  <a:srgbClr val="FFFFFF"/>
+                </a:solidFill>
+                <a:latin typeface="Play"/>
+                <a:ea typeface="Play"/>
+                <a:cs typeface="Play"/>
+              </a:defRPr>
+            </a:pPr>
+            <a:r>
+              <a:rPr sz="4000">
+                <a:solidFill>
+                  <a:srgbClr val="FFFFFF"/>
+                </a:solidFill>
+                <a:latin typeface="Play"/>
+                <a:ea typeface="Play"/>
+                <a:cs typeface="Play"/>
+              </a:rPr>
+              <a:t>Сервис принимает шаблон pptx и материалы</a:t>
+            </a:r>
+          </a:p>
+        </p:txBody>
+      </p:sp>
+      <p:sp>
+        <p:nvSpPr>
+          <p:cNvPr id="4" name="body"/>
+          <p:cNvSpPr txBox="1"/>
+          <p:nvPr/>
+        </p:nvSpPr>
+        <p:spPr>
+          <a:xfrm>
+            <a:off x="429280" y="3611995"/>
+            <a:ext cx="7827264" cy="2161617"/>
+          </a:xfrm>
+          <a:prstGeom prst="rect">
+            <a:avLst/>
+          </a:prstGeom>
+          <a:noFill/>
+        </p:spPr>
+        <p:txBody>
+          <a:bodyPr wrap="square" lIns="76200" rIns="76200" tIns="50800" bIns="50800">
+            <a:spAutoFit/>
+          </a:bodyPr>
+          <a:lstStyle/>
+          <a:p>
+            <a:pPr algn="l">
+              <a:spcAft>
+                <a:spcPts val="300"/>
+              </a:spcAft>
+              <a:defRPr sz="2800">
+                <a:solidFill>
+                  <a:srgbClr val="FFFFFF"/>
+                </a:solidFill>
+                <a:latin typeface="Play"/>
+                <a:ea typeface="Play"/>
+                <a:cs typeface="Play"/>
+              </a:defRPr>
+            </a:pPr>
+            <a:r>
+              <a:rPr sz="2800">
+                <a:solidFill>
+                  <a:srgbClr val="FFFFFF"/>
+                </a:solidFill>
+                <a:latin typeface="Play"/>
+                <a:ea typeface="Play"/>
+                <a:cs typeface="Play"/>
+              </a:rPr>
+              <a:t>• Генерирует колоду, экспортирует pptx/pdf/html</a:t>
+            </a:r>
+          </a:p>
+          <a:p>
+            <a:pPr algn="l">
+              <a:spcAft>
+                <a:spcPts val="300"/>
+              </a:spcAft>
+              <a:defRPr sz="2800">
+                <a:solidFill>
+                  <a:srgbClr val="FFFFFF"/>
+                </a:solidFill>
+                <a:latin typeface="Play"/>
+                <a:ea typeface="Play"/>
+                <a:cs typeface="Play"/>
+              </a:defRPr>
+            </a:pPr>
+            <a:r>
+              <a:rPr sz="2800">
+                <a:solidFill>
+                  <a:srgbClr val="FFFFFF"/>
+                </a:solidFill>
+                <a:latin typeface="Play"/>
+                <a:ea typeface="Play"/>
+                <a:cs typeface="Play"/>
+              </a:rPr>
+              <a:t>• Автоматический аудит исправляет нарушения стиля</a:t>
             </a:r>
           </a:p>
         </p:txBody>
@@ -7649,7 +7218,7 @@
                 <a:ea typeface="Play"/>
                 <a:cs typeface="Play"/>
               </a:rPr>
-              <a:t>План пилота</a:t>
+              <a:t>Ожидаемый эффект</a:t>
             </a:r>
           </a:p>
         </p:txBody>
@@ -7663,7 +7232,7 @@
         <p:spPr>
           <a:xfrm>
             <a:off x="429280" y="1504165"/>
-            <a:ext cx="7827264" cy="1476995"/>
+            <a:ext cx="7827264" cy="1328287"/>
           </a:xfrm>
           <a:prstGeom prst="rect">
             <a:avLst/>
@@ -7680,7 +7249,7 @@
               <a:spcAft>
                 <a:spcPts val="300"/>
               </a:spcAft>
-              <a:defRPr sz="5400">
+              <a:defRPr sz="4000">
                 <a:solidFill>
                   <a:srgbClr val="FFFFFF"/>
                 </a:solidFill>
@@ -7690,7 +7259,7 @@
               </a:defRPr>
             </a:pPr>
             <a:r>
-              <a:rPr sz="5400">
+              <a:rPr sz="4000">
                 <a:solidFill>
                   <a:srgbClr val="FFFFFF"/>
                 </a:solidFill>
@@ -7698,7 +7267,7 @@
                 <a:ea typeface="Play"/>
                 <a:cs typeface="Play"/>
               </a:rPr>
-              <a:t>6 недель</a:t>
+              <a:t>Сборка 4 минуты вместо 186</a:t>
             </a:r>
           </a:p>
         </p:txBody>
@@ -7711,8 +7280,8 @@
         </p:nvSpPr>
         <p:spPr>
           <a:xfrm>
-            <a:off x="429280" y="3215564"/>
-            <a:ext cx="7827264" cy="2195329"/>
+            <a:off x="429280" y="3066856"/>
+            <a:ext cx="7827264" cy="2344036"/>
           </a:xfrm>
           <a:prstGeom prst="rect">
             <a:avLst/>
@@ -7729,7 +7298,7 @@
               <a:spcAft>
                 <a:spcPts val="300"/>
               </a:spcAft>
-              <a:defRPr sz="4000">
+              <a:defRPr sz="2400">
                 <a:solidFill>
                   <a:srgbClr val="FFFFFF"/>
                 </a:solidFill>
@@ -7739,7 +7308,7 @@
               </a:defRPr>
             </a:pPr>
             <a:r>
-              <a:rPr sz="4000">
+              <a:rPr sz="2400">
                 <a:solidFill>
                   <a:srgbClr val="FFFFFF"/>
                 </a:solidFill>
@@ -7747,7 +7316,7 @@
                 <a:ea typeface="Play"/>
                 <a:cs typeface="Play"/>
               </a:rPr>
-              <a:t>• 2 команды</a:t>
+              <a:t>• Время до первой версии 1 день вместо 6</a:t>
             </a:r>
           </a:p>
           <a:p>
@@ -7755,7 +7324,7 @@
               <a:spcAft>
                 <a:spcPts val="300"/>
               </a:spcAft>
-              <a:defRPr sz="4000">
+              <a:defRPr sz="2400">
                 <a:solidFill>
                   <a:srgbClr val="FFFFFF"/>
                 </a:solidFill>
@@ -7765,7 +7334,7 @@
               </a:defRPr>
             </a:pPr>
             <a:r>
-              <a:rPr sz="4000">
+              <a:rPr sz="2400">
                 <a:solidFill>
                   <a:srgbClr val="FFFFFF"/>
                 </a:solidFill>
@@ -7773,7 +7342,33 @@
                 <a:ea typeface="Play"/>
                 <a:cs typeface="Play"/>
               </a:rPr>
-              <a:t>• 68 презентаций</a:t>
+              <a:t>• Нарушений 2 из 68, все исправлены</a:t>
+            </a:r>
+          </a:p>
+          <a:p>
+            <a:pPr algn="l">
+              <a:spcAft>
+                <a:spcPts val="300"/>
+              </a:spcAft>
+              <a:defRPr sz="2400">
+                <a:solidFill>
+                  <a:srgbClr val="FFFFFF"/>
+                </a:solidFill>
+                <a:latin typeface="Play"/>
+                <a:ea typeface="Play"/>
+                <a:cs typeface="Play"/>
+              </a:defRPr>
+            </a:pPr>
+            <a:r>
+              <a:rPr sz="2400">
+                <a:solidFill>
+                  <a:srgbClr val="FFFFFF"/>
+                </a:solidFill>
+                <a:latin typeface="Play"/>
+                <a:ea typeface="Play"/>
+                <a:cs typeface="Play"/>
+              </a:rPr>
+              <a:t>• Дизайнеры закрыли 38 запросов вместо 11</a:t>
             </a:r>
           </a:p>
         </p:txBody>
@@ -7840,7 +7435,92 @@
                 <a:ea typeface="Play"/>
                 <a:cs typeface="Play"/>
               </a:rPr>
-              <a:t>Результаты пилота</a:t>
+              <a:t>Время сборки колоды</a:t>
+            </a:r>
+          </a:p>
+        </p:txBody>
+      </p:sp>
+      <p:graphicFrame>
+        <p:nvGraphicFramePr>
+          <p:cNvPr id="3" name="Chart 2"/>
+          <p:cNvGraphicFramePr>
+            <a:graphicFrameLocks noGrp="1"/>
+          </p:cNvGraphicFramePr>
+          <p:nvPr/>
+        </p:nvGraphicFramePr>
+        <p:xfrm>
+          <a:off x="429280" y="1492575"/>
+          <a:ext cx="11310884" cy="4014604"/>
+        </p:xfrm>
+        <a:graphic>
+          <a:graphicData uri="http://schemas.openxmlformats.org/drawingml/2006/chart">
+            <c:chart xmlns:c="http://schemas.openxmlformats.org/drawingml/2006/chart" r:id="rId4"/>
+          </a:graphicData>
+        </a:graphic>
+      </p:graphicFrame>
+    </p:spTree>
+  </p:cSld>
+  <p:clrMapOvr>
+    <a:masterClrMapping/>
+  </p:clrMapOvr>
+</p:sld>
+</file>
+
+<file path=ppt/slides/slide35.xml><?xml version="1.0" encoding="utf-8"?>
+<p:sld xmlns:a="http://schemas.openxmlformats.org/drawingml/2006/main" xmlns:p="http://schemas.openxmlformats.org/presentationml/2006/main" xmlns:r="http://schemas.openxmlformats.org/officeDocument/2006/relationships">
+  <p:cSld>
+    <p:spTree>
+      <p:nvGrpSpPr>
+        <p:cNvPr id="1" name=""/>
+        <p:cNvGrpSpPr/>
+        <p:nvPr/>
+      </p:nvGrpSpPr>
+      <p:grpSpPr/>
+      <p:sp>
+        <p:nvSpPr>
+          <p:cNvPr id="2" name="title"/>
+          <p:cNvSpPr txBox="1"/>
+          <p:nvPr/>
+        </p:nvSpPr>
+        <p:spPr>
+          <a:xfrm>
+            <a:off x="429280" y="424715"/>
+            <a:ext cx="7827264" cy="822960"/>
+          </a:xfrm>
+          <a:prstGeom prst="rect">
+            <a:avLst/>
+          </a:prstGeom>
+          <a:noFill/>
+        </p:spPr>
+        <p:txBody>
+          <a:bodyPr wrap="square" lIns="76200" rIns="76200" tIns="50800" bIns="50800">
+            <a:spAutoFit/>
+          </a:bodyPr>
+          <a:lstStyle/>
+          <a:p>
+            <a:pPr algn="l">
+              <a:spcAft>
+                <a:spcPts val="300"/>
+              </a:spcAft>
+              <a:defRPr sz="3200">
+                <a:solidFill>
+                  <a:srgbClr val="FFFFFF"/>
+                </a:solidFill>
+                <a:latin typeface="Play"/>
+                <a:ea typeface="Play"/>
+                <a:cs typeface="Play"/>
+              </a:defRPr>
+            </a:pPr>
+            <a:r>
+              <a:rPr sz="3200">
+                <a:solidFill>
+                  <a:srgbClr val="FFFFFF"/>
+                </a:solidFill>
+                <a:latin typeface="Play"/>
+                <a:ea typeface="Play"/>
+                <a:cs typeface="Play"/>
+              </a:rPr>
+              <a:t>Нарушения фирменного стиля</a:t>
             </a:r>
           </a:p>
         </p:txBody>
@@ -7854,8 +7534,8 @@
           <p:nvPr/>
         </p:nvGraphicFramePr>
         <p:xfrm>
-          <a:off x="429280" y="1492575"/>
-          <a:ext cx="11310884" cy="2237312"/>
+          <a:off x="429280" y="1664162"/>
+          <a:ext cx="11310884" cy="3753589"/>
         </p:xfrm>
         <a:graphic>
           <a:graphicData uri="http://schemas.openxmlformats.org/drawingml/2006/table">
@@ -7868,7 +7548,7 @@
                 <a:gridCol w="3770294"/>
                 <a:gridCol w="3770296"/>
               </a:tblGrid>
-              <a:tr h="447462">
+              <a:tr h="1876794">
                 <a:tc>
                   <a:txBody>
                     <a:bodyPr/>
@@ -7911,7 +7591,7 @@
                         </a:defRPr>
                       </a:pPr>
                       <a:r>
-                        <a:t>До пилота</a:t>
+                        <a:t>Текущие</a:t>
                       </a:r>
                     </a:p>
                   </a:txBody>
@@ -7937,7 +7617,7 @@
                         </a:defRPr>
                       </a:pPr>
                       <a:r>
-                        <a:t>После пилота</a:t>
+                        <a:t>Пилот</a:t>
                       </a:r>
                     </a:p>
                   </a:txBody>
@@ -7948,7 +7628,7 @@
                   </a:tcPr>
                 </a:tc>
               </a:tr>
-              <a:tr h="447462">
+              <a:tr h="1876795">
                 <a:tc>
                   <a:txBody>
                     <a:bodyPr/>
@@ -7965,167 +7645,7 @@
                         </a:defRPr>
                       </a:pPr>
                       <a:r>
-                        <a:t>Сборка</a:t>
-                      </a:r>
-                    </a:p>
-                  </a:txBody>
-                  <a:tcPr>
-                    <a:solidFill>
-                      <a:srgbClr val="111111"/>
-                    </a:solidFill>
-                  </a:tcPr>
-                </a:tc>
-                <a:tc>
-                  <a:txBody>
-                    <a:bodyPr/>
-                    <a:lstStyle/>
-                    <a:p>
-                      <a:pPr>
-                        <a:defRPr sz="1300" b="0">
-                          <a:solidFill>
-                            <a:srgbClr val="FFFFFF"/>
-                          </a:solidFill>
-                          <a:latin typeface="Play"/>
-                          <a:ea typeface="Play"/>
-                          <a:cs typeface="Play"/>
-                        </a:defRPr>
-                      </a:pPr>
-                      <a:r>
-                        <a:t>186 мин</a:t>
-                      </a:r>
-                    </a:p>
-                  </a:txBody>
-                  <a:tcPr>
-                    <a:solidFill>
-                      <a:srgbClr val="111111"/>
-                    </a:solidFill>
-                  </a:tcPr>
-                </a:tc>
-                <a:tc>
-                  <a:txBody>
-                    <a:bodyPr/>
-                    <a:lstStyle/>
-                    <a:p>
-                      <a:pPr>
-                        <a:defRPr sz="1300" b="0">
-                          <a:solidFill>
-                            <a:srgbClr val="FFFFFF"/>
-                          </a:solidFill>
-                          <a:latin typeface="Play"/>
-                          <a:ea typeface="Play"/>
-                          <a:cs typeface="Play"/>
-                        </a:defRPr>
-                      </a:pPr>
-                      <a:r>
-                        <a:t>4 мин</a:t>
-                      </a:r>
-                    </a:p>
-                  </a:txBody>
-                  <a:tcPr>
-                    <a:solidFill>
-                      <a:srgbClr val="111111"/>
-                    </a:solidFill>
-                  </a:tcPr>
-                </a:tc>
-              </a:tr>
-              <a:tr h="447462">
-                <a:tc>
-                  <a:txBody>
-                    <a:bodyPr/>
-                    <a:lstStyle/>
-                    <a:p>
-                      <a:pPr>
-                        <a:defRPr sz="1300" b="0">
-                          <a:solidFill>
-                            <a:srgbClr val="FFFFFF"/>
-                          </a:solidFill>
-                          <a:latin typeface="Play"/>
-                          <a:ea typeface="Play"/>
-                          <a:cs typeface="Play"/>
-                        </a:defRPr>
-                      </a:pPr>
-                      <a:r>
-                        <a:t>Время до первой версии</a:t>
-                      </a:r>
-                    </a:p>
-                  </a:txBody>
-                  <a:tcPr>
-                    <a:solidFill>
-                      <a:srgbClr val="111111"/>
-                    </a:solidFill>
-                  </a:tcPr>
-                </a:tc>
-                <a:tc>
-                  <a:txBody>
-                    <a:bodyPr/>
-                    <a:lstStyle/>
-                    <a:p>
-                      <a:pPr>
-                        <a:defRPr sz="1300" b="0">
-                          <a:solidFill>
-                            <a:srgbClr val="FFFFFF"/>
-                          </a:solidFill>
-                          <a:latin typeface="Play"/>
-                          <a:ea typeface="Play"/>
-                          <a:cs typeface="Play"/>
-                        </a:defRPr>
-                      </a:pPr>
-                      <a:r>
-                        <a:t>6 дней</a:t>
-                      </a:r>
-                    </a:p>
-                  </a:txBody>
-                  <a:tcPr>
-                    <a:solidFill>
-                      <a:srgbClr val="111111"/>
-                    </a:solidFill>
-                  </a:tcPr>
-                </a:tc>
-                <a:tc>
-                  <a:txBody>
-                    <a:bodyPr/>
-                    <a:lstStyle/>
-                    <a:p>
-                      <a:pPr>
-                        <a:defRPr sz="1300" b="0">
-                          <a:solidFill>
-                            <a:srgbClr val="FFFFFF"/>
-                          </a:solidFill>
-                          <a:latin typeface="Play"/>
-                          <a:ea typeface="Play"/>
-                          <a:cs typeface="Play"/>
-                        </a:defRPr>
-                      </a:pPr>
-                      <a:r>
-                        <a:t>1 день</a:t>
-                      </a:r>
-                    </a:p>
-                  </a:txBody>
-                  <a:tcPr>
-                    <a:solidFill>
-                      <a:srgbClr val="111111"/>
-                    </a:solidFill>
-                  </a:tcPr>
-                </a:tc>
-              </a:tr>
-              <a:tr h="447462">
-                <a:tc>
-                  <a:txBody>
-                    <a:bodyPr/>
-                    <a:lstStyle/>
-                    <a:p>
-                      <a:pPr>
-                        <a:defRPr sz="1300" b="0">
-                          <a:solidFill>
-                            <a:srgbClr val="FFFFFF"/>
-                          </a:solidFill>
-                          <a:latin typeface="Play"/>
-                          <a:ea typeface="Play"/>
-                          <a:cs typeface="Play"/>
-                        </a:defRPr>
-                      </a:pPr>
-                      <a:r>
-                        <a:t>Нарушения</a:t>
+                        <a:t>Нарушения фирменного стиля</a:t>
                       </a:r>
                     </a:p>
                   </a:txBody>
@@ -8188,217 +7708,10 @@
                   </a:tcPr>
                 </a:tc>
               </a:tr>
-              <a:tr h="447464">
-                <a:tc>
-                  <a:txBody>
-                    <a:bodyPr/>
-                    <a:lstStyle/>
-                    <a:p>
-                      <a:pPr>
-                        <a:defRPr sz="1300" b="0">
-                          <a:solidFill>
-                            <a:srgbClr val="FFFFFF"/>
-                          </a:solidFill>
-                          <a:latin typeface="Play"/>
-                          <a:ea typeface="Play"/>
-                          <a:cs typeface="Play"/>
-                        </a:defRPr>
-                      </a:pPr>
-                      <a:r>
-                        <a:t>Запросы</a:t>
-                      </a:r>
-                    </a:p>
-                  </a:txBody>
-                  <a:tcPr>
-                    <a:solidFill>
-                      <a:srgbClr val="111111"/>
-                    </a:solidFill>
-                  </a:tcPr>
-                </a:tc>
-                <a:tc>
-                  <a:txBody>
-                    <a:bodyPr/>
-                    <a:lstStyle/>
-                    <a:p>
-                      <a:pPr>
-                        <a:defRPr sz="1300" b="0">
-                          <a:solidFill>
-                            <a:srgbClr val="FFFFFF"/>
-                          </a:solidFill>
-                          <a:latin typeface="Play"/>
-                          <a:ea typeface="Play"/>
-                          <a:cs typeface="Play"/>
-                        </a:defRPr>
-                      </a:pPr>
-                      <a:r>
-                        <a:t>11/нед</a:t>
-                      </a:r>
-                    </a:p>
-                  </a:txBody>
-                  <a:tcPr>
-                    <a:solidFill>
-                      <a:srgbClr val="111111"/>
-                    </a:solidFill>
-                  </a:tcPr>
-                </a:tc>
-                <a:tc>
-                  <a:txBody>
-                    <a:bodyPr/>
-                    <a:lstStyle/>
-                    <a:p>
-                      <a:pPr>
-                        <a:defRPr sz="1300" b="0">
-                          <a:solidFill>
-                            <a:srgbClr val="FFFFFF"/>
-                          </a:solidFill>
-                          <a:latin typeface="Play"/>
-                          <a:ea typeface="Play"/>
-                          <a:cs typeface="Play"/>
-                        </a:defRPr>
-                      </a:pPr>
-                      <a:r>
-                        <a:t>38/нед</a:t>
-                      </a:r>
-                    </a:p>
-                  </a:txBody>
-                  <a:tcPr>
-                    <a:solidFill>
-                      <a:srgbClr val="111111"/>
-                    </a:solidFill>
-                  </a:tcPr>
-                </a:tc>
-              </a:tr>
             </a:tbl>
           </a:graphicData>
         </a:graphic>
       </p:graphicFrame>
-      <p:sp>
-        <p:nvSpPr>
-          <p:cNvPr id="4" name="body"/>
-          <p:cNvSpPr txBox="1"/>
-          <p:nvPr/>
-        </p:nvSpPr>
-        <p:spPr>
-          <a:xfrm>
-            <a:off x="429280" y="3901337"/>
-            <a:ext cx="11310884" cy="1605841"/>
-          </a:xfrm>
-          <a:prstGeom prst="rect">
-            <a:avLst/>
-          </a:prstGeom>
-          <a:noFill/>
-        </p:spPr>
-        <p:txBody>
-          <a:bodyPr wrap="square" lIns="76200" rIns="76200" tIns="50800" bIns="50800">
-            <a:spAutoFit/>
-          </a:bodyPr>
-          <a:lstStyle/>
-          <a:p>
-            <a:pPr algn="l">
-              <a:spcAft>
-                <a:spcPts val="300"/>
-              </a:spcAft>
-              <a:defRPr sz="1600">
-                <a:solidFill>
-                  <a:srgbClr val="FFFFFF"/>
-                </a:solidFill>
-                <a:latin typeface="Play"/>
-                <a:ea typeface="Play"/>
-                <a:cs typeface="Play"/>
-              </a:defRPr>
-            </a:pPr>
-            <a:r>
-              <a:rPr sz="1600">
-                <a:solidFill>
-                  <a:srgbClr val="FFFFFF"/>
-                </a:solidFill>
-                <a:latin typeface="Play"/>
-                <a:ea typeface="Play"/>
-                <a:cs typeface="Play"/>
-              </a:rPr>
-              <a:t>• Сборка 4 мин вместо 186</a:t>
-            </a:r>
-          </a:p>
-          <a:p>
-            <a:pPr algn="l">
-              <a:spcAft>
-                <a:spcPts val="300"/>
-              </a:spcAft>
-              <a:defRPr sz="1600">
-                <a:solidFill>
-                  <a:srgbClr val="FFFFFF"/>
-                </a:solidFill>
-                <a:latin typeface="Play"/>
-                <a:ea typeface="Play"/>
-                <a:cs typeface="Play"/>
-              </a:defRPr>
-            </a:pPr>
-            <a:r>
-              <a:rPr sz="1600">
-                <a:solidFill>
-                  <a:srgbClr val="FFFFFF"/>
-                </a:solidFill>
-                <a:latin typeface="Play"/>
-                <a:ea typeface="Play"/>
-                <a:cs typeface="Play"/>
-              </a:rPr>
-              <a:t>• 1 день до первой версии вместо 6</a:t>
-            </a:r>
-          </a:p>
-          <a:p>
-            <a:pPr algn="l">
-              <a:spcAft>
-                <a:spcPts val="300"/>
-              </a:spcAft>
-              <a:defRPr sz="1600">
-                <a:solidFill>
-                  <a:srgbClr val="FFFFFF"/>
-                </a:solidFill>
-                <a:latin typeface="Play"/>
-                <a:ea typeface="Play"/>
-                <a:cs typeface="Play"/>
-              </a:defRPr>
-            </a:pPr>
-            <a:r>
-              <a:rPr sz="1600">
-                <a:solidFill>
-                  <a:srgbClr val="FFFFFF"/>
-                </a:solidFill>
-                <a:latin typeface="Play"/>
-                <a:ea typeface="Play"/>
-                <a:cs typeface="Play"/>
-              </a:rPr>
-              <a:t>• 2 нарушения из 68 вместо 19</a:t>
-            </a:r>
-          </a:p>
-          <a:p>
-            <a:pPr algn="l">
-              <a:spcAft>
-                <a:spcPts val="300"/>
-              </a:spcAft>
-              <a:defRPr sz="1600">
-                <a:solidFill>
-                  <a:srgbClr val="FFFFFF"/>
-                </a:solidFill>
-                <a:latin typeface="Play"/>
-                <a:ea typeface="Play"/>
-                <a:cs typeface="Play"/>
-              </a:defRPr>
-            </a:pPr>
-            <a:r>
-              <a:rPr sz="1600">
-                <a:solidFill>
-                  <a:srgbClr val="FFFFFF"/>
-                </a:solidFill>
-                <a:latin typeface="Play"/>
-                <a:ea typeface="Play"/>
-                <a:cs typeface="Play"/>
-              </a:rPr>
-              <a:t>• 38 запросов вместо 11</a:t>
-            </a:r>
-          </a:p>
-        </p:txBody>
-      </p:sp>
     </p:spTree>
   </p:cSld>
   <p:clrMapOvr>
@@ -8407,7 +7720,7 @@
 </p:sld>
 </file>
 
-<file path=ppt/slides/slide35.xml><?xml version="1.0" encoding="utf-8"?>
+<file path=ppt/slides/slide36.xml><?xml version="1.0" encoding="utf-8"?>
 <p:sld xmlns:a="http://schemas.openxmlformats.org/drawingml/2006/main" xmlns:p="http://schemas.openxmlformats.org/presentationml/2006/main" xmlns:r="http://schemas.openxmlformats.org/officeDocument/2006/relationships">
   <p:cSld>
     <p:spTree>
@@ -8443,104 +7756,6 @@
               <a:spcAft>
                 <a:spcPts val="300"/>
               </a:spcAft>
-              <a:defRPr sz="4000">
-                <a:solidFill>
-                  <a:srgbClr val="FFFFFF"/>
-                </a:solidFill>
-                <a:latin typeface="Play"/>
-                <a:ea typeface="Play"/>
-                <a:cs typeface="Play"/>
-              </a:defRPr>
-            </a:pPr>
-            <a:r>
-              <a:rPr sz="4000">
-                <a:solidFill>
-                  <a:srgbClr val="FFFFFF"/>
-                </a:solidFill>
-                <a:latin typeface="Play"/>
-                <a:ea typeface="Play"/>
-                <a:cs typeface="Play"/>
-              </a:rPr>
-              <a:t>Ожидаемый эффект</a:t>
-            </a:r>
-          </a:p>
-        </p:txBody>
-      </p:sp>
-      <p:sp>
-        <p:nvSpPr>
-          <p:cNvPr id="3" name="lead"/>
-          <p:cNvSpPr txBox="1"/>
-          <p:nvPr/>
-        </p:nvSpPr>
-        <p:spPr>
-          <a:xfrm>
-            <a:off x="429280" y="1592290"/>
-            <a:ext cx="7827264" cy="1493206"/>
-          </a:xfrm>
-          <a:prstGeom prst="rect">
-            <a:avLst/>
-          </a:prstGeom>
-          <a:noFill/>
-        </p:spPr>
-        <p:txBody>
-          <a:bodyPr wrap="square" lIns="76200" rIns="76200" tIns="50800" bIns="50800">
-            <a:spAutoFit/>
-          </a:bodyPr>
-          <a:lstStyle/>
-          <a:p>
-            <a:pPr algn="ctr">
-              <a:spcAft>
-                <a:spcPts val="300"/>
-              </a:spcAft>
-              <a:defRPr sz="4000">
-                <a:solidFill>
-                  <a:srgbClr val="FFFFFF"/>
-                </a:solidFill>
-                <a:latin typeface="Play"/>
-                <a:ea typeface="Play"/>
-                <a:cs typeface="Play"/>
-              </a:defRPr>
-            </a:pPr>
-            <a:r>
-              <a:rPr sz="4000">
-                <a:solidFill>
-                  <a:srgbClr val="FFFFFF"/>
-                </a:solidFill>
-                <a:latin typeface="Play"/>
-                <a:ea typeface="Play"/>
-                <a:cs typeface="Play"/>
-              </a:rPr>
-              <a:t>Сборка 4 мин вместо 186</a:t>
-            </a:r>
-          </a:p>
-        </p:txBody>
-      </p:sp>
-      <p:sp>
-        <p:nvSpPr>
-          <p:cNvPr id="4" name="body"/>
-          <p:cNvSpPr txBox="1"/>
-          <p:nvPr/>
-        </p:nvSpPr>
-        <p:spPr>
-          <a:xfrm>
-            <a:off x="429280" y="3336376"/>
-            <a:ext cx="7827264" cy="2437236"/>
-          </a:xfrm>
-          <a:prstGeom prst="rect">
-            <a:avLst/>
-          </a:prstGeom>
-          <a:noFill/>
-        </p:spPr>
-        <p:txBody>
-          <a:bodyPr wrap="square" lIns="76200" rIns="76200" tIns="50800" bIns="50800">
-            <a:spAutoFit/>
-          </a:bodyPr>
-          <a:lstStyle/>
-          <a:p>
-            <a:pPr algn="l">
-              <a:spcAft>
-                <a:spcPts val="300"/>
-              </a:spcAft>
               <a:defRPr sz="3200">
                 <a:solidFill>
                   <a:srgbClr val="FFFFFF"/>
@@ -8559,567 +7774,198 @@
                 <a:ea typeface="Play"/>
                 <a:cs typeface="Play"/>
               </a:rPr>
-              <a:t>• 1 день до первой версии вместо 6</a:t>
-            </a:r>
-          </a:p>
-          <a:p>
-            <a:pPr algn="l">
-              <a:spcAft>
-                <a:spcPts val="300"/>
-              </a:spcAft>
-              <a:defRPr sz="3200">
-                <a:solidFill>
-                  <a:srgbClr val="FFFFFF"/>
-                </a:solidFill>
-                <a:latin typeface="Play"/>
-                <a:ea typeface="Play"/>
-                <a:cs typeface="Play"/>
-              </a:defRPr>
-            </a:pPr>
-            <a:r>
-              <a:rPr sz="3200">
-                <a:solidFill>
-                  <a:srgbClr val="FFFFFF"/>
-                </a:solidFill>
-                <a:latin typeface="Play"/>
-                <a:ea typeface="Play"/>
-                <a:cs typeface="Play"/>
-              </a:rPr>
-              <a:t>• 2 нарушения вместо 19</a:t>
-            </a:r>
-          </a:p>
-          <a:p>
-            <a:pPr algn="l">
-              <a:spcAft>
-                <a:spcPts val="300"/>
-              </a:spcAft>
-              <a:defRPr sz="3200">
-                <a:solidFill>
-                  <a:srgbClr val="FFFFFF"/>
-                </a:solidFill>
-                <a:latin typeface="Play"/>
-                <a:ea typeface="Play"/>
-                <a:cs typeface="Play"/>
-              </a:defRPr>
-            </a:pPr>
-            <a:r>
-              <a:rPr sz="3200">
-                <a:solidFill>
-                  <a:srgbClr val="FFFFFF"/>
-                </a:solidFill>
-                <a:latin typeface="Play"/>
-                <a:ea typeface="Play"/>
-                <a:cs typeface="Play"/>
-              </a:rPr>
-              <a:t>• 38 запросов вместо 11</a:t>
+              <a:t>Нагрузка дизайнеров</a:t>
             </a:r>
           </a:p>
         </p:txBody>
       </p:sp>
-    </p:spTree>
-  </p:cSld>
-  <p:clrMapOvr>
-    <a:masterClrMapping/>
-  </p:clrMapOvr>
-</p:sld>
-</file>
-
-<file path=ppt/slides/slide36.xml><?xml version="1.0" encoding="utf-8"?>
-<p:sld xmlns:a="http://schemas.openxmlformats.org/drawingml/2006/main" xmlns:p="http://schemas.openxmlformats.org/presentationml/2006/main" xmlns:r="http://schemas.openxmlformats.org/officeDocument/2006/relationships">
-  <p:cSld>
-    <p:spTree>
-      <p:nvGrpSpPr>
-        <p:cNvPr id="1" name=""/>
-        <p:cNvGrpSpPr/>
-        <p:nvPr/>
-      </p:nvGrpSpPr>
-      <p:grpSpPr/>
-      <p:sp>
-        <p:nvSpPr>
-          <p:cNvPr id="2" name="title"/>
-          <p:cNvSpPr txBox="1"/>
+      <p:graphicFrame>
+        <p:nvGraphicFramePr>
+          <p:cNvPr id="3" name="Table 2"/>
+          <p:cNvGraphicFramePr>
+            <a:graphicFrameLocks noGrp="1"/>
+          </p:cNvGraphicFramePr>
           <p:nvPr/>
-        </p:nvSpPr>
-        <p:spPr>
-          <a:xfrm>
-            <a:off x="429280" y="424715"/>
-            <a:ext cx="7827264" cy="1183640"/>
-          </a:xfrm>
-          <a:prstGeom prst="rect">
-            <a:avLst/>
-          </a:prstGeom>
-          <a:noFill/>
-        </p:spPr>
-        <p:txBody>
-          <a:bodyPr wrap="square" lIns="76200" rIns="76200" tIns="50800" bIns="50800">
-            <a:spAutoFit/>
-          </a:bodyPr>
-          <a:lstStyle/>
-          <a:p>
-            <a:pPr algn="l">
-              <a:spcAft>
-                <a:spcPts val="300"/>
-              </a:spcAft>
-              <a:defRPr sz="3200">
-                <a:solidFill>
-                  <a:srgbClr val="FFFFFF"/>
-                </a:solidFill>
-                <a:latin typeface="Play"/>
-                <a:ea typeface="Play"/>
-                <a:cs typeface="Play"/>
-              </a:defRPr>
-            </a:pPr>
-            <a:r>
-              <a:rPr sz="3200">
-                <a:solidFill>
-                  <a:srgbClr val="FFFFFF"/>
-                </a:solidFill>
-                <a:latin typeface="Play"/>
-                <a:ea typeface="Play"/>
-                <a:cs typeface="Play"/>
-              </a:rPr>
-              <a:t>Что потребуется: ресурсы и сроки</a:t>
-            </a:r>
-          </a:p>
-        </p:txBody>
-      </p:sp>
-      <p:sp>
-        <p:nvSpPr>
-          <p:cNvPr id="3" name="Rectangle 2"/>
-          <p:cNvSpPr/>
-          <p:nvPr/>
-        </p:nvSpPr>
-        <p:spPr>
-          <a:xfrm>
-            <a:off x="429280" y="2680184"/>
-            <a:ext cx="11310884" cy="60956"/>
-          </a:xfrm>
-          <a:prstGeom prst="rect">
-            <a:avLst/>
-          </a:prstGeom>
-          <a:solidFill>
-            <a:srgbClr val="0077FF"/>
-          </a:solidFill>
-          <a:ln>
-            <a:noFill/>
-          </a:ln>
-        </p:spPr>
-        <p:style>
-          <a:lnRef idx="1">
-            <a:schemeClr val="accent1"/>
-          </a:lnRef>
-          <a:fillRef idx="3">
-            <a:schemeClr val="accent1"/>
-          </a:fillRef>
-          <a:effectRef idx="2">
-            <a:schemeClr val="accent1"/>
-          </a:effectRef>
-          <a:fontRef idx="minor">
-            <a:schemeClr val="lt1"/>
-          </a:fontRef>
-        </p:style>
-        <p:txBody>
-          <a:bodyPr rtlCol="0" anchor="ctr"/>
-          <a:lstStyle/>
-          <a:p>
-            <a:pPr algn="ctr"/>
-          </a:p>
-        </p:txBody>
-      </p:sp>
-      <p:sp>
-        <p:nvSpPr>
-          <p:cNvPr id="4" name="Oval 3"/>
-          <p:cNvSpPr/>
-          <p:nvPr/>
-        </p:nvSpPr>
-        <p:spPr>
-          <a:xfrm>
-            <a:off x="2090919" y="2487155"/>
-            <a:ext cx="447016" cy="447016"/>
-          </a:xfrm>
-          <a:prstGeom prst="ellipse">
-            <a:avLst/>
-          </a:prstGeom>
-          <a:solidFill>
-            <a:srgbClr val="0077FF"/>
-          </a:solidFill>
-          <a:ln>
-            <a:noFill/>
-          </a:ln>
-        </p:spPr>
-        <p:style>
-          <a:lnRef idx="1">
-            <a:schemeClr val="accent1"/>
-          </a:lnRef>
-          <a:fillRef idx="3">
-            <a:schemeClr val="accent1"/>
-          </a:fillRef>
-          <a:effectRef idx="2">
-            <a:schemeClr val="accent1"/>
-          </a:effectRef>
-          <a:fontRef idx="minor">
-            <a:schemeClr val="lt1"/>
-          </a:fontRef>
-        </p:style>
-        <p:txBody>
-          <a:bodyPr rtlCol="0" anchor="ctr"/>
-          <a:lstStyle/>
-          <a:p>
-            <a:pPr algn="ctr"/>
-          </a:p>
-        </p:txBody>
-      </p:sp>
-      <p:sp>
-        <p:nvSpPr>
-          <p:cNvPr id="5" name="TextBox 4"/>
-          <p:cNvSpPr txBox="1"/>
-          <p:nvPr/>
-        </p:nvSpPr>
-        <p:spPr>
-          <a:xfrm>
-            <a:off x="429280" y="1745515"/>
-            <a:ext cx="5655442" cy="772118"/>
-          </a:xfrm>
-          <a:prstGeom prst="rect">
-            <a:avLst/>
-          </a:prstGeom>
-          <a:noFill/>
-        </p:spPr>
-        <p:txBody>
-          <a:bodyPr wrap="square" lIns="12700" rIns="12700" tIns="12700" bIns="12700">
-            <a:spAutoFit/>
-          </a:bodyPr>
-          <a:lstStyle/>
-          <a:p>
-            <a:pPr algn="ctr">
-              <a:defRPr sz="1400" b="0">
-                <a:solidFill>
-                  <a:srgbClr val="FFFFFF"/>
-                </a:solidFill>
-                <a:latin typeface="Play"/>
-                <a:ea typeface="Play"/>
-                <a:cs typeface="Play"/>
-              </a:defRPr>
-            </a:pPr>
-            <a:r>
-              <a:rPr sz="1400" b="0">
-                <a:solidFill>
-                  <a:srgbClr val="FFFFFF"/>
-                </a:solidFill>
-                <a:latin typeface="Play"/>
-                <a:ea typeface="Play"/>
-                <a:cs typeface="Play"/>
-              </a:rPr>
-              <a:t>Третий квартал 2026</a:t>
-            </a:r>
-          </a:p>
-        </p:txBody>
-      </p:sp>
-      <p:sp>
-        <p:nvSpPr>
-          <p:cNvPr id="6" name="Oval 5"/>
-          <p:cNvSpPr/>
-          <p:nvPr/>
-        </p:nvSpPr>
-        <p:spPr>
-          <a:xfrm>
-            <a:off x="5861213" y="2487155"/>
-            <a:ext cx="447016" cy="447016"/>
-          </a:xfrm>
-          <a:prstGeom prst="ellipse">
-            <a:avLst/>
-          </a:prstGeom>
-          <a:solidFill>
-            <a:srgbClr val="0077FF"/>
-          </a:solidFill>
-          <a:ln>
-            <a:noFill/>
-          </a:ln>
-        </p:spPr>
-        <p:style>
-          <a:lnRef idx="1">
-            <a:schemeClr val="accent1"/>
-          </a:lnRef>
-          <a:fillRef idx="3">
-            <a:schemeClr val="accent1"/>
-          </a:fillRef>
-          <a:effectRef idx="2">
-            <a:schemeClr val="accent1"/>
-          </a:effectRef>
-          <a:fontRef idx="minor">
-            <a:schemeClr val="lt1"/>
-          </a:fontRef>
-        </p:style>
-        <p:txBody>
-          <a:bodyPr rtlCol="0" anchor="ctr"/>
-          <a:lstStyle/>
-          <a:p>
-            <a:pPr algn="ctr"/>
-          </a:p>
-        </p:txBody>
-      </p:sp>
-      <p:sp>
-        <p:nvSpPr>
-          <p:cNvPr id="7" name="TextBox 6"/>
-          <p:cNvSpPr txBox="1"/>
-          <p:nvPr/>
-        </p:nvSpPr>
-        <p:spPr>
-          <a:xfrm>
-            <a:off x="3257001" y="3127200"/>
-            <a:ext cx="5655442" cy="772118"/>
-          </a:xfrm>
-          <a:prstGeom prst="rect">
-            <a:avLst/>
-          </a:prstGeom>
-          <a:noFill/>
-        </p:spPr>
-        <p:txBody>
-          <a:bodyPr wrap="square" lIns="12700" rIns="12700" tIns="12700" bIns="12700">
-            <a:spAutoFit/>
-          </a:bodyPr>
-          <a:lstStyle/>
-          <a:p>
-            <a:pPr algn="ctr">
-              <a:defRPr sz="1400" b="0">
-                <a:solidFill>
-                  <a:srgbClr val="FFFFFF"/>
-                </a:solidFill>
-                <a:latin typeface="Play"/>
-                <a:ea typeface="Play"/>
-                <a:cs typeface="Play"/>
-              </a:defRPr>
-            </a:pPr>
-            <a:r>
-              <a:rPr sz="1400" b="0">
-                <a:solidFill>
-                  <a:srgbClr val="FFFFFF"/>
-                </a:solidFill>
-                <a:latin typeface="Play"/>
-                <a:ea typeface="Play"/>
-                <a:cs typeface="Play"/>
-              </a:rPr>
-              <a:t>Четвёртый квартал 2026</a:t>
-            </a:r>
-          </a:p>
-        </p:txBody>
-      </p:sp>
-      <p:sp>
-        <p:nvSpPr>
-          <p:cNvPr id="8" name="Oval 7"/>
-          <p:cNvSpPr/>
-          <p:nvPr/>
-        </p:nvSpPr>
-        <p:spPr>
-          <a:xfrm>
-            <a:off x="9631508" y="2487155"/>
-            <a:ext cx="447016" cy="447016"/>
-          </a:xfrm>
-          <a:prstGeom prst="ellipse">
-            <a:avLst/>
-          </a:prstGeom>
-          <a:solidFill>
-            <a:srgbClr val="0077FF"/>
-          </a:solidFill>
-          <a:ln>
-            <a:noFill/>
-          </a:ln>
-        </p:spPr>
-        <p:style>
-          <a:lnRef idx="1">
-            <a:schemeClr val="accent1"/>
-          </a:lnRef>
-          <a:fillRef idx="3">
-            <a:schemeClr val="accent1"/>
-          </a:fillRef>
-          <a:effectRef idx="2">
-            <a:schemeClr val="accent1"/>
-          </a:effectRef>
-          <a:fontRef idx="minor">
-            <a:schemeClr val="lt1"/>
-          </a:fontRef>
-        </p:style>
-        <p:txBody>
-          <a:bodyPr rtlCol="0" anchor="ctr"/>
-          <a:lstStyle/>
-          <a:p>
-            <a:pPr algn="ctr"/>
-          </a:p>
-        </p:txBody>
-      </p:sp>
-      <p:sp>
-        <p:nvSpPr>
-          <p:cNvPr id="9" name="TextBox 8"/>
-          <p:cNvSpPr txBox="1"/>
-          <p:nvPr/>
-        </p:nvSpPr>
-        <p:spPr>
-          <a:xfrm>
-            <a:off x="6084722" y="1745515"/>
-            <a:ext cx="5655442" cy="772118"/>
-          </a:xfrm>
-          <a:prstGeom prst="rect">
-            <a:avLst/>
-          </a:prstGeom>
-          <a:noFill/>
-        </p:spPr>
-        <p:txBody>
-          <a:bodyPr wrap="square" lIns="12700" rIns="12700" tIns="12700" bIns="12700">
-            <a:spAutoFit/>
-          </a:bodyPr>
-          <a:lstStyle/>
-          <a:p>
-            <a:pPr algn="ctr">
-              <a:defRPr sz="1400" b="0">
-                <a:solidFill>
-                  <a:srgbClr val="FFFFFF"/>
-                </a:solidFill>
-                <a:latin typeface="Play"/>
-                <a:ea typeface="Play"/>
-                <a:cs typeface="Play"/>
-              </a:defRPr>
-            </a:pPr>
-            <a:r>
-              <a:rPr sz="1400" b="0">
-                <a:solidFill>
-                  <a:srgbClr val="FFFFFF"/>
-                </a:solidFill>
-                <a:latin typeface="Play"/>
-                <a:ea typeface="Play"/>
-                <a:cs typeface="Play"/>
-              </a:rPr>
-              <a:t>Первый квартал 2027</a:t>
-            </a:r>
-          </a:p>
-        </p:txBody>
-      </p:sp>
-      <p:sp>
-        <p:nvSpPr>
-          <p:cNvPr id="10" name="body"/>
-          <p:cNvSpPr txBox="1"/>
-          <p:nvPr/>
-        </p:nvSpPr>
-        <p:spPr>
-          <a:xfrm>
-            <a:off x="429280" y="3948857"/>
-            <a:ext cx="11310884" cy="1468894"/>
-          </a:xfrm>
-          <a:prstGeom prst="rect">
-            <a:avLst/>
-          </a:prstGeom>
-          <a:noFill/>
-        </p:spPr>
-        <p:txBody>
-          <a:bodyPr wrap="square" lIns="76200" rIns="76200" tIns="50800" bIns="50800">
-            <a:spAutoFit/>
-          </a:bodyPr>
-          <a:lstStyle/>
-          <a:p>
-            <a:pPr algn="l">
-              <a:spcAft>
-                <a:spcPts val="300"/>
-              </a:spcAft>
-              <a:defRPr sz="1600">
-                <a:solidFill>
-                  <a:srgbClr val="FFFFFF"/>
-                </a:solidFill>
-                <a:latin typeface="Play"/>
-                <a:ea typeface="Play"/>
-                <a:cs typeface="Play"/>
-              </a:defRPr>
-            </a:pPr>
-            <a:r>
-              <a:rPr sz="1600">
-                <a:solidFill>
-                  <a:srgbClr val="FFFFFF"/>
-                </a:solidFill>
-                <a:latin typeface="Play"/>
-                <a:ea typeface="Play"/>
-                <a:cs typeface="Play"/>
-              </a:rPr>
-              <a:t>• 2 vCPU / 2 ГБ RAM</a:t>
-            </a:r>
-          </a:p>
-          <a:p>
-            <a:pPr algn="l">
-              <a:spcAft>
-                <a:spcPts val="300"/>
-              </a:spcAft>
-              <a:defRPr sz="1600">
-                <a:solidFill>
-                  <a:srgbClr val="FFFFFF"/>
-                </a:solidFill>
-                <a:latin typeface="Play"/>
-                <a:ea typeface="Play"/>
-                <a:cs typeface="Play"/>
-              </a:defRPr>
-            </a:pPr>
-            <a:r>
-              <a:rPr sz="1600">
-                <a:solidFill>
-                  <a:srgbClr val="FFFFFF"/>
-                </a:solidFill>
-                <a:latin typeface="Play"/>
-                <a:ea typeface="Play"/>
-                <a:cs typeface="Play"/>
-              </a:rPr>
-              <a:t>• 1 400 руб инференс</a:t>
-            </a:r>
-          </a:p>
-          <a:p>
-            <a:pPr algn="l">
-              <a:spcAft>
-                <a:spcPts val="300"/>
-              </a:spcAft>
-              <a:defRPr sz="1600">
-                <a:solidFill>
-                  <a:srgbClr val="FFFFFF"/>
-                </a:solidFill>
-                <a:latin typeface="Play"/>
-                <a:ea typeface="Play"/>
-                <a:cs typeface="Play"/>
-              </a:defRPr>
-            </a:pPr>
-            <a:r>
-              <a:rPr sz="1600">
-                <a:solidFill>
-                  <a:srgbClr val="FFFFFF"/>
-                </a:solidFill>
-                <a:latin typeface="Play"/>
-                <a:ea typeface="Play"/>
-                <a:cs typeface="Play"/>
-              </a:rPr>
-              <a:t>• Gpt-oss-20b, OpenAI‑совместим</a:t>
-            </a:r>
-          </a:p>
-          <a:p>
-            <a:pPr algn="l">
-              <a:spcAft>
-                <a:spcPts val="300"/>
-              </a:spcAft>
-              <a:defRPr sz="1600">
-                <a:solidFill>
-                  <a:srgbClr val="FFFFFF"/>
-                </a:solidFill>
-                <a:latin typeface="Play"/>
-                <a:ea typeface="Play"/>
-                <a:cs typeface="Play"/>
-              </a:defRPr>
-            </a:pPr>
-            <a:r>
-              <a:rPr sz="1600">
-                <a:solidFill>
-                  <a:srgbClr val="FFFFFF"/>
-                </a:solidFill>
-                <a:latin typeface="Play"/>
-                <a:ea typeface="Play"/>
-                <a:cs typeface="Play"/>
-              </a:rPr>
-              <a:t>• Дизайн‑отдел 4 человека</a:t>
-            </a:r>
-          </a:p>
-        </p:txBody>
-      </p:sp>
+        </p:nvGraphicFramePr>
+        <p:xfrm>
+          <a:off x="429280" y="1592290"/>
+          <a:ext cx="11310884" cy="4181322"/>
+        </p:xfrm>
+        <a:graphic>
+          <a:graphicData uri="http://schemas.openxmlformats.org/drawingml/2006/table">
+            <a:tbl>
+              <a:tblPr firstRow="1" bandRow="1">
+                <a:tableStyleId>{5C22544A-7EE6-4342-B048-85BDC9FD1C3A}</a:tableStyleId>
+              </a:tblPr>
+              <a:tblGrid>
+                <a:gridCol w="3770294"/>
+                <a:gridCol w="3770294"/>
+                <a:gridCol w="3770296"/>
+              </a:tblGrid>
+              <a:tr h="2090661">
+                <a:tc>
+                  <a:txBody>
+                    <a:bodyPr/>
+                    <a:lstStyle/>
+                    <a:p>
+                      <a:pPr>
+                        <a:defRPr sz="1300" b="1">
+                          <a:solidFill>
+                            <a:srgbClr val="FFFFFF"/>
+                          </a:solidFill>
+                          <a:latin typeface="Play"/>
+                          <a:ea typeface="Play"/>
+                          <a:cs typeface="Play"/>
+                        </a:defRPr>
+                      </a:pPr>
+                      <a:r>
+                        <a:t>Показатель</a:t>
+                      </a:r>
+                    </a:p>
+                  </a:txBody>
+                  <a:tcPr>
+                    <a:solidFill>
+                      <a:srgbClr val="0077FF"/>
+                    </a:solidFill>
+                  </a:tcPr>
+                </a:tc>
+                <a:tc>
+                  <a:txBody>
+                    <a:bodyPr/>
+                    <a:lstStyle/>
+                    <a:p>
+                      <a:pPr>
+                        <a:defRPr sz="1300" b="1">
+                          <a:solidFill>
+                            <a:srgbClr val="FFFFFF"/>
+                          </a:solidFill>
+                          <a:latin typeface="Play"/>
+                          <a:ea typeface="Play"/>
+                          <a:cs typeface="Play"/>
+                        </a:defRPr>
+                      </a:pPr>
+                      <a:r>
+                        <a:t>Текущая</a:t>
+                      </a:r>
+                    </a:p>
+                  </a:txBody>
+                  <a:tcPr>
+                    <a:solidFill>
+                      <a:srgbClr val="0077FF"/>
+                    </a:solidFill>
+                  </a:tcPr>
+                </a:tc>
+                <a:tc>
+                  <a:txBody>
+                    <a:bodyPr/>
+                    <a:lstStyle/>
+                    <a:p>
+                      <a:pPr>
+                        <a:defRPr sz="1300" b="1">
+                          <a:solidFill>
+                            <a:srgbClr val="FFFFFF"/>
+                          </a:solidFill>
+                          <a:latin typeface="Play"/>
+                          <a:ea typeface="Play"/>
+                          <a:cs typeface="Play"/>
+                        </a:defRPr>
+                      </a:pPr>
+                      <a:r>
+                        <a:t>Пилот</a:t>
+                      </a:r>
+                    </a:p>
+                  </a:txBody>
+                  <a:tcPr>
+                    <a:solidFill>
+                      <a:srgbClr val="0077FF"/>
+                    </a:solidFill>
+                  </a:tcPr>
+                </a:tc>
+              </a:tr>
+              <a:tr h="2090661">
+                <a:tc>
+                  <a:txBody>
+                    <a:bodyPr/>
+                    <a:lstStyle/>
+                    <a:p>
+                      <a:pPr>
+                        <a:defRPr sz="1300" b="0">
+                          <a:solidFill>
+                            <a:srgbClr val="FFFFFF"/>
+                          </a:solidFill>
+                          <a:latin typeface="Play"/>
+                          <a:ea typeface="Play"/>
+                          <a:cs typeface="Play"/>
+                        </a:defRPr>
+                      </a:pPr>
+                      <a:r>
+                        <a:t>Запросов/неделя</a:t>
+                      </a:r>
+                    </a:p>
+                  </a:txBody>
+                  <a:tcPr>
+                    <a:solidFill>
+                      <a:srgbClr val="111111"/>
+                    </a:solidFill>
+                  </a:tcPr>
+                </a:tc>
+                <a:tc>
+                  <a:txBody>
+                    <a:bodyPr/>
+                    <a:lstStyle/>
+                    <a:p>
+                      <a:pPr>
+                        <a:defRPr sz="1300" b="0">
+                          <a:solidFill>
+                            <a:srgbClr val="FFFFFF"/>
+                          </a:solidFill>
+                          <a:latin typeface="Play"/>
+                          <a:ea typeface="Play"/>
+                          <a:cs typeface="Play"/>
+                        </a:defRPr>
+                      </a:pPr>
+                      <a:r>
+                        <a:t>11</a:t>
+                      </a:r>
+                    </a:p>
+                  </a:txBody>
+                  <a:tcPr>
+                    <a:solidFill>
+                      <a:srgbClr val="111111"/>
+                    </a:solidFill>
+                  </a:tcPr>
+                </a:tc>
+                <a:tc>
+                  <a:txBody>
+                    <a:bodyPr/>
+                    <a:lstStyle/>
+                    <a:p>
+                      <a:pPr>
+                        <a:defRPr sz="1300" b="0">
+                          <a:solidFill>
+                            <a:srgbClr val="FFFFFF"/>
+                          </a:solidFill>
+                          <a:latin typeface="Play"/>
+                          <a:ea typeface="Play"/>
+                          <a:cs typeface="Play"/>
+                        </a:defRPr>
+                      </a:pPr>
+                      <a:r>
+                        <a:t>38</a:t>
+                      </a:r>
+                    </a:p>
+                  </a:txBody>
+                  <a:tcPr>
+                    <a:solidFill>
+                      <a:srgbClr val="111111"/>
+                    </a:solidFill>
+                  </a:tcPr>
+                </a:tc>
+              </a:tr>
+            </a:tbl>
+          </a:graphicData>
+        </a:graphic>
+      </p:graphicFrame>
     </p:spTree>
   </p:cSld>
   <p:clrMapOvr>
@@ -9211,7 +8057,7 @@
         <p:spPr>
           <a:xfrm>
             <a:off x="300817" y="297715"/>
-            <a:ext cx="8081264" cy="5565466"/>
+            <a:ext cx="8081264" cy="4989763"/>
           </a:xfrm>
           <a:prstGeom prst="roundRect">
             <a:avLst/>
@@ -9292,7 +8138,7 @@
                 <a:ea typeface="Play"/>
                 <a:cs typeface="Play"/>
               </a:rPr>
-              <a:t>Что мы просим решить</a:t>
+              <a:t>Ресурсы и сроки</a:t>
             </a:r>
           </a:p>
         </p:txBody>
@@ -9306,7 +8152,7 @@
         <p:spPr>
           <a:xfrm>
             <a:off x="427817" y="1837052"/>
-            <a:ext cx="7827264" cy="1438720"/>
+            <a:ext cx="7827264" cy="1391337"/>
           </a:xfrm>
           <a:prstGeom prst="rect">
             <a:avLst/>
@@ -9323,7 +8169,7 @@
               <a:spcAft>
                 <a:spcPts val="300"/>
               </a:spcAft>
-              <a:defRPr sz="4000">
+              <a:defRPr sz="5400">
                 <a:solidFill>
                   <a:srgbClr val="FFFFFF"/>
                 </a:solidFill>
@@ -9333,7 +8179,7 @@
               </a:defRPr>
             </a:pPr>
             <a:r>
-              <a:rPr sz="4000">
+              <a:rPr sz="5400">
                 <a:solidFill>
                   <a:srgbClr val="FFFFFF"/>
                 </a:solidFill>
@@ -9341,7 +8187,7 @@
                 <a:ea typeface="Play"/>
                 <a:cs typeface="Play"/>
               </a:rPr>
-              <a:t>Запуск на всю компанию</a:t>
+              <a:t>2 vCPU / 2 GB RAM</a:t>
             </a:r>
           </a:p>
         </p:txBody>
@@ -9354,8 +8200,8 @@
         </p:nvSpPr>
         <p:spPr>
           <a:xfrm>
-            <a:off x="427817" y="3521302"/>
-            <a:ext cx="7827264" cy="2407918"/>
+            <a:off x="427817" y="3473919"/>
+            <a:ext cx="7827264" cy="2455301"/>
           </a:xfrm>
           <a:prstGeom prst="rect">
             <a:avLst/>
@@ -9390,7 +8236,7 @@
                 <a:ea typeface="Play"/>
                 <a:cs typeface="Play"/>
               </a:rPr>
-              <a:t>• Бюджет на расширение инфраструктуры</a:t>
+              <a:t>• 1 400 рублей за 6 недель пилота</a:t>
             </a:r>
           </a:p>
           <a:p>
@@ -9416,7 +8262,7 @@
                 <a:ea typeface="Play"/>
                 <a:cs typeface="Play"/>
               </a:rPr>
-              <a:t>• Назначение ответственных за интеграцию</a:t>
+              <a:t>• 6 недель пилота, 2 команды, 68 презентаций</a:t>
             </a:r>
           </a:p>
         </p:txBody>
@@ -9537,7 +8383,7 @@
                 <a:ea typeface="Play"/>
                 <a:cs typeface="Play"/>
               </a:rPr>
-              <a:t>Риски</a:t>
+              <a:t>Что мы просим решить</a:t>
             </a:r>
           </a:p>
         </p:txBody>
@@ -9551,7 +8397,7 @@
         <p:spPr>
           <a:xfrm>
             <a:off x="429280" y="1504165"/>
-            <a:ext cx="7827264" cy="1514703"/>
+            <a:ext cx="7827264" cy="1652664"/>
           </a:xfrm>
           <a:prstGeom prst="rect">
             <a:avLst/>
@@ -9586,7 +8432,7 @@
                 <a:ea typeface="Play"/>
                 <a:cs typeface="Play"/>
               </a:rPr>
-              <a:t>Слабая модель может выдумать цифры</a:t>
+              <a:t>Запуск сервиса на всю компанию</a:t>
             </a:r>
           </a:p>
         </p:txBody>
@@ -9599,8 +8445,8 @@
         </p:nvSpPr>
         <p:spPr>
           <a:xfrm>
-            <a:off x="429280" y="3253271"/>
-            <a:ext cx="7827264" cy="2157621"/>
+            <a:off x="429280" y="3391233"/>
+            <a:ext cx="7827264" cy="2019660"/>
           </a:xfrm>
           <a:prstGeom prst="rect">
             <a:avLst/>
@@ -9617,7 +8463,7 @@
               <a:spcAft>
                 <a:spcPts val="300"/>
               </a:spcAft>
-              <a:defRPr sz="2800">
+              <a:defRPr sz="3200">
                 <a:solidFill>
                   <a:srgbClr val="FFFFFF"/>
                 </a:solidFill>
@@ -9627,7 +8473,7 @@
               </a:defRPr>
             </a:pPr>
             <a:r>
-              <a:rPr sz="2800">
+              <a:rPr sz="3200">
                 <a:solidFill>
                   <a:srgbClr val="FFFFFF"/>
                 </a:solidFill>
@@ -9635,7 +8481,7 @@
                 <a:ea typeface="Play"/>
                 <a:cs typeface="Play"/>
               </a:rPr>
-              <a:t>• Плохой шаблон может привести к некорректной вёрстке</a:t>
+              <a:t>• Интеграция с корпоративным хранилищем</a:t>
             </a:r>
           </a:p>
           <a:p>
@@ -9643,7 +8489,7 @@
               <a:spcAft>
                 <a:spcPts val="300"/>
               </a:spcAft>
-              <a:defRPr sz="2800">
+              <a:defRPr sz="3200">
                 <a:solidFill>
                   <a:srgbClr val="FFFFFF"/>
                 </a:solidFill>
@@ -9653,7 +8499,7 @@
               </a:defRPr>
             </a:pPr>
             <a:r>
-              <a:rPr sz="2800">
+              <a:rPr sz="3200">
                 <a:solidFill>
                   <a:srgbClr val="FFFFFF"/>
                 </a:solidFill>
@@ -9661,7 +8507,7 @@
                 <a:ea typeface="Play"/>
                 <a:cs typeface="Play"/>
               </a:rPr>
-              <a:t>• Нагрузка &gt;20 задач требует внешней очереди</a:t>
+              <a:t>• Поддержка 20 одновременных задач</a:t>
             </a:r>
           </a:p>
         </p:txBody>
@@ -9728,371 +8574,107 @@
                 <a:ea typeface="Play"/>
                 <a:cs typeface="Play"/>
               </a:rPr>
-              <a:t>Команда</a:t>
+              <a:t>План запуска</a:t>
             </a:r>
           </a:p>
         </p:txBody>
       </p:sp>
-      <p:graphicFrame>
-        <p:nvGraphicFramePr>
-          <p:cNvPr id="3" name="Table 2"/>
-          <p:cNvGraphicFramePr>
-            <a:graphicFrameLocks noGrp="1"/>
-          </p:cNvGraphicFramePr>
-          <p:nvPr/>
-        </p:nvGraphicFramePr>
-        <p:xfrm>
-          <a:off x="429280" y="1492575"/>
-          <a:ext cx="11310884" cy="2898274"/>
-        </p:xfrm>
-        <a:graphic>
-          <a:graphicData uri="http://schemas.openxmlformats.org/drawingml/2006/table">
-            <a:tbl>
-              <a:tblPr firstRow="1" bandRow="1">
-                <a:tableStyleId>{5C22544A-7EE6-4342-B048-85BDC9FD1C3A}</a:tableStyleId>
-              </a:tblPr>
-              <a:tblGrid>
-                <a:gridCol w="5655442"/>
-                <a:gridCol w="5655442"/>
-              </a:tblGrid>
-              <a:tr h="483045">
-                <a:tc>
-                  <a:txBody>
-                    <a:bodyPr/>
-                    <a:lstStyle/>
-                    <a:p>
-                      <a:pPr>
-                        <a:defRPr sz="1300" b="1">
-                          <a:solidFill>
-                            <a:srgbClr val="FFFFFF"/>
-                          </a:solidFill>
-                          <a:latin typeface="Play"/>
-                          <a:ea typeface="Play"/>
-                          <a:cs typeface="Play"/>
-                        </a:defRPr>
-                      </a:pPr>
-                      <a:r>
-                        <a:t>Роль</a:t>
-                      </a:r>
-                    </a:p>
-                  </a:txBody>
-                  <a:tcPr>
-                    <a:solidFill>
-                      <a:srgbClr val="0077FF"/>
-                    </a:solidFill>
-                  </a:tcPr>
-                </a:tc>
-                <a:tc>
-                  <a:txBody>
-                    <a:bodyPr/>
-                    <a:lstStyle/>
-                    <a:p>
-                      <a:pPr>
-                        <a:defRPr sz="1300" b="1">
-                          <a:solidFill>
-                            <a:srgbClr val="FFFFFF"/>
-                          </a:solidFill>
-                          <a:latin typeface="Play"/>
-                          <a:ea typeface="Play"/>
-                          <a:cs typeface="Play"/>
-                        </a:defRPr>
-                      </a:pPr>
-                      <a:r>
-                        <a:t>Количество</a:t>
-                      </a:r>
-                    </a:p>
-                  </a:txBody>
-                  <a:tcPr>
-                    <a:solidFill>
-                      <a:srgbClr val="0077FF"/>
-                    </a:solidFill>
-                  </a:tcPr>
-                </a:tc>
-              </a:tr>
-              <a:tr h="483045">
-                <a:tc>
-                  <a:txBody>
-                    <a:bodyPr/>
-                    <a:lstStyle/>
-                    <a:p>
-                      <a:pPr>
-                        <a:defRPr sz="1300" b="0">
-                          <a:solidFill>
-                            <a:srgbClr val="FFFFFF"/>
-                          </a:solidFill>
-                          <a:latin typeface="Play"/>
-                          <a:ea typeface="Play"/>
-                          <a:cs typeface="Play"/>
-                        </a:defRPr>
-                      </a:pPr>
-                      <a:r>
-                        <a:t>Дизайн‑отдел</a:t>
-                      </a:r>
-                    </a:p>
-                  </a:txBody>
-                  <a:tcPr>
-                    <a:solidFill>
-                      <a:srgbClr val="111111"/>
-                    </a:solidFill>
-                  </a:tcPr>
-                </a:tc>
-                <a:tc>
-                  <a:txBody>
-                    <a:bodyPr/>
-                    <a:lstStyle/>
-                    <a:p>
-                      <a:pPr>
-                        <a:defRPr sz="1300" b="0">
-                          <a:solidFill>
-                            <a:srgbClr val="FFFFFF"/>
-                          </a:solidFill>
-                          <a:latin typeface="Play"/>
-                          <a:ea typeface="Play"/>
-                          <a:cs typeface="Play"/>
-                        </a:defRPr>
-                      </a:pPr>
-                      <a:r>
-                        <a:t>4 человека</a:t>
-                      </a:r>
-                    </a:p>
-                  </a:txBody>
-                  <a:tcPr>
-                    <a:solidFill>
-                      <a:srgbClr val="111111"/>
-                    </a:solidFill>
-                  </a:tcPr>
-                </a:tc>
-              </a:tr>
-              <a:tr h="483045">
-                <a:tc>
-                  <a:txBody>
-                    <a:bodyPr/>
-                    <a:lstStyle/>
-                    <a:p>
-                      <a:pPr>
-                        <a:defRPr sz="1300" b="0">
-                          <a:solidFill>
-                            <a:srgbClr val="FFFFFF"/>
-                          </a:solidFill>
-                          <a:latin typeface="Play"/>
-                          <a:ea typeface="Play"/>
-                          <a:cs typeface="Play"/>
-                        </a:defRPr>
-                      </a:pPr>
-                      <a:r>
-                        <a:t>Запросы</a:t>
-                      </a:r>
-                    </a:p>
-                  </a:txBody>
-                  <a:tcPr>
-                    <a:solidFill>
-                      <a:srgbClr val="111111"/>
-                    </a:solidFill>
-                  </a:tcPr>
-                </a:tc>
-                <a:tc>
-                  <a:txBody>
-                    <a:bodyPr/>
-                    <a:lstStyle/>
-                    <a:p>
-                      <a:pPr>
-                        <a:defRPr sz="1300" b="0">
-                          <a:solidFill>
-                            <a:srgbClr val="FFFFFF"/>
-                          </a:solidFill>
-                          <a:latin typeface="Play"/>
-                          <a:ea typeface="Play"/>
-                          <a:cs typeface="Play"/>
-                        </a:defRPr>
-                      </a:pPr>
-                      <a:r>
-                        <a:t>11/нед</a:t>
-                      </a:r>
-                    </a:p>
-                  </a:txBody>
-                  <a:tcPr>
-                    <a:solidFill>
-                      <a:srgbClr val="111111"/>
-                    </a:solidFill>
-                  </a:tcPr>
-                </a:tc>
-              </a:tr>
-              <a:tr h="483045">
-                <a:tc>
-                  <a:txBody>
-                    <a:bodyPr/>
-                    <a:lstStyle/>
-                    <a:p>
-                      <a:pPr>
-                        <a:defRPr sz="1300" b="0">
-                          <a:solidFill>
-                            <a:srgbClr val="FFFFFF"/>
-                          </a:solidFill>
-                          <a:latin typeface="Play"/>
-                          <a:ea typeface="Play"/>
-                          <a:cs typeface="Play"/>
-                        </a:defRPr>
-                      </a:pPr>
-                      <a:r>
-                        <a:t>Ожидание</a:t>
-                      </a:r>
-                    </a:p>
-                  </a:txBody>
-                  <a:tcPr>
-                    <a:solidFill>
-                      <a:srgbClr val="111111"/>
-                    </a:solidFill>
-                  </a:tcPr>
-                </a:tc>
-                <a:tc>
-                  <a:txBody>
-                    <a:bodyPr/>
-                    <a:lstStyle/>
-                    <a:p>
-                      <a:pPr>
-                        <a:defRPr sz="1300" b="0">
-                          <a:solidFill>
-                            <a:srgbClr val="FFFFFF"/>
-                          </a:solidFill>
-                          <a:latin typeface="Play"/>
-                          <a:ea typeface="Play"/>
-                          <a:cs typeface="Play"/>
-                        </a:defRPr>
-                      </a:pPr>
-                      <a:r>
-                        <a:t>6 дней</a:t>
-                      </a:r>
-                    </a:p>
-                  </a:txBody>
-                  <a:tcPr>
-                    <a:solidFill>
-                      <a:srgbClr val="111111"/>
-                    </a:solidFill>
-                  </a:tcPr>
-                </a:tc>
-              </a:tr>
-              <a:tr h="483045">
-                <a:tc>
-                  <a:txBody>
-                    <a:bodyPr/>
-                    <a:lstStyle/>
-                    <a:p>
-                      <a:pPr>
-                        <a:defRPr sz="1300" b="0">
-                          <a:solidFill>
-                            <a:srgbClr val="FFFFFF"/>
-                          </a:solidFill>
-                          <a:latin typeface="Play"/>
-                          <a:ea typeface="Play"/>
-                          <a:cs typeface="Play"/>
-                        </a:defRPr>
-                      </a:pPr>
-                      <a:r>
-                        <a:t>Пилотные команды</a:t>
-                      </a:r>
-                    </a:p>
-                  </a:txBody>
-                  <a:tcPr>
-                    <a:solidFill>
-                      <a:srgbClr val="111111"/>
-                    </a:solidFill>
-                  </a:tcPr>
-                </a:tc>
-                <a:tc>
-                  <a:txBody>
-                    <a:bodyPr/>
-                    <a:lstStyle/>
-                    <a:p>
-                      <a:pPr>
-                        <a:defRPr sz="1300" b="0">
-                          <a:solidFill>
-                            <a:srgbClr val="FFFFFF"/>
-                          </a:solidFill>
-                          <a:latin typeface="Play"/>
-                          <a:ea typeface="Play"/>
-                          <a:cs typeface="Play"/>
-                        </a:defRPr>
-                      </a:pPr>
-                      <a:r>
-                        <a:t>2</a:t>
-                      </a:r>
-                    </a:p>
-                  </a:txBody>
-                  <a:tcPr>
-                    <a:solidFill>
-                      <a:srgbClr val="111111"/>
-                    </a:solidFill>
-                  </a:tcPr>
-                </a:tc>
-              </a:tr>
-              <a:tr h="483049">
-                <a:tc>
-                  <a:txBody>
-                    <a:bodyPr/>
-                    <a:lstStyle/>
-                    <a:p>
-                      <a:pPr>
-                        <a:defRPr sz="1300" b="0">
-                          <a:solidFill>
-                            <a:srgbClr val="FFFFFF"/>
-                          </a:solidFill>
-                          <a:latin typeface="Play"/>
-                          <a:ea typeface="Play"/>
-                          <a:cs typeface="Play"/>
-                        </a:defRPr>
-                      </a:pPr>
-                      <a:r>
-                        <a:t>Презентации</a:t>
-                      </a:r>
-                    </a:p>
-                  </a:txBody>
-                  <a:tcPr>
-                    <a:solidFill>
-                      <a:srgbClr val="111111"/>
-                    </a:solidFill>
-                  </a:tcPr>
-                </a:tc>
-                <a:tc>
-                  <a:txBody>
-                    <a:bodyPr/>
-                    <a:lstStyle/>
-                    <a:p>
-                      <a:pPr>
-                        <a:defRPr sz="1300" b="0">
-                          <a:solidFill>
-                            <a:srgbClr val="FFFFFF"/>
-                          </a:solidFill>
-                          <a:latin typeface="Play"/>
-                          <a:ea typeface="Play"/>
-                          <a:cs typeface="Play"/>
-                        </a:defRPr>
-                      </a:pPr>
-                      <a:r>
-                        <a:t>68</a:t>
-                      </a:r>
-                    </a:p>
-                  </a:txBody>
-                  <a:tcPr>
-                    <a:solidFill>
-                      <a:srgbClr val="111111"/>
-                    </a:solidFill>
-                  </a:tcPr>
-                </a:tc>
-              </a:tr>
-            </a:tbl>
-          </a:graphicData>
-        </a:graphic>
-      </p:graphicFrame>
       <p:sp>
         <p:nvSpPr>
-          <p:cNvPr id="4" name="body"/>
+          <p:cNvPr id="3" name="Rectangle 2"/>
+          <p:cNvSpPr/>
+          <p:nvPr/>
+        </p:nvSpPr>
+        <p:spPr>
+          <a:xfrm>
+            <a:off x="429280" y="3339292"/>
+            <a:ext cx="11310884" cy="120438"/>
+          </a:xfrm>
+          <a:prstGeom prst="rect">
+            <a:avLst/>
+          </a:prstGeom>
+          <a:solidFill>
+            <a:srgbClr val="0077FF"/>
+          </a:solidFill>
+          <a:ln>
+            <a:noFill/>
+          </a:ln>
+        </p:spPr>
+        <p:style>
+          <a:lnRef idx="1">
+            <a:schemeClr val="accent1"/>
+          </a:lnRef>
+          <a:fillRef idx="3">
+            <a:schemeClr val="accent1"/>
+          </a:fillRef>
+          <a:effectRef idx="2">
+            <a:schemeClr val="accent1"/>
+          </a:effectRef>
+          <a:fontRef idx="minor">
+            <a:schemeClr val="lt1"/>
+          </a:fontRef>
+        </p:style>
+        <p:txBody>
+          <a:bodyPr rtlCol="0" anchor="ctr"/>
+          <a:lstStyle/>
+          <a:p>
+            <a:pPr algn="ctr"/>
+          </a:p>
+        </p:txBody>
+      </p:sp>
+      <p:sp>
+        <p:nvSpPr>
+          <p:cNvPr id="4" name="Oval 3"/>
+          <p:cNvSpPr/>
+          <p:nvPr/>
+        </p:nvSpPr>
+        <p:spPr>
+          <a:xfrm>
+            <a:off x="1872820" y="2957905"/>
+            <a:ext cx="883212" cy="883212"/>
+          </a:xfrm>
+          <a:prstGeom prst="ellipse">
+            <a:avLst/>
+          </a:prstGeom>
+          <a:solidFill>
+            <a:srgbClr val="0077FF"/>
+          </a:solidFill>
+          <a:ln>
+            <a:noFill/>
+          </a:ln>
+        </p:spPr>
+        <p:style>
+          <a:lnRef idx="1">
+            <a:schemeClr val="accent1"/>
+          </a:lnRef>
+          <a:fillRef idx="3">
+            <a:schemeClr val="accent1"/>
+          </a:fillRef>
+          <a:effectRef idx="2">
+            <a:schemeClr val="accent1"/>
+          </a:effectRef>
+          <a:fontRef idx="minor">
+            <a:schemeClr val="lt1"/>
+          </a:fontRef>
+        </p:style>
+        <p:txBody>
+          <a:bodyPr rtlCol="0" anchor="ctr"/>
+          <a:lstStyle/>
+          <a:p>
+            <a:pPr algn="ctr"/>
+          </a:p>
+        </p:txBody>
+      </p:sp>
+      <p:sp>
+        <p:nvSpPr>
+          <p:cNvPr id="5" name="TextBox 4"/>
           <p:cNvSpPr txBox="1"/>
           <p:nvPr/>
         </p:nvSpPr>
         <p:spPr>
           <a:xfrm>
-            <a:off x="429280" y="4562299"/>
-            <a:ext cx="11310884" cy="944880"/>
+            <a:off x="429280" y="1492575"/>
+            <a:ext cx="5655442" cy="1525549"/>
           </a:xfrm>
           <a:prstGeom prst="rect">
             <a:avLst/>
@@ -10100,16 +8682,13 @@
           <a:noFill/>
         </p:spPr>
         <p:txBody>
-          <a:bodyPr wrap="square" lIns="76200" rIns="76200" tIns="50800" bIns="50800">
+          <a:bodyPr wrap="square" lIns="12700" rIns="12700" tIns="12700" bIns="12700">
             <a:spAutoFit/>
           </a:bodyPr>
           <a:lstStyle/>
           <a:p>
-            <a:pPr algn="l">
-              <a:spcAft>
-                <a:spcPts val="300"/>
-              </a:spcAft>
-              <a:defRPr sz="1600">
+            <a:pPr algn="ctr">
+              <a:defRPr sz="1400" b="0">
                 <a:solidFill>
                   <a:srgbClr val="FFFFFF"/>
                 </a:solidFill>
@@ -10119,7 +8698,7 @@
               </a:defRPr>
             </a:pPr>
             <a:r>
-              <a:rPr sz="1600">
+              <a:rPr sz="1400" b="0">
                 <a:solidFill>
                   <a:srgbClr val="FFFFFF"/>
                 </a:solidFill>
@@ -10127,15 +8706,78 @@
                 <a:ea typeface="Play"/>
                 <a:cs typeface="Play"/>
               </a:rPr>
-              <a:t>• Дизайн‑отдел 4 человека, 11 запросов/нед, 6 дней ожидания</a:t>
+              <a:t>Третий квартал 2026: подключение 4 команд</a:t>
             </a:r>
           </a:p>
+        </p:txBody>
+      </p:sp>
+      <p:sp>
+        <p:nvSpPr>
+          <p:cNvPr id="6" name="Oval 5"/>
+          <p:cNvSpPr/>
+          <p:nvPr/>
+        </p:nvSpPr>
+        <p:spPr>
+          <a:xfrm>
+            <a:off x="5643115" y="2957905"/>
+            <a:ext cx="883212" cy="883212"/>
+          </a:xfrm>
+          <a:prstGeom prst="ellipse">
+            <a:avLst/>
+          </a:prstGeom>
+          <a:solidFill>
+            <a:srgbClr val="0077FF"/>
+          </a:solidFill>
+          <a:ln>
+            <a:noFill/>
+          </a:ln>
+        </p:spPr>
+        <p:style>
+          <a:lnRef idx="1">
+            <a:schemeClr val="accent1"/>
+          </a:lnRef>
+          <a:fillRef idx="3">
+            <a:schemeClr val="accent1"/>
+          </a:fillRef>
+          <a:effectRef idx="2">
+            <a:schemeClr val="accent1"/>
+          </a:effectRef>
+          <a:fontRef idx="minor">
+            <a:schemeClr val="lt1"/>
+          </a:fontRef>
+        </p:style>
+        <p:txBody>
+          <a:bodyPr rtlCol="0" anchor="ctr"/>
+          <a:lstStyle/>
           <a:p>
-            <a:pPr algn="l">
-              <a:spcAft>
-                <a:spcPts val="300"/>
-              </a:spcAft>
-              <a:defRPr sz="1600">
+            <a:pPr algn="ctr"/>
+          </a:p>
+        </p:txBody>
+      </p:sp>
+      <p:sp>
+        <p:nvSpPr>
+          <p:cNvPr id="7" name="TextBox 6"/>
+          <p:cNvSpPr txBox="1"/>
+          <p:nvPr/>
+        </p:nvSpPr>
+        <p:spPr>
+          <a:xfrm>
+            <a:off x="3257001" y="4222505"/>
+            <a:ext cx="5655442" cy="1525549"/>
+          </a:xfrm>
+          <a:prstGeom prst="rect">
+            <a:avLst/>
+          </a:prstGeom>
+          <a:noFill/>
+        </p:spPr>
+        <p:txBody>
+          <a:bodyPr wrap="square" lIns="12700" rIns="12700" tIns="12700" bIns="12700">
+            <a:spAutoFit/>
+          </a:bodyPr>
+          <a:lstStyle/>
+          <a:p>
+            <a:pPr algn="ctr">
+              <a:defRPr sz="1400" b="0">
                 <a:solidFill>
                   <a:srgbClr val="FFFFFF"/>
                 </a:solidFill>
@@ -10145,7 +8787,7 @@
               </a:defRPr>
             </a:pPr>
             <a:r>
-              <a:rPr sz="1600">
+              <a:rPr sz="1400" b="0">
                 <a:solidFill>
                   <a:srgbClr val="FFFFFF"/>
                 </a:solidFill>
@@ -10153,7 +8795,96 @@
                 <a:ea typeface="Play"/>
                 <a:cs typeface="Play"/>
               </a:rPr>
-              <a:t>• Пилотные команды 2, 68 презентаций</a:t>
+              <a:t>Четвёртый квартал 2026: доступ для всей компании</a:t>
+            </a:r>
+          </a:p>
+        </p:txBody>
+      </p:sp>
+      <p:sp>
+        <p:nvSpPr>
+          <p:cNvPr id="8" name="Oval 7"/>
+          <p:cNvSpPr/>
+          <p:nvPr/>
+        </p:nvSpPr>
+        <p:spPr>
+          <a:xfrm>
+            <a:off x="9413410" y="2957905"/>
+            <a:ext cx="883212" cy="883212"/>
+          </a:xfrm>
+          <a:prstGeom prst="ellipse">
+            <a:avLst/>
+          </a:prstGeom>
+          <a:solidFill>
+            <a:srgbClr val="0077FF"/>
+          </a:solidFill>
+          <a:ln>
+            <a:noFill/>
+          </a:ln>
+        </p:spPr>
+        <p:style>
+          <a:lnRef idx="1">
+            <a:schemeClr val="accent1"/>
+          </a:lnRef>
+          <a:fillRef idx="3">
+            <a:schemeClr val="accent1"/>
+          </a:fillRef>
+          <a:effectRef idx="2">
+            <a:schemeClr val="accent1"/>
+          </a:effectRef>
+          <a:fontRef idx="minor">
+            <a:schemeClr val="lt1"/>
+          </a:fontRef>
+        </p:style>
+        <p:txBody>
+          <a:bodyPr rtlCol="0" anchor="ctr"/>
+          <a:lstStyle/>
+          <a:p>
+            <a:pPr algn="ctr"/>
+          </a:p>
+        </p:txBody>
+      </p:sp>
+      <p:sp>
+        <p:nvSpPr>
+          <p:cNvPr id="9" name="TextBox 8"/>
+          <p:cNvSpPr txBox="1"/>
+          <p:nvPr/>
+        </p:nvSpPr>
+        <p:spPr>
+          <a:xfrm>
+            <a:off x="6084722" y="1492575"/>
+            <a:ext cx="5655442" cy="1525549"/>
+          </a:xfrm>
+          <a:prstGeom prst="rect">
+            <a:avLst/>
+          </a:prstGeom>
+          <a:noFill/>
+        </p:spPr>
+        <p:txBody>
+          <a:bodyPr wrap="square" lIns="12700" rIns="12700" tIns="12700" bIns="12700">
+            <a:spAutoFit/>
+          </a:bodyPr>
+          <a:lstStyle/>
+          <a:p>
+            <a:pPr algn="ctr">
+              <a:defRPr sz="1400" b="0">
+                <a:solidFill>
+                  <a:srgbClr val="FFFFFF"/>
+                </a:solidFill>
+                <a:latin typeface="Play"/>
+                <a:ea typeface="Play"/>
+                <a:cs typeface="Play"/>
+              </a:defRPr>
+            </a:pPr>
+            <a:r>
+              <a:rPr sz="1400" b="0">
+                <a:solidFill>
+                  <a:srgbClr val="FFFFFF"/>
+                </a:solidFill>
+                <a:latin typeface="Play"/>
+                <a:ea typeface="Play"/>
+                <a:cs typeface="Play"/>
+              </a:rPr>
+              <a:t>Первый квартал 2027: генерация иллюстраций</a:t>
             </a:r>
           </a:p>
         </p:txBody>

--- a/samples/VK_WorkSpace_Клиентская_конференция_Шабл__focus.pptx
+++ b/samples/VK_WorkSpace_Клиентская_конференция_Шабл__focus.pptx
@@ -304,7 +304,7 @@
               <c:strCache>
                 <c:ptCount val="1"/>
                 <c:pt idx="0">
-                  <c:v>Время</c:v>
+                  <c:v>Текущее</c:v>
                 </c:pt>
               </c:strCache>
             </c:strRef>
@@ -321,36 +321,42 @@
           </c:spPr>
           <c:cat>
             <c:strRef>
-              <c:f>Sheet1!$A$2:$A$3</c:f>
+              <c:f>Sheet1!$A$2:$A$4</c:f>
               <c:strCache>
-                <c:ptCount val="2"/>
+                <c:ptCount val="3"/>
                 <c:pt idx="0">
-                  <c:v>Текущая сборка</c:v>
+                  <c:v>Сборка</c:v>
                 </c:pt>
                 <c:pt idx="1">
-                  <c:v>Пилот</c:v>
+                  <c:v>Правки</c:v>
+                </c:pt>
+                <c:pt idx="2">
+                  <c:v>Ожидание</c:v>
                 </c:pt>
               </c:strCache>
             </c:strRef>
           </c:cat>
           <c:val>
             <c:numRef>
-              <c:f>Sheet1!$B$2:$B$3</c:f>
+              <c:f>Sheet1!$B$2:$B$4</c:f>
               <c:numCache>
                 <c:formatCode>General</c:formatCode>
-                <c:ptCount val="2"/>
+                <c:ptCount val="3"/>
                 <c:pt idx="0">
                   <c:v>186.0</c:v>
                 </c:pt>
                 <c:pt idx="1">
-                  <c:v>4.0</c:v>
+                  <c:v>74.0</c:v>
+                </c:pt>
+                <c:pt idx="2">
+                  <c:v>6.0</c:v>
                 </c:pt>
               </c:numCache>
             </c:numRef>
           </c:val>
         </c:ser>
         <c:dLbls>
-          <c:numFmt formatCode="0&quot; минут&quot;" sourceLinked="0"/>
+          <c:numFmt formatCode="0&quot; мин&quot;" sourceLinked="0"/>
           <c:txPr>
             <a:bodyPr wrap="none"/>
             <a:lstStyle/>
@@ -444,7 +450,7 @@
                   </a:defRPr>
                 </a:pPr>
                 <a:r>
-                  <a:t>Время, минут</a:t>
+                  <a:t>Текущее, мин</a:t>
                 </a:r>
               </a:p>
             </c:rich>
@@ -475,6 +481,277 @@
         <c:crosses val="autoZero"/>
       </c:valAx>
     </c:plotArea>
+    <c:dispBlanksAs val="gap"/>
+  </c:chart>
+  <c:txPr>
+    <a:bodyPr/>
+    <a:lstStyle/>
+    <a:p>
+      <a:pPr>
+        <a:defRPr sz="1200" b="0">
+          <a:solidFill>
+            <a:srgbClr val="FFFFFF"/>
+          </a:solidFill>
+          <a:latin typeface="Play"/>
+          <a:ea typeface="Play"/>
+          <a:cs typeface="Play"/>
+        </a:defRPr>
+      </a:pPr>
+      <a:endParaRPr lang="en-US"/>
+    </a:p>
+  </c:txPr>
+  <c:externalData r:id="rId1">
+    <c:autoUpdate val="0"/>
+  </c:externalData>
+</c:chartSpace>
+</file>
+
+<file path=ppt/charts/chart2.xml><?xml version="1.0" encoding="utf-8"?>
+<c:chartSpace xmlns:c="http://schemas.openxmlformats.org/drawingml/2006/chart" xmlns:a="http://schemas.openxmlformats.org/drawingml/2006/main" xmlns:r="http://schemas.openxmlformats.org/officeDocument/2006/relationships">
+  <c:date1904 val="0"/>
+  <c:chart>
+    <c:autoTitleDeleted val="1"/>
+    <c:plotArea>
+      <c:barChart>
+        <c:barDir val="col"/>
+        <c:grouping val="clustered"/>
+        <c:ser>
+          <c:idx val="0"/>
+          <c:order val="0"/>
+          <c:tx>
+            <c:strRef>
+              <c:f>Sheet1!$B$1</c:f>
+              <c:strCache>
+                <c:ptCount val="1"/>
+                <c:pt idx="0">
+                  <c:v>До</c:v>
+                </c:pt>
+              </c:strCache>
+            </c:strRef>
+          </c:tx>
+          <c:spPr>
+            <a:solidFill>
+              <a:srgbClr val="0077FF"/>
+            </a:solidFill>
+            <a:ln>
+              <a:solidFill>
+                <a:srgbClr val="0077FF"/>
+              </a:solidFill>
+            </a:ln>
+          </c:spPr>
+          <c:cat>
+            <c:strRef>
+              <c:f>Sheet1!$A$2:$A$5</c:f>
+              <c:strCache>
+                <c:ptCount val="4"/>
+                <c:pt idx="0">
+                  <c:v>Время сборки</c:v>
+                </c:pt>
+                <c:pt idx="1">
+                  <c:v>Время до первой версии</c:v>
+                </c:pt>
+                <c:pt idx="2">
+                  <c:v>Нарушения стиля</c:v>
+                </c:pt>
+                <c:pt idx="3">
+                  <c:v>Запросы закрыты</c:v>
+                </c:pt>
+              </c:strCache>
+            </c:strRef>
+          </c:cat>
+          <c:val>
+            <c:numRef>
+              <c:f>Sheet1!$B$2:$B$5</c:f>
+              <c:numCache>
+                <c:formatCode>General</c:formatCode>
+                <c:ptCount val="4"/>
+                <c:pt idx="0">
+                  <c:v>186.0</c:v>
+                </c:pt>
+                <c:pt idx="1">
+                  <c:v>6.0</c:v>
+                </c:pt>
+                <c:pt idx="2">
+                  <c:v>19.0</c:v>
+                </c:pt>
+                <c:pt idx="3">
+                  <c:v>11.0</c:v>
+                </c:pt>
+              </c:numCache>
+            </c:numRef>
+          </c:val>
+        </c:ser>
+        <c:ser>
+          <c:idx val="1"/>
+          <c:order val="1"/>
+          <c:tx>
+            <c:strRef>
+              <c:f>Sheet1!$C$1</c:f>
+              <c:strCache>
+                <c:ptCount val="1"/>
+                <c:pt idx="0">
+                  <c:v>После</c:v>
+                </c:pt>
+              </c:strCache>
+            </c:strRef>
+          </c:tx>
+          <c:spPr>
+            <a:solidFill>
+              <a:srgbClr val="6DBCFF"/>
+            </a:solidFill>
+            <a:ln>
+              <a:solidFill>
+                <a:srgbClr val="6DBCFF"/>
+              </a:solidFill>
+            </a:ln>
+          </c:spPr>
+          <c:cat>
+            <c:strRef>
+              <c:f>Sheet1!$A$2:$A$5</c:f>
+              <c:strCache>
+                <c:ptCount val="4"/>
+                <c:pt idx="0">
+                  <c:v>Время сборки</c:v>
+                </c:pt>
+                <c:pt idx="1">
+                  <c:v>Время до первой версии</c:v>
+                </c:pt>
+                <c:pt idx="2">
+                  <c:v>Нарушения стиля</c:v>
+                </c:pt>
+                <c:pt idx="3">
+                  <c:v>Запросы закрыты</c:v>
+                </c:pt>
+              </c:strCache>
+            </c:strRef>
+          </c:cat>
+          <c:val>
+            <c:numRef>
+              <c:f>Sheet1!$C$2:$C$5</c:f>
+              <c:numCache>
+                <c:formatCode>General</c:formatCode>
+                <c:ptCount val="4"/>
+                <c:pt idx="0">
+                  <c:v>4.0</c:v>
+                </c:pt>
+                <c:pt idx="1">
+                  <c:v>1.0</c:v>
+                </c:pt>
+                <c:pt idx="2">
+                  <c:v>2.0</c:v>
+                </c:pt>
+                <c:pt idx="3">
+                  <c:v>38.0</c:v>
+                </c:pt>
+              </c:numCache>
+            </c:numRef>
+          </c:val>
+        </c:ser>
+        <c:dLbls>
+          <c:numFmt formatCode="0" sourceLinked="0"/>
+          <c:txPr>
+            <a:bodyPr wrap="none"/>
+            <a:lstStyle/>
+            <a:p>
+              <a:pPr>
+                <a:defRPr sz="1100" b="0">
+                  <a:solidFill>
+                    <a:srgbClr val="FFFFFF"/>
+                  </a:solidFill>
+                  <a:latin typeface="Play"/>
+                  <a:ea typeface="Play"/>
+                  <a:cs typeface="Play"/>
+                </a:defRPr>
+              </a:pPr>
+            </a:p>
+          </c:txPr>
+          <c:dLblPos val="outEnd"/>
+          <c:showLegendKey val="0"/>
+          <c:showVal val="1"/>
+          <c:showCatName val="0"/>
+          <c:showSerName val="0"/>
+          <c:showPercent val="0"/>
+          <c:showBubbleSize val="0"/>
+          <c:showLeaderLines val="1"/>
+        </c:dLbls>
+        <c:gapWidth val="60"/>
+        <c:axId val="-2068027336"/>
+        <c:axId val="-2113994440"/>
+      </c:barChart>
+      <c:catAx>
+        <c:axId val="-2068027336"/>
+        <c:scaling>
+          <c:orientation val="minMax"/>
+        </c:scaling>
+        <c:delete val="0"/>
+        <c:axPos val="b"/>
+        <c:majorTickMark val="out"/>
+        <c:minorTickMark val="none"/>
+        <c:tickLblPos val="nextTo"/>
+        <c:txPr>
+          <a:bodyPr/>
+          <a:lstStyle/>
+          <a:p>
+            <a:pPr>
+              <a:defRPr sz="1100" b="0">
+                <a:solidFill>
+                  <a:srgbClr val="FFFFFF"/>
+                </a:solidFill>
+                <a:latin typeface="Play"/>
+                <a:ea typeface="Play"/>
+                <a:cs typeface="Play"/>
+              </a:defRPr>
+            </a:pPr>
+          </a:p>
+        </c:txPr>
+        <c:crossAx val="-2113994440"/>
+        <c:crosses val="autoZero"/>
+        <c:auto val="1"/>
+        <c:lblAlgn val="ctr"/>
+        <c:lblOffset val="100"/>
+        <c:noMultiLvlLbl val="0"/>
+      </c:catAx>
+      <c:valAx>
+        <c:axId val="-2113994440"/>
+        <c:scaling/>
+        <c:delete val="0"/>
+        <c:axPos val="l"/>
+        <c:majorGridlines>
+          <c:spPr>
+            <a:ln w="9525">
+              <a:solidFill>
+                <a:srgbClr val="3C3C3C"/>
+              </a:solidFill>
+            </a:ln>
+          </c:spPr>
+        </c:majorGridlines>
+        <c:majorTickMark val="out"/>
+        <c:minorTickMark val="none"/>
+        <c:tickLblPos val="nextTo"/>
+        <c:txPr>
+          <a:bodyPr/>
+          <a:lstStyle/>
+          <a:p>
+            <a:pPr>
+              <a:defRPr sz="1100" b="0">
+                <a:solidFill>
+                  <a:srgbClr val="FFFFFF"/>
+                </a:solidFill>
+                <a:latin typeface="Play"/>
+                <a:ea typeface="Play"/>
+                <a:cs typeface="Play"/>
+              </a:defRPr>
+            </a:pPr>
+          </a:p>
+        </c:txPr>
+        <c:crossAx val="-2068027336"/>
+        <c:crosses val="autoZero"/>
+      </c:valAx>
+    </c:plotArea>
+    <c:legend>
+      <c:legendPos val="b"/>
+      <c:overlay val="0"/>
+    </c:legend>
     <c:dispBlanksAs val="gap"/>
   </c:chart>
   <c:txPr>
@@ -2328,6 +2605,2607 @@
 </p:notes>
 </file>
 
+<file path=ppt/slideLayouts/slideLayout1.xml><?xml version="1.0" encoding="utf-8"?>
+<p:sldLayout xmlns:a="http://schemas.openxmlformats.org/drawingml/2006/main" xmlns:r="http://schemas.openxmlformats.org/officeDocument/2006/relationships" xmlns:mc="http://schemas.openxmlformats.org/markup-compatibility/2006" xmlns:mv="urn:schemas-microsoft-com:mac:vml" xmlns:p="http://schemas.openxmlformats.org/presentationml/2006/main" xmlns:c="http://schemas.openxmlformats.org/drawingml/2006/chart" xmlns:dgm="http://schemas.openxmlformats.org/drawingml/2006/diagram" xmlns:o="urn:schemas-microsoft-com:office:office" xmlns:v="urn:schemas-microsoft-com:vml" xmlns:pvml="urn:schemas-microsoft-com:office:powerpoint" xmlns:com="http://schemas.openxmlformats.org/drawingml/2006/compatibility" xmlns:p14="http://schemas.microsoft.com/office/powerpoint/2010/main" xmlns:p15="http://schemas.microsoft.com/office/powerpoint/2012/main" xmlns:ahyp="http://schemas.microsoft.com/office/drawing/2018/hyperlinkcolor" matchingName="7_Титульный слайд">
+  <p:cSld name="7_Титульный слайд">
+    <p:bg>
+      <p:bgPr>
+        <a:solidFill>
+          <a:schemeClr val="dk1"/>
+        </a:solidFill>
+      </p:bgPr>
+    </p:bg>
+    <p:spTree>
+      <p:nvGrpSpPr>
+        <p:cNvPr id="54" name="Shape 54"/>
+        <p:cNvGrpSpPr/>
+        <p:nvPr/>
+      </p:nvGrpSpPr>
+      <p:grpSpPr>
+        <a:xfrm>
+          <a:off x="0" y="0"/>
+          <a:ext cx="0" cy="0"/>
+          <a:chOff x="0" y="0"/>
+          <a:chExt cx="0" cy="0"/>
+        </a:xfrm>
+      </p:grpSpPr>
+      <p:grpSp>
+        <p:nvGrpSpPr>
+          <p:cNvPr id="55" name="Google Shape;55;p2"/>
+          <p:cNvGrpSpPr/>
+          <p:nvPr/>
+        </p:nvGrpSpPr>
+        <p:grpSpPr>
+          <a:xfrm>
+            <a:off x="224842" y="-74145"/>
+            <a:ext cx="12188171" cy="64326"/>
+            <a:chOff x="-2" y="-2"/>
+            <a:chExt cx="12188169" cy="64324"/>
+          </a:xfrm>
+        </p:grpSpPr>
+        <p:cxnSp>
+          <p:nvCxnSpPr>
+            <p:cNvPr id="56" name="Google Shape;56;p2"/>
+            <p:cNvCxnSpPr/>
+            <p:nvPr/>
+          </p:nvCxnSpPr>
+          <p:spPr>
+            <a:xfrm flipH="1">
+              <a:off x="-2" y="-2"/>
+              <a:ext cx="7" cy="64324"/>
+            </a:xfrm>
+            <a:prstGeom prst="straightConnector1">
+              <a:avLst/>
+            </a:prstGeom>
+            <a:noFill/>
+            <a:ln cap="flat" cmpd="sng" w="9525">
+              <a:solidFill>
+                <a:srgbClr val="808080"/>
+              </a:solidFill>
+              <a:prstDash val="solid"/>
+              <a:miter lim="8000"/>
+              <a:headEnd len="sm" w="sm" type="none"/>
+              <a:tailEnd len="sm" w="sm" type="none"/>
+            </a:ln>
+          </p:spPr>
+        </p:cxnSp>
+        <p:cxnSp>
+          <p:nvCxnSpPr>
+            <p:cNvPr id="57" name="Google Shape;57;p2"/>
+            <p:cNvCxnSpPr/>
+            <p:nvPr/>
+          </p:nvCxnSpPr>
+          <p:spPr>
+            <a:xfrm>
+              <a:off x="677118" y="-2"/>
+              <a:ext cx="7" cy="64324"/>
+            </a:xfrm>
+            <a:prstGeom prst="straightConnector1">
+              <a:avLst/>
+            </a:prstGeom>
+            <a:noFill/>
+            <a:ln cap="flat" cmpd="sng" w="9525">
+              <a:solidFill>
+                <a:srgbClr val="808080"/>
+              </a:solidFill>
+              <a:prstDash val="solid"/>
+              <a:miter lim="8000"/>
+              <a:headEnd len="sm" w="sm" type="none"/>
+              <a:tailEnd len="sm" w="sm" type="none"/>
+            </a:ln>
+          </p:spPr>
+        </p:cxnSp>
+        <p:cxnSp>
+          <p:nvCxnSpPr>
+            <p:cNvPr id="58" name="Google Shape;58;p2"/>
+            <p:cNvCxnSpPr/>
+            <p:nvPr/>
+          </p:nvCxnSpPr>
+          <p:spPr>
+            <a:xfrm>
+              <a:off x="1354241" y="-2"/>
+              <a:ext cx="7" cy="64324"/>
+            </a:xfrm>
+            <a:prstGeom prst="straightConnector1">
+              <a:avLst/>
+            </a:prstGeom>
+            <a:noFill/>
+            <a:ln cap="flat" cmpd="sng" w="9525">
+              <a:solidFill>
+                <a:srgbClr val="808080"/>
+              </a:solidFill>
+              <a:prstDash val="solid"/>
+              <a:miter lim="8000"/>
+              <a:headEnd len="sm" w="sm" type="none"/>
+              <a:tailEnd len="sm" w="sm" type="none"/>
+            </a:ln>
+          </p:spPr>
+        </p:cxnSp>
+        <p:cxnSp>
+          <p:nvCxnSpPr>
+            <p:cNvPr id="59" name="Google Shape;59;p2"/>
+            <p:cNvCxnSpPr/>
+            <p:nvPr/>
+          </p:nvCxnSpPr>
+          <p:spPr>
+            <a:xfrm>
+              <a:off x="2031360" y="-2"/>
+              <a:ext cx="7" cy="64324"/>
+            </a:xfrm>
+            <a:prstGeom prst="straightConnector1">
+              <a:avLst/>
+            </a:prstGeom>
+            <a:noFill/>
+            <a:ln cap="flat" cmpd="sng" w="9525">
+              <a:solidFill>
+                <a:srgbClr val="808080"/>
+              </a:solidFill>
+              <a:prstDash val="solid"/>
+              <a:miter lim="8000"/>
+              <a:headEnd len="sm" w="sm" type="none"/>
+              <a:tailEnd len="sm" w="sm" type="none"/>
+            </a:ln>
+          </p:spPr>
+        </p:cxnSp>
+        <p:cxnSp>
+          <p:nvCxnSpPr>
+            <p:cNvPr id="60" name="Google Shape;60;p2"/>
+            <p:cNvCxnSpPr/>
+            <p:nvPr/>
+          </p:nvCxnSpPr>
+          <p:spPr>
+            <a:xfrm>
+              <a:off x="2708479" y="-2"/>
+              <a:ext cx="7" cy="64324"/>
+            </a:xfrm>
+            <a:prstGeom prst="straightConnector1">
+              <a:avLst/>
+            </a:prstGeom>
+            <a:noFill/>
+            <a:ln cap="flat" cmpd="sng" w="9525">
+              <a:solidFill>
+                <a:srgbClr val="808080"/>
+              </a:solidFill>
+              <a:prstDash val="solid"/>
+              <a:miter lim="8000"/>
+              <a:headEnd len="sm" w="sm" type="none"/>
+              <a:tailEnd len="sm" w="sm" type="none"/>
+            </a:ln>
+          </p:spPr>
+        </p:cxnSp>
+        <p:cxnSp>
+          <p:nvCxnSpPr>
+            <p:cNvPr id="61" name="Google Shape;61;p2"/>
+            <p:cNvCxnSpPr/>
+            <p:nvPr/>
+          </p:nvCxnSpPr>
+          <p:spPr>
+            <a:xfrm>
+              <a:off x="3385598" y="-2"/>
+              <a:ext cx="7" cy="64324"/>
+            </a:xfrm>
+            <a:prstGeom prst="straightConnector1">
+              <a:avLst/>
+            </a:prstGeom>
+            <a:noFill/>
+            <a:ln cap="flat" cmpd="sng" w="9525">
+              <a:solidFill>
+                <a:srgbClr val="808080"/>
+              </a:solidFill>
+              <a:prstDash val="solid"/>
+              <a:miter lim="8000"/>
+              <a:headEnd len="sm" w="sm" type="none"/>
+              <a:tailEnd len="sm" w="sm" type="none"/>
+            </a:ln>
+          </p:spPr>
+        </p:cxnSp>
+        <p:cxnSp>
+          <p:nvCxnSpPr>
+            <p:cNvPr id="62" name="Google Shape;62;p2"/>
+            <p:cNvCxnSpPr/>
+            <p:nvPr/>
+          </p:nvCxnSpPr>
+          <p:spPr>
+            <a:xfrm>
+              <a:off x="4062717" y="-2"/>
+              <a:ext cx="7" cy="64324"/>
+            </a:xfrm>
+            <a:prstGeom prst="straightConnector1">
+              <a:avLst/>
+            </a:prstGeom>
+            <a:noFill/>
+            <a:ln cap="flat" cmpd="sng" w="9525">
+              <a:solidFill>
+                <a:srgbClr val="808080"/>
+              </a:solidFill>
+              <a:prstDash val="solid"/>
+              <a:miter lim="8000"/>
+              <a:headEnd len="sm" w="sm" type="none"/>
+              <a:tailEnd len="sm" w="sm" type="none"/>
+            </a:ln>
+          </p:spPr>
+        </p:cxnSp>
+        <p:cxnSp>
+          <p:nvCxnSpPr>
+            <p:cNvPr id="63" name="Google Shape;63;p2"/>
+            <p:cNvCxnSpPr/>
+            <p:nvPr/>
+          </p:nvCxnSpPr>
+          <p:spPr>
+            <a:xfrm>
+              <a:off x="4739836" y="-2"/>
+              <a:ext cx="7" cy="64324"/>
+            </a:xfrm>
+            <a:prstGeom prst="straightConnector1">
+              <a:avLst/>
+            </a:prstGeom>
+            <a:noFill/>
+            <a:ln cap="flat" cmpd="sng" w="9525">
+              <a:solidFill>
+                <a:srgbClr val="808080"/>
+              </a:solidFill>
+              <a:prstDash val="solid"/>
+              <a:miter lim="8000"/>
+              <a:headEnd len="sm" w="sm" type="none"/>
+              <a:tailEnd len="sm" w="sm" type="none"/>
+            </a:ln>
+          </p:spPr>
+        </p:cxnSp>
+        <p:cxnSp>
+          <p:nvCxnSpPr>
+            <p:cNvPr id="64" name="Google Shape;64;p2"/>
+            <p:cNvCxnSpPr/>
+            <p:nvPr/>
+          </p:nvCxnSpPr>
+          <p:spPr>
+            <a:xfrm>
+              <a:off x="5416955" y="-2"/>
+              <a:ext cx="7" cy="64324"/>
+            </a:xfrm>
+            <a:prstGeom prst="straightConnector1">
+              <a:avLst/>
+            </a:prstGeom>
+            <a:noFill/>
+            <a:ln cap="flat" cmpd="sng" w="9525">
+              <a:solidFill>
+                <a:srgbClr val="808080"/>
+              </a:solidFill>
+              <a:prstDash val="solid"/>
+              <a:miter lim="8000"/>
+              <a:headEnd len="sm" w="sm" type="none"/>
+              <a:tailEnd len="sm" w="sm" type="none"/>
+            </a:ln>
+          </p:spPr>
+        </p:cxnSp>
+        <p:cxnSp>
+          <p:nvCxnSpPr>
+            <p:cNvPr id="65" name="Google Shape;65;p2"/>
+            <p:cNvCxnSpPr/>
+            <p:nvPr/>
+          </p:nvCxnSpPr>
+          <p:spPr>
+            <a:xfrm>
+              <a:off x="6094077" y="-2"/>
+              <a:ext cx="7" cy="64324"/>
+            </a:xfrm>
+            <a:prstGeom prst="straightConnector1">
+              <a:avLst/>
+            </a:prstGeom>
+            <a:noFill/>
+            <a:ln cap="flat" cmpd="sng" w="9525">
+              <a:solidFill>
+                <a:srgbClr val="808080"/>
+              </a:solidFill>
+              <a:prstDash val="solid"/>
+              <a:miter lim="8000"/>
+              <a:headEnd len="sm" w="sm" type="none"/>
+              <a:tailEnd len="sm" w="sm" type="none"/>
+            </a:ln>
+          </p:spPr>
+        </p:cxnSp>
+        <p:cxnSp>
+          <p:nvCxnSpPr>
+            <p:cNvPr id="66" name="Google Shape;66;p2"/>
+            <p:cNvCxnSpPr/>
+            <p:nvPr/>
+          </p:nvCxnSpPr>
+          <p:spPr>
+            <a:xfrm>
+              <a:off x="6771195" y="-2"/>
+              <a:ext cx="7" cy="64324"/>
+            </a:xfrm>
+            <a:prstGeom prst="straightConnector1">
+              <a:avLst/>
+            </a:prstGeom>
+            <a:noFill/>
+            <a:ln cap="flat" cmpd="sng" w="9525">
+              <a:solidFill>
+                <a:srgbClr val="808080"/>
+              </a:solidFill>
+              <a:prstDash val="solid"/>
+              <a:miter lim="8000"/>
+              <a:headEnd len="sm" w="sm" type="none"/>
+              <a:tailEnd len="sm" w="sm" type="none"/>
+            </a:ln>
+          </p:spPr>
+        </p:cxnSp>
+        <p:cxnSp>
+          <p:nvCxnSpPr>
+            <p:cNvPr id="67" name="Google Shape;67;p2"/>
+            <p:cNvCxnSpPr/>
+            <p:nvPr/>
+          </p:nvCxnSpPr>
+          <p:spPr>
+            <a:xfrm>
+              <a:off x="7448315" y="-2"/>
+              <a:ext cx="7" cy="64324"/>
+            </a:xfrm>
+            <a:prstGeom prst="straightConnector1">
+              <a:avLst/>
+            </a:prstGeom>
+            <a:noFill/>
+            <a:ln cap="flat" cmpd="sng" w="9525">
+              <a:solidFill>
+                <a:srgbClr val="808080"/>
+              </a:solidFill>
+              <a:prstDash val="solid"/>
+              <a:miter lim="8000"/>
+              <a:headEnd len="sm" w="sm" type="none"/>
+              <a:tailEnd len="sm" w="sm" type="none"/>
+            </a:ln>
+          </p:spPr>
+        </p:cxnSp>
+        <p:cxnSp>
+          <p:nvCxnSpPr>
+            <p:cNvPr id="68" name="Google Shape;68;p2"/>
+            <p:cNvCxnSpPr/>
+            <p:nvPr/>
+          </p:nvCxnSpPr>
+          <p:spPr>
+            <a:xfrm>
+              <a:off x="8125435" y="-2"/>
+              <a:ext cx="7" cy="64324"/>
+            </a:xfrm>
+            <a:prstGeom prst="straightConnector1">
+              <a:avLst/>
+            </a:prstGeom>
+            <a:noFill/>
+            <a:ln cap="flat" cmpd="sng" w="9525">
+              <a:solidFill>
+                <a:srgbClr val="808080"/>
+              </a:solidFill>
+              <a:prstDash val="solid"/>
+              <a:miter lim="8000"/>
+              <a:headEnd len="sm" w="sm" type="none"/>
+              <a:tailEnd len="sm" w="sm" type="none"/>
+            </a:ln>
+          </p:spPr>
+        </p:cxnSp>
+        <p:cxnSp>
+          <p:nvCxnSpPr>
+            <p:cNvPr id="69" name="Google Shape;69;p2"/>
+            <p:cNvCxnSpPr/>
+            <p:nvPr/>
+          </p:nvCxnSpPr>
+          <p:spPr>
+            <a:xfrm>
+              <a:off x="8802554" y="-2"/>
+              <a:ext cx="7" cy="64324"/>
+            </a:xfrm>
+            <a:prstGeom prst="straightConnector1">
+              <a:avLst/>
+            </a:prstGeom>
+            <a:noFill/>
+            <a:ln cap="flat" cmpd="sng" w="9525">
+              <a:solidFill>
+                <a:srgbClr val="808080"/>
+              </a:solidFill>
+              <a:prstDash val="solid"/>
+              <a:miter lim="8000"/>
+              <a:headEnd len="sm" w="sm" type="none"/>
+              <a:tailEnd len="sm" w="sm" type="none"/>
+            </a:ln>
+          </p:spPr>
+        </p:cxnSp>
+        <p:cxnSp>
+          <p:nvCxnSpPr>
+            <p:cNvPr id="70" name="Google Shape;70;p2"/>
+            <p:cNvCxnSpPr/>
+            <p:nvPr/>
+          </p:nvCxnSpPr>
+          <p:spPr>
+            <a:xfrm>
+              <a:off x="9479673" y="-2"/>
+              <a:ext cx="7" cy="64324"/>
+            </a:xfrm>
+            <a:prstGeom prst="straightConnector1">
+              <a:avLst/>
+            </a:prstGeom>
+            <a:noFill/>
+            <a:ln cap="flat" cmpd="sng" w="9525">
+              <a:solidFill>
+                <a:srgbClr val="808080"/>
+              </a:solidFill>
+              <a:prstDash val="solid"/>
+              <a:miter lim="8000"/>
+              <a:headEnd len="sm" w="sm" type="none"/>
+              <a:tailEnd len="sm" w="sm" type="none"/>
+            </a:ln>
+          </p:spPr>
+        </p:cxnSp>
+        <p:cxnSp>
+          <p:nvCxnSpPr>
+            <p:cNvPr id="71" name="Google Shape;71;p2"/>
+            <p:cNvCxnSpPr/>
+            <p:nvPr/>
+          </p:nvCxnSpPr>
+          <p:spPr>
+            <a:xfrm>
+              <a:off x="10156792" y="-2"/>
+              <a:ext cx="7" cy="64324"/>
+            </a:xfrm>
+            <a:prstGeom prst="straightConnector1">
+              <a:avLst/>
+            </a:prstGeom>
+            <a:noFill/>
+            <a:ln cap="flat" cmpd="sng" w="9525">
+              <a:solidFill>
+                <a:srgbClr val="808080"/>
+              </a:solidFill>
+              <a:prstDash val="solid"/>
+              <a:miter lim="8000"/>
+              <a:headEnd len="sm" w="sm" type="none"/>
+              <a:tailEnd len="sm" w="sm" type="none"/>
+            </a:ln>
+          </p:spPr>
+        </p:cxnSp>
+        <p:cxnSp>
+          <p:nvCxnSpPr>
+            <p:cNvPr id="72" name="Google Shape;72;p2"/>
+            <p:cNvCxnSpPr/>
+            <p:nvPr/>
+          </p:nvCxnSpPr>
+          <p:spPr>
+            <a:xfrm>
+              <a:off x="10833914" y="-2"/>
+              <a:ext cx="7" cy="64324"/>
+            </a:xfrm>
+            <a:prstGeom prst="straightConnector1">
+              <a:avLst/>
+            </a:prstGeom>
+            <a:noFill/>
+            <a:ln cap="flat" cmpd="sng" w="9525">
+              <a:solidFill>
+                <a:srgbClr val="808080"/>
+              </a:solidFill>
+              <a:prstDash val="solid"/>
+              <a:miter lim="8000"/>
+              <a:headEnd len="sm" w="sm" type="none"/>
+              <a:tailEnd len="sm" w="sm" type="none"/>
+            </a:ln>
+          </p:spPr>
+        </p:cxnSp>
+        <p:cxnSp>
+          <p:nvCxnSpPr>
+            <p:cNvPr id="73" name="Google Shape;73;p2"/>
+            <p:cNvCxnSpPr/>
+            <p:nvPr/>
+          </p:nvCxnSpPr>
+          <p:spPr>
+            <a:xfrm>
+              <a:off x="11511034" y="-2"/>
+              <a:ext cx="7" cy="64324"/>
+            </a:xfrm>
+            <a:prstGeom prst="straightConnector1">
+              <a:avLst/>
+            </a:prstGeom>
+            <a:noFill/>
+            <a:ln cap="flat" cmpd="sng" w="9525">
+              <a:solidFill>
+                <a:srgbClr val="808080"/>
+              </a:solidFill>
+              <a:prstDash val="solid"/>
+              <a:miter lim="8000"/>
+              <a:headEnd len="sm" w="sm" type="none"/>
+              <a:tailEnd len="sm" w="sm" type="none"/>
+            </a:ln>
+          </p:spPr>
+        </p:cxnSp>
+        <p:cxnSp>
+          <p:nvCxnSpPr>
+            <p:cNvPr id="74" name="Google Shape;74;p2"/>
+            <p:cNvCxnSpPr/>
+            <p:nvPr/>
+          </p:nvCxnSpPr>
+          <p:spPr>
+            <a:xfrm>
+              <a:off x="12188160" y="-2"/>
+              <a:ext cx="7" cy="64324"/>
+            </a:xfrm>
+            <a:prstGeom prst="straightConnector1">
+              <a:avLst/>
+            </a:prstGeom>
+            <a:noFill/>
+            <a:ln cap="flat" cmpd="sng" w="9525">
+              <a:solidFill>
+                <a:srgbClr val="808080"/>
+              </a:solidFill>
+              <a:prstDash val="solid"/>
+              <a:miter lim="8000"/>
+              <a:headEnd len="sm" w="sm" type="none"/>
+              <a:tailEnd len="sm" w="sm" type="none"/>
+            </a:ln>
+          </p:spPr>
+        </p:cxnSp>
+      </p:grpSp>
+      <p:sp>
+        <p:nvSpPr>
+          <p:cNvPr id="75" name="Google Shape;75;p2"/>
+          <p:cNvSpPr txBox="1"/>
+          <p:nvPr>
+            <p:ph type="title"/>
+          </p:nvPr>
+        </p:nvSpPr>
+        <p:spPr>
+          <a:xfrm>
+            <a:off x="429253" y="2546255"/>
+            <a:ext cx="7827335" cy="1876890"/>
+          </a:xfrm>
+          <a:prstGeom prst="rect">
+            <a:avLst/>
+          </a:prstGeom>
+          <a:noFill/>
+          <a:ln>
+            <a:noFill/>
+          </a:ln>
+        </p:spPr>
+        <p:txBody>
+          <a:bodyPr anchorCtr="0" anchor="ctr" bIns="0" lIns="0" spcFirstLastPara="1" rIns="0" wrap="square" tIns="0">
+            <a:noAutofit/>
+          </a:bodyPr>
+          <a:lstStyle>
+            <a:lvl1pPr lvl="0" algn="l">
+              <a:lnSpc>
+                <a:spcPct val="90000"/>
+              </a:lnSpc>
+              <a:spcBef>
+                <a:spcPts val="0"/>
+              </a:spcBef>
+              <a:spcAft>
+                <a:spcPts val="0"/>
+              </a:spcAft>
+              <a:buClr>
+                <a:schemeClr val="lt1"/>
+              </a:buClr>
+              <a:buSzPts val="3600"/>
+              <a:buFont typeface="Play"/>
+              <a:buNone/>
+              <a:defRPr b="0" i="0" sz="3600">
+                <a:solidFill>
+                  <a:schemeClr val="lt1"/>
+                </a:solidFill>
+                <a:latin typeface="Play"/>
+                <a:ea typeface="Play"/>
+                <a:cs typeface="Play"/>
+                <a:sym typeface="Play"/>
+              </a:defRPr>
+            </a:lvl1pPr>
+            <a:lvl2pPr lvl="1">
+              <a:spcBef>
+                <a:spcPts val="0"/>
+              </a:spcBef>
+              <a:spcAft>
+                <a:spcPts val="0"/>
+              </a:spcAft>
+              <a:buSzPts val="1400"/>
+              <a:buNone/>
+              <a:defRPr/>
+            </a:lvl2pPr>
+            <a:lvl3pPr lvl="2">
+              <a:spcBef>
+                <a:spcPts val="0"/>
+              </a:spcBef>
+              <a:spcAft>
+                <a:spcPts val="0"/>
+              </a:spcAft>
+              <a:buSzPts val="1400"/>
+              <a:buNone/>
+              <a:defRPr/>
+            </a:lvl3pPr>
+            <a:lvl4pPr lvl="3">
+              <a:spcBef>
+                <a:spcPts val="0"/>
+              </a:spcBef>
+              <a:spcAft>
+                <a:spcPts val="0"/>
+              </a:spcAft>
+              <a:buSzPts val="1400"/>
+              <a:buNone/>
+              <a:defRPr/>
+            </a:lvl4pPr>
+            <a:lvl5pPr lvl="4">
+              <a:spcBef>
+                <a:spcPts val="0"/>
+              </a:spcBef>
+              <a:spcAft>
+                <a:spcPts val="0"/>
+              </a:spcAft>
+              <a:buSzPts val="1400"/>
+              <a:buNone/>
+              <a:defRPr/>
+            </a:lvl5pPr>
+            <a:lvl6pPr lvl="5">
+              <a:spcBef>
+                <a:spcPts val="0"/>
+              </a:spcBef>
+              <a:spcAft>
+                <a:spcPts val="0"/>
+              </a:spcAft>
+              <a:buSzPts val="1400"/>
+              <a:buNone/>
+              <a:defRPr/>
+            </a:lvl6pPr>
+            <a:lvl7pPr lvl="6">
+              <a:spcBef>
+                <a:spcPts val="0"/>
+              </a:spcBef>
+              <a:spcAft>
+                <a:spcPts val="0"/>
+              </a:spcAft>
+              <a:buSzPts val="1400"/>
+              <a:buNone/>
+              <a:defRPr/>
+            </a:lvl7pPr>
+            <a:lvl8pPr lvl="7">
+              <a:spcBef>
+                <a:spcPts val="0"/>
+              </a:spcBef>
+              <a:spcAft>
+                <a:spcPts val="0"/>
+              </a:spcAft>
+              <a:buSzPts val="1400"/>
+              <a:buNone/>
+              <a:defRPr/>
+            </a:lvl8pPr>
+            <a:lvl9pPr lvl="8">
+              <a:spcBef>
+                <a:spcPts val="0"/>
+              </a:spcBef>
+              <a:spcAft>
+                <a:spcPts val="0"/>
+              </a:spcAft>
+              <a:buSzPts val="1400"/>
+              <a:buNone/>
+              <a:defRPr/>
+            </a:lvl9pPr>
+          </a:lstStyle>
+          <a:p/>
+        </p:txBody>
+      </p:sp>
+      <p:grpSp>
+        <p:nvGrpSpPr>
+          <p:cNvPr id="76" name="Google Shape;76;p2"/>
+          <p:cNvGrpSpPr/>
+          <p:nvPr/>
+        </p:nvGrpSpPr>
+        <p:grpSpPr>
+          <a:xfrm>
+            <a:off x="1" y="6350"/>
+            <a:ext cx="12192792" cy="6851649"/>
+            <a:chOff x="0" y="6350"/>
+            <a:chExt cx="24396891" cy="13709651"/>
+          </a:xfrm>
+        </p:grpSpPr>
+        <p:pic>
+          <p:nvPicPr>
+            <p:cNvPr id="77" name="Google Shape;77;p2"/>
+            <p:cNvPicPr preferRelativeResize="0"/>
+            <p:nvPr/>
+          </p:nvPicPr>
+          <p:blipFill rotWithShape="1">
+            <a:blip r:embed="rId2">
+              <a:alphaModFix/>
+            </a:blip>
+            <a:srcRect b="0" l="0" r="50023" t="80662"/>
+            <a:stretch/>
+          </p:blipFill>
+          <p:spPr>
+            <a:xfrm>
+              <a:off x="1587" y="11064874"/>
+              <a:ext cx="12192000" cy="2651125"/>
+            </a:xfrm>
+            <a:prstGeom prst="rect">
+              <a:avLst/>
+            </a:prstGeom>
+            <a:noFill/>
+            <a:ln>
+              <a:noFill/>
+            </a:ln>
+          </p:spPr>
+        </p:pic>
+        <p:sp>
+          <p:nvSpPr>
+            <p:cNvPr id="78" name="Google Shape;78;p2"/>
+            <p:cNvSpPr/>
+            <p:nvPr/>
+          </p:nvSpPr>
+          <p:spPr>
+            <a:xfrm>
+              <a:off x="0" y="10657492"/>
+              <a:ext cx="8335061" cy="3058509"/>
+            </a:xfrm>
+            <a:prstGeom prst="rect">
+              <a:avLst/>
+            </a:prstGeom>
+            <a:solidFill>
+              <a:srgbClr val="000000"/>
+            </a:solidFill>
+            <a:ln>
+              <a:noFill/>
+            </a:ln>
+          </p:spPr>
+          <p:txBody>
+            <a:bodyPr anchorCtr="0" anchor="ctr" bIns="45700" lIns="91425" spcFirstLastPara="1" rIns="91425" wrap="square" tIns="45700">
+              <a:noAutofit/>
+            </a:bodyPr>
+            <a:lstStyle/>
+            <a:p>
+              <a:pPr indent="0" lvl="0" marL="0" marR="0" rtl="0" algn="ctr">
+                <a:spcBef>
+                  <a:spcPts val="0"/>
+                </a:spcBef>
+                <a:spcAft>
+                  <a:spcPts val="0"/>
+                </a:spcAft>
+                <a:buNone/>
+              </a:pPr>
+              <a:r>
+                <a:t/>
+              </a:r>
+              <a:endParaRPr b="0" i="0" sz="1800" u="none" cap="none" strike="noStrike">
+                <a:solidFill>
+                  <a:schemeClr val="lt1"/>
+                </a:solidFill>
+                <a:latin typeface="Arial"/>
+                <a:ea typeface="Arial"/>
+                <a:cs typeface="Arial"/>
+                <a:sym typeface="Arial"/>
+              </a:endParaRPr>
+            </a:p>
+          </p:txBody>
+        </p:sp>
+        <p:pic>
+          <p:nvPicPr>
+            <p:cNvPr id="79" name="Google Shape;79;p2"/>
+            <p:cNvPicPr preferRelativeResize="0"/>
+            <p:nvPr/>
+          </p:nvPicPr>
+          <p:blipFill rotWithShape="1">
+            <a:blip r:embed="rId2">
+              <a:alphaModFix/>
+            </a:blip>
+            <a:srcRect b="0" l="52729" r="0" t="82751"/>
+            <a:stretch/>
+          </p:blipFill>
+          <p:spPr>
+            <a:xfrm>
+              <a:off x="12853797" y="11351172"/>
+              <a:ext cx="11531791" cy="2364828"/>
+            </a:xfrm>
+            <a:prstGeom prst="rect">
+              <a:avLst/>
+            </a:prstGeom>
+            <a:noFill/>
+            <a:ln>
+              <a:noFill/>
+            </a:ln>
+          </p:spPr>
+        </p:pic>
+        <p:pic>
+          <p:nvPicPr>
+            <p:cNvPr id="80" name="Google Shape;80;p2"/>
+            <p:cNvPicPr preferRelativeResize="0"/>
+            <p:nvPr/>
+          </p:nvPicPr>
+          <p:blipFill rotWithShape="1">
+            <a:blip r:embed="rId2">
+              <a:alphaModFix/>
+            </a:blip>
+            <a:srcRect b="76357" l="52729" r="0" t="0"/>
+            <a:stretch/>
+          </p:blipFill>
+          <p:spPr>
+            <a:xfrm>
+              <a:off x="12865099" y="6350"/>
+              <a:ext cx="11531792" cy="3241347"/>
+            </a:xfrm>
+            <a:prstGeom prst="rect">
+              <a:avLst/>
+            </a:prstGeom>
+            <a:noFill/>
+            <a:ln>
+              <a:noFill/>
+            </a:ln>
+          </p:spPr>
+        </p:pic>
+        <p:pic>
+          <p:nvPicPr>
+            <p:cNvPr id="81" name="Google Shape;81;p2"/>
+            <p:cNvPicPr preferRelativeResize="0"/>
+            <p:nvPr/>
+          </p:nvPicPr>
+          <p:blipFill rotWithShape="1">
+            <a:blip r:embed="rId2">
+              <a:alphaModFix/>
+            </a:blip>
+            <a:srcRect b="69917" l="0" r="47271" t="0"/>
+            <a:stretch/>
+          </p:blipFill>
+          <p:spPr>
+            <a:xfrm>
+              <a:off x="1587" y="6350"/>
+              <a:ext cx="12863512" cy="4124216"/>
+            </a:xfrm>
+            <a:prstGeom prst="rect">
+              <a:avLst/>
+            </a:prstGeom>
+            <a:noFill/>
+            <a:ln>
+              <a:noFill/>
+            </a:ln>
+          </p:spPr>
+        </p:pic>
+      </p:grpSp>
+      <p:pic>
+        <p:nvPicPr>
+          <p:cNvPr id="82" name="Google Shape;82;p2"/>
+          <p:cNvPicPr preferRelativeResize="0"/>
+          <p:nvPr/>
+        </p:nvPicPr>
+        <p:blipFill rotWithShape="1">
+          <a:blip r:embed="rId3">
+            <a:alphaModFix/>
+          </a:blip>
+          <a:srcRect b="0" l="0" r="0" t="0"/>
+          <a:stretch/>
+        </p:blipFill>
+        <p:spPr>
+          <a:xfrm>
+            <a:off x="398723" y="6035040"/>
+            <a:ext cx="2653844" cy="418148"/>
+          </a:xfrm>
+          <a:prstGeom prst="rect">
+            <a:avLst/>
+          </a:prstGeom>
+          <a:noFill/>
+          <a:ln>
+            <a:noFill/>
+          </a:ln>
+        </p:spPr>
+      </p:pic>
+      <p:pic>
+        <p:nvPicPr>
+          <p:cNvPr descr=" " id="83" name="Google Shape;83;p2"/>
+          <p:cNvPicPr preferRelativeResize="0"/>
+          <p:nvPr/>
+        </p:nvPicPr>
+        <p:blipFill rotWithShape="1">
+          <a:blip r:embed="rId4">
+            <a:alphaModFix/>
+          </a:blip>
+          <a:srcRect b="0" l="0" r="0" t="0"/>
+          <a:stretch/>
+        </p:blipFill>
+        <p:spPr>
+          <a:xfrm>
+            <a:off x="10858522" y="6160788"/>
+            <a:ext cx="934755" cy="292400"/>
+          </a:xfrm>
+          <a:prstGeom prst="rect">
+            <a:avLst/>
+          </a:prstGeom>
+          <a:noFill/>
+          <a:ln>
+            <a:noFill/>
+          </a:ln>
+        </p:spPr>
+      </p:pic>
+    </p:spTree>
+  </p:cSld>
+  <p:clrMapOvr>
+    <a:masterClrMapping/>
+  </p:clrMapOvr>
+</p:sldLayout>
+</file>
+
+<file path=ppt/slideLayouts/slideLayout14.xml><?xml version="1.0" encoding="utf-8"?>
+<p:sldLayout xmlns:a="http://schemas.openxmlformats.org/drawingml/2006/main" xmlns:r="http://schemas.openxmlformats.org/officeDocument/2006/relationships" xmlns:mc="http://schemas.openxmlformats.org/markup-compatibility/2006" xmlns:mv="urn:schemas-microsoft-com:mac:vml" xmlns:p="http://schemas.openxmlformats.org/presentationml/2006/main" xmlns:c="http://schemas.openxmlformats.org/drawingml/2006/chart" xmlns:dgm="http://schemas.openxmlformats.org/drawingml/2006/diagram" xmlns:o="urn:schemas-microsoft-com:office:office" xmlns:v="urn:schemas-microsoft-com:vml" xmlns:pvml="urn:schemas-microsoft-com:office:powerpoint" xmlns:com="http://schemas.openxmlformats.org/drawingml/2006/compatibility" xmlns:p14="http://schemas.microsoft.com/office/powerpoint/2010/main" xmlns:p15="http://schemas.microsoft.com/office/powerpoint/2012/main" xmlns:ahyp="http://schemas.microsoft.com/office/drawing/2018/hyperlinkcolor" matchingName="12_Титульный слайд">
+  <p:cSld name="12_Титульный слайд">
+    <p:bg>
+      <p:bgPr>
+        <a:solidFill>
+          <a:schemeClr val="dk1"/>
+        </a:solidFill>
+      </p:bgPr>
+    </p:bg>
+    <p:spTree>
+      <p:nvGrpSpPr>
+        <p:cNvPr id="326" name="Shape 326"/>
+        <p:cNvGrpSpPr/>
+        <p:nvPr/>
+      </p:nvGrpSpPr>
+      <p:grpSpPr>
+        <a:xfrm>
+          <a:off x="0" y="0"/>
+          <a:ext cx="0" cy="0"/>
+          <a:chOff x="0" y="0"/>
+          <a:chExt cx="0" cy="0"/>
+        </a:xfrm>
+      </p:grpSpPr>
+      <p:pic>
+        <p:nvPicPr>
+          <p:cNvPr descr=" " id="327" name="Google Shape;327;p15"/>
+          <p:cNvPicPr preferRelativeResize="0"/>
+          <p:nvPr/>
+        </p:nvPicPr>
+        <p:blipFill rotWithShape="1">
+          <a:blip r:embed="rId2">
+            <a:alphaModFix/>
+          </a:blip>
+          <a:srcRect b="0" l="0" r="0" t="0"/>
+          <a:stretch/>
+        </p:blipFill>
+        <p:spPr>
+          <a:xfrm>
+            <a:off x="0" y="0"/>
+            <a:ext cx="12191979" cy="6857131"/>
+          </a:xfrm>
+          <a:prstGeom prst="rect">
+            <a:avLst/>
+          </a:prstGeom>
+          <a:noFill/>
+          <a:ln>
+            <a:noFill/>
+          </a:ln>
+        </p:spPr>
+      </p:pic>
+      <p:sp>
+        <p:nvSpPr>
+          <p:cNvPr id="328" name="Google Shape;328;p15"/>
+          <p:cNvSpPr/>
+          <p:nvPr/>
+        </p:nvSpPr>
+        <p:spPr>
+          <a:xfrm>
+            <a:off x="0" y="4499104"/>
+            <a:ext cx="6792686" cy="1661684"/>
+          </a:xfrm>
+          <a:prstGeom prst="rect">
+            <a:avLst/>
+          </a:prstGeom>
+          <a:solidFill>
+            <a:srgbClr val="000000"/>
+          </a:solidFill>
+          <a:ln>
+            <a:noFill/>
+          </a:ln>
+        </p:spPr>
+        <p:txBody>
+          <a:bodyPr anchorCtr="0" anchor="ctr" bIns="45700" lIns="91425" spcFirstLastPara="1" rIns="91425" wrap="square" tIns="45700">
+            <a:noAutofit/>
+          </a:bodyPr>
+          <a:lstStyle/>
+          <a:p>
+            <a:pPr indent="0" lvl="0" marL="0" marR="0" rtl="0" algn="ctr">
+              <a:spcBef>
+                <a:spcPts val="0"/>
+              </a:spcBef>
+              <a:spcAft>
+                <a:spcPts val="0"/>
+              </a:spcAft>
+              <a:buNone/>
+            </a:pPr>
+            <a:r>
+              <a:t/>
+            </a:r>
+            <a:endParaRPr sz="1800">
+              <a:solidFill>
+                <a:schemeClr val="lt1"/>
+              </a:solidFill>
+              <a:latin typeface="Arial"/>
+              <a:ea typeface="Arial"/>
+              <a:cs typeface="Arial"/>
+              <a:sym typeface="Arial"/>
+            </a:endParaRPr>
+          </a:p>
+        </p:txBody>
+      </p:sp>
+      <p:sp>
+        <p:nvSpPr>
+          <p:cNvPr id="329" name="Google Shape;329;p15"/>
+          <p:cNvSpPr/>
+          <p:nvPr/>
+        </p:nvSpPr>
+        <p:spPr>
+          <a:xfrm>
+            <a:off x="1" y="5501389"/>
+            <a:ext cx="4811842" cy="1356609"/>
+          </a:xfrm>
+          <a:prstGeom prst="rect">
+            <a:avLst/>
+          </a:prstGeom>
+          <a:solidFill>
+            <a:srgbClr val="000000"/>
+          </a:solidFill>
+          <a:ln>
+            <a:noFill/>
+          </a:ln>
+        </p:spPr>
+        <p:txBody>
+          <a:bodyPr anchorCtr="0" anchor="ctr" bIns="45700" lIns="91425" spcFirstLastPara="1" rIns="91425" wrap="square" tIns="45700">
+            <a:noAutofit/>
+          </a:bodyPr>
+          <a:lstStyle/>
+          <a:p>
+            <a:pPr indent="0" lvl="0" marL="0" marR="0" rtl="0" algn="ctr">
+              <a:spcBef>
+                <a:spcPts val="0"/>
+              </a:spcBef>
+              <a:spcAft>
+                <a:spcPts val="0"/>
+              </a:spcAft>
+              <a:buNone/>
+            </a:pPr>
+            <a:r>
+              <a:t/>
+            </a:r>
+            <a:endParaRPr sz="1800">
+              <a:solidFill>
+                <a:schemeClr val="lt1"/>
+              </a:solidFill>
+              <a:latin typeface="Arial"/>
+              <a:ea typeface="Arial"/>
+              <a:cs typeface="Arial"/>
+              <a:sym typeface="Arial"/>
+            </a:endParaRPr>
+          </a:p>
+        </p:txBody>
+      </p:sp>
+      <p:grpSp>
+        <p:nvGrpSpPr>
+          <p:cNvPr id="330" name="Google Shape;330;p15"/>
+          <p:cNvGrpSpPr/>
+          <p:nvPr/>
+        </p:nvGrpSpPr>
+        <p:grpSpPr>
+          <a:xfrm>
+            <a:off x="224842" y="-74145"/>
+            <a:ext cx="12188171" cy="64326"/>
+            <a:chOff x="-2" y="-2"/>
+            <a:chExt cx="12188169" cy="64324"/>
+          </a:xfrm>
+        </p:grpSpPr>
+        <p:cxnSp>
+          <p:nvCxnSpPr>
+            <p:cNvPr id="331" name="Google Shape;331;p15"/>
+            <p:cNvCxnSpPr/>
+            <p:nvPr/>
+          </p:nvCxnSpPr>
+          <p:spPr>
+            <a:xfrm flipH="1">
+              <a:off x="-2" y="-2"/>
+              <a:ext cx="7" cy="64324"/>
+            </a:xfrm>
+            <a:prstGeom prst="straightConnector1">
+              <a:avLst/>
+            </a:prstGeom>
+            <a:noFill/>
+            <a:ln cap="flat" cmpd="sng" w="9525">
+              <a:solidFill>
+                <a:srgbClr val="808080"/>
+              </a:solidFill>
+              <a:prstDash val="solid"/>
+              <a:miter lim="8000"/>
+              <a:headEnd len="sm" w="sm" type="none"/>
+              <a:tailEnd len="sm" w="sm" type="none"/>
+            </a:ln>
+          </p:spPr>
+        </p:cxnSp>
+        <p:cxnSp>
+          <p:nvCxnSpPr>
+            <p:cNvPr id="332" name="Google Shape;332;p15"/>
+            <p:cNvCxnSpPr/>
+            <p:nvPr/>
+          </p:nvCxnSpPr>
+          <p:spPr>
+            <a:xfrm>
+              <a:off x="677118" y="-2"/>
+              <a:ext cx="7" cy="64324"/>
+            </a:xfrm>
+            <a:prstGeom prst="straightConnector1">
+              <a:avLst/>
+            </a:prstGeom>
+            <a:noFill/>
+            <a:ln cap="flat" cmpd="sng" w="9525">
+              <a:solidFill>
+                <a:srgbClr val="808080"/>
+              </a:solidFill>
+              <a:prstDash val="solid"/>
+              <a:miter lim="8000"/>
+              <a:headEnd len="sm" w="sm" type="none"/>
+              <a:tailEnd len="sm" w="sm" type="none"/>
+            </a:ln>
+          </p:spPr>
+        </p:cxnSp>
+        <p:cxnSp>
+          <p:nvCxnSpPr>
+            <p:cNvPr id="333" name="Google Shape;333;p15"/>
+            <p:cNvCxnSpPr/>
+            <p:nvPr/>
+          </p:nvCxnSpPr>
+          <p:spPr>
+            <a:xfrm>
+              <a:off x="1354241" y="-2"/>
+              <a:ext cx="7" cy="64324"/>
+            </a:xfrm>
+            <a:prstGeom prst="straightConnector1">
+              <a:avLst/>
+            </a:prstGeom>
+            <a:noFill/>
+            <a:ln cap="flat" cmpd="sng" w="9525">
+              <a:solidFill>
+                <a:srgbClr val="808080"/>
+              </a:solidFill>
+              <a:prstDash val="solid"/>
+              <a:miter lim="8000"/>
+              <a:headEnd len="sm" w="sm" type="none"/>
+              <a:tailEnd len="sm" w="sm" type="none"/>
+            </a:ln>
+          </p:spPr>
+        </p:cxnSp>
+        <p:cxnSp>
+          <p:nvCxnSpPr>
+            <p:cNvPr id="334" name="Google Shape;334;p15"/>
+            <p:cNvCxnSpPr/>
+            <p:nvPr/>
+          </p:nvCxnSpPr>
+          <p:spPr>
+            <a:xfrm>
+              <a:off x="2031360" y="-2"/>
+              <a:ext cx="7" cy="64324"/>
+            </a:xfrm>
+            <a:prstGeom prst="straightConnector1">
+              <a:avLst/>
+            </a:prstGeom>
+            <a:noFill/>
+            <a:ln cap="flat" cmpd="sng" w="9525">
+              <a:solidFill>
+                <a:srgbClr val="808080"/>
+              </a:solidFill>
+              <a:prstDash val="solid"/>
+              <a:miter lim="8000"/>
+              <a:headEnd len="sm" w="sm" type="none"/>
+              <a:tailEnd len="sm" w="sm" type="none"/>
+            </a:ln>
+          </p:spPr>
+        </p:cxnSp>
+        <p:cxnSp>
+          <p:nvCxnSpPr>
+            <p:cNvPr id="335" name="Google Shape;335;p15"/>
+            <p:cNvCxnSpPr/>
+            <p:nvPr/>
+          </p:nvCxnSpPr>
+          <p:spPr>
+            <a:xfrm>
+              <a:off x="2708479" y="-2"/>
+              <a:ext cx="7" cy="64324"/>
+            </a:xfrm>
+            <a:prstGeom prst="straightConnector1">
+              <a:avLst/>
+            </a:prstGeom>
+            <a:noFill/>
+            <a:ln cap="flat" cmpd="sng" w="9525">
+              <a:solidFill>
+                <a:srgbClr val="808080"/>
+              </a:solidFill>
+              <a:prstDash val="solid"/>
+              <a:miter lim="8000"/>
+              <a:headEnd len="sm" w="sm" type="none"/>
+              <a:tailEnd len="sm" w="sm" type="none"/>
+            </a:ln>
+          </p:spPr>
+        </p:cxnSp>
+        <p:cxnSp>
+          <p:nvCxnSpPr>
+            <p:cNvPr id="336" name="Google Shape;336;p15"/>
+            <p:cNvCxnSpPr/>
+            <p:nvPr/>
+          </p:nvCxnSpPr>
+          <p:spPr>
+            <a:xfrm>
+              <a:off x="3385598" y="-2"/>
+              <a:ext cx="7" cy="64324"/>
+            </a:xfrm>
+            <a:prstGeom prst="straightConnector1">
+              <a:avLst/>
+            </a:prstGeom>
+            <a:noFill/>
+            <a:ln cap="flat" cmpd="sng" w="9525">
+              <a:solidFill>
+                <a:srgbClr val="808080"/>
+              </a:solidFill>
+              <a:prstDash val="solid"/>
+              <a:miter lim="8000"/>
+              <a:headEnd len="sm" w="sm" type="none"/>
+              <a:tailEnd len="sm" w="sm" type="none"/>
+            </a:ln>
+          </p:spPr>
+        </p:cxnSp>
+        <p:cxnSp>
+          <p:nvCxnSpPr>
+            <p:cNvPr id="337" name="Google Shape;337;p15"/>
+            <p:cNvCxnSpPr/>
+            <p:nvPr/>
+          </p:nvCxnSpPr>
+          <p:spPr>
+            <a:xfrm>
+              <a:off x="4062717" y="-2"/>
+              <a:ext cx="7" cy="64324"/>
+            </a:xfrm>
+            <a:prstGeom prst="straightConnector1">
+              <a:avLst/>
+            </a:prstGeom>
+            <a:noFill/>
+            <a:ln cap="flat" cmpd="sng" w="9525">
+              <a:solidFill>
+                <a:srgbClr val="808080"/>
+              </a:solidFill>
+              <a:prstDash val="solid"/>
+              <a:miter lim="8000"/>
+              <a:headEnd len="sm" w="sm" type="none"/>
+              <a:tailEnd len="sm" w="sm" type="none"/>
+            </a:ln>
+          </p:spPr>
+        </p:cxnSp>
+        <p:cxnSp>
+          <p:nvCxnSpPr>
+            <p:cNvPr id="338" name="Google Shape;338;p15"/>
+            <p:cNvCxnSpPr/>
+            <p:nvPr/>
+          </p:nvCxnSpPr>
+          <p:spPr>
+            <a:xfrm>
+              <a:off x="4739836" y="-2"/>
+              <a:ext cx="7" cy="64324"/>
+            </a:xfrm>
+            <a:prstGeom prst="straightConnector1">
+              <a:avLst/>
+            </a:prstGeom>
+            <a:noFill/>
+            <a:ln cap="flat" cmpd="sng" w="9525">
+              <a:solidFill>
+                <a:srgbClr val="808080"/>
+              </a:solidFill>
+              <a:prstDash val="solid"/>
+              <a:miter lim="8000"/>
+              <a:headEnd len="sm" w="sm" type="none"/>
+              <a:tailEnd len="sm" w="sm" type="none"/>
+            </a:ln>
+          </p:spPr>
+        </p:cxnSp>
+        <p:cxnSp>
+          <p:nvCxnSpPr>
+            <p:cNvPr id="339" name="Google Shape;339;p15"/>
+            <p:cNvCxnSpPr/>
+            <p:nvPr/>
+          </p:nvCxnSpPr>
+          <p:spPr>
+            <a:xfrm>
+              <a:off x="5416955" y="-2"/>
+              <a:ext cx="7" cy="64324"/>
+            </a:xfrm>
+            <a:prstGeom prst="straightConnector1">
+              <a:avLst/>
+            </a:prstGeom>
+            <a:noFill/>
+            <a:ln cap="flat" cmpd="sng" w="9525">
+              <a:solidFill>
+                <a:srgbClr val="808080"/>
+              </a:solidFill>
+              <a:prstDash val="solid"/>
+              <a:miter lim="8000"/>
+              <a:headEnd len="sm" w="sm" type="none"/>
+              <a:tailEnd len="sm" w="sm" type="none"/>
+            </a:ln>
+          </p:spPr>
+        </p:cxnSp>
+        <p:cxnSp>
+          <p:nvCxnSpPr>
+            <p:cNvPr id="340" name="Google Shape;340;p15"/>
+            <p:cNvCxnSpPr/>
+            <p:nvPr/>
+          </p:nvCxnSpPr>
+          <p:spPr>
+            <a:xfrm>
+              <a:off x="6094077" y="-2"/>
+              <a:ext cx="7" cy="64324"/>
+            </a:xfrm>
+            <a:prstGeom prst="straightConnector1">
+              <a:avLst/>
+            </a:prstGeom>
+            <a:noFill/>
+            <a:ln cap="flat" cmpd="sng" w="9525">
+              <a:solidFill>
+                <a:srgbClr val="808080"/>
+              </a:solidFill>
+              <a:prstDash val="solid"/>
+              <a:miter lim="8000"/>
+              <a:headEnd len="sm" w="sm" type="none"/>
+              <a:tailEnd len="sm" w="sm" type="none"/>
+            </a:ln>
+          </p:spPr>
+        </p:cxnSp>
+        <p:cxnSp>
+          <p:nvCxnSpPr>
+            <p:cNvPr id="341" name="Google Shape;341;p15"/>
+            <p:cNvCxnSpPr/>
+            <p:nvPr/>
+          </p:nvCxnSpPr>
+          <p:spPr>
+            <a:xfrm>
+              <a:off x="6771195" y="-2"/>
+              <a:ext cx="7" cy="64324"/>
+            </a:xfrm>
+            <a:prstGeom prst="straightConnector1">
+              <a:avLst/>
+            </a:prstGeom>
+            <a:noFill/>
+            <a:ln cap="flat" cmpd="sng" w="9525">
+              <a:solidFill>
+                <a:srgbClr val="808080"/>
+              </a:solidFill>
+              <a:prstDash val="solid"/>
+              <a:miter lim="8000"/>
+              <a:headEnd len="sm" w="sm" type="none"/>
+              <a:tailEnd len="sm" w="sm" type="none"/>
+            </a:ln>
+          </p:spPr>
+        </p:cxnSp>
+        <p:cxnSp>
+          <p:nvCxnSpPr>
+            <p:cNvPr id="342" name="Google Shape;342;p15"/>
+            <p:cNvCxnSpPr/>
+            <p:nvPr/>
+          </p:nvCxnSpPr>
+          <p:spPr>
+            <a:xfrm>
+              <a:off x="7448315" y="-2"/>
+              <a:ext cx="7" cy="64324"/>
+            </a:xfrm>
+            <a:prstGeom prst="straightConnector1">
+              <a:avLst/>
+            </a:prstGeom>
+            <a:noFill/>
+            <a:ln cap="flat" cmpd="sng" w="9525">
+              <a:solidFill>
+                <a:srgbClr val="808080"/>
+              </a:solidFill>
+              <a:prstDash val="solid"/>
+              <a:miter lim="8000"/>
+              <a:headEnd len="sm" w="sm" type="none"/>
+              <a:tailEnd len="sm" w="sm" type="none"/>
+            </a:ln>
+          </p:spPr>
+        </p:cxnSp>
+        <p:cxnSp>
+          <p:nvCxnSpPr>
+            <p:cNvPr id="343" name="Google Shape;343;p15"/>
+            <p:cNvCxnSpPr/>
+            <p:nvPr/>
+          </p:nvCxnSpPr>
+          <p:spPr>
+            <a:xfrm>
+              <a:off x="8125435" y="-2"/>
+              <a:ext cx="7" cy="64324"/>
+            </a:xfrm>
+            <a:prstGeom prst="straightConnector1">
+              <a:avLst/>
+            </a:prstGeom>
+            <a:noFill/>
+            <a:ln cap="flat" cmpd="sng" w="9525">
+              <a:solidFill>
+                <a:srgbClr val="808080"/>
+              </a:solidFill>
+              <a:prstDash val="solid"/>
+              <a:miter lim="8000"/>
+              <a:headEnd len="sm" w="sm" type="none"/>
+              <a:tailEnd len="sm" w="sm" type="none"/>
+            </a:ln>
+          </p:spPr>
+        </p:cxnSp>
+        <p:cxnSp>
+          <p:nvCxnSpPr>
+            <p:cNvPr id="344" name="Google Shape;344;p15"/>
+            <p:cNvCxnSpPr/>
+            <p:nvPr/>
+          </p:nvCxnSpPr>
+          <p:spPr>
+            <a:xfrm>
+              <a:off x="8802554" y="-2"/>
+              <a:ext cx="7" cy="64324"/>
+            </a:xfrm>
+            <a:prstGeom prst="straightConnector1">
+              <a:avLst/>
+            </a:prstGeom>
+            <a:noFill/>
+            <a:ln cap="flat" cmpd="sng" w="9525">
+              <a:solidFill>
+                <a:srgbClr val="808080"/>
+              </a:solidFill>
+              <a:prstDash val="solid"/>
+              <a:miter lim="8000"/>
+              <a:headEnd len="sm" w="sm" type="none"/>
+              <a:tailEnd len="sm" w="sm" type="none"/>
+            </a:ln>
+          </p:spPr>
+        </p:cxnSp>
+        <p:cxnSp>
+          <p:nvCxnSpPr>
+            <p:cNvPr id="345" name="Google Shape;345;p15"/>
+            <p:cNvCxnSpPr/>
+            <p:nvPr/>
+          </p:nvCxnSpPr>
+          <p:spPr>
+            <a:xfrm>
+              <a:off x="9479673" y="-2"/>
+              <a:ext cx="7" cy="64324"/>
+            </a:xfrm>
+            <a:prstGeom prst="straightConnector1">
+              <a:avLst/>
+            </a:prstGeom>
+            <a:noFill/>
+            <a:ln cap="flat" cmpd="sng" w="9525">
+              <a:solidFill>
+                <a:srgbClr val="808080"/>
+              </a:solidFill>
+              <a:prstDash val="solid"/>
+              <a:miter lim="8000"/>
+              <a:headEnd len="sm" w="sm" type="none"/>
+              <a:tailEnd len="sm" w="sm" type="none"/>
+            </a:ln>
+          </p:spPr>
+        </p:cxnSp>
+        <p:cxnSp>
+          <p:nvCxnSpPr>
+            <p:cNvPr id="346" name="Google Shape;346;p15"/>
+            <p:cNvCxnSpPr/>
+            <p:nvPr/>
+          </p:nvCxnSpPr>
+          <p:spPr>
+            <a:xfrm>
+              <a:off x="10156792" y="-2"/>
+              <a:ext cx="7" cy="64324"/>
+            </a:xfrm>
+            <a:prstGeom prst="straightConnector1">
+              <a:avLst/>
+            </a:prstGeom>
+            <a:noFill/>
+            <a:ln cap="flat" cmpd="sng" w="9525">
+              <a:solidFill>
+                <a:srgbClr val="808080"/>
+              </a:solidFill>
+              <a:prstDash val="solid"/>
+              <a:miter lim="8000"/>
+              <a:headEnd len="sm" w="sm" type="none"/>
+              <a:tailEnd len="sm" w="sm" type="none"/>
+            </a:ln>
+          </p:spPr>
+        </p:cxnSp>
+        <p:cxnSp>
+          <p:nvCxnSpPr>
+            <p:cNvPr id="347" name="Google Shape;347;p15"/>
+            <p:cNvCxnSpPr/>
+            <p:nvPr/>
+          </p:nvCxnSpPr>
+          <p:spPr>
+            <a:xfrm>
+              <a:off x="10833914" y="-2"/>
+              <a:ext cx="7" cy="64324"/>
+            </a:xfrm>
+            <a:prstGeom prst="straightConnector1">
+              <a:avLst/>
+            </a:prstGeom>
+            <a:noFill/>
+            <a:ln cap="flat" cmpd="sng" w="9525">
+              <a:solidFill>
+                <a:srgbClr val="808080"/>
+              </a:solidFill>
+              <a:prstDash val="solid"/>
+              <a:miter lim="8000"/>
+              <a:headEnd len="sm" w="sm" type="none"/>
+              <a:tailEnd len="sm" w="sm" type="none"/>
+            </a:ln>
+          </p:spPr>
+        </p:cxnSp>
+        <p:cxnSp>
+          <p:nvCxnSpPr>
+            <p:cNvPr id="348" name="Google Shape;348;p15"/>
+            <p:cNvCxnSpPr/>
+            <p:nvPr/>
+          </p:nvCxnSpPr>
+          <p:spPr>
+            <a:xfrm>
+              <a:off x="11511034" y="-2"/>
+              <a:ext cx="7" cy="64324"/>
+            </a:xfrm>
+            <a:prstGeom prst="straightConnector1">
+              <a:avLst/>
+            </a:prstGeom>
+            <a:noFill/>
+            <a:ln cap="flat" cmpd="sng" w="9525">
+              <a:solidFill>
+                <a:srgbClr val="808080"/>
+              </a:solidFill>
+              <a:prstDash val="solid"/>
+              <a:miter lim="8000"/>
+              <a:headEnd len="sm" w="sm" type="none"/>
+              <a:tailEnd len="sm" w="sm" type="none"/>
+            </a:ln>
+          </p:spPr>
+        </p:cxnSp>
+        <p:cxnSp>
+          <p:nvCxnSpPr>
+            <p:cNvPr id="349" name="Google Shape;349;p15"/>
+            <p:cNvCxnSpPr/>
+            <p:nvPr/>
+          </p:nvCxnSpPr>
+          <p:spPr>
+            <a:xfrm>
+              <a:off x="12188160" y="-2"/>
+              <a:ext cx="7" cy="64324"/>
+            </a:xfrm>
+            <a:prstGeom prst="straightConnector1">
+              <a:avLst/>
+            </a:prstGeom>
+            <a:noFill/>
+            <a:ln cap="flat" cmpd="sng" w="9525">
+              <a:solidFill>
+                <a:srgbClr val="808080"/>
+              </a:solidFill>
+              <a:prstDash val="solid"/>
+              <a:miter lim="8000"/>
+              <a:headEnd len="sm" w="sm" type="none"/>
+              <a:tailEnd len="sm" w="sm" type="none"/>
+            </a:ln>
+          </p:spPr>
+        </p:cxnSp>
+      </p:grpSp>
+      <p:sp>
+        <p:nvSpPr>
+          <p:cNvPr id="350" name="Google Shape;350;p15"/>
+          <p:cNvSpPr txBox="1"/>
+          <p:nvPr>
+            <p:ph type="title"/>
+          </p:nvPr>
+        </p:nvSpPr>
+        <p:spPr>
+          <a:xfrm>
+            <a:off x="429253" y="2291422"/>
+            <a:ext cx="7827335" cy="1876890"/>
+          </a:xfrm>
+          <a:prstGeom prst="rect">
+            <a:avLst/>
+          </a:prstGeom>
+          <a:noFill/>
+          <a:ln>
+            <a:noFill/>
+          </a:ln>
+        </p:spPr>
+        <p:txBody>
+          <a:bodyPr anchorCtr="0" anchor="ctr" bIns="0" lIns="0" spcFirstLastPara="1" rIns="0" wrap="square" tIns="0">
+            <a:noAutofit/>
+          </a:bodyPr>
+          <a:lstStyle>
+            <a:lvl1pPr lvl="0" algn="l">
+              <a:lnSpc>
+                <a:spcPct val="90000"/>
+              </a:lnSpc>
+              <a:spcBef>
+                <a:spcPts val="0"/>
+              </a:spcBef>
+              <a:spcAft>
+                <a:spcPts val="0"/>
+              </a:spcAft>
+              <a:buClr>
+                <a:schemeClr val="lt1"/>
+              </a:buClr>
+              <a:buSzPts val="5400"/>
+              <a:buFont typeface="Play"/>
+              <a:buNone/>
+              <a:defRPr b="0" i="0" sz="5400">
+                <a:solidFill>
+                  <a:schemeClr val="lt1"/>
+                </a:solidFill>
+                <a:latin typeface="Play"/>
+                <a:ea typeface="Play"/>
+                <a:cs typeface="Play"/>
+                <a:sym typeface="Play"/>
+              </a:defRPr>
+            </a:lvl1pPr>
+            <a:lvl2pPr lvl="1">
+              <a:spcBef>
+                <a:spcPts val="0"/>
+              </a:spcBef>
+              <a:spcAft>
+                <a:spcPts val="0"/>
+              </a:spcAft>
+              <a:buSzPts val="1400"/>
+              <a:buNone/>
+              <a:defRPr/>
+            </a:lvl2pPr>
+            <a:lvl3pPr lvl="2">
+              <a:spcBef>
+                <a:spcPts val="0"/>
+              </a:spcBef>
+              <a:spcAft>
+                <a:spcPts val="0"/>
+              </a:spcAft>
+              <a:buSzPts val="1400"/>
+              <a:buNone/>
+              <a:defRPr/>
+            </a:lvl3pPr>
+            <a:lvl4pPr lvl="3">
+              <a:spcBef>
+                <a:spcPts val="0"/>
+              </a:spcBef>
+              <a:spcAft>
+                <a:spcPts val="0"/>
+              </a:spcAft>
+              <a:buSzPts val="1400"/>
+              <a:buNone/>
+              <a:defRPr/>
+            </a:lvl4pPr>
+            <a:lvl5pPr lvl="4">
+              <a:spcBef>
+                <a:spcPts val="0"/>
+              </a:spcBef>
+              <a:spcAft>
+                <a:spcPts val="0"/>
+              </a:spcAft>
+              <a:buSzPts val="1400"/>
+              <a:buNone/>
+              <a:defRPr/>
+            </a:lvl5pPr>
+            <a:lvl6pPr lvl="5">
+              <a:spcBef>
+                <a:spcPts val="0"/>
+              </a:spcBef>
+              <a:spcAft>
+                <a:spcPts val="0"/>
+              </a:spcAft>
+              <a:buSzPts val="1400"/>
+              <a:buNone/>
+              <a:defRPr/>
+            </a:lvl6pPr>
+            <a:lvl7pPr lvl="6">
+              <a:spcBef>
+                <a:spcPts val="0"/>
+              </a:spcBef>
+              <a:spcAft>
+                <a:spcPts val="0"/>
+              </a:spcAft>
+              <a:buSzPts val="1400"/>
+              <a:buNone/>
+              <a:defRPr/>
+            </a:lvl7pPr>
+            <a:lvl8pPr lvl="7">
+              <a:spcBef>
+                <a:spcPts val="0"/>
+              </a:spcBef>
+              <a:spcAft>
+                <a:spcPts val="0"/>
+              </a:spcAft>
+              <a:buSzPts val="1400"/>
+              <a:buNone/>
+              <a:defRPr/>
+            </a:lvl8pPr>
+            <a:lvl9pPr lvl="8">
+              <a:spcBef>
+                <a:spcPts val="0"/>
+              </a:spcBef>
+              <a:spcAft>
+                <a:spcPts val="0"/>
+              </a:spcAft>
+              <a:buSzPts val="1400"/>
+              <a:buNone/>
+              <a:defRPr/>
+            </a:lvl9pPr>
+          </a:lstStyle>
+          <a:p/>
+        </p:txBody>
+      </p:sp>
+      <p:pic>
+        <p:nvPicPr>
+          <p:cNvPr id="351" name="Google Shape;351;p15"/>
+          <p:cNvPicPr preferRelativeResize="0"/>
+          <p:nvPr/>
+        </p:nvPicPr>
+        <p:blipFill rotWithShape="1">
+          <a:blip r:embed="rId3">
+            <a:alphaModFix/>
+          </a:blip>
+          <a:srcRect b="0" l="0" r="0" t="0"/>
+          <a:stretch/>
+        </p:blipFill>
+        <p:spPr>
+          <a:xfrm>
+            <a:off x="398723" y="5895936"/>
+            <a:ext cx="3536690" cy="557252"/>
+          </a:xfrm>
+          <a:prstGeom prst="rect">
+            <a:avLst/>
+          </a:prstGeom>
+          <a:noFill/>
+          <a:ln>
+            <a:noFill/>
+          </a:ln>
+        </p:spPr>
+      </p:pic>
+      <p:pic>
+        <p:nvPicPr>
+          <p:cNvPr descr=" " id="352" name="Google Shape;352;p15"/>
+          <p:cNvPicPr preferRelativeResize="0"/>
+          <p:nvPr/>
+        </p:nvPicPr>
+        <p:blipFill rotWithShape="1">
+          <a:blip r:embed="rId4">
+            <a:alphaModFix/>
+          </a:blip>
+          <a:srcRect b="0" l="0" r="0" t="0"/>
+          <a:stretch/>
+        </p:blipFill>
+        <p:spPr>
+          <a:xfrm>
+            <a:off x="10858522" y="6160788"/>
+            <a:ext cx="934755" cy="292400"/>
+          </a:xfrm>
+          <a:prstGeom prst="rect">
+            <a:avLst/>
+          </a:prstGeom>
+          <a:noFill/>
+          <a:ln>
+            <a:noFill/>
+          </a:ln>
+        </p:spPr>
+      </p:pic>
+    </p:spTree>
+  </p:cSld>
+  <p:clrMapOvr>
+    <a:masterClrMapping/>
+  </p:clrMapOvr>
+</p:sldLayout>
+</file>
+
+<file path=ppt/slideLayouts/slideLayout5.xml><?xml version="1.0" encoding="utf-8"?>
+<p:sldLayout xmlns:a="http://schemas.openxmlformats.org/drawingml/2006/main" xmlns:r="http://schemas.openxmlformats.org/officeDocument/2006/relationships" xmlns:mc="http://schemas.openxmlformats.org/markup-compatibility/2006" xmlns:mv="urn:schemas-microsoft-com:mac:vml" xmlns:p="http://schemas.openxmlformats.org/presentationml/2006/main" xmlns:c="http://schemas.openxmlformats.org/drawingml/2006/chart" xmlns:dgm="http://schemas.openxmlformats.org/drawingml/2006/diagram" xmlns:o="urn:schemas-microsoft-com:office:office" xmlns:v="urn:schemas-microsoft-com:vml" xmlns:pvml="urn:schemas-microsoft-com:office:powerpoint" xmlns:com="http://schemas.openxmlformats.org/drawingml/2006/compatibility" xmlns:p14="http://schemas.microsoft.com/office/powerpoint/2010/main" xmlns:p15="http://schemas.microsoft.com/office/powerpoint/2012/main" xmlns:ahyp="http://schemas.microsoft.com/office/drawing/2018/hyperlinkcolor" matchingName="15_Титульный слайд">
+  <p:cSld name="15_Титульный слайд">
+    <p:bg>
+      <p:bgPr>
+        <a:solidFill>
+          <a:schemeClr val="dk1"/>
+        </a:solidFill>
+      </p:bgPr>
+    </p:bg>
+    <p:spTree>
+      <p:nvGrpSpPr>
+        <p:cNvPr id="147" name="Shape 147"/>
+        <p:cNvGrpSpPr/>
+        <p:nvPr/>
+      </p:nvGrpSpPr>
+      <p:grpSpPr>
+        <a:xfrm>
+          <a:off x="0" y="0"/>
+          <a:ext cx="0" cy="0"/>
+          <a:chOff x="0" y="0"/>
+          <a:chExt cx="0" cy="0"/>
+        </a:xfrm>
+      </p:grpSpPr>
+      <p:pic>
+        <p:nvPicPr>
+          <p:cNvPr descr=" " id="148" name="Google Shape;148;p6"/>
+          <p:cNvPicPr preferRelativeResize="0"/>
+          <p:nvPr/>
+        </p:nvPicPr>
+        <p:blipFill rotWithShape="1">
+          <a:blip r:embed="rId2">
+            <a:alphaModFix/>
+          </a:blip>
+          <a:srcRect b="0" l="0" r="0" t="0"/>
+          <a:stretch/>
+        </p:blipFill>
+        <p:spPr>
+          <a:xfrm>
+            <a:off x="0" y="6393786"/>
+            <a:ext cx="4655279" cy="464214"/>
+          </a:xfrm>
+          <a:prstGeom prst="rect">
+            <a:avLst/>
+          </a:prstGeom>
+          <a:noFill/>
+          <a:ln>
+            <a:noFill/>
+          </a:ln>
+        </p:spPr>
+      </p:pic>
+      <p:pic>
+        <p:nvPicPr>
+          <p:cNvPr descr=" " id="149" name="Google Shape;149;p6"/>
+          <p:cNvPicPr preferRelativeResize="0"/>
+          <p:nvPr/>
+        </p:nvPicPr>
+        <p:blipFill rotWithShape="1">
+          <a:blip r:embed="rId3">
+            <a:alphaModFix/>
+          </a:blip>
+          <a:srcRect b="0" l="0" r="0" t="0"/>
+          <a:stretch/>
+        </p:blipFill>
+        <p:spPr>
+          <a:xfrm>
+            <a:off x="10431600" y="0"/>
+            <a:ext cx="1760400" cy="2431278"/>
+          </a:xfrm>
+          <a:prstGeom prst="rect">
+            <a:avLst/>
+          </a:prstGeom>
+          <a:noFill/>
+          <a:ln>
+            <a:noFill/>
+          </a:ln>
+        </p:spPr>
+      </p:pic>
+      <p:pic>
+        <p:nvPicPr>
+          <p:cNvPr descr=" " id="150" name="Google Shape;150;p6"/>
+          <p:cNvPicPr preferRelativeResize="0"/>
+          <p:nvPr/>
+        </p:nvPicPr>
+        <p:blipFill rotWithShape="1">
+          <a:blip r:embed="rId4">
+            <a:alphaModFix/>
+          </a:blip>
+          <a:srcRect b="0" l="0" r="0" t="0"/>
+          <a:stretch/>
+        </p:blipFill>
+        <p:spPr>
+          <a:xfrm>
+            <a:off x="9331498" y="6290333"/>
+            <a:ext cx="2860502" cy="567667"/>
+          </a:xfrm>
+          <a:prstGeom prst="rect">
+            <a:avLst/>
+          </a:prstGeom>
+          <a:noFill/>
+          <a:ln>
+            <a:noFill/>
+          </a:ln>
+        </p:spPr>
+      </p:pic>
+      <p:grpSp>
+        <p:nvGrpSpPr>
+          <p:cNvPr id="151" name="Google Shape;151;p6"/>
+          <p:cNvGrpSpPr/>
+          <p:nvPr/>
+        </p:nvGrpSpPr>
+        <p:grpSpPr>
+          <a:xfrm>
+            <a:off x="224842" y="-74145"/>
+            <a:ext cx="12188171" cy="64326"/>
+            <a:chOff x="-2" y="-2"/>
+            <a:chExt cx="12188169" cy="64324"/>
+          </a:xfrm>
+        </p:grpSpPr>
+        <p:cxnSp>
+          <p:nvCxnSpPr>
+            <p:cNvPr id="152" name="Google Shape;152;p6"/>
+            <p:cNvCxnSpPr/>
+            <p:nvPr/>
+          </p:nvCxnSpPr>
+          <p:spPr>
+            <a:xfrm flipH="1">
+              <a:off x="-2" y="-2"/>
+              <a:ext cx="7" cy="64324"/>
+            </a:xfrm>
+            <a:prstGeom prst="straightConnector1">
+              <a:avLst/>
+            </a:prstGeom>
+            <a:noFill/>
+            <a:ln cap="flat" cmpd="sng" w="9525">
+              <a:solidFill>
+                <a:srgbClr val="808080"/>
+              </a:solidFill>
+              <a:prstDash val="solid"/>
+              <a:miter lim="8000"/>
+              <a:headEnd len="sm" w="sm" type="none"/>
+              <a:tailEnd len="sm" w="sm" type="none"/>
+            </a:ln>
+          </p:spPr>
+        </p:cxnSp>
+        <p:cxnSp>
+          <p:nvCxnSpPr>
+            <p:cNvPr id="153" name="Google Shape;153;p6"/>
+            <p:cNvCxnSpPr/>
+            <p:nvPr/>
+          </p:nvCxnSpPr>
+          <p:spPr>
+            <a:xfrm>
+              <a:off x="677118" y="-2"/>
+              <a:ext cx="7" cy="64324"/>
+            </a:xfrm>
+            <a:prstGeom prst="straightConnector1">
+              <a:avLst/>
+            </a:prstGeom>
+            <a:noFill/>
+            <a:ln cap="flat" cmpd="sng" w="9525">
+              <a:solidFill>
+                <a:srgbClr val="808080"/>
+              </a:solidFill>
+              <a:prstDash val="solid"/>
+              <a:miter lim="8000"/>
+              <a:headEnd len="sm" w="sm" type="none"/>
+              <a:tailEnd len="sm" w="sm" type="none"/>
+            </a:ln>
+          </p:spPr>
+        </p:cxnSp>
+        <p:cxnSp>
+          <p:nvCxnSpPr>
+            <p:cNvPr id="154" name="Google Shape;154;p6"/>
+            <p:cNvCxnSpPr/>
+            <p:nvPr/>
+          </p:nvCxnSpPr>
+          <p:spPr>
+            <a:xfrm>
+              <a:off x="1354241" y="-2"/>
+              <a:ext cx="7" cy="64324"/>
+            </a:xfrm>
+            <a:prstGeom prst="straightConnector1">
+              <a:avLst/>
+            </a:prstGeom>
+            <a:noFill/>
+            <a:ln cap="flat" cmpd="sng" w="9525">
+              <a:solidFill>
+                <a:srgbClr val="808080"/>
+              </a:solidFill>
+              <a:prstDash val="solid"/>
+              <a:miter lim="8000"/>
+              <a:headEnd len="sm" w="sm" type="none"/>
+              <a:tailEnd len="sm" w="sm" type="none"/>
+            </a:ln>
+          </p:spPr>
+        </p:cxnSp>
+        <p:cxnSp>
+          <p:nvCxnSpPr>
+            <p:cNvPr id="155" name="Google Shape;155;p6"/>
+            <p:cNvCxnSpPr/>
+            <p:nvPr/>
+          </p:nvCxnSpPr>
+          <p:spPr>
+            <a:xfrm>
+              <a:off x="2031360" y="-2"/>
+              <a:ext cx="7" cy="64324"/>
+            </a:xfrm>
+            <a:prstGeom prst="straightConnector1">
+              <a:avLst/>
+            </a:prstGeom>
+            <a:noFill/>
+            <a:ln cap="flat" cmpd="sng" w="9525">
+              <a:solidFill>
+                <a:srgbClr val="808080"/>
+              </a:solidFill>
+              <a:prstDash val="solid"/>
+              <a:miter lim="8000"/>
+              <a:headEnd len="sm" w="sm" type="none"/>
+              <a:tailEnd len="sm" w="sm" type="none"/>
+            </a:ln>
+          </p:spPr>
+        </p:cxnSp>
+        <p:cxnSp>
+          <p:nvCxnSpPr>
+            <p:cNvPr id="156" name="Google Shape;156;p6"/>
+            <p:cNvCxnSpPr/>
+            <p:nvPr/>
+          </p:nvCxnSpPr>
+          <p:spPr>
+            <a:xfrm>
+              <a:off x="2708479" y="-2"/>
+              <a:ext cx="7" cy="64324"/>
+            </a:xfrm>
+            <a:prstGeom prst="straightConnector1">
+              <a:avLst/>
+            </a:prstGeom>
+            <a:noFill/>
+            <a:ln cap="flat" cmpd="sng" w="9525">
+              <a:solidFill>
+                <a:srgbClr val="808080"/>
+              </a:solidFill>
+              <a:prstDash val="solid"/>
+              <a:miter lim="8000"/>
+              <a:headEnd len="sm" w="sm" type="none"/>
+              <a:tailEnd len="sm" w="sm" type="none"/>
+            </a:ln>
+          </p:spPr>
+        </p:cxnSp>
+        <p:cxnSp>
+          <p:nvCxnSpPr>
+            <p:cNvPr id="157" name="Google Shape;157;p6"/>
+            <p:cNvCxnSpPr/>
+            <p:nvPr/>
+          </p:nvCxnSpPr>
+          <p:spPr>
+            <a:xfrm>
+              <a:off x="3385598" y="-2"/>
+              <a:ext cx="7" cy="64324"/>
+            </a:xfrm>
+            <a:prstGeom prst="straightConnector1">
+              <a:avLst/>
+            </a:prstGeom>
+            <a:noFill/>
+            <a:ln cap="flat" cmpd="sng" w="9525">
+              <a:solidFill>
+                <a:srgbClr val="808080"/>
+              </a:solidFill>
+              <a:prstDash val="solid"/>
+              <a:miter lim="8000"/>
+              <a:headEnd len="sm" w="sm" type="none"/>
+              <a:tailEnd len="sm" w="sm" type="none"/>
+            </a:ln>
+          </p:spPr>
+        </p:cxnSp>
+        <p:cxnSp>
+          <p:nvCxnSpPr>
+            <p:cNvPr id="158" name="Google Shape;158;p6"/>
+            <p:cNvCxnSpPr/>
+            <p:nvPr/>
+          </p:nvCxnSpPr>
+          <p:spPr>
+            <a:xfrm>
+              <a:off x="4062717" y="-2"/>
+              <a:ext cx="7" cy="64324"/>
+            </a:xfrm>
+            <a:prstGeom prst="straightConnector1">
+              <a:avLst/>
+            </a:prstGeom>
+            <a:noFill/>
+            <a:ln cap="flat" cmpd="sng" w="9525">
+              <a:solidFill>
+                <a:srgbClr val="808080"/>
+              </a:solidFill>
+              <a:prstDash val="solid"/>
+              <a:miter lim="8000"/>
+              <a:headEnd len="sm" w="sm" type="none"/>
+              <a:tailEnd len="sm" w="sm" type="none"/>
+            </a:ln>
+          </p:spPr>
+        </p:cxnSp>
+        <p:cxnSp>
+          <p:nvCxnSpPr>
+            <p:cNvPr id="159" name="Google Shape;159;p6"/>
+            <p:cNvCxnSpPr/>
+            <p:nvPr/>
+          </p:nvCxnSpPr>
+          <p:spPr>
+            <a:xfrm>
+              <a:off x="4739836" y="-2"/>
+              <a:ext cx="7" cy="64324"/>
+            </a:xfrm>
+            <a:prstGeom prst="straightConnector1">
+              <a:avLst/>
+            </a:prstGeom>
+            <a:noFill/>
+            <a:ln cap="flat" cmpd="sng" w="9525">
+              <a:solidFill>
+                <a:srgbClr val="808080"/>
+              </a:solidFill>
+              <a:prstDash val="solid"/>
+              <a:miter lim="8000"/>
+              <a:headEnd len="sm" w="sm" type="none"/>
+              <a:tailEnd len="sm" w="sm" type="none"/>
+            </a:ln>
+          </p:spPr>
+        </p:cxnSp>
+        <p:cxnSp>
+          <p:nvCxnSpPr>
+            <p:cNvPr id="160" name="Google Shape;160;p6"/>
+            <p:cNvCxnSpPr/>
+            <p:nvPr/>
+          </p:nvCxnSpPr>
+          <p:spPr>
+            <a:xfrm>
+              <a:off x="5416955" y="-2"/>
+              <a:ext cx="7" cy="64324"/>
+            </a:xfrm>
+            <a:prstGeom prst="straightConnector1">
+              <a:avLst/>
+            </a:prstGeom>
+            <a:noFill/>
+            <a:ln cap="flat" cmpd="sng" w="9525">
+              <a:solidFill>
+                <a:srgbClr val="808080"/>
+              </a:solidFill>
+              <a:prstDash val="solid"/>
+              <a:miter lim="8000"/>
+              <a:headEnd len="sm" w="sm" type="none"/>
+              <a:tailEnd len="sm" w="sm" type="none"/>
+            </a:ln>
+          </p:spPr>
+        </p:cxnSp>
+        <p:cxnSp>
+          <p:nvCxnSpPr>
+            <p:cNvPr id="161" name="Google Shape;161;p6"/>
+            <p:cNvCxnSpPr/>
+            <p:nvPr/>
+          </p:nvCxnSpPr>
+          <p:spPr>
+            <a:xfrm>
+              <a:off x="6094077" y="-2"/>
+              <a:ext cx="7" cy="64324"/>
+            </a:xfrm>
+            <a:prstGeom prst="straightConnector1">
+              <a:avLst/>
+            </a:prstGeom>
+            <a:noFill/>
+            <a:ln cap="flat" cmpd="sng" w="9525">
+              <a:solidFill>
+                <a:srgbClr val="808080"/>
+              </a:solidFill>
+              <a:prstDash val="solid"/>
+              <a:miter lim="8000"/>
+              <a:headEnd len="sm" w="sm" type="none"/>
+              <a:tailEnd len="sm" w="sm" type="none"/>
+            </a:ln>
+          </p:spPr>
+        </p:cxnSp>
+        <p:cxnSp>
+          <p:nvCxnSpPr>
+            <p:cNvPr id="162" name="Google Shape;162;p6"/>
+            <p:cNvCxnSpPr/>
+            <p:nvPr/>
+          </p:nvCxnSpPr>
+          <p:spPr>
+            <a:xfrm>
+              <a:off x="6771195" y="-2"/>
+              <a:ext cx="7" cy="64324"/>
+            </a:xfrm>
+            <a:prstGeom prst="straightConnector1">
+              <a:avLst/>
+            </a:prstGeom>
+            <a:noFill/>
+            <a:ln cap="flat" cmpd="sng" w="9525">
+              <a:solidFill>
+                <a:srgbClr val="808080"/>
+              </a:solidFill>
+              <a:prstDash val="solid"/>
+              <a:miter lim="8000"/>
+              <a:headEnd len="sm" w="sm" type="none"/>
+              <a:tailEnd len="sm" w="sm" type="none"/>
+            </a:ln>
+          </p:spPr>
+        </p:cxnSp>
+        <p:cxnSp>
+          <p:nvCxnSpPr>
+            <p:cNvPr id="163" name="Google Shape;163;p6"/>
+            <p:cNvCxnSpPr/>
+            <p:nvPr/>
+          </p:nvCxnSpPr>
+          <p:spPr>
+            <a:xfrm>
+              <a:off x="7448315" y="-2"/>
+              <a:ext cx="7" cy="64324"/>
+            </a:xfrm>
+            <a:prstGeom prst="straightConnector1">
+              <a:avLst/>
+            </a:prstGeom>
+            <a:noFill/>
+            <a:ln cap="flat" cmpd="sng" w="9525">
+              <a:solidFill>
+                <a:srgbClr val="808080"/>
+              </a:solidFill>
+              <a:prstDash val="solid"/>
+              <a:miter lim="8000"/>
+              <a:headEnd len="sm" w="sm" type="none"/>
+              <a:tailEnd len="sm" w="sm" type="none"/>
+            </a:ln>
+          </p:spPr>
+        </p:cxnSp>
+        <p:cxnSp>
+          <p:nvCxnSpPr>
+            <p:cNvPr id="164" name="Google Shape;164;p6"/>
+            <p:cNvCxnSpPr/>
+            <p:nvPr/>
+          </p:nvCxnSpPr>
+          <p:spPr>
+            <a:xfrm>
+              <a:off x="8125435" y="-2"/>
+              <a:ext cx="7" cy="64324"/>
+            </a:xfrm>
+            <a:prstGeom prst="straightConnector1">
+              <a:avLst/>
+            </a:prstGeom>
+            <a:noFill/>
+            <a:ln cap="flat" cmpd="sng" w="9525">
+              <a:solidFill>
+                <a:srgbClr val="808080"/>
+              </a:solidFill>
+              <a:prstDash val="solid"/>
+              <a:miter lim="8000"/>
+              <a:headEnd len="sm" w="sm" type="none"/>
+              <a:tailEnd len="sm" w="sm" type="none"/>
+            </a:ln>
+          </p:spPr>
+        </p:cxnSp>
+        <p:cxnSp>
+          <p:nvCxnSpPr>
+            <p:cNvPr id="165" name="Google Shape;165;p6"/>
+            <p:cNvCxnSpPr/>
+            <p:nvPr/>
+          </p:nvCxnSpPr>
+          <p:spPr>
+            <a:xfrm>
+              <a:off x="8802554" y="-2"/>
+              <a:ext cx="7" cy="64324"/>
+            </a:xfrm>
+            <a:prstGeom prst="straightConnector1">
+              <a:avLst/>
+            </a:prstGeom>
+            <a:noFill/>
+            <a:ln cap="flat" cmpd="sng" w="9525">
+              <a:solidFill>
+                <a:srgbClr val="808080"/>
+              </a:solidFill>
+              <a:prstDash val="solid"/>
+              <a:miter lim="8000"/>
+              <a:headEnd len="sm" w="sm" type="none"/>
+              <a:tailEnd len="sm" w="sm" type="none"/>
+            </a:ln>
+          </p:spPr>
+        </p:cxnSp>
+        <p:cxnSp>
+          <p:nvCxnSpPr>
+            <p:cNvPr id="166" name="Google Shape;166;p6"/>
+            <p:cNvCxnSpPr/>
+            <p:nvPr/>
+          </p:nvCxnSpPr>
+          <p:spPr>
+            <a:xfrm>
+              <a:off x="9479673" y="-2"/>
+              <a:ext cx="7" cy="64324"/>
+            </a:xfrm>
+            <a:prstGeom prst="straightConnector1">
+              <a:avLst/>
+            </a:prstGeom>
+            <a:noFill/>
+            <a:ln cap="flat" cmpd="sng" w="9525">
+              <a:solidFill>
+                <a:srgbClr val="808080"/>
+              </a:solidFill>
+              <a:prstDash val="solid"/>
+              <a:miter lim="8000"/>
+              <a:headEnd len="sm" w="sm" type="none"/>
+              <a:tailEnd len="sm" w="sm" type="none"/>
+            </a:ln>
+          </p:spPr>
+        </p:cxnSp>
+        <p:cxnSp>
+          <p:nvCxnSpPr>
+            <p:cNvPr id="167" name="Google Shape;167;p6"/>
+            <p:cNvCxnSpPr/>
+            <p:nvPr/>
+          </p:nvCxnSpPr>
+          <p:spPr>
+            <a:xfrm>
+              <a:off x="10156792" y="-2"/>
+              <a:ext cx="7" cy="64324"/>
+            </a:xfrm>
+            <a:prstGeom prst="straightConnector1">
+              <a:avLst/>
+            </a:prstGeom>
+            <a:noFill/>
+            <a:ln cap="flat" cmpd="sng" w="9525">
+              <a:solidFill>
+                <a:srgbClr val="808080"/>
+              </a:solidFill>
+              <a:prstDash val="solid"/>
+              <a:miter lim="8000"/>
+              <a:headEnd len="sm" w="sm" type="none"/>
+              <a:tailEnd len="sm" w="sm" type="none"/>
+            </a:ln>
+          </p:spPr>
+        </p:cxnSp>
+        <p:cxnSp>
+          <p:nvCxnSpPr>
+            <p:cNvPr id="168" name="Google Shape;168;p6"/>
+            <p:cNvCxnSpPr/>
+            <p:nvPr/>
+          </p:nvCxnSpPr>
+          <p:spPr>
+            <a:xfrm>
+              <a:off x="10833914" y="-2"/>
+              <a:ext cx="7" cy="64324"/>
+            </a:xfrm>
+            <a:prstGeom prst="straightConnector1">
+              <a:avLst/>
+            </a:prstGeom>
+            <a:noFill/>
+            <a:ln cap="flat" cmpd="sng" w="9525">
+              <a:solidFill>
+                <a:srgbClr val="808080"/>
+              </a:solidFill>
+              <a:prstDash val="solid"/>
+              <a:miter lim="8000"/>
+              <a:headEnd len="sm" w="sm" type="none"/>
+              <a:tailEnd len="sm" w="sm" type="none"/>
+            </a:ln>
+          </p:spPr>
+        </p:cxnSp>
+        <p:cxnSp>
+          <p:nvCxnSpPr>
+            <p:cNvPr id="169" name="Google Shape;169;p6"/>
+            <p:cNvCxnSpPr/>
+            <p:nvPr/>
+          </p:nvCxnSpPr>
+          <p:spPr>
+            <a:xfrm>
+              <a:off x="11511034" y="-2"/>
+              <a:ext cx="7" cy="64324"/>
+            </a:xfrm>
+            <a:prstGeom prst="straightConnector1">
+              <a:avLst/>
+            </a:prstGeom>
+            <a:noFill/>
+            <a:ln cap="flat" cmpd="sng" w="9525">
+              <a:solidFill>
+                <a:srgbClr val="808080"/>
+              </a:solidFill>
+              <a:prstDash val="solid"/>
+              <a:miter lim="8000"/>
+              <a:headEnd len="sm" w="sm" type="none"/>
+              <a:tailEnd len="sm" w="sm" type="none"/>
+            </a:ln>
+          </p:spPr>
+        </p:cxnSp>
+        <p:cxnSp>
+          <p:nvCxnSpPr>
+            <p:cNvPr id="170" name="Google Shape;170;p6"/>
+            <p:cNvCxnSpPr/>
+            <p:nvPr/>
+          </p:nvCxnSpPr>
+          <p:spPr>
+            <a:xfrm>
+              <a:off x="12188160" y="-2"/>
+              <a:ext cx="7" cy="64324"/>
+            </a:xfrm>
+            <a:prstGeom prst="straightConnector1">
+              <a:avLst/>
+            </a:prstGeom>
+            <a:noFill/>
+            <a:ln cap="flat" cmpd="sng" w="9525">
+              <a:solidFill>
+                <a:srgbClr val="808080"/>
+              </a:solidFill>
+              <a:prstDash val="solid"/>
+              <a:miter lim="8000"/>
+              <a:headEnd len="sm" w="sm" type="none"/>
+              <a:tailEnd len="sm" w="sm" type="none"/>
+            </a:ln>
+          </p:spPr>
+        </p:cxnSp>
+      </p:grpSp>
+      <p:sp>
+        <p:nvSpPr>
+          <p:cNvPr id="171" name="Google Shape;171;p6"/>
+          <p:cNvSpPr txBox="1"/>
+          <p:nvPr>
+            <p:ph type="title"/>
+          </p:nvPr>
+        </p:nvSpPr>
+        <p:spPr>
+          <a:xfrm>
+            <a:off x="429253" y="424691"/>
+            <a:ext cx="7827311" cy="1167572"/>
+          </a:xfrm>
+          <a:prstGeom prst="rect">
+            <a:avLst/>
+          </a:prstGeom>
+          <a:noFill/>
+          <a:ln>
+            <a:noFill/>
+          </a:ln>
+        </p:spPr>
+        <p:txBody>
+          <a:bodyPr anchorCtr="0" anchor="t" bIns="0" lIns="0" spcFirstLastPara="1" rIns="0" wrap="square" tIns="0">
+            <a:noAutofit/>
+          </a:bodyPr>
+          <a:lstStyle>
+            <a:lvl1pPr lvl="0" algn="l">
+              <a:lnSpc>
+                <a:spcPct val="90000"/>
+              </a:lnSpc>
+              <a:spcBef>
+                <a:spcPts val="0"/>
+              </a:spcBef>
+              <a:spcAft>
+                <a:spcPts val="0"/>
+              </a:spcAft>
+              <a:buClr>
+                <a:schemeClr val="lt1"/>
+              </a:buClr>
+              <a:buSzPts val="3600"/>
+              <a:buFont typeface="Play"/>
+              <a:buNone/>
+              <a:defRPr b="0" i="0" sz="3600">
+                <a:solidFill>
+                  <a:schemeClr val="lt1"/>
+                </a:solidFill>
+                <a:latin typeface="Play"/>
+                <a:ea typeface="Play"/>
+                <a:cs typeface="Play"/>
+                <a:sym typeface="Play"/>
+              </a:defRPr>
+            </a:lvl1pPr>
+            <a:lvl2pPr lvl="1">
+              <a:spcBef>
+                <a:spcPts val="0"/>
+              </a:spcBef>
+              <a:spcAft>
+                <a:spcPts val="0"/>
+              </a:spcAft>
+              <a:buSzPts val="1400"/>
+              <a:buNone/>
+              <a:defRPr/>
+            </a:lvl2pPr>
+            <a:lvl3pPr lvl="2">
+              <a:spcBef>
+                <a:spcPts val="0"/>
+              </a:spcBef>
+              <a:spcAft>
+                <a:spcPts val="0"/>
+              </a:spcAft>
+              <a:buSzPts val="1400"/>
+              <a:buNone/>
+              <a:defRPr/>
+            </a:lvl3pPr>
+            <a:lvl4pPr lvl="3">
+              <a:spcBef>
+                <a:spcPts val="0"/>
+              </a:spcBef>
+              <a:spcAft>
+                <a:spcPts val="0"/>
+              </a:spcAft>
+              <a:buSzPts val="1400"/>
+              <a:buNone/>
+              <a:defRPr/>
+            </a:lvl4pPr>
+            <a:lvl5pPr lvl="4">
+              <a:spcBef>
+                <a:spcPts val="0"/>
+              </a:spcBef>
+              <a:spcAft>
+                <a:spcPts val="0"/>
+              </a:spcAft>
+              <a:buSzPts val="1400"/>
+              <a:buNone/>
+              <a:defRPr/>
+            </a:lvl5pPr>
+            <a:lvl6pPr lvl="5">
+              <a:spcBef>
+                <a:spcPts val="0"/>
+              </a:spcBef>
+              <a:spcAft>
+                <a:spcPts val="0"/>
+              </a:spcAft>
+              <a:buSzPts val="1400"/>
+              <a:buNone/>
+              <a:defRPr/>
+            </a:lvl6pPr>
+            <a:lvl7pPr lvl="6">
+              <a:spcBef>
+                <a:spcPts val="0"/>
+              </a:spcBef>
+              <a:spcAft>
+                <a:spcPts val="0"/>
+              </a:spcAft>
+              <a:buSzPts val="1400"/>
+              <a:buNone/>
+              <a:defRPr/>
+            </a:lvl7pPr>
+            <a:lvl8pPr lvl="7">
+              <a:spcBef>
+                <a:spcPts val="0"/>
+              </a:spcBef>
+              <a:spcAft>
+                <a:spcPts val="0"/>
+              </a:spcAft>
+              <a:buSzPts val="1400"/>
+              <a:buNone/>
+              <a:defRPr/>
+            </a:lvl8pPr>
+            <a:lvl9pPr lvl="8">
+              <a:spcBef>
+                <a:spcPts val="0"/>
+              </a:spcBef>
+              <a:spcAft>
+                <a:spcPts val="0"/>
+              </a:spcAft>
+              <a:buSzPts val="1400"/>
+              <a:buNone/>
+              <a:defRPr/>
+            </a:lvl9pPr>
+          </a:lstStyle>
+          <a:p/>
+        </p:txBody>
+      </p:sp>
+      <p:pic>
+        <p:nvPicPr>
+          <p:cNvPr id="172" name="Google Shape;172;p6"/>
+          <p:cNvPicPr preferRelativeResize="0"/>
+          <p:nvPr/>
+        </p:nvPicPr>
+        <p:blipFill rotWithShape="1">
+          <a:blip r:embed="rId5">
+            <a:alphaModFix/>
+          </a:blip>
+          <a:srcRect b="0" l="0" r="0" t="0"/>
+          <a:stretch/>
+        </p:blipFill>
+        <p:spPr>
+          <a:xfrm>
+            <a:off x="398723" y="6160516"/>
+            <a:ext cx="1857481" cy="292671"/>
+          </a:xfrm>
+          <a:prstGeom prst="rect">
+            <a:avLst/>
+          </a:prstGeom>
+          <a:noFill/>
+          <a:ln>
+            <a:noFill/>
+          </a:ln>
+        </p:spPr>
+      </p:pic>
+      <p:pic>
+        <p:nvPicPr>
+          <p:cNvPr descr=" " id="173" name="Google Shape;173;p6"/>
+          <p:cNvPicPr preferRelativeResize="0"/>
+          <p:nvPr/>
+        </p:nvPicPr>
+        <p:blipFill rotWithShape="1">
+          <a:blip r:embed="rId6">
+            <a:alphaModFix/>
+          </a:blip>
+          <a:srcRect b="0" l="0" r="0" t="0"/>
+          <a:stretch/>
+        </p:blipFill>
+        <p:spPr>
+          <a:xfrm>
+            <a:off x="11093496" y="6238282"/>
+            <a:ext cx="690517" cy="216000"/>
+          </a:xfrm>
+          <a:prstGeom prst="rect">
+            <a:avLst/>
+          </a:prstGeom>
+          <a:noFill/>
+          <a:ln>
+            <a:noFill/>
+          </a:ln>
+        </p:spPr>
+      </p:pic>
+    </p:spTree>
+  </p:cSld>
+  <p:clrMapOvr>
+    <a:masterClrMapping/>
+  </p:clrMapOvr>
+</p:sldLayout>
+</file>
+
 <file path=ppt/slideLayouts/slideLayout6.xml><?xml version="1.0" encoding="utf-8"?>
 <p:sldLayout xmlns:a="http://schemas.openxmlformats.org/drawingml/2006/main" xmlns:r="http://schemas.openxmlformats.org/officeDocument/2006/relationships" xmlns:mc="http://schemas.openxmlformats.org/markup-compatibility/2006" xmlns:mv="urn:schemas-microsoft-com:mac:vml" xmlns:p="http://schemas.openxmlformats.org/presentationml/2006/main" xmlns:c="http://schemas.openxmlformats.org/drawingml/2006/chart" xmlns:dgm="http://schemas.openxmlformats.org/drawingml/2006/diagram" xmlns:o="urn:schemas-microsoft-com:office:office" xmlns:v="urn:schemas-microsoft-com:vml" xmlns:pvml="urn:schemas-microsoft-com:office:powerpoint" xmlns:com="http://schemas.openxmlformats.org/drawingml/2006/compatibility" xmlns:p14="http://schemas.microsoft.com/office/powerpoint/2010/main" xmlns:p15="http://schemas.microsoft.com/office/powerpoint/2012/main" xmlns:ahyp="http://schemas.microsoft.com/office/drawing/2018/hyperlinkcolor" matchingName="13_Титульный слайд">
   <p:cSld name="13_Титульный слайд">
@@ -4104,6 +6982,799 @@
           </a:p>
         </p:txBody>
       </p:sp>
+    </p:spTree>
+  </p:cSld>
+  <p:clrMapOvr>
+    <a:masterClrMapping/>
+  </p:clrMapOvr>
+</p:sldLayout>
+</file>
+
+<file path=ppt/slideLayouts/slideLayout9.xml><?xml version="1.0" encoding="utf-8"?>
+<p:sldLayout xmlns:a="http://schemas.openxmlformats.org/drawingml/2006/main" xmlns:r="http://schemas.openxmlformats.org/officeDocument/2006/relationships" xmlns:mc="http://schemas.openxmlformats.org/markup-compatibility/2006" xmlns:mv="urn:schemas-microsoft-com:mac:vml" xmlns:p="http://schemas.openxmlformats.org/presentationml/2006/main" xmlns:c="http://schemas.openxmlformats.org/drawingml/2006/chart" xmlns:dgm="http://schemas.openxmlformats.org/drawingml/2006/diagram" xmlns:o="urn:schemas-microsoft-com:office:office" xmlns:v="urn:schemas-microsoft-com:vml" xmlns:pvml="urn:schemas-microsoft-com:office:powerpoint" xmlns:com="http://schemas.openxmlformats.org/drawingml/2006/compatibility" xmlns:p14="http://schemas.microsoft.com/office/powerpoint/2010/main" xmlns:p15="http://schemas.microsoft.com/office/powerpoint/2012/main" xmlns:ahyp="http://schemas.microsoft.com/office/drawing/2018/hyperlinkcolor" matchingName="14_Титульный слайд">
+  <p:cSld name="14_Титульный слайд">
+    <p:bg>
+      <p:bgPr>
+        <a:solidFill>
+          <a:schemeClr val="dk1"/>
+        </a:solidFill>
+      </p:bgPr>
+    </p:bg>
+    <p:spTree>
+      <p:nvGrpSpPr>
+        <p:cNvPr id="234" name="Shape 234"/>
+        <p:cNvGrpSpPr/>
+        <p:nvPr/>
+      </p:nvGrpSpPr>
+      <p:grpSpPr>
+        <a:xfrm>
+          <a:off x="0" y="0"/>
+          <a:ext cx="0" cy="0"/>
+          <a:chOff x="0" y="0"/>
+          <a:chExt cx="0" cy="0"/>
+        </a:xfrm>
+      </p:grpSpPr>
+      <p:pic>
+        <p:nvPicPr>
+          <p:cNvPr descr=" " id="235" name="Google Shape;235;p10"/>
+          <p:cNvPicPr preferRelativeResize="0"/>
+          <p:nvPr/>
+        </p:nvPicPr>
+        <p:blipFill rotWithShape="1">
+          <a:blip r:embed="rId2">
+            <a:alphaModFix/>
+          </a:blip>
+          <a:srcRect b="0" l="0" r="0" t="0"/>
+          <a:stretch/>
+        </p:blipFill>
+        <p:spPr>
+          <a:xfrm>
+            <a:off x="6096000" y="5844358"/>
+            <a:ext cx="6096000" cy="1013642"/>
+          </a:xfrm>
+          <a:prstGeom prst="rect">
+            <a:avLst/>
+          </a:prstGeom>
+          <a:noFill/>
+          <a:ln>
+            <a:noFill/>
+          </a:ln>
+        </p:spPr>
+      </p:pic>
+      <p:grpSp>
+        <p:nvGrpSpPr>
+          <p:cNvPr id="236" name="Google Shape;236;p10"/>
+          <p:cNvGrpSpPr/>
+          <p:nvPr/>
+        </p:nvGrpSpPr>
+        <p:grpSpPr>
+          <a:xfrm>
+            <a:off x="224842" y="-74145"/>
+            <a:ext cx="12188171" cy="64326"/>
+            <a:chOff x="-2" y="-2"/>
+            <a:chExt cx="12188169" cy="64324"/>
+          </a:xfrm>
+        </p:grpSpPr>
+        <p:cxnSp>
+          <p:nvCxnSpPr>
+            <p:cNvPr id="237" name="Google Shape;237;p10"/>
+            <p:cNvCxnSpPr/>
+            <p:nvPr/>
+          </p:nvCxnSpPr>
+          <p:spPr>
+            <a:xfrm flipH="1">
+              <a:off x="-2" y="-2"/>
+              <a:ext cx="7" cy="64324"/>
+            </a:xfrm>
+            <a:prstGeom prst="straightConnector1">
+              <a:avLst/>
+            </a:prstGeom>
+            <a:noFill/>
+            <a:ln cap="flat" cmpd="sng" w="9525">
+              <a:solidFill>
+                <a:srgbClr val="808080"/>
+              </a:solidFill>
+              <a:prstDash val="solid"/>
+              <a:miter lim="8000"/>
+              <a:headEnd len="sm" w="sm" type="none"/>
+              <a:tailEnd len="sm" w="sm" type="none"/>
+            </a:ln>
+          </p:spPr>
+        </p:cxnSp>
+        <p:cxnSp>
+          <p:nvCxnSpPr>
+            <p:cNvPr id="238" name="Google Shape;238;p10"/>
+            <p:cNvCxnSpPr/>
+            <p:nvPr/>
+          </p:nvCxnSpPr>
+          <p:spPr>
+            <a:xfrm>
+              <a:off x="677118" y="-2"/>
+              <a:ext cx="7" cy="64324"/>
+            </a:xfrm>
+            <a:prstGeom prst="straightConnector1">
+              <a:avLst/>
+            </a:prstGeom>
+            <a:noFill/>
+            <a:ln cap="flat" cmpd="sng" w="9525">
+              <a:solidFill>
+                <a:srgbClr val="808080"/>
+              </a:solidFill>
+              <a:prstDash val="solid"/>
+              <a:miter lim="8000"/>
+              <a:headEnd len="sm" w="sm" type="none"/>
+              <a:tailEnd len="sm" w="sm" type="none"/>
+            </a:ln>
+          </p:spPr>
+        </p:cxnSp>
+        <p:cxnSp>
+          <p:nvCxnSpPr>
+            <p:cNvPr id="239" name="Google Shape;239;p10"/>
+            <p:cNvCxnSpPr/>
+            <p:nvPr/>
+          </p:nvCxnSpPr>
+          <p:spPr>
+            <a:xfrm>
+              <a:off x="1354241" y="-2"/>
+              <a:ext cx="7" cy="64324"/>
+            </a:xfrm>
+            <a:prstGeom prst="straightConnector1">
+              <a:avLst/>
+            </a:prstGeom>
+            <a:noFill/>
+            <a:ln cap="flat" cmpd="sng" w="9525">
+              <a:solidFill>
+                <a:srgbClr val="808080"/>
+              </a:solidFill>
+              <a:prstDash val="solid"/>
+              <a:miter lim="8000"/>
+              <a:headEnd len="sm" w="sm" type="none"/>
+              <a:tailEnd len="sm" w="sm" type="none"/>
+            </a:ln>
+          </p:spPr>
+        </p:cxnSp>
+        <p:cxnSp>
+          <p:nvCxnSpPr>
+            <p:cNvPr id="240" name="Google Shape;240;p10"/>
+            <p:cNvCxnSpPr/>
+            <p:nvPr/>
+          </p:nvCxnSpPr>
+          <p:spPr>
+            <a:xfrm>
+              <a:off x="2031360" y="-2"/>
+              <a:ext cx="7" cy="64324"/>
+            </a:xfrm>
+            <a:prstGeom prst="straightConnector1">
+              <a:avLst/>
+            </a:prstGeom>
+            <a:noFill/>
+            <a:ln cap="flat" cmpd="sng" w="9525">
+              <a:solidFill>
+                <a:srgbClr val="808080"/>
+              </a:solidFill>
+              <a:prstDash val="solid"/>
+              <a:miter lim="8000"/>
+              <a:headEnd len="sm" w="sm" type="none"/>
+              <a:tailEnd len="sm" w="sm" type="none"/>
+            </a:ln>
+          </p:spPr>
+        </p:cxnSp>
+        <p:cxnSp>
+          <p:nvCxnSpPr>
+            <p:cNvPr id="241" name="Google Shape;241;p10"/>
+            <p:cNvCxnSpPr/>
+            <p:nvPr/>
+          </p:nvCxnSpPr>
+          <p:spPr>
+            <a:xfrm>
+              <a:off x="2708479" y="-2"/>
+              <a:ext cx="7" cy="64324"/>
+            </a:xfrm>
+            <a:prstGeom prst="straightConnector1">
+              <a:avLst/>
+            </a:prstGeom>
+            <a:noFill/>
+            <a:ln cap="flat" cmpd="sng" w="9525">
+              <a:solidFill>
+                <a:srgbClr val="808080"/>
+              </a:solidFill>
+              <a:prstDash val="solid"/>
+              <a:miter lim="8000"/>
+              <a:headEnd len="sm" w="sm" type="none"/>
+              <a:tailEnd len="sm" w="sm" type="none"/>
+            </a:ln>
+          </p:spPr>
+        </p:cxnSp>
+        <p:cxnSp>
+          <p:nvCxnSpPr>
+            <p:cNvPr id="242" name="Google Shape;242;p10"/>
+            <p:cNvCxnSpPr/>
+            <p:nvPr/>
+          </p:nvCxnSpPr>
+          <p:spPr>
+            <a:xfrm>
+              <a:off x="3385598" y="-2"/>
+              <a:ext cx="7" cy="64324"/>
+            </a:xfrm>
+            <a:prstGeom prst="straightConnector1">
+              <a:avLst/>
+            </a:prstGeom>
+            <a:noFill/>
+            <a:ln cap="flat" cmpd="sng" w="9525">
+              <a:solidFill>
+                <a:srgbClr val="808080"/>
+              </a:solidFill>
+              <a:prstDash val="solid"/>
+              <a:miter lim="8000"/>
+              <a:headEnd len="sm" w="sm" type="none"/>
+              <a:tailEnd len="sm" w="sm" type="none"/>
+            </a:ln>
+          </p:spPr>
+        </p:cxnSp>
+        <p:cxnSp>
+          <p:nvCxnSpPr>
+            <p:cNvPr id="243" name="Google Shape;243;p10"/>
+            <p:cNvCxnSpPr/>
+            <p:nvPr/>
+          </p:nvCxnSpPr>
+          <p:spPr>
+            <a:xfrm>
+              <a:off x="4062717" y="-2"/>
+              <a:ext cx="7" cy="64324"/>
+            </a:xfrm>
+            <a:prstGeom prst="straightConnector1">
+              <a:avLst/>
+            </a:prstGeom>
+            <a:noFill/>
+            <a:ln cap="flat" cmpd="sng" w="9525">
+              <a:solidFill>
+                <a:srgbClr val="808080"/>
+              </a:solidFill>
+              <a:prstDash val="solid"/>
+              <a:miter lim="8000"/>
+              <a:headEnd len="sm" w="sm" type="none"/>
+              <a:tailEnd len="sm" w="sm" type="none"/>
+            </a:ln>
+          </p:spPr>
+        </p:cxnSp>
+        <p:cxnSp>
+          <p:nvCxnSpPr>
+            <p:cNvPr id="244" name="Google Shape;244;p10"/>
+            <p:cNvCxnSpPr/>
+            <p:nvPr/>
+          </p:nvCxnSpPr>
+          <p:spPr>
+            <a:xfrm>
+              <a:off x="4739836" y="-2"/>
+              <a:ext cx="7" cy="64324"/>
+            </a:xfrm>
+            <a:prstGeom prst="straightConnector1">
+              <a:avLst/>
+            </a:prstGeom>
+            <a:noFill/>
+            <a:ln cap="flat" cmpd="sng" w="9525">
+              <a:solidFill>
+                <a:srgbClr val="808080"/>
+              </a:solidFill>
+              <a:prstDash val="solid"/>
+              <a:miter lim="8000"/>
+              <a:headEnd len="sm" w="sm" type="none"/>
+              <a:tailEnd len="sm" w="sm" type="none"/>
+            </a:ln>
+          </p:spPr>
+        </p:cxnSp>
+        <p:cxnSp>
+          <p:nvCxnSpPr>
+            <p:cNvPr id="245" name="Google Shape;245;p10"/>
+            <p:cNvCxnSpPr/>
+            <p:nvPr/>
+          </p:nvCxnSpPr>
+          <p:spPr>
+            <a:xfrm>
+              <a:off x="5416955" y="-2"/>
+              <a:ext cx="7" cy="64324"/>
+            </a:xfrm>
+            <a:prstGeom prst="straightConnector1">
+              <a:avLst/>
+            </a:prstGeom>
+            <a:noFill/>
+            <a:ln cap="flat" cmpd="sng" w="9525">
+              <a:solidFill>
+                <a:srgbClr val="808080"/>
+              </a:solidFill>
+              <a:prstDash val="solid"/>
+              <a:miter lim="8000"/>
+              <a:headEnd len="sm" w="sm" type="none"/>
+              <a:tailEnd len="sm" w="sm" type="none"/>
+            </a:ln>
+          </p:spPr>
+        </p:cxnSp>
+        <p:cxnSp>
+          <p:nvCxnSpPr>
+            <p:cNvPr id="246" name="Google Shape;246;p10"/>
+            <p:cNvCxnSpPr/>
+            <p:nvPr/>
+          </p:nvCxnSpPr>
+          <p:spPr>
+            <a:xfrm>
+              <a:off x="6094077" y="-2"/>
+              <a:ext cx="7" cy="64324"/>
+            </a:xfrm>
+            <a:prstGeom prst="straightConnector1">
+              <a:avLst/>
+            </a:prstGeom>
+            <a:noFill/>
+            <a:ln cap="flat" cmpd="sng" w="9525">
+              <a:solidFill>
+                <a:srgbClr val="808080"/>
+              </a:solidFill>
+              <a:prstDash val="solid"/>
+              <a:miter lim="8000"/>
+              <a:headEnd len="sm" w="sm" type="none"/>
+              <a:tailEnd len="sm" w="sm" type="none"/>
+            </a:ln>
+          </p:spPr>
+        </p:cxnSp>
+        <p:cxnSp>
+          <p:nvCxnSpPr>
+            <p:cNvPr id="247" name="Google Shape;247;p10"/>
+            <p:cNvCxnSpPr/>
+            <p:nvPr/>
+          </p:nvCxnSpPr>
+          <p:spPr>
+            <a:xfrm>
+              <a:off x="6771195" y="-2"/>
+              <a:ext cx="7" cy="64324"/>
+            </a:xfrm>
+            <a:prstGeom prst="straightConnector1">
+              <a:avLst/>
+            </a:prstGeom>
+            <a:noFill/>
+            <a:ln cap="flat" cmpd="sng" w="9525">
+              <a:solidFill>
+                <a:srgbClr val="808080"/>
+              </a:solidFill>
+              <a:prstDash val="solid"/>
+              <a:miter lim="8000"/>
+              <a:headEnd len="sm" w="sm" type="none"/>
+              <a:tailEnd len="sm" w="sm" type="none"/>
+            </a:ln>
+          </p:spPr>
+        </p:cxnSp>
+        <p:cxnSp>
+          <p:nvCxnSpPr>
+            <p:cNvPr id="248" name="Google Shape;248;p10"/>
+            <p:cNvCxnSpPr/>
+            <p:nvPr/>
+          </p:nvCxnSpPr>
+          <p:spPr>
+            <a:xfrm>
+              <a:off x="7448315" y="-2"/>
+              <a:ext cx="7" cy="64324"/>
+            </a:xfrm>
+            <a:prstGeom prst="straightConnector1">
+              <a:avLst/>
+            </a:prstGeom>
+            <a:noFill/>
+            <a:ln cap="flat" cmpd="sng" w="9525">
+              <a:solidFill>
+                <a:srgbClr val="808080"/>
+              </a:solidFill>
+              <a:prstDash val="solid"/>
+              <a:miter lim="8000"/>
+              <a:headEnd len="sm" w="sm" type="none"/>
+              <a:tailEnd len="sm" w="sm" type="none"/>
+            </a:ln>
+          </p:spPr>
+        </p:cxnSp>
+        <p:cxnSp>
+          <p:nvCxnSpPr>
+            <p:cNvPr id="249" name="Google Shape;249;p10"/>
+            <p:cNvCxnSpPr/>
+            <p:nvPr/>
+          </p:nvCxnSpPr>
+          <p:spPr>
+            <a:xfrm>
+              <a:off x="8125435" y="-2"/>
+              <a:ext cx="7" cy="64324"/>
+            </a:xfrm>
+            <a:prstGeom prst="straightConnector1">
+              <a:avLst/>
+            </a:prstGeom>
+            <a:noFill/>
+            <a:ln cap="flat" cmpd="sng" w="9525">
+              <a:solidFill>
+                <a:srgbClr val="808080"/>
+              </a:solidFill>
+              <a:prstDash val="solid"/>
+              <a:miter lim="8000"/>
+              <a:headEnd len="sm" w="sm" type="none"/>
+              <a:tailEnd len="sm" w="sm" type="none"/>
+            </a:ln>
+          </p:spPr>
+        </p:cxnSp>
+        <p:cxnSp>
+          <p:nvCxnSpPr>
+            <p:cNvPr id="250" name="Google Shape;250;p10"/>
+            <p:cNvCxnSpPr/>
+            <p:nvPr/>
+          </p:nvCxnSpPr>
+          <p:spPr>
+            <a:xfrm>
+              <a:off x="8802554" y="-2"/>
+              <a:ext cx="7" cy="64324"/>
+            </a:xfrm>
+            <a:prstGeom prst="straightConnector1">
+              <a:avLst/>
+            </a:prstGeom>
+            <a:noFill/>
+            <a:ln cap="flat" cmpd="sng" w="9525">
+              <a:solidFill>
+                <a:srgbClr val="808080"/>
+              </a:solidFill>
+              <a:prstDash val="solid"/>
+              <a:miter lim="8000"/>
+              <a:headEnd len="sm" w="sm" type="none"/>
+              <a:tailEnd len="sm" w="sm" type="none"/>
+            </a:ln>
+          </p:spPr>
+        </p:cxnSp>
+        <p:cxnSp>
+          <p:nvCxnSpPr>
+            <p:cNvPr id="251" name="Google Shape;251;p10"/>
+            <p:cNvCxnSpPr/>
+            <p:nvPr/>
+          </p:nvCxnSpPr>
+          <p:spPr>
+            <a:xfrm>
+              <a:off x="9479673" y="-2"/>
+              <a:ext cx="7" cy="64324"/>
+            </a:xfrm>
+            <a:prstGeom prst="straightConnector1">
+              <a:avLst/>
+            </a:prstGeom>
+            <a:noFill/>
+            <a:ln cap="flat" cmpd="sng" w="9525">
+              <a:solidFill>
+                <a:srgbClr val="808080"/>
+              </a:solidFill>
+              <a:prstDash val="solid"/>
+              <a:miter lim="8000"/>
+              <a:headEnd len="sm" w="sm" type="none"/>
+              <a:tailEnd len="sm" w="sm" type="none"/>
+            </a:ln>
+          </p:spPr>
+        </p:cxnSp>
+        <p:cxnSp>
+          <p:nvCxnSpPr>
+            <p:cNvPr id="252" name="Google Shape;252;p10"/>
+            <p:cNvCxnSpPr/>
+            <p:nvPr/>
+          </p:nvCxnSpPr>
+          <p:spPr>
+            <a:xfrm>
+              <a:off x="10156792" y="-2"/>
+              <a:ext cx="7" cy="64324"/>
+            </a:xfrm>
+            <a:prstGeom prst="straightConnector1">
+              <a:avLst/>
+            </a:prstGeom>
+            <a:noFill/>
+            <a:ln cap="flat" cmpd="sng" w="9525">
+              <a:solidFill>
+                <a:srgbClr val="808080"/>
+              </a:solidFill>
+              <a:prstDash val="solid"/>
+              <a:miter lim="8000"/>
+              <a:headEnd len="sm" w="sm" type="none"/>
+              <a:tailEnd len="sm" w="sm" type="none"/>
+            </a:ln>
+          </p:spPr>
+        </p:cxnSp>
+        <p:cxnSp>
+          <p:nvCxnSpPr>
+            <p:cNvPr id="253" name="Google Shape;253;p10"/>
+            <p:cNvCxnSpPr/>
+            <p:nvPr/>
+          </p:nvCxnSpPr>
+          <p:spPr>
+            <a:xfrm>
+              <a:off x="10833914" y="-2"/>
+              <a:ext cx="7" cy="64324"/>
+            </a:xfrm>
+            <a:prstGeom prst="straightConnector1">
+              <a:avLst/>
+            </a:prstGeom>
+            <a:noFill/>
+            <a:ln cap="flat" cmpd="sng" w="9525">
+              <a:solidFill>
+                <a:srgbClr val="808080"/>
+              </a:solidFill>
+              <a:prstDash val="solid"/>
+              <a:miter lim="8000"/>
+              <a:headEnd len="sm" w="sm" type="none"/>
+              <a:tailEnd len="sm" w="sm" type="none"/>
+            </a:ln>
+          </p:spPr>
+        </p:cxnSp>
+        <p:cxnSp>
+          <p:nvCxnSpPr>
+            <p:cNvPr id="254" name="Google Shape;254;p10"/>
+            <p:cNvCxnSpPr/>
+            <p:nvPr/>
+          </p:nvCxnSpPr>
+          <p:spPr>
+            <a:xfrm>
+              <a:off x="11511034" y="-2"/>
+              <a:ext cx="7" cy="64324"/>
+            </a:xfrm>
+            <a:prstGeom prst="straightConnector1">
+              <a:avLst/>
+            </a:prstGeom>
+            <a:noFill/>
+            <a:ln cap="flat" cmpd="sng" w="9525">
+              <a:solidFill>
+                <a:srgbClr val="808080"/>
+              </a:solidFill>
+              <a:prstDash val="solid"/>
+              <a:miter lim="8000"/>
+              <a:headEnd len="sm" w="sm" type="none"/>
+              <a:tailEnd len="sm" w="sm" type="none"/>
+            </a:ln>
+          </p:spPr>
+        </p:cxnSp>
+        <p:cxnSp>
+          <p:nvCxnSpPr>
+            <p:cNvPr id="255" name="Google Shape;255;p10"/>
+            <p:cNvCxnSpPr/>
+            <p:nvPr/>
+          </p:nvCxnSpPr>
+          <p:spPr>
+            <a:xfrm>
+              <a:off x="12188160" y="-2"/>
+              <a:ext cx="7" cy="64324"/>
+            </a:xfrm>
+            <a:prstGeom prst="straightConnector1">
+              <a:avLst/>
+            </a:prstGeom>
+            <a:noFill/>
+            <a:ln cap="flat" cmpd="sng" w="9525">
+              <a:solidFill>
+                <a:srgbClr val="808080"/>
+              </a:solidFill>
+              <a:prstDash val="solid"/>
+              <a:miter lim="8000"/>
+              <a:headEnd len="sm" w="sm" type="none"/>
+              <a:tailEnd len="sm" w="sm" type="none"/>
+            </a:ln>
+          </p:spPr>
+        </p:cxnSp>
+      </p:grpSp>
+      <p:sp>
+        <p:nvSpPr>
+          <p:cNvPr id="256" name="Google Shape;256;p10"/>
+          <p:cNvSpPr txBox="1"/>
+          <p:nvPr>
+            <p:ph type="title"/>
+          </p:nvPr>
+        </p:nvSpPr>
+        <p:spPr>
+          <a:xfrm>
+            <a:off x="429253" y="424691"/>
+            <a:ext cx="7827311" cy="1167572"/>
+          </a:xfrm>
+          <a:prstGeom prst="rect">
+            <a:avLst/>
+          </a:prstGeom>
+          <a:noFill/>
+          <a:ln>
+            <a:noFill/>
+          </a:ln>
+        </p:spPr>
+        <p:txBody>
+          <a:bodyPr anchorCtr="0" anchor="t" bIns="0" lIns="0" spcFirstLastPara="1" rIns="0" wrap="square" tIns="0">
+            <a:noAutofit/>
+          </a:bodyPr>
+          <a:lstStyle>
+            <a:lvl1pPr lvl="0" algn="l">
+              <a:lnSpc>
+                <a:spcPct val="90000"/>
+              </a:lnSpc>
+              <a:spcBef>
+                <a:spcPts val="0"/>
+              </a:spcBef>
+              <a:spcAft>
+                <a:spcPts val="0"/>
+              </a:spcAft>
+              <a:buClr>
+                <a:schemeClr val="lt1"/>
+              </a:buClr>
+              <a:buSzPts val="3600"/>
+              <a:buFont typeface="Play"/>
+              <a:buNone/>
+              <a:defRPr b="0" i="0" sz="3600">
+                <a:solidFill>
+                  <a:schemeClr val="lt1"/>
+                </a:solidFill>
+                <a:latin typeface="Play"/>
+                <a:ea typeface="Play"/>
+                <a:cs typeface="Play"/>
+                <a:sym typeface="Play"/>
+              </a:defRPr>
+            </a:lvl1pPr>
+            <a:lvl2pPr lvl="1">
+              <a:spcBef>
+                <a:spcPts val="0"/>
+              </a:spcBef>
+              <a:spcAft>
+                <a:spcPts val="0"/>
+              </a:spcAft>
+              <a:buSzPts val="1400"/>
+              <a:buNone/>
+              <a:defRPr/>
+            </a:lvl2pPr>
+            <a:lvl3pPr lvl="2">
+              <a:spcBef>
+                <a:spcPts val="0"/>
+              </a:spcBef>
+              <a:spcAft>
+                <a:spcPts val="0"/>
+              </a:spcAft>
+              <a:buSzPts val="1400"/>
+              <a:buNone/>
+              <a:defRPr/>
+            </a:lvl3pPr>
+            <a:lvl4pPr lvl="3">
+              <a:spcBef>
+                <a:spcPts val="0"/>
+              </a:spcBef>
+              <a:spcAft>
+                <a:spcPts val="0"/>
+              </a:spcAft>
+              <a:buSzPts val="1400"/>
+              <a:buNone/>
+              <a:defRPr/>
+            </a:lvl4pPr>
+            <a:lvl5pPr lvl="4">
+              <a:spcBef>
+                <a:spcPts val="0"/>
+              </a:spcBef>
+              <a:spcAft>
+                <a:spcPts val="0"/>
+              </a:spcAft>
+              <a:buSzPts val="1400"/>
+              <a:buNone/>
+              <a:defRPr/>
+            </a:lvl5pPr>
+            <a:lvl6pPr lvl="5">
+              <a:spcBef>
+                <a:spcPts val="0"/>
+              </a:spcBef>
+              <a:spcAft>
+                <a:spcPts val="0"/>
+              </a:spcAft>
+              <a:buSzPts val="1400"/>
+              <a:buNone/>
+              <a:defRPr/>
+            </a:lvl6pPr>
+            <a:lvl7pPr lvl="6">
+              <a:spcBef>
+                <a:spcPts val="0"/>
+              </a:spcBef>
+              <a:spcAft>
+                <a:spcPts val="0"/>
+              </a:spcAft>
+              <a:buSzPts val="1400"/>
+              <a:buNone/>
+              <a:defRPr/>
+            </a:lvl7pPr>
+            <a:lvl8pPr lvl="7">
+              <a:spcBef>
+                <a:spcPts val="0"/>
+              </a:spcBef>
+              <a:spcAft>
+                <a:spcPts val="0"/>
+              </a:spcAft>
+              <a:buSzPts val="1400"/>
+              <a:buNone/>
+              <a:defRPr/>
+            </a:lvl8pPr>
+            <a:lvl9pPr lvl="8">
+              <a:spcBef>
+                <a:spcPts val="0"/>
+              </a:spcBef>
+              <a:spcAft>
+                <a:spcPts val="0"/>
+              </a:spcAft>
+              <a:buSzPts val="1400"/>
+              <a:buNone/>
+              <a:defRPr/>
+            </a:lvl9pPr>
+          </a:lstStyle>
+          <a:p/>
+        </p:txBody>
+      </p:sp>
+      <p:pic>
+        <p:nvPicPr>
+          <p:cNvPr id="257" name="Google Shape;257;p10"/>
+          <p:cNvPicPr preferRelativeResize="0"/>
+          <p:nvPr/>
+        </p:nvPicPr>
+        <p:blipFill rotWithShape="1">
+          <a:blip r:embed="rId3">
+            <a:alphaModFix/>
+          </a:blip>
+          <a:srcRect b="0" l="0" r="0" t="0"/>
+          <a:stretch/>
+        </p:blipFill>
+        <p:spPr>
+          <a:xfrm>
+            <a:off x="398723" y="6160516"/>
+            <a:ext cx="1857481" cy="292671"/>
+          </a:xfrm>
+          <a:prstGeom prst="rect">
+            <a:avLst/>
+          </a:prstGeom>
+          <a:noFill/>
+          <a:ln>
+            <a:noFill/>
+          </a:ln>
+        </p:spPr>
+      </p:pic>
+      <p:pic>
+        <p:nvPicPr>
+          <p:cNvPr descr=" " id="258" name="Google Shape;258;p10"/>
+          <p:cNvPicPr preferRelativeResize="0"/>
+          <p:nvPr/>
+        </p:nvPicPr>
+        <p:blipFill rotWithShape="1">
+          <a:blip r:embed="rId4">
+            <a:alphaModFix/>
+          </a:blip>
+          <a:srcRect b="0" l="0" r="0" t="0"/>
+          <a:stretch/>
+        </p:blipFill>
+        <p:spPr>
+          <a:xfrm>
+            <a:off x="10866292" y="0"/>
+            <a:ext cx="1325708" cy="3723972"/>
+          </a:xfrm>
+          <a:prstGeom prst="rect">
+            <a:avLst/>
+          </a:prstGeom>
+          <a:noFill/>
+          <a:ln>
+            <a:noFill/>
+          </a:ln>
+        </p:spPr>
+      </p:pic>
+      <p:pic>
+        <p:nvPicPr>
+          <p:cNvPr descr=" " id="259" name="Google Shape;259;p10"/>
+          <p:cNvPicPr preferRelativeResize="0"/>
+          <p:nvPr/>
+        </p:nvPicPr>
+        <p:blipFill rotWithShape="1">
+          <a:blip r:embed="rId5">
+            <a:alphaModFix/>
+          </a:blip>
+          <a:srcRect b="0" l="0" r="0" t="0"/>
+          <a:stretch/>
+        </p:blipFill>
+        <p:spPr>
+          <a:xfrm>
+            <a:off x="11093496" y="6238282"/>
+            <a:ext cx="690517" cy="216000"/>
+          </a:xfrm>
+          <a:prstGeom prst="rect">
+            <a:avLst/>
+          </a:prstGeom>
+          <a:noFill/>
+          <a:ln>
+            <a:noFill/>
+          </a:ln>
+        </p:spPr>
+      </p:pic>
     </p:spTree>
   </p:cSld>
   <p:clrMapOvr>
@@ -5794,8 +9465,12 @@
   </p:cSld>
   <p:clrMap accent1="accent1" accent2="accent2" accent3="accent3" accent4="accent4" accent5="accent5" accent6="accent6" bg1="lt1" bg2="dk2" tx1="dk1" tx2="lt2" folHlink="folHlink" hlink="hlink"/>
   <p:sldLayoutIdLst>
+    <p:sldLayoutId id="2147483648" r:id="rId2"/>
+    <p:sldLayoutId id="2147483652" r:id="rId6"/>
     <p:sldLayoutId id="2147483653" r:id="rId7"/>
     <p:sldLayoutId id="2147483655" r:id="rId9"/>
+    <p:sldLayoutId id="2147483656" r:id="rId10"/>
+    <p:sldLayoutId id="2147483661" r:id="rId15"/>
   </p:sldLayoutIdLst>
   <p:hf dt="0" ftr="0" hdr="0" sldNum="0"/>
   <p:txStyles>
@@ -6563,14 +10238,65 @@
       <p:grpSpPr/>
       <p:sp>
         <p:nvSpPr>
-          <p:cNvPr id="2" name="title"/>
+          <p:cNvPr id="382" name="Google Shape;382;p17"/>
+          <p:cNvSpPr/>
+          <p:nvPr/>
+        </p:nvSpPr>
+        <p:spPr>
+          <a:xfrm>
+            <a:off x="429254" y="4682210"/>
+            <a:ext cx="834282" cy="834282"/>
+          </a:xfrm>
+          <a:prstGeom prst="ellipse">
+            <a:avLst/>
+          </a:prstGeom>
+          <a:solidFill>
+            <a:srgbClr val="5A6775"/>
+          </a:solidFill>
+          <a:ln>
+            <a:noFill/>
+          </a:ln>
+        </p:spPr>
+        <p:txBody>
+          <a:bodyPr anchorCtr="0" anchor="ctr" bIns="45700" lIns="91425" spcFirstLastPara="1" rIns="91425" wrap="square" tIns="45700">
+            <a:noAutofit/>
+          </a:bodyPr>
+          <a:lstStyle/>
+          <a:p>
+            <a:pPr indent="0" lvl="0" marL="0" marR="0" rtl="0" algn="ctr">
+              <a:spcBef>
+                <a:spcPts val="0"/>
+              </a:spcBef>
+              <a:spcAft>
+                <a:spcPts val="0"/>
+              </a:spcAft>
+              <a:buNone/>
+            </a:pPr>
+            <a:r>
+              <a:t/>
+            </a:r>
+            <a:endParaRPr b="0" i="0" sz="1800" u="none" cap="none" strike="noStrike">
+              <a:solidFill>
+                <a:schemeClr val="lt1"/>
+              </a:solidFill>
+              <a:latin typeface="Arial"/>
+              <a:ea typeface="Arial"/>
+              <a:cs typeface="Arial"/>
+              <a:sym typeface="Arial"/>
+            </a:endParaRPr>
+          </a:p>
+        </p:txBody>
+      </p:sp>
+      <p:sp>
+        <p:nvSpPr>
+          <p:cNvPr id="383" name="title"/>
           <p:cNvSpPr txBox="1"/>
           <p:nvPr/>
         </p:nvSpPr>
         <p:spPr>
           <a:xfrm>
-            <a:off x="429280" y="424715"/>
-            <a:ext cx="7827264" cy="1183640"/>
+            <a:off x="429280" y="2490551"/>
+            <a:ext cx="7827385" cy="1876897"/>
           </a:xfrm>
           <a:prstGeom prst="rect">
             <a:avLst/>
@@ -6587,7 +10313,7 @@
               <a:spcAft>
                 <a:spcPts val="300"/>
               </a:spcAft>
-              <a:defRPr sz="3200">
+              <a:defRPr sz="5400" b="0">
                 <a:solidFill>
                   <a:srgbClr val="FFFFFF"/>
                 </a:solidFill>
@@ -6597,7 +10323,7 @@
               </a:defRPr>
             </a:pPr>
             <a:r>
-              <a:rPr sz="3200">
+              <a:rPr sz="5400" b="0">
                 <a:solidFill>
                   <a:srgbClr val="FFFFFF"/>
                 </a:solidFill>
@@ -6605,7 +10331,7 @@
                 <a:ea typeface="Play"/>
                 <a:cs typeface="Play"/>
               </a:rPr>
-              <a:t>Защита инициативы: сервис автоматической вёрстки презентаций</a:t>
+              <a:t>Защита инициативы</a:t>
             </a:r>
           </a:p>
         </p:txBody>
@@ -6619,6 +10345,569 @@
 </file>
 
 <file path=ppt/slides/slide31.xml><?xml version="1.0" encoding="utf-8"?>
+<p:sld xmlns:a="http://schemas.openxmlformats.org/drawingml/2006/main" xmlns:p="http://schemas.openxmlformats.org/presentationml/2006/main" xmlns:r="http://schemas.openxmlformats.org/officeDocument/2006/relationships">
+  <p:cSld>
+    <p:spTree>
+      <p:nvGrpSpPr>
+        <p:cNvPr id="1" name=""/>
+        <p:cNvGrpSpPr/>
+        <p:nvPr/>
+      </p:nvGrpSpPr>
+      <p:grpSpPr/>
+      <p:sp>
+        <p:nvSpPr>
+          <p:cNvPr id="2" name="title"/>
+          <p:cNvSpPr txBox="1"/>
+          <p:nvPr/>
+        </p:nvSpPr>
+        <p:spPr>
+          <a:xfrm>
+            <a:off x="429280" y="424715"/>
+            <a:ext cx="7827264" cy="822960"/>
+          </a:xfrm>
+          <a:prstGeom prst="rect">
+            <a:avLst/>
+          </a:prstGeom>
+          <a:noFill/>
+        </p:spPr>
+        <p:txBody>
+          <a:bodyPr wrap="square" lIns="76200" rIns="76200" tIns="50800" bIns="50800">
+            <a:spAutoFit/>
+          </a:bodyPr>
+          <a:lstStyle/>
+          <a:p>
+            <a:pPr algn="l">
+              <a:spcAft>
+                <a:spcPts val="300"/>
+              </a:spcAft>
+              <a:defRPr sz="3200">
+                <a:solidFill>
+                  <a:srgbClr val="FFFFFF"/>
+                </a:solidFill>
+                <a:latin typeface="Play"/>
+                <a:ea typeface="Play"/>
+                <a:cs typeface="Play"/>
+              </a:defRPr>
+            </a:pPr>
+            <a:r>
+              <a:rPr sz="3200">
+                <a:solidFill>
+                  <a:srgbClr val="FFFFFF"/>
+                </a:solidFill>
+                <a:latin typeface="Play"/>
+                <a:ea typeface="Play"/>
+                <a:cs typeface="Play"/>
+              </a:rPr>
+              <a:t>Контекст и возможность</a:t>
+            </a:r>
+          </a:p>
+        </p:txBody>
+      </p:sp>
+      <p:graphicFrame>
+        <p:nvGraphicFramePr>
+          <p:cNvPr id="3" name="Chart 2"/>
+          <p:cNvGraphicFramePr>
+            <a:graphicFrameLocks noGrp="1"/>
+          </p:cNvGraphicFramePr>
+          <p:nvPr/>
+        </p:nvGraphicFramePr>
+        <p:xfrm>
+          <a:off x="429280" y="1664162"/>
+          <a:ext cx="11310884" cy="2241019"/>
+        </p:xfrm>
+        <a:graphic>
+          <a:graphicData uri="http://schemas.openxmlformats.org/drawingml/2006/chart">
+            <c:chart xmlns:c="http://schemas.openxmlformats.org/drawingml/2006/chart" r:id="rId2"/>
+          </a:graphicData>
+        </a:graphic>
+      </p:graphicFrame>
+      <p:sp>
+        <p:nvSpPr>
+          <p:cNvPr id="4" name="body"/>
+          <p:cNvSpPr txBox="1"/>
+          <p:nvPr/>
+        </p:nvSpPr>
+        <p:spPr>
+          <a:xfrm>
+            <a:off x="429280" y="4076631"/>
+            <a:ext cx="11310884" cy="1341120"/>
+          </a:xfrm>
+          <a:prstGeom prst="rect">
+            <a:avLst/>
+          </a:prstGeom>
+          <a:noFill/>
+        </p:spPr>
+        <p:txBody>
+          <a:bodyPr wrap="square" lIns="76200" rIns="76200" tIns="50800" bIns="50800">
+            <a:spAutoFit/>
+          </a:bodyPr>
+          <a:lstStyle/>
+          <a:p>
+            <a:pPr algn="l">
+              <a:spcAft>
+                <a:spcPts val="300"/>
+              </a:spcAft>
+              <a:defRPr sz="1600">
+                <a:solidFill>
+                  <a:srgbClr val="FFFFFF"/>
+                </a:solidFill>
+                <a:latin typeface="Play"/>
+                <a:ea typeface="Play"/>
+                <a:cs typeface="Play"/>
+              </a:defRPr>
+            </a:pPr>
+            <a:r>
+              <a:rPr sz="1600">
+                <a:solidFill>
+                  <a:srgbClr val="FFFFFF"/>
+                </a:solidFill>
+                <a:latin typeface="Play"/>
+                <a:ea typeface="Play"/>
+                <a:cs typeface="Play"/>
+              </a:rPr>
+              <a:t>• Сборка 12-слайдной колоды занимает 186 мин</a:t>
+            </a:r>
+          </a:p>
+          <a:p>
+            <a:pPr algn="l">
+              <a:spcAft>
+                <a:spcPts val="300"/>
+              </a:spcAft>
+              <a:defRPr sz="1600">
+                <a:solidFill>
+                  <a:srgbClr val="FFFFFF"/>
+                </a:solidFill>
+                <a:latin typeface="Play"/>
+                <a:ea typeface="Play"/>
+                <a:cs typeface="Play"/>
+              </a:defRPr>
+            </a:pPr>
+            <a:r>
+              <a:rPr sz="1600">
+                <a:solidFill>
+                  <a:srgbClr val="FFFFFF"/>
+                </a:solidFill>
+                <a:latin typeface="Play"/>
+                <a:ea typeface="Play"/>
+                <a:cs typeface="Play"/>
+              </a:rPr>
+              <a:t>• Правки после ревью добавляют 74 мин</a:t>
+            </a:r>
+          </a:p>
+          <a:p>
+            <a:pPr algn="l">
+              <a:spcAft>
+                <a:spcPts val="300"/>
+              </a:spcAft>
+              <a:defRPr sz="1600">
+                <a:solidFill>
+                  <a:srgbClr val="FFFFFF"/>
+                </a:solidFill>
+                <a:latin typeface="Play"/>
+                <a:ea typeface="Play"/>
+                <a:cs typeface="Play"/>
+              </a:defRPr>
+            </a:pPr>
+            <a:r>
+              <a:rPr sz="1600">
+                <a:solidFill>
+                  <a:srgbClr val="FFFFFF"/>
+                </a:solidFill>
+                <a:latin typeface="Play"/>
+                <a:ea typeface="Play"/>
+                <a:cs typeface="Play"/>
+              </a:rPr>
+              <a:t>• Средний срок ожидания 6 дней</a:t>
+            </a:r>
+          </a:p>
+        </p:txBody>
+      </p:sp>
+    </p:spTree>
+  </p:cSld>
+  <p:clrMapOvr>
+    <a:masterClrMapping/>
+  </p:clrMapOvr>
+</p:sld>
+</file>
+
+<file path=ppt/slides/slide32.xml><?xml version="1.0" encoding="utf-8"?>
+<p:sld xmlns:a="http://schemas.openxmlformats.org/drawingml/2006/main" xmlns:p="http://schemas.openxmlformats.org/presentationml/2006/main" xmlns:r="http://schemas.openxmlformats.org/officeDocument/2006/relationships">
+  <p:cSld>
+    <p:spTree>
+      <p:nvGrpSpPr>
+        <p:cNvPr id="1" name=""/>
+        <p:cNvGrpSpPr/>
+        <p:nvPr/>
+      </p:nvGrpSpPr>
+      <p:grpSpPr/>
+      <p:sp>
+        <p:nvSpPr>
+          <p:cNvPr id="2" name="title"/>
+          <p:cNvSpPr txBox="1"/>
+          <p:nvPr/>
+        </p:nvSpPr>
+        <p:spPr>
+          <a:xfrm>
+            <a:off x="429280" y="424715"/>
+            <a:ext cx="7827264" cy="822960"/>
+          </a:xfrm>
+          <a:prstGeom prst="rect">
+            <a:avLst/>
+          </a:prstGeom>
+          <a:noFill/>
+        </p:spPr>
+        <p:txBody>
+          <a:bodyPr wrap="square" lIns="76200" rIns="76200" tIns="50800" bIns="50800">
+            <a:spAutoFit/>
+          </a:bodyPr>
+          <a:lstStyle/>
+          <a:p>
+            <a:pPr algn="l">
+              <a:spcAft>
+                <a:spcPts val="300"/>
+              </a:spcAft>
+              <a:defRPr sz="4000">
+                <a:solidFill>
+                  <a:srgbClr val="FFFFFF"/>
+                </a:solidFill>
+                <a:latin typeface="Play"/>
+                <a:ea typeface="Play"/>
+                <a:cs typeface="Play"/>
+              </a:defRPr>
+            </a:pPr>
+            <a:r>
+              <a:rPr sz="4000">
+                <a:solidFill>
+                  <a:srgbClr val="FFFFFF"/>
+                </a:solidFill>
+                <a:latin typeface="Play"/>
+                <a:ea typeface="Play"/>
+                <a:cs typeface="Play"/>
+              </a:rPr>
+              <a:t>Текущая нагрузка дизайна</a:t>
+            </a:r>
+          </a:p>
+        </p:txBody>
+      </p:sp>
+      <p:sp>
+        <p:nvSpPr>
+          <p:cNvPr id="3" name="lead"/>
+          <p:cNvSpPr txBox="1"/>
+          <p:nvPr/>
+        </p:nvSpPr>
+        <p:spPr>
+          <a:xfrm>
+            <a:off x="429280" y="1384835"/>
+            <a:ext cx="7827264" cy="2497631"/>
+          </a:xfrm>
+          <a:prstGeom prst="rect">
+            <a:avLst/>
+          </a:prstGeom>
+          <a:noFill/>
+        </p:spPr>
+        <p:txBody>
+          <a:bodyPr wrap="square" lIns="76200" rIns="76200" tIns="50800" bIns="50800">
+            <a:spAutoFit/>
+          </a:bodyPr>
+          <a:lstStyle/>
+          <a:p>
+            <a:pPr algn="l">
+              <a:spcAft>
+                <a:spcPts val="300"/>
+              </a:spcAft>
+              <a:defRPr sz="4000">
+                <a:solidFill>
+                  <a:srgbClr val="FFFFFF"/>
+                </a:solidFill>
+                <a:latin typeface="Play"/>
+                <a:ea typeface="Play"/>
+                <a:cs typeface="Play"/>
+              </a:defRPr>
+            </a:pPr>
+            <a:r>
+              <a:rPr sz="4000">
+                <a:solidFill>
+                  <a:srgbClr val="FFFFFF"/>
+                </a:solidFill>
+                <a:latin typeface="Play"/>
+                <a:ea typeface="Play"/>
+                <a:cs typeface="Play"/>
+              </a:rPr>
+              <a:t>Дизайн-отдел закрывает 11 запросов в неделю из 27</a:t>
+            </a:r>
+          </a:p>
+        </p:txBody>
+      </p:sp>
+      <p:sp>
+        <p:nvSpPr>
+          <p:cNvPr id="4" name="body"/>
+          <p:cNvSpPr txBox="1"/>
+          <p:nvPr/>
+        </p:nvSpPr>
+        <p:spPr>
+          <a:xfrm>
+            <a:off x="429280" y="4170655"/>
+            <a:ext cx="7827264" cy="2017317"/>
+          </a:xfrm>
+          <a:prstGeom prst="rect">
+            <a:avLst/>
+          </a:prstGeom>
+          <a:noFill/>
+        </p:spPr>
+        <p:txBody>
+          <a:bodyPr wrap="square" lIns="76200" rIns="76200" tIns="50800" bIns="50800">
+            <a:spAutoFit/>
+          </a:bodyPr>
+          <a:lstStyle/>
+          <a:p>
+            <a:pPr algn="l">
+              <a:spcAft>
+                <a:spcPts val="300"/>
+              </a:spcAft>
+              <a:defRPr sz="3200">
+                <a:solidFill>
+                  <a:srgbClr val="FFFFFF"/>
+                </a:solidFill>
+                <a:latin typeface="Play"/>
+                <a:ea typeface="Play"/>
+                <a:cs typeface="Play"/>
+              </a:defRPr>
+            </a:pPr>
+            <a:r>
+              <a:rPr sz="3200">
+                <a:solidFill>
+                  <a:srgbClr val="FFFFFF"/>
+                </a:solidFill>
+                <a:latin typeface="Play"/>
+                <a:ea typeface="Play"/>
+                <a:cs typeface="Play"/>
+              </a:rPr>
+              <a:t>Средний срок ожидания 6 дней</a:t>
+            </a:r>
+          </a:p>
+        </p:txBody>
+      </p:sp>
+    </p:spTree>
+  </p:cSld>
+  <p:clrMapOvr>
+    <a:masterClrMapping/>
+  </p:clrMapOvr>
+</p:sld>
+</file>
+
+<file path=ppt/slides/slide33.xml><?xml version="1.0" encoding="utf-8"?>
+<p:sld xmlns:a="http://schemas.openxmlformats.org/drawingml/2006/main" xmlns:p="http://schemas.openxmlformats.org/presentationml/2006/main" xmlns:r="http://schemas.openxmlformats.org/officeDocument/2006/relationships">
+  <p:cSld>
+    <p:spTree>
+      <p:nvGrpSpPr>
+        <p:cNvPr id="1" name=""/>
+        <p:cNvGrpSpPr/>
+        <p:nvPr/>
+      </p:nvGrpSpPr>
+      <p:grpSpPr/>
+      <p:sp>
+        <p:nvSpPr>
+          <p:cNvPr id="2" name="title"/>
+          <p:cNvSpPr txBox="1"/>
+          <p:nvPr/>
+        </p:nvSpPr>
+        <p:spPr>
+          <a:xfrm>
+            <a:off x="429280" y="424715"/>
+            <a:ext cx="7827264" cy="822960"/>
+          </a:xfrm>
+          <a:prstGeom prst="rect">
+            <a:avLst/>
+          </a:prstGeom>
+          <a:noFill/>
+        </p:spPr>
+        <p:txBody>
+          <a:bodyPr wrap="square" lIns="76200" rIns="76200" tIns="50800" bIns="50800">
+            <a:spAutoFit/>
+          </a:bodyPr>
+          <a:lstStyle/>
+          <a:p>
+            <a:pPr algn="l">
+              <a:spcAft>
+                <a:spcPts val="300"/>
+              </a:spcAft>
+              <a:defRPr sz="3200">
+                <a:solidFill>
+                  <a:srgbClr val="FFFFFF"/>
+                </a:solidFill>
+                <a:latin typeface="Play"/>
+                <a:ea typeface="Play"/>
+                <a:cs typeface="Play"/>
+              </a:defRPr>
+            </a:pPr>
+            <a:r>
+              <a:rPr sz="3200">
+                <a:solidFill>
+                  <a:srgbClr val="FFFFFF"/>
+                </a:solidFill>
+                <a:latin typeface="Play"/>
+                <a:ea typeface="Play"/>
+                <a:cs typeface="Play"/>
+              </a:rPr>
+              <a:t>Ожидаемый эффект пилота</a:t>
+            </a:r>
+          </a:p>
+        </p:txBody>
+      </p:sp>
+      <p:graphicFrame>
+        <p:nvGraphicFramePr>
+          <p:cNvPr id="3" name="Chart 2"/>
+          <p:cNvGraphicFramePr>
+            <a:graphicFrameLocks noGrp="1"/>
+          </p:cNvGraphicFramePr>
+          <p:nvPr/>
+        </p:nvGraphicFramePr>
+        <p:xfrm>
+          <a:off x="429280" y="1592290"/>
+          <a:ext cx="11310884" cy="2337343"/>
+        </p:xfrm>
+        <a:graphic>
+          <a:graphicData uri="http://schemas.openxmlformats.org/drawingml/2006/chart">
+            <c:chart xmlns:c="http://schemas.openxmlformats.org/drawingml/2006/chart" r:id="rId2"/>
+          </a:graphicData>
+        </a:graphic>
+      </p:graphicFrame>
+      <p:sp>
+        <p:nvSpPr>
+          <p:cNvPr id="4" name="body"/>
+          <p:cNvSpPr txBox="1"/>
+          <p:nvPr/>
+        </p:nvSpPr>
+        <p:spPr>
+          <a:xfrm>
+            <a:off x="429280" y="4101083"/>
+            <a:ext cx="11310884" cy="1672529"/>
+          </a:xfrm>
+          <a:prstGeom prst="rect">
+            <a:avLst/>
+          </a:prstGeom>
+          <a:noFill/>
+        </p:spPr>
+        <p:txBody>
+          <a:bodyPr wrap="square" lIns="76200" rIns="76200" tIns="50800" bIns="50800">
+            <a:spAutoFit/>
+          </a:bodyPr>
+          <a:lstStyle/>
+          <a:p>
+            <a:pPr algn="l">
+              <a:spcAft>
+                <a:spcPts val="300"/>
+              </a:spcAft>
+              <a:defRPr sz="1600">
+                <a:solidFill>
+                  <a:srgbClr val="FFFFFF"/>
+                </a:solidFill>
+                <a:latin typeface="Play"/>
+                <a:ea typeface="Play"/>
+                <a:cs typeface="Play"/>
+              </a:defRPr>
+            </a:pPr>
+            <a:r>
+              <a:rPr sz="1600">
+                <a:solidFill>
+                  <a:srgbClr val="FFFFFF"/>
+                </a:solidFill>
+                <a:latin typeface="Play"/>
+                <a:ea typeface="Play"/>
+                <a:cs typeface="Play"/>
+              </a:rPr>
+              <a:t>• Средняя сборка колоды 12 слайдов — 4 мин вместо 186</a:t>
+            </a:r>
+          </a:p>
+          <a:p>
+            <a:pPr algn="l">
+              <a:spcAft>
+                <a:spcPts val="300"/>
+              </a:spcAft>
+              <a:defRPr sz="1600">
+                <a:solidFill>
+                  <a:srgbClr val="FFFFFF"/>
+                </a:solidFill>
+                <a:latin typeface="Play"/>
+                <a:ea typeface="Play"/>
+                <a:cs typeface="Play"/>
+              </a:defRPr>
+            </a:pPr>
+            <a:r>
+              <a:rPr sz="1600">
+                <a:solidFill>
+                  <a:srgbClr val="FFFFFF"/>
+                </a:solidFill>
+                <a:latin typeface="Play"/>
+                <a:ea typeface="Play"/>
+                <a:cs typeface="Play"/>
+              </a:rPr>
+              <a:t>• Время до первой версии сократилось с 6 дней до 1</a:t>
+            </a:r>
+          </a:p>
+          <a:p>
+            <a:pPr algn="l">
+              <a:spcAft>
+                <a:spcPts val="300"/>
+              </a:spcAft>
+              <a:defRPr sz="1600">
+                <a:solidFill>
+                  <a:srgbClr val="FFFFFF"/>
+                </a:solidFill>
+                <a:latin typeface="Play"/>
+                <a:ea typeface="Play"/>
+                <a:cs typeface="Play"/>
+              </a:defRPr>
+            </a:pPr>
+            <a:r>
+              <a:rPr sz="1600">
+                <a:solidFill>
+                  <a:srgbClr val="FFFFFF"/>
+                </a:solidFill>
+                <a:latin typeface="Play"/>
+                <a:ea typeface="Play"/>
+                <a:cs typeface="Play"/>
+              </a:rPr>
+              <a:t>• Нарушений стиля 2 из 68, исправлены автоматически</a:t>
+            </a:r>
+          </a:p>
+          <a:p>
+            <a:pPr algn="l">
+              <a:spcAft>
+                <a:spcPts val="300"/>
+              </a:spcAft>
+              <a:defRPr sz="1600">
+                <a:solidFill>
+                  <a:srgbClr val="FFFFFF"/>
+                </a:solidFill>
+                <a:latin typeface="Play"/>
+                <a:ea typeface="Play"/>
+                <a:cs typeface="Play"/>
+              </a:defRPr>
+            </a:pPr>
+            <a:r>
+              <a:rPr sz="1600">
+                <a:solidFill>
+                  <a:srgbClr val="FFFFFF"/>
+                </a:solidFill>
+                <a:latin typeface="Play"/>
+                <a:ea typeface="Play"/>
+                <a:cs typeface="Play"/>
+              </a:rPr>
+              <a:t>• Дизайнеры закрыли 38 запросов вместо 11</a:t>
+            </a:r>
+          </a:p>
+        </p:txBody>
+      </p:sp>
+    </p:spTree>
+  </p:cSld>
+  <p:clrMapOvr>
+    <a:masterClrMapping/>
+  </p:clrMapOvr>
+</p:sld>
+</file>
+
+<file path=ppt/slides/slide34.xml><?xml version="1.0" encoding="utf-8"?>
 <p:sld xmlns:a="http://schemas.openxmlformats.org/drawingml/2006/main" xmlns:p="http://schemas.openxmlformats.org/presentationml/2006/main" xmlns:r="http://schemas.openxmlformats.org/officeDocument/2006/relationships">
   <p:cSld>
     <p:spTree>
@@ -6701,7 +10990,786 @@
         <p:spPr>
           <a:xfrm>
             <a:off x="300817" y="297715"/>
-            <a:ext cx="8081264" cy="5544651"/>
+            <a:ext cx="11566347" cy="5311465"/>
+          </a:xfrm>
+          <a:prstGeom prst="roundRect">
+            <a:avLst/>
+          </a:prstGeom>
+          <a:solidFill>
+            <a:srgbClr val="111111">
+              <a:alpha val="85000"/>
+            </a:srgbClr>
+          </a:solidFill>
+          <a:ln>
+            <a:noFill/>
+          </a:ln>
+          <a:effectLst/>
+        </p:spPr>
+        <p:style>
+          <a:lnRef idx="1">
+            <a:schemeClr val="accent1"/>
+          </a:lnRef>
+          <a:fillRef idx="3">
+            <a:schemeClr val="accent1"/>
+          </a:fillRef>
+          <a:effectRef idx="2">
+            <a:schemeClr val="accent1"/>
+          </a:effectRef>
+          <a:fontRef idx="minor">
+            <a:schemeClr val="lt1"/>
+          </a:fontRef>
+        </p:style>
+        <p:txBody>
+          <a:bodyPr rtlCol="0" anchor="ctr"/>
+          <a:lstStyle/>
+          <a:p>
+            <a:pPr algn="ctr"/>
+          </a:p>
+        </p:txBody>
+      </p:sp>
+      <p:sp>
+        <p:nvSpPr>
+          <p:cNvPr id="681" name="title"/>
+          <p:cNvSpPr txBox="1"/>
+          <p:nvPr/>
+        </p:nvSpPr>
+        <p:spPr>
+          <a:xfrm>
+            <a:off x="427817" y="424715"/>
+            <a:ext cx="7827264" cy="1183640"/>
+          </a:xfrm>
+          <a:prstGeom prst="rect">
+            <a:avLst/>
+          </a:prstGeom>
+          <a:noFill/>
+        </p:spPr>
+        <p:txBody>
+          <a:bodyPr wrap="square" lIns="76200" rIns="76200" tIns="50800" bIns="50800">
+            <a:spAutoFit/>
+          </a:bodyPr>
+          <a:lstStyle/>
+          <a:p>
+            <a:pPr algn="l">
+              <a:spcAft>
+                <a:spcPts val="300"/>
+              </a:spcAft>
+              <a:defRPr sz="3200">
+                <a:solidFill>
+                  <a:srgbClr val="FFFFFF"/>
+                </a:solidFill>
+                <a:latin typeface="Play"/>
+                <a:ea typeface="Play"/>
+                <a:cs typeface="Play"/>
+              </a:defRPr>
+            </a:pPr>
+            <a:r>
+              <a:rPr sz="3200">
+                <a:solidFill>
+                  <a:srgbClr val="FFFFFF"/>
+                </a:solidFill>
+                <a:latin typeface="Play"/>
+                <a:ea typeface="Play"/>
+                <a:cs typeface="Play"/>
+              </a:rPr>
+              <a:t>Что потребуется: ресурсы и сроки</a:t>
+            </a:r>
+          </a:p>
+        </p:txBody>
+      </p:sp>
+      <p:sp>
+        <p:nvSpPr>
+          <p:cNvPr id="682" name="Rectangle 681"/>
+          <p:cNvSpPr/>
+          <p:nvPr/>
+        </p:nvSpPr>
+        <p:spPr>
+          <a:xfrm>
+            <a:off x="427817" y="3023667"/>
+            <a:ext cx="11312347" cy="77387"/>
+          </a:xfrm>
+          <a:prstGeom prst="rect">
+            <a:avLst/>
+          </a:prstGeom>
+          <a:solidFill>
+            <a:srgbClr val="0077FF"/>
+          </a:solidFill>
+          <a:ln>
+            <a:noFill/>
+          </a:ln>
+        </p:spPr>
+        <p:style>
+          <a:lnRef idx="1">
+            <a:schemeClr val="accent1"/>
+          </a:lnRef>
+          <a:fillRef idx="3">
+            <a:schemeClr val="accent1"/>
+          </a:fillRef>
+          <a:effectRef idx="2">
+            <a:schemeClr val="accent1"/>
+          </a:effectRef>
+          <a:fontRef idx="minor">
+            <a:schemeClr val="lt1"/>
+          </a:fontRef>
+        </p:style>
+        <p:txBody>
+          <a:bodyPr rtlCol="0" anchor="ctr"/>
+          <a:lstStyle/>
+          <a:p>
+            <a:pPr algn="ctr"/>
+          </a:p>
+        </p:txBody>
+      </p:sp>
+      <p:sp>
+        <p:nvSpPr>
+          <p:cNvPr id="683" name="Oval 682"/>
+          <p:cNvSpPr/>
+          <p:nvPr/>
+        </p:nvSpPr>
+        <p:spPr>
+          <a:xfrm>
+            <a:off x="2029452" y="2778605"/>
+            <a:ext cx="567511" cy="567511"/>
+          </a:xfrm>
+          <a:prstGeom prst="ellipse">
+            <a:avLst/>
+          </a:prstGeom>
+          <a:solidFill>
+            <a:srgbClr val="0077FF"/>
+          </a:solidFill>
+          <a:ln>
+            <a:noFill/>
+          </a:ln>
+        </p:spPr>
+        <p:style>
+          <a:lnRef idx="1">
+            <a:schemeClr val="accent1"/>
+          </a:lnRef>
+          <a:fillRef idx="3">
+            <a:schemeClr val="accent1"/>
+          </a:fillRef>
+          <a:effectRef idx="2">
+            <a:schemeClr val="accent1"/>
+          </a:effectRef>
+          <a:fontRef idx="minor">
+            <a:schemeClr val="lt1"/>
+          </a:fontRef>
+        </p:style>
+        <p:txBody>
+          <a:bodyPr rtlCol="0" anchor="ctr"/>
+          <a:lstStyle/>
+          <a:p>
+            <a:pPr algn="ctr"/>
+          </a:p>
+        </p:txBody>
+      </p:sp>
+      <p:sp>
+        <p:nvSpPr>
+          <p:cNvPr id="684" name="TextBox 683"/>
+          <p:cNvSpPr txBox="1"/>
+          <p:nvPr/>
+        </p:nvSpPr>
+        <p:spPr>
+          <a:xfrm>
+            <a:off x="427817" y="1837052"/>
+            <a:ext cx="5656173" cy="980247"/>
+          </a:xfrm>
+          <a:prstGeom prst="rect">
+            <a:avLst/>
+          </a:prstGeom>
+          <a:noFill/>
+        </p:spPr>
+        <p:txBody>
+          <a:bodyPr wrap="square" lIns="12700" rIns="12700" tIns="12700" bIns="12700">
+            <a:spAutoFit/>
+          </a:bodyPr>
+          <a:lstStyle/>
+          <a:p>
+            <a:pPr algn="ctr">
+              <a:defRPr sz="1400" b="0">
+                <a:solidFill>
+                  <a:srgbClr val="FFFFFF"/>
+                </a:solidFill>
+                <a:latin typeface="Play"/>
+                <a:ea typeface="Play"/>
+                <a:cs typeface="Play"/>
+              </a:defRPr>
+            </a:pPr>
+            <a:r>
+              <a:rPr sz="1400" b="0">
+                <a:solidFill>
+                  <a:srgbClr val="FFFFFF"/>
+                </a:solidFill>
+                <a:latin typeface="Play"/>
+                <a:ea typeface="Play"/>
+                <a:cs typeface="Play"/>
+              </a:rPr>
+              <a:t>Третий квартал 2026 подключение 4 команд</a:t>
+            </a:r>
+          </a:p>
+        </p:txBody>
+      </p:sp>
+      <p:sp>
+        <p:nvSpPr>
+          <p:cNvPr id="685" name="Oval 684"/>
+          <p:cNvSpPr/>
+          <p:nvPr/>
+        </p:nvSpPr>
+        <p:spPr>
+          <a:xfrm>
+            <a:off x="5800234" y="2778605"/>
+            <a:ext cx="567511" cy="567511"/>
+          </a:xfrm>
+          <a:prstGeom prst="ellipse">
+            <a:avLst/>
+          </a:prstGeom>
+          <a:solidFill>
+            <a:srgbClr val="0077FF"/>
+          </a:solidFill>
+          <a:ln>
+            <a:noFill/>
+          </a:ln>
+        </p:spPr>
+        <p:style>
+          <a:lnRef idx="1">
+            <a:schemeClr val="accent1"/>
+          </a:lnRef>
+          <a:fillRef idx="3">
+            <a:schemeClr val="accent1"/>
+          </a:fillRef>
+          <a:effectRef idx="2">
+            <a:schemeClr val="accent1"/>
+          </a:effectRef>
+          <a:fontRef idx="minor">
+            <a:schemeClr val="lt1"/>
+          </a:fontRef>
+        </p:style>
+        <p:txBody>
+          <a:bodyPr rtlCol="0" anchor="ctr"/>
+          <a:lstStyle/>
+          <a:p>
+            <a:pPr algn="ctr"/>
+          </a:p>
+        </p:txBody>
+      </p:sp>
+      <p:sp>
+        <p:nvSpPr>
+          <p:cNvPr id="686" name="TextBox 685"/>
+          <p:cNvSpPr txBox="1"/>
+          <p:nvPr/>
+        </p:nvSpPr>
+        <p:spPr>
+          <a:xfrm>
+            <a:off x="3255903" y="3591178"/>
+            <a:ext cx="5656173" cy="980247"/>
+          </a:xfrm>
+          <a:prstGeom prst="rect">
+            <a:avLst/>
+          </a:prstGeom>
+          <a:noFill/>
+        </p:spPr>
+        <p:txBody>
+          <a:bodyPr wrap="square" lIns="12700" rIns="12700" tIns="12700" bIns="12700">
+            <a:spAutoFit/>
+          </a:bodyPr>
+          <a:lstStyle/>
+          <a:p>
+            <a:pPr algn="ctr">
+              <a:defRPr sz="1400" b="0">
+                <a:solidFill>
+                  <a:srgbClr val="FFFFFF"/>
+                </a:solidFill>
+                <a:latin typeface="Play"/>
+                <a:ea typeface="Play"/>
+                <a:cs typeface="Play"/>
+              </a:defRPr>
+            </a:pPr>
+            <a:r>
+              <a:rPr sz="1400" b="0">
+                <a:solidFill>
+                  <a:srgbClr val="FFFFFF"/>
+                </a:solidFill>
+                <a:latin typeface="Play"/>
+                <a:ea typeface="Play"/>
+                <a:cs typeface="Play"/>
+              </a:rPr>
+              <a:t>Четвёртый квартал 2026 доступ для всей компании</a:t>
+            </a:r>
+          </a:p>
+        </p:txBody>
+      </p:sp>
+      <p:sp>
+        <p:nvSpPr>
+          <p:cNvPr id="687" name="Oval 686"/>
+          <p:cNvSpPr/>
+          <p:nvPr/>
+        </p:nvSpPr>
+        <p:spPr>
+          <a:xfrm>
+            <a:off x="9571017" y="2778605"/>
+            <a:ext cx="567511" cy="567511"/>
+          </a:xfrm>
+          <a:prstGeom prst="ellipse">
+            <a:avLst/>
+          </a:prstGeom>
+          <a:solidFill>
+            <a:srgbClr val="0077FF"/>
+          </a:solidFill>
+          <a:ln>
+            <a:noFill/>
+          </a:ln>
+        </p:spPr>
+        <p:style>
+          <a:lnRef idx="1">
+            <a:schemeClr val="accent1"/>
+          </a:lnRef>
+          <a:fillRef idx="3">
+            <a:schemeClr val="accent1"/>
+          </a:fillRef>
+          <a:effectRef idx="2">
+            <a:schemeClr val="accent1"/>
+          </a:effectRef>
+          <a:fontRef idx="minor">
+            <a:schemeClr val="lt1"/>
+          </a:fontRef>
+        </p:style>
+        <p:txBody>
+          <a:bodyPr rtlCol="0" anchor="ctr"/>
+          <a:lstStyle/>
+          <a:p>
+            <a:pPr algn="ctr"/>
+          </a:p>
+        </p:txBody>
+      </p:sp>
+      <p:sp>
+        <p:nvSpPr>
+          <p:cNvPr id="688" name="TextBox 687"/>
+          <p:cNvSpPr txBox="1"/>
+          <p:nvPr/>
+        </p:nvSpPr>
+        <p:spPr>
+          <a:xfrm>
+            <a:off x="6083990" y="1837052"/>
+            <a:ext cx="5656173" cy="980247"/>
+          </a:xfrm>
+          <a:prstGeom prst="rect">
+            <a:avLst/>
+          </a:prstGeom>
+          <a:noFill/>
+        </p:spPr>
+        <p:txBody>
+          <a:bodyPr wrap="square" lIns="12700" rIns="12700" tIns="12700" bIns="12700">
+            <a:spAutoFit/>
+          </a:bodyPr>
+          <a:lstStyle/>
+          <a:p>
+            <a:pPr algn="ctr">
+              <a:defRPr sz="1400" b="0">
+                <a:solidFill>
+                  <a:srgbClr val="FFFFFF"/>
+                </a:solidFill>
+                <a:latin typeface="Play"/>
+                <a:ea typeface="Play"/>
+                <a:cs typeface="Play"/>
+              </a:defRPr>
+            </a:pPr>
+            <a:r>
+              <a:rPr sz="1400" b="0">
+                <a:solidFill>
+                  <a:srgbClr val="FFFFFF"/>
+                </a:solidFill>
+                <a:latin typeface="Play"/>
+                <a:ea typeface="Play"/>
+                <a:cs typeface="Play"/>
+              </a:rPr>
+              <a:t>Первый квартал 2027 генерация иллюстраций</a:t>
+            </a:r>
+          </a:p>
+        </p:txBody>
+      </p:sp>
+      <p:sp>
+        <p:nvSpPr>
+          <p:cNvPr id="689" name="body"/>
+          <p:cNvSpPr txBox="1"/>
+          <p:nvPr/>
+        </p:nvSpPr>
+        <p:spPr>
+          <a:xfrm>
+            <a:off x="427817" y="4588101"/>
+            <a:ext cx="11312347" cy="1341120"/>
+          </a:xfrm>
+          <a:prstGeom prst="rect">
+            <a:avLst/>
+          </a:prstGeom>
+          <a:noFill/>
+        </p:spPr>
+        <p:txBody>
+          <a:bodyPr wrap="square" lIns="76200" rIns="76200" tIns="50800" bIns="50800">
+            <a:spAutoFit/>
+          </a:bodyPr>
+          <a:lstStyle/>
+          <a:p>
+            <a:pPr algn="l">
+              <a:spcAft>
+                <a:spcPts val="300"/>
+              </a:spcAft>
+              <a:defRPr sz="1600">
+                <a:solidFill>
+                  <a:srgbClr val="FFFFFF"/>
+                </a:solidFill>
+                <a:latin typeface="Play"/>
+                <a:ea typeface="Play"/>
+                <a:cs typeface="Play"/>
+              </a:defRPr>
+            </a:pPr>
+            <a:r>
+              <a:rPr sz="1600">
+                <a:solidFill>
+                  <a:srgbClr val="FFFFFF"/>
+                </a:solidFill>
+                <a:latin typeface="Play"/>
+                <a:ea typeface="Play"/>
+                <a:cs typeface="Play"/>
+              </a:rPr>
+              <a:t>• Сервис работает на 2 vCPU / 2 ГБ RAM</a:t>
+            </a:r>
+          </a:p>
+          <a:p>
+            <a:pPr algn="l">
+              <a:spcAft>
+                <a:spcPts val="300"/>
+              </a:spcAft>
+              <a:defRPr sz="1600">
+                <a:solidFill>
+                  <a:srgbClr val="FFFFFF"/>
+                </a:solidFill>
+                <a:latin typeface="Play"/>
+                <a:ea typeface="Play"/>
+                <a:cs typeface="Play"/>
+              </a:defRPr>
+            </a:pPr>
+            <a:r>
+              <a:rPr sz="1600">
+                <a:solidFill>
+                  <a:srgbClr val="FFFFFF"/>
+                </a:solidFill>
+                <a:latin typeface="Play"/>
+                <a:ea typeface="Play"/>
+                <a:cs typeface="Play"/>
+              </a:rPr>
+              <a:t>• Инференс за 6 недель 1 400 руб</a:t>
+            </a:r>
+          </a:p>
+          <a:p>
+            <a:pPr algn="l">
+              <a:spcAft>
+                <a:spcPts val="300"/>
+              </a:spcAft>
+              <a:defRPr sz="1600">
+                <a:solidFill>
+                  <a:srgbClr val="FFFFFF"/>
+                </a:solidFill>
+                <a:latin typeface="Play"/>
+                <a:ea typeface="Play"/>
+                <a:cs typeface="Play"/>
+              </a:defRPr>
+            </a:pPr>
+            <a:r>
+              <a:rPr sz="1600">
+                <a:solidFill>
+                  <a:srgbClr val="FFFFFF"/>
+                </a:solidFill>
+                <a:latin typeface="Play"/>
+                <a:ea typeface="Play"/>
+                <a:cs typeface="Play"/>
+              </a:rPr>
+              <a:t>• Модель gpt-oss-20b подключается по OpenAI-совместимому протоколу</a:t>
+            </a:r>
+          </a:p>
+        </p:txBody>
+      </p:sp>
+    </p:spTree>
+  </p:cSld>
+  <p:clrMapOvr>
+    <a:masterClrMapping/>
+  </p:clrMapOvr>
+</p:sld>
+</file>
+
+<file path=ppt/slides/slide35.xml><?xml version="1.0" encoding="utf-8"?>
+<p:sld xmlns:a="http://schemas.openxmlformats.org/drawingml/2006/main" xmlns:p="http://schemas.openxmlformats.org/presentationml/2006/main" xmlns:r="http://schemas.openxmlformats.org/officeDocument/2006/relationships">
+  <p:cSld>
+    <p:spTree>
+      <p:nvGrpSpPr>
+        <p:cNvPr id="1" name=""/>
+        <p:cNvGrpSpPr/>
+        <p:nvPr/>
+      </p:nvGrpSpPr>
+      <p:grpSpPr/>
+      <p:sp>
+        <p:nvSpPr>
+          <p:cNvPr id="2" name="title"/>
+          <p:cNvSpPr txBox="1"/>
+          <p:nvPr/>
+        </p:nvSpPr>
+        <p:spPr>
+          <a:xfrm>
+            <a:off x="429280" y="424715"/>
+            <a:ext cx="7827264" cy="822960"/>
+          </a:xfrm>
+          <a:prstGeom prst="rect">
+            <a:avLst/>
+          </a:prstGeom>
+          <a:noFill/>
+        </p:spPr>
+        <p:txBody>
+          <a:bodyPr wrap="square" lIns="76200" rIns="76200" tIns="50800" bIns="50800">
+            <a:spAutoFit/>
+          </a:bodyPr>
+          <a:lstStyle/>
+          <a:p>
+            <a:pPr algn="l">
+              <a:spcAft>
+                <a:spcPts val="300"/>
+              </a:spcAft>
+              <a:defRPr sz="4000">
+                <a:solidFill>
+                  <a:srgbClr val="FFFFFF"/>
+                </a:solidFill>
+                <a:latin typeface="Play"/>
+                <a:ea typeface="Play"/>
+                <a:cs typeface="Play"/>
+              </a:defRPr>
+            </a:pPr>
+            <a:r>
+              <a:rPr sz="4000">
+                <a:solidFill>
+                  <a:srgbClr val="FFFFFF"/>
+                </a:solidFill>
+                <a:latin typeface="Play"/>
+                <a:ea typeface="Play"/>
+                <a:cs typeface="Play"/>
+              </a:rPr>
+              <a:t>Риски</a:t>
+            </a:r>
+          </a:p>
+        </p:txBody>
+      </p:sp>
+      <p:sp>
+        <p:nvSpPr>
+          <p:cNvPr id="3" name="lead"/>
+          <p:cNvSpPr txBox="1"/>
+          <p:nvPr/>
+        </p:nvSpPr>
+        <p:spPr>
+          <a:xfrm>
+            <a:off x="429280" y="2431298"/>
+            <a:ext cx="7827264" cy="1265898"/>
+          </a:xfrm>
+          <a:prstGeom prst="rect">
+            <a:avLst/>
+          </a:prstGeom>
+          <a:noFill/>
+        </p:spPr>
+        <p:txBody>
+          <a:bodyPr wrap="square" lIns="76200" rIns="76200" tIns="50800" bIns="50800">
+            <a:spAutoFit/>
+          </a:bodyPr>
+          <a:lstStyle/>
+          <a:p>
+            <a:pPr algn="l">
+              <a:spcAft>
+                <a:spcPts val="300"/>
+              </a:spcAft>
+              <a:defRPr sz="3200">
+                <a:solidFill>
+                  <a:srgbClr val="FFFFFF"/>
+                </a:solidFill>
+                <a:latin typeface="Play"/>
+                <a:ea typeface="Play"/>
+                <a:cs typeface="Play"/>
+              </a:defRPr>
+            </a:pPr>
+            <a:r>
+              <a:rPr sz="3200">
+                <a:solidFill>
+                  <a:srgbClr val="FFFFFF"/>
+                </a:solidFill>
+                <a:latin typeface="Play"/>
+                <a:ea typeface="Play"/>
+                <a:cs typeface="Play"/>
+              </a:rPr>
+              <a:t>Слабая модель может выдумать цифру, аудит проверяет каждое число</a:t>
+            </a:r>
+          </a:p>
+        </p:txBody>
+      </p:sp>
+      <p:sp>
+        <p:nvSpPr>
+          <p:cNvPr id="4" name="body"/>
+          <p:cNvSpPr txBox="1"/>
+          <p:nvPr/>
+        </p:nvSpPr>
+        <p:spPr>
+          <a:xfrm>
+            <a:off x="429280" y="3862809"/>
+            <a:ext cx="7827264" cy="1328696"/>
+          </a:xfrm>
+          <a:prstGeom prst="rect">
+            <a:avLst/>
+          </a:prstGeom>
+          <a:noFill/>
+        </p:spPr>
+        <p:txBody>
+          <a:bodyPr wrap="square" lIns="76200" rIns="76200" tIns="50800" bIns="50800">
+            <a:spAutoFit/>
+          </a:bodyPr>
+          <a:lstStyle/>
+          <a:p>
+            <a:pPr algn="l">
+              <a:spcAft>
+                <a:spcPts val="300"/>
+              </a:spcAft>
+              <a:defRPr sz="2000">
+                <a:solidFill>
+                  <a:srgbClr val="FFFFFF"/>
+                </a:solidFill>
+                <a:latin typeface="Play"/>
+                <a:ea typeface="Play"/>
+                <a:cs typeface="Play"/>
+              </a:defRPr>
+            </a:pPr>
+            <a:r>
+              <a:rPr sz="2000">
+                <a:solidFill>
+                  <a:srgbClr val="FFFFFF"/>
+                </a:solidFill>
+                <a:latin typeface="Play"/>
+                <a:ea typeface="Play"/>
+                <a:cs typeface="Play"/>
+              </a:rPr>
+              <a:t>• Незнакомый шаблон может быть плохо сделанным, сервис использует рабочую область</a:t>
+            </a:r>
+          </a:p>
+          <a:p>
+            <a:pPr algn="l">
+              <a:spcAft>
+                <a:spcPts val="300"/>
+              </a:spcAft>
+              <a:defRPr sz="2000">
+                <a:solidFill>
+                  <a:srgbClr val="FFFFFF"/>
+                </a:solidFill>
+                <a:latin typeface="Play"/>
+                <a:ea typeface="Play"/>
+                <a:cs typeface="Play"/>
+              </a:defRPr>
+            </a:pPr>
+            <a:r>
+              <a:rPr sz="2000">
+                <a:solidFill>
+                  <a:srgbClr val="FFFFFF"/>
+                </a:solidFill>
+                <a:latin typeface="Play"/>
+                <a:ea typeface="Play"/>
+                <a:cs typeface="Play"/>
+              </a:rPr>
+              <a:t>• Нагрузка выше 20 задач требует внешней очереди</a:t>
+            </a:r>
+          </a:p>
+        </p:txBody>
+      </p:sp>
+    </p:spTree>
+  </p:cSld>
+  <p:clrMapOvr>
+    <a:masterClrMapping/>
+  </p:clrMapOvr>
+</p:sld>
+</file>
+
+<file path=ppt/slides/slide36.xml><?xml version="1.0" encoding="utf-8"?>
+<p:sld xmlns:a="http://schemas.openxmlformats.org/drawingml/2006/main" xmlns:p="http://schemas.openxmlformats.org/presentationml/2006/main" xmlns:r="http://schemas.openxmlformats.org/officeDocument/2006/relationships">
+  <p:cSld>
+    <p:spTree>
+      <p:nvGrpSpPr>
+        <p:cNvPr id="1" name=""/>
+        <p:cNvGrpSpPr/>
+        <p:nvPr/>
+      </p:nvGrpSpPr>
+      <p:grpSpPr/>
+      <p:sp>
+        <p:nvSpPr>
+          <p:cNvPr id="679" name="Google Shape;679;p31"/>
+          <p:cNvSpPr/>
+          <p:nvPr/>
+        </p:nvSpPr>
+        <p:spPr>
+          <a:xfrm>
+            <a:off x="0" y="4748271"/>
+            <a:ext cx="12192000" cy="2109730"/>
+          </a:xfrm>
+          <a:prstGeom prst="rect">
+            <a:avLst/>
+          </a:prstGeom>
+          <a:gradFill>
+            <a:gsLst>
+              <a:gs pos="0">
+                <a:srgbClr val="0077FF">
+                  <a:alpha val="61961"/>
+                </a:srgbClr>
+              </a:gs>
+              <a:gs pos="99000">
+                <a:srgbClr val="00AEE8"/>
+              </a:gs>
+              <a:gs pos="100000">
+                <a:srgbClr val="00AEE8"/>
+              </a:gs>
+            </a:gsLst>
+            <a:lin ang="14400000" scaled="0"/>
+          </a:gradFill>
+          <a:ln>
+            <a:noFill/>
+          </a:ln>
+        </p:spPr>
+        <p:txBody>
+          <a:bodyPr anchorCtr="0" anchor="ctr" bIns="0" lIns="108000" spcFirstLastPara="1" rIns="91425" wrap="square" tIns="0">
+            <a:noAutofit/>
+          </a:bodyPr>
+          <a:lstStyle/>
+          <a:p>
+            <a:pPr indent="0" lvl="0" marL="0" marR="0" rtl="0" algn="l">
+              <a:spcBef>
+                <a:spcPts val="0"/>
+              </a:spcBef>
+              <a:spcAft>
+                <a:spcPts val="0"/>
+              </a:spcAft>
+              <a:buNone/>
+            </a:pPr>
+            <a:r>
+              <a:t/>
+            </a:r>
+            <a:endParaRPr sz="1100">
+              <a:solidFill>
+                <a:schemeClr val="lt1"/>
+              </a:solidFill>
+              <a:latin typeface="Play"/>
+              <a:ea typeface="Play"/>
+              <a:cs typeface="Play"/>
+              <a:sym typeface="Play"/>
+            </a:endParaRPr>
+          </a:p>
+        </p:txBody>
+      </p:sp>
+      <p:sp>
+        <p:nvSpPr>
+          <p:cNvPr id="680" name="Rounded Rectangle 679"/>
+          <p:cNvSpPr/>
+          <p:nvPr/>
+        </p:nvSpPr>
+        <p:spPr>
+          <a:xfrm>
+            <a:off x="300817" y="297715"/>
+            <a:ext cx="8081264" cy="5563696"/>
           </a:xfrm>
           <a:prstGeom prst="roundRect">
             <a:avLst/>
@@ -6782,7 +11850,7 @@
                 <a:ea typeface="Play"/>
                 <a:cs typeface="Play"/>
               </a:rPr>
-              <a:t>Контекст и возможность</a:t>
+              <a:t>План пилота</a:t>
             </a:r>
           </a:p>
         </p:txBody>
@@ -6796,7 +11864,7 @@
         <p:spPr>
           <a:xfrm>
             <a:off x="427817" y="1837052"/>
-            <a:ext cx="7827264" cy="1682064"/>
+            <a:ext cx="7827264" cy="1701110"/>
           </a:xfrm>
           <a:prstGeom prst="rect">
             <a:avLst/>
@@ -6813,7 +11881,7 @@
               <a:spcAft>
                 <a:spcPts val="300"/>
               </a:spcAft>
-              <a:defRPr sz="4000">
+              <a:defRPr sz="3200">
                 <a:solidFill>
                   <a:srgbClr val="FFFFFF"/>
                 </a:solidFill>
@@ -6823,7 +11891,7 @@
               </a:defRPr>
             </a:pPr>
             <a:r>
-              <a:rPr sz="4000">
+              <a:rPr sz="3200">
                 <a:solidFill>
                   <a:srgbClr val="FFFFFF"/>
                 </a:solidFill>
@@ -6831,7 +11899,7 @@
                 <a:ea typeface="Play"/>
                 <a:cs typeface="Play"/>
               </a:rPr>
-              <a:t>42 колоды, 12 слайдов, 186 минут сборки</a:t>
+              <a:t>Третий квартал 2026 подключение 4 команд, домен и HTTPS</a:t>
             </a:r>
           </a:p>
         </p:txBody>
@@ -6844,8 +11912,8 @@
         </p:nvSpPr>
         <p:spPr>
           <a:xfrm>
-            <a:off x="427817" y="3764647"/>
-            <a:ext cx="7827264" cy="2164573"/>
+            <a:off x="427817" y="3783692"/>
+            <a:ext cx="7827264" cy="2145528"/>
           </a:xfrm>
           <a:prstGeom prst="rect">
             <a:avLst/>
@@ -6880,7 +11948,7 @@
                 <a:ea typeface="Play"/>
                 <a:cs typeface="Play"/>
               </a:rPr>
-              <a:t>• 74 минуты правки, 19 нарушений фирменного стиля</a:t>
+              <a:t>• Четвёртый квартал 2026 доступ для всей компании, интеграция с хранилищем</a:t>
             </a:r>
           </a:p>
           <a:p>
@@ -6906,7 +11974,7 @@
                 <a:ea typeface="Play"/>
                 <a:cs typeface="Play"/>
               </a:rPr>
-              <a:t>• 4 дизайнера, 11 запросов/неделя, 6 дней ожидания</a:t>
+              <a:t>• Первый квартал 2027 генерация иллюстраций под стиль шаблона</a:t>
             </a:r>
           </a:p>
         </p:txBody>
@@ -6919,7 +11987,7 @@
 </p:sld>
 </file>
 
-<file path=ppt/slides/slide32.xml><?xml version="1.0" encoding="utf-8"?>
+<file path=ppt/slides/slide37.xml><?xml version="1.0" encoding="utf-8"?>
 <p:sld xmlns:a="http://schemas.openxmlformats.org/drawingml/2006/main" xmlns:p="http://schemas.openxmlformats.org/presentationml/2006/main" xmlns:r="http://schemas.openxmlformats.org/officeDocument/2006/relationships">
   <p:cSld>
     <p:spTree>
@@ -6973,7 +12041,7 @@
                 <a:ea typeface="Play"/>
                 <a:cs typeface="Play"/>
               </a:rPr>
-              <a:t>Предложение</a:t>
+              <a:t>Пилотные результаты</a:t>
             </a:r>
           </a:p>
         </p:txBody>
@@ -6986,57 +12054,8 @@
         </p:nvSpPr>
         <p:spPr>
           <a:xfrm>
-            <a:off x="429280" y="1592290"/>
-            <a:ext cx="7827264" cy="1768826"/>
-          </a:xfrm>
-          <a:prstGeom prst="rect">
-            <a:avLst/>
-          </a:prstGeom>
-          <a:noFill/>
-        </p:spPr>
-        <p:txBody>
-          <a:bodyPr wrap="square" lIns="76200" rIns="76200" tIns="50800" bIns="50800">
-            <a:spAutoFit/>
-          </a:bodyPr>
-          <a:lstStyle/>
-          <a:p>
-            <a:pPr algn="ctr">
-              <a:spcAft>
-                <a:spcPts val="300"/>
-              </a:spcAft>
-              <a:defRPr sz="4000">
-                <a:solidFill>
-                  <a:srgbClr val="FFFFFF"/>
-                </a:solidFill>
-                <a:latin typeface="Play"/>
-                <a:ea typeface="Play"/>
-                <a:cs typeface="Play"/>
-              </a:defRPr>
-            </a:pPr>
-            <a:r>
-              <a:rPr sz="4000">
-                <a:solidFill>
-                  <a:srgbClr val="FFFFFF"/>
-                </a:solidFill>
-                <a:latin typeface="Play"/>
-                <a:ea typeface="Play"/>
-                <a:cs typeface="Play"/>
-              </a:rPr>
-              <a:t>Сервис принимает шаблон pptx и материалы</a:t>
-            </a:r>
-          </a:p>
-        </p:txBody>
-      </p:sp>
-      <p:sp>
-        <p:nvSpPr>
-          <p:cNvPr id="4" name="body"/>
-          <p:cNvSpPr txBox="1"/>
-          <p:nvPr/>
-        </p:nvSpPr>
-        <p:spPr>
-          <a:xfrm>
-            <a:off x="429280" y="3611995"/>
-            <a:ext cx="7827264" cy="2161617"/>
+            <a:off x="429280" y="2431298"/>
+            <a:ext cx="7827264" cy="1435308"/>
           </a:xfrm>
           <a:prstGeom prst="rect">
             <a:avLst/>
@@ -7053,7 +12072,7 @@
               <a:spcAft>
                 <a:spcPts val="300"/>
               </a:spcAft>
-              <a:defRPr sz="2800">
+              <a:defRPr sz="3200">
                 <a:solidFill>
                   <a:srgbClr val="FFFFFF"/>
                 </a:solidFill>
@@ -7063,7 +12082,7 @@
               </a:defRPr>
             </a:pPr>
             <a:r>
-              <a:rPr sz="2800">
+              <a:rPr sz="3200">
                 <a:solidFill>
                   <a:srgbClr val="FFFFFF"/>
                 </a:solidFill>
@@ -7071,119 +12090,21 @@
                 <a:ea typeface="Play"/>
                 <a:cs typeface="Play"/>
               </a:rPr>
-              <a:t>• Генерирует колоду, экспортирует pptx/pdf/html</a:t>
-            </a:r>
-          </a:p>
-          <a:p>
-            <a:pPr algn="l">
-              <a:spcAft>
-                <a:spcPts val="300"/>
-              </a:spcAft>
-              <a:defRPr sz="2800">
-                <a:solidFill>
-                  <a:srgbClr val="FFFFFF"/>
-                </a:solidFill>
-                <a:latin typeface="Play"/>
-                <a:ea typeface="Play"/>
-                <a:cs typeface="Play"/>
-              </a:defRPr>
-            </a:pPr>
-            <a:r>
-              <a:rPr sz="2800">
-                <a:solidFill>
-                  <a:srgbClr val="FFFFFF"/>
-                </a:solidFill>
-                <a:latin typeface="Play"/>
-                <a:ea typeface="Play"/>
-                <a:cs typeface="Play"/>
-              </a:rPr>
-              <a:t>• Автоматический аудит исправляет нарушения стиля</a:t>
+              <a:t>Пилот шёл 6 недель на двух командах, собрал 68 презентаций</a:t>
             </a:r>
           </a:p>
         </p:txBody>
       </p:sp>
-    </p:spTree>
-  </p:cSld>
-  <p:clrMapOvr>
-    <a:masterClrMapping/>
-  </p:clrMapOvr>
-</p:sld>
-</file>
-
-<file path=ppt/slides/slide33.xml><?xml version="1.0" encoding="utf-8"?>
-<p:sld xmlns:a="http://schemas.openxmlformats.org/drawingml/2006/main" xmlns:p="http://schemas.openxmlformats.org/presentationml/2006/main" xmlns:r="http://schemas.openxmlformats.org/officeDocument/2006/relationships">
-  <p:cSld>
-    <p:spTree>
-      <p:nvGrpSpPr>
-        <p:cNvPr id="1" name=""/>
-        <p:cNvGrpSpPr/>
-        <p:nvPr/>
-      </p:nvGrpSpPr>
-      <p:grpSpPr/>
-      <p:pic>
-        <p:nvPicPr>
-          <p:cNvPr id="620" name="Google Shape;620;p28"/>
-          <p:cNvPicPr preferRelativeResize="0"/>
-          <p:nvPr/>
-        </p:nvPicPr>
-        <p:blipFill rotWithShape="1">
-          <a:blip r:embed="rId3">
-            <a:alphaModFix/>
-          </a:blip>
-          <a:srcRect b="0" l="0" r="0" t="0"/>
-          <a:stretch/>
-        </p:blipFill>
-        <p:spPr>
-          <a:xfrm>
-            <a:off x="398723" y="6160516"/>
-            <a:ext cx="1857481" cy="292671"/>
-          </a:xfrm>
-          <a:prstGeom prst="rect">
-            <a:avLst/>
-          </a:prstGeom>
-          <a:noFill/>
-          <a:ln>
-            <a:noFill/>
-          </a:ln>
-        </p:spPr>
-      </p:pic>
-      <p:pic>
-        <p:nvPicPr>
-          <p:cNvPr descr=" " id="621" name="Google Shape;621;p28"/>
-          <p:cNvPicPr preferRelativeResize="0"/>
-          <p:nvPr/>
-        </p:nvPicPr>
-        <p:blipFill rotWithShape="1">
-          <a:blip r:embed="rId4">
-            <a:alphaModFix/>
-          </a:blip>
-          <a:srcRect b="0" l="0" r="0" t="0"/>
-          <a:stretch/>
-        </p:blipFill>
-        <p:spPr>
-          <a:xfrm>
-            <a:off x="11093496" y="6238282"/>
-            <a:ext cx="690517" cy="216000"/>
-          </a:xfrm>
-          <a:prstGeom prst="rect">
-            <a:avLst/>
-          </a:prstGeom>
-          <a:noFill/>
-          <a:ln>
-            <a:noFill/>
-          </a:ln>
-        </p:spPr>
-      </p:pic>
       <p:sp>
         <p:nvSpPr>
-          <p:cNvPr id="622" name="title"/>
+          <p:cNvPr id="4" name="body"/>
           <p:cNvSpPr txBox="1"/>
           <p:nvPr/>
         </p:nvSpPr>
         <p:spPr>
           <a:xfrm>
-            <a:off x="429280" y="424715"/>
-            <a:ext cx="7827264" cy="822960"/>
+            <a:off x="429280" y="4032218"/>
+            <a:ext cx="7827264" cy="1159287"/>
           </a:xfrm>
           <a:prstGeom prst="rect">
             <a:avLst/>
@@ -7200,7 +12121,7 @@
               <a:spcAft>
                 <a:spcPts val="300"/>
               </a:spcAft>
-              <a:defRPr sz="4000">
+              <a:defRPr sz="2000">
                 <a:solidFill>
                   <a:srgbClr val="FFFFFF"/>
                 </a:solidFill>
@@ -7210,7 +12131,7 @@
               </a:defRPr>
             </a:pPr>
             <a:r>
-              <a:rPr sz="4000">
+              <a:rPr sz="2000">
                 <a:solidFill>
                   <a:srgbClr val="FFFFFF"/>
                 </a:solidFill>
@@ -7218,38 +12139,15 @@
                 <a:ea typeface="Play"/>
                 <a:cs typeface="Play"/>
               </a:rPr>
-              <a:t>Ожидаемый эффект</a:t>
+              <a:t>• Сервис ускорил сборку с 186 до 4 мин</a:t>
             </a:r>
           </a:p>
-        </p:txBody>
-      </p:sp>
-      <p:sp>
-        <p:nvSpPr>
-          <p:cNvPr id="623" name="lead"/>
-          <p:cNvSpPr txBox="1"/>
-          <p:nvPr/>
-        </p:nvSpPr>
-        <p:spPr>
-          <a:xfrm>
-            <a:off x="429280" y="1504165"/>
-            <a:ext cx="7827264" cy="1328287"/>
-          </a:xfrm>
-          <a:prstGeom prst="rect">
-            <a:avLst/>
-          </a:prstGeom>
-          <a:noFill/>
-        </p:spPr>
-        <p:txBody>
-          <a:bodyPr wrap="square" lIns="76200" rIns="76200" tIns="50800" bIns="50800">
-            <a:spAutoFit/>
-          </a:bodyPr>
-          <a:lstStyle/>
           <a:p>
             <a:pPr algn="l">
               <a:spcAft>
                 <a:spcPts val="300"/>
               </a:spcAft>
-              <a:defRPr sz="4000">
+              <a:defRPr sz="2000">
                 <a:solidFill>
                   <a:srgbClr val="FFFFFF"/>
                 </a:solidFill>
@@ -7259,7 +12157,7 @@
               </a:defRPr>
             </a:pPr>
             <a:r>
-              <a:rPr sz="4000">
+              <a:rPr sz="2000">
                 <a:solidFill>
                   <a:srgbClr val="FFFFFF"/>
                 </a:solidFill>
@@ -7267,108 +12165,7 @@
                 <a:ea typeface="Play"/>
                 <a:cs typeface="Play"/>
               </a:rPr>
-              <a:t>Сборка 4 минуты вместо 186</a:t>
-            </a:r>
-          </a:p>
-        </p:txBody>
-      </p:sp>
-      <p:sp>
-        <p:nvSpPr>
-          <p:cNvPr id="624" name="body"/>
-          <p:cNvSpPr txBox="1"/>
-          <p:nvPr/>
-        </p:nvSpPr>
-        <p:spPr>
-          <a:xfrm>
-            <a:off x="429280" y="3066856"/>
-            <a:ext cx="7827264" cy="2344036"/>
-          </a:xfrm>
-          <a:prstGeom prst="rect">
-            <a:avLst/>
-          </a:prstGeom>
-          <a:noFill/>
-        </p:spPr>
-        <p:txBody>
-          <a:bodyPr wrap="square" lIns="76200" rIns="76200" tIns="50800" bIns="50800">
-            <a:spAutoFit/>
-          </a:bodyPr>
-          <a:lstStyle/>
-          <a:p>
-            <a:pPr algn="l">
-              <a:spcAft>
-                <a:spcPts val="300"/>
-              </a:spcAft>
-              <a:defRPr sz="2400">
-                <a:solidFill>
-                  <a:srgbClr val="FFFFFF"/>
-                </a:solidFill>
-                <a:latin typeface="Play"/>
-                <a:ea typeface="Play"/>
-                <a:cs typeface="Play"/>
-              </a:defRPr>
-            </a:pPr>
-            <a:r>
-              <a:rPr sz="2400">
-                <a:solidFill>
-                  <a:srgbClr val="FFFFFF"/>
-                </a:solidFill>
-                <a:latin typeface="Play"/>
-                <a:ea typeface="Play"/>
-                <a:cs typeface="Play"/>
-              </a:rPr>
-              <a:t>• Время до первой версии 1 день вместо 6</a:t>
-            </a:r>
-          </a:p>
-          <a:p>
-            <a:pPr algn="l">
-              <a:spcAft>
-                <a:spcPts val="300"/>
-              </a:spcAft>
-              <a:defRPr sz="2400">
-                <a:solidFill>
-                  <a:srgbClr val="FFFFFF"/>
-                </a:solidFill>
-                <a:latin typeface="Play"/>
-                <a:ea typeface="Play"/>
-                <a:cs typeface="Play"/>
-              </a:defRPr>
-            </a:pPr>
-            <a:r>
-              <a:rPr sz="2400">
-                <a:solidFill>
-                  <a:srgbClr val="FFFFFF"/>
-                </a:solidFill>
-                <a:latin typeface="Play"/>
-                <a:ea typeface="Play"/>
-                <a:cs typeface="Play"/>
-              </a:rPr>
-              <a:t>• Нарушений 2 из 68, все исправлены</a:t>
-            </a:r>
-          </a:p>
-          <a:p>
-            <a:pPr algn="l">
-              <a:spcAft>
-                <a:spcPts val="300"/>
-              </a:spcAft>
-              <a:defRPr sz="2400">
-                <a:solidFill>
-                  <a:srgbClr val="FFFFFF"/>
-                </a:solidFill>
-                <a:latin typeface="Play"/>
-                <a:ea typeface="Play"/>
-                <a:cs typeface="Play"/>
-              </a:defRPr>
-            </a:pPr>
-            <a:r>
-              <a:rPr sz="2400">
-                <a:solidFill>
-                  <a:srgbClr val="FFFFFF"/>
-                </a:solidFill>
-                <a:latin typeface="Play"/>
-                <a:ea typeface="Play"/>
-                <a:cs typeface="Play"/>
-              </a:rPr>
-              <a:t>• Дизайнеры закрыли 38 запросов вместо 11</a:t>
+              <a:t>• Нарушения стиля 2 из 68, исправлены автоматически</a:t>
             </a:r>
           </a:p>
         </p:txBody>
@@ -7381,600 +12178,7 @@
 </p:sld>
 </file>
 
-<file path=ppt/slides/slide34.xml><?xml version="1.0" encoding="utf-8"?>
-<p:sld xmlns:a="http://schemas.openxmlformats.org/drawingml/2006/main" xmlns:p="http://schemas.openxmlformats.org/presentationml/2006/main" xmlns:r="http://schemas.openxmlformats.org/officeDocument/2006/relationships">
-  <p:cSld>
-    <p:spTree>
-      <p:nvGrpSpPr>
-        <p:cNvPr id="1" name=""/>
-        <p:cNvGrpSpPr/>
-        <p:nvPr/>
-      </p:nvGrpSpPr>
-      <p:grpSpPr/>
-      <p:sp>
-        <p:nvSpPr>
-          <p:cNvPr id="2" name="title"/>
-          <p:cNvSpPr txBox="1"/>
-          <p:nvPr/>
-        </p:nvSpPr>
-        <p:spPr>
-          <a:xfrm>
-            <a:off x="429280" y="424715"/>
-            <a:ext cx="7827264" cy="822960"/>
-          </a:xfrm>
-          <a:prstGeom prst="rect">
-            <a:avLst/>
-          </a:prstGeom>
-          <a:noFill/>
-        </p:spPr>
-        <p:txBody>
-          <a:bodyPr wrap="square" lIns="76200" rIns="76200" tIns="50800" bIns="50800">
-            <a:spAutoFit/>
-          </a:bodyPr>
-          <a:lstStyle/>
-          <a:p>
-            <a:pPr algn="l">
-              <a:spcAft>
-                <a:spcPts val="300"/>
-              </a:spcAft>
-              <a:defRPr sz="3200">
-                <a:solidFill>
-                  <a:srgbClr val="FFFFFF"/>
-                </a:solidFill>
-                <a:latin typeface="Play"/>
-                <a:ea typeface="Play"/>
-                <a:cs typeface="Play"/>
-              </a:defRPr>
-            </a:pPr>
-            <a:r>
-              <a:rPr sz="3200">
-                <a:solidFill>
-                  <a:srgbClr val="FFFFFF"/>
-                </a:solidFill>
-                <a:latin typeface="Play"/>
-                <a:ea typeface="Play"/>
-                <a:cs typeface="Play"/>
-              </a:rPr>
-              <a:t>Время сборки колоды</a:t>
-            </a:r>
-          </a:p>
-        </p:txBody>
-      </p:sp>
-      <p:graphicFrame>
-        <p:nvGraphicFramePr>
-          <p:cNvPr id="3" name="Chart 2"/>
-          <p:cNvGraphicFramePr>
-            <a:graphicFrameLocks noGrp="1"/>
-          </p:cNvGraphicFramePr>
-          <p:nvPr/>
-        </p:nvGraphicFramePr>
-        <p:xfrm>
-          <a:off x="429280" y="1492575"/>
-          <a:ext cx="11310884" cy="4014604"/>
-        </p:xfrm>
-        <a:graphic>
-          <a:graphicData uri="http://schemas.openxmlformats.org/drawingml/2006/chart">
-            <c:chart xmlns:c="http://schemas.openxmlformats.org/drawingml/2006/chart" r:id="rId4"/>
-          </a:graphicData>
-        </a:graphic>
-      </p:graphicFrame>
-    </p:spTree>
-  </p:cSld>
-  <p:clrMapOvr>
-    <a:masterClrMapping/>
-  </p:clrMapOvr>
-</p:sld>
-</file>
-
-<file path=ppt/slides/slide35.xml><?xml version="1.0" encoding="utf-8"?>
-<p:sld xmlns:a="http://schemas.openxmlformats.org/drawingml/2006/main" xmlns:p="http://schemas.openxmlformats.org/presentationml/2006/main" xmlns:r="http://schemas.openxmlformats.org/officeDocument/2006/relationships">
-  <p:cSld>
-    <p:spTree>
-      <p:nvGrpSpPr>
-        <p:cNvPr id="1" name=""/>
-        <p:cNvGrpSpPr/>
-        <p:nvPr/>
-      </p:nvGrpSpPr>
-      <p:grpSpPr/>
-      <p:sp>
-        <p:nvSpPr>
-          <p:cNvPr id="2" name="title"/>
-          <p:cNvSpPr txBox="1"/>
-          <p:nvPr/>
-        </p:nvSpPr>
-        <p:spPr>
-          <a:xfrm>
-            <a:off x="429280" y="424715"/>
-            <a:ext cx="7827264" cy="822960"/>
-          </a:xfrm>
-          <a:prstGeom prst="rect">
-            <a:avLst/>
-          </a:prstGeom>
-          <a:noFill/>
-        </p:spPr>
-        <p:txBody>
-          <a:bodyPr wrap="square" lIns="76200" rIns="76200" tIns="50800" bIns="50800">
-            <a:spAutoFit/>
-          </a:bodyPr>
-          <a:lstStyle/>
-          <a:p>
-            <a:pPr algn="l">
-              <a:spcAft>
-                <a:spcPts val="300"/>
-              </a:spcAft>
-              <a:defRPr sz="3200">
-                <a:solidFill>
-                  <a:srgbClr val="FFFFFF"/>
-                </a:solidFill>
-                <a:latin typeface="Play"/>
-                <a:ea typeface="Play"/>
-                <a:cs typeface="Play"/>
-              </a:defRPr>
-            </a:pPr>
-            <a:r>
-              <a:rPr sz="3200">
-                <a:solidFill>
-                  <a:srgbClr val="FFFFFF"/>
-                </a:solidFill>
-                <a:latin typeface="Play"/>
-                <a:ea typeface="Play"/>
-                <a:cs typeface="Play"/>
-              </a:rPr>
-              <a:t>Нарушения фирменного стиля</a:t>
-            </a:r>
-          </a:p>
-        </p:txBody>
-      </p:sp>
-      <p:graphicFrame>
-        <p:nvGraphicFramePr>
-          <p:cNvPr id="3" name="Table 2"/>
-          <p:cNvGraphicFramePr>
-            <a:graphicFrameLocks noGrp="1"/>
-          </p:cNvGraphicFramePr>
-          <p:nvPr/>
-        </p:nvGraphicFramePr>
-        <p:xfrm>
-          <a:off x="429280" y="1664162"/>
-          <a:ext cx="11310884" cy="3753589"/>
-        </p:xfrm>
-        <a:graphic>
-          <a:graphicData uri="http://schemas.openxmlformats.org/drawingml/2006/table">
-            <a:tbl>
-              <a:tblPr firstRow="1" bandRow="1">
-                <a:tableStyleId>{5C22544A-7EE6-4342-B048-85BDC9FD1C3A}</a:tableStyleId>
-              </a:tblPr>
-              <a:tblGrid>
-                <a:gridCol w="3770294"/>
-                <a:gridCol w="3770294"/>
-                <a:gridCol w="3770296"/>
-              </a:tblGrid>
-              <a:tr h="1876794">
-                <a:tc>
-                  <a:txBody>
-                    <a:bodyPr/>
-                    <a:lstStyle/>
-                    <a:p>
-                      <a:pPr>
-                        <a:defRPr sz="1300" b="1">
-                          <a:solidFill>
-                            <a:srgbClr val="FFFFFF"/>
-                          </a:solidFill>
-                          <a:latin typeface="Play"/>
-                          <a:ea typeface="Play"/>
-                          <a:cs typeface="Play"/>
-                        </a:defRPr>
-                      </a:pPr>
-                      <a:r>
-                        <a:t>Показатель</a:t>
-                      </a:r>
-                    </a:p>
-                  </a:txBody>
-                  <a:tcPr>
-                    <a:solidFill>
-                      <a:srgbClr val="0077FF"/>
-                    </a:solidFill>
-                  </a:tcPr>
-                </a:tc>
-                <a:tc>
-                  <a:txBody>
-                    <a:bodyPr/>
-                    <a:lstStyle/>
-                    <a:p>
-                      <a:pPr>
-                        <a:defRPr sz="1300" b="1">
-                          <a:solidFill>
-                            <a:srgbClr val="FFFFFF"/>
-                          </a:solidFill>
-                          <a:latin typeface="Play"/>
-                          <a:ea typeface="Play"/>
-                          <a:cs typeface="Play"/>
-                        </a:defRPr>
-                      </a:pPr>
-                      <a:r>
-                        <a:t>Текущие</a:t>
-                      </a:r>
-                    </a:p>
-                  </a:txBody>
-                  <a:tcPr>
-                    <a:solidFill>
-                      <a:srgbClr val="0077FF"/>
-                    </a:solidFill>
-                  </a:tcPr>
-                </a:tc>
-                <a:tc>
-                  <a:txBody>
-                    <a:bodyPr/>
-                    <a:lstStyle/>
-                    <a:p>
-                      <a:pPr>
-                        <a:defRPr sz="1300" b="1">
-                          <a:solidFill>
-                            <a:srgbClr val="FFFFFF"/>
-                          </a:solidFill>
-                          <a:latin typeface="Play"/>
-                          <a:ea typeface="Play"/>
-                          <a:cs typeface="Play"/>
-                        </a:defRPr>
-                      </a:pPr>
-                      <a:r>
-                        <a:t>Пилот</a:t>
-                      </a:r>
-                    </a:p>
-                  </a:txBody>
-                  <a:tcPr>
-                    <a:solidFill>
-                      <a:srgbClr val="0077FF"/>
-                    </a:solidFill>
-                  </a:tcPr>
-                </a:tc>
-              </a:tr>
-              <a:tr h="1876795">
-                <a:tc>
-                  <a:txBody>
-                    <a:bodyPr/>
-                    <a:lstStyle/>
-                    <a:p>
-                      <a:pPr>
-                        <a:defRPr sz="1300" b="0">
-                          <a:solidFill>
-                            <a:srgbClr val="FFFFFF"/>
-                          </a:solidFill>
-                          <a:latin typeface="Play"/>
-                          <a:ea typeface="Play"/>
-                          <a:cs typeface="Play"/>
-                        </a:defRPr>
-                      </a:pPr>
-                      <a:r>
-                        <a:t>Нарушения фирменного стиля</a:t>
-                      </a:r>
-                    </a:p>
-                  </a:txBody>
-                  <a:tcPr>
-                    <a:solidFill>
-                      <a:srgbClr val="111111"/>
-                    </a:solidFill>
-                  </a:tcPr>
-                </a:tc>
-                <a:tc>
-                  <a:txBody>
-                    <a:bodyPr/>
-                    <a:lstStyle/>
-                    <a:p>
-                      <a:pPr>
-                        <a:defRPr sz="1300" b="0">
-                          <a:solidFill>
-                            <a:srgbClr val="FFFFFF"/>
-                          </a:solidFill>
-                          <a:latin typeface="Play"/>
-                          <a:ea typeface="Play"/>
-                          <a:cs typeface="Play"/>
-                        </a:defRPr>
-                      </a:pPr>
-                      <a:r>
-                        <a:t>19 из 42</a:t>
-                      </a:r>
-                    </a:p>
-                  </a:txBody>
-                  <a:tcPr>
-                    <a:solidFill>
-                      <a:srgbClr val="111111"/>
-                    </a:solidFill>
-                  </a:tcPr>
-                </a:tc>
-                <a:tc>
-                  <a:txBody>
-                    <a:bodyPr/>
-                    <a:lstStyle/>
-                    <a:p>
-                      <a:pPr>
-                        <a:defRPr sz="1300" b="0">
-                          <a:solidFill>
-                            <a:srgbClr val="FFFFFF"/>
-                          </a:solidFill>
-                          <a:latin typeface="Play"/>
-                          <a:ea typeface="Play"/>
-                          <a:cs typeface="Play"/>
-                        </a:defRPr>
-                      </a:pPr>
-                      <a:r>
-                        <a:t>2 из 68</a:t>
-                      </a:r>
-                    </a:p>
-                  </a:txBody>
-                  <a:tcPr>
-                    <a:solidFill>
-                      <a:srgbClr val="111111"/>
-                    </a:solidFill>
-                  </a:tcPr>
-                </a:tc>
-              </a:tr>
-            </a:tbl>
-          </a:graphicData>
-        </a:graphic>
-      </p:graphicFrame>
-    </p:spTree>
-  </p:cSld>
-  <p:clrMapOvr>
-    <a:masterClrMapping/>
-  </p:clrMapOvr>
-</p:sld>
-</file>
-
-<file path=ppt/slides/slide36.xml><?xml version="1.0" encoding="utf-8"?>
-<p:sld xmlns:a="http://schemas.openxmlformats.org/drawingml/2006/main" xmlns:p="http://schemas.openxmlformats.org/presentationml/2006/main" xmlns:r="http://schemas.openxmlformats.org/officeDocument/2006/relationships">
-  <p:cSld>
-    <p:spTree>
-      <p:nvGrpSpPr>
-        <p:cNvPr id="1" name=""/>
-        <p:cNvGrpSpPr/>
-        <p:nvPr/>
-      </p:nvGrpSpPr>
-      <p:grpSpPr/>
-      <p:sp>
-        <p:nvSpPr>
-          <p:cNvPr id="2" name="title"/>
-          <p:cNvSpPr txBox="1"/>
-          <p:nvPr/>
-        </p:nvSpPr>
-        <p:spPr>
-          <a:xfrm>
-            <a:off x="429280" y="424715"/>
-            <a:ext cx="7827264" cy="822960"/>
-          </a:xfrm>
-          <a:prstGeom prst="rect">
-            <a:avLst/>
-          </a:prstGeom>
-          <a:noFill/>
-        </p:spPr>
-        <p:txBody>
-          <a:bodyPr wrap="square" lIns="76200" rIns="76200" tIns="50800" bIns="50800">
-            <a:spAutoFit/>
-          </a:bodyPr>
-          <a:lstStyle/>
-          <a:p>
-            <a:pPr algn="l">
-              <a:spcAft>
-                <a:spcPts val="300"/>
-              </a:spcAft>
-              <a:defRPr sz="3200">
-                <a:solidFill>
-                  <a:srgbClr val="FFFFFF"/>
-                </a:solidFill>
-                <a:latin typeface="Play"/>
-                <a:ea typeface="Play"/>
-                <a:cs typeface="Play"/>
-              </a:defRPr>
-            </a:pPr>
-            <a:r>
-              <a:rPr sz="3200">
-                <a:solidFill>
-                  <a:srgbClr val="FFFFFF"/>
-                </a:solidFill>
-                <a:latin typeface="Play"/>
-                <a:ea typeface="Play"/>
-                <a:cs typeface="Play"/>
-              </a:rPr>
-              <a:t>Нагрузка дизайнеров</a:t>
-            </a:r>
-          </a:p>
-        </p:txBody>
-      </p:sp>
-      <p:graphicFrame>
-        <p:nvGraphicFramePr>
-          <p:cNvPr id="3" name="Table 2"/>
-          <p:cNvGraphicFramePr>
-            <a:graphicFrameLocks noGrp="1"/>
-          </p:cNvGraphicFramePr>
-          <p:nvPr/>
-        </p:nvGraphicFramePr>
-        <p:xfrm>
-          <a:off x="429280" y="1592290"/>
-          <a:ext cx="11310884" cy="4181322"/>
-        </p:xfrm>
-        <a:graphic>
-          <a:graphicData uri="http://schemas.openxmlformats.org/drawingml/2006/table">
-            <a:tbl>
-              <a:tblPr firstRow="1" bandRow="1">
-                <a:tableStyleId>{5C22544A-7EE6-4342-B048-85BDC9FD1C3A}</a:tableStyleId>
-              </a:tblPr>
-              <a:tblGrid>
-                <a:gridCol w="3770294"/>
-                <a:gridCol w="3770294"/>
-                <a:gridCol w="3770296"/>
-              </a:tblGrid>
-              <a:tr h="2090661">
-                <a:tc>
-                  <a:txBody>
-                    <a:bodyPr/>
-                    <a:lstStyle/>
-                    <a:p>
-                      <a:pPr>
-                        <a:defRPr sz="1300" b="1">
-                          <a:solidFill>
-                            <a:srgbClr val="FFFFFF"/>
-                          </a:solidFill>
-                          <a:latin typeface="Play"/>
-                          <a:ea typeface="Play"/>
-                          <a:cs typeface="Play"/>
-                        </a:defRPr>
-                      </a:pPr>
-                      <a:r>
-                        <a:t>Показатель</a:t>
-                      </a:r>
-                    </a:p>
-                  </a:txBody>
-                  <a:tcPr>
-                    <a:solidFill>
-                      <a:srgbClr val="0077FF"/>
-                    </a:solidFill>
-                  </a:tcPr>
-                </a:tc>
-                <a:tc>
-                  <a:txBody>
-                    <a:bodyPr/>
-                    <a:lstStyle/>
-                    <a:p>
-                      <a:pPr>
-                        <a:defRPr sz="1300" b="1">
-                          <a:solidFill>
-                            <a:srgbClr val="FFFFFF"/>
-                          </a:solidFill>
-                          <a:latin typeface="Play"/>
-                          <a:ea typeface="Play"/>
-                          <a:cs typeface="Play"/>
-                        </a:defRPr>
-                      </a:pPr>
-                      <a:r>
-                        <a:t>Текущая</a:t>
-                      </a:r>
-                    </a:p>
-                  </a:txBody>
-                  <a:tcPr>
-                    <a:solidFill>
-                      <a:srgbClr val="0077FF"/>
-                    </a:solidFill>
-                  </a:tcPr>
-                </a:tc>
-                <a:tc>
-                  <a:txBody>
-                    <a:bodyPr/>
-                    <a:lstStyle/>
-                    <a:p>
-                      <a:pPr>
-                        <a:defRPr sz="1300" b="1">
-                          <a:solidFill>
-                            <a:srgbClr val="FFFFFF"/>
-                          </a:solidFill>
-                          <a:latin typeface="Play"/>
-                          <a:ea typeface="Play"/>
-                          <a:cs typeface="Play"/>
-                        </a:defRPr>
-                      </a:pPr>
-                      <a:r>
-                        <a:t>Пилот</a:t>
-                      </a:r>
-                    </a:p>
-                  </a:txBody>
-                  <a:tcPr>
-                    <a:solidFill>
-                      <a:srgbClr val="0077FF"/>
-                    </a:solidFill>
-                  </a:tcPr>
-                </a:tc>
-              </a:tr>
-              <a:tr h="2090661">
-                <a:tc>
-                  <a:txBody>
-                    <a:bodyPr/>
-                    <a:lstStyle/>
-                    <a:p>
-                      <a:pPr>
-                        <a:defRPr sz="1300" b="0">
-                          <a:solidFill>
-                            <a:srgbClr val="FFFFFF"/>
-                          </a:solidFill>
-                          <a:latin typeface="Play"/>
-                          <a:ea typeface="Play"/>
-                          <a:cs typeface="Play"/>
-                        </a:defRPr>
-                      </a:pPr>
-                      <a:r>
-                        <a:t>Запросов/неделя</a:t>
-                      </a:r>
-                    </a:p>
-                  </a:txBody>
-                  <a:tcPr>
-                    <a:solidFill>
-                      <a:srgbClr val="111111"/>
-                    </a:solidFill>
-                  </a:tcPr>
-                </a:tc>
-                <a:tc>
-                  <a:txBody>
-                    <a:bodyPr/>
-                    <a:lstStyle/>
-                    <a:p>
-                      <a:pPr>
-                        <a:defRPr sz="1300" b="0">
-                          <a:solidFill>
-                            <a:srgbClr val="FFFFFF"/>
-                          </a:solidFill>
-                          <a:latin typeface="Play"/>
-                          <a:ea typeface="Play"/>
-                          <a:cs typeface="Play"/>
-                        </a:defRPr>
-                      </a:pPr>
-                      <a:r>
-                        <a:t>11</a:t>
-                      </a:r>
-                    </a:p>
-                  </a:txBody>
-                  <a:tcPr>
-                    <a:solidFill>
-                      <a:srgbClr val="111111"/>
-                    </a:solidFill>
-                  </a:tcPr>
-                </a:tc>
-                <a:tc>
-                  <a:txBody>
-                    <a:bodyPr/>
-                    <a:lstStyle/>
-                    <a:p>
-                      <a:pPr>
-                        <a:defRPr sz="1300" b="0">
-                          <a:solidFill>
-                            <a:srgbClr val="FFFFFF"/>
-                          </a:solidFill>
-                          <a:latin typeface="Play"/>
-                          <a:ea typeface="Play"/>
-                          <a:cs typeface="Play"/>
-                        </a:defRPr>
-                      </a:pPr>
-                      <a:r>
-                        <a:t>38</a:t>
-                      </a:r>
-                    </a:p>
-                  </a:txBody>
-                  <a:tcPr>
-                    <a:solidFill>
-                      <a:srgbClr val="111111"/>
-                    </a:solidFill>
-                  </a:tcPr>
-                </a:tc>
-              </a:tr>
-            </a:tbl>
-          </a:graphicData>
-        </a:graphic>
-      </p:graphicFrame>
-    </p:spTree>
-  </p:cSld>
-  <p:clrMapOvr>
-    <a:masterClrMapping/>
-  </p:clrMapOvr>
-</p:sld>
-</file>
-
-<file path=ppt/slides/slide37.xml><?xml version="1.0" encoding="utf-8"?>
+<file path=ppt/slides/slide38.xml><?xml version="1.0" encoding="utf-8"?>
 <p:sld xmlns:a="http://schemas.openxmlformats.org/drawingml/2006/main" xmlns:p="http://schemas.openxmlformats.org/presentationml/2006/main" xmlns:r="http://schemas.openxmlformats.org/officeDocument/2006/relationships">
   <p:cSld>
     <p:spTree>
@@ -8057,7 +12261,7 @@
         <p:spPr>
           <a:xfrm>
             <a:off x="300817" y="297715"/>
-            <a:ext cx="8081264" cy="4989763"/>
+            <a:ext cx="8081264" cy="5418295"/>
           </a:xfrm>
           <a:prstGeom prst="roundRect">
             <a:avLst/>
@@ -8138,7 +12342,7 @@
                 <a:ea typeface="Play"/>
                 <a:cs typeface="Play"/>
               </a:rPr>
-              <a:t>Ресурсы и сроки</a:t>
+              <a:t>Показатели после пилота</a:t>
             </a:r>
           </a:p>
         </p:txBody>
@@ -8152,7 +12356,7 @@
         <p:spPr>
           <a:xfrm>
             <a:off x="427817" y="1837052"/>
-            <a:ext cx="7827264" cy="1391337"/>
+            <a:ext cx="7827264" cy="2017988"/>
           </a:xfrm>
           <a:prstGeom prst="rect">
             <a:avLst/>
@@ -8169,7 +12373,7 @@
               <a:spcAft>
                 <a:spcPts val="300"/>
               </a:spcAft>
-              <a:defRPr sz="5400">
+              <a:defRPr sz="4000">
                 <a:solidFill>
                   <a:srgbClr val="FFFFFF"/>
                 </a:solidFill>
@@ -8179,7 +12383,7 @@
               </a:defRPr>
             </a:pPr>
             <a:r>
-              <a:rPr sz="5400">
+              <a:rPr sz="4000">
                 <a:solidFill>
                   <a:srgbClr val="FFFFFF"/>
                 </a:solidFill>
@@ -8187,7 +12391,7 @@
                 <a:ea typeface="Play"/>
                 <a:cs typeface="Play"/>
               </a:rPr>
-              <a:t>2 vCPU / 2 GB RAM</a:t>
+              <a:t>Запросы закрыты 38 вместо 11, рутина ушла в сервис</a:t>
             </a:r>
           </a:p>
         </p:txBody>
@@ -8200,8 +12404,8 @@
         </p:nvSpPr>
         <p:spPr>
           <a:xfrm>
-            <a:off x="427817" y="3473919"/>
-            <a:ext cx="7827264" cy="2455301"/>
+            <a:off x="427817" y="4100571"/>
+            <a:ext cx="7827264" cy="1828649"/>
           </a:xfrm>
           <a:prstGeom prst="rect">
             <a:avLst/>
@@ -8218,7 +12422,7 @@
               <a:spcAft>
                 <a:spcPts val="300"/>
               </a:spcAft>
-              <a:defRPr sz="3200">
+              <a:defRPr sz="2800">
                 <a:solidFill>
                   <a:srgbClr val="FFFFFF"/>
                 </a:solidFill>
@@ -8228,7 +12432,7 @@
               </a:defRPr>
             </a:pPr>
             <a:r>
-              <a:rPr sz="3200">
+              <a:rPr sz="2800">
                 <a:solidFill>
                   <a:srgbClr val="FFFFFF"/>
                 </a:solidFill>
@@ -8236,7 +12440,7 @@
                 <a:ea typeface="Play"/>
                 <a:cs typeface="Play"/>
               </a:rPr>
-              <a:t>• 1 400 рублей за 6 недель пилота</a:t>
+              <a:t>• Время до первой версии сократилось с 6 дней до 1</a:t>
             </a:r>
           </a:p>
           <a:p>
@@ -8244,7 +12448,7 @@
               <a:spcAft>
                 <a:spcPts val="300"/>
               </a:spcAft>
-              <a:defRPr sz="3200">
+              <a:defRPr sz="2800">
                 <a:solidFill>
                   <a:srgbClr val="FFFFFF"/>
                 </a:solidFill>
@@ -8254,7 +12458,7 @@
               </a:defRPr>
             </a:pPr>
             <a:r>
-              <a:rPr sz="3200">
+              <a:rPr sz="2800">
                 <a:solidFill>
                   <a:srgbClr val="FFFFFF"/>
                 </a:solidFill>
@@ -8262,252 +12466,7 @@
                 <a:ea typeface="Play"/>
                 <a:cs typeface="Play"/>
               </a:rPr>
-              <a:t>• 6 недель пилота, 2 команды, 68 презентаций</a:t>
-            </a:r>
-          </a:p>
-        </p:txBody>
-      </p:sp>
-    </p:spTree>
-  </p:cSld>
-  <p:clrMapOvr>
-    <a:masterClrMapping/>
-  </p:clrMapOvr>
-</p:sld>
-</file>
-
-<file path=ppt/slides/slide38.xml><?xml version="1.0" encoding="utf-8"?>
-<p:sld xmlns:a="http://schemas.openxmlformats.org/drawingml/2006/main" xmlns:p="http://schemas.openxmlformats.org/presentationml/2006/main" xmlns:r="http://schemas.openxmlformats.org/officeDocument/2006/relationships">
-  <p:cSld>
-    <p:spTree>
-      <p:nvGrpSpPr>
-        <p:cNvPr id="1" name=""/>
-        <p:cNvGrpSpPr/>
-        <p:nvPr/>
-      </p:nvGrpSpPr>
-      <p:grpSpPr/>
-      <p:pic>
-        <p:nvPicPr>
-          <p:cNvPr id="620" name="Google Shape;620;p28"/>
-          <p:cNvPicPr preferRelativeResize="0"/>
-          <p:nvPr/>
-        </p:nvPicPr>
-        <p:blipFill rotWithShape="1">
-          <a:blip r:embed="rId3">
-            <a:alphaModFix/>
-          </a:blip>
-          <a:srcRect b="0" l="0" r="0" t="0"/>
-          <a:stretch/>
-        </p:blipFill>
-        <p:spPr>
-          <a:xfrm>
-            <a:off x="398723" y="6160516"/>
-            <a:ext cx="1857481" cy="292671"/>
-          </a:xfrm>
-          <a:prstGeom prst="rect">
-            <a:avLst/>
-          </a:prstGeom>
-          <a:noFill/>
-          <a:ln>
-            <a:noFill/>
-          </a:ln>
-        </p:spPr>
-      </p:pic>
-      <p:pic>
-        <p:nvPicPr>
-          <p:cNvPr descr=" " id="621" name="Google Shape;621;p28"/>
-          <p:cNvPicPr preferRelativeResize="0"/>
-          <p:nvPr/>
-        </p:nvPicPr>
-        <p:blipFill rotWithShape="1">
-          <a:blip r:embed="rId4">
-            <a:alphaModFix/>
-          </a:blip>
-          <a:srcRect b="0" l="0" r="0" t="0"/>
-          <a:stretch/>
-        </p:blipFill>
-        <p:spPr>
-          <a:xfrm>
-            <a:off x="11093496" y="6238282"/>
-            <a:ext cx="690517" cy="216000"/>
-          </a:xfrm>
-          <a:prstGeom prst="rect">
-            <a:avLst/>
-          </a:prstGeom>
-          <a:noFill/>
-          <a:ln>
-            <a:noFill/>
-          </a:ln>
-        </p:spPr>
-      </p:pic>
-      <p:sp>
-        <p:nvSpPr>
-          <p:cNvPr id="622" name="title"/>
-          <p:cNvSpPr txBox="1"/>
-          <p:nvPr/>
-        </p:nvSpPr>
-        <p:spPr>
-          <a:xfrm>
-            <a:off x="429280" y="424715"/>
-            <a:ext cx="7827264" cy="822960"/>
-          </a:xfrm>
-          <a:prstGeom prst="rect">
-            <a:avLst/>
-          </a:prstGeom>
-          <a:noFill/>
-        </p:spPr>
-        <p:txBody>
-          <a:bodyPr wrap="square" lIns="76200" rIns="76200" tIns="50800" bIns="50800">
-            <a:spAutoFit/>
-          </a:bodyPr>
-          <a:lstStyle/>
-          <a:p>
-            <a:pPr algn="l">
-              <a:spcAft>
-                <a:spcPts val="300"/>
-              </a:spcAft>
-              <a:defRPr sz="4000">
-                <a:solidFill>
-                  <a:srgbClr val="FFFFFF"/>
-                </a:solidFill>
-                <a:latin typeface="Play"/>
-                <a:ea typeface="Play"/>
-                <a:cs typeface="Play"/>
-              </a:defRPr>
-            </a:pPr>
-            <a:r>
-              <a:rPr sz="4000">
-                <a:solidFill>
-                  <a:srgbClr val="FFFFFF"/>
-                </a:solidFill>
-                <a:latin typeface="Play"/>
-                <a:ea typeface="Play"/>
-                <a:cs typeface="Play"/>
-              </a:rPr>
-              <a:t>Что мы просим решить</a:t>
-            </a:r>
-          </a:p>
-        </p:txBody>
-      </p:sp>
-      <p:sp>
-        <p:nvSpPr>
-          <p:cNvPr id="623" name="lead"/>
-          <p:cNvSpPr txBox="1"/>
-          <p:nvPr/>
-        </p:nvSpPr>
-        <p:spPr>
-          <a:xfrm>
-            <a:off x="429280" y="1504165"/>
-            <a:ext cx="7827264" cy="1652664"/>
-          </a:xfrm>
-          <a:prstGeom prst="rect">
-            <a:avLst/>
-          </a:prstGeom>
-          <a:noFill/>
-        </p:spPr>
-        <p:txBody>
-          <a:bodyPr wrap="square" lIns="76200" rIns="76200" tIns="50800" bIns="50800">
-            <a:spAutoFit/>
-          </a:bodyPr>
-          <a:lstStyle/>
-          <a:p>
-            <a:pPr algn="l">
-              <a:spcAft>
-                <a:spcPts val="300"/>
-              </a:spcAft>
-              <a:defRPr sz="4000">
-                <a:solidFill>
-                  <a:srgbClr val="FFFFFF"/>
-                </a:solidFill>
-                <a:latin typeface="Play"/>
-                <a:ea typeface="Play"/>
-                <a:cs typeface="Play"/>
-              </a:defRPr>
-            </a:pPr>
-            <a:r>
-              <a:rPr sz="4000">
-                <a:solidFill>
-                  <a:srgbClr val="FFFFFF"/>
-                </a:solidFill>
-                <a:latin typeface="Play"/>
-                <a:ea typeface="Play"/>
-                <a:cs typeface="Play"/>
-              </a:rPr>
-              <a:t>Запуск сервиса на всю компанию</a:t>
-            </a:r>
-          </a:p>
-        </p:txBody>
-      </p:sp>
-      <p:sp>
-        <p:nvSpPr>
-          <p:cNvPr id="624" name="body"/>
-          <p:cNvSpPr txBox="1"/>
-          <p:nvPr/>
-        </p:nvSpPr>
-        <p:spPr>
-          <a:xfrm>
-            <a:off x="429280" y="3391233"/>
-            <a:ext cx="7827264" cy="2019660"/>
-          </a:xfrm>
-          <a:prstGeom prst="rect">
-            <a:avLst/>
-          </a:prstGeom>
-          <a:noFill/>
-        </p:spPr>
-        <p:txBody>
-          <a:bodyPr wrap="square" lIns="76200" rIns="76200" tIns="50800" bIns="50800">
-            <a:spAutoFit/>
-          </a:bodyPr>
-          <a:lstStyle/>
-          <a:p>
-            <a:pPr algn="l">
-              <a:spcAft>
-                <a:spcPts val="300"/>
-              </a:spcAft>
-              <a:defRPr sz="3200">
-                <a:solidFill>
-                  <a:srgbClr val="FFFFFF"/>
-                </a:solidFill>
-                <a:latin typeface="Play"/>
-                <a:ea typeface="Play"/>
-                <a:cs typeface="Play"/>
-              </a:defRPr>
-            </a:pPr>
-            <a:r>
-              <a:rPr sz="3200">
-                <a:solidFill>
-                  <a:srgbClr val="FFFFFF"/>
-                </a:solidFill>
-                <a:latin typeface="Play"/>
-                <a:ea typeface="Play"/>
-                <a:cs typeface="Play"/>
-              </a:rPr>
-              <a:t>• Интеграция с корпоративным хранилищем</a:t>
-            </a:r>
-          </a:p>
-          <a:p>
-            <a:pPr algn="l">
-              <a:spcAft>
-                <a:spcPts val="300"/>
-              </a:spcAft>
-              <a:defRPr sz="3200">
-                <a:solidFill>
-                  <a:srgbClr val="FFFFFF"/>
-                </a:solidFill>
-                <a:latin typeface="Play"/>
-                <a:ea typeface="Play"/>
-                <a:cs typeface="Play"/>
-              </a:defRPr>
-            </a:pPr>
-            <a:r>
-              <a:rPr sz="3200">
-                <a:solidFill>
-                  <a:srgbClr val="FFFFFF"/>
-                </a:solidFill>
-                <a:latin typeface="Play"/>
-                <a:ea typeface="Play"/>
-                <a:cs typeface="Play"/>
-              </a:rPr>
-              <a:t>• Поддержка 20 одновременных задач</a:t>
+              <a:t>• Сервис работает на 2 vCPU / 2 ГБ RAM</a:t>
             </a:r>
           </a:p>
         </p:txBody>
@@ -8532,73 +12491,129 @@
       <p:grpSpPr/>
       <p:sp>
         <p:nvSpPr>
-          <p:cNvPr id="2" name="title"/>
-          <p:cNvSpPr txBox="1"/>
+          <p:cNvPr id="881" name="Google Shape;881;p45"/>
+          <p:cNvSpPr/>
           <p:nvPr/>
         </p:nvSpPr>
         <p:spPr>
           <a:xfrm>
-            <a:off x="429280" y="424715"/>
-            <a:ext cx="7827264" cy="822960"/>
+            <a:off x="429254" y="4567907"/>
+            <a:ext cx="834282" cy="834282"/>
           </a:xfrm>
-          <a:prstGeom prst="rect">
+          <a:prstGeom prst="ellipse">
             <a:avLst/>
           </a:prstGeom>
-          <a:noFill/>
+          <a:solidFill>
+            <a:srgbClr val="5A6775"/>
+          </a:solidFill>
+          <a:ln>
+            <a:noFill/>
+          </a:ln>
         </p:spPr>
         <p:txBody>
-          <a:bodyPr wrap="square" lIns="76200" rIns="76200" tIns="50800" bIns="50800">
-            <a:spAutoFit/>
+          <a:bodyPr anchorCtr="0" anchor="ctr" bIns="45700" lIns="91425" spcFirstLastPara="1" rIns="91425" wrap="square" tIns="45700">
+            <a:noAutofit/>
           </a:bodyPr>
           <a:lstStyle/>
           <a:p>
-            <a:pPr algn="l">
-              <a:spcAft>
-                <a:spcPts val="300"/>
-              </a:spcAft>
-              <a:defRPr sz="3200">
-                <a:solidFill>
-                  <a:srgbClr val="FFFFFF"/>
-                </a:solidFill>
-                <a:latin typeface="Play"/>
-                <a:ea typeface="Play"/>
-                <a:cs typeface="Play"/>
-              </a:defRPr>
+            <a:pPr indent="0" lvl="0" marL="0" marR="0" rtl="0" algn="ctr">
+              <a:spcBef>
+                <a:spcPts val="0"/>
+              </a:spcBef>
+              <a:spcAft>
+                <a:spcPts val="0"/>
+              </a:spcAft>
+              <a:buNone/>
             </a:pPr>
             <a:r>
-              <a:rPr sz="3200">
-                <a:solidFill>
-                  <a:srgbClr val="FFFFFF"/>
-                </a:solidFill>
-                <a:latin typeface="Play"/>
-                <a:ea typeface="Play"/>
-                <a:cs typeface="Play"/>
-              </a:rPr>
-              <a:t>План запуска</a:t>
+              <a:t/>
             </a:r>
+            <a:endParaRPr sz="1800">
+              <a:solidFill>
+                <a:schemeClr val="lt1"/>
+              </a:solidFill>
+              <a:latin typeface="Arial"/>
+              <a:ea typeface="Arial"/>
+              <a:cs typeface="Arial"/>
+              <a:sym typeface="Arial"/>
+            </a:endParaRPr>
           </a:p>
         </p:txBody>
       </p:sp>
       <p:sp>
         <p:nvSpPr>
-          <p:cNvPr id="3" name="Rectangle 2"/>
+          <p:cNvPr id="883" name="Google Shape;883;p45"/>
           <p:cNvSpPr/>
           <p:nvPr/>
         </p:nvSpPr>
         <p:spPr>
           <a:xfrm>
-            <a:off x="429280" y="3339292"/>
-            <a:ext cx="11310884" cy="120438"/>
+            <a:off x="3499026" y="4567907"/>
+            <a:ext cx="834282" cy="834282"/>
           </a:xfrm>
-          <a:prstGeom prst="rect">
+          <a:prstGeom prst="ellipse">
             <a:avLst/>
           </a:prstGeom>
           <a:solidFill>
-            <a:srgbClr val="0077FF"/>
+            <a:srgbClr val="5A6775"/>
           </a:solidFill>
           <a:ln>
             <a:noFill/>
           </a:ln>
+        </p:spPr>
+        <p:txBody>
+          <a:bodyPr anchorCtr="0" anchor="ctr" bIns="45700" lIns="91425" spcFirstLastPara="1" rIns="91425" wrap="square" tIns="45700">
+            <a:noAutofit/>
+          </a:bodyPr>
+          <a:lstStyle/>
+          <a:p>
+            <a:pPr indent="0" lvl="0" marL="0" marR="0" rtl="0" algn="ctr">
+              <a:spcBef>
+                <a:spcPts val="0"/>
+              </a:spcBef>
+              <a:spcAft>
+                <a:spcPts val="0"/>
+              </a:spcAft>
+              <a:buNone/>
+            </a:pPr>
+            <a:r>
+              <a:t/>
+            </a:r>
+            <a:endParaRPr sz="1800">
+              <a:solidFill>
+                <a:schemeClr val="lt1"/>
+              </a:solidFill>
+              <a:latin typeface="Arial"/>
+              <a:ea typeface="Arial"/>
+              <a:cs typeface="Arial"/>
+              <a:sym typeface="Arial"/>
+            </a:endParaRPr>
+          </a:p>
+        </p:txBody>
+      </p:sp>
+      <p:sp>
+        <p:nvSpPr>
+          <p:cNvPr id="884" name="Rounded Rectangle 883"/>
+          <p:cNvSpPr/>
+          <p:nvPr/>
+        </p:nvSpPr>
+        <p:spPr>
+          <a:xfrm>
+            <a:off x="300817" y="297715"/>
+            <a:ext cx="11566347" cy="4213947"/>
+          </a:xfrm>
+          <a:prstGeom prst="roundRect">
+            <a:avLst/>
+          </a:prstGeom>
+          <a:solidFill>
+            <a:srgbClr val="111111">
+              <a:alpha val="85000"/>
+            </a:srgbClr>
+          </a:solidFill>
+          <a:ln>
+            <a:noFill/>
+          </a:ln>
+          <a:effectLst/>
         </p:spPr>
         <p:style>
           <a:lnRef idx="1">
@@ -8624,57 +12639,14 @@
       </p:sp>
       <p:sp>
         <p:nvSpPr>
-          <p:cNvPr id="4" name="Oval 3"/>
-          <p:cNvSpPr/>
-          <p:nvPr/>
-        </p:nvSpPr>
-        <p:spPr>
-          <a:xfrm>
-            <a:off x="1872820" y="2957905"/>
-            <a:ext cx="883212" cy="883212"/>
-          </a:xfrm>
-          <a:prstGeom prst="ellipse">
-            <a:avLst/>
-          </a:prstGeom>
-          <a:solidFill>
-            <a:srgbClr val="0077FF"/>
-          </a:solidFill>
-          <a:ln>
-            <a:noFill/>
-          </a:ln>
-        </p:spPr>
-        <p:style>
-          <a:lnRef idx="1">
-            <a:schemeClr val="accent1"/>
-          </a:lnRef>
-          <a:fillRef idx="3">
-            <a:schemeClr val="accent1"/>
-          </a:fillRef>
-          <a:effectRef idx="2">
-            <a:schemeClr val="accent1"/>
-          </a:effectRef>
-          <a:fontRef idx="minor">
-            <a:schemeClr val="lt1"/>
-          </a:fontRef>
-        </p:style>
-        <p:txBody>
-          <a:bodyPr rtlCol="0" anchor="ctr"/>
-          <a:lstStyle/>
-          <a:p>
-            <a:pPr algn="ctr"/>
-          </a:p>
-        </p:txBody>
-      </p:sp>
-      <p:sp>
-        <p:nvSpPr>
-          <p:cNvPr id="5" name="TextBox 4"/>
+          <p:cNvPr id="885" name="title"/>
           <p:cNvSpPr txBox="1"/>
           <p:nvPr/>
         </p:nvSpPr>
         <p:spPr>
           <a:xfrm>
-            <a:off x="429280" y="1492575"/>
-            <a:ext cx="5655442" cy="1525549"/>
+            <a:off x="427817" y="424715"/>
+            <a:ext cx="11312347" cy="1018540"/>
           </a:xfrm>
           <a:prstGeom prst="rect">
             <a:avLst/>
@@ -8682,13 +12654,16 @@
           <a:noFill/>
         </p:spPr>
         <p:txBody>
-          <a:bodyPr wrap="square" lIns="12700" rIns="12700" tIns="12700" bIns="12700">
+          <a:bodyPr wrap="square" lIns="76200" rIns="76200" tIns="50800" bIns="50800">
             <a:spAutoFit/>
           </a:bodyPr>
           <a:lstStyle/>
           <a:p>
-            <a:pPr algn="ctr">
-              <a:defRPr sz="1400" b="0">
+            <a:pPr algn="l">
+              <a:spcAft>
+                <a:spcPts val="300"/>
+              </a:spcAft>
+              <a:defRPr sz="5400">
                 <a:solidFill>
                   <a:srgbClr val="FFFFFF"/>
                 </a:solidFill>
@@ -8698,7 +12673,7 @@
               </a:defRPr>
             </a:pPr>
             <a:r>
-              <a:rPr sz="1400" b="0">
+              <a:rPr sz="5400">
                 <a:solidFill>
                   <a:srgbClr val="FFFFFF"/>
                 </a:solidFill>
@@ -8706,64 +12681,21 @@
                 <a:ea typeface="Play"/>
                 <a:cs typeface="Play"/>
               </a:rPr>
-              <a:t>Третий квартал 2026: подключение 4 команд</a:t>
+              <a:t>Что мы просим решить</a:t>
             </a:r>
           </a:p>
         </p:txBody>
       </p:sp>
       <p:sp>
         <p:nvSpPr>
-          <p:cNvPr id="6" name="Oval 5"/>
-          <p:cNvSpPr/>
-          <p:nvPr/>
-        </p:nvSpPr>
-        <p:spPr>
-          <a:xfrm>
-            <a:off x="5643115" y="2957905"/>
-            <a:ext cx="883212" cy="883212"/>
-          </a:xfrm>
-          <a:prstGeom prst="ellipse">
-            <a:avLst/>
-          </a:prstGeom>
-          <a:solidFill>
-            <a:srgbClr val="0077FF"/>
-          </a:solidFill>
-          <a:ln>
-            <a:noFill/>
-          </a:ln>
-        </p:spPr>
-        <p:style>
-          <a:lnRef idx="1">
-            <a:schemeClr val="accent1"/>
-          </a:lnRef>
-          <a:fillRef idx="3">
-            <a:schemeClr val="accent1"/>
-          </a:fillRef>
-          <a:effectRef idx="2">
-            <a:schemeClr val="accent1"/>
-          </a:effectRef>
-          <a:fontRef idx="minor">
-            <a:schemeClr val="lt1"/>
-          </a:fontRef>
-        </p:style>
-        <p:txBody>
-          <a:bodyPr rtlCol="0" anchor="ctr"/>
-          <a:lstStyle/>
-          <a:p>
-            <a:pPr algn="ctr"/>
-          </a:p>
-        </p:txBody>
-      </p:sp>
-      <p:sp>
-        <p:nvSpPr>
-          <p:cNvPr id="7" name="TextBox 6"/>
+          <p:cNvPr id="886" name="lead"/>
           <p:cNvSpPr txBox="1"/>
           <p:nvPr/>
         </p:nvSpPr>
         <p:spPr>
           <a:xfrm>
-            <a:off x="3257001" y="4222505"/>
-            <a:ext cx="5655442" cy="1525549"/>
+            <a:off x="427817" y="1783080"/>
+            <a:ext cx="11312347" cy="1412448"/>
           </a:xfrm>
           <a:prstGeom prst="rect">
             <a:avLst/>
@@ -8771,13 +12703,16 @@
           <a:noFill/>
         </p:spPr>
         <p:txBody>
-          <a:bodyPr wrap="square" lIns="12700" rIns="12700" tIns="12700" bIns="12700">
+          <a:bodyPr wrap="square" lIns="76200" rIns="76200" tIns="50800" bIns="50800">
             <a:spAutoFit/>
           </a:bodyPr>
           <a:lstStyle/>
           <a:p>
             <a:pPr algn="ctr">
-              <a:defRPr sz="1400" b="0">
+              <a:spcAft>
+                <a:spcPts val="300"/>
+              </a:spcAft>
+              <a:defRPr sz="3200" b="1">
                 <a:solidFill>
                   <a:srgbClr val="FFFFFF"/>
                 </a:solidFill>
@@ -8787,7 +12722,7 @@
               </a:defRPr>
             </a:pPr>
             <a:r>
-              <a:rPr sz="1400" b="0">
+              <a:rPr sz="3200" b="1">
                 <a:solidFill>
                   <a:srgbClr val="FFFFFF"/>
                 </a:solidFill>
@@ -8795,64 +12730,21 @@
                 <a:ea typeface="Play"/>
                 <a:cs typeface="Play"/>
               </a:rPr>
-              <a:t>Четвёртый квартал 2026: доступ для всей компании</a:t>
+              <a:t>Попросим решение о запуске на всю компанию</a:t>
             </a:r>
           </a:p>
         </p:txBody>
       </p:sp>
       <p:sp>
         <p:nvSpPr>
-          <p:cNvPr id="8" name="Oval 7"/>
-          <p:cNvSpPr/>
-          <p:nvPr/>
-        </p:nvSpPr>
-        <p:spPr>
-          <a:xfrm>
-            <a:off x="9413410" y="2957905"/>
-            <a:ext cx="883212" cy="883212"/>
-          </a:xfrm>
-          <a:prstGeom prst="ellipse">
-            <a:avLst/>
-          </a:prstGeom>
-          <a:solidFill>
-            <a:srgbClr val="0077FF"/>
-          </a:solidFill>
-          <a:ln>
-            <a:noFill/>
-          </a:ln>
-        </p:spPr>
-        <p:style>
-          <a:lnRef idx="1">
-            <a:schemeClr val="accent1"/>
-          </a:lnRef>
-          <a:fillRef idx="3">
-            <a:schemeClr val="accent1"/>
-          </a:fillRef>
-          <a:effectRef idx="2">
-            <a:schemeClr val="accent1"/>
-          </a:effectRef>
-          <a:fontRef idx="minor">
-            <a:schemeClr val="lt1"/>
-          </a:fontRef>
-        </p:style>
-        <p:txBody>
-          <a:bodyPr rtlCol="0" anchor="ctr"/>
-          <a:lstStyle/>
-          <a:p>
-            <a:pPr algn="ctr"/>
-          </a:p>
-        </p:txBody>
-      </p:sp>
-      <p:sp>
-        <p:nvSpPr>
-          <p:cNvPr id="9" name="TextBox 8"/>
+          <p:cNvPr id="887" name="body"/>
           <p:cNvSpPr txBox="1"/>
           <p:nvPr/>
         </p:nvSpPr>
         <p:spPr>
           <a:xfrm>
-            <a:off x="6084722" y="1492575"/>
-            <a:ext cx="5655442" cy="1525549"/>
+            <a:off x="427817" y="3358503"/>
+            <a:ext cx="11312347" cy="1140824"/>
           </a:xfrm>
           <a:prstGeom prst="rect">
             <a:avLst/>
@@ -8860,13 +12752,16 @@
           <a:noFill/>
         </p:spPr>
         <p:txBody>
-          <a:bodyPr wrap="square" lIns="12700" rIns="12700" tIns="12700" bIns="12700">
+          <a:bodyPr wrap="square" lIns="76200" rIns="76200" tIns="50800" bIns="50800">
             <a:spAutoFit/>
           </a:bodyPr>
           <a:lstStyle/>
           <a:p>
-            <a:pPr algn="ctr">
-              <a:defRPr sz="1400" b="0">
+            <a:pPr algn="l">
+              <a:spcAft>
+                <a:spcPts val="300"/>
+              </a:spcAft>
+              <a:defRPr sz="2800" b="1">
                 <a:solidFill>
                   <a:srgbClr val="FFFFFF"/>
                 </a:solidFill>
@@ -8876,7 +12771,7 @@
               </a:defRPr>
             </a:pPr>
             <a:r>
-              <a:rPr sz="1400" b="0">
+              <a:rPr sz="2800" b="1">
                 <a:solidFill>
                   <a:srgbClr val="FFFFFF"/>
                 </a:solidFill>
@@ -8884,7 +12779,33 @@
                 <a:ea typeface="Play"/>
                 <a:cs typeface="Play"/>
               </a:rPr>
-              <a:t>Первый квартал 2027: генерация иллюстраций</a:t>
+              <a:t>• Ожидаем одобрения руководства</a:t>
+            </a:r>
+          </a:p>
+          <a:p>
+            <a:pPr algn="l">
+              <a:spcAft>
+                <a:spcPts val="300"/>
+              </a:spcAft>
+              <a:defRPr sz="2800" b="1">
+                <a:solidFill>
+                  <a:srgbClr val="FFFFFF"/>
+                </a:solidFill>
+                <a:latin typeface="Play"/>
+                <a:ea typeface="Play"/>
+                <a:cs typeface="Play"/>
+              </a:defRPr>
+            </a:pPr>
+            <a:r>
+              <a:rPr sz="2800" b="1">
+                <a:solidFill>
+                  <a:srgbClr val="FFFFFF"/>
+                </a:solidFill>
+                <a:latin typeface="Play"/>
+                <a:ea typeface="Play"/>
+                <a:cs typeface="Play"/>
+              </a:rPr>
+              <a:t>• Готовы к масштабированию</a:t>
             </a:r>
           </a:p>
         </p:txBody>

--- a/samples/VK_WorkSpace_Клиентская_конференция_Шабл__focus.pptx
+++ b/samples/VK_WorkSpace_Клиентская_конференция_Шабл__focus.pptx
@@ -304,7 +304,7 @@
               <c:strCache>
                 <c:ptCount val="1"/>
                 <c:pt idx="0">
-                  <c:v>Текущее</c:v>
+                  <c:v>Время</c:v>
                 </c:pt>
               </c:strCache>
             </c:strRef>
@@ -321,35 +321,29 @@
           </c:spPr>
           <c:cat>
             <c:strRef>
-              <c:f>Sheet1!$A$2:$A$4</c:f>
+              <c:f>Sheet1!$A$2:$A$3</c:f>
               <c:strCache>
-                <c:ptCount val="3"/>
+                <c:ptCount val="2"/>
                 <c:pt idx="0">
                   <c:v>Сборка</c:v>
                 </c:pt>
                 <c:pt idx="1">
                   <c:v>Правки</c:v>
                 </c:pt>
-                <c:pt idx="2">
-                  <c:v>Ожидание</c:v>
-                </c:pt>
               </c:strCache>
             </c:strRef>
           </c:cat>
           <c:val>
             <c:numRef>
-              <c:f>Sheet1!$B$2:$B$4</c:f>
+              <c:f>Sheet1!$B$2:$B$3</c:f>
               <c:numCache>
                 <c:formatCode>General</c:formatCode>
-                <c:ptCount val="3"/>
+                <c:ptCount val="2"/>
                 <c:pt idx="0">
                   <c:v>186.0</c:v>
                 </c:pt>
                 <c:pt idx="1">
                   <c:v>74.0</c:v>
-                </c:pt>
-                <c:pt idx="2">
-                  <c:v>6.0</c:v>
                 </c:pt>
               </c:numCache>
             </c:numRef>
@@ -450,7 +444,7 @@
                   </a:defRPr>
                 </a:pPr>
                 <a:r>
-                  <a:t>Текущее, мин</a:t>
+                  <a:t>Время, мин</a:t>
                 </a:r>
               </a:p>
             </c:rich>
@@ -524,7 +518,7 @@
               <c:strCache>
                 <c:ptCount val="1"/>
                 <c:pt idx="0">
-                  <c:v>До</c:v>
+                  <c:v>Текущее</c:v>
                 </c:pt>
               </c:strCache>
             </c:strRef>
@@ -541,41 +535,29 @@
           </c:spPr>
           <c:cat>
             <c:strRef>
-              <c:f>Sheet1!$A$2:$A$5</c:f>
+              <c:f>Sheet1!$A$2:$A$3</c:f>
               <c:strCache>
-                <c:ptCount val="4"/>
+                <c:ptCount val="2"/>
                 <c:pt idx="0">
-                  <c:v>Время сборки</c:v>
+                  <c:v>Сборка</c:v>
                 </c:pt>
                 <c:pt idx="1">
-                  <c:v>Время до первой версии</c:v>
-                </c:pt>
-                <c:pt idx="2">
-                  <c:v>Нарушения стиля</c:v>
-                </c:pt>
-                <c:pt idx="3">
-                  <c:v>Запросы закрыты</c:v>
+                  <c:v>Первая версия</c:v>
                 </c:pt>
               </c:strCache>
             </c:strRef>
           </c:cat>
           <c:val>
             <c:numRef>
-              <c:f>Sheet1!$B$2:$B$5</c:f>
+              <c:f>Sheet1!$B$2:$B$3</c:f>
               <c:numCache>
                 <c:formatCode>General</c:formatCode>
-                <c:ptCount val="4"/>
+                <c:ptCount val="2"/>
                 <c:pt idx="0">
                   <c:v>186.0</c:v>
                 </c:pt>
                 <c:pt idx="1">
                   <c:v>6.0</c:v>
-                </c:pt>
-                <c:pt idx="2">
-                  <c:v>19.0</c:v>
-                </c:pt>
-                <c:pt idx="3">
-                  <c:v>11.0</c:v>
                 </c:pt>
               </c:numCache>
             </c:numRef>
@@ -590,7 +572,7 @@
               <c:strCache>
                 <c:ptCount val="1"/>
                 <c:pt idx="0">
-                  <c:v>После</c:v>
+                  <c:v>Пилот</c:v>
                 </c:pt>
               </c:strCache>
             </c:strRef>
@@ -607,48 +589,36 @@
           </c:spPr>
           <c:cat>
             <c:strRef>
-              <c:f>Sheet1!$A$2:$A$5</c:f>
+              <c:f>Sheet1!$A$2:$A$3</c:f>
               <c:strCache>
-                <c:ptCount val="4"/>
+                <c:ptCount val="2"/>
                 <c:pt idx="0">
-                  <c:v>Время сборки</c:v>
+                  <c:v>Сборка</c:v>
                 </c:pt>
                 <c:pt idx="1">
-                  <c:v>Время до первой версии</c:v>
-                </c:pt>
-                <c:pt idx="2">
-                  <c:v>Нарушения стиля</c:v>
-                </c:pt>
-                <c:pt idx="3">
-                  <c:v>Запросы закрыты</c:v>
+                  <c:v>Первая версия</c:v>
                 </c:pt>
               </c:strCache>
             </c:strRef>
           </c:cat>
           <c:val>
             <c:numRef>
-              <c:f>Sheet1!$C$2:$C$5</c:f>
+              <c:f>Sheet1!$C$2:$C$3</c:f>
               <c:numCache>
                 <c:formatCode>General</c:formatCode>
-                <c:ptCount val="4"/>
+                <c:ptCount val="2"/>
                 <c:pt idx="0">
                   <c:v>4.0</c:v>
                 </c:pt>
                 <c:pt idx="1">
                   <c:v>1.0</c:v>
                 </c:pt>
-                <c:pt idx="2">
-                  <c:v>2.0</c:v>
-                </c:pt>
-                <c:pt idx="3">
-                  <c:v>38.0</c:v>
-                </c:pt>
               </c:numCache>
             </c:numRef>
           </c:val>
         </c:ser>
         <c:dLbls>
-          <c:numFmt formatCode="0" sourceLinked="0"/>
+          <c:numFmt formatCode="0&quot; мин&quot;" sourceLinked="0"/>
           <c:txPr>
             <a:bodyPr wrap="none"/>
             <a:lstStyle/>
@@ -725,6 +695,31 @@
             </a:ln>
           </c:spPr>
         </c:majorGridlines>
+        <c:title>
+          <c:tx>
+            <c:rich>
+              <a:bodyPr rot="0" vert="horz"/>
+              <a:lstStyle/>
+              <a:p>
+                <a:pPr>
+                  <a:defRPr sz="1100" b="0">
+                    <a:solidFill>
+                      <a:srgbClr val="FFFFFF"/>
+                    </a:solidFill>
+                    <a:latin typeface="Play"/>
+                    <a:ea typeface="Play"/>
+                    <a:cs typeface="Play"/>
+                  </a:defRPr>
+                </a:pPr>
+                <a:r>
+                  <a:t>мин</a:t>
+                </a:r>
+              </a:p>
+            </c:rich>
+          </c:tx>
+          <c:layout/>
+          <c:overlay val="0"/>
+        </c:title>
         <c:majorTickMark val="out"/>
         <c:minorTickMark val="none"/>
         <c:tickLblPos val="nextTo"/>
@@ -752,6 +747,220 @@
       <c:legendPos val="b"/>
       <c:overlay val="0"/>
     </c:legend>
+    <c:dispBlanksAs val="gap"/>
+  </c:chart>
+  <c:txPr>
+    <a:bodyPr/>
+    <a:lstStyle/>
+    <a:p>
+      <a:pPr>
+        <a:defRPr sz="1200" b="0">
+          <a:solidFill>
+            <a:srgbClr val="FFFFFF"/>
+          </a:solidFill>
+          <a:latin typeface="Play"/>
+          <a:ea typeface="Play"/>
+          <a:cs typeface="Play"/>
+        </a:defRPr>
+      </a:pPr>
+      <a:endParaRPr lang="en-US"/>
+    </a:p>
+  </c:txPr>
+  <c:externalData r:id="rId1">
+    <c:autoUpdate val="0"/>
+  </c:externalData>
+</c:chartSpace>
+</file>
+
+<file path=ppt/charts/chart3.xml><?xml version="1.0" encoding="utf-8"?>
+<c:chartSpace xmlns:c="http://schemas.openxmlformats.org/drawingml/2006/chart" xmlns:a="http://schemas.openxmlformats.org/drawingml/2006/main" xmlns:r="http://schemas.openxmlformats.org/officeDocument/2006/relationships">
+  <c:date1904 val="0"/>
+  <c:chart>
+    <c:autoTitleDeleted val="1"/>
+    <c:plotArea>
+      <c:barChart>
+        <c:barDir val="col"/>
+        <c:grouping val="clustered"/>
+        <c:ser>
+          <c:idx val="0"/>
+          <c:order val="0"/>
+          <c:tx>
+            <c:strRef>
+              <c:f>Sheet1!$B$1</c:f>
+              <c:strCache>
+                <c:ptCount val="1"/>
+                <c:pt idx="0">
+                  <c:v>Запросы</c:v>
+                </c:pt>
+              </c:strCache>
+            </c:strRef>
+          </c:tx>
+          <c:spPr>
+            <a:solidFill>
+              <a:srgbClr val="0077FF"/>
+            </a:solidFill>
+            <a:ln>
+              <a:solidFill>
+                <a:srgbClr val="0077FF"/>
+              </a:solidFill>
+            </a:ln>
+          </c:spPr>
+          <c:cat>
+            <c:strRef>
+              <c:f>Sheet1!$A$2:$A$3</c:f>
+              <c:strCache>
+                <c:ptCount val="2"/>
+                <c:pt idx="0">
+                  <c:v>Текущая</c:v>
+                </c:pt>
+                <c:pt idx="1">
+                  <c:v>Пилот</c:v>
+                </c:pt>
+              </c:strCache>
+            </c:strRef>
+          </c:cat>
+          <c:val>
+            <c:numRef>
+              <c:f>Sheet1!$B$2:$B$3</c:f>
+              <c:numCache>
+                <c:formatCode>General</c:formatCode>
+                <c:ptCount val="2"/>
+                <c:pt idx="0">
+                  <c:v>11.0</c:v>
+                </c:pt>
+                <c:pt idx="1">
+                  <c:v>38.0</c:v>
+                </c:pt>
+              </c:numCache>
+            </c:numRef>
+          </c:val>
+        </c:ser>
+        <c:dLbls>
+          <c:numFmt formatCode="0&quot; запросов&quot;" sourceLinked="0"/>
+          <c:txPr>
+            <a:bodyPr wrap="none"/>
+            <a:lstStyle/>
+            <a:p>
+              <a:pPr>
+                <a:defRPr sz="1100" b="0">
+                  <a:solidFill>
+                    <a:srgbClr val="FFFFFF"/>
+                  </a:solidFill>
+                  <a:latin typeface="Play"/>
+                  <a:ea typeface="Play"/>
+                  <a:cs typeface="Play"/>
+                </a:defRPr>
+              </a:pPr>
+            </a:p>
+          </c:txPr>
+          <c:dLblPos val="outEnd"/>
+          <c:showLegendKey val="0"/>
+          <c:showVal val="1"/>
+          <c:showCatName val="0"/>
+          <c:showSerName val="0"/>
+          <c:showPercent val="0"/>
+          <c:showBubbleSize val="0"/>
+          <c:showLeaderLines val="1"/>
+        </c:dLbls>
+        <c:gapWidth val="60"/>
+        <c:axId val="-2068027336"/>
+        <c:axId val="-2113994440"/>
+      </c:barChart>
+      <c:catAx>
+        <c:axId val="-2068027336"/>
+        <c:scaling>
+          <c:orientation val="minMax"/>
+        </c:scaling>
+        <c:delete val="0"/>
+        <c:axPos val="b"/>
+        <c:majorTickMark val="out"/>
+        <c:minorTickMark val="none"/>
+        <c:tickLblPos val="nextTo"/>
+        <c:txPr>
+          <a:bodyPr/>
+          <a:lstStyle/>
+          <a:p>
+            <a:pPr>
+              <a:defRPr sz="1100" b="0">
+                <a:solidFill>
+                  <a:srgbClr val="FFFFFF"/>
+                </a:solidFill>
+                <a:latin typeface="Play"/>
+                <a:ea typeface="Play"/>
+                <a:cs typeface="Play"/>
+              </a:defRPr>
+            </a:pPr>
+          </a:p>
+        </c:txPr>
+        <c:crossAx val="-2113994440"/>
+        <c:crosses val="autoZero"/>
+        <c:auto val="1"/>
+        <c:lblAlgn val="ctr"/>
+        <c:lblOffset val="100"/>
+        <c:noMultiLvlLbl val="0"/>
+      </c:catAx>
+      <c:valAx>
+        <c:axId val="-2113994440"/>
+        <c:scaling/>
+        <c:delete val="0"/>
+        <c:axPos val="l"/>
+        <c:majorGridlines>
+          <c:spPr>
+            <a:ln w="9525">
+              <a:solidFill>
+                <a:srgbClr val="3C3C3C"/>
+              </a:solidFill>
+            </a:ln>
+          </c:spPr>
+        </c:majorGridlines>
+        <c:title>
+          <c:tx>
+            <c:rich>
+              <a:bodyPr rot="0" vert="horz"/>
+              <a:lstStyle/>
+              <a:p>
+                <a:pPr>
+                  <a:defRPr sz="1100" b="0">
+                    <a:solidFill>
+                      <a:srgbClr val="FFFFFF"/>
+                    </a:solidFill>
+                    <a:latin typeface="Play"/>
+                    <a:ea typeface="Play"/>
+                    <a:cs typeface="Play"/>
+                  </a:defRPr>
+                </a:pPr>
+                <a:r>
+                  <a:t>Запросы, запросов</a:t>
+                </a:r>
+              </a:p>
+            </c:rich>
+          </c:tx>
+          <c:layout/>
+          <c:overlay val="0"/>
+        </c:title>
+        <c:majorTickMark val="out"/>
+        <c:minorTickMark val="none"/>
+        <c:tickLblPos val="nextTo"/>
+        <c:txPr>
+          <a:bodyPr/>
+          <a:lstStyle/>
+          <a:p>
+            <a:pPr>
+              <a:defRPr sz="1100" b="0">
+                <a:solidFill>
+                  <a:srgbClr val="FFFFFF"/>
+                </a:solidFill>
+                <a:latin typeface="Play"/>
+                <a:ea typeface="Play"/>
+                <a:cs typeface="Play"/>
+              </a:defRPr>
+            </a:pPr>
+          </a:p>
+        </c:txPr>
+        <c:crossAx val="-2068027336"/>
+        <c:crosses val="autoZero"/>
+      </c:valAx>
+    </c:plotArea>
     <c:dispBlanksAs val="gap"/>
   </c:chart>
   <c:txPr>
@@ -6990,799 +7199,6 @@
 </p:sldLayout>
 </file>
 
-<file path=ppt/slideLayouts/slideLayout9.xml><?xml version="1.0" encoding="utf-8"?>
-<p:sldLayout xmlns:a="http://schemas.openxmlformats.org/drawingml/2006/main" xmlns:r="http://schemas.openxmlformats.org/officeDocument/2006/relationships" xmlns:mc="http://schemas.openxmlformats.org/markup-compatibility/2006" xmlns:mv="urn:schemas-microsoft-com:mac:vml" xmlns:p="http://schemas.openxmlformats.org/presentationml/2006/main" xmlns:c="http://schemas.openxmlformats.org/drawingml/2006/chart" xmlns:dgm="http://schemas.openxmlformats.org/drawingml/2006/diagram" xmlns:o="urn:schemas-microsoft-com:office:office" xmlns:v="urn:schemas-microsoft-com:vml" xmlns:pvml="urn:schemas-microsoft-com:office:powerpoint" xmlns:com="http://schemas.openxmlformats.org/drawingml/2006/compatibility" xmlns:p14="http://schemas.microsoft.com/office/powerpoint/2010/main" xmlns:p15="http://schemas.microsoft.com/office/powerpoint/2012/main" xmlns:ahyp="http://schemas.microsoft.com/office/drawing/2018/hyperlinkcolor" matchingName="14_Титульный слайд">
-  <p:cSld name="14_Титульный слайд">
-    <p:bg>
-      <p:bgPr>
-        <a:solidFill>
-          <a:schemeClr val="dk1"/>
-        </a:solidFill>
-      </p:bgPr>
-    </p:bg>
-    <p:spTree>
-      <p:nvGrpSpPr>
-        <p:cNvPr id="234" name="Shape 234"/>
-        <p:cNvGrpSpPr/>
-        <p:nvPr/>
-      </p:nvGrpSpPr>
-      <p:grpSpPr>
-        <a:xfrm>
-          <a:off x="0" y="0"/>
-          <a:ext cx="0" cy="0"/>
-          <a:chOff x="0" y="0"/>
-          <a:chExt cx="0" cy="0"/>
-        </a:xfrm>
-      </p:grpSpPr>
-      <p:pic>
-        <p:nvPicPr>
-          <p:cNvPr descr=" " id="235" name="Google Shape;235;p10"/>
-          <p:cNvPicPr preferRelativeResize="0"/>
-          <p:nvPr/>
-        </p:nvPicPr>
-        <p:blipFill rotWithShape="1">
-          <a:blip r:embed="rId2">
-            <a:alphaModFix/>
-          </a:blip>
-          <a:srcRect b="0" l="0" r="0" t="0"/>
-          <a:stretch/>
-        </p:blipFill>
-        <p:spPr>
-          <a:xfrm>
-            <a:off x="6096000" y="5844358"/>
-            <a:ext cx="6096000" cy="1013642"/>
-          </a:xfrm>
-          <a:prstGeom prst="rect">
-            <a:avLst/>
-          </a:prstGeom>
-          <a:noFill/>
-          <a:ln>
-            <a:noFill/>
-          </a:ln>
-        </p:spPr>
-      </p:pic>
-      <p:grpSp>
-        <p:nvGrpSpPr>
-          <p:cNvPr id="236" name="Google Shape;236;p10"/>
-          <p:cNvGrpSpPr/>
-          <p:nvPr/>
-        </p:nvGrpSpPr>
-        <p:grpSpPr>
-          <a:xfrm>
-            <a:off x="224842" y="-74145"/>
-            <a:ext cx="12188171" cy="64326"/>
-            <a:chOff x="-2" y="-2"/>
-            <a:chExt cx="12188169" cy="64324"/>
-          </a:xfrm>
-        </p:grpSpPr>
-        <p:cxnSp>
-          <p:nvCxnSpPr>
-            <p:cNvPr id="237" name="Google Shape;237;p10"/>
-            <p:cNvCxnSpPr/>
-            <p:nvPr/>
-          </p:nvCxnSpPr>
-          <p:spPr>
-            <a:xfrm flipH="1">
-              <a:off x="-2" y="-2"/>
-              <a:ext cx="7" cy="64324"/>
-            </a:xfrm>
-            <a:prstGeom prst="straightConnector1">
-              <a:avLst/>
-            </a:prstGeom>
-            <a:noFill/>
-            <a:ln cap="flat" cmpd="sng" w="9525">
-              <a:solidFill>
-                <a:srgbClr val="808080"/>
-              </a:solidFill>
-              <a:prstDash val="solid"/>
-              <a:miter lim="8000"/>
-              <a:headEnd len="sm" w="sm" type="none"/>
-              <a:tailEnd len="sm" w="sm" type="none"/>
-            </a:ln>
-          </p:spPr>
-        </p:cxnSp>
-        <p:cxnSp>
-          <p:nvCxnSpPr>
-            <p:cNvPr id="238" name="Google Shape;238;p10"/>
-            <p:cNvCxnSpPr/>
-            <p:nvPr/>
-          </p:nvCxnSpPr>
-          <p:spPr>
-            <a:xfrm>
-              <a:off x="677118" y="-2"/>
-              <a:ext cx="7" cy="64324"/>
-            </a:xfrm>
-            <a:prstGeom prst="straightConnector1">
-              <a:avLst/>
-            </a:prstGeom>
-            <a:noFill/>
-            <a:ln cap="flat" cmpd="sng" w="9525">
-              <a:solidFill>
-                <a:srgbClr val="808080"/>
-              </a:solidFill>
-              <a:prstDash val="solid"/>
-              <a:miter lim="8000"/>
-              <a:headEnd len="sm" w="sm" type="none"/>
-              <a:tailEnd len="sm" w="sm" type="none"/>
-            </a:ln>
-          </p:spPr>
-        </p:cxnSp>
-        <p:cxnSp>
-          <p:nvCxnSpPr>
-            <p:cNvPr id="239" name="Google Shape;239;p10"/>
-            <p:cNvCxnSpPr/>
-            <p:nvPr/>
-          </p:nvCxnSpPr>
-          <p:spPr>
-            <a:xfrm>
-              <a:off x="1354241" y="-2"/>
-              <a:ext cx="7" cy="64324"/>
-            </a:xfrm>
-            <a:prstGeom prst="straightConnector1">
-              <a:avLst/>
-            </a:prstGeom>
-            <a:noFill/>
-            <a:ln cap="flat" cmpd="sng" w="9525">
-              <a:solidFill>
-                <a:srgbClr val="808080"/>
-              </a:solidFill>
-              <a:prstDash val="solid"/>
-              <a:miter lim="8000"/>
-              <a:headEnd len="sm" w="sm" type="none"/>
-              <a:tailEnd len="sm" w="sm" type="none"/>
-            </a:ln>
-          </p:spPr>
-        </p:cxnSp>
-        <p:cxnSp>
-          <p:nvCxnSpPr>
-            <p:cNvPr id="240" name="Google Shape;240;p10"/>
-            <p:cNvCxnSpPr/>
-            <p:nvPr/>
-          </p:nvCxnSpPr>
-          <p:spPr>
-            <a:xfrm>
-              <a:off x="2031360" y="-2"/>
-              <a:ext cx="7" cy="64324"/>
-            </a:xfrm>
-            <a:prstGeom prst="straightConnector1">
-              <a:avLst/>
-            </a:prstGeom>
-            <a:noFill/>
-            <a:ln cap="flat" cmpd="sng" w="9525">
-              <a:solidFill>
-                <a:srgbClr val="808080"/>
-              </a:solidFill>
-              <a:prstDash val="solid"/>
-              <a:miter lim="8000"/>
-              <a:headEnd len="sm" w="sm" type="none"/>
-              <a:tailEnd len="sm" w="sm" type="none"/>
-            </a:ln>
-          </p:spPr>
-        </p:cxnSp>
-        <p:cxnSp>
-          <p:nvCxnSpPr>
-            <p:cNvPr id="241" name="Google Shape;241;p10"/>
-            <p:cNvCxnSpPr/>
-            <p:nvPr/>
-          </p:nvCxnSpPr>
-          <p:spPr>
-            <a:xfrm>
-              <a:off x="2708479" y="-2"/>
-              <a:ext cx="7" cy="64324"/>
-            </a:xfrm>
-            <a:prstGeom prst="straightConnector1">
-              <a:avLst/>
-            </a:prstGeom>
-            <a:noFill/>
-            <a:ln cap="flat" cmpd="sng" w="9525">
-              <a:solidFill>
-                <a:srgbClr val="808080"/>
-              </a:solidFill>
-              <a:prstDash val="solid"/>
-              <a:miter lim="8000"/>
-              <a:headEnd len="sm" w="sm" type="none"/>
-              <a:tailEnd len="sm" w="sm" type="none"/>
-            </a:ln>
-          </p:spPr>
-        </p:cxnSp>
-        <p:cxnSp>
-          <p:nvCxnSpPr>
-            <p:cNvPr id="242" name="Google Shape;242;p10"/>
-            <p:cNvCxnSpPr/>
-            <p:nvPr/>
-          </p:nvCxnSpPr>
-          <p:spPr>
-            <a:xfrm>
-              <a:off x="3385598" y="-2"/>
-              <a:ext cx="7" cy="64324"/>
-            </a:xfrm>
-            <a:prstGeom prst="straightConnector1">
-              <a:avLst/>
-            </a:prstGeom>
-            <a:noFill/>
-            <a:ln cap="flat" cmpd="sng" w="9525">
-              <a:solidFill>
-                <a:srgbClr val="808080"/>
-              </a:solidFill>
-              <a:prstDash val="solid"/>
-              <a:miter lim="8000"/>
-              <a:headEnd len="sm" w="sm" type="none"/>
-              <a:tailEnd len="sm" w="sm" type="none"/>
-            </a:ln>
-          </p:spPr>
-        </p:cxnSp>
-        <p:cxnSp>
-          <p:nvCxnSpPr>
-            <p:cNvPr id="243" name="Google Shape;243;p10"/>
-            <p:cNvCxnSpPr/>
-            <p:nvPr/>
-          </p:nvCxnSpPr>
-          <p:spPr>
-            <a:xfrm>
-              <a:off x="4062717" y="-2"/>
-              <a:ext cx="7" cy="64324"/>
-            </a:xfrm>
-            <a:prstGeom prst="straightConnector1">
-              <a:avLst/>
-            </a:prstGeom>
-            <a:noFill/>
-            <a:ln cap="flat" cmpd="sng" w="9525">
-              <a:solidFill>
-                <a:srgbClr val="808080"/>
-              </a:solidFill>
-              <a:prstDash val="solid"/>
-              <a:miter lim="8000"/>
-              <a:headEnd len="sm" w="sm" type="none"/>
-              <a:tailEnd len="sm" w="sm" type="none"/>
-            </a:ln>
-          </p:spPr>
-        </p:cxnSp>
-        <p:cxnSp>
-          <p:nvCxnSpPr>
-            <p:cNvPr id="244" name="Google Shape;244;p10"/>
-            <p:cNvCxnSpPr/>
-            <p:nvPr/>
-          </p:nvCxnSpPr>
-          <p:spPr>
-            <a:xfrm>
-              <a:off x="4739836" y="-2"/>
-              <a:ext cx="7" cy="64324"/>
-            </a:xfrm>
-            <a:prstGeom prst="straightConnector1">
-              <a:avLst/>
-            </a:prstGeom>
-            <a:noFill/>
-            <a:ln cap="flat" cmpd="sng" w="9525">
-              <a:solidFill>
-                <a:srgbClr val="808080"/>
-              </a:solidFill>
-              <a:prstDash val="solid"/>
-              <a:miter lim="8000"/>
-              <a:headEnd len="sm" w="sm" type="none"/>
-              <a:tailEnd len="sm" w="sm" type="none"/>
-            </a:ln>
-          </p:spPr>
-        </p:cxnSp>
-        <p:cxnSp>
-          <p:nvCxnSpPr>
-            <p:cNvPr id="245" name="Google Shape;245;p10"/>
-            <p:cNvCxnSpPr/>
-            <p:nvPr/>
-          </p:nvCxnSpPr>
-          <p:spPr>
-            <a:xfrm>
-              <a:off x="5416955" y="-2"/>
-              <a:ext cx="7" cy="64324"/>
-            </a:xfrm>
-            <a:prstGeom prst="straightConnector1">
-              <a:avLst/>
-            </a:prstGeom>
-            <a:noFill/>
-            <a:ln cap="flat" cmpd="sng" w="9525">
-              <a:solidFill>
-                <a:srgbClr val="808080"/>
-              </a:solidFill>
-              <a:prstDash val="solid"/>
-              <a:miter lim="8000"/>
-              <a:headEnd len="sm" w="sm" type="none"/>
-              <a:tailEnd len="sm" w="sm" type="none"/>
-            </a:ln>
-          </p:spPr>
-        </p:cxnSp>
-        <p:cxnSp>
-          <p:nvCxnSpPr>
-            <p:cNvPr id="246" name="Google Shape;246;p10"/>
-            <p:cNvCxnSpPr/>
-            <p:nvPr/>
-          </p:nvCxnSpPr>
-          <p:spPr>
-            <a:xfrm>
-              <a:off x="6094077" y="-2"/>
-              <a:ext cx="7" cy="64324"/>
-            </a:xfrm>
-            <a:prstGeom prst="straightConnector1">
-              <a:avLst/>
-            </a:prstGeom>
-            <a:noFill/>
-            <a:ln cap="flat" cmpd="sng" w="9525">
-              <a:solidFill>
-                <a:srgbClr val="808080"/>
-              </a:solidFill>
-              <a:prstDash val="solid"/>
-              <a:miter lim="8000"/>
-              <a:headEnd len="sm" w="sm" type="none"/>
-              <a:tailEnd len="sm" w="sm" type="none"/>
-            </a:ln>
-          </p:spPr>
-        </p:cxnSp>
-        <p:cxnSp>
-          <p:nvCxnSpPr>
-            <p:cNvPr id="247" name="Google Shape;247;p10"/>
-            <p:cNvCxnSpPr/>
-            <p:nvPr/>
-          </p:nvCxnSpPr>
-          <p:spPr>
-            <a:xfrm>
-              <a:off x="6771195" y="-2"/>
-              <a:ext cx="7" cy="64324"/>
-            </a:xfrm>
-            <a:prstGeom prst="straightConnector1">
-              <a:avLst/>
-            </a:prstGeom>
-            <a:noFill/>
-            <a:ln cap="flat" cmpd="sng" w="9525">
-              <a:solidFill>
-                <a:srgbClr val="808080"/>
-              </a:solidFill>
-              <a:prstDash val="solid"/>
-              <a:miter lim="8000"/>
-              <a:headEnd len="sm" w="sm" type="none"/>
-              <a:tailEnd len="sm" w="sm" type="none"/>
-            </a:ln>
-          </p:spPr>
-        </p:cxnSp>
-        <p:cxnSp>
-          <p:nvCxnSpPr>
-            <p:cNvPr id="248" name="Google Shape;248;p10"/>
-            <p:cNvCxnSpPr/>
-            <p:nvPr/>
-          </p:nvCxnSpPr>
-          <p:spPr>
-            <a:xfrm>
-              <a:off x="7448315" y="-2"/>
-              <a:ext cx="7" cy="64324"/>
-            </a:xfrm>
-            <a:prstGeom prst="straightConnector1">
-              <a:avLst/>
-            </a:prstGeom>
-            <a:noFill/>
-            <a:ln cap="flat" cmpd="sng" w="9525">
-              <a:solidFill>
-                <a:srgbClr val="808080"/>
-              </a:solidFill>
-              <a:prstDash val="solid"/>
-              <a:miter lim="8000"/>
-              <a:headEnd len="sm" w="sm" type="none"/>
-              <a:tailEnd len="sm" w="sm" type="none"/>
-            </a:ln>
-          </p:spPr>
-        </p:cxnSp>
-        <p:cxnSp>
-          <p:nvCxnSpPr>
-            <p:cNvPr id="249" name="Google Shape;249;p10"/>
-            <p:cNvCxnSpPr/>
-            <p:nvPr/>
-          </p:nvCxnSpPr>
-          <p:spPr>
-            <a:xfrm>
-              <a:off x="8125435" y="-2"/>
-              <a:ext cx="7" cy="64324"/>
-            </a:xfrm>
-            <a:prstGeom prst="straightConnector1">
-              <a:avLst/>
-            </a:prstGeom>
-            <a:noFill/>
-            <a:ln cap="flat" cmpd="sng" w="9525">
-              <a:solidFill>
-                <a:srgbClr val="808080"/>
-              </a:solidFill>
-              <a:prstDash val="solid"/>
-              <a:miter lim="8000"/>
-              <a:headEnd len="sm" w="sm" type="none"/>
-              <a:tailEnd len="sm" w="sm" type="none"/>
-            </a:ln>
-          </p:spPr>
-        </p:cxnSp>
-        <p:cxnSp>
-          <p:nvCxnSpPr>
-            <p:cNvPr id="250" name="Google Shape;250;p10"/>
-            <p:cNvCxnSpPr/>
-            <p:nvPr/>
-          </p:nvCxnSpPr>
-          <p:spPr>
-            <a:xfrm>
-              <a:off x="8802554" y="-2"/>
-              <a:ext cx="7" cy="64324"/>
-            </a:xfrm>
-            <a:prstGeom prst="straightConnector1">
-              <a:avLst/>
-            </a:prstGeom>
-            <a:noFill/>
-            <a:ln cap="flat" cmpd="sng" w="9525">
-              <a:solidFill>
-                <a:srgbClr val="808080"/>
-              </a:solidFill>
-              <a:prstDash val="solid"/>
-              <a:miter lim="8000"/>
-              <a:headEnd len="sm" w="sm" type="none"/>
-              <a:tailEnd len="sm" w="sm" type="none"/>
-            </a:ln>
-          </p:spPr>
-        </p:cxnSp>
-        <p:cxnSp>
-          <p:nvCxnSpPr>
-            <p:cNvPr id="251" name="Google Shape;251;p10"/>
-            <p:cNvCxnSpPr/>
-            <p:nvPr/>
-          </p:nvCxnSpPr>
-          <p:spPr>
-            <a:xfrm>
-              <a:off x="9479673" y="-2"/>
-              <a:ext cx="7" cy="64324"/>
-            </a:xfrm>
-            <a:prstGeom prst="straightConnector1">
-              <a:avLst/>
-            </a:prstGeom>
-            <a:noFill/>
-            <a:ln cap="flat" cmpd="sng" w="9525">
-              <a:solidFill>
-                <a:srgbClr val="808080"/>
-              </a:solidFill>
-              <a:prstDash val="solid"/>
-              <a:miter lim="8000"/>
-              <a:headEnd len="sm" w="sm" type="none"/>
-              <a:tailEnd len="sm" w="sm" type="none"/>
-            </a:ln>
-          </p:spPr>
-        </p:cxnSp>
-        <p:cxnSp>
-          <p:nvCxnSpPr>
-            <p:cNvPr id="252" name="Google Shape;252;p10"/>
-            <p:cNvCxnSpPr/>
-            <p:nvPr/>
-          </p:nvCxnSpPr>
-          <p:spPr>
-            <a:xfrm>
-              <a:off x="10156792" y="-2"/>
-              <a:ext cx="7" cy="64324"/>
-            </a:xfrm>
-            <a:prstGeom prst="straightConnector1">
-              <a:avLst/>
-            </a:prstGeom>
-            <a:noFill/>
-            <a:ln cap="flat" cmpd="sng" w="9525">
-              <a:solidFill>
-                <a:srgbClr val="808080"/>
-              </a:solidFill>
-              <a:prstDash val="solid"/>
-              <a:miter lim="8000"/>
-              <a:headEnd len="sm" w="sm" type="none"/>
-              <a:tailEnd len="sm" w="sm" type="none"/>
-            </a:ln>
-          </p:spPr>
-        </p:cxnSp>
-        <p:cxnSp>
-          <p:nvCxnSpPr>
-            <p:cNvPr id="253" name="Google Shape;253;p10"/>
-            <p:cNvCxnSpPr/>
-            <p:nvPr/>
-          </p:nvCxnSpPr>
-          <p:spPr>
-            <a:xfrm>
-              <a:off x="10833914" y="-2"/>
-              <a:ext cx="7" cy="64324"/>
-            </a:xfrm>
-            <a:prstGeom prst="straightConnector1">
-              <a:avLst/>
-            </a:prstGeom>
-            <a:noFill/>
-            <a:ln cap="flat" cmpd="sng" w="9525">
-              <a:solidFill>
-                <a:srgbClr val="808080"/>
-              </a:solidFill>
-              <a:prstDash val="solid"/>
-              <a:miter lim="8000"/>
-              <a:headEnd len="sm" w="sm" type="none"/>
-              <a:tailEnd len="sm" w="sm" type="none"/>
-            </a:ln>
-          </p:spPr>
-        </p:cxnSp>
-        <p:cxnSp>
-          <p:nvCxnSpPr>
-            <p:cNvPr id="254" name="Google Shape;254;p10"/>
-            <p:cNvCxnSpPr/>
-            <p:nvPr/>
-          </p:nvCxnSpPr>
-          <p:spPr>
-            <a:xfrm>
-              <a:off x="11511034" y="-2"/>
-              <a:ext cx="7" cy="64324"/>
-            </a:xfrm>
-            <a:prstGeom prst="straightConnector1">
-              <a:avLst/>
-            </a:prstGeom>
-            <a:noFill/>
-            <a:ln cap="flat" cmpd="sng" w="9525">
-              <a:solidFill>
-                <a:srgbClr val="808080"/>
-              </a:solidFill>
-              <a:prstDash val="solid"/>
-              <a:miter lim="8000"/>
-              <a:headEnd len="sm" w="sm" type="none"/>
-              <a:tailEnd len="sm" w="sm" type="none"/>
-            </a:ln>
-          </p:spPr>
-        </p:cxnSp>
-        <p:cxnSp>
-          <p:nvCxnSpPr>
-            <p:cNvPr id="255" name="Google Shape;255;p10"/>
-            <p:cNvCxnSpPr/>
-            <p:nvPr/>
-          </p:nvCxnSpPr>
-          <p:spPr>
-            <a:xfrm>
-              <a:off x="12188160" y="-2"/>
-              <a:ext cx="7" cy="64324"/>
-            </a:xfrm>
-            <a:prstGeom prst="straightConnector1">
-              <a:avLst/>
-            </a:prstGeom>
-            <a:noFill/>
-            <a:ln cap="flat" cmpd="sng" w="9525">
-              <a:solidFill>
-                <a:srgbClr val="808080"/>
-              </a:solidFill>
-              <a:prstDash val="solid"/>
-              <a:miter lim="8000"/>
-              <a:headEnd len="sm" w="sm" type="none"/>
-              <a:tailEnd len="sm" w="sm" type="none"/>
-            </a:ln>
-          </p:spPr>
-        </p:cxnSp>
-      </p:grpSp>
-      <p:sp>
-        <p:nvSpPr>
-          <p:cNvPr id="256" name="Google Shape;256;p10"/>
-          <p:cNvSpPr txBox="1"/>
-          <p:nvPr>
-            <p:ph type="title"/>
-          </p:nvPr>
-        </p:nvSpPr>
-        <p:spPr>
-          <a:xfrm>
-            <a:off x="429253" y="424691"/>
-            <a:ext cx="7827311" cy="1167572"/>
-          </a:xfrm>
-          <a:prstGeom prst="rect">
-            <a:avLst/>
-          </a:prstGeom>
-          <a:noFill/>
-          <a:ln>
-            <a:noFill/>
-          </a:ln>
-        </p:spPr>
-        <p:txBody>
-          <a:bodyPr anchorCtr="0" anchor="t" bIns="0" lIns="0" spcFirstLastPara="1" rIns="0" wrap="square" tIns="0">
-            <a:noAutofit/>
-          </a:bodyPr>
-          <a:lstStyle>
-            <a:lvl1pPr lvl="0" algn="l">
-              <a:lnSpc>
-                <a:spcPct val="90000"/>
-              </a:lnSpc>
-              <a:spcBef>
-                <a:spcPts val="0"/>
-              </a:spcBef>
-              <a:spcAft>
-                <a:spcPts val="0"/>
-              </a:spcAft>
-              <a:buClr>
-                <a:schemeClr val="lt1"/>
-              </a:buClr>
-              <a:buSzPts val="3600"/>
-              <a:buFont typeface="Play"/>
-              <a:buNone/>
-              <a:defRPr b="0" i="0" sz="3600">
-                <a:solidFill>
-                  <a:schemeClr val="lt1"/>
-                </a:solidFill>
-                <a:latin typeface="Play"/>
-                <a:ea typeface="Play"/>
-                <a:cs typeface="Play"/>
-                <a:sym typeface="Play"/>
-              </a:defRPr>
-            </a:lvl1pPr>
-            <a:lvl2pPr lvl="1">
-              <a:spcBef>
-                <a:spcPts val="0"/>
-              </a:spcBef>
-              <a:spcAft>
-                <a:spcPts val="0"/>
-              </a:spcAft>
-              <a:buSzPts val="1400"/>
-              <a:buNone/>
-              <a:defRPr/>
-            </a:lvl2pPr>
-            <a:lvl3pPr lvl="2">
-              <a:spcBef>
-                <a:spcPts val="0"/>
-              </a:spcBef>
-              <a:spcAft>
-                <a:spcPts val="0"/>
-              </a:spcAft>
-              <a:buSzPts val="1400"/>
-              <a:buNone/>
-              <a:defRPr/>
-            </a:lvl3pPr>
-            <a:lvl4pPr lvl="3">
-              <a:spcBef>
-                <a:spcPts val="0"/>
-              </a:spcBef>
-              <a:spcAft>
-                <a:spcPts val="0"/>
-              </a:spcAft>
-              <a:buSzPts val="1400"/>
-              <a:buNone/>
-              <a:defRPr/>
-            </a:lvl4pPr>
-            <a:lvl5pPr lvl="4">
-              <a:spcBef>
-                <a:spcPts val="0"/>
-              </a:spcBef>
-              <a:spcAft>
-                <a:spcPts val="0"/>
-              </a:spcAft>
-              <a:buSzPts val="1400"/>
-              <a:buNone/>
-              <a:defRPr/>
-            </a:lvl5pPr>
-            <a:lvl6pPr lvl="5">
-              <a:spcBef>
-                <a:spcPts val="0"/>
-              </a:spcBef>
-              <a:spcAft>
-                <a:spcPts val="0"/>
-              </a:spcAft>
-              <a:buSzPts val="1400"/>
-              <a:buNone/>
-              <a:defRPr/>
-            </a:lvl6pPr>
-            <a:lvl7pPr lvl="6">
-              <a:spcBef>
-                <a:spcPts val="0"/>
-              </a:spcBef>
-              <a:spcAft>
-                <a:spcPts val="0"/>
-              </a:spcAft>
-              <a:buSzPts val="1400"/>
-              <a:buNone/>
-              <a:defRPr/>
-            </a:lvl7pPr>
-            <a:lvl8pPr lvl="7">
-              <a:spcBef>
-                <a:spcPts val="0"/>
-              </a:spcBef>
-              <a:spcAft>
-                <a:spcPts val="0"/>
-              </a:spcAft>
-              <a:buSzPts val="1400"/>
-              <a:buNone/>
-              <a:defRPr/>
-            </a:lvl8pPr>
-            <a:lvl9pPr lvl="8">
-              <a:spcBef>
-                <a:spcPts val="0"/>
-              </a:spcBef>
-              <a:spcAft>
-                <a:spcPts val="0"/>
-              </a:spcAft>
-              <a:buSzPts val="1400"/>
-              <a:buNone/>
-              <a:defRPr/>
-            </a:lvl9pPr>
-          </a:lstStyle>
-          <a:p/>
-        </p:txBody>
-      </p:sp>
-      <p:pic>
-        <p:nvPicPr>
-          <p:cNvPr id="257" name="Google Shape;257;p10"/>
-          <p:cNvPicPr preferRelativeResize="0"/>
-          <p:nvPr/>
-        </p:nvPicPr>
-        <p:blipFill rotWithShape="1">
-          <a:blip r:embed="rId3">
-            <a:alphaModFix/>
-          </a:blip>
-          <a:srcRect b="0" l="0" r="0" t="0"/>
-          <a:stretch/>
-        </p:blipFill>
-        <p:spPr>
-          <a:xfrm>
-            <a:off x="398723" y="6160516"/>
-            <a:ext cx="1857481" cy="292671"/>
-          </a:xfrm>
-          <a:prstGeom prst="rect">
-            <a:avLst/>
-          </a:prstGeom>
-          <a:noFill/>
-          <a:ln>
-            <a:noFill/>
-          </a:ln>
-        </p:spPr>
-      </p:pic>
-      <p:pic>
-        <p:nvPicPr>
-          <p:cNvPr descr=" " id="258" name="Google Shape;258;p10"/>
-          <p:cNvPicPr preferRelativeResize="0"/>
-          <p:nvPr/>
-        </p:nvPicPr>
-        <p:blipFill rotWithShape="1">
-          <a:blip r:embed="rId4">
-            <a:alphaModFix/>
-          </a:blip>
-          <a:srcRect b="0" l="0" r="0" t="0"/>
-          <a:stretch/>
-        </p:blipFill>
-        <p:spPr>
-          <a:xfrm>
-            <a:off x="10866292" y="0"/>
-            <a:ext cx="1325708" cy="3723972"/>
-          </a:xfrm>
-          <a:prstGeom prst="rect">
-            <a:avLst/>
-          </a:prstGeom>
-          <a:noFill/>
-          <a:ln>
-            <a:noFill/>
-          </a:ln>
-        </p:spPr>
-      </p:pic>
-      <p:pic>
-        <p:nvPicPr>
-          <p:cNvPr descr=" " id="259" name="Google Shape;259;p10"/>
-          <p:cNvPicPr preferRelativeResize="0"/>
-          <p:nvPr/>
-        </p:nvPicPr>
-        <p:blipFill rotWithShape="1">
-          <a:blip r:embed="rId5">
-            <a:alphaModFix/>
-          </a:blip>
-          <a:srcRect b="0" l="0" r="0" t="0"/>
-          <a:stretch/>
-        </p:blipFill>
-        <p:spPr>
-          <a:xfrm>
-            <a:off x="11093496" y="6238282"/>
-            <a:ext cx="690517" cy="216000"/>
-          </a:xfrm>
-          <a:prstGeom prst="rect">
-            <a:avLst/>
-          </a:prstGeom>
-          <a:noFill/>
-          <a:ln>
-            <a:noFill/>
-          </a:ln>
-        </p:spPr>
-      </p:pic>
-    </p:spTree>
-  </p:cSld>
-  <p:clrMapOvr>
-    <a:masterClrMapping/>
-  </p:clrMapOvr>
-</p:sldLayout>
-</file>
-
 <file path=ppt/slideMasters/slideMaster1.xml><?xml version="1.0" encoding="utf-8"?>
 <p:sldMaster xmlns:a="http://schemas.openxmlformats.org/drawingml/2006/main" xmlns:r="http://schemas.openxmlformats.org/officeDocument/2006/relationships" xmlns:mc="http://schemas.openxmlformats.org/markup-compatibility/2006" xmlns:mv="urn:schemas-microsoft-com:mac:vml" xmlns:p="http://schemas.openxmlformats.org/presentationml/2006/main" xmlns:c="http://schemas.openxmlformats.org/drawingml/2006/chart" xmlns:dgm="http://schemas.openxmlformats.org/drawingml/2006/diagram" xmlns:o="urn:schemas-microsoft-com:office:office" xmlns:v="urn:schemas-microsoft-com:vml" xmlns:pvml="urn:schemas-microsoft-com:office:powerpoint" xmlns:com="http://schemas.openxmlformats.org/drawingml/2006/compatibility" xmlns:p14="http://schemas.microsoft.com/office/powerpoint/2010/main" xmlns:p15="http://schemas.microsoft.com/office/powerpoint/2012/main" xmlns:ahyp="http://schemas.microsoft.com/office/drawing/2018/hyperlinkcolor">
   <p:cSld>
@@ -9469,7 +8885,6 @@
     <p:sldLayoutId id="2147483652" r:id="rId6"/>
     <p:sldLayoutId id="2147483653" r:id="rId7"/>
     <p:sldLayoutId id="2147483655" r:id="rId9"/>
-    <p:sldLayoutId id="2147483656" r:id="rId10"/>
     <p:sldLayoutId id="2147483661" r:id="rId15"/>
   </p:sldLayoutIdLst>
   <p:hf dt="0" ftr="0" hdr="0" sldNum="0"/>
@@ -10313,7 +9728,7 @@
               <a:spcAft>
                 <a:spcPts val="300"/>
               </a:spcAft>
-              <a:defRPr sz="5400" b="0">
+              <a:defRPr sz="3200" b="0">
                 <a:solidFill>
                   <a:srgbClr val="FFFFFF"/>
                 </a:solidFill>
@@ -10323,7 +9738,7 @@
               </a:defRPr>
             </a:pPr>
             <a:r>
-              <a:rPr sz="5400" b="0">
+              <a:rPr sz="3200" b="0">
                 <a:solidFill>
                   <a:srgbClr val="FFFFFF"/>
                 </a:solidFill>
@@ -10331,7 +9746,7 @@
                 <a:ea typeface="Play"/>
                 <a:cs typeface="Play"/>
               </a:rPr>
-              <a:t>Защита инициативы</a:t>
+              <a:t>Защита инициативы: сервис автоматической вёрстки презентаций</a:t>
             </a:r>
           </a:p>
         </p:txBody>
@@ -10413,7 +9828,7 @@
         </p:nvGraphicFramePr>
         <p:xfrm>
           <a:off x="429280" y="1664162"/>
-          <a:ext cx="11310884" cy="2241019"/>
+          <a:ext cx="11310884" cy="2080703"/>
         </p:xfrm>
         <a:graphic>
           <a:graphicData uri="http://schemas.openxmlformats.org/drawingml/2006/chart">
@@ -10429,8 +9844,8 @@
         </p:nvSpPr>
         <p:spPr>
           <a:xfrm>
-            <a:off x="429280" y="4076631"/>
-            <a:ext cx="11310884" cy="1341120"/>
+            <a:off x="429280" y="3916315"/>
+            <a:ext cx="11310884" cy="1501435"/>
           </a:xfrm>
           <a:prstGeom prst="rect">
             <a:avLst/>
@@ -10465,7 +9880,7 @@
                 <a:ea typeface="Play"/>
                 <a:cs typeface="Play"/>
               </a:rPr>
-              <a:t>• Сборка 12-слайдной колоды занимает 186 мин</a:t>
+              <a:t>• Сборка одной презентации занимает 186 минут</a:t>
             </a:r>
           </a:p>
           <a:p>
@@ -10491,7 +9906,7 @@
                 <a:ea typeface="Play"/>
                 <a:cs typeface="Play"/>
               </a:rPr>
-              <a:t>• Правки после ревью добавляют 74 мин</a:t>
+              <a:t>• Правки после ревью добавляют 74 минуты</a:t>
             </a:r>
           </a:p>
           <a:p>
@@ -10517,7 +9932,59 @@
                 <a:ea typeface="Play"/>
                 <a:cs typeface="Play"/>
               </a:rPr>
-              <a:t>• Средний срок ожидания 6 дней</a:t>
+              <a:t>• 19 из 42 колод нарушают фирменный стиль</a:t>
+            </a:r>
+          </a:p>
+          <a:p>
+            <a:pPr algn="l">
+              <a:spcAft>
+                <a:spcPts val="300"/>
+              </a:spcAft>
+              <a:defRPr sz="1600">
+                <a:solidFill>
+                  <a:srgbClr val="FFFFFF"/>
+                </a:solidFill>
+                <a:latin typeface="Play"/>
+                <a:ea typeface="Play"/>
+                <a:cs typeface="Play"/>
+              </a:defRPr>
+            </a:pPr>
+            <a:r>
+              <a:rPr sz="1600">
+                <a:solidFill>
+                  <a:srgbClr val="FFFFFF"/>
+                </a:solidFill>
+                <a:latin typeface="Play"/>
+                <a:ea typeface="Play"/>
+                <a:cs typeface="Play"/>
+              </a:rPr>
+              <a:t>• Дизайн-отдел закрывает 11 запросов в неделю из 27</a:t>
+            </a:r>
+          </a:p>
+          <a:p>
+            <a:pPr algn="l">
+              <a:spcAft>
+                <a:spcPts val="300"/>
+              </a:spcAft>
+              <a:defRPr sz="1600">
+                <a:solidFill>
+                  <a:srgbClr val="FFFFFF"/>
+                </a:solidFill>
+                <a:latin typeface="Play"/>
+                <a:ea typeface="Play"/>
+                <a:cs typeface="Play"/>
+              </a:defRPr>
+            </a:pPr>
+            <a:r>
+              <a:rPr sz="1600">
+                <a:solidFill>
+                  <a:srgbClr val="FFFFFF"/>
+                </a:solidFill>
+                <a:latin typeface="Play"/>
+                <a:ea typeface="Play"/>
+                <a:cs typeface="Play"/>
+              </a:rPr>
+              <a:t>• Средний срок ожидания 6 рабочих дней</a:t>
             </a:r>
           </a:p>
         </p:txBody>
@@ -10566,104 +10033,6 @@
               <a:spcAft>
                 <a:spcPts val="300"/>
               </a:spcAft>
-              <a:defRPr sz="4000">
-                <a:solidFill>
-                  <a:srgbClr val="FFFFFF"/>
-                </a:solidFill>
-                <a:latin typeface="Play"/>
-                <a:ea typeface="Play"/>
-                <a:cs typeface="Play"/>
-              </a:defRPr>
-            </a:pPr>
-            <a:r>
-              <a:rPr sz="4000">
-                <a:solidFill>
-                  <a:srgbClr val="FFFFFF"/>
-                </a:solidFill>
-                <a:latin typeface="Play"/>
-                <a:ea typeface="Play"/>
-                <a:cs typeface="Play"/>
-              </a:rPr>
-              <a:t>Текущая нагрузка дизайна</a:t>
-            </a:r>
-          </a:p>
-        </p:txBody>
-      </p:sp>
-      <p:sp>
-        <p:nvSpPr>
-          <p:cNvPr id="3" name="lead"/>
-          <p:cNvSpPr txBox="1"/>
-          <p:nvPr/>
-        </p:nvSpPr>
-        <p:spPr>
-          <a:xfrm>
-            <a:off x="429280" y="1384835"/>
-            <a:ext cx="7827264" cy="2497631"/>
-          </a:xfrm>
-          <a:prstGeom prst="rect">
-            <a:avLst/>
-          </a:prstGeom>
-          <a:noFill/>
-        </p:spPr>
-        <p:txBody>
-          <a:bodyPr wrap="square" lIns="76200" rIns="76200" tIns="50800" bIns="50800">
-            <a:spAutoFit/>
-          </a:bodyPr>
-          <a:lstStyle/>
-          <a:p>
-            <a:pPr algn="l">
-              <a:spcAft>
-                <a:spcPts val="300"/>
-              </a:spcAft>
-              <a:defRPr sz="4000">
-                <a:solidFill>
-                  <a:srgbClr val="FFFFFF"/>
-                </a:solidFill>
-                <a:latin typeface="Play"/>
-                <a:ea typeface="Play"/>
-                <a:cs typeface="Play"/>
-              </a:defRPr>
-            </a:pPr>
-            <a:r>
-              <a:rPr sz="4000">
-                <a:solidFill>
-                  <a:srgbClr val="FFFFFF"/>
-                </a:solidFill>
-                <a:latin typeface="Play"/>
-                <a:ea typeface="Play"/>
-                <a:cs typeface="Play"/>
-              </a:rPr>
-              <a:t>Дизайн-отдел закрывает 11 запросов в неделю из 27</a:t>
-            </a:r>
-          </a:p>
-        </p:txBody>
-      </p:sp>
-      <p:sp>
-        <p:nvSpPr>
-          <p:cNvPr id="4" name="body"/>
-          <p:cNvSpPr txBox="1"/>
-          <p:nvPr/>
-        </p:nvSpPr>
-        <p:spPr>
-          <a:xfrm>
-            <a:off x="429280" y="4170655"/>
-            <a:ext cx="7827264" cy="2017317"/>
-          </a:xfrm>
-          <a:prstGeom prst="rect">
-            <a:avLst/>
-          </a:prstGeom>
-          <a:noFill/>
-        </p:spPr>
-        <p:txBody>
-          <a:bodyPr wrap="square" lIns="76200" rIns="76200" tIns="50800" bIns="50800">
-            <a:spAutoFit/>
-          </a:bodyPr>
-          <a:lstStyle/>
-          <a:p>
-            <a:pPr algn="l">
-              <a:spcAft>
-                <a:spcPts val="300"/>
-              </a:spcAft>
               <a:defRPr sz="3200">
                 <a:solidFill>
                   <a:srgbClr val="FFFFFF"/>
@@ -10682,56 +10051,52 @@
                 <a:ea typeface="Play"/>
                 <a:cs typeface="Play"/>
               </a:rPr>
-              <a:t>Средний срок ожидания 6 дней</a:t>
+              <a:t>Предложение</a:t>
             </a:r>
           </a:p>
         </p:txBody>
       </p:sp>
-    </p:spTree>
-  </p:cSld>
-  <p:clrMapOvr>
-    <a:masterClrMapping/>
-  </p:clrMapOvr>
-</p:sld>
-</file>
-
-<file path=ppt/slides/slide33.xml><?xml version="1.0" encoding="utf-8"?>
-<p:sld xmlns:a="http://schemas.openxmlformats.org/drawingml/2006/main" xmlns:p="http://schemas.openxmlformats.org/presentationml/2006/main" xmlns:r="http://schemas.openxmlformats.org/officeDocument/2006/relationships">
-  <p:cSld>
-    <p:spTree>
-      <p:nvGrpSpPr>
-        <p:cNvPr id="1" name=""/>
-        <p:cNvGrpSpPr/>
-        <p:nvPr/>
-      </p:nvGrpSpPr>
-      <p:grpSpPr/>
       <p:sp>
         <p:nvSpPr>
-          <p:cNvPr id="2" name="title"/>
-          <p:cNvSpPr txBox="1"/>
+          <p:cNvPr id="3" name="Pentagon 2"/>
+          <p:cNvSpPr/>
           <p:nvPr/>
         </p:nvSpPr>
         <p:spPr>
           <a:xfrm>
-            <a:off x="429280" y="424715"/>
-            <a:ext cx="7827264" cy="822960"/>
+            <a:off x="429280" y="1619559"/>
+            <a:ext cx="11310884" cy="335019"/>
           </a:xfrm>
-          <a:prstGeom prst="rect">
+          <a:prstGeom prst="homePlate">
             <a:avLst/>
           </a:prstGeom>
-          <a:noFill/>
+          <a:solidFill>
+            <a:srgbClr val="0077FF"/>
+          </a:solidFill>
+          <a:ln>
+            <a:noFill/>
+          </a:ln>
         </p:spPr>
+        <p:style>
+          <a:lnRef idx="1">
+            <a:schemeClr val="accent1"/>
+          </a:lnRef>
+          <a:fillRef idx="3">
+            <a:schemeClr val="accent1"/>
+          </a:fillRef>
+          <a:effectRef idx="2">
+            <a:schemeClr val="accent1"/>
+          </a:effectRef>
+          <a:fontRef idx="minor">
+            <a:schemeClr val="lt1"/>
+          </a:fontRef>
+        </p:style>
         <p:txBody>
-          <a:bodyPr wrap="square" lIns="76200" rIns="76200" tIns="50800" bIns="50800">
-            <a:spAutoFit/>
-          </a:bodyPr>
+          <a:bodyPr rtlCol="0" anchor="ctr" wrap="square" lIns="12700" rIns="12700" tIns="12700" bIns="12700"/>
           <a:lstStyle/>
           <a:p>
-            <a:pPr algn="l">
-              <a:spcAft>
-                <a:spcPts val="300"/>
-              </a:spcAft>
-              <a:defRPr sz="3200">
+            <a:pPr algn="ctr">
+              <a:defRPr sz="1400" b="0">
                 <a:solidFill>
                   <a:srgbClr val="FFFFFF"/>
                 </a:solidFill>
@@ -10741,7 +10106,7 @@
               </a:defRPr>
             </a:pPr>
             <a:r>
-              <a:rPr sz="3200">
+              <a:rPr sz="1400" b="0">
                 <a:solidFill>
                   <a:srgbClr val="FFFFFF"/>
                 </a:solidFill>
@@ -10749,32 +10114,329 @@
                 <a:ea typeface="Play"/>
                 <a:cs typeface="Play"/>
               </a:rPr>
-              <a:t>Ожидаемый эффект пилота</a:t>
+              <a:t>Шаблон</a:t>
             </a:r>
           </a:p>
         </p:txBody>
       </p:sp>
-      <p:graphicFrame>
-        <p:nvGraphicFramePr>
-          <p:cNvPr id="3" name="Chart 2"/>
-          <p:cNvGraphicFramePr>
-            <a:graphicFrameLocks noGrp="1"/>
-          </p:cNvGraphicFramePr>
-          <p:nvPr/>
-        </p:nvGraphicFramePr>
-        <p:xfrm>
-          <a:off x="429280" y="1592290"/>
-          <a:ext cx="11310884" cy="2337343"/>
-        </p:xfrm>
-        <a:graphic>
-          <a:graphicData uri="http://schemas.openxmlformats.org/drawingml/2006/chart">
-            <c:chart xmlns:c="http://schemas.openxmlformats.org/drawingml/2006/chart" r:id="rId2"/>
-          </a:graphicData>
-        </a:graphic>
-      </p:graphicFrame>
       <p:sp>
         <p:nvSpPr>
-          <p:cNvPr id="4" name="body"/>
+          <p:cNvPr id="4" name="Chevron 3"/>
+          <p:cNvSpPr/>
+          <p:nvPr/>
+        </p:nvSpPr>
+        <p:spPr>
+          <a:xfrm>
+            <a:off x="429280" y="2009116"/>
+            <a:ext cx="11310884" cy="335019"/>
+          </a:xfrm>
+          <a:prstGeom prst="chevron">
+            <a:avLst/>
+          </a:prstGeom>
+          <a:solidFill>
+            <a:srgbClr val="0077FF"/>
+          </a:solidFill>
+          <a:ln>
+            <a:noFill/>
+          </a:ln>
+        </p:spPr>
+        <p:style>
+          <a:lnRef idx="1">
+            <a:schemeClr val="accent1"/>
+          </a:lnRef>
+          <a:fillRef idx="3">
+            <a:schemeClr val="accent1"/>
+          </a:fillRef>
+          <a:effectRef idx="2">
+            <a:schemeClr val="accent1"/>
+          </a:effectRef>
+          <a:fontRef idx="minor">
+            <a:schemeClr val="lt1"/>
+          </a:fontRef>
+        </p:style>
+        <p:txBody>
+          <a:bodyPr rtlCol="0" anchor="ctr" wrap="square" lIns="12700" rIns="12700" tIns="12700" bIns="12700"/>
+          <a:lstStyle/>
+          <a:p>
+            <a:pPr algn="ctr">
+              <a:defRPr sz="1400" b="0">
+                <a:solidFill>
+                  <a:srgbClr val="FFFFFF"/>
+                </a:solidFill>
+                <a:latin typeface="Play"/>
+                <a:ea typeface="Play"/>
+                <a:cs typeface="Play"/>
+              </a:defRPr>
+            </a:pPr>
+            <a:r>
+              <a:rPr sz="1400" b="0">
+                <a:solidFill>
+                  <a:srgbClr val="FFFFFF"/>
+                </a:solidFill>
+                <a:latin typeface="Play"/>
+                <a:ea typeface="Play"/>
+                <a:cs typeface="Play"/>
+              </a:rPr>
+              <a:t>Дизайн-система</a:t>
+            </a:r>
+          </a:p>
+        </p:txBody>
+      </p:sp>
+      <p:sp>
+        <p:nvSpPr>
+          <p:cNvPr id="5" name="Chevron 4"/>
+          <p:cNvSpPr/>
+          <p:nvPr/>
+        </p:nvSpPr>
+        <p:spPr>
+          <a:xfrm>
+            <a:off x="429280" y="2398673"/>
+            <a:ext cx="11310884" cy="335019"/>
+          </a:xfrm>
+          <a:prstGeom prst="chevron">
+            <a:avLst/>
+          </a:prstGeom>
+          <a:solidFill>
+            <a:srgbClr val="0077FF"/>
+          </a:solidFill>
+          <a:ln>
+            <a:noFill/>
+          </a:ln>
+        </p:spPr>
+        <p:style>
+          <a:lnRef idx="1">
+            <a:schemeClr val="accent1"/>
+          </a:lnRef>
+          <a:fillRef idx="3">
+            <a:schemeClr val="accent1"/>
+          </a:fillRef>
+          <a:effectRef idx="2">
+            <a:schemeClr val="accent1"/>
+          </a:effectRef>
+          <a:fontRef idx="minor">
+            <a:schemeClr val="lt1"/>
+          </a:fontRef>
+        </p:style>
+        <p:txBody>
+          <a:bodyPr rtlCol="0" anchor="ctr" wrap="square" lIns="12700" rIns="12700" tIns="12700" bIns="12700"/>
+          <a:lstStyle/>
+          <a:p>
+            <a:pPr algn="ctr">
+              <a:defRPr sz="1400" b="0">
+                <a:solidFill>
+                  <a:srgbClr val="FFFFFF"/>
+                </a:solidFill>
+                <a:latin typeface="Play"/>
+                <a:ea typeface="Play"/>
+                <a:cs typeface="Play"/>
+              </a:defRPr>
+            </a:pPr>
+            <a:r>
+              <a:rPr sz="1400" b="0">
+                <a:solidFill>
+                  <a:srgbClr val="FFFFFF"/>
+                </a:solidFill>
+                <a:latin typeface="Play"/>
+                <a:ea typeface="Play"/>
+                <a:cs typeface="Play"/>
+              </a:rPr>
+              <a:t>План колоды</a:t>
+            </a:r>
+          </a:p>
+        </p:txBody>
+      </p:sp>
+      <p:sp>
+        <p:nvSpPr>
+          <p:cNvPr id="6" name="Chevron 5"/>
+          <p:cNvSpPr/>
+          <p:nvPr/>
+        </p:nvSpPr>
+        <p:spPr>
+          <a:xfrm>
+            <a:off x="429280" y="2788230"/>
+            <a:ext cx="11310884" cy="335019"/>
+          </a:xfrm>
+          <a:prstGeom prst="chevron">
+            <a:avLst/>
+          </a:prstGeom>
+          <a:solidFill>
+            <a:srgbClr val="0077FF"/>
+          </a:solidFill>
+          <a:ln>
+            <a:noFill/>
+          </a:ln>
+        </p:spPr>
+        <p:style>
+          <a:lnRef idx="1">
+            <a:schemeClr val="accent1"/>
+          </a:lnRef>
+          <a:fillRef idx="3">
+            <a:schemeClr val="accent1"/>
+          </a:fillRef>
+          <a:effectRef idx="2">
+            <a:schemeClr val="accent1"/>
+          </a:effectRef>
+          <a:fontRef idx="minor">
+            <a:schemeClr val="lt1"/>
+          </a:fontRef>
+        </p:style>
+        <p:txBody>
+          <a:bodyPr rtlCol="0" anchor="ctr" wrap="square" lIns="12700" rIns="12700" tIns="12700" bIns="12700"/>
+          <a:lstStyle/>
+          <a:p>
+            <a:pPr algn="ctr">
+              <a:defRPr sz="1400" b="0">
+                <a:solidFill>
+                  <a:srgbClr val="FFFFFF"/>
+                </a:solidFill>
+                <a:latin typeface="Play"/>
+                <a:ea typeface="Play"/>
+                <a:cs typeface="Play"/>
+              </a:defRPr>
+            </a:pPr>
+            <a:r>
+              <a:rPr sz="1400" b="0">
+                <a:solidFill>
+                  <a:srgbClr val="FFFFFF"/>
+                </a:solidFill>
+                <a:latin typeface="Play"/>
+                <a:ea typeface="Play"/>
+                <a:cs typeface="Play"/>
+              </a:rPr>
+              <a:t>Вёрстка</a:t>
+            </a:r>
+          </a:p>
+        </p:txBody>
+      </p:sp>
+      <p:sp>
+        <p:nvSpPr>
+          <p:cNvPr id="7" name="Chevron 6"/>
+          <p:cNvSpPr/>
+          <p:nvPr/>
+        </p:nvSpPr>
+        <p:spPr>
+          <a:xfrm>
+            <a:off x="429280" y="3177787"/>
+            <a:ext cx="11310884" cy="335019"/>
+          </a:xfrm>
+          <a:prstGeom prst="chevron">
+            <a:avLst/>
+          </a:prstGeom>
+          <a:solidFill>
+            <a:srgbClr val="0077FF"/>
+          </a:solidFill>
+          <a:ln>
+            <a:noFill/>
+          </a:ln>
+        </p:spPr>
+        <p:style>
+          <a:lnRef idx="1">
+            <a:schemeClr val="accent1"/>
+          </a:lnRef>
+          <a:fillRef idx="3">
+            <a:schemeClr val="accent1"/>
+          </a:fillRef>
+          <a:effectRef idx="2">
+            <a:schemeClr val="accent1"/>
+          </a:effectRef>
+          <a:fontRef idx="minor">
+            <a:schemeClr val="lt1"/>
+          </a:fontRef>
+        </p:style>
+        <p:txBody>
+          <a:bodyPr rtlCol="0" anchor="ctr" wrap="square" lIns="12700" rIns="12700" tIns="12700" bIns="12700"/>
+          <a:lstStyle/>
+          <a:p>
+            <a:pPr algn="ctr">
+              <a:defRPr sz="1400" b="0">
+                <a:solidFill>
+                  <a:srgbClr val="FFFFFF"/>
+                </a:solidFill>
+                <a:latin typeface="Play"/>
+                <a:ea typeface="Play"/>
+                <a:cs typeface="Play"/>
+              </a:defRPr>
+            </a:pPr>
+            <a:r>
+              <a:rPr sz="1400" b="0">
+                <a:solidFill>
+                  <a:srgbClr val="FFFFFF"/>
+                </a:solidFill>
+                <a:latin typeface="Play"/>
+                <a:ea typeface="Play"/>
+                <a:cs typeface="Play"/>
+              </a:rPr>
+              <a:t>Аудит</a:t>
+            </a:r>
+          </a:p>
+        </p:txBody>
+      </p:sp>
+      <p:sp>
+        <p:nvSpPr>
+          <p:cNvPr id="8" name="Chevron 7"/>
+          <p:cNvSpPr/>
+          <p:nvPr/>
+        </p:nvSpPr>
+        <p:spPr>
+          <a:xfrm>
+            <a:off x="429280" y="3567344"/>
+            <a:ext cx="11310884" cy="335019"/>
+          </a:xfrm>
+          <a:prstGeom prst="chevron">
+            <a:avLst/>
+          </a:prstGeom>
+          <a:solidFill>
+            <a:srgbClr val="0077FF"/>
+          </a:solidFill>
+          <a:ln>
+            <a:noFill/>
+          </a:ln>
+        </p:spPr>
+        <p:style>
+          <a:lnRef idx="1">
+            <a:schemeClr val="accent1"/>
+          </a:lnRef>
+          <a:fillRef idx="3">
+            <a:schemeClr val="accent1"/>
+          </a:fillRef>
+          <a:effectRef idx="2">
+            <a:schemeClr val="accent1"/>
+          </a:effectRef>
+          <a:fontRef idx="minor">
+            <a:schemeClr val="lt1"/>
+          </a:fontRef>
+        </p:style>
+        <p:txBody>
+          <a:bodyPr rtlCol="0" anchor="ctr" wrap="square" lIns="12700" rIns="12700" tIns="12700" bIns="12700"/>
+          <a:lstStyle/>
+          <a:p>
+            <a:pPr algn="ctr">
+              <a:defRPr sz="1400" b="0">
+                <a:solidFill>
+                  <a:srgbClr val="FFFFFF"/>
+                </a:solidFill>
+                <a:latin typeface="Play"/>
+                <a:ea typeface="Play"/>
+                <a:cs typeface="Play"/>
+              </a:defRPr>
+            </a:pPr>
+            <a:r>
+              <a:rPr sz="1400" b="0">
+                <a:solidFill>
+                  <a:srgbClr val="FFFFFF"/>
+                </a:solidFill>
+                <a:latin typeface="Play"/>
+                <a:ea typeface="Play"/>
+                <a:cs typeface="Play"/>
+              </a:rPr>
+              <a:t>Экспорт</a:t>
+            </a:r>
+          </a:p>
+        </p:txBody>
+      </p:sp>
+      <p:sp>
+        <p:nvSpPr>
+          <p:cNvPr id="9" name="body"/>
           <p:cNvSpPr txBox="1"/>
           <p:nvPr/>
         </p:nvSpPr>
@@ -10816,7 +10478,7 @@
                 <a:ea typeface="Play"/>
                 <a:cs typeface="Play"/>
               </a:rPr>
-              <a:t>• Средняя сборка колоды 12 слайдов — 4 мин вместо 186</a:t>
+              <a:t>• Сервис принимает шаблон pptx и материалы</a:t>
             </a:r>
           </a:p>
           <a:p>
@@ -10842,7 +10504,7 @@
                 <a:ea typeface="Play"/>
                 <a:cs typeface="Play"/>
               </a:rPr>
-              <a:t>• Время до первой версии сократилось с 6 дней до 1</a:t>
+              <a:t>• Автоматически формирует дизайн-систему и план колоды</a:t>
             </a:r>
           </a:p>
           <a:p>
@@ -10868,7 +10530,7 @@
                 <a:ea typeface="Play"/>
                 <a:cs typeface="Play"/>
               </a:rPr>
-              <a:t>• Нарушений стиля 2 из 68, исправлены автоматически</a:t>
+              <a:t>• Экспорт в pptx, pdf, html с редактируемыми слайдами</a:t>
             </a:r>
           </a:p>
           <a:p>
@@ -10894,7 +10556,7 @@
                 <a:ea typeface="Play"/>
                 <a:cs typeface="Play"/>
               </a:rPr>
-              <a:t>• Дизайнеры закрыли 38 запросов вместо 11</a:t>
+              <a:t>• Аудит качества проверяет все данные до выдачи</a:t>
             </a:r>
           </a:p>
         </p:txBody>
@@ -10907,7 +10569,7 @@
 </p:sld>
 </file>
 
-<file path=ppt/slides/slide34.xml><?xml version="1.0" encoding="utf-8"?>
+<file path=ppt/slides/slide33.xml><?xml version="1.0" encoding="utf-8"?>
 <p:sld xmlns:a="http://schemas.openxmlformats.org/drawingml/2006/main" xmlns:p="http://schemas.openxmlformats.org/presentationml/2006/main" xmlns:r="http://schemas.openxmlformats.org/officeDocument/2006/relationships">
   <p:cSld>
     <p:spTree>
@@ -10991,785 +10653,6 @@
           <a:xfrm>
             <a:off x="300817" y="297715"/>
             <a:ext cx="11566347" cy="5311465"/>
-          </a:xfrm>
-          <a:prstGeom prst="roundRect">
-            <a:avLst/>
-          </a:prstGeom>
-          <a:solidFill>
-            <a:srgbClr val="111111">
-              <a:alpha val="85000"/>
-            </a:srgbClr>
-          </a:solidFill>
-          <a:ln>
-            <a:noFill/>
-          </a:ln>
-          <a:effectLst/>
-        </p:spPr>
-        <p:style>
-          <a:lnRef idx="1">
-            <a:schemeClr val="accent1"/>
-          </a:lnRef>
-          <a:fillRef idx="3">
-            <a:schemeClr val="accent1"/>
-          </a:fillRef>
-          <a:effectRef idx="2">
-            <a:schemeClr val="accent1"/>
-          </a:effectRef>
-          <a:fontRef idx="minor">
-            <a:schemeClr val="lt1"/>
-          </a:fontRef>
-        </p:style>
-        <p:txBody>
-          <a:bodyPr rtlCol="0" anchor="ctr"/>
-          <a:lstStyle/>
-          <a:p>
-            <a:pPr algn="ctr"/>
-          </a:p>
-        </p:txBody>
-      </p:sp>
-      <p:sp>
-        <p:nvSpPr>
-          <p:cNvPr id="681" name="title"/>
-          <p:cNvSpPr txBox="1"/>
-          <p:nvPr/>
-        </p:nvSpPr>
-        <p:spPr>
-          <a:xfrm>
-            <a:off x="427817" y="424715"/>
-            <a:ext cx="7827264" cy="1183640"/>
-          </a:xfrm>
-          <a:prstGeom prst="rect">
-            <a:avLst/>
-          </a:prstGeom>
-          <a:noFill/>
-        </p:spPr>
-        <p:txBody>
-          <a:bodyPr wrap="square" lIns="76200" rIns="76200" tIns="50800" bIns="50800">
-            <a:spAutoFit/>
-          </a:bodyPr>
-          <a:lstStyle/>
-          <a:p>
-            <a:pPr algn="l">
-              <a:spcAft>
-                <a:spcPts val="300"/>
-              </a:spcAft>
-              <a:defRPr sz="3200">
-                <a:solidFill>
-                  <a:srgbClr val="FFFFFF"/>
-                </a:solidFill>
-                <a:latin typeface="Play"/>
-                <a:ea typeface="Play"/>
-                <a:cs typeface="Play"/>
-              </a:defRPr>
-            </a:pPr>
-            <a:r>
-              <a:rPr sz="3200">
-                <a:solidFill>
-                  <a:srgbClr val="FFFFFF"/>
-                </a:solidFill>
-                <a:latin typeface="Play"/>
-                <a:ea typeface="Play"/>
-                <a:cs typeface="Play"/>
-              </a:rPr>
-              <a:t>Что потребуется: ресурсы и сроки</a:t>
-            </a:r>
-          </a:p>
-        </p:txBody>
-      </p:sp>
-      <p:sp>
-        <p:nvSpPr>
-          <p:cNvPr id="682" name="Rectangle 681"/>
-          <p:cNvSpPr/>
-          <p:nvPr/>
-        </p:nvSpPr>
-        <p:spPr>
-          <a:xfrm>
-            <a:off x="427817" y="3023667"/>
-            <a:ext cx="11312347" cy="77387"/>
-          </a:xfrm>
-          <a:prstGeom prst="rect">
-            <a:avLst/>
-          </a:prstGeom>
-          <a:solidFill>
-            <a:srgbClr val="0077FF"/>
-          </a:solidFill>
-          <a:ln>
-            <a:noFill/>
-          </a:ln>
-        </p:spPr>
-        <p:style>
-          <a:lnRef idx="1">
-            <a:schemeClr val="accent1"/>
-          </a:lnRef>
-          <a:fillRef idx="3">
-            <a:schemeClr val="accent1"/>
-          </a:fillRef>
-          <a:effectRef idx="2">
-            <a:schemeClr val="accent1"/>
-          </a:effectRef>
-          <a:fontRef idx="minor">
-            <a:schemeClr val="lt1"/>
-          </a:fontRef>
-        </p:style>
-        <p:txBody>
-          <a:bodyPr rtlCol="0" anchor="ctr"/>
-          <a:lstStyle/>
-          <a:p>
-            <a:pPr algn="ctr"/>
-          </a:p>
-        </p:txBody>
-      </p:sp>
-      <p:sp>
-        <p:nvSpPr>
-          <p:cNvPr id="683" name="Oval 682"/>
-          <p:cNvSpPr/>
-          <p:nvPr/>
-        </p:nvSpPr>
-        <p:spPr>
-          <a:xfrm>
-            <a:off x="2029452" y="2778605"/>
-            <a:ext cx="567511" cy="567511"/>
-          </a:xfrm>
-          <a:prstGeom prst="ellipse">
-            <a:avLst/>
-          </a:prstGeom>
-          <a:solidFill>
-            <a:srgbClr val="0077FF"/>
-          </a:solidFill>
-          <a:ln>
-            <a:noFill/>
-          </a:ln>
-        </p:spPr>
-        <p:style>
-          <a:lnRef idx="1">
-            <a:schemeClr val="accent1"/>
-          </a:lnRef>
-          <a:fillRef idx="3">
-            <a:schemeClr val="accent1"/>
-          </a:fillRef>
-          <a:effectRef idx="2">
-            <a:schemeClr val="accent1"/>
-          </a:effectRef>
-          <a:fontRef idx="minor">
-            <a:schemeClr val="lt1"/>
-          </a:fontRef>
-        </p:style>
-        <p:txBody>
-          <a:bodyPr rtlCol="0" anchor="ctr"/>
-          <a:lstStyle/>
-          <a:p>
-            <a:pPr algn="ctr"/>
-          </a:p>
-        </p:txBody>
-      </p:sp>
-      <p:sp>
-        <p:nvSpPr>
-          <p:cNvPr id="684" name="TextBox 683"/>
-          <p:cNvSpPr txBox="1"/>
-          <p:nvPr/>
-        </p:nvSpPr>
-        <p:spPr>
-          <a:xfrm>
-            <a:off x="427817" y="1837052"/>
-            <a:ext cx="5656173" cy="980247"/>
-          </a:xfrm>
-          <a:prstGeom prst="rect">
-            <a:avLst/>
-          </a:prstGeom>
-          <a:noFill/>
-        </p:spPr>
-        <p:txBody>
-          <a:bodyPr wrap="square" lIns="12700" rIns="12700" tIns="12700" bIns="12700">
-            <a:spAutoFit/>
-          </a:bodyPr>
-          <a:lstStyle/>
-          <a:p>
-            <a:pPr algn="ctr">
-              <a:defRPr sz="1400" b="0">
-                <a:solidFill>
-                  <a:srgbClr val="FFFFFF"/>
-                </a:solidFill>
-                <a:latin typeface="Play"/>
-                <a:ea typeface="Play"/>
-                <a:cs typeface="Play"/>
-              </a:defRPr>
-            </a:pPr>
-            <a:r>
-              <a:rPr sz="1400" b="0">
-                <a:solidFill>
-                  <a:srgbClr val="FFFFFF"/>
-                </a:solidFill>
-                <a:latin typeface="Play"/>
-                <a:ea typeface="Play"/>
-                <a:cs typeface="Play"/>
-              </a:rPr>
-              <a:t>Третий квартал 2026 подключение 4 команд</a:t>
-            </a:r>
-          </a:p>
-        </p:txBody>
-      </p:sp>
-      <p:sp>
-        <p:nvSpPr>
-          <p:cNvPr id="685" name="Oval 684"/>
-          <p:cNvSpPr/>
-          <p:nvPr/>
-        </p:nvSpPr>
-        <p:spPr>
-          <a:xfrm>
-            <a:off x="5800234" y="2778605"/>
-            <a:ext cx="567511" cy="567511"/>
-          </a:xfrm>
-          <a:prstGeom prst="ellipse">
-            <a:avLst/>
-          </a:prstGeom>
-          <a:solidFill>
-            <a:srgbClr val="0077FF"/>
-          </a:solidFill>
-          <a:ln>
-            <a:noFill/>
-          </a:ln>
-        </p:spPr>
-        <p:style>
-          <a:lnRef idx="1">
-            <a:schemeClr val="accent1"/>
-          </a:lnRef>
-          <a:fillRef idx="3">
-            <a:schemeClr val="accent1"/>
-          </a:fillRef>
-          <a:effectRef idx="2">
-            <a:schemeClr val="accent1"/>
-          </a:effectRef>
-          <a:fontRef idx="minor">
-            <a:schemeClr val="lt1"/>
-          </a:fontRef>
-        </p:style>
-        <p:txBody>
-          <a:bodyPr rtlCol="0" anchor="ctr"/>
-          <a:lstStyle/>
-          <a:p>
-            <a:pPr algn="ctr"/>
-          </a:p>
-        </p:txBody>
-      </p:sp>
-      <p:sp>
-        <p:nvSpPr>
-          <p:cNvPr id="686" name="TextBox 685"/>
-          <p:cNvSpPr txBox="1"/>
-          <p:nvPr/>
-        </p:nvSpPr>
-        <p:spPr>
-          <a:xfrm>
-            <a:off x="3255903" y="3591178"/>
-            <a:ext cx="5656173" cy="980247"/>
-          </a:xfrm>
-          <a:prstGeom prst="rect">
-            <a:avLst/>
-          </a:prstGeom>
-          <a:noFill/>
-        </p:spPr>
-        <p:txBody>
-          <a:bodyPr wrap="square" lIns="12700" rIns="12700" tIns="12700" bIns="12700">
-            <a:spAutoFit/>
-          </a:bodyPr>
-          <a:lstStyle/>
-          <a:p>
-            <a:pPr algn="ctr">
-              <a:defRPr sz="1400" b="0">
-                <a:solidFill>
-                  <a:srgbClr val="FFFFFF"/>
-                </a:solidFill>
-                <a:latin typeface="Play"/>
-                <a:ea typeface="Play"/>
-                <a:cs typeface="Play"/>
-              </a:defRPr>
-            </a:pPr>
-            <a:r>
-              <a:rPr sz="1400" b="0">
-                <a:solidFill>
-                  <a:srgbClr val="FFFFFF"/>
-                </a:solidFill>
-                <a:latin typeface="Play"/>
-                <a:ea typeface="Play"/>
-                <a:cs typeface="Play"/>
-              </a:rPr>
-              <a:t>Четвёртый квартал 2026 доступ для всей компании</a:t>
-            </a:r>
-          </a:p>
-        </p:txBody>
-      </p:sp>
-      <p:sp>
-        <p:nvSpPr>
-          <p:cNvPr id="687" name="Oval 686"/>
-          <p:cNvSpPr/>
-          <p:nvPr/>
-        </p:nvSpPr>
-        <p:spPr>
-          <a:xfrm>
-            <a:off x="9571017" y="2778605"/>
-            <a:ext cx="567511" cy="567511"/>
-          </a:xfrm>
-          <a:prstGeom prst="ellipse">
-            <a:avLst/>
-          </a:prstGeom>
-          <a:solidFill>
-            <a:srgbClr val="0077FF"/>
-          </a:solidFill>
-          <a:ln>
-            <a:noFill/>
-          </a:ln>
-        </p:spPr>
-        <p:style>
-          <a:lnRef idx="1">
-            <a:schemeClr val="accent1"/>
-          </a:lnRef>
-          <a:fillRef idx="3">
-            <a:schemeClr val="accent1"/>
-          </a:fillRef>
-          <a:effectRef idx="2">
-            <a:schemeClr val="accent1"/>
-          </a:effectRef>
-          <a:fontRef idx="minor">
-            <a:schemeClr val="lt1"/>
-          </a:fontRef>
-        </p:style>
-        <p:txBody>
-          <a:bodyPr rtlCol="0" anchor="ctr"/>
-          <a:lstStyle/>
-          <a:p>
-            <a:pPr algn="ctr"/>
-          </a:p>
-        </p:txBody>
-      </p:sp>
-      <p:sp>
-        <p:nvSpPr>
-          <p:cNvPr id="688" name="TextBox 687"/>
-          <p:cNvSpPr txBox="1"/>
-          <p:nvPr/>
-        </p:nvSpPr>
-        <p:spPr>
-          <a:xfrm>
-            <a:off x="6083990" y="1837052"/>
-            <a:ext cx="5656173" cy="980247"/>
-          </a:xfrm>
-          <a:prstGeom prst="rect">
-            <a:avLst/>
-          </a:prstGeom>
-          <a:noFill/>
-        </p:spPr>
-        <p:txBody>
-          <a:bodyPr wrap="square" lIns="12700" rIns="12700" tIns="12700" bIns="12700">
-            <a:spAutoFit/>
-          </a:bodyPr>
-          <a:lstStyle/>
-          <a:p>
-            <a:pPr algn="ctr">
-              <a:defRPr sz="1400" b="0">
-                <a:solidFill>
-                  <a:srgbClr val="FFFFFF"/>
-                </a:solidFill>
-                <a:latin typeface="Play"/>
-                <a:ea typeface="Play"/>
-                <a:cs typeface="Play"/>
-              </a:defRPr>
-            </a:pPr>
-            <a:r>
-              <a:rPr sz="1400" b="0">
-                <a:solidFill>
-                  <a:srgbClr val="FFFFFF"/>
-                </a:solidFill>
-                <a:latin typeface="Play"/>
-                <a:ea typeface="Play"/>
-                <a:cs typeface="Play"/>
-              </a:rPr>
-              <a:t>Первый квартал 2027 генерация иллюстраций</a:t>
-            </a:r>
-          </a:p>
-        </p:txBody>
-      </p:sp>
-      <p:sp>
-        <p:nvSpPr>
-          <p:cNvPr id="689" name="body"/>
-          <p:cNvSpPr txBox="1"/>
-          <p:nvPr/>
-        </p:nvSpPr>
-        <p:spPr>
-          <a:xfrm>
-            <a:off x="427817" y="4588101"/>
-            <a:ext cx="11312347" cy="1341120"/>
-          </a:xfrm>
-          <a:prstGeom prst="rect">
-            <a:avLst/>
-          </a:prstGeom>
-          <a:noFill/>
-        </p:spPr>
-        <p:txBody>
-          <a:bodyPr wrap="square" lIns="76200" rIns="76200" tIns="50800" bIns="50800">
-            <a:spAutoFit/>
-          </a:bodyPr>
-          <a:lstStyle/>
-          <a:p>
-            <a:pPr algn="l">
-              <a:spcAft>
-                <a:spcPts val="300"/>
-              </a:spcAft>
-              <a:defRPr sz="1600">
-                <a:solidFill>
-                  <a:srgbClr val="FFFFFF"/>
-                </a:solidFill>
-                <a:latin typeface="Play"/>
-                <a:ea typeface="Play"/>
-                <a:cs typeface="Play"/>
-              </a:defRPr>
-            </a:pPr>
-            <a:r>
-              <a:rPr sz="1600">
-                <a:solidFill>
-                  <a:srgbClr val="FFFFFF"/>
-                </a:solidFill>
-                <a:latin typeface="Play"/>
-                <a:ea typeface="Play"/>
-                <a:cs typeface="Play"/>
-              </a:rPr>
-              <a:t>• Сервис работает на 2 vCPU / 2 ГБ RAM</a:t>
-            </a:r>
-          </a:p>
-          <a:p>
-            <a:pPr algn="l">
-              <a:spcAft>
-                <a:spcPts val="300"/>
-              </a:spcAft>
-              <a:defRPr sz="1600">
-                <a:solidFill>
-                  <a:srgbClr val="FFFFFF"/>
-                </a:solidFill>
-                <a:latin typeface="Play"/>
-                <a:ea typeface="Play"/>
-                <a:cs typeface="Play"/>
-              </a:defRPr>
-            </a:pPr>
-            <a:r>
-              <a:rPr sz="1600">
-                <a:solidFill>
-                  <a:srgbClr val="FFFFFF"/>
-                </a:solidFill>
-                <a:latin typeface="Play"/>
-                <a:ea typeface="Play"/>
-                <a:cs typeface="Play"/>
-              </a:rPr>
-              <a:t>• Инференс за 6 недель 1 400 руб</a:t>
-            </a:r>
-          </a:p>
-          <a:p>
-            <a:pPr algn="l">
-              <a:spcAft>
-                <a:spcPts val="300"/>
-              </a:spcAft>
-              <a:defRPr sz="1600">
-                <a:solidFill>
-                  <a:srgbClr val="FFFFFF"/>
-                </a:solidFill>
-                <a:latin typeface="Play"/>
-                <a:ea typeface="Play"/>
-                <a:cs typeface="Play"/>
-              </a:defRPr>
-            </a:pPr>
-            <a:r>
-              <a:rPr sz="1600">
-                <a:solidFill>
-                  <a:srgbClr val="FFFFFF"/>
-                </a:solidFill>
-                <a:latin typeface="Play"/>
-                <a:ea typeface="Play"/>
-                <a:cs typeface="Play"/>
-              </a:rPr>
-              <a:t>• Модель gpt-oss-20b подключается по OpenAI-совместимому протоколу</a:t>
-            </a:r>
-          </a:p>
-        </p:txBody>
-      </p:sp>
-    </p:spTree>
-  </p:cSld>
-  <p:clrMapOvr>
-    <a:masterClrMapping/>
-  </p:clrMapOvr>
-</p:sld>
-</file>
-
-<file path=ppt/slides/slide35.xml><?xml version="1.0" encoding="utf-8"?>
-<p:sld xmlns:a="http://schemas.openxmlformats.org/drawingml/2006/main" xmlns:p="http://schemas.openxmlformats.org/presentationml/2006/main" xmlns:r="http://schemas.openxmlformats.org/officeDocument/2006/relationships">
-  <p:cSld>
-    <p:spTree>
-      <p:nvGrpSpPr>
-        <p:cNvPr id="1" name=""/>
-        <p:cNvGrpSpPr/>
-        <p:nvPr/>
-      </p:nvGrpSpPr>
-      <p:grpSpPr/>
-      <p:sp>
-        <p:nvSpPr>
-          <p:cNvPr id="2" name="title"/>
-          <p:cNvSpPr txBox="1"/>
-          <p:nvPr/>
-        </p:nvSpPr>
-        <p:spPr>
-          <a:xfrm>
-            <a:off x="429280" y="424715"/>
-            <a:ext cx="7827264" cy="822960"/>
-          </a:xfrm>
-          <a:prstGeom prst="rect">
-            <a:avLst/>
-          </a:prstGeom>
-          <a:noFill/>
-        </p:spPr>
-        <p:txBody>
-          <a:bodyPr wrap="square" lIns="76200" rIns="76200" tIns="50800" bIns="50800">
-            <a:spAutoFit/>
-          </a:bodyPr>
-          <a:lstStyle/>
-          <a:p>
-            <a:pPr algn="l">
-              <a:spcAft>
-                <a:spcPts val="300"/>
-              </a:spcAft>
-              <a:defRPr sz="4000">
-                <a:solidFill>
-                  <a:srgbClr val="FFFFFF"/>
-                </a:solidFill>
-                <a:latin typeface="Play"/>
-                <a:ea typeface="Play"/>
-                <a:cs typeface="Play"/>
-              </a:defRPr>
-            </a:pPr>
-            <a:r>
-              <a:rPr sz="4000">
-                <a:solidFill>
-                  <a:srgbClr val="FFFFFF"/>
-                </a:solidFill>
-                <a:latin typeface="Play"/>
-                <a:ea typeface="Play"/>
-                <a:cs typeface="Play"/>
-              </a:rPr>
-              <a:t>Риски</a:t>
-            </a:r>
-          </a:p>
-        </p:txBody>
-      </p:sp>
-      <p:sp>
-        <p:nvSpPr>
-          <p:cNvPr id="3" name="lead"/>
-          <p:cNvSpPr txBox="1"/>
-          <p:nvPr/>
-        </p:nvSpPr>
-        <p:spPr>
-          <a:xfrm>
-            <a:off x="429280" y="2431298"/>
-            <a:ext cx="7827264" cy="1265898"/>
-          </a:xfrm>
-          <a:prstGeom prst="rect">
-            <a:avLst/>
-          </a:prstGeom>
-          <a:noFill/>
-        </p:spPr>
-        <p:txBody>
-          <a:bodyPr wrap="square" lIns="76200" rIns="76200" tIns="50800" bIns="50800">
-            <a:spAutoFit/>
-          </a:bodyPr>
-          <a:lstStyle/>
-          <a:p>
-            <a:pPr algn="l">
-              <a:spcAft>
-                <a:spcPts val="300"/>
-              </a:spcAft>
-              <a:defRPr sz="3200">
-                <a:solidFill>
-                  <a:srgbClr val="FFFFFF"/>
-                </a:solidFill>
-                <a:latin typeface="Play"/>
-                <a:ea typeface="Play"/>
-                <a:cs typeface="Play"/>
-              </a:defRPr>
-            </a:pPr>
-            <a:r>
-              <a:rPr sz="3200">
-                <a:solidFill>
-                  <a:srgbClr val="FFFFFF"/>
-                </a:solidFill>
-                <a:latin typeface="Play"/>
-                <a:ea typeface="Play"/>
-                <a:cs typeface="Play"/>
-              </a:rPr>
-              <a:t>Слабая модель может выдумать цифру, аудит проверяет каждое число</a:t>
-            </a:r>
-          </a:p>
-        </p:txBody>
-      </p:sp>
-      <p:sp>
-        <p:nvSpPr>
-          <p:cNvPr id="4" name="body"/>
-          <p:cNvSpPr txBox="1"/>
-          <p:nvPr/>
-        </p:nvSpPr>
-        <p:spPr>
-          <a:xfrm>
-            <a:off x="429280" y="3862809"/>
-            <a:ext cx="7827264" cy="1328696"/>
-          </a:xfrm>
-          <a:prstGeom prst="rect">
-            <a:avLst/>
-          </a:prstGeom>
-          <a:noFill/>
-        </p:spPr>
-        <p:txBody>
-          <a:bodyPr wrap="square" lIns="76200" rIns="76200" tIns="50800" bIns="50800">
-            <a:spAutoFit/>
-          </a:bodyPr>
-          <a:lstStyle/>
-          <a:p>
-            <a:pPr algn="l">
-              <a:spcAft>
-                <a:spcPts val="300"/>
-              </a:spcAft>
-              <a:defRPr sz="2000">
-                <a:solidFill>
-                  <a:srgbClr val="FFFFFF"/>
-                </a:solidFill>
-                <a:latin typeface="Play"/>
-                <a:ea typeface="Play"/>
-                <a:cs typeface="Play"/>
-              </a:defRPr>
-            </a:pPr>
-            <a:r>
-              <a:rPr sz="2000">
-                <a:solidFill>
-                  <a:srgbClr val="FFFFFF"/>
-                </a:solidFill>
-                <a:latin typeface="Play"/>
-                <a:ea typeface="Play"/>
-                <a:cs typeface="Play"/>
-              </a:rPr>
-              <a:t>• Незнакомый шаблон может быть плохо сделанным, сервис использует рабочую область</a:t>
-            </a:r>
-          </a:p>
-          <a:p>
-            <a:pPr algn="l">
-              <a:spcAft>
-                <a:spcPts val="300"/>
-              </a:spcAft>
-              <a:defRPr sz="2000">
-                <a:solidFill>
-                  <a:srgbClr val="FFFFFF"/>
-                </a:solidFill>
-                <a:latin typeface="Play"/>
-                <a:ea typeface="Play"/>
-                <a:cs typeface="Play"/>
-              </a:defRPr>
-            </a:pPr>
-            <a:r>
-              <a:rPr sz="2000">
-                <a:solidFill>
-                  <a:srgbClr val="FFFFFF"/>
-                </a:solidFill>
-                <a:latin typeface="Play"/>
-                <a:ea typeface="Play"/>
-                <a:cs typeface="Play"/>
-              </a:rPr>
-              <a:t>• Нагрузка выше 20 задач требует внешней очереди</a:t>
-            </a:r>
-          </a:p>
-        </p:txBody>
-      </p:sp>
-    </p:spTree>
-  </p:cSld>
-  <p:clrMapOvr>
-    <a:masterClrMapping/>
-  </p:clrMapOvr>
-</p:sld>
-</file>
-
-<file path=ppt/slides/slide36.xml><?xml version="1.0" encoding="utf-8"?>
-<p:sld xmlns:a="http://schemas.openxmlformats.org/drawingml/2006/main" xmlns:p="http://schemas.openxmlformats.org/presentationml/2006/main" xmlns:r="http://schemas.openxmlformats.org/officeDocument/2006/relationships">
-  <p:cSld>
-    <p:spTree>
-      <p:nvGrpSpPr>
-        <p:cNvPr id="1" name=""/>
-        <p:cNvGrpSpPr/>
-        <p:nvPr/>
-      </p:nvGrpSpPr>
-      <p:grpSpPr/>
-      <p:sp>
-        <p:nvSpPr>
-          <p:cNvPr id="679" name="Google Shape;679;p31"/>
-          <p:cNvSpPr/>
-          <p:nvPr/>
-        </p:nvSpPr>
-        <p:spPr>
-          <a:xfrm>
-            <a:off x="0" y="4748271"/>
-            <a:ext cx="12192000" cy="2109730"/>
-          </a:xfrm>
-          <a:prstGeom prst="rect">
-            <a:avLst/>
-          </a:prstGeom>
-          <a:gradFill>
-            <a:gsLst>
-              <a:gs pos="0">
-                <a:srgbClr val="0077FF">
-                  <a:alpha val="61961"/>
-                </a:srgbClr>
-              </a:gs>
-              <a:gs pos="99000">
-                <a:srgbClr val="00AEE8"/>
-              </a:gs>
-              <a:gs pos="100000">
-                <a:srgbClr val="00AEE8"/>
-              </a:gs>
-            </a:gsLst>
-            <a:lin ang="14400000" scaled="0"/>
-          </a:gradFill>
-          <a:ln>
-            <a:noFill/>
-          </a:ln>
-        </p:spPr>
-        <p:txBody>
-          <a:bodyPr anchorCtr="0" anchor="ctr" bIns="0" lIns="108000" spcFirstLastPara="1" rIns="91425" wrap="square" tIns="0">
-            <a:noAutofit/>
-          </a:bodyPr>
-          <a:lstStyle/>
-          <a:p>
-            <a:pPr indent="0" lvl="0" marL="0" marR="0" rtl="0" algn="l">
-              <a:spcBef>
-                <a:spcPts val="0"/>
-              </a:spcBef>
-              <a:spcAft>
-                <a:spcPts val="0"/>
-              </a:spcAft>
-              <a:buNone/>
-            </a:pPr>
-            <a:r>
-              <a:t/>
-            </a:r>
-            <a:endParaRPr sz="1100">
-              <a:solidFill>
-                <a:schemeClr val="lt1"/>
-              </a:solidFill>
-              <a:latin typeface="Play"/>
-              <a:ea typeface="Play"/>
-              <a:cs typeface="Play"/>
-              <a:sym typeface="Play"/>
-            </a:endParaRPr>
-          </a:p>
-        </p:txBody>
-      </p:sp>
-      <p:sp>
-        <p:nvSpPr>
-          <p:cNvPr id="680" name="Rounded Rectangle 679"/>
-          <p:cNvSpPr/>
-          <p:nvPr/>
-        </p:nvSpPr>
-        <p:spPr>
-          <a:xfrm>
-            <a:off x="300817" y="297715"/>
-            <a:ext cx="8081264" cy="5563696"/>
           </a:xfrm>
           <a:prstGeom prst="roundRect">
             <a:avLst/>
@@ -11832,7 +10715,7 @@
               <a:spcAft>
                 <a:spcPts val="300"/>
               </a:spcAft>
-              <a:defRPr sz="4000">
+              <a:defRPr sz="3200">
                 <a:solidFill>
                   <a:srgbClr val="FFFFFF"/>
                 </a:solidFill>
@@ -11842,7 +10725,7 @@
               </a:defRPr>
             </a:pPr>
             <a:r>
-              <a:rPr sz="4000">
+              <a:rPr sz="3200">
                 <a:solidFill>
                   <a:srgbClr val="FFFFFF"/>
                 </a:solidFill>
@@ -11850,21 +10733,39 @@
                 <a:ea typeface="Play"/>
                 <a:cs typeface="Play"/>
               </a:rPr>
-              <a:t>План пилота</a:t>
+              <a:t>Результаты пилота: время</a:t>
             </a:r>
           </a:p>
         </p:txBody>
       </p:sp>
+      <p:graphicFrame>
+        <p:nvGraphicFramePr>
+          <p:cNvPr id="682" name="Chart 681"/>
+          <p:cNvGraphicFramePr>
+            <a:graphicFrameLocks noGrp="1"/>
+          </p:cNvGraphicFramePr>
+          <p:nvPr/>
+        </p:nvGraphicFramePr>
+        <p:xfrm>
+          <a:off x="427817" y="1837052"/>
+          <a:ext cx="11312347" cy="2579598"/>
+        </p:xfrm>
+        <a:graphic>
+          <a:graphicData uri="http://schemas.openxmlformats.org/drawingml/2006/chart">
+            <c:chart xmlns:c="http://schemas.openxmlformats.org/drawingml/2006/chart" r:id="rId2"/>
+          </a:graphicData>
+        </a:graphic>
+      </p:graphicFrame>
       <p:sp>
         <p:nvSpPr>
-          <p:cNvPr id="682" name="lead"/>
+          <p:cNvPr id="683" name="body"/>
           <p:cNvSpPr txBox="1"/>
           <p:nvPr/>
         </p:nvSpPr>
         <p:spPr>
           <a:xfrm>
-            <a:off x="427817" y="1837052"/>
-            <a:ext cx="7827264" cy="1701110"/>
+            <a:off x="427817" y="4588101"/>
+            <a:ext cx="11312347" cy="1341120"/>
           </a:xfrm>
           <a:prstGeom prst="rect">
             <a:avLst/>
@@ -11881,7 +10782,7 @@
               <a:spcAft>
                 <a:spcPts val="300"/>
               </a:spcAft>
-              <a:defRPr sz="3200">
+              <a:defRPr sz="1600">
                 <a:solidFill>
                   <a:srgbClr val="FFFFFF"/>
                 </a:solidFill>
@@ -11891,7 +10792,7 @@
               </a:defRPr>
             </a:pPr>
             <a:r>
-              <a:rPr sz="3200">
+              <a:rPr sz="1600">
                 <a:solidFill>
                   <a:srgbClr val="FFFFFF"/>
                 </a:solidFill>
@@ -11899,21 +10800,145 @@
                 <a:ea typeface="Play"/>
                 <a:cs typeface="Play"/>
               </a:rPr>
-              <a:t>Третий квартал 2026 подключение 4 команд, домен и HTTPS</a:t>
+              <a:t>• 68 презентаций собраны за 6 недель</a:t>
+            </a:r>
+          </a:p>
+          <a:p>
+            <a:pPr algn="l">
+              <a:spcAft>
+                <a:spcPts val="300"/>
+              </a:spcAft>
+              <a:defRPr sz="1600">
+                <a:solidFill>
+                  <a:srgbClr val="FFFFFF"/>
+                </a:solidFill>
+                <a:latin typeface="Play"/>
+                <a:ea typeface="Play"/>
+                <a:cs typeface="Play"/>
+              </a:defRPr>
+            </a:pPr>
+            <a:r>
+              <a:rPr sz="1600">
+                <a:solidFill>
+                  <a:srgbClr val="FFFFFF"/>
+                </a:solidFill>
+                <a:latin typeface="Play"/>
+                <a:ea typeface="Play"/>
+                <a:cs typeface="Play"/>
+              </a:rPr>
+              <a:t>• Средняя сборка 4 минуты вместо 186</a:t>
+            </a:r>
+          </a:p>
+          <a:p>
+            <a:pPr algn="l">
+              <a:spcAft>
+                <a:spcPts val="300"/>
+              </a:spcAft>
+              <a:defRPr sz="1600">
+                <a:solidFill>
+                  <a:srgbClr val="FFFFFF"/>
+                </a:solidFill>
+                <a:latin typeface="Play"/>
+                <a:ea typeface="Play"/>
+                <a:cs typeface="Play"/>
+              </a:defRPr>
+            </a:pPr>
+            <a:r>
+              <a:rPr sz="1600">
+                <a:solidFill>
+                  <a:srgbClr val="FFFFFF"/>
+                </a:solidFill>
+                <a:latin typeface="Play"/>
+                <a:ea typeface="Play"/>
+                <a:cs typeface="Play"/>
+              </a:rPr>
+              <a:t>• Время до первой версии сократилось с 6 дней до 1</a:t>
             </a:r>
           </a:p>
         </p:txBody>
       </p:sp>
+    </p:spTree>
+  </p:cSld>
+  <p:clrMapOvr>
+    <a:masterClrMapping/>
+  </p:clrMapOvr>
+</p:sld>
+</file>
+
+<file path=ppt/slides/slide34.xml><?xml version="1.0" encoding="utf-8"?>
+<p:sld xmlns:a="http://schemas.openxmlformats.org/drawingml/2006/main" xmlns:p="http://schemas.openxmlformats.org/presentationml/2006/main" xmlns:r="http://schemas.openxmlformats.org/officeDocument/2006/relationships">
+  <p:cSld>
+    <p:spTree>
+      <p:nvGrpSpPr>
+        <p:cNvPr id="1" name=""/>
+        <p:cNvGrpSpPr/>
+        <p:nvPr/>
+      </p:nvGrpSpPr>
+      <p:grpSpPr/>
+      <p:pic>
+        <p:nvPicPr>
+          <p:cNvPr id="620" name="Google Shape;620;p28"/>
+          <p:cNvPicPr preferRelativeResize="0"/>
+          <p:nvPr/>
+        </p:nvPicPr>
+        <p:blipFill rotWithShape="1">
+          <a:blip r:embed="rId3">
+            <a:alphaModFix/>
+          </a:blip>
+          <a:srcRect b="0" l="0" r="0" t="0"/>
+          <a:stretch/>
+        </p:blipFill>
+        <p:spPr>
+          <a:xfrm>
+            <a:off x="398723" y="6160516"/>
+            <a:ext cx="1857481" cy="292671"/>
+          </a:xfrm>
+          <a:prstGeom prst="rect">
+            <a:avLst/>
+          </a:prstGeom>
+          <a:noFill/>
+          <a:ln>
+            <a:noFill/>
+          </a:ln>
+        </p:spPr>
+      </p:pic>
+      <p:pic>
+        <p:nvPicPr>
+          <p:cNvPr descr=" " id="621" name="Google Shape;621;p28"/>
+          <p:cNvPicPr preferRelativeResize="0"/>
+          <p:nvPr/>
+        </p:nvPicPr>
+        <p:blipFill rotWithShape="1">
+          <a:blip r:embed="rId4">
+            <a:alphaModFix/>
+          </a:blip>
+          <a:srcRect b="0" l="0" r="0" t="0"/>
+          <a:stretch/>
+        </p:blipFill>
+        <p:spPr>
+          <a:xfrm>
+            <a:off x="11093496" y="6238282"/>
+            <a:ext cx="690517" cy="216000"/>
+          </a:xfrm>
+          <a:prstGeom prst="rect">
+            <a:avLst/>
+          </a:prstGeom>
+          <a:noFill/>
+          <a:ln>
+            <a:noFill/>
+          </a:ln>
+        </p:spPr>
+      </p:pic>
       <p:sp>
         <p:nvSpPr>
-          <p:cNvPr id="683" name="body"/>
+          <p:cNvPr id="622" name="title"/>
           <p:cNvSpPr txBox="1"/>
           <p:nvPr/>
         </p:nvSpPr>
         <p:spPr>
           <a:xfrm>
-            <a:off x="427817" y="3783692"/>
-            <a:ext cx="7827264" cy="2145528"/>
+            <a:off x="429280" y="424715"/>
+            <a:ext cx="7827264" cy="1183640"/>
           </a:xfrm>
           <a:prstGeom prst="rect">
             <a:avLst/>
@@ -11930,6 +10955,215 @@
               <a:spcAft>
                 <a:spcPts val="300"/>
               </a:spcAft>
+              <a:defRPr sz="3200">
+                <a:solidFill>
+                  <a:srgbClr val="FFFFFF"/>
+                </a:solidFill>
+                <a:latin typeface="Play"/>
+                <a:ea typeface="Play"/>
+                <a:cs typeface="Play"/>
+              </a:defRPr>
+            </a:pPr>
+            <a:r>
+              <a:rPr sz="3200">
+                <a:solidFill>
+                  <a:srgbClr val="FFFFFF"/>
+                </a:solidFill>
+                <a:latin typeface="Play"/>
+                <a:ea typeface="Play"/>
+                <a:cs typeface="Play"/>
+              </a:rPr>
+              <a:t>Результаты пилота: качество и нагрузка</a:t>
+            </a:r>
+          </a:p>
+        </p:txBody>
+      </p:sp>
+      <p:graphicFrame>
+        <p:nvGraphicFramePr>
+          <p:cNvPr id="623" name="Chart 622"/>
+          <p:cNvGraphicFramePr>
+            <a:graphicFrameLocks noGrp="1"/>
+          </p:cNvGraphicFramePr>
+          <p:nvPr/>
+        </p:nvGraphicFramePr>
+        <p:xfrm>
+          <a:off x="429280" y="1745515"/>
+          <a:ext cx="11310884" cy="2549047"/>
+        </p:xfrm>
+        <a:graphic>
+          <a:graphicData uri="http://schemas.openxmlformats.org/drawingml/2006/chart">
+            <c:chart xmlns:c="http://schemas.openxmlformats.org/drawingml/2006/chart" r:id="rId5"/>
+          </a:graphicData>
+        </a:graphic>
+      </p:graphicFrame>
+      <p:sp>
+        <p:nvSpPr>
+          <p:cNvPr id="624" name="body"/>
+          <p:cNvSpPr txBox="1"/>
+          <p:nvPr/>
+        </p:nvSpPr>
+        <p:spPr>
+          <a:xfrm>
+            <a:off x="429280" y="4466013"/>
+            <a:ext cx="11310884" cy="944880"/>
+          </a:xfrm>
+          <a:prstGeom prst="rect">
+            <a:avLst/>
+          </a:prstGeom>
+          <a:noFill/>
+        </p:spPr>
+        <p:txBody>
+          <a:bodyPr wrap="square" lIns="76200" rIns="76200" tIns="50800" bIns="50800">
+            <a:spAutoFit/>
+          </a:bodyPr>
+          <a:lstStyle/>
+          <a:p>
+            <a:pPr algn="l">
+              <a:spcAft>
+                <a:spcPts val="300"/>
+              </a:spcAft>
+              <a:defRPr sz="2000">
+                <a:solidFill>
+                  <a:srgbClr val="FFFFFF"/>
+                </a:solidFill>
+                <a:latin typeface="Play"/>
+                <a:ea typeface="Play"/>
+                <a:cs typeface="Play"/>
+              </a:defRPr>
+            </a:pPr>
+            <a:r>
+              <a:rPr sz="2000">
+                <a:solidFill>
+                  <a:srgbClr val="FFFFFF"/>
+                </a:solidFill>
+                <a:latin typeface="Play"/>
+                <a:ea typeface="Play"/>
+                <a:cs typeface="Play"/>
+              </a:rPr>
+              <a:t>• Нарушений фирменного стиля 2 из 68 колод</a:t>
+            </a:r>
+          </a:p>
+          <a:p>
+            <a:pPr algn="l">
+              <a:spcAft>
+                <a:spcPts val="300"/>
+              </a:spcAft>
+              <a:defRPr sz="2000">
+                <a:solidFill>
+                  <a:srgbClr val="FFFFFF"/>
+                </a:solidFill>
+                <a:latin typeface="Play"/>
+                <a:ea typeface="Play"/>
+                <a:cs typeface="Play"/>
+              </a:defRPr>
+            </a:pPr>
+            <a:r>
+              <a:rPr sz="2000">
+                <a:solidFill>
+                  <a:srgbClr val="FFFFFF"/>
+                </a:solidFill>
+                <a:latin typeface="Play"/>
+                <a:ea typeface="Play"/>
+                <a:cs typeface="Play"/>
+              </a:rPr>
+              <a:t>• Дизайнеры закрыли 38 запросов вместо 11 в неделю</a:t>
+            </a:r>
+          </a:p>
+        </p:txBody>
+      </p:sp>
+    </p:spTree>
+  </p:cSld>
+  <p:clrMapOvr>
+    <a:masterClrMapping/>
+  </p:clrMapOvr>
+</p:sld>
+</file>
+
+<file path=ppt/slides/slide35.xml><?xml version="1.0" encoding="utf-8"?>
+<p:sld xmlns:a="http://schemas.openxmlformats.org/drawingml/2006/main" xmlns:p="http://schemas.openxmlformats.org/presentationml/2006/main" xmlns:r="http://schemas.openxmlformats.org/officeDocument/2006/relationships">
+  <p:cSld>
+    <p:spTree>
+      <p:nvGrpSpPr>
+        <p:cNvPr id="1" name=""/>
+        <p:cNvGrpSpPr/>
+        <p:nvPr/>
+      </p:nvGrpSpPr>
+      <p:grpSpPr/>
+      <p:sp>
+        <p:nvSpPr>
+          <p:cNvPr id="2" name="title"/>
+          <p:cNvSpPr txBox="1"/>
+          <p:nvPr/>
+        </p:nvSpPr>
+        <p:spPr>
+          <a:xfrm>
+            <a:off x="429280" y="424715"/>
+            <a:ext cx="7827264" cy="822960"/>
+          </a:xfrm>
+          <a:prstGeom prst="rect">
+            <a:avLst/>
+          </a:prstGeom>
+          <a:noFill/>
+        </p:spPr>
+        <p:txBody>
+          <a:bodyPr wrap="square" lIns="76200" rIns="76200" tIns="50800" bIns="50800">
+            <a:spAutoFit/>
+          </a:bodyPr>
+          <a:lstStyle/>
+          <a:p>
+            <a:pPr algn="l">
+              <a:spcAft>
+                <a:spcPts val="300"/>
+              </a:spcAft>
+              <a:defRPr sz="4000">
+                <a:solidFill>
+                  <a:srgbClr val="FFFFFF"/>
+                </a:solidFill>
+                <a:latin typeface="Play"/>
+                <a:ea typeface="Play"/>
+                <a:cs typeface="Play"/>
+              </a:defRPr>
+            </a:pPr>
+            <a:r>
+              <a:rPr sz="4000">
+                <a:solidFill>
+                  <a:srgbClr val="FFFFFF"/>
+                </a:solidFill>
+                <a:latin typeface="Play"/>
+                <a:ea typeface="Play"/>
+                <a:cs typeface="Play"/>
+              </a:rPr>
+              <a:t>Стоимость и ресурсы</a:t>
+            </a:r>
+          </a:p>
+        </p:txBody>
+      </p:sp>
+      <p:sp>
+        <p:nvSpPr>
+          <p:cNvPr id="3" name="lead"/>
+          <p:cNvSpPr txBox="1"/>
+          <p:nvPr/>
+        </p:nvSpPr>
+        <p:spPr>
+          <a:xfrm>
+            <a:off x="429280" y="2431298"/>
+            <a:ext cx="7827264" cy="1021276"/>
+          </a:xfrm>
+          <a:prstGeom prst="rect">
+            <a:avLst/>
+          </a:prstGeom>
+          <a:noFill/>
+        </p:spPr>
+        <p:txBody>
+          <a:bodyPr wrap="square" lIns="76200" rIns="76200" tIns="50800" bIns="50800">
+            <a:spAutoFit/>
+          </a:bodyPr>
+          <a:lstStyle/>
+          <a:p>
+            <a:pPr algn="l">
+              <a:spcAft>
+                <a:spcPts val="300"/>
+              </a:spcAft>
               <a:defRPr sz="2800">
                 <a:solidFill>
                   <a:srgbClr val="FFFFFF"/>
@@ -11948,15 +11182,38 @@
                 <a:ea typeface="Play"/>
                 <a:cs typeface="Play"/>
               </a:rPr>
-              <a:t>• Четвёртый квартал 2026 доступ для всей компании, интеграция с хранилищем</a:t>
+              <a:t>Сервис работает на 2 vCPU / 2 ГБ RAM</a:t>
             </a:r>
           </a:p>
+        </p:txBody>
+      </p:sp>
+      <p:sp>
+        <p:nvSpPr>
+          <p:cNvPr id="4" name="body"/>
+          <p:cNvSpPr txBox="1"/>
+          <p:nvPr/>
+        </p:nvSpPr>
+        <p:spPr>
+          <a:xfrm>
+            <a:off x="429280" y="3618187"/>
+            <a:ext cx="7827264" cy="1573318"/>
+          </a:xfrm>
+          <a:prstGeom prst="rect">
+            <a:avLst/>
+          </a:prstGeom>
+          <a:noFill/>
+        </p:spPr>
+        <p:txBody>
+          <a:bodyPr wrap="square" lIns="76200" rIns="76200" tIns="50800" bIns="50800">
+            <a:spAutoFit/>
+          </a:bodyPr>
+          <a:lstStyle/>
           <a:p>
             <a:pPr algn="l">
               <a:spcAft>
                 <a:spcPts val="300"/>
               </a:spcAft>
-              <a:defRPr sz="2800">
+              <a:defRPr sz="2000">
                 <a:solidFill>
                   <a:srgbClr val="FFFFFF"/>
                 </a:solidFill>
@@ -11966,7 +11223,7 @@
               </a:defRPr>
             </a:pPr>
             <a:r>
-              <a:rPr sz="2800">
+              <a:rPr sz="2000">
                 <a:solidFill>
                   <a:srgbClr val="FFFFFF"/>
                 </a:solidFill>
@@ -11974,7 +11231,640 @@
                 <a:ea typeface="Play"/>
                 <a:cs typeface="Play"/>
               </a:rPr>
-              <a:t>• Первый квартал 2027 генерация иллюстраций под стиль шаблона</a:t>
+              <a:t>• Модель gpt-oss-20b подключается по OpenAI-совместимому протоколу</a:t>
+            </a:r>
+          </a:p>
+          <a:p>
+            <a:pPr algn="l">
+              <a:spcAft>
+                <a:spcPts val="300"/>
+              </a:spcAft>
+              <a:defRPr sz="2000">
+                <a:solidFill>
+                  <a:srgbClr val="FFFFFF"/>
+                </a:solidFill>
+                <a:latin typeface="Play"/>
+                <a:ea typeface="Play"/>
+                <a:cs typeface="Play"/>
+              </a:defRPr>
+            </a:pPr>
+            <a:r>
+              <a:rPr sz="2000">
+                <a:solidFill>
+                  <a:srgbClr val="FFFFFF"/>
+                </a:solidFill>
+                <a:latin typeface="Play"/>
+                <a:ea typeface="Play"/>
+                <a:cs typeface="Play"/>
+              </a:rPr>
+              <a:t>• Стоимость инференса за 6 недель 1 400 рублей</a:t>
+            </a:r>
+          </a:p>
+        </p:txBody>
+      </p:sp>
+    </p:spTree>
+  </p:cSld>
+  <p:clrMapOvr>
+    <a:masterClrMapping/>
+  </p:clrMapOvr>
+</p:sld>
+</file>
+
+<file path=ppt/slides/slide36.xml><?xml version="1.0" encoding="utf-8"?>
+<p:sld xmlns:a="http://schemas.openxmlformats.org/drawingml/2006/main" xmlns:p="http://schemas.openxmlformats.org/presentationml/2006/main" xmlns:r="http://schemas.openxmlformats.org/officeDocument/2006/relationships">
+  <p:cSld>
+    <p:spTree>
+      <p:nvGrpSpPr>
+        <p:cNvPr id="1" name=""/>
+        <p:cNvGrpSpPr/>
+        <p:nvPr/>
+      </p:nvGrpSpPr>
+      <p:grpSpPr/>
+      <p:sp>
+        <p:nvSpPr>
+          <p:cNvPr id="2" name="title"/>
+          <p:cNvSpPr txBox="1"/>
+          <p:nvPr/>
+        </p:nvSpPr>
+        <p:spPr>
+          <a:xfrm>
+            <a:off x="429280" y="424715"/>
+            <a:ext cx="7827264" cy="822960"/>
+          </a:xfrm>
+          <a:prstGeom prst="rect">
+            <a:avLst/>
+          </a:prstGeom>
+          <a:noFill/>
+        </p:spPr>
+        <p:txBody>
+          <a:bodyPr wrap="square" lIns="76200" rIns="76200" tIns="50800" bIns="50800">
+            <a:spAutoFit/>
+          </a:bodyPr>
+          <a:lstStyle/>
+          <a:p>
+            <a:pPr algn="l">
+              <a:spcAft>
+                <a:spcPts val="300"/>
+              </a:spcAft>
+              <a:defRPr sz="3200">
+                <a:solidFill>
+                  <a:srgbClr val="FFFFFF"/>
+                </a:solidFill>
+                <a:latin typeface="Play"/>
+                <a:ea typeface="Play"/>
+                <a:cs typeface="Play"/>
+              </a:defRPr>
+            </a:pPr>
+            <a:r>
+              <a:rPr sz="3200">
+                <a:solidFill>
+                  <a:srgbClr val="FFFFFF"/>
+                </a:solidFill>
+                <a:latin typeface="Play"/>
+                <a:ea typeface="Play"/>
+                <a:cs typeface="Play"/>
+              </a:rPr>
+              <a:t>Риски</a:t>
+            </a:r>
+          </a:p>
+        </p:txBody>
+      </p:sp>
+      <p:sp>
+        <p:nvSpPr>
+          <p:cNvPr id="3" name="Oval 2"/>
+          <p:cNvSpPr/>
+          <p:nvPr/>
+        </p:nvSpPr>
+        <p:spPr>
+          <a:xfrm>
+            <a:off x="1713709" y="1567636"/>
+            <a:ext cx="1100894" cy="1100894"/>
+          </a:xfrm>
+          <a:prstGeom prst="ellipse">
+            <a:avLst/>
+          </a:prstGeom>
+          <a:solidFill>
+            <a:srgbClr val="0077FF"/>
+          </a:solidFill>
+          <a:ln>
+            <a:noFill/>
+          </a:ln>
+        </p:spPr>
+        <p:style>
+          <a:lnRef idx="1">
+            <a:schemeClr val="accent1"/>
+          </a:lnRef>
+          <a:fillRef idx="3">
+            <a:schemeClr val="accent1"/>
+          </a:fillRef>
+          <a:effectRef idx="2">
+            <a:schemeClr val="accent1"/>
+          </a:effectRef>
+          <a:fontRef idx="minor">
+            <a:schemeClr val="lt1"/>
+          </a:fontRef>
+        </p:style>
+        <p:txBody>
+          <a:bodyPr rtlCol="0" anchor="ctr"/>
+          <a:lstStyle/>
+          <a:p>
+            <a:pPr algn="ctr"/>
+          </a:p>
+        </p:txBody>
+      </p:sp>
+      <p:sp>
+        <p:nvSpPr>
+          <p:cNvPr id="4" name="Oval 3"/>
+          <p:cNvSpPr/>
+          <p:nvPr/>
+        </p:nvSpPr>
+        <p:spPr>
+          <a:xfrm>
+            <a:off x="1888851" y="1742778"/>
+            <a:ext cx="750610" cy="750610"/>
+          </a:xfrm>
+          <a:prstGeom prst="ellipse">
+            <a:avLst/>
+          </a:prstGeom>
+          <a:solidFill>
+            <a:srgbClr val="111111"/>
+          </a:solidFill>
+          <a:ln>
+            <a:noFill/>
+          </a:ln>
+        </p:spPr>
+        <p:style>
+          <a:lnRef idx="1">
+            <a:schemeClr val="accent1"/>
+          </a:lnRef>
+          <a:fillRef idx="3">
+            <a:schemeClr val="accent1"/>
+          </a:fillRef>
+          <a:effectRef idx="2">
+            <a:schemeClr val="accent1"/>
+          </a:effectRef>
+          <a:fontRef idx="minor">
+            <a:schemeClr val="lt1"/>
+          </a:fontRef>
+        </p:style>
+        <p:txBody>
+          <a:bodyPr rtlCol="0" anchor="ctr"/>
+          <a:lstStyle/>
+          <a:p>
+            <a:pPr algn="ctr"/>
+          </a:p>
+        </p:txBody>
+      </p:sp>
+      <p:sp>
+        <p:nvSpPr>
+          <p:cNvPr id="5" name="Oval 4"/>
+          <p:cNvSpPr/>
+          <p:nvPr/>
+        </p:nvSpPr>
+        <p:spPr>
+          <a:xfrm>
+            <a:off x="2089014" y="1942941"/>
+            <a:ext cx="350284" cy="350284"/>
+          </a:xfrm>
+          <a:prstGeom prst="ellipse">
+            <a:avLst/>
+          </a:prstGeom>
+          <a:solidFill>
+            <a:srgbClr val="0077FF"/>
+          </a:solidFill>
+          <a:ln>
+            <a:noFill/>
+          </a:ln>
+        </p:spPr>
+        <p:style>
+          <a:lnRef idx="1">
+            <a:schemeClr val="accent1"/>
+          </a:lnRef>
+          <a:fillRef idx="3">
+            <a:schemeClr val="accent1"/>
+          </a:fillRef>
+          <a:effectRef idx="2">
+            <a:schemeClr val="accent1"/>
+          </a:effectRef>
+          <a:fontRef idx="minor">
+            <a:schemeClr val="lt1"/>
+          </a:fontRef>
+        </p:style>
+        <p:txBody>
+          <a:bodyPr rtlCol="0" anchor="ctr"/>
+          <a:lstStyle/>
+          <a:p>
+            <a:pPr algn="ctr"/>
+          </a:p>
+        </p:txBody>
+      </p:sp>
+      <p:sp>
+        <p:nvSpPr>
+          <p:cNvPr id="6" name="TextBox 5"/>
+          <p:cNvSpPr txBox="1"/>
+          <p:nvPr/>
+        </p:nvSpPr>
+        <p:spPr>
+          <a:xfrm>
+            <a:off x="429280" y="2893714"/>
+            <a:ext cx="3669753" cy="1100894"/>
+          </a:xfrm>
+          <a:prstGeom prst="rect">
+            <a:avLst/>
+          </a:prstGeom>
+          <a:noFill/>
+        </p:spPr>
+        <p:txBody>
+          <a:bodyPr wrap="square" lIns="12700" rIns="12700" tIns="12700" bIns="12700">
+            <a:spAutoFit/>
+          </a:bodyPr>
+          <a:lstStyle/>
+          <a:p>
+            <a:pPr algn="ctr">
+              <a:defRPr sz="1400" b="0">
+                <a:solidFill>
+                  <a:srgbClr val="FFFFFF"/>
+                </a:solidFill>
+                <a:latin typeface="Play"/>
+                <a:ea typeface="Play"/>
+                <a:cs typeface="Play"/>
+              </a:defRPr>
+            </a:pPr>
+            <a:r>
+              <a:rPr sz="1400" b="0">
+                <a:solidFill>
+                  <a:srgbClr val="FFFFFF"/>
+                </a:solidFill>
+                <a:latin typeface="Play"/>
+                <a:ea typeface="Play"/>
+                <a:cs typeface="Play"/>
+              </a:rPr>
+              <a:t>Выдумка</a:t>
+            </a:r>
+          </a:p>
+        </p:txBody>
+      </p:sp>
+      <p:sp>
+        <p:nvSpPr>
+          <p:cNvPr id="7" name="Document 6"/>
+          <p:cNvSpPr/>
+          <p:nvPr/>
+        </p:nvSpPr>
+        <p:spPr>
+          <a:xfrm>
+            <a:off x="5609335" y="1592656"/>
+            <a:ext cx="950772" cy="1050854"/>
+          </a:xfrm>
+          <a:prstGeom prst="flowChartDocument">
+            <a:avLst/>
+          </a:prstGeom>
+          <a:solidFill>
+            <a:srgbClr val="0077FF"/>
+          </a:solidFill>
+          <a:ln>
+            <a:noFill/>
+          </a:ln>
+        </p:spPr>
+        <p:style>
+          <a:lnRef idx="1">
+            <a:schemeClr val="accent1"/>
+          </a:lnRef>
+          <a:fillRef idx="3">
+            <a:schemeClr val="accent1"/>
+          </a:fillRef>
+          <a:effectRef idx="2">
+            <a:schemeClr val="accent1"/>
+          </a:effectRef>
+          <a:fontRef idx="minor">
+            <a:schemeClr val="lt1"/>
+          </a:fontRef>
+        </p:style>
+        <p:txBody>
+          <a:bodyPr rtlCol="0" anchor="ctr"/>
+          <a:lstStyle/>
+          <a:p>
+            <a:pPr algn="ctr"/>
+          </a:p>
+        </p:txBody>
+      </p:sp>
+      <p:sp>
+        <p:nvSpPr>
+          <p:cNvPr id="8" name="TextBox 7"/>
+          <p:cNvSpPr txBox="1"/>
+          <p:nvPr/>
+        </p:nvSpPr>
+        <p:spPr>
+          <a:xfrm>
+            <a:off x="4249845" y="2893714"/>
+            <a:ext cx="3669753" cy="1100894"/>
+          </a:xfrm>
+          <a:prstGeom prst="rect">
+            <a:avLst/>
+          </a:prstGeom>
+          <a:noFill/>
+        </p:spPr>
+        <p:txBody>
+          <a:bodyPr wrap="square" lIns="12700" rIns="12700" tIns="12700" bIns="12700">
+            <a:spAutoFit/>
+          </a:bodyPr>
+          <a:lstStyle/>
+          <a:p>
+            <a:pPr algn="ctr">
+              <a:defRPr sz="1400" b="0">
+                <a:solidFill>
+                  <a:srgbClr val="FFFFFF"/>
+                </a:solidFill>
+                <a:latin typeface="Play"/>
+                <a:ea typeface="Play"/>
+                <a:cs typeface="Play"/>
+              </a:defRPr>
+            </a:pPr>
+            <a:r>
+              <a:rPr sz="1400" b="0">
+                <a:solidFill>
+                  <a:srgbClr val="FFFFFF"/>
+                </a:solidFill>
+                <a:latin typeface="Play"/>
+                <a:ea typeface="Play"/>
+                <a:cs typeface="Play"/>
+              </a:rPr>
+              <a:t>Плохой шаблон</a:t>
+            </a:r>
+          </a:p>
+        </p:txBody>
+      </p:sp>
+      <p:sp>
+        <p:nvSpPr>
+          <p:cNvPr id="9" name="Oval 8"/>
+          <p:cNvSpPr/>
+          <p:nvPr/>
+        </p:nvSpPr>
+        <p:spPr>
+          <a:xfrm>
+            <a:off x="9354839" y="1567636"/>
+            <a:ext cx="1100894" cy="1100894"/>
+          </a:xfrm>
+          <a:prstGeom prst="ellipse">
+            <a:avLst/>
+          </a:prstGeom>
+          <a:solidFill>
+            <a:srgbClr val="0077FF"/>
+          </a:solidFill>
+          <a:ln>
+            <a:noFill/>
+          </a:ln>
+        </p:spPr>
+        <p:style>
+          <a:lnRef idx="1">
+            <a:schemeClr val="accent1"/>
+          </a:lnRef>
+          <a:fillRef idx="3">
+            <a:schemeClr val="accent1"/>
+          </a:fillRef>
+          <a:effectRef idx="2">
+            <a:schemeClr val="accent1"/>
+          </a:effectRef>
+          <a:fontRef idx="minor">
+            <a:schemeClr val="lt1"/>
+          </a:fontRef>
+        </p:style>
+        <p:txBody>
+          <a:bodyPr rtlCol="0" anchor="ctr"/>
+          <a:lstStyle/>
+          <a:p>
+            <a:pPr algn="ctr"/>
+          </a:p>
+        </p:txBody>
+      </p:sp>
+      <p:sp>
+        <p:nvSpPr>
+          <p:cNvPr id="10" name="Oval 9"/>
+          <p:cNvSpPr/>
+          <p:nvPr/>
+        </p:nvSpPr>
+        <p:spPr>
+          <a:xfrm>
+            <a:off x="9529982" y="1742778"/>
+            <a:ext cx="750610" cy="750610"/>
+          </a:xfrm>
+          <a:prstGeom prst="ellipse">
+            <a:avLst/>
+          </a:prstGeom>
+          <a:solidFill>
+            <a:srgbClr val="111111"/>
+          </a:solidFill>
+          <a:ln>
+            <a:noFill/>
+          </a:ln>
+        </p:spPr>
+        <p:style>
+          <a:lnRef idx="1">
+            <a:schemeClr val="accent1"/>
+          </a:lnRef>
+          <a:fillRef idx="3">
+            <a:schemeClr val="accent1"/>
+          </a:fillRef>
+          <a:effectRef idx="2">
+            <a:schemeClr val="accent1"/>
+          </a:effectRef>
+          <a:fontRef idx="minor">
+            <a:schemeClr val="lt1"/>
+          </a:fontRef>
+        </p:style>
+        <p:txBody>
+          <a:bodyPr rtlCol="0" anchor="ctr"/>
+          <a:lstStyle/>
+          <a:p>
+            <a:pPr algn="ctr"/>
+          </a:p>
+        </p:txBody>
+      </p:sp>
+      <p:sp>
+        <p:nvSpPr>
+          <p:cNvPr id="11" name="Oval 10"/>
+          <p:cNvSpPr/>
+          <p:nvPr/>
+        </p:nvSpPr>
+        <p:spPr>
+          <a:xfrm>
+            <a:off x="9730144" y="1942941"/>
+            <a:ext cx="350284" cy="350284"/>
+          </a:xfrm>
+          <a:prstGeom prst="ellipse">
+            <a:avLst/>
+          </a:prstGeom>
+          <a:solidFill>
+            <a:srgbClr val="0077FF"/>
+          </a:solidFill>
+          <a:ln>
+            <a:noFill/>
+          </a:ln>
+        </p:spPr>
+        <p:style>
+          <a:lnRef idx="1">
+            <a:schemeClr val="accent1"/>
+          </a:lnRef>
+          <a:fillRef idx="3">
+            <a:schemeClr val="accent1"/>
+          </a:fillRef>
+          <a:effectRef idx="2">
+            <a:schemeClr val="accent1"/>
+          </a:effectRef>
+          <a:fontRef idx="minor">
+            <a:schemeClr val="lt1"/>
+          </a:fontRef>
+        </p:style>
+        <p:txBody>
+          <a:bodyPr rtlCol="0" anchor="ctr"/>
+          <a:lstStyle/>
+          <a:p>
+            <a:pPr algn="ctr"/>
+          </a:p>
+        </p:txBody>
+      </p:sp>
+      <p:sp>
+        <p:nvSpPr>
+          <p:cNvPr id="12" name="TextBox 11"/>
+          <p:cNvSpPr txBox="1"/>
+          <p:nvPr/>
+        </p:nvSpPr>
+        <p:spPr>
+          <a:xfrm>
+            <a:off x="8070410" y="2893714"/>
+            <a:ext cx="3669753" cy="1100894"/>
+          </a:xfrm>
+          <a:prstGeom prst="rect">
+            <a:avLst/>
+          </a:prstGeom>
+          <a:noFill/>
+        </p:spPr>
+        <p:txBody>
+          <a:bodyPr wrap="square" lIns="12700" rIns="12700" tIns="12700" bIns="12700">
+            <a:spAutoFit/>
+          </a:bodyPr>
+          <a:lstStyle/>
+          <a:p>
+            <a:pPr algn="ctr">
+              <a:defRPr sz="1400" b="0">
+                <a:solidFill>
+                  <a:srgbClr val="FFFFFF"/>
+                </a:solidFill>
+                <a:latin typeface="Play"/>
+                <a:ea typeface="Play"/>
+                <a:cs typeface="Play"/>
+              </a:defRPr>
+            </a:pPr>
+            <a:r>
+              <a:rPr sz="1400" b="0">
+                <a:solidFill>
+                  <a:srgbClr val="FFFFFF"/>
+                </a:solidFill>
+                <a:latin typeface="Play"/>
+                <a:ea typeface="Play"/>
+                <a:cs typeface="Play"/>
+              </a:rPr>
+              <a:t>Перегрузка</a:t>
+            </a:r>
+          </a:p>
+        </p:txBody>
+      </p:sp>
+      <p:sp>
+        <p:nvSpPr>
+          <p:cNvPr id="13" name="body"/>
+          <p:cNvSpPr txBox="1"/>
+          <p:nvPr/>
+        </p:nvSpPr>
+        <p:spPr>
+          <a:xfrm>
+            <a:off x="429280" y="4166059"/>
+            <a:ext cx="11310884" cy="1341120"/>
+          </a:xfrm>
+          <a:prstGeom prst="rect">
+            <a:avLst/>
+          </a:prstGeom>
+          <a:noFill/>
+        </p:spPr>
+        <p:txBody>
+          <a:bodyPr wrap="square" lIns="76200" rIns="76200" tIns="50800" bIns="50800">
+            <a:spAutoFit/>
+          </a:bodyPr>
+          <a:lstStyle/>
+          <a:p>
+            <a:pPr algn="l">
+              <a:spcAft>
+                <a:spcPts val="300"/>
+              </a:spcAft>
+              <a:defRPr sz="1600">
+                <a:solidFill>
+                  <a:srgbClr val="FFFFFF"/>
+                </a:solidFill>
+                <a:latin typeface="Play"/>
+                <a:ea typeface="Play"/>
+                <a:cs typeface="Play"/>
+              </a:defRPr>
+            </a:pPr>
+            <a:r>
+              <a:rPr sz="1600">
+                <a:solidFill>
+                  <a:srgbClr val="FFFFFF"/>
+                </a:solidFill>
+                <a:latin typeface="Play"/>
+                <a:ea typeface="Play"/>
+                <a:cs typeface="Play"/>
+              </a:rPr>
+              <a:t>• Модель может выдумать цифры, аудит проверяет каждое число</a:t>
+            </a:r>
+          </a:p>
+          <a:p>
+            <a:pPr algn="l">
+              <a:spcAft>
+                <a:spcPts val="300"/>
+              </a:spcAft>
+              <a:defRPr sz="1600">
+                <a:solidFill>
+                  <a:srgbClr val="FFFFFF"/>
+                </a:solidFill>
+                <a:latin typeface="Play"/>
+                <a:ea typeface="Play"/>
+                <a:cs typeface="Play"/>
+              </a:defRPr>
+            </a:pPr>
+            <a:r>
+              <a:rPr sz="1600">
+                <a:solidFill>
+                  <a:srgbClr val="FFFFFF"/>
+                </a:solidFill>
+                <a:latin typeface="Play"/>
+                <a:ea typeface="Play"/>
+                <a:cs typeface="Play"/>
+              </a:rPr>
+              <a:t>• Плохой шаблон приводит к использованию рабочей области</a:t>
+            </a:r>
+          </a:p>
+          <a:p>
+            <a:pPr algn="l">
+              <a:spcAft>
+                <a:spcPts val="300"/>
+              </a:spcAft>
+              <a:defRPr sz="1600">
+                <a:solidFill>
+                  <a:srgbClr val="FFFFFF"/>
+                </a:solidFill>
+                <a:latin typeface="Play"/>
+                <a:ea typeface="Play"/>
+                <a:cs typeface="Play"/>
+              </a:defRPr>
+            </a:pPr>
+            <a:r>
+              <a:rPr sz="1600">
+                <a:solidFill>
+                  <a:srgbClr val="FFFFFF"/>
+                </a:solidFill>
+                <a:latin typeface="Play"/>
+                <a:ea typeface="Play"/>
+                <a:cs typeface="Play"/>
+              </a:rPr>
+              <a:t>• Нагрузка выше 20 задач требует внешней очереди</a:t>
             </a:r>
           </a:p>
         </p:txBody>
@@ -12023,7 +11913,7 @@
               <a:spcAft>
                 <a:spcPts val="300"/>
               </a:spcAft>
-              <a:defRPr sz="4000">
+              <a:defRPr sz="3200">
                 <a:solidFill>
                   <a:srgbClr val="FFFFFF"/>
                 </a:solidFill>
@@ -12033,7 +11923,7 @@
               </a:defRPr>
             </a:pPr>
             <a:r>
-              <a:rPr sz="4000">
+              <a:rPr sz="3200">
                 <a:solidFill>
                   <a:srgbClr val="FFFFFF"/>
                 </a:solidFill>
@@ -12041,21 +11931,331 @@
                 <a:ea typeface="Play"/>
                 <a:cs typeface="Play"/>
               </a:rPr>
-              <a:t>Пилотные результаты</a:t>
+              <a:t>План</a:t>
             </a:r>
           </a:p>
         </p:txBody>
       </p:sp>
       <p:sp>
         <p:nvSpPr>
-          <p:cNvPr id="3" name="lead"/>
+          <p:cNvPr id="3" name="Rectangle 2"/>
+          <p:cNvSpPr/>
+          <p:nvPr/>
+        </p:nvSpPr>
+        <p:spPr>
+          <a:xfrm>
+            <a:off x="429280" y="2695030"/>
+            <a:ext cx="11310884" cy="67230"/>
+          </a:xfrm>
+          <a:prstGeom prst="rect">
+            <a:avLst/>
+          </a:prstGeom>
+          <a:solidFill>
+            <a:srgbClr val="0077FF"/>
+          </a:solidFill>
+          <a:ln>
+            <a:noFill/>
+          </a:ln>
+        </p:spPr>
+        <p:style>
+          <a:lnRef idx="1">
+            <a:schemeClr val="accent1"/>
+          </a:lnRef>
+          <a:fillRef idx="3">
+            <a:schemeClr val="accent1"/>
+          </a:fillRef>
+          <a:effectRef idx="2">
+            <a:schemeClr val="accent1"/>
+          </a:effectRef>
+          <a:fontRef idx="minor">
+            <a:schemeClr val="lt1"/>
+          </a:fontRef>
+        </p:style>
+        <p:txBody>
+          <a:bodyPr rtlCol="0" anchor="ctr"/>
+          <a:lstStyle/>
+          <a:p>
+            <a:pPr algn="ctr"/>
+          </a:p>
+        </p:txBody>
+      </p:sp>
+      <p:sp>
+        <p:nvSpPr>
+          <p:cNvPr id="4" name="Oval 3"/>
+          <p:cNvSpPr/>
+          <p:nvPr/>
+        </p:nvSpPr>
+        <p:spPr>
+          <a:xfrm>
+            <a:off x="2067915" y="2482133"/>
+            <a:ext cx="493024" cy="493024"/>
+          </a:xfrm>
+          <a:prstGeom prst="ellipse">
+            <a:avLst/>
+          </a:prstGeom>
+          <a:solidFill>
+            <a:srgbClr val="0077FF"/>
+          </a:solidFill>
+          <a:ln>
+            <a:noFill/>
+          </a:ln>
+        </p:spPr>
+        <p:style>
+          <a:lnRef idx="1">
+            <a:schemeClr val="accent1"/>
+          </a:lnRef>
+          <a:fillRef idx="3">
+            <a:schemeClr val="accent1"/>
+          </a:fillRef>
+          <a:effectRef idx="2">
+            <a:schemeClr val="accent1"/>
+          </a:effectRef>
+          <a:fontRef idx="minor">
+            <a:schemeClr val="lt1"/>
+          </a:fontRef>
+        </p:style>
+        <p:txBody>
+          <a:bodyPr rtlCol="0" anchor="ctr"/>
+          <a:lstStyle/>
+          <a:p>
+            <a:pPr algn="ctr"/>
+          </a:p>
+        </p:txBody>
+      </p:sp>
+      <p:sp>
+        <p:nvSpPr>
+          <p:cNvPr id="5" name="TextBox 4"/>
           <p:cNvSpPr txBox="1"/>
           <p:nvPr/>
         </p:nvSpPr>
         <p:spPr>
           <a:xfrm>
-            <a:off x="429280" y="2431298"/>
-            <a:ext cx="7827264" cy="1435308"/>
+            <a:off x="429280" y="1664162"/>
+            <a:ext cx="5655442" cy="851587"/>
+          </a:xfrm>
+          <a:prstGeom prst="rect">
+            <a:avLst/>
+          </a:prstGeom>
+          <a:noFill/>
+        </p:spPr>
+        <p:txBody>
+          <a:bodyPr wrap="square" lIns="12700" rIns="12700" tIns="12700" bIns="12700">
+            <a:spAutoFit/>
+          </a:bodyPr>
+          <a:lstStyle/>
+          <a:p>
+            <a:pPr algn="ctr">
+              <a:defRPr sz="1400" b="0">
+                <a:solidFill>
+                  <a:srgbClr val="FFFFFF"/>
+                </a:solidFill>
+                <a:latin typeface="Play"/>
+                <a:ea typeface="Play"/>
+                <a:cs typeface="Play"/>
+              </a:defRPr>
+            </a:pPr>
+            <a:r>
+              <a:rPr sz="1400" b="0">
+                <a:solidFill>
+                  <a:srgbClr val="FFFFFF"/>
+                </a:solidFill>
+                <a:latin typeface="Play"/>
+                <a:ea typeface="Play"/>
+                <a:cs typeface="Play"/>
+              </a:rPr>
+              <a:t>Подключение 4 команд</a:t>
+            </a:r>
+          </a:p>
+        </p:txBody>
+      </p:sp>
+      <p:sp>
+        <p:nvSpPr>
+          <p:cNvPr id="6" name="Oval 5"/>
+          <p:cNvSpPr/>
+          <p:nvPr/>
+        </p:nvSpPr>
+        <p:spPr>
+          <a:xfrm>
+            <a:off x="5838209" y="2482133"/>
+            <a:ext cx="493024" cy="493024"/>
+          </a:xfrm>
+          <a:prstGeom prst="ellipse">
+            <a:avLst/>
+          </a:prstGeom>
+          <a:solidFill>
+            <a:srgbClr val="0077FF"/>
+          </a:solidFill>
+          <a:ln>
+            <a:noFill/>
+          </a:ln>
+        </p:spPr>
+        <p:style>
+          <a:lnRef idx="1">
+            <a:schemeClr val="accent1"/>
+          </a:lnRef>
+          <a:fillRef idx="3">
+            <a:schemeClr val="accent1"/>
+          </a:fillRef>
+          <a:effectRef idx="2">
+            <a:schemeClr val="accent1"/>
+          </a:effectRef>
+          <a:fontRef idx="minor">
+            <a:schemeClr val="lt1"/>
+          </a:fontRef>
+        </p:style>
+        <p:txBody>
+          <a:bodyPr rtlCol="0" anchor="ctr"/>
+          <a:lstStyle/>
+          <a:p>
+            <a:pPr algn="ctr"/>
+          </a:p>
+        </p:txBody>
+      </p:sp>
+      <p:sp>
+        <p:nvSpPr>
+          <p:cNvPr id="7" name="TextBox 6"/>
+          <p:cNvSpPr txBox="1"/>
+          <p:nvPr/>
+        </p:nvSpPr>
+        <p:spPr>
+          <a:xfrm>
+            <a:off x="3257001" y="3188054"/>
+            <a:ext cx="5655442" cy="851587"/>
+          </a:xfrm>
+          <a:prstGeom prst="rect">
+            <a:avLst/>
+          </a:prstGeom>
+          <a:noFill/>
+        </p:spPr>
+        <p:txBody>
+          <a:bodyPr wrap="square" lIns="12700" rIns="12700" tIns="12700" bIns="12700">
+            <a:spAutoFit/>
+          </a:bodyPr>
+          <a:lstStyle/>
+          <a:p>
+            <a:pPr algn="ctr">
+              <a:defRPr sz="1400" b="0">
+                <a:solidFill>
+                  <a:srgbClr val="FFFFFF"/>
+                </a:solidFill>
+                <a:latin typeface="Play"/>
+                <a:ea typeface="Play"/>
+                <a:cs typeface="Play"/>
+              </a:defRPr>
+            </a:pPr>
+            <a:r>
+              <a:rPr sz="1400" b="0">
+                <a:solidFill>
+                  <a:srgbClr val="FFFFFF"/>
+                </a:solidFill>
+                <a:latin typeface="Play"/>
+                <a:ea typeface="Play"/>
+                <a:cs typeface="Play"/>
+              </a:rPr>
+              <a:t>Доступ для всей компании</a:t>
+            </a:r>
+          </a:p>
+        </p:txBody>
+      </p:sp>
+      <p:sp>
+        <p:nvSpPr>
+          <p:cNvPr id="8" name="Oval 7"/>
+          <p:cNvSpPr/>
+          <p:nvPr/>
+        </p:nvSpPr>
+        <p:spPr>
+          <a:xfrm>
+            <a:off x="9608504" y="2482133"/>
+            <a:ext cx="493024" cy="493024"/>
+          </a:xfrm>
+          <a:prstGeom prst="ellipse">
+            <a:avLst/>
+          </a:prstGeom>
+          <a:solidFill>
+            <a:srgbClr val="0077FF"/>
+          </a:solidFill>
+          <a:ln>
+            <a:noFill/>
+          </a:ln>
+        </p:spPr>
+        <p:style>
+          <a:lnRef idx="1">
+            <a:schemeClr val="accent1"/>
+          </a:lnRef>
+          <a:fillRef idx="3">
+            <a:schemeClr val="accent1"/>
+          </a:fillRef>
+          <a:effectRef idx="2">
+            <a:schemeClr val="accent1"/>
+          </a:effectRef>
+          <a:fontRef idx="minor">
+            <a:schemeClr val="lt1"/>
+          </a:fontRef>
+        </p:style>
+        <p:txBody>
+          <a:bodyPr rtlCol="0" anchor="ctr"/>
+          <a:lstStyle/>
+          <a:p>
+            <a:pPr algn="ctr"/>
+          </a:p>
+        </p:txBody>
+      </p:sp>
+      <p:sp>
+        <p:nvSpPr>
+          <p:cNvPr id="9" name="TextBox 8"/>
+          <p:cNvSpPr txBox="1"/>
+          <p:nvPr/>
+        </p:nvSpPr>
+        <p:spPr>
+          <a:xfrm>
+            <a:off x="6084722" y="1664162"/>
+            <a:ext cx="5655442" cy="851587"/>
+          </a:xfrm>
+          <a:prstGeom prst="rect">
+            <a:avLst/>
+          </a:prstGeom>
+          <a:noFill/>
+        </p:spPr>
+        <p:txBody>
+          <a:bodyPr wrap="square" lIns="12700" rIns="12700" tIns="12700" bIns="12700">
+            <a:spAutoFit/>
+          </a:bodyPr>
+          <a:lstStyle/>
+          <a:p>
+            <a:pPr algn="ctr">
+              <a:defRPr sz="1400" b="0">
+                <a:solidFill>
+                  <a:srgbClr val="FFFFFF"/>
+                </a:solidFill>
+                <a:latin typeface="Play"/>
+                <a:ea typeface="Play"/>
+                <a:cs typeface="Play"/>
+              </a:defRPr>
+            </a:pPr>
+            <a:r>
+              <a:rPr sz="1400" b="0">
+                <a:solidFill>
+                  <a:srgbClr val="FFFFFF"/>
+                </a:solidFill>
+                <a:latin typeface="Play"/>
+                <a:ea typeface="Play"/>
+                <a:cs typeface="Play"/>
+              </a:rPr>
+              <a:t>Генерация иллюстраций</a:t>
+            </a:r>
+          </a:p>
+        </p:txBody>
+      </p:sp>
+      <p:sp>
+        <p:nvSpPr>
+          <p:cNvPr id="10" name="body"/>
+          <p:cNvSpPr txBox="1"/>
+          <p:nvPr/>
+        </p:nvSpPr>
+        <p:spPr>
+          <a:xfrm>
+            <a:off x="429280" y="4076631"/>
+            <a:ext cx="11310884" cy="1341120"/>
           </a:xfrm>
           <a:prstGeom prst="rect">
             <a:avLst/>
@@ -12072,7 +12272,7 @@
               <a:spcAft>
                 <a:spcPts val="300"/>
               </a:spcAft>
-              <a:defRPr sz="3200">
+              <a:defRPr sz="1600">
                 <a:solidFill>
                   <a:srgbClr val="FFFFFF"/>
                 </a:solidFill>
@@ -12082,7 +12282,7 @@
               </a:defRPr>
             </a:pPr>
             <a:r>
-              <a:rPr sz="3200">
+              <a:rPr sz="1600">
                 <a:solidFill>
                   <a:srgbClr val="FFFFFF"/>
                 </a:solidFill>
@@ -12090,38 +12290,15 @@
                 <a:ea typeface="Play"/>
                 <a:cs typeface="Play"/>
               </a:rPr>
-              <a:t>Пилот шёл 6 недель на двух командах, собрал 68 презентаций</a:t>
+              <a:t>• Q3 2026: подключение 4 команд, домен и HTTPS</a:t>
             </a:r>
           </a:p>
-        </p:txBody>
-      </p:sp>
-      <p:sp>
-        <p:nvSpPr>
-          <p:cNvPr id="4" name="body"/>
-          <p:cNvSpPr txBox="1"/>
-          <p:nvPr/>
-        </p:nvSpPr>
-        <p:spPr>
-          <a:xfrm>
-            <a:off x="429280" y="4032218"/>
-            <a:ext cx="7827264" cy="1159287"/>
-          </a:xfrm>
-          <a:prstGeom prst="rect">
-            <a:avLst/>
-          </a:prstGeom>
-          <a:noFill/>
-        </p:spPr>
-        <p:txBody>
-          <a:bodyPr wrap="square" lIns="76200" rIns="76200" tIns="50800" bIns="50800">
-            <a:spAutoFit/>
-          </a:bodyPr>
-          <a:lstStyle/>
           <a:p>
             <a:pPr algn="l">
               <a:spcAft>
                 <a:spcPts val="300"/>
               </a:spcAft>
-              <a:defRPr sz="2000">
+              <a:defRPr sz="1600">
                 <a:solidFill>
                   <a:srgbClr val="FFFFFF"/>
                 </a:solidFill>
@@ -12131,7 +12308,7 @@
               </a:defRPr>
             </a:pPr>
             <a:r>
-              <a:rPr sz="2000">
+              <a:rPr sz="1600">
                 <a:solidFill>
                   <a:srgbClr val="FFFFFF"/>
                 </a:solidFill>
@@ -12139,7 +12316,7 @@
                 <a:ea typeface="Play"/>
                 <a:cs typeface="Play"/>
               </a:rPr>
-              <a:t>• Сервис ускорил сборку с 186 до 4 мин</a:t>
+              <a:t>• Q4 2026: доступ для всей компании, интеграция с хранилищем</a:t>
             </a:r>
           </a:p>
           <a:p>
@@ -12147,7 +12324,7 @@
               <a:spcAft>
                 <a:spcPts val="300"/>
               </a:spcAft>
-              <a:defRPr sz="2000">
+              <a:defRPr sz="1600">
                 <a:solidFill>
                   <a:srgbClr val="FFFFFF"/>
                 </a:solidFill>
@@ -12157,7 +12334,7 @@
               </a:defRPr>
             </a:pPr>
             <a:r>
-              <a:rPr sz="2000">
+              <a:rPr sz="1600">
                 <a:solidFill>
                   <a:srgbClr val="FFFFFF"/>
                 </a:solidFill>
@@ -12165,7 +12342,7 @@
                 <a:ea typeface="Play"/>
                 <a:cs typeface="Play"/>
               </a:rPr>
-              <a:t>• Нарушения стиля 2 из 68, исправлены автоматически</a:t>
+              <a:t>• Q1 2027: генерация иллюстраций под стиль шаблона</a:t>
             </a:r>
           </a:p>
         </p:txBody>
@@ -12261,7 +12438,7 @@
         <p:spPr>
           <a:xfrm>
             <a:off x="300817" y="297715"/>
-            <a:ext cx="8081264" cy="5418295"/>
+            <a:ext cx="8081264" cy="5658188"/>
           </a:xfrm>
           <a:prstGeom prst="roundRect">
             <a:avLst/>
@@ -12342,7 +12519,7 @@
                 <a:ea typeface="Play"/>
                 <a:cs typeface="Play"/>
               </a:rPr>
-              <a:t>Показатели после пилота</a:t>
+              <a:t>Что мы просим решить</a:t>
             </a:r>
           </a:p>
         </p:txBody>
@@ -12356,7 +12533,7 @@
         <p:spPr>
           <a:xfrm>
             <a:off x="427817" y="1837052"/>
-            <a:ext cx="7827264" cy="2017988"/>
+            <a:ext cx="7827264" cy="1531442"/>
           </a:xfrm>
           <a:prstGeom prst="rect">
             <a:avLst/>
@@ -12391,7 +12568,7 @@
                 <a:ea typeface="Play"/>
                 <a:cs typeface="Play"/>
               </a:rPr>
-              <a:t>Запросы закрыты 38 вместо 11, рутина ушла в сервис</a:t>
+              <a:t>Запуск сервиса на всю компанию</a:t>
             </a:r>
           </a:p>
         </p:txBody>
@@ -12404,8 +12581,8 @@
         </p:nvSpPr>
         <p:spPr>
           <a:xfrm>
-            <a:off x="427817" y="4100571"/>
-            <a:ext cx="7827264" cy="1828649"/>
+            <a:off x="427817" y="3614024"/>
+            <a:ext cx="7827264" cy="2315196"/>
           </a:xfrm>
           <a:prstGeom prst="rect">
             <a:avLst/>
@@ -12422,7 +12599,7 @@
               <a:spcAft>
                 <a:spcPts val="300"/>
               </a:spcAft>
-              <a:defRPr sz="2800">
+              <a:defRPr sz="3200">
                 <a:solidFill>
                   <a:srgbClr val="FFFFFF"/>
                 </a:solidFill>
@@ -12432,7 +12609,7 @@
               </a:defRPr>
             </a:pPr>
             <a:r>
-              <a:rPr sz="2800">
+              <a:rPr sz="3200">
                 <a:solidFill>
                   <a:srgbClr val="FFFFFF"/>
                 </a:solidFill>
@@ -12440,7 +12617,7 @@
                 <a:ea typeface="Play"/>
                 <a:cs typeface="Play"/>
               </a:rPr>
-              <a:t>• Время до первой версии сократилось с 6 дней до 1</a:t>
+              <a:t>• Выделение бюджета на поддержку и развитие</a:t>
             </a:r>
           </a:p>
           <a:p>
@@ -12448,7 +12625,7 @@
               <a:spcAft>
                 <a:spcPts val="300"/>
               </a:spcAft>
-              <a:defRPr sz="2800">
+              <a:defRPr sz="3200">
                 <a:solidFill>
                   <a:srgbClr val="FFFFFF"/>
                 </a:solidFill>
@@ -12458,7 +12635,7 @@
               </a:defRPr>
             </a:pPr>
             <a:r>
-              <a:rPr sz="2800">
+              <a:rPr sz="3200">
                 <a:solidFill>
                   <a:srgbClr val="FFFFFF"/>
                 </a:solidFill>
@@ -12466,7 +12643,7 @@
                 <a:ea typeface="Play"/>
                 <a:cs typeface="Play"/>
               </a:rPr>
-              <a:t>• Сервис работает на 2 vCPU / 2 ГБ RAM</a:t>
+              <a:t>• Поддержка интеграции с корпоративными системами</a:t>
             </a:r>
           </a:p>
         </p:txBody>
@@ -12599,8 +12776,8 @@
         </p:nvSpPr>
         <p:spPr>
           <a:xfrm>
-            <a:off x="300817" y="297715"/>
-            <a:ext cx="11566347" cy="4213947"/>
+            <a:off x="302280" y="2164394"/>
+            <a:ext cx="8081385" cy="1247140"/>
           </a:xfrm>
           <a:prstGeom prst="roundRect">
             <a:avLst/>
@@ -12645,8 +12822,8 @@
         </p:nvSpPr>
         <p:spPr>
           <a:xfrm>
-            <a:off x="427817" y="424715"/>
-            <a:ext cx="11312347" cy="1018540"/>
+            <a:off x="429280" y="2291394"/>
+            <a:ext cx="7827385" cy="1018540"/>
           </a:xfrm>
           <a:prstGeom prst="rect">
             <a:avLst/>
@@ -12681,131 +12858,7 @@
                 <a:ea typeface="Play"/>
                 <a:cs typeface="Play"/>
               </a:rPr>
-              <a:t>Что мы просим решить</a:t>
-            </a:r>
-          </a:p>
-        </p:txBody>
-      </p:sp>
-      <p:sp>
-        <p:nvSpPr>
-          <p:cNvPr id="886" name="lead"/>
-          <p:cNvSpPr txBox="1"/>
-          <p:nvPr/>
-        </p:nvSpPr>
-        <p:spPr>
-          <a:xfrm>
-            <a:off x="427817" y="1783080"/>
-            <a:ext cx="11312347" cy="1412448"/>
-          </a:xfrm>
-          <a:prstGeom prst="rect">
-            <a:avLst/>
-          </a:prstGeom>
-          <a:noFill/>
-        </p:spPr>
-        <p:txBody>
-          <a:bodyPr wrap="square" lIns="76200" rIns="76200" tIns="50800" bIns="50800">
-            <a:spAutoFit/>
-          </a:bodyPr>
-          <a:lstStyle/>
-          <a:p>
-            <a:pPr algn="ctr">
-              <a:spcAft>
-                <a:spcPts val="300"/>
-              </a:spcAft>
-              <a:defRPr sz="3200" b="1">
-                <a:solidFill>
-                  <a:srgbClr val="FFFFFF"/>
-                </a:solidFill>
-                <a:latin typeface="Play"/>
-                <a:ea typeface="Play"/>
-                <a:cs typeface="Play"/>
-              </a:defRPr>
-            </a:pPr>
-            <a:r>
-              <a:rPr sz="3200" b="1">
-                <a:solidFill>
-                  <a:srgbClr val="FFFFFF"/>
-                </a:solidFill>
-                <a:latin typeface="Play"/>
-                <a:ea typeface="Play"/>
-                <a:cs typeface="Play"/>
-              </a:rPr>
-              <a:t>Попросим решение о запуске на всю компанию</a:t>
-            </a:r>
-          </a:p>
-        </p:txBody>
-      </p:sp>
-      <p:sp>
-        <p:nvSpPr>
-          <p:cNvPr id="887" name="body"/>
-          <p:cNvSpPr txBox="1"/>
-          <p:nvPr/>
-        </p:nvSpPr>
-        <p:spPr>
-          <a:xfrm>
-            <a:off x="427817" y="3358503"/>
-            <a:ext cx="11312347" cy="1140824"/>
-          </a:xfrm>
-          <a:prstGeom prst="rect">
-            <a:avLst/>
-          </a:prstGeom>
-          <a:noFill/>
-        </p:spPr>
-        <p:txBody>
-          <a:bodyPr wrap="square" lIns="76200" rIns="76200" tIns="50800" bIns="50800">
-            <a:spAutoFit/>
-          </a:bodyPr>
-          <a:lstStyle/>
-          <a:p>
-            <a:pPr algn="l">
-              <a:spcAft>
-                <a:spcPts val="300"/>
-              </a:spcAft>
-              <a:defRPr sz="2800" b="1">
-                <a:solidFill>
-                  <a:srgbClr val="FFFFFF"/>
-                </a:solidFill>
-                <a:latin typeface="Play"/>
-                <a:ea typeface="Play"/>
-                <a:cs typeface="Play"/>
-              </a:defRPr>
-            </a:pPr>
-            <a:r>
-              <a:rPr sz="2800" b="1">
-                <a:solidFill>
-                  <a:srgbClr val="FFFFFF"/>
-                </a:solidFill>
-                <a:latin typeface="Play"/>
-                <a:ea typeface="Play"/>
-                <a:cs typeface="Play"/>
-              </a:rPr>
-              <a:t>• Ожидаем одобрения руководства</a:t>
-            </a:r>
-          </a:p>
-          <a:p>
-            <a:pPr algn="l">
-              <a:spcAft>
-                <a:spcPts val="300"/>
-              </a:spcAft>
-              <a:defRPr sz="2800" b="1">
-                <a:solidFill>
-                  <a:srgbClr val="FFFFFF"/>
-                </a:solidFill>
-                <a:latin typeface="Play"/>
-                <a:ea typeface="Play"/>
-                <a:cs typeface="Play"/>
-              </a:defRPr>
-            </a:pPr>
-            <a:r>
-              <a:rPr sz="2800" b="1">
-                <a:solidFill>
-                  <a:srgbClr val="FFFFFF"/>
-                </a:solidFill>
-                <a:latin typeface="Play"/>
-                <a:ea typeface="Play"/>
-                <a:cs typeface="Play"/>
-              </a:rPr>
-              <a:t>• Готовы к масштабированию</a:t>
+              <a:t>Вопросы?</a:t>
             </a:r>
           </a:p>
         </p:txBody>

--- a/samples/VK_WorkSpace_Клиентская_конференция_Шабл__focus.pptx
+++ b/samples/VK_WorkSpace_Клиентская_конференция_Шабл__focus.pptx
@@ -18,6 +18,8 @@
     <p:sldId id="292" r:id="rId45"/>
     <p:sldId id="293" r:id="rId46"/>
     <p:sldId id="294" r:id="rId47"/>
+    <p:sldId id="295" r:id="rId48"/>
+    <p:sldId id="296" r:id="rId49"/>
   </p:sldIdLst>
   <p:sldSz cy="6858000" cx="12192000"/>
   <p:notesSz cx="6858000" cy="9144000"/>
@@ -284,706 +286,6 @@
     </p:ext>
   </p:extLst>
 </p:presentation>
-</file>
-
-<file path=ppt/charts/chart1.xml><?xml version="1.0" encoding="utf-8"?>
-<c:chartSpace xmlns:c="http://schemas.openxmlformats.org/drawingml/2006/chart" xmlns:a="http://schemas.openxmlformats.org/drawingml/2006/main" xmlns:r="http://schemas.openxmlformats.org/officeDocument/2006/relationships">
-  <c:date1904 val="0"/>
-  <c:chart>
-    <c:autoTitleDeleted val="1"/>
-    <c:plotArea>
-      <c:barChart>
-        <c:barDir val="col"/>
-        <c:grouping val="clustered"/>
-        <c:ser>
-          <c:idx val="0"/>
-          <c:order val="0"/>
-          <c:tx>
-            <c:strRef>
-              <c:f>Sheet1!$B$1</c:f>
-              <c:strCache>
-                <c:ptCount val="1"/>
-                <c:pt idx="0">
-                  <c:v>Время</c:v>
-                </c:pt>
-              </c:strCache>
-            </c:strRef>
-          </c:tx>
-          <c:spPr>
-            <a:solidFill>
-              <a:srgbClr val="0077FF"/>
-            </a:solidFill>
-            <a:ln>
-              <a:solidFill>
-                <a:srgbClr val="0077FF"/>
-              </a:solidFill>
-            </a:ln>
-          </c:spPr>
-          <c:cat>
-            <c:strRef>
-              <c:f>Sheet1!$A$2:$A$3</c:f>
-              <c:strCache>
-                <c:ptCount val="2"/>
-                <c:pt idx="0">
-                  <c:v>Сборка</c:v>
-                </c:pt>
-                <c:pt idx="1">
-                  <c:v>Правки</c:v>
-                </c:pt>
-              </c:strCache>
-            </c:strRef>
-          </c:cat>
-          <c:val>
-            <c:numRef>
-              <c:f>Sheet1!$B$2:$B$3</c:f>
-              <c:numCache>
-                <c:formatCode>General</c:formatCode>
-                <c:ptCount val="2"/>
-                <c:pt idx="0">
-                  <c:v>186.0</c:v>
-                </c:pt>
-                <c:pt idx="1">
-                  <c:v>74.0</c:v>
-                </c:pt>
-              </c:numCache>
-            </c:numRef>
-          </c:val>
-        </c:ser>
-        <c:dLbls>
-          <c:numFmt formatCode="0&quot; мин&quot;" sourceLinked="0"/>
-          <c:txPr>
-            <a:bodyPr wrap="none"/>
-            <a:lstStyle/>
-            <a:p>
-              <a:pPr>
-                <a:defRPr sz="1100" b="0">
-                  <a:solidFill>
-                    <a:srgbClr val="FFFFFF"/>
-                  </a:solidFill>
-                  <a:latin typeface="Play"/>
-                  <a:ea typeface="Play"/>
-                  <a:cs typeface="Play"/>
-                </a:defRPr>
-              </a:pPr>
-            </a:p>
-          </c:txPr>
-          <c:dLblPos val="outEnd"/>
-          <c:showLegendKey val="0"/>
-          <c:showVal val="1"/>
-          <c:showCatName val="0"/>
-          <c:showSerName val="0"/>
-          <c:showPercent val="0"/>
-          <c:showBubbleSize val="0"/>
-          <c:showLeaderLines val="1"/>
-        </c:dLbls>
-        <c:gapWidth val="60"/>
-        <c:axId val="-2068027336"/>
-        <c:axId val="-2113994440"/>
-      </c:barChart>
-      <c:catAx>
-        <c:axId val="-2068027336"/>
-        <c:scaling>
-          <c:orientation val="minMax"/>
-        </c:scaling>
-        <c:delete val="0"/>
-        <c:axPos val="b"/>
-        <c:majorTickMark val="out"/>
-        <c:minorTickMark val="none"/>
-        <c:tickLblPos val="nextTo"/>
-        <c:txPr>
-          <a:bodyPr/>
-          <a:lstStyle/>
-          <a:p>
-            <a:pPr>
-              <a:defRPr sz="1100" b="0">
-                <a:solidFill>
-                  <a:srgbClr val="FFFFFF"/>
-                </a:solidFill>
-                <a:latin typeface="Play"/>
-                <a:ea typeface="Play"/>
-                <a:cs typeface="Play"/>
-              </a:defRPr>
-            </a:pPr>
-          </a:p>
-        </c:txPr>
-        <c:crossAx val="-2113994440"/>
-        <c:crosses val="autoZero"/>
-        <c:auto val="1"/>
-        <c:lblAlgn val="ctr"/>
-        <c:lblOffset val="100"/>
-        <c:noMultiLvlLbl val="0"/>
-      </c:catAx>
-      <c:valAx>
-        <c:axId val="-2113994440"/>
-        <c:scaling/>
-        <c:delete val="0"/>
-        <c:axPos val="l"/>
-        <c:majorGridlines>
-          <c:spPr>
-            <a:ln w="9525">
-              <a:solidFill>
-                <a:srgbClr val="3C3C3C"/>
-              </a:solidFill>
-            </a:ln>
-          </c:spPr>
-        </c:majorGridlines>
-        <c:title>
-          <c:tx>
-            <c:rich>
-              <a:bodyPr rot="0" vert="horz"/>
-              <a:lstStyle/>
-              <a:p>
-                <a:pPr>
-                  <a:defRPr sz="1100" b="0">
-                    <a:solidFill>
-                      <a:srgbClr val="FFFFFF"/>
-                    </a:solidFill>
-                    <a:latin typeface="Play"/>
-                    <a:ea typeface="Play"/>
-                    <a:cs typeface="Play"/>
-                  </a:defRPr>
-                </a:pPr>
-                <a:r>
-                  <a:t>Время, мин</a:t>
-                </a:r>
-              </a:p>
-            </c:rich>
-          </c:tx>
-          <c:layout/>
-          <c:overlay val="0"/>
-        </c:title>
-        <c:majorTickMark val="out"/>
-        <c:minorTickMark val="none"/>
-        <c:tickLblPos val="nextTo"/>
-        <c:txPr>
-          <a:bodyPr/>
-          <a:lstStyle/>
-          <a:p>
-            <a:pPr>
-              <a:defRPr sz="1100" b="0">
-                <a:solidFill>
-                  <a:srgbClr val="FFFFFF"/>
-                </a:solidFill>
-                <a:latin typeface="Play"/>
-                <a:ea typeface="Play"/>
-                <a:cs typeface="Play"/>
-              </a:defRPr>
-            </a:pPr>
-          </a:p>
-        </c:txPr>
-        <c:crossAx val="-2068027336"/>
-        <c:crosses val="autoZero"/>
-      </c:valAx>
-    </c:plotArea>
-    <c:dispBlanksAs val="gap"/>
-  </c:chart>
-  <c:txPr>
-    <a:bodyPr/>
-    <a:lstStyle/>
-    <a:p>
-      <a:pPr>
-        <a:defRPr sz="1200" b="0">
-          <a:solidFill>
-            <a:srgbClr val="FFFFFF"/>
-          </a:solidFill>
-          <a:latin typeface="Play"/>
-          <a:ea typeface="Play"/>
-          <a:cs typeface="Play"/>
-        </a:defRPr>
-      </a:pPr>
-      <a:endParaRPr lang="en-US"/>
-    </a:p>
-  </c:txPr>
-  <c:externalData r:id="rId1">
-    <c:autoUpdate val="0"/>
-  </c:externalData>
-</c:chartSpace>
-</file>
-
-<file path=ppt/charts/chart2.xml><?xml version="1.0" encoding="utf-8"?>
-<c:chartSpace xmlns:c="http://schemas.openxmlformats.org/drawingml/2006/chart" xmlns:a="http://schemas.openxmlformats.org/drawingml/2006/main" xmlns:r="http://schemas.openxmlformats.org/officeDocument/2006/relationships">
-  <c:date1904 val="0"/>
-  <c:chart>
-    <c:autoTitleDeleted val="1"/>
-    <c:plotArea>
-      <c:barChart>
-        <c:barDir val="col"/>
-        <c:grouping val="clustered"/>
-        <c:ser>
-          <c:idx val="0"/>
-          <c:order val="0"/>
-          <c:tx>
-            <c:strRef>
-              <c:f>Sheet1!$B$1</c:f>
-              <c:strCache>
-                <c:ptCount val="1"/>
-                <c:pt idx="0">
-                  <c:v>Текущее</c:v>
-                </c:pt>
-              </c:strCache>
-            </c:strRef>
-          </c:tx>
-          <c:spPr>
-            <a:solidFill>
-              <a:srgbClr val="0077FF"/>
-            </a:solidFill>
-            <a:ln>
-              <a:solidFill>
-                <a:srgbClr val="0077FF"/>
-              </a:solidFill>
-            </a:ln>
-          </c:spPr>
-          <c:cat>
-            <c:strRef>
-              <c:f>Sheet1!$A$2:$A$3</c:f>
-              <c:strCache>
-                <c:ptCount val="2"/>
-                <c:pt idx="0">
-                  <c:v>Сборка</c:v>
-                </c:pt>
-                <c:pt idx="1">
-                  <c:v>Первая версия</c:v>
-                </c:pt>
-              </c:strCache>
-            </c:strRef>
-          </c:cat>
-          <c:val>
-            <c:numRef>
-              <c:f>Sheet1!$B$2:$B$3</c:f>
-              <c:numCache>
-                <c:formatCode>General</c:formatCode>
-                <c:ptCount val="2"/>
-                <c:pt idx="0">
-                  <c:v>186.0</c:v>
-                </c:pt>
-                <c:pt idx="1">
-                  <c:v>6.0</c:v>
-                </c:pt>
-              </c:numCache>
-            </c:numRef>
-          </c:val>
-        </c:ser>
-        <c:ser>
-          <c:idx val="1"/>
-          <c:order val="1"/>
-          <c:tx>
-            <c:strRef>
-              <c:f>Sheet1!$C$1</c:f>
-              <c:strCache>
-                <c:ptCount val="1"/>
-                <c:pt idx="0">
-                  <c:v>Пилот</c:v>
-                </c:pt>
-              </c:strCache>
-            </c:strRef>
-          </c:tx>
-          <c:spPr>
-            <a:solidFill>
-              <a:srgbClr val="6DBCFF"/>
-            </a:solidFill>
-            <a:ln>
-              <a:solidFill>
-                <a:srgbClr val="6DBCFF"/>
-              </a:solidFill>
-            </a:ln>
-          </c:spPr>
-          <c:cat>
-            <c:strRef>
-              <c:f>Sheet1!$A$2:$A$3</c:f>
-              <c:strCache>
-                <c:ptCount val="2"/>
-                <c:pt idx="0">
-                  <c:v>Сборка</c:v>
-                </c:pt>
-                <c:pt idx="1">
-                  <c:v>Первая версия</c:v>
-                </c:pt>
-              </c:strCache>
-            </c:strRef>
-          </c:cat>
-          <c:val>
-            <c:numRef>
-              <c:f>Sheet1!$C$2:$C$3</c:f>
-              <c:numCache>
-                <c:formatCode>General</c:formatCode>
-                <c:ptCount val="2"/>
-                <c:pt idx="0">
-                  <c:v>4.0</c:v>
-                </c:pt>
-                <c:pt idx="1">
-                  <c:v>1.0</c:v>
-                </c:pt>
-              </c:numCache>
-            </c:numRef>
-          </c:val>
-        </c:ser>
-        <c:dLbls>
-          <c:numFmt formatCode="0&quot; мин&quot;" sourceLinked="0"/>
-          <c:txPr>
-            <a:bodyPr wrap="none"/>
-            <a:lstStyle/>
-            <a:p>
-              <a:pPr>
-                <a:defRPr sz="1100" b="0">
-                  <a:solidFill>
-                    <a:srgbClr val="FFFFFF"/>
-                  </a:solidFill>
-                  <a:latin typeface="Play"/>
-                  <a:ea typeface="Play"/>
-                  <a:cs typeface="Play"/>
-                </a:defRPr>
-              </a:pPr>
-            </a:p>
-          </c:txPr>
-          <c:dLblPos val="outEnd"/>
-          <c:showLegendKey val="0"/>
-          <c:showVal val="1"/>
-          <c:showCatName val="0"/>
-          <c:showSerName val="0"/>
-          <c:showPercent val="0"/>
-          <c:showBubbleSize val="0"/>
-          <c:showLeaderLines val="1"/>
-        </c:dLbls>
-        <c:gapWidth val="60"/>
-        <c:axId val="-2068027336"/>
-        <c:axId val="-2113994440"/>
-      </c:barChart>
-      <c:catAx>
-        <c:axId val="-2068027336"/>
-        <c:scaling>
-          <c:orientation val="minMax"/>
-        </c:scaling>
-        <c:delete val="0"/>
-        <c:axPos val="b"/>
-        <c:majorTickMark val="out"/>
-        <c:minorTickMark val="none"/>
-        <c:tickLblPos val="nextTo"/>
-        <c:txPr>
-          <a:bodyPr/>
-          <a:lstStyle/>
-          <a:p>
-            <a:pPr>
-              <a:defRPr sz="1100" b="0">
-                <a:solidFill>
-                  <a:srgbClr val="FFFFFF"/>
-                </a:solidFill>
-                <a:latin typeface="Play"/>
-                <a:ea typeface="Play"/>
-                <a:cs typeface="Play"/>
-              </a:defRPr>
-            </a:pPr>
-          </a:p>
-        </c:txPr>
-        <c:crossAx val="-2113994440"/>
-        <c:crosses val="autoZero"/>
-        <c:auto val="1"/>
-        <c:lblAlgn val="ctr"/>
-        <c:lblOffset val="100"/>
-        <c:noMultiLvlLbl val="0"/>
-      </c:catAx>
-      <c:valAx>
-        <c:axId val="-2113994440"/>
-        <c:scaling/>
-        <c:delete val="0"/>
-        <c:axPos val="l"/>
-        <c:majorGridlines>
-          <c:spPr>
-            <a:ln w="9525">
-              <a:solidFill>
-                <a:srgbClr val="3C3C3C"/>
-              </a:solidFill>
-            </a:ln>
-          </c:spPr>
-        </c:majorGridlines>
-        <c:title>
-          <c:tx>
-            <c:rich>
-              <a:bodyPr rot="0" vert="horz"/>
-              <a:lstStyle/>
-              <a:p>
-                <a:pPr>
-                  <a:defRPr sz="1100" b="0">
-                    <a:solidFill>
-                      <a:srgbClr val="FFFFFF"/>
-                    </a:solidFill>
-                    <a:latin typeface="Play"/>
-                    <a:ea typeface="Play"/>
-                    <a:cs typeface="Play"/>
-                  </a:defRPr>
-                </a:pPr>
-                <a:r>
-                  <a:t>мин</a:t>
-                </a:r>
-              </a:p>
-            </c:rich>
-          </c:tx>
-          <c:layout/>
-          <c:overlay val="0"/>
-        </c:title>
-        <c:majorTickMark val="out"/>
-        <c:minorTickMark val="none"/>
-        <c:tickLblPos val="nextTo"/>
-        <c:txPr>
-          <a:bodyPr/>
-          <a:lstStyle/>
-          <a:p>
-            <a:pPr>
-              <a:defRPr sz="1100" b="0">
-                <a:solidFill>
-                  <a:srgbClr val="FFFFFF"/>
-                </a:solidFill>
-                <a:latin typeface="Play"/>
-                <a:ea typeface="Play"/>
-                <a:cs typeface="Play"/>
-              </a:defRPr>
-            </a:pPr>
-          </a:p>
-        </c:txPr>
-        <c:crossAx val="-2068027336"/>
-        <c:crosses val="autoZero"/>
-      </c:valAx>
-    </c:plotArea>
-    <c:legend>
-      <c:legendPos val="b"/>
-      <c:overlay val="0"/>
-    </c:legend>
-    <c:dispBlanksAs val="gap"/>
-  </c:chart>
-  <c:txPr>
-    <a:bodyPr/>
-    <a:lstStyle/>
-    <a:p>
-      <a:pPr>
-        <a:defRPr sz="1200" b="0">
-          <a:solidFill>
-            <a:srgbClr val="FFFFFF"/>
-          </a:solidFill>
-          <a:latin typeface="Play"/>
-          <a:ea typeface="Play"/>
-          <a:cs typeface="Play"/>
-        </a:defRPr>
-      </a:pPr>
-      <a:endParaRPr lang="en-US"/>
-    </a:p>
-  </c:txPr>
-  <c:externalData r:id="rId1">
-    <c:autoUpdate val="0"/>
-  </c:externalData>
-</c:chartSpace>
-</file>
-
-<file path=ppt/charts/chart3.xml><?xml version="1.0" encoding="utf-8"?>
-<c:chartSpace xmlns:c="http://schemas.openxmlformats.org/drawingml/2006/chart" xmlns:a="http://schemas.openxmlformats.org/drawingml/2006/main" xmlns:r="http://schemas.openxmlformats.org/officeDocument/2006/relationships">
-  <c:date1904 val="0"/>
-  <c:chart>
-    <c:autoTitleDeleted val="1"/>
-    <c:plotArea>
-      <c:barChart>
-        <c:barDir val="col"/>
-        <c:grouping val="clustered"/>
-        <c:ser>
-          <c:idx val="0"/>
-          <c:order val="0"/>
-          <c:tx>
-            <c:strRef>
-              <c:f>Sheet1!$B$1</c:f>
-              <c:strCache>
-                <c:ptCount val="1"/>
-                <c:pt idx="0">
-                  <c:v>Запросы</c:v>
-                </c:pt>
-              </c:strCache>
-            </c:strRef>
-          </c:tx>
-          <c:spPr>
-            <a:solidFill>
-              <a:srgbClr val="0077FF"/>
-            </a:solidFill>
-            <a:ln>
-              <a:solidFill>
-                <a:srgbClr val="0077FF"/>
-              </a:solidFill>
-            </a:ln>
-          </c:spPr>
-          <c:cat>
-            <c:strRef>
-              <c:f>Sheet1!$A$2:$A$3</c:f>
-              <c:strCache>
-                <c:ptCount val="2"/>
-                <c:pt idx="0">
-                  <c:v>Текущая</c:v>
-                </c:pt>
-                <c:pt idx="1">
-                  <c:v>Пилот</c:v>
-                </c:pt>
-              </c:strCache>
-            </c:strRef>
-          </c:cat>
-          <c:val>
-            <c:numRef>
-              <c:f>Sheet1!$B$2:$B$3</c:f>
-              <c:numCache>
-                <c:formatCode>General</c:formatCode>
-                <c:ptCount val="2"/>
-                <c:pt idx="0">
-                  <c:v>11.0</c:v>
-                </c:pt>
-                <c:pt idx="1">
-                  <c:v>38.0</c:v>
-                </c:pt>
-              </c:numCache>
-            </c:numRef>
-          </c:val>
-        </c:ser>
-        <c:dLbls>
-          <c:numFmt formatCode="0&quot; запросов&quot;" sourceLinked="0"/>
-          <c:txPr>
-            <a:bodyPr wrap="none"/>
-            <a:lstStyle/>
-            <a:p>
-              <a:pPr>
-                <a:defRPr sz="1100" b="0">
-                  <a:solidFill>
-                    <a:srgbClr val="FFFFFF"/>
-                  </a:solidFill>
-                  <a:latin typeface="Play"/>
-                  <a:ea typeface="Play"/>
-                  <a:cs typeface="Play"/>
-                </a:defRPr>
-              </a:pPr>
-            </a:p>
-          </c:txPr>
-          <c:dLblPos val="outEnd"/>
-          <c:showLegendKey val="0"/>
-          <c:showVal val="1"/>
-          <c:showCatName val="0"/>
-          <c:showSerName val="0"/>
-          <c:showPercent val="0"/>
-          <c:showBubbleSize val="0"/>
-          <c:showLeaderLines val="1"/>
-        </c:dLbls>
-        <c:gapWidth val="60"/>
-        <c:axId val="-2068027336"/>
-        <c:axId val="-2113994440"/>
-      </c:barChart>
-      <c:catAx>
-        <c:axId val="-2068027336"/>
-        <c:scaling>
-          <c:orientation val="minMax"/>
-        </c:scaling>
-        <c:delete val="0"/>
-        <c:axPos val="b"/>
-        <c:majorTickMark val="out"/>
-        <c:minorTickMark val="none"/>
-        <c:tickLblPos val="nextTo"/>
-        <c:txPr>
-          <a:bodyPr/>
-          <a:lstStyle/>
-          <a:p>
-            <a:pPr>
-              <a:defRPr sz="1100" b="0">
-                <a:solidFill>
-                  <a:srgbClr val="FFFFFF"/>
-                </a:solidFill>
-                <a:latin typeface="Play"/>
-                <a:ea typeface="Play"/>
-                <a:cs typeface="Play"/>
-              </a:defRPr>
-            </a:pPr>
-          </a:p>
-        </c:txPr>
-        <c:crossAx val="-2113994440"/>
-        <c:crosses val="autoZero"/>
-        <c:auto val="1"/>
-        <c:lblAlgn val="ctr"/>
-        <c:lblOffset val="100"/>
-        <c:noMultiLvlLbl val="0"/>
-      </c:catAx>
-      <c:valAx>
-        <c:axId val="-2113994440"/>
-        <c:scaling/>
-        <c:delete val="0"/>
-        <c:axPos val="l"/>
-        <c:majorGridlines>
-          <c:spPr>
-            <a:ln w="9525">
-              <a:solidFill>
-                <a:srgbClr val="3C3C3C"/>
-              </a:solidFill>
-            </a:ln>
-          </c:spPr>
-        </c:majorGridlines>
-        <c:title>
-          <c:tx>
-            <c:rich>
-              <a:bodyPr rot="0" vert="horz"/>
-              <a:lstStyle/>
-              <a:p>
-                <a:pPr>
-                  <a:defRPr sz="1100" b="0">
-                    <a:solidFill>
-                      <a:srgbClr val="FFFFFF"/>
-                    </a:solidFill>
-                    <a:latin typeface="Play"/>
-                    <a:ea typeface="Play"/>
-                    <a:cs typeface="Play"/>
-                  </a:defRPr>
-                </a:pPr>
-                <a:r>
-                  <a:t>Запросы, запросов</a:t>
-                </a:r>
-              </a:p>
-            </c:rich>
-          </c:tx>
-          <c:layout/>
-          <c:overlay val="0"/>
-        </c:title>
-        <c:majorTickMark val="out"/>
-        <c:minorTickMark val="none"/>
-        <c:tickLblPos val="nextTo"/>
-        <c:txPr>
-          <a:bodyPr/>
-          <a:lstStyle/>
-          <a:p>
-            <a:pPr>
-              <a:defRPr sz="1100" b="0">
-                <a:solidFill>
-                  <a:srgbClr val="FFFFFF"/>
-                </a:solidFill>
-                <a:latin typeface="Play"/>
-                <a:ea typeface="Play"/>
-                <a:cs typeface="Play"/>
-              </a:defRPr>
-            </a:pPr>
-          </a:p>
-        </c:txPr>
-        <c:crossAx val="-2068027336"/>
-        <c:crosses val="autoZero"/>
-      </c:valAx>
-    </c:plotArea>
-    <c:dispBlanksAs val="gap"/>
-  </c:chart>
-  <c:txPr>
-    <a:bodyPr/>
-    <a:lstStyle/>
-    <a:p>
-      <a:pPr>
-        <a:defRPr sz="1200" b="0">
-          <a:solidFill>
-            <a:srgbClr val="FFFFFF"/>
-          </a:solidFill>
-          <a:latin typeface="Play"/>
-          <a:ea typeface="Play"/>
-          <a:cs typeface="Play"/>
-        </a:defRPr>
-      </a:pPr>
-      <a:endParaRPr lang="en-US"/>
-    </a:p>
-  </c:txPr>
-  <c:externalData r:id="rId1">
-    <c:autoUpdate val="0"/>
-  </c:externalData>
-</c:chartSpace>
 </file>
 
 <file path=ppt/notesMasters/notesMaster1.xml><?xml version="1.0" encoding="utf-8"?>
@@ -2814,6 +2116,138 @@
 </p:notes>
 </file>
 
+<file path=ppt/notesSlides/notesSlide40.xml><?xml version="1.0" encoding="utf-8"?>
+<p:notes xmlns:a="http://schemas.openxmlformats.org/drawingml/2006/main" xmlns:p="http://schemas.openxmlformats.org/presentationml/2006/main" xmlns:r="http://schemas.openxmlformats.org/officeDocument/2006/relationships">
+  <p:cSld>
+    <p:spTree>
+      <p:nvGrpSpPr>
+        <p:cNvPr id="1" name=""/>
+        <p:cNvGrpSpPr/>
+        <p:nvPr/>
+      </p:nvGrpSpPr>
+      <p:grpSpPr>
+        <a:xfrm>
+          <a:off x="0" y="0"/>
+          <a:ext cx="0" cy="0"/>
+          <a:chOff x="0" y="0"/>
+          <a:chExt cx="0" cy="0"/>
+        </a:xfrm>
+      </p:grpSpPr>
+      <p:sp>
+        <p:nvSpPr>
+          <p:cNvPr id="2" name="Slide Image Placeholder 1"/>
+          <p:cNvSpPr>
+            <a:spLocks noGrp="1"/>
+          </p:cNvSpPr>
+          <p:nvPr>
+            <p:ph type="sldImg" idx="3"/>
+          </p:nvPr>
+        </p:nvSpPr>
+        <p:spPr/>
+      </p:sp>
+      <p:sp>
+        <p:nvSpPr>
+          <p:cNvPr id="3" name="Notes Placeholder 2"/>
+          <p:cNvSpPr>
+            <a:spLocks noGrp="1"/>
+          </p:cNvSpPr>
+          <p:nvPr>
+            <p:ph type="body" idx="1"/>
+          </p:nvPr>
+        </p:nvSpPr>
+        <p:spPr/>
+        <p:txBody>
+          <a:bodyPr/>
+          <a:lstStyle/>
+          <a:p/>
+        </p:txBody>
+      </p:sp>
+      <p:sp>
+        <p:nvSpPr>
+          <p:cNvPr id="4" name="Slide Number Placeholder 3"/>
+          <p:cNvSpPr>
+            <a:spLocks noGrp="1"/>
+          </p:cNvSpPr>
+          <p:nvPr>
+            <p:ph type="sldNum" idx="12"/>
+          </p:nvPr>
+        </p:nvSpPr>
+        <p:spPr/>
+      </p:sp>
+    </p:spTree>
+  </p:cSld>
+  <p:clrMapOvr>
+    <a:masterClrMapping/>
+  </p:clrMapOvr>
+</p:notes>
+</file>
+
+<file path=ppt/notesSlides/notesSlide41.xml><?xml version="1.0" encoding="utf-8"?>
+<p:notes xmlns:a="http://schemas.openxmlformats.org/drawingml/2006/main" xmlns:p="http://schemas.openxmlformats.org/presentationml/2006/main" xmlns:r="http://schemas.openxmlformats.org/officeDocument/2006/relationships">
+  <p:cSld>
+    <p:spTree>
+      <p:nvGrpSpPr>
+        <p:cNvPr id="1" name=""/>
+        <p:cNvGrpSpPr/>
+        <p:nvPr/>
+      </p:nvGrpSpPr>
+      <p:grpSpPr>
+        <a:xfrm>
+          <a:off x="0" y="0"/>
+          <a:ext cx="0" cy="0"/>
+          <a:chOff x="0" y="0"/>
+          <a:chExt cx="0" cy="0"/>
+        </a:xfrm>
+      </p:grpSpPr>
+      <p:sp>
+        <p:nvSpPr>
+          <p:cNvPr id="2" name="Slide Image Placeholder 1"/>
+          <p:cNvSpPr>
+            <a:spLocks noGrp="1"/>
+          </p:cNvSpPr>
+          <p:nvPr>
+            <p:ph type="sldImg" idx="3"/>
+          </p:nvPr>
+        </p:nvSpPr>
+        <p:spPr/>
+      </p:sp>
+      <p:sp>
+        <p:nvSpPr>
+          <p:cNvPr id="3" name="Notes Placeholder 2"/>
+          <p:cNvSpPr>
+            <a:spLocks noGrp="1"/>
+          </p:cNvSpPr>
+          <p:nvPr>
+            <p:ph type="body" idx="1"/>
+          </p:nvPr>
+        </p:nvSpPr>
+        <p:spPr/>
+        <p:txBody>
+          <a:bodyPr/>
+          <a:lstStyle/>
+          <a:p/>
+        </p:txBody>
+      </p:sp>
+      <p:sp>
+        <p:nvSpPr>
+          <p:cNvPr id="4" name="Slide Number Placeholder 3"/>
+          <p:cNvSpPr>
+            <a:spLocks noGrp="1"/>
+          </p:cNvSpPr>
+          <p:nvPr>
+            <p:ph type="sldNum" idx="12"/>
+          </p:nvPr>
+        </p:nvSpPr>
+        <p:spPr/>
+      </p:sp>
+    </p:spTree>
+  </p:cSld>
+  <p:clrMapOvr>
+    <a:masterClrMapping/>
+  </p:clrMapOvr>
+</p:notes>
+</file>
+
 <file path=ppt/slideLayouts/slideLayout1.xml><?xml version="1.0" encoding="utf-8"?>
 <p:sldLayout xmlns:a="http://schemas.openxmlformats.org/drawingml/2006/main" xmlns:r="http://schemas.openxmlformats.org/officeDocument/2006/relationships" xmlns:mc="http://schemas.openxmlformats.org/markup-compatibility/2006" xmlns:mv="urn:schemas-microsoft-com:mac:vml" xmlns:p="http://schemas.openxmlformats.org/presentationml/2006/main" xmlns:c="http://schemas.openxmlformats.org/drawingml/2006/chart" xmlns:dgm="http://schemas.openxmlformats.org/drawingml/2006/diagram" xmlns:o="urn:schemas-microsoft-com:office:office" xmlns:v="urn:schemas-microsoft-com:vml" xmlns:pvml="urn:schemas-microsoft-com:office:powerpoint" xmlns:com="http://schemas.openxmlformats.org/drawingml/2006/compatibility" xmlns:p14="http://schemas.microsoft.com/office/powerpoint/2010/main" xmlns:p15="http://schemas.microsoft.com/office/powerpoint/2012/main" xmlns:ahyp="http://schemas.microsoft.com/office/drawing/2018/hyperlinkcolor" matchingName="7_Титульный слайд">
   <p:cSld name="7_Титульный слайд">
@@ -9820,19 +9254,588 @@
       </p:sp>
       <p:graphicFrame>
         <p:nvGraphicFramePr>
-          <p:cNvPr id="3" name="Chart 2"/>
+          <p:cNvPr id="3" name="Table 2"/>
           <p:cNvGraphicFramePr>
             <a:graphicFrameLocks noGrp="1"/>
           </p:cNvGraphicFramePr>
           <p:nvPr/>
         </p:nvGraphicFramePr>
         <p:xfrm>
-          <a:off x="429280" y="1664162"/>
-          <a:ext cx="11310884" cy="2080703"/>
+          <a:off x="429280" y="1783080"/>
+          <a:ext cx="11310884" cy="2297430"/>
         </p:xfrm>
         <a:graphic>
-          <a:graphicData uri="http://schemas.openxmlformats.org/drawingml/2006/chart">
-            <c:chart xmlns:c="http://schemas.openxmlformats.org/drawingml/2006/chart" r:id="rId2"/>
+          <a:graphicData uri="http://schemas.openxmlformats.org/drawingml/2006/table">
+            <a:tbl>
+              <a:tblPr firstRow="1" bandRow="1">
+                <a:tableStyleId>{5C22544A-7EE6-4342-B048-85BDC9FD1C3A}</a:tableStyleId>
+              </a:tblPr>
+              <a:tblGrid>
+                <a:gridCol w="3770294"/>
+                <a:gridCol w="3770294"/>
+                <a:gridCol w="3770296"/>
+              </a:tblGrid>
+              <a:tr h="328204">
+                <a:tc>
+                  <a:txBody>
+                    <a:bodyPr/>
+                    <a:lstStyle/>
+                    <a:p>
+                      <a:pPr>
+                        <a:defRPr sz="1300" b="1">
+                          <a:solidFill>
+                            <a:srgbClr val="FFFFFF"/>
+                          </a:solidFill>
+                          <a:latin typeface="Play"/>
+                          <a:ea typeface="Play"/>
+                          <a:cs typeface="Play"/>
+                        </a:defRPr>
+                      </a:pPr>
+                      <a:r>
+                        <a:t>Метрика</a:t>
+                      </a:r>
+                    </a:p>
+                  </a:txBody>
+                  <a:tcPr>
+                    <a:solidFill>
+                      <a:srgbClr val="0077FF"/>
+                    </a:solidFill>
+                  </a:tcPr>
+                </a:tc>
+                <a:tc>
+                  <a:txBody>
+                    <a:bodyPr/>
+                    <a:lstStyle/>
+                    <a:p>
+                      <a:pPr>
+                        <a:defRPr sz="1300" b="1">
+                          <a:solidFill>
+                            <a:srgbClr val="FFFFFF"/>
+                          </a:solidFill>
+                          <a:latin typeface="Play"/>
+                          <a:ea typeface="Play"/>
+                          <a:cs typeface="Play"/>
+                        </a:defRPr>
+                      </a:pPr>
+                      <a:r>
+                        <a:t>Значение</a:t>
+                      </a:r>
+                    </a:p>
+                  </a:txBody>
+                  <a:tcPr>
+                    <a:solidFill>
+                      <a:srgbClr val="0077FF"/>
+                    </a:solidFill>
+                  </a:tcPr>
+                </a:tc>
+                <a:tc>
+                  <a:txBody>
+                    <a:bodyPr/>
+                    <a:lstStyle/>
+                    <a:p>
+                      <a:pPr>
+                        <a:defRPr sz="1300" b="1">
+                          <a:solidFill>
+                            <a:srgbClr val="FFFFFF"/>
+                          </a:solidFill>
+                          <a:latin typeface="Play"/>
+                          <a:ea typeface="Play"/>
+                          <a:cs typeface="Play"/>
+                        </a:defRPr>
+                      </a:pPr>
+                      <a:r>
+                        <a:t>Единица</a:t>
+                      </a:r>
+                    </a:p>
+                  </a:txBody>
+                  <a:tcPr>
+                    <a:solidFill>
+                      <a:srgbClr val="0077FF"/>
+                    </a:solidFill>
+                  </a:tcPr>
+                </a:tc>
+              </a:tr>
+              <a:tr h="328204">
+                <a:tc>
+                  <a:txBody>
+                    <a:bodyPr/>
+                    <a:lstStyle/>
+                    <a:p>
+                      <a:pPr>
+                        <a:defRPr sz="1300" b="0">
+                          <a:solidFill>
+                            <a:srgbClr val="FFFFFF"/>
+                          </a:solidFill>
+                          <a:latin typeface="Play"/>
+                          <a:ea typeface="Play"/>
+                          <a:cs typeface="Play"/>
+                        </a:defRPr>
+                      </a:pPr>
+                      <a:r>
+                        <a:t>Время сборки</a:t>
+                      </a:r>
+                    </a:p>
+                  </a:txBody>
+                  <a:tcPr>
+                    <a:solidFill>
+                      <a:srgbClr val="111111"/>
+                    </a:solidFill>
+                  </a:tcPr>
+                </a:tc>
+                <a:tc>
+                  <a:txBody>
+                    <a:bodyPr/>
+                    <a:lstStyle/>
+                    <a:p>
+                      <a:pPr>
+                        <a:defRPr sz="1300" b="0">
+                          <a:solidFill>
+                            <a:srgbClr val="FFFFFF"/>
+                          </a:solidFill>
+                          <a:latin typeface="Play"/>
+                          <a:ea typeface="Play"/>
+                          <a:cs typeface="Play"/>
+                        </a:defRPr>
+                      </a:pPr>
+                      <a:r>
+                        <a:t>186</a:t>
+                      </a:r>
+                    </a:p>
+                  </a:txBody>
+                  <a:tcPr>
+                    <a:solidFill>
+                      <a:srgbClr val="111111"/>
+                    </a:solidFill>
+                  </a:tcPr>
+                </a:tc>
+                <a:tc>
+                  <a:txBody>
+                    <a:bodyPr/>
+                    <a:lstStyle/>
+                    <a:p>
+                      <a:pPr>
+                        <a:defRPr sz="1300" b="0">
+                          <a:solidFill>
+                            <a:srgbClr val="FFFFFF"/>
+                          </a:solidFill>
+                          <a:latin typeface="Play"/>
+                          <a:ea typeface="Play"/>
+                          <a:cs typeface="Play"/>
+                        </a:defRPr>
+                      </a:pPr>
+                      <a:r>
+                        <a:t>мин</a:t>
+                      </a:r>
+                    </a:p>
+                  </a:txBody>
+                  <a:tcPr>
+                    <a:solidFill>
+                      <a:srgbClr val="111111"/>
+                    </a:solidFill>
+                  </a:tcPr>
+                </a:tc>
+              </a:tr>
+              <a:tr h="328204">
+                <a:tc>
+                  <a:txBody>
+                    <a:bodyPr/>
+                    <a:lstStyle/>
+                    <a:p>
+                      <a:pPr>
+                        <a:defRPr sz="1300" b="0">
+                          <a:solidFill>
+                            <a:srgbClr val="FFFFFF"/>
+                          </a:solidFill>
+                          <a:latin typeface="Play"/>
+                          <a:ea typeface="Play"/>
+                          <a:cs typeface="Play"/>
+                        </a:defRPr>
+                      </a:pPr>
+                      <a:r>
+                        <a:t>Время правок</a:t>
+                      </a:r>
+                    </a:p>
+                  </a:txBody>
+                  <a:tcPr>
+                    <a:solidFill>
+                      <a:srgbClr val="111111"/>
+                    </a:solidFill>
+                  </a:tcPr>
+                </a:tc>
+                <a:tc>
+                  <a:txBody>
+                    <a:bodyPr/>
+                    <a:lstStyle/>
+                    <a:p>
+                      <a:pPr>
+                        <a:defRPr sz="1300" b="0">
+                          <a:solidFill>
+                            <a:srgbClr val="FFFFFF"/>
+                          </a:solidFill>
+                          <a:latin typeface="Play"/>
+                          <a:ea typeface="Play"/>
+                          <a:cs typeface="Play"/>
+                        </a:defRPr>
+                      </a:pPr>
+                      <a:r>
+                        <a:t>74</a:t>
+                      </a:r>
+                    </a:p>
+                  </a:txBody>
+                  <a:tcPr>
+                    <a:solidFill>
+                      <a:srgbClr val="111111"/>
+                    </a:solidFill>
+                  </a:tcPr>
+                </a:tc>
+                <a:tc>
+                  <a:txBody>
+                    <a:bodyPr/>
+                    <a:lstStyle/>
+                    <a:p>
+                      <a:pPr>
+                        <a:defRPr sz="1300" b="0">
+                          <a:solidFill>
+                            <a:srgbClr val="FFFFFF"/>
+                          </a:solidFill>
+                          <a:latin typeface="Play"/>
+                          <a:ea typeface="Play"/>
+                          <a:cs typeface="Play"/>
+                        </a:defRPr>
+                      </a:pPr>
+                      <a:r>
+                        <a:t>мин</a:t>
+                      </a:r>
+                    </a:p>
+                  </a:txBody>
+                  <a:tcPr>
+                    <a:solidFill>
+                      <a:srgbClr val="111111"/>
+                    </a:solidFill>
+                  </a:tcPr>
+                </a:tc>
+              </a:tr>
+              <a:tr h="328204">
+                <a:tc>
+                  <a:txBody>
+                    <a:bodyPr/>
+                    <a:lstStyle/>
+                    <a:p>
+                      <a:pPr>
+                        <a:defRPr sz="1300" b="0">
+                          <a:solidFill>
+                            <a:srgbClr val="FFFFFF"/>
+                          </a:solidFill>
+                          <a:latin typeface="Play"/>
+                          <a:ea typeface="Play"/>
+                          <a:cs typeface="Play"/>
+                        </a:defRPr>
+                      </a:pPr>
+                      <a:r>
+                        <a:t>Нарушения стиля</a:t>
+                      </a:r>
+                    </a:p>
+                  </a:txBody>
+                  <a:tcPr>
+                    <a:solidFill>
+                      <a:srgbClr val="111111"/>
+                    </a:solidFill>
+                  </a:tcPr>
+                </a:tc>
+                <a:tc>
+                  <a:txBody>
+                    <a:bodyPr/>
+                    <a:lstStyle/>
+                    <a:p>
+                      <a:pPr>
+                        <a:defRPr sz="1300" b="0">
+                          <a:solidFill>
+                            <a:srgbClr val="FFFFFF"/>
+                          </a:solidFill>
+                          <a:latin typeface="Play"/>
+                          <a:ea typeface="Play"/>
+                          <a:cs typeface="Play"/>
+                        </a:defRPr>
+                      </a:pPr>
+                      <a:r>
+                        <a:t>19/42</a:t>
+                      </a:r>
+                    </a:p>
+                  </a:txBody>
+                  <a:tcPr>
+                    <a:solidFill>
+                      <a:srgbClr val="111111"/>
+                    </a:solidFill>
+                  </a:tcPr>
+                </a:tc>
+                <a:tc>
+                  <a:txBody>
+                    <a:bodyPr/>
+                    <a:lstStyle/>
+                    <a:p>
+                      <a:pPr>
+                        <a:defRPr sz="1300" b="0">
+                          <a:solidFill>
+                            <a:srgbClr val="FFFFFF"/>
+                          </a:solidFill>
+                          <a:latin typeface="Play"/>
+                          <a:ea typeface="Play"/>
+                          <a:cs typeface="Play"/>
+                        </a:defRPr>
+                      </a:pPr>
+                      <a:r>
+                        <a:t>шт</a:t>
+                      </a:r>
+                    </a:p>
+                  </a:txBody>
+                  <a:tcPr>
+                    <a:solidFill>
+                      <a:srgbClr val="111111"/>
+                    </a:solidFill>
+                  </a:tcPr>
+                </a:tc>
+              </a:tr>
+              <a:tr h="328204">
+                <a:tc>
+                  <a:txBody>
+                    <a:bodyPr/>
+                    <a:lstStyle/>
+                    <a:p>
+                      <a:pPr>
+                        <a:defRPr sz="1300" b="0">
+                          <a:solidFill>
+                            <a:srgbClr val="FFFFFF"/>
+                          </a:solidFill>
+                          <a:latin typeface="Play"/>
+                          <a:ea typeface="Play"/>
+                          <a:cs typeface="Play"/>
+                        </a:defRPr>
+                      </a:pPr>
+                      <a:r>
+                        <a:t>Размер команды</a:t>
+                      </a:r>
+                    </a:p>
+                  </a:txBody>
+                  <a:tcPr>
+                    <a:solidFill>
+                      <a:srgbClr val="111111"/>
+                    </a:solidFill>
+                  </a:tcPr>
+                </a:tc>
+                <a:tc>
+                  <a:txBody>
+                    <a:bodyPr/>
+                    <a:lstStyle/>
+                    <a:p>
+                      <a:pPr>
+                        <a:defRPr sz="1300" b="0">
+                          <a:solidFill>
+                            <a:srgbClr val="FFFFFF"/>
+                          </a:solidFill>
+                          <a:latin typeface="Play"/>
+                          <a:ea typeface="Play"/>
+                          <a:cs typeface="Play"/>
+                        </a:defRPr>
+                      </a:pPr>
+                      <a:r>
+                        <a:t>4</a:t>
+                      </a:r>
+                    </a:p>
+                  </a:txBody>
+                  <a:tcPr>
+                    <a:solidFill>
+                      <a:srgbClr val="111111"/>
+                    </a:solidFill>
+                  </a:tcPr>
+                </a:tc>
+                <a:tc>
+                  <a:txBody>
+                    <a:bodyPr/>
+                    <a:lstStyle/>
+                    <a:p>
+                      <a:pPr>
+                        <a:defRPr sz="1300" b="0">
+                          <a:solidFill>
+                            <a:srgbClr val="FFFFFF"/>
+                          </a:solidFill>
+                          <a:latin typeface="Play"/>
+                          <a:ea typeface="Play"/>
+                          <a:cs typeface="Play"/>
+                        </a:defRPr>
+                      </a:pPr>
+                      <a:r>
+                        <a:t>чел</a:t>
+                      </a:r>
+                    </a:p>
+                  </a:txBody>
+                  <a:tcPr>
+                    <a:solidFill>
+                      <a:srgbClr val="111111"/>
+                    </a:solidFill>
+                  </a:tcPr>
+                </a:tc>
+              </a:tr>
+              <a:tr h="328204">
+                <a:tc>
+                  <a:txBody>
+                    <a:bodyPr/>
+                    <a:lstStyle/>
+                    <a:p>
+                      <a:pPr>
+                        <a:defRPr sz="1300" b="0">
+                          <a:solidFill>
+                            <a:srgbClr val="FFFFFF"/>
+                          </a:solidFill>
+                          <a:latin typeface="Play"/>
+                          <a:ea typeface="Play"/>
+                          <a:cs typeface="Play"/>
+                        </a:defRPr>
+                      </a:pPr>
+                      <a:r>
+                        <a:t>Запросы в неделю</a:t>
+                      </a:r>
+                    </a:p>
+                  </a:txBody>
+                  <a:tcPr>
+                    <a:solidFill>
+                      <a:srgbClr val="111111"/>
+                    </a:solidFill>
+                  </a:tcPr>
+                </a:tc>
+                <a:tc>
+                  <a:txBody>
+                    <a:bodyPr/>
+                    <a:lstStyle/>
+                    <a:p>
+                      <a:pPr>
+                        <a:defRPr sz="1300" b="0">
+                          <a:solidFill>
+                            <a:srgbClr val="FFFFFF"/>
+                          </a:solidFill>
+                          <a:latin typeface="Play"/>
+                          <a:ea typeface="Play"/>
+                          <a:cs typeface="Play"/>
+                        </a:defRPr>
+                      </a:pPr>
+                      <a:r>
+                        <a:t>11/27</a:t>
+                      </a:r>
+                    </a:p>
+                  </a:txBody>
+                  <a:tcPr>
+                    <a:solidFill>
+                      <a:srgbClr val="111111"/>
+                    </a:solidFill>
+                  </a:tcPr>
+                </a:tc>
+                <a:tc>
+                  <a:txBody>
+                    <a:bodyPr/>
+                    <a:lstStyle/>
+                    <a:p>
+                      <a:pPr>
+                        <a:defRPr sz="1300" b="0">
+                          <a:solidFill>
+                            <a:srgbClr val="FFFFFF"/>
+                          </a:solidFill>
+                          <a:latin typeface="Play"/>
+                          <a:ea typeface="Play"/>
+                          <a:cs typeface="Play"/>
+                        </a:defRPr>
+                      </a:pPr>
+                      <a:r>
+                        <a:t>запросов</a:t>
+                      </a:r>
+                    </a:p>
+                  </a:txBody>
+                  <a:tcPr>
+                    <a:solidFill>
+                      <a:srgbClr val="111111"/>
+                    </a:solidFill>
+                  </a:tcPr>
+                </a:tc>
+              </a:tr>
+              <a:tr h="328206">
+                <a:tc>
+                  <a:txBody>
+                    <a:bodyPr/>
+                    <a:lstStyle/>
+                    <a:p>
+                      <a:pPr>
+                        <a:defRPr sz="1300" b="0">
+                          <a:solidFill>
+                            <a:srgbClr val="FFFFFF"/>
+                          </a:solidFill>
+                          <a:latin typeface="Play"/>
+                          <a:ea typeface="Play"/>
+                          <a:cs typeface="Play"/>
+                        </a:defRPr>
+                      </a:pPr>
+                      <a:r>
+                        <a:t>Срок ожидания</a:t>
+                      </a:r>
+                    </a:p>
+                  </a:txBody>
+                  <a:tcPr>
+                    <a:solidFill>
+                      <a:srgbClr val="111111"/>
+                    </a:solidFill>
+                  </a:tcPr>
+                </a:tc>
+                <a:tc>
+                  <a:txBody>
+                    <a:bodyPr/>
+                    <a:lstStyle/>
+                    <a:p>
+                      <a:pPr>
+                        <a:defRPr sz="1300" b="0">
+                          <a:solidFill>
+                            <a:srgbClr val="FFFFFF"/>
+                          </a:solidFill>
+                          <a:latin typeface="Play"/>
+                          <a:ea typeface="Play"/>
+                          <a:cs typeface="Play"/>
+                        </a:defRPr>
+                      </a:pPr>
+                      <a:r>
+                        <a:t>6</a:t>
+                      </a:r>
+                    </a:p>
+                  </a:txBody>
+                  <a:tcPr>
+                    <a:solidFill>
+                      <a:srgbClr val="111111"/>
+                    </a:solidFill>
+                  </a:tcPr>
+                </a:tc>
+                <a:tc>
+                  <a:txBody>
+                    <a:bodyPr/>
+                    <a:lstStyle/>
+                    <a:p>
+                      <a:pPr>
+                        <a:defRPr sz="1300" b="0">
+                          <a:solidFill>
+                            <a:srgbClr val="FFFFFF"/>
+                          </a:solidFill>
+                          <a:latin typeface="Play"/>
+                          <a:ea typeface="Play"/>
+                          <a:cs typeface="Play"/>
+                        </a:defRPr>
+                      </a:pPr>
+                      <a:r>
+                        <a:t>дней</a:t>
+                      </a:r>
+                    </a:p>
+                  </a:txBody>
+                  <a:tcPr>
+                    <a:solidFill>
+                      <a:srgbClr val="111111"/>
+                    </a:solidFill>
+                  </a:tcPr>
+                </a:tc>
+              </a:tr>
+            </a:tbl>
           </a:graphicData>
         </a:graphic>
       </p:graphicFrame>
@@ -9844,8 +9847,8 @@
         </p:nvSpPr>
         <p:spPr>
           <a:xfrm>
-            <a:off x="429280" y="3916315"/>
-            <a:ext cx="11310884" cy="1501435"/>
+            <a:off x="429280" y="4251959"/>
+            <a:ext cx="11310884" cy="1645920"/>
           </a:xfrm>
           <a:prstGeom prst="rect">
             <a:avLst/>
@@ -9958,33 +9961,7 @@
                 <a:ea typeface="Play"/>
                 <a:cs typeface="Play"/>
               </a:rPr>
-              <a:t>• Дизайн-отдел закрывает 11 запросов в неделю из 27</a:t>
-            </a:r>
-          </a:p>
-          <a:p>
-            <a:pPr algn="l">
-              <a:spcAft>
-                <a:spcPts val="300"/>
-              </a:spcAft>
-              <a:defRPr sz="1600">
-                <a:solidFill>
-                  <a:srgbClr val="FFFFFF"/>
-                </a:solidFill>
-                <a:latin typeface="Play"/>
-                <a:ea typeface="Play"/>
-                <a:cs typeface="Play"/>
-              </a:defRPr>
-            </a:pPr>
-            <a:r>
-              <a:rPr sz="1600">
-                <a:solidFill>
-                  <a:srgbClr val="FFFFFF"/>
-                </a:solidFill>
-                <a:latin typeface="Play"/>
-                <a:ea typeface="Play"/>
-                <a:cs typeface="Play"/>
-              </a:rPr>
-              <a:t>• Средний срок ожидания 6 рабочих дней</a:t>
+              <a:t>• Дизайн-отдел из 4 человек обслуживает 11 запросов в неделю</a:t>
             </a:r>
           </a:p>
         </p:txBody>
@@ -10064,8 +10041,8 @@
         </p:nvSpPr>
         <p:spPr>
           <a:xfrm>
-            <a:off x="429280" y="1619559"/>
-            <a:ext cx="11310884" cy="335019"/>
+            <a:off x="429280" y="1809883"/>
+            <a:ext cx="11310884" cy="329298"/>
           </a:xfrm>
           <a:prstGeom prst="homePlate">
             <a:avLst/>
@@ -10114,7 +10091,7 @@
                 <a:ea typeface="Play"/>
                 <a:cs typeface="Play"/>
               </a:rPr>
-              <a:t>Шаблон</a:t>
+              <a:t>Загрузить шаблон</a:t>
             </a:r>
           </a:p>
         </p:txBody>
@@ -10127,8 +10104,8 @@
         </p:nvSpPr>
         <p:spPr>
           <a:xfrm>
-            <a:off x="429280" y="2009116"/>
-            <a:ext cx="11310884" cy="335019"/>
+            <a:off x="429280" y="2192788"/>
+            <a:ext cx="11310884" cy="329298"/>
           </a:xfrm>
           <a:prstGeom prst="chevron">
             <a:avLst/>
@@ -10177,7 +10154,7 @@
                 <a:ea typeface="Play"/>
                 <a:cs typeface="Play"/>
               </a:rPr>
-              <a:t>Дизайн-система</a:t>
+              <a:t>Разобрать дизайн-систему</a:t>
             </a:r>
           </a:p>
         </p:txBody>
@@ -10190,8 +10167,8 @@
         </p:nvSpPr>
         <p:spPr>
           <a:xfrm>
-            <a:off x="429280" y="2398673"/>
-            <a:ext cx="11310884" cy="335019"/>
+            <a:off x="429280" y="2575693"/>
+            <a:ext cx="11310884" cy="329298"/>
           </a:xfrm>
           <a:prstGeom prst="chevron">
             <a:avLst/>
@@ -10240,7 +10217,7 @@
                 <a:ea typeface="Play"/>
                 <a:cs typeface="Play"/>
               </a:rPr>
-              <a:t>План колоды</a:t>
+              <a:t>Сформировать план колоды</a:t>
             </a:r>
           </a:p>
         </p:txBody>
@@ -10253,8 +10230,8 @@
         </p:nvSpPr>
         <p:spPr>
           <a:xfrm>
-            <a:off x="429280" y="2788230"/>
-            <a:ext cx="11310884" cy="335019"/>
+            <a:off x="429280" y="2958598"/>
+            <a:ext cx="11310884" cy="329298"/>
           </a:xfrm>
           <a:prstGeom prst="chevron">
             <a:avLst/>
@@ -10303,7 +10280,7 @@
                 <a:ea typeface="Play"/>
                 <a:cs typeface="Play"/>
               </a:rPr>
-              <a:t>Вёрстка</a:t>
+              <a:t>Автоматически вёрстать</a:t>
             </a:r>
           </a:p>
         </p:txBody>
@@ -10316,8 +10293,8 @@
         </p:nvSpPr>
         <p:spPr>
           <a:xfrm>
-            <a:off x="429280" y="3177787"/>
-            <a:ext cx="11310884" cy="335019"/>
+            <a:off x="429280" y="3341503"/>
+            <a:ext cx="11310884" cy="329298"/>
           </a:xfrm>
           <a:prstGeom prst="chevron">
             <a:avLst/>
@@ -10366,7 +10343,7 @@
                 <a:ea typeface="Play"/>
                 <a:cs typeface="Play"/>
               </a:rPr>
-              <a:t>Аудит</a:t>
+              <a:t>Провести аудит качества</a:t>
             </a:r>
           </a:p>
         </p:txBody>
@@ -10379,8 +10356,8 @@
         </p:nvSpPr>
         <p:spPr>
           <a:xfrm>
-            <a:off x="429280" y="3567344"/>
-            <a:ext cx="11310884" cy="335019"/>
+            <a:off x="429280" y="3724408"/>
+            <a:ext cx="11310884" cy="329298"/>
           </a:xfrm>
           <a:prstGeom prst="chevron">
             <a:avLst/>
@@ -10429,7 +10406,7 @@
                 <a:ea typeface="Play"/>
                 <a:cs typeface="Play"/>
               </a:rPr>
-              <a:t>Экспорт</a:t>
+              <a:t>Экспортировать pptx/pdf/html</a:t>
             </a:r>
           </a:p>
         </p:txBody>
@@ -10442,8 +10419,8 @@
         </p:nvSpPr>
         <p:spPr>
           <a:xfrm>
-            <a:off x="429280" y="4101083"/>
-            <a:ext cx="11310884" cy="1672529"/>
+            <a:off x="429280" y="4251959"/>
+            <a:ext cx="11310884" cy="1645920"/>
           </a:xfrm>
           <a:prstGeom prst="rect">
             <a:avLst/>
@@ -10504,7 +10481,7 @@
                 <a:ea typeface="Play"/>
                 <a:cs typeface="Play"/>
               </a:rPr>
-              <a:t>• Автоматически формирует дизайн-систему и план колоды</a:t>
+              <a:t>• Шаблон преобразуется в дизайн-систему</a:t>
             </a:r>
           </a:p>
           <a:p>
@@ -10530,7 +10507,7 @@
                 <a:ea typeface="Play"/>
                 <a:cs typeface="Play"/>
               </a:rPr>
-              <a:t>• Экспорт в pptx, pdf, html с редактируемыми слайдами</a:t>
+              <a:t>• Автоматически формируется план колоды</a:t>
             </a:r>
           </a:p>
           <a:p>
@@ -10556,7 +10533,33 @@
                 <a:ea typeface="Play"/>
                 <a:cs typeface="Play"/>
               </a:rPr>
-              <a:t>• Аудит качества проверяет все данные до выдачи</a:t>
+              <a:t>• Вёрстка выполняется по правилам дизайна</a:t>
+            </a:r>
+          </a:p>
+          <a:p>
+            <a:pPr algn="l">
+              <a:spcAft>
+                <a:spcPts val="300"/>
+              </a:spcAft>
+              <a:defRPr sz="1600">
+                <a:solidFill>
+                  <a:srgbClr val="FFFFFF"/>
+                </a:solidFill>
+                <a:latin typeface="Play"/>
+                <a:ea typeface="Play"/>
+                <a:cs typeface="Play"/>
+              </a:defRPr>
+            </a:pPr>
+            <a:r>
+              <a:rPr sz="1600">
+                <a:solidFill>
+                  <a:srgbClr val="FFFFFF"/>
+                </a:solidFill>
+                <a:latin typeface="Play"/>
+                <a:ea typeface="Play"/>
+                <a:cs typeface="Play"/>
+              </a:rPr>
+              <a:t>• Проводится аудит качества до публикации</a:t>
             </a:r>
           </a:p>
         </p:txBody>
@@ -10652,7 +10655,7 @@
         <p:spPr>
           <a:xfrm>
             <a:off x="300817" y="297715"/>
-            <a:ext cx="11566347" cy="5311465"/>
+            <a:ext cx="11566347" cy="5239484"/>
           </a:xfrm>
           <a:prstGeom prst="roundRect">
             <a:avLst/>
@@ -10733,26 +10736,435 @@
                 <a:ea typeface="Play"/>
                 <a:cs typeface="Play"/>
               </a:rPr>
-              <a:t>Результаты пилота: время</a:t>
+              <a:t>Ожидаемый эффект</a:t>
             </a:r>
           </a:p>
         </p:txBody>
       </p:sp>
       <p:graphicFrame>
         <p:nvGraphicFramePr>
-          <p:cNvPr id="682" name="Chart 681"/>
+          <p:cNvPr id="682" name="Table 681"/>
           <p:cNvGraphicFramePr>
             <a:graphicFrameLocks noGrp="1"/>
           </p:cNvGraphicFramePr>
           <p:nvPr/>
         </p:nvGraphicFramePr>
         <p:xfrm>
-          <a:off x="427817" y="1837052"/>
-          <a:ext cx="11312347" cy="2579598"/>
+          <a:off x="427817" y="1783080"/>
+          <a:ext cx="11312347" cy="2297430"/>
         </p:xfrm>
         <a:graphic>
-          <a:graphicData uri="http://schemas.openxmlformats.org/drawingml/2006/chart">
-            <c:chart xmlns:c="http://schemas.openxmlformats.org/drawingml/2006/chart" r:id="rId2"/>
+          <a:graphicData uri="http://schemas.openxmlformats.org/drawingml/2006/table">
+            <a:tbl>
+              <a:tblPr firstRow="1" bandRow="1">
+                <a:tableStyleId>{5C22544A-7EE6-4342-B048-85BDC9FD1C3A}</a:tableStyleId>
+              </a:tblPr>
+              <a:tblGrid>
+                <a:gridCol w="3770782"/>
+                <a:gridCol w="3770782"/>
+                <a:gridCol w="3770783"/>
+              </a:tblGrid>
+              <a:tr h="459486">
+                <a:tc>
+                  <a:txBody>
+                    <a:bodyPr/>
+                    <a:lstStyle/>
+                    <a:p>
+                      <a:pPr>
+                        <a:defRPr sz="1300" b="1">
+                          <a:solidFill>
+                            <a:srgbClr val="FFFFFF"/>
+                          </a:solidFill>
+                          <a:latin typeface="Play"/>
+                          <a:ea typeface="Play"/>
+                          <a:cs typeface="Play"/>
+                        </a:defRPr>
+                      </a:pPr>
+                      <a:r>
+                        <a:t>Метрика</a:t>
+                      </a:r>
+                    </a:p>
+                  </a:txBody>
+                  <a:tcPr>
+                    <a:solidFill>
+                      <a:srgbClr val="0077FF"/>
+                    </a:solidFill>
+                  </a:tcPr>
+                </a:tc>
+                <a:tc>
+                  <a:txBody>
+                    <a:bodyPr/>
+                    <a:lstStyle/>
+                    <a:p>
+                      <a:pPr>
+                        <a:defRPr sz="1300" b="1">
+                          <a:solidFill>
+                            <a:srgbClr val="FFFFFF"/>
+                          </a:solidFill>
+                          <a:latin typeface="Play"/>
+                          <a:ea typeface="Play"/>
+                          <a:cs typeface="Play"/>
+                        </a:defRPr>
+                      </a:pPr>
+                      <a:r>
+                        <a:t>До</a:t>
+                      </a:r>
+                    </a:p>
+                  </a:txBody>
+                  <a:tcPr>
+                    <a:solidFill>
+                      <a:srgbClr val="0077FF"/>
+                    </a:solidFill>
+                  </a:tcPr>
+                </a:tc>
+                <a:tc>
+                  <a:txBody>
+                    <a:bodyPr/>
+                    <a:lstStyle/>
+                    <a:p>
+                      <a:pPr>
+                        <a:defRPr sz="1300" b="1">
+                          <a:solidFill>
+                            <a:srgbClr val="FFFFFF"/>
+                          </a:solidFill>
+                          <a:latin typeface="Play"/>
+                          <a:ea typeface="Play"/>
+                          <a:cs typeface="Play"/>
+                        </a:defRPr>
+                      </a:pPr>
+                      <a:r>
+                        <a:t>После</a:t>
+                      </a:r>
+                    </a:p>
+                  </a:txBody>
+                  <a:tcPr>
+                    <a:solidFill>
+                      <a:srgbClr val="0077FF"/>
+                    </a:solidFill>
+                  </a:tcPr>
+                </a:tc>
+              </a:tr>
+              <a:tr h="459486">
+                <a:tc>
+                  <a:txBody>
+                    <a:bodyPr/>
+                    <a:lstStyle/>
+                    <a:p>
+                      <a:pPr>
+                        <a:defRPr sz="1300" b="0">
+                          <a:solidFill>
+                            <a:srgbClr val="FFFFFF"/>
+                          </a:solidFill>
+                          <a:latin typeface="Play"/>
+                          <a:ea typeface="Play"/>
+                          <a:cs typeface="Play"/>
+                        </a:defRPr>
+                      </a:pPr>
+                      <a:r>
+                        <a:t>Время сборки</a:t>
+                      </a:r>
+                    </a:p>
+                  </a:txBody>
+                  <a:tcPr>
+                    <a:solidFill>
+                      <a:srgbClr val="111111"/>
+                    </a:solidFill>
+                  </a:tcPr>
+                </a:tc>
+                <a:tc>
+                  <a:txBody>
+                    <a:bodyPr/>
+                    <a:lstStyle/>
+                    <a:p>
+                      <a:pPr>
+                        <a:defRPr sz="1300" b="0">
+                          <a:solidFill>
+                            <a:srgbClr val="FFFFFF"/>
+                          </a:solidFill>
+                          <a:latin typeface="Play"/>
+                          <a:ea typeface="Play"/>
+                          <a:cs typeface="Play"/>
+                        </a:defRPr>
+                      </a:pPr>
+                      <a:r>
+                        <a:t>186</a:t>
+                      </a:r>
+                    </a:p>
+                  </a:txBody>
+                  <a:tcPr>
+                    <a:solidFill>
+                      <a:srgbClr val="111111"/>
+                    </a:solidFill>
+                  </a:tcPr>
+                </a:tc>
+                <a:tc>
+                  <a:txBody>
+                    <a:bodyPr/>
+                    <a:lstStyle/>
+                    <a:p>
+                      <a:pPr>
+                        <a:defRPr sz="1300" b="0">
+                          <a:solidFill>
+                            <a:srgbClr val="FFFFFF"/>
+                          </a:solidFill>
+                          <a:latin typeface="Play"/>
+                          <a:ea typeface="Play"/>
+                          <a:cs typeface="Play"/>
+                        </a:defRPr>
+                      </a:pPr>
+                      <a:r>
+                        <a:t>4</a:t>
+                      </a:r>
+                    </a:p>
+                  </a:txBody>
+                  <a:tcPr>
+                    <a:solidFill>
+                      <a:srgbClr val="111111"/>
+                    </a:solidFill>
+                  </a:tcPr>
+                </a:tc>
+              </a:tr>
+              <a:tr h="459486">
+                <a:tc>
+                  <a:txBody>
+                    <a:bodyPr/>
+                    <a:lstStyle/>
+                    <a:p>
+                      <a:pPr>
+                        <a:defRPr sz="1300" b="0">
+                          <a:solidFill>
+                            <a:srgbClr val="FFFFFF"/>
+                          </a:solidFill>
+                          <a:latin typeface="Play"/>
+                          <a:ea typeface="Play"/>
+                          <a:cs typeface="Play"/>
+                        </a:defRPr>
+                      </a:pPr>
+                      <a:r>
+                        <a:t>Первый вариант</a:t>
+                      </a:r>
+                    </a:p>
+                  </a:txBody>
+                  <a:tcPr>
+                    <a:solidFill>
+                      <a:srgbClr val="111111"/>
+                    </a:solidFill>
+                  </a:tcPr>
+                </a:tc>
+                <a:tc>
+                  <a:txBody>
+                    <a:bodyPr/>
+                    <a:lstStyle/>
+                    <a:p>
+                      <a:pPr>
+                        <a:defRPr sz="1300" b="0">
+                          <a:solidFill>
+                            <a:srgbClr val="FFFFFF"/>
+                          </a:solidFill>
+                          <a:latin typeface="Play"/>
+                          <a:ea typeface="Play"/>
+                          <a:cs typeface="Play"/>
+                        </a:defRPr>
+                      </a:pPr>
+                      <a:r>
+                        <a:t>6</a:t>
+                      </a:r>
+                    </a:p>
+                  </a:txBody>
+                  <a:tcPr>
+                    <a:solidFill>
+                      <a:srgbClr val="111111"/>
+                    </a:solidFill>
+                  </a:tcPr>
+                </a:tc>
+                <a:tc>
+                  <a:txBody>
+                    <a:bodyPr/>
+                    <a:lstStyle/>
+                    <a:p>
+                      <a:pPr>
+                        <a:defRPr sz="1300" b="0">
+                          <a:solidFill>
+                            <a:srgbClr val="FFFFFF"/>
+                          </a:solidFill>
+                          <a:latin typeface="Play"/>
+                          <a:ea typeface="Play"/>
+                          <a:cs typeface="Play"/>
+                        </a:defRPr>
+                      </a:pPr>
+                      <a:r>
+                        <a:t>1</a:t>
+                      </a:r>
+                    </a:p>
+                  </a:txBody>
+                  <a:tcPr>
+                    <a:solidFill>
+                      <a:srgbClr val="111111"/>
+                    </a:solidFill>
+                  </a:tcPr>
+                </a:tc>
+              </a:tr>
+              <a:tr h="459486">
+                <a:tc>
+                  <a:txBody>
+                    <a:bodyPr/>
+                    <a:lstStyle/>
+                    <a:p>
+                      <a:pPr>
+                        <a:defRPr sz="1300" b="0">
+                          <a:solidFill>
+                            <a:srgbClr val="FFFFFF"/>
+                          </a:solidFill>
+                          <a:latin typeface="Play"/>
+                          <a:ea typeface="Play"/>
+                          <a:cs typeface="Play"/>
+                        </a:defRPr>
+                      </a:pPr>
+                      <a:r>
+                        <a:t>Нарушения стиля</a:t>
+                      </a:r>
+                    </a:p>
+                  </a:txBody>
+                  <a:tcPr>
+                    <a:solidFill>
+                      <a:srgbClr val="111111"/>
+                    </a:solidFill>
+                  </a:tcPr>
+                </a:tc>
+                <a:tc>
+                  <a:txBody>
+                    <a:bodyPr/>
+                    <a:lstStyle/>
+                    <a:p>
+                      <a:pPr>
+                        <a:defRPr sz="1300" b="0">
+                          <a:solidFill>
+                            <a:srgbClr val="FFFFFF"/>
+                          </a:solidFill>
+                          <a:latin typeface="Play"/>
+                          <a:ea typeface="Play"/>
+                          <a:cs typeface="Play"/>
+                        </a:defRPr>
+                      </a:pPr>
+                      <a:r>
+                        <a:t>19/42</a:t>
+                      </a:r>
+                    </a:p>
+                  </a:txBody>
+                  <a:tcPr>
+                    <a:solidFill>
+                      <a:srgbClr val="111111"/>
+                    </a:solidFill>
+                  </a:tcPr>
+                </a:tc>
+                <a:tc>
+                  <a:txBody>
+                    <a:bodyPr/>
+                    <a:lstStyle/>
+                    <a:p>
+                      <a:pPr>
+                        <a:defRPr sz="1300" b="0">
+                          <a:solidFill>
+                            <a:srgbClr val="FFFFFF"/>
+                          </a:solidFill>
+                          <a:latin typeface="Play"/>
+                          <a:ea typeface="Play"/>
+                          <a:cs typeface="Play"/>
+                        </a:defRPr>
+                      </a:pPr>
+                      <a:r>
+                        <a:t>2/68</a:t>
+                      </a:r>
+                    </a:p>
+                  </a:txBody>
+                  <a:tcPr>
+                    <a:solidFill>
+                      <a:srgbClr val="111111"/>
+                    </a:solidFill>
+                  </a:tcPr>
+                </a:tc>
+              </a:tr>
+              <a:tr h="459486">
+                <a:tc>
+                  <a:txBody>
+                    <a:bodyPr/>
+                    <a:lstStyle/>
+                    <a:p>
+                      <a:pPr>
+                        <a:defRPr sz="1300" b="0">
+                          <a:solidFill>
+                            <a:srgbClr val="FFFFFF"/>
+                          </a:solidFill>
+                          <a:latin typeface="Play"/>
+                          <a:ea typeface="Play"/>
+                          <a:cs typeface="Play"/>
+                        </a:defRPr>
+                      </a:pPr>
+                      <a:r>
+                        <a:t>Загрузка дизайнеров</a:t>
+                      </a:r>
+                    </a:p>
+                  </a:txBody>
+                  <a:tcPr>
+                    <a:solidFill>
+                      <a:srgbClr val="111111"/>
+                    </a:solidFill>
+                  </a:tcPr>
+                </a:tc>
+                <a:tc>
+                  <a:txBody>
+                    <a:bodyPr/>
+                    <a:lstStyle/>
+                    <a:p>
+                      <a:pPr>
+                        <a:defRPr sz="1300" b="0">
+                          <a:solidFill>
+                            <a:srgbClr val="FFFFFF"/>
+                          </a:solidFill>
+                          <a:latin typeface="Play"/>
+                          <a:ea typeface="Play"/>
+                          <a:cs typeface="Play"/>
+                        </a:defRPr>
+                      </a:pPr>
+                      <a:r>
+                        <a:t>11/нед</a:t>
+                      </a:r>
+                    </a:p>
+                  </a:txBody>
+                  <a:tcPr>
+                    <a:solidFill>
+                      <a:srgbClr val="111111"/>
+                    </a:solidFill>
+                  </a:tcPr>
+                </a:tc>
+                <a:tc>
+                  <a:txBody>
+                    <a:bodyPr/>
+                    <a:lstStyle/>
+                    <a:p>
+                      <a:pPr>
+                        <a:defRPr sz="1300" b="0">
+                          <a:solidFill>
+                            <a:srgbClr val="FFFFFF"/>
+                          </a:solidFill>
+                          <a:latin typeface="Play"/>
+                          <a:ea typeface="Play"/>
+                          <a:cs typeface="Play"/>
+                        </a:defRPr>
+                      </a:pPr>
+                      <a:r>
+                        <a:t>38/нед</a:t>
+                      </a:r>
+                    </a:p>
+                  </a:txBody>
+                  <a:tcPr>
+                    <a:solidFill>
+                      <a:srgbClr val="111111"/>
+                    </a:solidFill>
+                  </a:tcPr>
+                </a:tc>
+              </a:tr>
+            </a:tbl>
           </a:graphicData>
         </a:graphic>
       </p:graphicFrame>
@@ -10764,8 +11176,8 @@
         </p:nvSpPr>
         <p:spPr>
           <a:xfrm>
-            <a:off x="427817" y="4588101"/>
-            <a:ext cx="11312347" cy="1341120"/>
+            <a:off x="427817" y="4251959"/>
+            <a:ext cx="11312347" cy="1645920"/>
           </a:xfrm>
           <a:prstGeom prst="rect">
             <a:avLst/>
@@ -10800,7 +11212,7 @@
                 <a:ea typeface="Play"/>
                 <a:cs typeface="Play"/>
               </a:rPr>
-              <a:t>• 68 презентаций собраны за 6 недель</a:t>
+              <a:t>• Время сборки колоды сократилось с 186 до 4 минут</a:t>
             </a:r>
           </a:p>
           <a:p>
@@ -10826,7 +11238,7 @@
                 <a:ea typeface="Play"/>
                 <a:cs typeface="Play"/>
               </a:rPr>
-              <a:t>• Средняя сборка 4 минуты вместо 186</a:t>
+              <a:t>• Первый готовый вариант появился за 1 день вместо 6</a:t>
             </a:r>
           </a:p>
           <a:p>
@@ -10852,7 +11264,33 @@
                 <a:ea typeface="Play"/>
                 <a:cs typeface="Play"/>
               </a:rPr>
-              <a:t>• Время до первой версии сократилось с 6 дней до 1</a:t>
+              <a:t>• Нарушения стиля уменьшились до 2 из 68 колод</a:t>
+            </a:r>
+          </a:p>
+          <a:p>
+            <a:pPr algn="l">
+              <a:spcAft>
+                <a:spcPts val="300"/>
+              </a:spcAft>
+              <a:defRPr sz="1600">
+                <a:solidFill>
+                  <a:srgbClr val="FFFFFF"/>
+                </a:solidFill>
+                <a:latin typeface="Play"/>
+                <a:ea typeface="Play"/>
+                <a:cs typeface="Play"/>
+              </a:defRPr>
+            </a:pPr>
+            <a:r>
+              <a:rPr sz="1600">
+                <a:solidFill>
+                  <a:srgbClr val="FFFFFF"/>
+                </a:solidFill>
+                <a:latin typeface="Play"/>
+                <a:ea typeface="Play"/>
+                <a:cs typeface="Play"/>
+              </a:rPr>
+              <a:t>• Дизайнеры закрыли 38 запросов вместо 11 в неделю</a:t>
             </a:r>
           </a:p>
         </p:txBody>
@@ -10938,7 +11376,7 @@
         <p:spPr>
           <a:xfrm>
             <a:off x="429280" y="424715"/>
-            <a:ext cx="7827264" cy="1183640"/>
+            <a:ext cx="7827264" cy="822960"/>
           </a:xfrm>
           <a:prstGeom prst="rect">
             <a:avLst/>
@@ -10973,39 +11411,331 @@
                 <a:ea typeface="Play"/>
                 <a:cs typeface="Play"/>
               </a:rPr>
-              <a:t>Результаты пилота: качество и нагрузка</a:t>
+              <a:t>Ресурсы и сроки</a:t>
             </a:r>
           </a:p>
         </p:txBody>
       </p:sp>
-      <p:graphicFrame>
-        <p:nvGraphicFramePr>
-          <p:cNvPr id="623" name="Chart 622"/>
-          <p:cNvGraphicFramePr>
-            <a:graphicFrameLocks noGrp="1"/>
-          </p:cNvGraphicFramePr>
-          <p:nvPr/>
-        </p:nvGraphicFramePr>
-        <p:xfrm>
-          <a:off x="429280" y="1745515"/>
-          <a:ext cx="11310884" cy="2549047"/>
-        </p:xfrm>
-        <a:graphic>
-          <a:graphicData uri="http://schemas.openxmlformats.org/drawingml/2006/chart">
-            <c:chart xmlns:c="http://schemas.openxmlformats.org/drawingml/2006/chart" r:id="rId5"/>
-          </a:graphicData>
-        </a:graphic>
-      </p:graphicFrame>
       <p:sp>
         <p:nvSpPr>
-          <p:cNvPr id="624" name="body"/>
+          <p:cNvPr id="623" name="Rectangle 622"/>
+          <p:cNvSpPr/>
+          <p:nvPr/>
+        </p:nvSpPr>
+        <p:spPr>
+          <a:xfrm>
+            <a:off x="429280" y="2839897"/>
+            <a:ext cx="11310884" cy="68922"/>
+          </a:xfrm>
+          <a:prstGeom prst="rect">
+            <a:avLst/>
+          </a:prstGeom>
+          <a:solidFill>
+            <a:srgbClr val="0077FF"/>
+          </a:solidFill>
+          <a:ln>
+            <a:noFill/>
+          </a:ln>
+        </p:spPr>
+        <p:style>
+          <a:lnRef idx="1">
+            <a:schemeClr val="accent1"/>
+          </a:lnRef>
+          <a:fillRef idx="3">
+            <a:schemeClr val="accent1"/>
+          </a:fillRef>
+          <a:effectRef idx="2">
+            <a:schemeClr val="accent1"/>
+          </a:effectRef>
+          <a:fontRef idx="minor">
+            <a:schemeClr val="lt1"/>
+          </a:fontRef>
+        </p:style>
+        <p:txBody>
+          <a:bodyPr rtlCol="0" anchor="ctr"/>
+          <a:lstStyle/>
+          <a:p>
+            <a:pPr algn="ctr"/>
+          </a:p>
+        </p:txBody>
+      </p:sp>
+      <p:sp>
+        <p:nvSpPr>
+          <p:cNvPr id="624" name="Oval 623"/>
+          <p:cNvSpPr/>
+          <p:nvPr/>
+        </p:nvSpPr>
+        <p:spPr>
+          <a:xfrm>
+            <a:off x="2061710" y="2621641"/>
+            <a:ext cx="505434" cy="505434"/>
+          </a:xfrm>
+          <a:prstGeom prst="ellipse">
+            <a:avLst/>
+          </a:prstGeom>
+          <a:solidFill>
+            <a:srgbClr val="0077FF"/>
+          </a:solidFill>
+          <a:ln>
+            <a:noFill/>
+          </a:ln>
+        </p:spPr>
+        <p:style>
+          <a:lnRef idx="1">
+            <a:schemeClr val="accent1"/>
+          </a:lnRef>
+          <a:fillRef idx="3">
+            <a:schemeClr val="accent1"/>
+          </a:fillRef>
+          <a:effectRef idx="2">
+            <a:schemeClr val="accent1"/>
+          </a:effectRef>
+          <a:fontRef idx="minor">
+            <a:schemeClr val="lt1"/>
+          </a:fontRef>
+        </p:style>
+        <p:txBody>
+          <a:bodyPr rtlCol="0" anchor="ctr"/>
+          <a:lstStyle/>
+          <a:p>
+            <a:pPr algn="ctr"/>
+          </a:p>
+        </p:txBody>
+      </p:sp>
+      <p:sp>
+        <p:nvSpPr>
+          <p:cNvPr id="625" name="TextBox 624"/>
           <p:cNvSpPr txBox="1"/>
           <p:nvPr/>
         </p:nvSpPr>
         <p:spPr>
           <a:xfrm>
-            <a:off x="429280" y="4466013"/>
-            <a:ext cx="11310884" cy="944880"/>
+            <a:off x="429280" y="1783080"/>
+            <a:ext cx="5655442" cy="873023"/>
+          </a:xfrm>
+          <a:prstGeom prst="rect">
+            <a:avLst/>
+          </a:prstGeom>
+          <a:noFill/>
+        </p:spPr>
+        <p:txBody>
+          <a:bodyPr wrap="square" lIns="12700" rIns="12700" tIns="12700" bIns="12700">
+            <a:spAutoFit/>
+          </a:bodyPr>
+          <a:lstStyle/>
+          <a:p>
+            <a:pPr algn="ctr">
+              <a:defRPr sz="1400" b="0">
+                <a:solidFill>
+                  <a:srgbClr val="FFFFFF"/>
+                </a:solidFill>
+                <a:latin typeface="Play"/>
+                <a:ea typeface="Play"/>
+                <a:cs typeface="Play"/>
+              </a:defRPr>
+            </a:pPr>
+            <a:r>
+              <a:rPr sz="1400" b="0">
+                <a:solidFill>
+                  <a:srgbClr val="FFFFFF"/>
+                </a:solidFill>
+                <a:latin typeface="Play"/>
+                <a:ea typeface="Play"/>
+                <a:cs typeface="Play"/>
+              </a:rPr>
+              <a:t>Q3 2026: подключение 4 команд</a:t>
+            </a:r>
+          </a:p>
+        </p:txBody>
+      </p:sp>
+      <p:sp>
+        <p:nvSpPr>
+          <p:cNvPr id="626" name="Oval 625"/>
+          <p:cNvSpPr/>
+          <p:nvPr/>
+        </p:nvSpPr>
+        <p:spPr>
+          <a:xfrm>
+            <a:off x="5832004" y="2621641"/>
+            <a:ext cx="505434" cy="505434"/>
+          </a:xfrm>
+          <a:prstGeom prst="ellipse">
+            <a:avLst/>
+          </a:prstGeom>
+          <a:solidFill>
+            <a:srgbClr val="0077FF"/>
+          </a:solidFill>
+          <a:ln>
+            <a:noFill/>
+          </a:ln>
+        </p:spPr>
+        <p:style>
+          <a:lnRef idx="1">
+            <a:schemeClr val="accent1"/>
+          </a:lnRef>
+          <a:fillRef idx="3">
+            <a:schemeClr val="accent1"/>
+          </a:fillRef>
+          <a:effectRef idx="2">
+            <a:schemeClr val="accent1"/>
+          </a:effectRef>
+          <a:fontRef idx="minor">
+            <a:schemeClr val="lt1"/>
+          </a:fontRef>
+        </p:style>
+        <p:txBody>
+          <a:bodyPr rtlCol="0" anchor="ctr"/>
+          <a:lstStyle/>
+          <a:p>
+            <a:pPr algn="ctr"/>
+          </a:p>
+        </p:txBody>
+      </p:sp>
+      <p:sp>
+        <p:nvSpPr>
+          <p:cNvPr id="627" name="TextBox 626"/>
+          <p:cNvSpPr txBox="1"/>
+          <p:nvPr/>
+        </p:nvSpPr>
+        <p:spPr>
+          <a:xfrm>
+            <a:off x="3257001" y="3345332"/>
+            <a:ext cx="5655442" cy="873023"/>
+          </a:xfrm>
+          <a:prstGeom prst="rect">
+            <a:avLst/>
+          </a:prstGeom>
+          <a:noFill/>
+        </p:spPr>
+        <p:txBody>
+          <a:bodyPr wrap="square" lIns="12700" rIns="12700" tIns="12700" bIns="12700">
+            <a:spAutoFit/>
+          </a:bodyPr>
+          <a:lstStyle/>
+          <a:p>
+            <a:pPr algn="ctr">
+              <a:defRPr sz="1400" b="0">
+                <a:solidFill>
+                  <a:srgbClr val="FFFFFF"/>
+                </a:solidFill>
+                <a:latin typeface="Play"/>
+                <a:ea typeface="Play"/>
+                <a:cs typeface="Play"/>
+              </a:defRPr>
+            </a:pPr>
+            <a:r>
+              <a:rPr sz="1400" b="0">
+                <a:solidFill>
+                  <a:srgbClr val="FFFFFF"/>
+                </a:solidFill>
+                <a:latin typeface="Play"/>
+                <a:ea typeface="Play"/>
+                <a:cs typeface="Play"/>
+              </a:rPr>
+              <a:t>Q4 2026: доступ для всей компании</a:t>
+            </a:r>
+          </a:p>
+        </p:txBody>
+      </p:sp>
+      <p:sp>
+        <p:nvSpPr>
+          <p:cNvPr id="628" name="Oval 627"/>
+          <p:cNvSpPr/>
+          <p:nvPr/>
+        </p:nvSpPr>
+        <p:spPr>
+          <a:xfrm>
+            <a:off x="9602299" y="2621641"/>
+            <a:ext cx="505434" cy="505434"/>
+          </a:xfrm>
+          <a:prstGeom prst="ellipse">
+            <a:avLst/>
+          </a:prstGeom>
+          <a:solidFill>
+            <a:srgbClr val="0077FF"/>
+          </a:solidFill>
+          <a:ln>
+            <a:noFill/>
+          </a:ln>
+        </p:spPr>
+        <p:style>
+          <a:lnRef idx="1">
+            <a:schemeClr val="accent1"/>
+          </a:lnRef>
+          <a:fillRef idx="3">
+            <a:schemeClr val="accent1"/>
+          </a:fillRef>
+          <a:effectRef idx="2">
+            <a:schemeClr val="accent1"/>
+          </a:effectRef>
+          <a:fontRef idx="minor">
+            <a:schemeClr val="lt1"/>
+          </a:fontRef>
+        </p:style>
+        <p:txBody>
+          <a:bodyPr rtlCol="0" anchor="ctr"/>
+          <a:lstStyle/>
+          <a:p>
+            <a:pPr algn="ctr"/>
+          </a:p>
+        </p:txBody>
+      </p:sp>
+      <p:sp>
+        <p:nvSpPr>
+          <p:cNvPr id="629" name="TextBox 628"/>
+          <p:cNvSpPr txBox="1"/>
+          <p:nvPr/>
+        </p:nvSpPr>
+        <p:spPr>
+          <a:xfrm>
+            <a:off x="6084722" y="1783080"/>
+            <a:ext cx="5655442" cy="873023"/>
+          </a:xfrm>
+          <a:prstGeom prst="rect">
+            <a:avLst/>
+          </a:prstGeom>
+          <a:noFill/>
+        </p:spPr>
+        <p:txBody>
+          <a:bodyPr wrap="square" lIns="12700" rIns="12700" tIns="12700" bIns="12700">
+            <a:spAutoFit/>
+          </a:bodyPr>
+          <a:lstStyle/>
+          <a:p>
+            <a:pPr algn="ctr">
+              <a:defRPr sz="1400" b="0">
+                <a:solidFill>
+                  <a:srgbClr val="FFFFFF"/>
+                </a:solidFill>
+                <a:latin typeface="Play"/>
+                <a:ea typeface="Play"/>
+                <a:cs typeface="Play"/>
+              </a:defRPr>
+            </a:pPr>
+            <a:r>
+              <a:rPr sz="1400" b="0">
+                <a:solidFill>
+                  <a:srgbClr val="FFFFFF"/>
+                </a:solidFill>
+                <a:latin typeface="Play"/>
+                <a:ea typeface="Play"/>
+                <a:cs typeface="Play"/>
+              </a:rPr>
+              <a:t>Q1 2027: генерация иллюстраций</a:t>
+            </a:r>
+          </a:p>
+        </p:txBody>
+      </p:sp>
+      <p:sp>
+        <p:nvSpPr>
+          <p:cNvPr id="630" name="body"/>
+          <p:cNvSpPr txBox="1"/>
+          <p:nvPr/>
+        </p:nvSpPr>
+        <p:spPr>
+          <a:xfrm>
+            <a:off x="429280" y="4251959"/>
+            <a:ext cx="11310884" cy="1645920"/>
           </a:xfrm>
           <a:prstGeom prst="rect">
             <a:avLst/>
@@ -11040,7 +11770,7 @@
                 <a:ea typeface="Play"/>
                 <a:cs typeface="Play"/>
               </a:rPr>
-              <a:t>• Нарушений фирменного стиля 2 из 68 колод</a:t>
+              <a:t>• Сервис работает на 2 vCPU / 2 ГБ RAM</a:t>
             </a:r>
           </a:p>
           <a:p>
@@ -11066,7 +11796,33 @@
                 <a:ea typeface="Play"/>
                 <a:cs typeface="Play"/>
               </a:rPr>
-              <a:t>• Дизайнеры закрыли 38 запросов вместо 11 в неделю</a:t>
+              <a:t>• Инференс gpt-oss-20b стоит 1 400 рублей за 6 недель</a:t>
+            </a:r>
+          </a:p>
+          <a:p>
+            <a:pPr algn="l">
+              <a:spcAft>
+                <a:spcPts val="300"/>
+              </a:spcAft>
+              <a:defRPr sz="2000">
+                <a:solidFill>
+                  <a:srgbClr val="FFFFFF"/>
+                </a:solidFill>
+                <a:latin typeface="Play"/>
+                <a:ea typeface="Play"/>
+                <a:cs typeface="Play"/>
+              </a:defRPr>
+            </a:pPr>
+            <a:r>
+              <a:rPr sz="2000">
+                <a:solidFill>
+                  <a:srgbClr val="FFFFFF"/>
+                </a:solidFill>
+                <a:latin typeface="Play"/>
+                <a:ea typeface="Play"/>
+                <a:cs typeface="Play"/>
+              </a:rPr>
+              <a:t>• План запуска: Q3 2026 подключение 4 команд, Q4 2026 доступ компании, Q1 2027 генерация иллюстраций</a:t>
             </a:r>
           </a:p>
         </p:txBody>
@@ -11133,7 +11889,7 @@
                 <a:ea typeface="Play"/>
                 <a:cs typeface="Play"/>
               </a:rPr>
-              <a:t>Стоимость и ресурсы</a:t>
+              <a:t>План пилота</a:t>
             </a:r>
           </a:p>
         </p:txBody>
@@ -11146,8 +11902,57 @@
         </p:nvSpPr>
         <p:spPr>
           <a:xfrm>
-            <a:off x="429280" y="2431298"/>
-            <a:ext cx="7827264" cy="1021276"/>
+            <a:off x="429280" y="1592290"/>
+            <a:ext cx="7827264" cy="1447534"/>
+          </a:xfrm>
+          <a:prstGeom prst="rect">
+            <a:avLst/>
+          </a:prstGeom>
+          <a:noFill/>
+        </p:spPr>
+        <p:txBody>
+          <a:bodyPr wrap="square" lIns="76200" rIns="76200" tIns="50800" bIns="50800">
+            <a:spAutoFit/>
+          </a:bodyPr>
+          <a:lstStyle/>
+          <a:p>
+            <a:pPr algn="ctr">
+              <a:spcAft>
+                <a:spcPts val="300"/>
+              </a:spcAft>
+              <a:defRPr sz="4000">
+                <a:solidFill>
+                  <a:srgbClr val="FFFFFF"/>
+                </a:solidFill>
+                <a:latin typeface="Play"/>
+                <a:ea typeface="Play"/>
+                <a:cs typeface="Play"/>
+              </a:defRPr>
+            </a:pPr>
+            <a:r>
+              <a:rPr sz="4000">
+                <a:solidFill>
+                  <a:srgbClr val="FFFFFF"/>
+                </a:solidFill>
+                <a:latin typeface="Play"/>
+                <a:ea typeface="Play"/>
+                <a:cs typeface="Play"/>
+              </a:rPr>
+              <a:t>Пилот длился 6 недель на двух командах</a:t>
+            </a:r>
+          </a:p>
+        </p:txBody>
+      </p:sp>
+      <p:sp>
+        <p:nvSpPr>
+          <p:cNvPr id="4" name="body"/>
+          <p:cNvSpPr txBox="1"/>
+          <p:nvPr/>
+        </p:nvSpPr>
+        <p:spPr>
+          <a:xfrm>
+            <a:off x="429280" y="3290703"/>
+            <a:ext cx="7827264" cy="2482909"/>
           </a:xfrm>
           <a:prstGeom prst="rect">
             <a:avLst/>
@@ -11182,38 +11987,15 @@
                 <a:ea typeface="Play"/>
                 <a:cs typeface="Play"/>
               </a:rPr>
-              <a:t>Сервис работает на 2 vCPU / 2 ГБ RAM</a:t>
+              <a:t>• Собрано 68 презентаций</a:t>
             </a:r>
           </a:p>
-        </p:txBody>
-      </p:sp>
-      <p:sp>
-        <p:nvSpPr>
-          <p:cNvPr id="4" name="body"/>
-          <p:cNvSpPr txBox="1"/>
-          <p:nvPr/>
-        </p:nvSpPr>
-        <p:spPr>
-          <a:xfrm>
-            <a:off x="429280" y="3618187"/>
-            <a:ext cx="7827264" cy="1573318"/>
-          </a:xfrm>
-          <a:prstGeom prst="rect">
-            <a:avLst/>
-          </a:prstGeom>
-          <a:noFill/>
-        </p:spPr>
-        <p:txBody>
-          <a:bodyPr wrap="square" lIns="76200" rIns="76200" tIns="50800" bIns="50800">
-            <a:spAutoFit/>
-          </a:bodyPr>
-          <a:lstStyle/>
           <a:p>
             <a:pPr algn="l">
               <a:spcAft>
                 <a:spcPts val="300"/>
               </a:spcAft>
-              <a:defRPr sz="2000">
+              <a:defRPr sz="2800">
                 <a:solidFill>
                   <a:srgbClr val="FFFFFF"/>
                 </a:solidFill>
@@ -11223,7 +12005,7 @@
               </a:defRPr>
             </a:pPr>
             <a:r>
-              <a:rPr sz="2000">
+              <a:rPr sz="2800">
                 <a:solidFill>
                   <a:srgbClr val="FFFFFF"/>
                 </a:solidFill>
@@ -11231,7 +12013,7 @@
                 <a:ea typeface="Play"/>
                 <a:cs typeface="Play"/>
               </a:rPr>
-              <a:t>• Модель gpt-oss-20b подключается по OpenAI-совместимому протоколу</a:t>
+              <a:t>• Среднее время сборки 4 минуты</a:t>
             </a:r>
           </a:p>
           <a:p>
@@ -11239,7 +12021,7 @@
               <a:spcAft>
                 <a:spcPts val="300"/>
               </a:spcAft>
-              <a:defRPr sz="2000">
+              <a:defRPr sz="2800">
                 <a:solidFill>
                   <a:srgbClr val="FFFFFF"/>
                 </a:solidFill>
@@ -11249,7 +12031,7 @@
               </a:defRPr>
             </a:pPr>
             <a:r>
-              <a:rPr sz="2000">
+              <a:rPr sz="2800">
                 <a:solidFill>
                   <a:srgbClr val="FFFFFF"/>
                 </a:solidFill>
@@ -11257,7 +12039,33 @@
                 <a:ea typeface="Play"/>
                 <a:cs typeface="Play"/>
               </a:rPr>
-              <a:t>• Стоимость инференса за 6 недель 1 400 рублей</a:t>
+              <a:t>• Первый вариант готов за 1 день</a:t>
+            </a:r>
+          </a:p>
+          <a:p>
+            <a:pPr algn="l">
+              <a:spcAft>
+                <a:spcPts val="300"/>
+              </a:spcAft>
+              <a:defRPr sz="2800">
+                <a:solidFill>
+                  <a:srgbClr val="FFFFFF"/>
+                </a:solidFill>
+                <a:latin typeface="Play"/>
+                <a:ea typeface="Play"/>
+                <a:cs typeface="Play"/>
+              </a:defRPr>
+            </a:pPr>
+            <a:r>
+              <a:rPr sz="2800">
+                <a:solidFill>
+                  <a:srgbClr val="FFFFFF"/>
+                </a:solidFill>
+                <a:latin typeface="Play"/>
+                <a:ea typeface="Play"/>
+                <a:cs typeface="Play"/>
+              </a:rPr>
+              <a:t>• Нарушения стиля 2 из 68, исправлены автоматически</a:t>
             </a:r>
           </a:p>
         </p:txBody>
@@ -11306,7 +12114,7 @@
               <a:spcAft>
                 <a:spcPts val="300"/>
               </a:spcAft>
-              <a:defRPr sz="3200">
+              <a:defRPr sz="4000">
                 <a:solidFill>
                   <a:srgbClr val="FFFFFF"/>
                 </a:solidFill>
@@ -11316,7 +12124,7 @@
               </a:defRPr>
             </a:pPr>
             <a:r>
-              <a:rPr sz="3200">
+              <a:rPr sz="4000">
                 <a:solidFill>
                   <a:srgbClr val="FFFFFF"/>
                 </a:solidFill>
@@ -11324,460 +12132,21 @@
                 <a:ea typeface="Play"/>
                 <a:cs typeface="Play"/>
               </a:rPr>
-              <a:t>Риски</a:t>
+              <a:t>Что мы просим решить</a:t>
             </a:r>
           </a:p>
         </p:txBody>
       </p:sp>
       <p:sp>
         <p:nvSpPr>
-          <p:cNvPr id="3" name="Oval 2"/>
-          <p:cNvSpPr/>
-          <p:nvPr/>
-        </p:nvSpPr>
-        <p:spPr>
-          <a:xfrm>
-            <a:off x="1713709" y="1567636"/>
-            <a:ext cx="1100894" cy="1100894"/>
-          </a:xfrm>
-          <a:prstGeom prst="ellipse">
-            <a:avLst/>
-          </a:prstGeom>
-          <a:solidFill>
-            <a:srgbClr val="0077FF"/>
-          </a:solidFill>
-          <a:ln>
-            <a:noFill/>
-          </a:ln>
-        </p:spPr>
-        <p:style>
-          <a:lnRef idx="1">
-            <a:schemeClr val="accent1"/>
-          </a:lnRef>
-          <a:fillRef idx="3">
-            <a:schemeClr val="accent1"/>
-          </a:fillRef>
-          <a:effectRef idx="2">
-            <a:schemeClr val="accent1"/>
-          </a:effectRef>
-          <a:fontRef idx="minor">
-            <a:schemeClr val="lt1"/>
-          </a:fontRef>
-        </p:style>
-        <p:txBody>
-          <a:bodyPr rtlCol="0" anchor="ctr"/>
-          <a:lstStyle/>
-          <a:p>
-            <a:pPr algn="ctr"/>
-          </a:p>
-        </p:txBody>
-      </p:sp>
-      <p:sp>
-        <p:nvSpPr>
-          <p:cNvPr id="4" name="Oval 3"/>
-          <p:cNvSpPr/>
-          <p:nvPr/>
-        </p:nvSpPr>
-        <p:spPr>
-          <a:xfrm>
-            <a:off x="1888851" y="1742778"/>
-            <a:ext cx="750610" cy="750610"/>
-          </a:xfrm>
-          <a:prstGeom prst="ellipse">
-            <a:avLst/>
-          </a:prstGeom>
-          <a:solidFill>
-            <a:srgbClr val="111111"/>
-          </a:solidFill>
-          <a:ln>
-            <a:noFill/>
-          </a:ln>
-        </p:spPr>
-        <p:style>
-          <a:lnRef idx="1">
-            <a:schemeClr val="accent1"/>
-          </a:lnRef>
-          <a:fillRef idx="3">
-            <a:schemeClr val="accent1"/>
-          </a:fillRef>
-          <a:effectRef idx="2">
-            <a:schemeClr val="accent1"/>
-          </a:effectRef>
-          <a:fontRef idx="minor">
-            <a:schemeClr val="lt1"/>
-          </a:fontRef>
-        </p:style>
-        <p:txBody>
-          <a:bodyPr rtlCol="0" anchor="ctr"/>
-          <a:lstStyle/>
-          <a:p>
-            <a:pPr algn="ctr"/>
-          </a:p>
-        </p:txBody>
-      </p:sp>
-      <p:sp>
-        <p:nvSpPr>
-          <p:cNvPr id="5" name="Oval 4"/>
-          <p:cNvSpPr/>
-          <p:nvPr/>
-        </p:nvSpPr>
-        <p:spPr>
-          <a:xfrm>
-            <a:off x="2089014" y="1942941"/>
-            <a:ext cx="350284" cy="350284"/>
-          </a:xfrm>
-          <a:prstGeom prst="ellipse">
-            <a:avLst/>
-          </a:prstGeom>
-          <a:solidFill>
-            <a:srgbClr val="0077FF"/>
-          </a:solidFill>
-          <a:ln>
-            <a:noFill/>
-          </a:ln>
-        </p:spPr>
-        <p:style>
-          <a:lnRef idx="1">
-            <a:schemeClr val="accent1"/>
-          </a:lnRef>
-          <a:fillRef idx="3">
-            <a:schemeClr val="accent1"/>
-          </a:fillRef>
-          <a:effectRef idx="2">
-            <a:schemeClr val="accent1"/>
-          </a:effectRef>
-          <a:fontRef idx="minor">
-            <a:schemeClr val="lt1"/>
-          </a:fontRef>
-        </p:style>
-        <p:txBody>
-          <a:bodyPr rtlCol="0" anchor="ctr"/>
-          <a:lstStyle/>
-          <a:p>
-            <a:pPr algn="ctr"/>
-          </a:p>
-        </p:txBody>
-      </p:sp>
-      <p:sp>
-        <p:nvSpPr>
-          <p:cNvPr id="6" name="TextBox 5"/>
+          <p:cNvPr id="3" name="lead"/>
           <p:cNvSpPr txBox="1"/>
           <p:nvPr/>
         </p:nvSpPr>
         <p:spPr>
           <a:xfrm>
-            <a:off x="429280" y="2893714"/>
-            <a:ext cx="3669753" cy="1100894"/>
-          </a:xfrm>
-          <a:prstGeom prst="rect">
-            <a:avLst/>
-          </a:prstGeom>
-          <a:noFill/>
-        </p:spPr>
-        <p:txBody>
-          <a:bodyPr wrap="square" lIns="12700" rIns="12700" tIns="12700" bIns="12700">
-            <a:spAutoFit/>
-          </a:bodyPr>
-          <a:lstStyle/>
-          <a:p>
-            <a:pPr algn="ctr">
-              <a:defRPr sz="1400" b="0">
-                <a:solidFill>
-                  <a:srgbClr val="FFFFFF"/>
-                </a:solidFill>
-                <a:latin typeface="Play"/>
-                <a:ea typeface="Play"/>
-                <a:cs typeface="Play"/>
-              </a:defRPr>
-            </a:pPr>
-            <a:r>
-              <a:rPr sz="1400" b="0">
-                <a:solidFill>
-                  <a:srgbClr val="FFFFFF"/>
-                </a:solidFill>
-                <a:latin typeface="Play"/>
-                <a:ea typeface="Play"/>
-                <a:cs typeface="Play"/>
-              </a:rPr>
-              <a:t>Выдумка</a:t>
-            </a:r>
-          </a:p>
-        </p:txBody>
-      </p:sp>
-      <p:sp>
-        <p:nvSpPr>
-          <p:cNvPr id="7" name="Document 6"/>
-          <p:cNvSpPr/>
-          <p:nvPr/>
-        </p:nvSpPr>
-        <p:spPr>
-          <a:xfrm>
-            <a:off x="5609335" y="1592656"/>
-            <a:ext cx="950772" cy="1050854"/>
-          </a:xfrm>
-          <a:prstGeom prst="flowChartDocument">
-            <a:avLst/>
-          </a:prstGeom>
-          <a:solidFill>
-            <a:srgbClr val="0077FF"/>
-          </a:solidFill>
-          <a:ln>
-            <a:noFill/>
-          </a:ln>
-        </p:spPr>
-        <p:style>
-          <a:lnRef idx="1">
-            <a:schemeClr val="accent1"/>
-          </a:lnRef>
-          <a:fillRef idx="3">
-            <a:schemeClr val="accent1"/>
-          </a:fillRef>
-          <a:effectRef idx="2">
-            <a:schemeClr val="accent1"/>
-          </a:effectRef>
-          <a:fontRef idx="minor">
-            <a:schemeClr val="lt1"/>
-          </a:fontRef>
-        </p:style>
-        <p:txBody>
-          <a:bodyPr rtlCol="0" anchor="ctr"/>
-          <a:lstStyle/>
-          <a:p>
-            <a:pPr algn="ctr"/>
-          </a:p>
-        </p:txBody>
-      </p:sp>
-      <p:sp>
-        <p:nvSpPr>
-          <p:cNvPr id="8" name="TextBox 7"/>
-          <p:cNvSpPr txBox="1"/>
-          <p:nvPr/>
-        </p:nvSpPr>
-        <p:spPr>
-          <a:xfrm>
-            <a:off x="4249845" y="2893714"/>
-            <a:ext cx="3669753" cy="1100894"/>
-          </a:xfrm>
-          <a:prstGeom prst="rect">
-            <a:avLst/>
-          </a:prstGeom>
-          <a:noFill/>
-        </p:spPr>
-        <p:txBody>
-          <a:bodyPr wrap="square" lIns="12700" rIns="12700" tIns="12700" bIns="12700">
-            <a:spAutoFit/>
-          </a:bodyPr>
-          <a:lstStyle/>
-          <a:p>
-            <a:pPr algn="ctr">
-              <a:defRPr sz="1400" b="0">
-                <a:solidFill>
-                  <a:srgbClr val="FFFFFF"/>
-                </a:solidFill>
-                <a:latin typeface="Play"/>
-                <a:ea typeface="Play"/>
-                <a:cs typeface="Play"/>
-              </a:defRPr>
-            </a:pPr>
-            <a:r>
-              <a:rPr sz="1400" b="0">
-                <a:solidFill>
-                  <a:srgbClr val="FFFFFF"/>
-                </a:solidFill>
-                <a:latin typeface="Play"/>
-                <a:ea typeface="Play"/>
-                <a:cs typeface="Play"/>
-              </a:rPr>
-              <a:t>Плохой шаблон</a:t>
-            </a:r>
-          </a:p>
-        </p:txBody>
-      </p:sp>
-      <p:sp>
-        <p:nvSpPr>
-          <p:cNvPr id="9" name="Oval 8"/>
-          <p:cNvSpPr/>
-          <p:nvPr/>
-        </p:nvSpPr>
-        <p:spPr>
-          <a:xfrm>
-            <a:off x="9354839" y="1567636"/>
-            <a:ext cx="1100894" cy="1100894"/>
-          </a:xfrm>
-          <a:prstGeom prst="ellipse">
-            <a:avLst/>
-          </a:prstGeom>
-          <a:solidFill>
-            <a:srgbClr val="0077FF"/>
-          </a:solidFill>
-          <a:ln>
-            <a:noFill/>
-          </a:ln>
-        </p:spPr>
-        <p:style>
-          <a:lnRef idx="1">
-            <a:schemeClr val="accent1"/>
-          </a:lnRef>
-          <a:fillRef idx="3">
-            <a:schemeClr val="accent1"/>
-          </a:fillRef>
-          <a:effectRef idx="2">
-            <a:schemeClr val="accent1"/>
-          </a:effectRef>
-          <a:fontRef idx="minor">
-            <a:schemeClr val="lt1"/>
-          </a:fontRef>
-        </p:style>
-        <p:txBody>
-          <a:bodyPr rtlCol="0" anchor="ctr"/>
-          <a:lstStyle/>
-          <a:p>
-            <a:pPr algn="ctr"/>
-          </a:p>
-        </p:txBody>
-      </p:sp>
-      <p:sp>
-        <p:nvSpPr>
-          <p:cNvPr id="10" name="Oval 9"/>
-          <p:cNvSpPr/>
-          <p:nvPr/>
-        </p:nvSpPr>
-        <p:spPr>
-          <a:xfrm>
-            <a:off x="9529982" y="1742778"/>
-            <a:ext cx="750610" cy="750610"/>
-          </a:xfrm>
-          <a:prstGeom prst="ellipse">
-            <a:avLst/>
-          </a:prstGeom>
-          <a:solidFill>
-            <a:srgbClr val="111111"/>
-          </a:solidFill>
-          <a:ln>
-            <a:noFill/>
-          </a:ln>
-        </p:spPr>
-        <p:style>
-          <a:lnRef idx="1">
-            <a:schemeClr val="accent1"/>
-          </a:lnRef>
-          <a:fillRef idx="3">
-            <a:schemeClr val="accent1"/>
-          </a:fillRef>
-          <a:effectRef idx="2">
-            <a:schemeClr val="accent1"/>
-          </a:effectRef>
-          <a:fontRef idx="minor">
-            <a:schemeClr val="lt1"/>
-          </a:fontRef>
-        </p:style>
-        <p:txBody>
-          <a:bodyPr rtlCol="0" anchor="ctr"/>
-          <a:lstStyle/>
-          <a:p>
-            <a:pPr algn="ctr"/>
-          </a:p>
-        </p:txBody>
-      </p:sp>
-      <p:sp>
-        <p:nvSpPr>
-          <p:cNvPr id="11" name="Oval 10"/>
-          <p:cNvSpPr/>
-          <p:nvPr/>
-        </p:nvSpPr>
-        <p:spPr>
-          <a:xfrm>
-            <a:off x="9730144" y="1942941"/>
-            <a:ext cx="350284" cy="350284"/>
-          </a:xfrm>
-          <a:prstGeom prst="ellipse">
-            <a:avLst/>
-          </a:prstGeom>
-          <a:solidFill>
-            <a:srgbClr val="0077FF"/>
-          </a:solidFill>
-          <a:ln>
-            <a:noFill/>
-          </a:ln>
-        </p:spPr>
-        <p:style>
-          <a:lnRef idx="1">
-            <a:schemeClr val="accent1"/>
-          </a:lnRef>
-          <a:fillRef idx="3">
-            <a:schemeClr val="accent1"/>
-          </a:fillRef>
-          <a:effectRef idx="2">
-            <a:schemeClr val="accent1"/>
-          </a:effectRef>
-          <a:fontRef idx="minor">
-            <a:schemeClr val="lt1"/>
-          </a:fontRef>
-        </p:style>
-        <p:txBody>
-          <a:bodyPr rtlCol="0" anchor="ctr"/>
-          <a:lstStyle/>
-          <a:p>
-            <a:pPr algn="ctr"/>
-          </a:p>
-        </p:txBody>
-      </p:sp>
-      <p:sp>
-        <p:nvSpPr>
-          <p:cNvPr id="12" name="TextBox 11"/>
-          <p:cNvSpPr txBox="1"/>
-          <p:nvPr/>
-        </p:nvSpPr>
-        <p:spPr>
-          <a:xfrm>
-            <a:off x="8070410" y="2893714"/>
-            <a:ext cx="3669753" cy="1100894"/>
-          </a:xfrm>
-          <a:prstGeom prst="rect">
-            <a:avLst/>
-          </a:prstGeom>
-          <a:noFill/>
-        </p:spPr>
-        <p:txBody>
-          <a:bodyPr wrap="square" lIns="12700" rIns="12700" tIns="12700" bIns="12700">
-            <a:spAutoFit/>
-          </a:bodyPr>
-          <a:lstStyle/>
-          <a:p>
-            <a:pPr algn="ctr">
-              <a:defRPr sz="1400" b="0">
-                <a:solidFill>
-                  <a:srgbClr val="FFFFFF"/>
-                </a:solidFill>
-                <a:latin typeface="Play"/>
-                <a:ea typeface="Play"/>
-                <a:cs typeface="Play"/>
-              </a:defRPr>
-            </a:pPr>
-            <a:r>
-              <a:rPr sz="1400" b="0">
-                <a:solidFill>
-                  <a:srgbClr val="FFFFFF"/>
-                </a:solidFill>
-                <a:latin typeface="Play"/>
-                <a:ea typeface="Play"/>
-                <a:cs typeface="Play"/>
-              </a:rPr>
-              <a:t>Перегрузка</a:t>
-            </a:r>
-          </a:p>
-        </p:txBody>
-      </p:sp>
-      <p:sp>
-        <p:nvSpPr>
-          <p:cNvPr id="13" name="body"/>
-          <p:cNvSpPr txBox="1"/>
-          <p:nvPr/>
-        </p:nvSpPr>
-        <p:spPr>
-          <a:xfrm>
-            <a:off x="429280" y="4166059"/>
-            <a:ext cx="11310884" cy="1341120"/>
+            <a:off x="429280" y="2431298"/>
+            <a:ext cx="7827264" cy="1178847"/>
           </a:xfrm>
           <a:prstGeom prst="rect">
             <a:avLst/>
@@ -11794,7 +12163,7 @@
               <a:spcAft>
                 <a:spcPts val="300"/>
               </a:spcAft>
-              <a:defRPr sz="1600">
+              <a:defRPr sz="3200">
                 <a:solidFill>
                   <a:srgbClr val="FFFFFF"/>
                 </a:solidFill>
@@ -11804,7 +12173,7 @@
               </a:defRPr>
             </a:pPr>
             <a:r>
-              <a:rPr sz="1600">
+              <a:rPr sz="3200">
                 <a:solidFill>
                   <a:srgbClr val="FFFFFF"/>
                 </a:solidFill>
@@ -11812,15 +12181,38 @@
                 <a:ea typeface="Play"/>
                 <a:cs typeface="Play"/>
               </a:rPr>
-              <a:t>• Модель может выдумать цифры, аудит проверяет каждое число</a:t>
+              <a:t>Одобрить запуск сервиса на всю компанию</a:t>
             </a:r>
           </a:p>
+        </p:txBody>
+      </p:sp>
+      <p:sp>
+        <p:nvSpPr>
+          <p:cNvPr id="4" name="body"/>
+          <p:cNvSpPr txBox="1"/>
+          <p:nvPr/>
+        </p:nvSpPr>
+        <p:spPr>
+          <a:xfrm>
+            <a:off x="429280" y="3775758"/>
+            <a:ext cx="7827264" cy="1415747"/>
+          </a:xfrm>
+          <a:prstGeom prst="rect">
+            <a:avLst/>
+          </a:prstGeom>
+          <a:noFill/>
+        </p:spPr>
+        <p:txBody>
+          <a:bodyPr wrap="square" lIns="76200" rIns="76200" tIns="50800" bIns="50800">
+            <a:spAutoFit/>
+          </a:bodyPr>
+          <a:lstStyle/>
           <a:p>
             <a:pPr algn="l">
               <a:spcAft>
                 <a:spcPts val="300"/>
               </a:spcAft>
-              <a:defRPr sz="1600">
+              <a:defRPr sz="2400">
                 <a:solidFill>
                   <a:srgbClr val="FFFFFF"/>
                 </a:solidFill>
@@ -11830,7 +12222,7 @@
               </a:defRPr>
             </a:pPr>
             <a:r>
-              <a:rPr sz="1600">
+              <a:rPr sz="2400">
                 <a:solidFill>
                   <a:srgbClr val="FFFFFF"/>
                 </a:solidFill>
@@ -11838,7 +12230,7 @@
                 <a:ea typeface="Play"/>
                 <a:cs typeface="Play"/>
               </a:rPr>
-              <a:t>• Плохой шаблон приводит к использованию рабочей области</a:t>
+              <a:t>• Выделить бюджет на интеграцию и поддержку</a:t>
             </a:r>
           </a:p>
           <a:p>
@@ -11846,7 +12238,7 @@
               <a:spcAft>
                 <a:spcPts val="300"/>
               </a:spcAft>
-              <a:defRPr sz="1600">
+              <a:defRPr sz="2400">
                 <a:solidFill>
                   <a:srgbClr val="FFFFFF"/>
                 </a:solidFill>
@@ -11856,7 +12248,7 @@
               </a:defRPr>
             </a:pPr>
             <a:r>
-              <a:rPr sz="1600">
+              <a:rPr sz="2400">
                 <a:solidFill>
                   <a:srgbClr val="FFFFFF"/>
                 </a:solidFill>
@@ -11864,7 +12256,7 @@
                 <a:ea typeface="Play"/>
                 <a:cs typeface="Play"/>
               </a:rPr>
-              <a:t>• Нагрузка выше 20 задач требует внешней очереди</a:t>
+              <a:t>• Согласовать сроки и ответственных за расширение</a:t>
             </a:r>
           </a:p>
         </p:txBody>
@@ -11931,21 +12323,1025 @@
                 <a:ea typeface="Play"/>
                 <a:cs typeface="Play"/>
               </a:rPr>
-              <a:t>План</a:t>
+              <a:t>Риски</a:t>
+            </a:r>
+          </a:p>
+        </p:txBody>
+      </p:sp>
+      <p:grpSp>
+        <p:nvGrpSpPr>
+          <p:cNvPr id="3" name="icon:builtin-sparkles"/>
+          <p:cNvGrpSpPr/>
+          <p:nvPr/>
+        </p:nvGrpSpPr>
+        <p:grpSpPr>
+          <a:xfrm>
+            <a:off x="1884664" y="1945719"/>
+            <a:ext cx="878252" cy="840303"/>
+            <a:chOff x="1884664" y="1945719"/>
+            <a:chExt cx="878252" cy="840303"/>
+          </a:xfrm>
+        </p:grpSpPr>
+        <p:sp>
+          <p:nvSpPr>
+            <p:cNvPr id="4" name="Freeform 3"/>
+            <p:cNvSpPr/>
+            <p:nvPr/>
+          </p:nvSpPr>
+          <p:spPr>
+            <a:xfrm>
+              <a:off x="1884664" y="1945719"/>
+              <a:ext cx="650557" cy="650557"/>
+            </a:xfrm>
+            <a:custGeom>
+              <a:avLst/>
+              <a:gdLst/>
+              <a:ahLst/>
+              <a:cxnLst/>
+              <a:rect l="l" t="t" r="r" b="b"/>
+              <a:pathLst>
+                <a:path w="650557" h="650557">
+                  <a:moveTo>
+                    <a:pt x="325278" y="0"/>
+                  </a:moveTo>
+                  <a:lnTo>
+                    <a:pt x="335145" y="61098"/>
+                  </a:lnTo>
+                  <a:lnTo>
+                    <a:pt x="348698" y="114498"/>
+                  </a:lnTo>
+                  <a:lnTo>
+                    <a:pt x="366480" y="160742"/>
+                  </a:lnTo>
+                  <a:lnTo>
+                    <a:pt x="389033" y="200371"/>
+                  </a:lnTo>
+                  <a:lnTo>
+                    <a:pt x="416790" y="233767"/>
+                  </a:lnTo>
+                  <a:lnTo>
+                    <a:pt x="450185" y="261524"/>
+                  </a:lnTo>
+                  <a:lnTo>
+                    <a:pt x="489761" y="284022"/>
+                  </a:lnTo>
+                  <a:lnTo>
+                    <a:pt x="536059" y="301858"/>
+                  </a:lnTo>
+                  <a:lnTo>
+                    <a:pt x="589459" y="315466"/>
+                  </a:lnTo>
+                  <a:lnTo>
+                    <a:pt x="650557" y="325278"/>
+                  </a:lnTo>
+                  <a:lnTo>
+                    <a:pt x="589459" y="335145"/>
+                  </a:lnTo>
+                  <a:lnTo>
+                    <a:pt x="536059" y="348698"/>
+                  </a:lnTo>
+                  <a:lnTo>
+                    <a:pt x="489761" y="366480"/>
+                  </a:lnTo>
+                  <a:lnTo>
+                    <a:pt x="450185" y="389033"/>
+                  </a:lnTo>
+                  <a:lnTo>
+                    <a:pt x="416790" y="416790"/>
+                  </a:lnTo>
+                  <a:lnTo>
+                    <a:pt x="389033" y="450185"/>
+                  </a:lnTo>
+                  <a:lnTo>
+                    <a:pt x="366480" y="489761"/>
+                  </a:lnTo>
+                  <a:lnTo>
+                    <a:pt x="348698" y="536059"/>
+                  </a:lnTo>
+                  <a:lnTo>
+                    <a:pt x="335145" y="589513"/>
+                  </a:lnTo>
+                  <a:lnTo>
+                    <a:pt x="325278" y="650557"/>
+                  </a:lnTo>
+                  <a:lnTo>
+                    <a:pt x="315466" y="589513"/>
+                  </a:lnTo>
+                  <a:lnTo>
+                    <a:pt x="301858" y="536059"/>
+                  </a:lnTo>
+                  <a:lnTo>
+                    <a:pt x="284022" y="489761"/>
+                  </a:lnTo>
+                  <a:lnTo>
+                    <a:pt x="261524" y="450185"/>
+                  </a:lnTo>
+                  <a:lnTo>
+                    <a:pt x="233767" y="416790"/>
+                  </a:lnTo>
+                  <a:lnTo>
+                    <a:pt x="200371" y="389033"/>
+                  </a:lnTo>
+                  <a:lnTo>
+                    <a:pt x="160742" y="366534"/>
+                  </a:lnTo>
+                  <a:lnTo>
+                    <a:pt x="114498" y="348698"/>
+                  </a:lnTo>
+                  <a:lnTo>
+                    <a:pt x="61098" y="335091"/>
+                  </a:lnTo>
+                  <a:lnTo>
+                    <a:pt x="0" y="325278"/>
+                  </a:lnTo>
+                  <a:lnTo>
+                    <a:pt x="61098" y="315466"/>
+                  </a:lnTo>
+                  <a:lnTo>
+                    <a:pt x="114498" y="301858"/>
+                  </a:lnTo>
+                  <a:lnTo>
+                    <a:pt x="160742" y="284022"/>
+                  </a:lnTo>
+                  <a:lnTo>
+                    <a:pt x="200371" y="261524"/>
+                  </a:lnTo>
+                  <a:lnTo>
+                    <a:pt x="233767" y="233767"/>
+                  </a:lnTo>
+                  <a:lnTo>
+                    <a:pt x="261524" y="200371"/>
+                  </a:lnTo>
+                  <a:lnTo>
+                    <a:pt x="284022" y="160796"/>
+                  </a:lnTo>
+                  <a:lnTo>
+                    <a:pt x="301858" y="114498"/>
+                  </a:lnTo>
+                  <a:lnTo>
+                    <a:pt x="315466" y="61098"/>
+                  </a:lnTo>
+                  <a:lnTo>
+                    <a:pt x="325278" y="0"/>
+                  </a:lnTo>
+                  <a:close/>
+                </a:path>
+              </a:pathLst>
+            </a:custGeom>
+            <a:noFill/>
+            <a:ln w="108426" cap="rnd">
+              <a:solidFill>
+                <a:srgbClr val="0077FF"/>
+              </a:solidFill>
+              <a:round/>
+            </a:ln>
+            <a:effectLst/>
+          </p:spPr>
+          <p:style>
+            <a:lnRef idx="1">
+              <a:schemeClr val="accent1"/>
+            </a:lnRef>
+            <a:fillRef idx="3">
+              <a:schemeClr val="accent1"/>
+            </a:fillRef>
+            <a:effectRef idx="2">
+              <a:schemeClr val="accent1"/>
+            </a:effectRef>
+            <a:fontRef idx="minor">
+              <a:schemeClr val="lt1"/>
+            </a:fontRef>
+          </p:style>
+          <p:txBody>
+            <a:bodyPr rtlCol="0" anchor="ctr"/>
+            <a:lstStyle/>
+            <a:p>
+              <a:pPr algn="ctr"/>
+            </a:p>
+          </p:txBody>
+        </p:sp>
+        <p:sp>
+          <p:nvSpPr>
+            <p:cNvPr id="5" name="Freeform 4"/>
+            <p:cNvSpPr/>
+            <p:nvPr/>
+          </p:nvSpPr>
+          <p:spPr>
+            <a:xfrm>
+              <a:off x="2524378" y="2542063"/>
+              <a:ext cx="238538" cy="243959"/>
+            </a:xfrm>
+            <a:custGeom>
+              <a:avLst/>
+              <a:gdLst/>
+              <a:ahLst/>
+              <a:cxnLst/>
+              <a:rect l="l" t="t" r="r" b="b"/>
+              <a:pathLst>
+                <a:path w="238538" h="243959">
+                  <a:moveTo>
+                    <a:pt x="119269" y="0"/>
+                  </a:moveTo>
+                  <a:lnTo>
+                    <a:pt x="123172" y="22986"/>
+                  </a:lnTo>
+                  <a:lnTo>
+                    <a:pt x="128540" y="43153"/>
+                  </a:lnTo>
+                  <a:lnTo>
+                    <a:pt x="135479" y="60718"/>
+                  </a:lnTo>
+                  <a:lnTo>
+                    <a:pt x="144099" y="75898"/>
+                  </a:lnTo>
+                  <a:lnTo>
+                    <a:pt x="154508" y="88801"/>
+                  </a:lnTo>
+                  <a:lnTo>
+                    <a:pt x="166868" y="99535"/>
+                  </a:lnTo>
+                  <a:lnTo>
+                    <a:pt x="181343" y="108317"/>
+                  </a:lnTo>
+                  <a:lnTo>
+                    <a:pt x="198041" y="115365"/>
+                  </a:lnTo>
+                  <a:lnTo>
+                    <a:pt x="217069" y="120732"/>
+                  </a:lnTo>
+                  <a:lnTo>
+                    <a:pt x="238538" y="124690"/>
+                  </a:lnTo>
+                  <a:lnTo>
+                    <a:pt x="217069" y="128593"/>
+                  </a:lnTo>
+                  <a:lnTo>
+                    <a:pt x="198041" y="133960"/>
+                  </a:lnTo>
+                  <a:lnTo>
+                    <a:pt x="181343" y="140899"/>
+                  </a:lnTo>
+                  <a:lnTo>
+                    <a:pt x="166868" y="149519"/>
+                  </a:lnTo>
+                  <a:lnTo>
+                    <a:pt x="154508" y="159928"/>
+                  </a:lnTo>
+                  <a:lnTo>
+                    <a:pt x="144099" y="172289"/>
+                  </a:lnTo>
+                  <a:lnTo>
+                    <a:pt x="135479" y="186764"/>
+                  </a:lnTo>
+                  <a:lnTo>
+                    <a:pt x="128540" y="203461"/>
+                  </a:lnTo>
+                  <a:lnTo>
+                    <a:pt x="123172" y="222490"/>
+                  </a:lnTo>
+                  <a:lnTo>
+                    <a:pt x="119269" y="243959"/>
+                  </a:lnTo>
+                  <a:lnTo>
+                    <a:pt x="115366" y="222490"/>
+                  </a:lnTo>
+                  <a:lnTo>
+                    <a:pt x="109999" y="203461"/>
+                  </a:lnTo>
+                  <a:lnTo>
+                    <a:pt x="103059" y="186764"/>
+                  </a:lnTo>
+                  <a:lnTo>
+                    <a:pt x="94439" y="172289"/>
+                  </a:lnTo>
+                  <a:lnTo>
+                    <a:pt x="84031" y="159928"/>
+                  </a:lnTo>
+                  <a:lnTo>
+                    <a:pt x="71670" y="149519"/>
+                  </a:lnTo>
+                  <a:lnTo>
+                    <a:pt x="57195" y="140899"/>
+                  </a:lnTo>
+                  <a:lnTo>
+                    <a:pt x="40497" y="133960"/>
+                  </a:lnTo>
+                  <a:lnTo>
+                    <a:pt x="21469" y="128593"/>
+                  </a:lnTo>
+                  <a:lnTo>
+                    <a:pt x="0" y="124690"/>
+                  </a:lnTo>
+                  <a:lnTo>
+                    <a:pt x="21469" y="120786"/>
+                  </a:lnTo>
+                  <a:lnTo>
+                    <a:pt x="40497" y="115365"/>
+                  </a:lnTo>
+                  <a:lnTo>
+                    <a:pt x="57195" y="108317"/>
+                  </a:lnTo>
+                  <a:lnTo>
+                    <a:pt x="71670" y="99535"/>
+                  </a:lnTo>
+                  <a:lnTo>
+                    <a:pt x="84031" y="88801"/>
+                  </a:lnTo>
+                  <a:lnTo>
+                    <a:pt x="94439" y="75898"/>
+                  </a:lnTo>
+                  <a:lnTo>
+                    <a:pt x="103059" y="60718"/>
+                  </a:lnTo>
+                  <a:lnTo>
+                    <a:pt x="109999" y="43153"/>
+                  </a:lnTo>
+                  <a:lnTo>
+                    <a:pt x="115366" y="22986"/>
+                  </a:lnTo>
+                  <a:lnTo>
+                    <a:pt x="119269" y="0"/>
+                  </a:lnTo>
+                  <a:close/>
+                </a:path>
+              </a:pathLst>
+            </a:custGeom>
+            <a:noFill/>
+            <a:ln w="108426" cap="rnd">
+              <a:solidFill>
+                <a:srgbClr val="0077FF"/>
+              </a:solidFill>
+              <a:round/>
+            </a:ln>
+            <a:effectLst/>
+          </p:spPr>
+          <p:style>
+            <a:lnRef idx="1">
+              <a:schemeClr val="accent1"/>
+            </a:lnRef>
+            <a:fillRef idx="3">
+              <a:schemeClr val="accent1"/>
+            </a:fillRef>
+            <a:effectRef idx="2">
+              <a:schemeClr val="accent1"/>
+            </a:effectRef>
+            <a:fontRef idx="minor">
+              <a:schemeClr val="lt1"/>
+            </a:fontRef>
+          </p:style>
+          <p:txBody>
+            <a:bodyPr rtlCol="0" anchor="ctr"/>
+            <a:lstStyle/>
+            <a:p>
+              <a:pPr algn="ctr"/>
+            </a:p>
+          </p:txBody>
+        </p:sp>
+      </p:grpSp>
+      <p:sp>
+        <p:nvSpPr>
+          <p:cNvPr id="6" name="TextBox 5"/>
+          <p:cNvSpPr txBox="1"/>
+          <p:nvPr/>
+        </p:nvSpPr>
+        <p:spPr>
+          <a:xfrm>
+            <a:off x="429280" y="3240328"/>
+            <a:ext cx="3669753" cy="1144980"/>
+          </a:xfrm>
+          <a:prstGeom prst="rect">
+            <a:avLst/>
+          </a:prstGeom>
+          <a:noFill/>
+        </p:spPr>
+        <p:txBody>
+          <a:bodyPr wrap="square" lIns="12700" rIns="12700" tIns="12700" bIns="12700">
+            <a:spAutoFit/>
+          </a:bodyPr>
+          <a:lstStyle/>
+          <a:p>
+            <a:pPr algn="ctr">
+              <a:defRPr sz="1400" b="0">
+                <a:solidFill>
+                  <a:srgbClr val="FFFFFF"/>
+                </a:solidFill>
+                <a:latin typeface="Play"/>
+                <a:ea typeface="Play"/>
+                <a:cs typeface="Play"/>
+              </a:defRPr>
+            </a:pPr>
+            <a:r>
+              <a:rPr sz="1400" b="0">
+                <a:solidFill>
+                  <a:srgbClr val="FFFFFF"/>
+                </a:solidFill>
+                <a:latin typeface="Play"/>
+                <a:ea typeface="Play"/>
+                <a:cs typeface="Play"/>
+              </a:rPr>
+              <a:t>Модель может выдумать цифры</a:t>
+            </a:r>
+          </a:p>
+        </p:txBody>
+      </p:sp>
+      <p:grpSp>
+        <p:nvGrpSpPr>
+          <p:cNvPr id="7" name="icon:builtin-layout"/>
+          <p:cNvGrpSpPr/>
+          <p:nvPr/>
+        </p:nvGrpSpPr>
+        <p:grpSpPr>
+          <a:xfrm>
+            <a:off x="5596803" y="1945719"/>
+            <a:ext cx="975835" cy="975835"/>
+            <a:chOff x="5596803" y="1945719"/>
+            <a:chExt cx="975835" cy="975835"/>
+          </a:xfrm>
+        </p:grpSpPr>
+        <p:sp>
+          <p:nvSpPr>
+            <p:cNvPr id="8" name="Rounded Rectangle 7"/>
+            <p:cNvSpPr/>
+            <p:nvPr/>
+          </p:nvSpPr>
+          <p:spPr>
+            <a:xfrm>
+              <a:off x="5596803" y="1945719"/>
+              <a:ext cx="975835" cy="975835"/>
+            </a:xfrm>
+            <a:prstGeom prst="roundRect">
+              <a:avLst>
+                <a:gd name="adj" fmla="val 11111"/>
+              </a:avLst>
+            </a:prstGeom>
+            <a:noFill/>
+            <a:ln w="108426" cap="rnd">
+              <a:solidFill>
+                <a:srgbClr val="0077FF"/>
+              </a:solidFill>
+              <a:round/>
+            </a:ln>
+            <a:effectLst/>
+          </p:spPr>
+          <p:style>
+            <a:lnRef idx="1">
+              <a:schemeClr val="accent1"/>
+            </a:lnRef>
+            <a:fillRef idx="3">
+              <a:schemeClr val="accent1"/>
+            </a:fillRef>
+            <a:effectRef idx="2">
+              <a:schemeClr val="accent1"/>
+            </a:effectRef>
+            <a:fontRef idx="minor">
+              <a:schemeClr val="lt1"/>
+            </a:fontRef>
+          </p:style>
+          <p:txBody>
+            <a:bodyPr rtlCol="0" anchor="ctr"/>
+            <a:lstStyle/>
+            <a:p>
+              <a:pPr algn="ctr"/>
+            </a:p>
+          </p:txBody>
+        </p:sp>
+        <p:sp>
+          <p:nvSpPr>
+            <p:cNvPr id="9" name="Freeform 8"/>
+            <p:cNvSpPr/>
+            <p:nvPr/>
+          </p:nvSpPr>
+          <p:spPr>
+            <a:xfrm>
+              <a:off x="5596803" y="2270997"/>
+              <a:ext cx="975835" cy="0"/>
+            </a:xfrm>
+            <a:custGeom>
+              <a:avLst/>
+              <a:gdLst/>
+              <a:ahLst/>
+              <a:cxnLst/>
+              <a:rect l="l" t="t" r="r" b="b"/>
+              <a:pathLst>
+                <a:path w="975835" h="0">
+                  <a:moveTo>
+                    <a:pt x="0" y="0"/>
+                  </a:moveTo>
+                  <a:lnTo>
+                    <a:pt x="975835" y="0"/>
+                  </a:lnTo>
+                </a:path>
+              </a:pathLst>
+            </a:custGeom>
+            <a:noFill/>
+            <a:ln w="108426" cap="rnd">
+              <a:solidFill>
+                <a:srgbClr val="0077FF"/>
+              </a:solidFill>
+              <a:round/>
+            </a:ln>
+            <a:effectLst/>
+          </p:spPr>
+          <p:style>
+            <a:lnRef idx="1">
+              <a:schemeClr val="accent1"/>
+            </a:lnRef>
+            <a:fillRef idx="3">
+              <a:schemeClr val="accent1"/>
+            </a:fillRef>
+            <a:effectRef idx="2">
+              <a:schemeClr val="accent1"/>
+            </a:effectRef>
+            <a:fontRef idx="minor">
+              <a:schemeClr val="lt1"/>
+            </a:fontRef>
+          </p:style>
+          <p:txBody>
+            <a:bodyPr rtlCol="0" anchor="ctr"/>
+            <a:lstStyle/>
+            <a:p>
+              <a:pPr algn="ctr"/>
+            </a:p>
+          </p:txBody>
+        </p:sp>
+        <p:sp>
+          <p:nvSpPr>
+            <p:cNvPr id="10" name="Freeform 9"/>
+            <p:cNvSpPr/>
+            <p:nvPr/>
+          </p:nvSpPr>
+          <p:spPr>
+            <a:xfrm>
+              <a:off x="5922081" y="2270997"/>
+              <a:ext cx="0" cy="650557"/>
+            </a:xfrm>
+            <a:custGeom>
+              <a:avLst/>
+              <a:gdLst/>
+              <a:ahLst/>
+              <a:cxnLst/>
+              <a:rect l="l" t="t" r="r" b="b"/>
+              <a:pathLst>
+                <a:path w="0" h="650557">
+                  <a:moveTo>
+                    <a:pt x="0" y="0"/>
+                  </a:moveTo>
+                  <a:lnTo>
+                    <a:pt x="0" y="650557"/>
+                  </a:lnTo>
+                </a:path>
+              </a:pathLst>
+            </a:custGeom>
+            <a:noFill/>
+            <a:ln w="108426" cap="rnd">
+              <a:solidFill>
+                <a:srgbClr val="0077FF"/>
+              </a:solidFill>
+              <a:round/>
+            </a:ln>
+            <a:effectLst/>
+          </p:spPr>
+          <p:style>
+            <a:lnRef idx="1">
+              <a:schemeClr val="accent1"/>
+            </a:lnRef>
+            <a:fillRef idx="3">
+              <a:schemeClr val="accent1"/>
+            </a:fillRef>
+            <a:effectRef idx="2">
+              <a:schemeClr val="accent1"/>
+            </a:effectRef>
+            <a:fontRef idx="minor">
+              <a:schemeClr val="lt1"/>
+            </a:fontRef>
+          </p:style>
+          <p:txBody>
+            <a:bodyPr rtlCol="0" anchor="ctr"/>
+            <a:lstStyle/>
+            <a:p>
+              <a:pPr algn="ctr"/>
+            </a:p>
+          </p:txBody>
+        </p:sp>
+      </p:grpSp>
+      <p:sp>
+        <p:nvSpPr>
+          <p:cNvPr id="11" name="TextBox 10"/>
+          <p:cNvSpPr txBox="1"/>
+          <p:nvPr/>
+        </p:nvSpPr>
+        <p:spPr>
+          <a:xfrm>
+            <a:off x="4249845" y="3240328"/>
+            <a:ext cx="3669753" cy="1144980"/>
+          </a:xfrm>
+          <a:prstGeom prst="rect">
+            <a:avLst/>
+          </a:prstGeom>
+          <a:noFill/>
+        </p:spPr>
+        <p:txBody>
+          <a:bodyPr wrap="square" lIns="12700" rIns="12700" tIns="12700" bIns="12700">
+            <a:spAutoFit/>
+          </a:bodyPr>
+          <a:lstStyle/>
+          <a:p>
+            <a:pPr algn="ctr">
+              <a:defRPr sz="1400" b="0">
+                <a:solidFill>
+                  <a:srgbClr val="FFFFFF"/>
+                </a:solidFill>
+                <a:latin typeface="Play"/>
+                <a:ea typeface="Play"/>
+                <a:cs typeface="Play"/>
+              </a:defRPr>
+            </a:pPr>
+            <a:r>
+              <a:rPr sz="1400" b="0">
+                <a:solidFill>
+                  <a:srgbClr val="FFFFFF"/>
+                </a:solidFill>
+                <a:latin typeface="Play"/>
+                <a:ea typeface="Play"/>
+                <a:cs typeface="Play"/>
+              </a:rPr>
+              <a:t>Неправильный шаблон</a:t>
+            </a:r>
+          </a:p>
+        </p:txBody>
+      </p:sp>
+      <p:grpSp>
+        <p:nvGrpSpPr>
+          <p:cNvPr id="12" name="icon:builtin-target"/>
+          <p:cNvGrpSpPr/>
+          <p:nvPr/>
+        </p:nvGrpSpPr>
+        <p:grpSpPr>
+          <a:xfrm>
+            <a:off x="9417369" y="1945719"/>
+            <a:ext cx="975835" cy="975835"/>
+            <a:chOff x="9417369" y="1945719"/>
+            <a:chExt cx="975835" cy="975835"/>
+          </a:xfrm>
+        </p:grpSpPr>
+        <p:sp>
+          <p:nvSpPr>
+            <p:cNvPr id="13" name="Oval 12"/>
+            <p:cNvSpPr/>
+            <p:nvPr/>
+          </p:nvSpPr>
+          <p:spPr>
+            <a:xfrm>
+              <a:off x="9417369" y="1945719"/>
+              <a:ext cx="975835" cy="975835"/>
+            </a:xfrm>
+            <a:prstGeom prst="ellipse">
+              <a:avLst/>
+            </a:prstGeom>
+            <a:noFill/>
+            <a:ln w="108426" cap="rnd">
+              <a:solidFill>
+                <a:srgbClr val="0077FF"/>
+              </a:solidFill>
+              <a:round/>
+            </a:ln>
+            <a:effectLst/>
+          </p:spPr>
+          <p:style>
+            <a:lnRef idx="1">
+              <a:schemeClr val="accent1"/>
+            </a:lnRef>
+            <a:fillRef idx="3">
+              <a:schemeClr val="accent1"/>
+            </a:fillRef>
+            <a:effectRef idx="2">
+              <a:schemeClr val="accent1"/>
+            </a:effectRef>
+            <a:fontRef idx="minor">
+              <a:schemeClr val="lt1"/>
+            </a:fontRef>
+          </p:style>
+          <p:txBody>
+            <a:bodyPr rtlCol="0" anchor="ctr"/>
+            <a:lstStyle/>
+            <a:p>
+              <a:pPr algn="ctr"/>
+            </a:p>
+          </p:txBody>
+        </p:sp>
+        <p:sp>
+          <p:nvSpPr>
+            <p:cNvPr id="14" name="Oval 13"/>
+            <p:cNvSpPr/>
+            <p:nvPr/>
+          </p:nvSpPr>
+          <p:spPr>
+            <a:xfrm>
+              <a:off x="9634221" y="2162571"/>
+              <a:ext cx="542130" cy="542130"/>
+            </a:xfrm>
+            <a:prstGeom prst="ellipse">
+              <a:avLst/>
+            </a:prstGeom>
+            <a:noFill/>
+            <a:ln w="108426" cap="rnd">
+              <a:solidFill>
+                <a:srgbClr val="0077FF"/>
+              </a:solidFill>
+              <a:round/>
+            </a:ln>
+            <a:effectLst/>
+          </p:spPr>
+          <p:style>
+            <a:lnRef idx="1">
+              <a:schemeClr val="accent1"/>
+            </a:lnRef>
+            <a:fillRef idx="3">
+              <a:schemeClr val="accent1"/>
+            </a:fillRef>
+            <a:effectRef idx="2">
+              <a:schemeClr val="accent1"/>
+            </a:effectRef>
+            <a:fontRef idx="minor">
+              <a:schemeClr val="lt1"/>
+            </a:fontRef>
+          </p:style>
+          <p:txBody>
+            <a:bodyPr rtlCol="0" anchor="ctr"/>
+            <a:lstStyle/>
+            <a:p>
+              <a:pPr algn="ctr"/>
+            </a:p>
+          </p:txBody>
+        </p:sp>
+        <p:sp>
+          <p:nvSpPr>
+            <p:cNvPr id="15" name="Oval 14"/>
+            <p:cNvSpPr/>
+            <p:nvPr/>
+          </p:nvSpPr>
+          <p:spPr>
+            <a:xfrm>
+              <a:off x="9829388" y="2357738"/>
+              <a:ext cx="151796" cy="151796"/>
+            </a:xfrm>
+            <a:prstGeom prst="ellipse">
+              <a:avLst/>
+            </a:prstGeom>
+            <a:solidFill>
+              <a:srgbClr val="0077FF"/>
+            </a:solidFill>
+            <a:ln>
+              <a:noFill/>
+            </a:ln>
+            <a:effectLst/>
+          </p:spPr>
+          <p:style>
+            <a:lnRef idx="1">
+              <a:schemeClr val="accent1"/>
+            </a:lnRef>
+            <a:fillRef idx="3">
+              <a:schemeClr val="accent1"/>
+            </a:fillRef>
+            <a:effectRef idx="2">
+              <a:schemeClr val="accent1"/>
+            </a:effectRef>
+            <a:fontRef idx="minor">
+              <a:schemeClr val="lt1"/>
+            </a:fontRef>
+          </p:style>
+          <p:txBody>
+            <a:bodyPr rtlCol="0" anchor="ctr"/>
+            <a:lstStyle/>
+            <a:p>
+              <a:pPr algn="ctr"/>
+            </a:p>
+          </p:txBody>
+        </p:sp>
+      </p:grpSp>
+      <p:sp>
+        <p:nvSpPr>
+          <p:cNvPr id="16" name="TextBox 15"/>
+          <p:cNvSpPr txBox="1"/>
+          <p:nvPr/>
+        </p:nvSpPr>
+        <p:spPr>
+          <a:xfrm>
+            <a:off x="8070410" y="3240328"/>
+            <a:ext cx="3669753" cy="1144980"/>
+          </a:xfrm>
+          <a:prstGeom prst="rect">
+            <a:avLst/>
+          </a:prstGeom>
+          <a:noFill/>
+        </p:spPr>
+        <p:txBody>
+          <a:bodyPr wrap="square" lIns="12700" rIns="12700" tIns="12700" bIns="12700">
+            <a:spAutoFit/>
+          </a:bodyPr>
+          <a:lstStyle/>
+          <a:p>
+            <a:pPr algn="ctr">
+              <a:defRPr sz="1400" b="0">
+                <a:solidFill>
+                  <a:srgbClr val="FFFFFF"/>
+                </a:solidFill>
+                <a:latin typeface="Play"/>
+                <a:ea typeface="Play"/>
+                <a:cs typeface="Play"/>
+              </a:defRPr>
+            </a:pPr>
+            <a:r>
+              <a:rPr sz="1400" b="0">
+                <a:solidFill>
+                  <a:srgbClr val="FFFFFF"/>
+                </a:solidFill>
+                <a:latin typeface="Play"/>
+                <a:ea typeface="Play"/>
+                <a:cs typeface="Play"/>
+              </a:rPr>
+              <a:t>Нагрузка &gt;20 задач</a:t>
             </a:r>
           </a:p>
         </p:txBody>
       </p:sp>
       <p:sp>
         <p:nvSpPr>
-          <p:cNvPr id="3" name="Rectangle 2"/>
+          <p:cNvPr id="17" name="body"/>
+          <p:cNvSpPr txBox="1"/>
+          <p:nvPr/>
+        </p:nvSpPr>
+        <p:spPr>
+          <a:xfrm>
+            <a:off x="429280" y="4556759"/>
+            <a:ext cx="11310884" cy="1341120"/>
+          </a:xfrm>
+          <a:prstGeom prst="rect">
+            <a:avLst/>
+          </a:prstGeom>
+          <a:noFill/>
+        </p:spPr>
+        <p:txBody>
+          <a:bodyPr wrap="square" lIns="76200" rIns="76200" tIns="50800" bIns="50800">
+            <a:spAutoFit/>
+          </a:bodyPr>
+          <a:lstStyle/>
+          <a:p>
+            <a:pPr algn="l">
+              <a:spcAft>
+                <a:spcPts val="300"/>
+              </a:spcAft>
+              <a:defRPr sz="1600">
+                <a:solidFill>
+                  <a:srgbClr val="FFFFFF"/>
+                </a:solidFill>
+                <a:latin typeface="Play"/>
+                <a:ea typeface="Play"/>
+                <a:cs typeface="Play"/>
+              </a:defRPr>
+            </a:pPr>
+            <a:r>
+              <a:rPr sz="1600">
+                <a:solidFill>
+                  <a:srgbClr val="FFFFFF"/>
+                </a:solidFill>
+                <a:latin typeface="Play"/>
+                <a:ea typeface="Play"/>
+                <a:cs typeface="Play"/>
+              </a:rPr>
+              <a:t>• Модель может выдумать цифры, которые не подтверждены</a:t>
+            </a:r>
+          </a:p>
+          <a:p>
+            <a:pPr algn="l">
+              <a:spcAft>
+                <a:spcPts val="300"/>
+              </a:spcAft>
+              <a:defRPr sz="1600">
+                <a:solidFill>
+                  <a:srgbClr val="FFFFFF"/>
+                </a:solidFill>
+                <a:latin typeface="Play"/>
+                <a:ea typeface="Play"/>
+                <a:cs typeface="Play"/>
+              </a:defRPr>
+            </a:pPr>
+            <a:r>
+              <a:rPr sz="1600">
+                <a:solidFill>
+                  <a:srgbClr val="FFFFFF"/>
+                </a:solidFill>
+                <a:latin typeface="Play"/>
+                <a:ea typeface="Play"/>
+                <a:cs typeface="Play"/>
+              </a:rPr>
+              <a:t>• Неправильный шаблон может привести к некорректной вёрстке</a:t>
+            </a:r>
+          </a:p>
+          <a:p>
+            <a:pPr algn="l">
+              <a:spcAft>
+                <a:spcPts val="300"/>
+              </a:spcAft>
+              <a:defRPr sz="1600">
+                <a:solidFill>
+                  <a:srgbClr val="FFFFFF"/>
+                </a:solidFill>
+                <a:latin typeface="Play"/>
+                <a:ea typeface="Play"/>
+                <a:cs typeface="Play"/>
+              </a:defRPr>
+            </a:pPr>
+            <a:r>
+              <a:rPr sz="1600">
+                <a:solidFill>
+                  <a:srgbClr val="FFFFFF"/>
+                </a:solidFill>
+                <a:latin typeface="Play"/>
+                <a:ea typeface="Play"/>
+                <a:cs typeface="Play"/>
+              </a:rPr>
+              <a:t>• Нагрузка выше 20 одновременных задач требует внешней очереди</a:t>
+            </a:r>
+          </a:p>
+        </p:txBody>
+      </p:sp>
+    </p:spTree>
+  </p:cSld>
+  <p:clrMapOvr>
+    <a:masterClrMapping/>
+  </p:clrMapOvr>
+</p:sld>
+</file>
+
+<file path=ppt/slides/slide38.xml><?xml version="1.0" encoding="utf-8"?>
+<p:sld xmlns:a="http://schemas.openxmlformats.org/drawingml/2006/main" xmlns:p="http://schemas.openxmlformats.org/presentationml/2006/main" xmlns:r="http://schemas.openxmlformats.org/officeDocument/2006/relationships">
+  <p:cSld>
+    <p:spTree>
+      <p:nvGrpSpPr>
+        <p:cNvPr id="1" name=""/>
+        <p:cNvGrpSpPr/>
+        <p:nvPr/>
+      </p:nvGrpSpPr>
+      <p:grpSpPr/>
+      <p:sp>
+        <p:nvSpPr>
+          <p:cNvPr id="2" name="title"/>
+          <p:cNvSpPr txBox="1"/>
+          <p:nvPr/>
+        </p:nvSpPr>
+        <p:spPr>
+          <a:xfrm>
+            <a:off x="429280" y="424715"/>
+            <a:ext cx="7827264" cy="822960"/>
+          </a:xfrm>
+          <a:prstGeom prst="rect">
+            <a:avLst/>
+          </a:prstGeom>
+          <a:noFill/>
+        </p:spPr>
+        <p:txBody>
+          <a:bodyPr wrap="square" lIns="76200" rIns="76200" tIns="50800" bIns="50800">
+            <a:spAutoFit/>
+          </a:bodyPr>
+          <a:lstStyle/>
+          <a:p>
+            <a:pPr algn="l">
+              <a:spcAft>
+                <a:spcPts val="300"/>
+              </a:spcAft>
+              <a:defRPr sz="3200">
+                <a:solidFill>
+                  <a:srgbClr val="FFFFFF"/>
+                </a:solidFill>
+                <a:latin typeface="Play"/>
+                <a:ea typeface="Play"/>
+                <a:cs typeface="Play"/>
+              </a:defRPr>
+            </a:pPr>
+            <a:r>
+              <a:rPr sz="3200">
+                <a:solidFill>
+                  <a:srgbClr val="FFFFFF"/>
+                </a:solidFill>
+                <a:latin typeface="Play"/>
+                <a:ea typeface="Play"/>
+                <a:cs typeface="Play"/>
+              </a:rPr>
+              <a:t>Итоги</a:t>
+            </a:r>
+          </a:p>
+        </p:txBody>
+      </p:sp>
+      <p:sp>
+        <p:nvSpPr>
+          <p:cNvPr id="3" name="stat_0:bar"/>
           <p:cNvSpPr/>
           <p:nvPr/>
         </p:nvSpPr>
         <p:spPr>
           <a:xfrm>
-            <a:off x="429280" y="2695030"/>
-            <a:ext cx="11310884" cy="67230"/>
+            <a:off x="429280" y="1906524"/>
+            <a:ext cx="50800" cy="1231646"/>
           </a:xfrm>
           <a:prstGeom prst="rect">
             <a:avLst/>
@@ -11956,6 +13352,7 @@
           <a:ln>
             <a:noFill/>
           </a:ln>
+          <a:effectLst/>
         </p:spPr>
         <p:style>
           <a:lnRef idx="1">
@@ -11981,57 +13378,14 @@
       </p:sp>
       <p:sp>
         <p:nvSpPr>
-          <p:cNvPr id="4" name="Oval 3"/>
-          <p:cNvSpPr/>
-          <p:nvPr/>
-        </p:nvSpPr>
-        <p:spPr>
-          <a:xfrm>
-            <a:off x="2067915" y="2482133"/>
-            <a:ext cx="493024" cy="493024"/>
-          </a:xfrm>
-          <a:prstGeom prst="ellipse">
-            <a:avLst/>
-          </a:prstGeom>
-          <a:solidFill>
-            <a:srgbClr val="0077FF"/>
-          </a:solidFill>
-          <a:ln>
-            <a:noFill/>
-          </a:ln>
-        </p:spPr>
-        <p:style>
-          <a:lnRef idx="1">
-            <a:schemeClr val="accent1"/>
-          </a:lnRef>
-          <a:fillRef idx="3">
-            <a:schemeClr val="accent1"/>
-          </a:fillRef>
-          <a:effectRef idx="2">
-            <a:schemeClr val="accent1"/>
-          </a:effectRef>
-          <a:fontRef idx="minor">
-            <a:schemeClr val="lt1"/>
-          </a:fontRef>
-        </p:style>
-        <p:txBody>
-          <a:bodyPr rtlCol="0" anchor="ctr"/>
-          <a:lstStyle/>
-          <a:p>
-            <a:pPr algn="ctr"/>
-          </a:p>
-        </p:txBody>
-      </p:sp>
-      <p:sp>
-        <p:nvSpPr>
-          <p:cNvPr id="5" name="TextBox 4"/>
+          <p:cNvPr id="4" name="stat_0"/>
           <p:cNvSpPr txBox="1"/>
           <p:nvPr/>
         </p:nvSpPr>
         <p:spPr>
           <a:xfrm>
-            <a:off x="429280" y="1664162"/>
-            <a:ext cx="5655442" cy="851587"/>
+            <a:off x="607080" y="1783080"/>
+            <a:ext cx="11133084" cy="1355090"/>
           </a:xfrm>
           <a:prstGeom prst="rect">
             <a:avLst/>
@@ -12039,15 +13393,21 @@
           <a:noFill/>
         </p:spPr>
         <p:txBody>
-          <a:bodyPr wrap="square" lIns="12700" rIns="12700" tIns="12700" bIns="12700">
+          <a:bodyPr wrap="square" lIns="76200" rIns="76200" tIns="0" bIns="0">
             <a:spAutoFit/>
           </a:bodyPr>
           <a:lstStyle/>
           <a:p>
-            <a:pPr algn="ctr">
-              <a:defRPr sz="1400" b="0">
-                <a:solidFill>
-                  <a:srgbClr val="FFFFFF"/>
+            <a:pPr>
+              <a:lnSpc>
+                <a:spcPct val="100000"/>
+              </a:lnSpc>
+              <a:spcAft>
+                <a:spcPts val="200"/>
+              </a:spcAft>
+              <a:defRPr sz="5400" b="1">
+                <a:solidFill>
+                  <a:srgbClr val="0077FF"/>
                 </a:solidFill>
                 <a:latin typeface="Play"/>
                 <a:ea typeface="Play"/>
@@ -12055,207 +13415,55 @@
               </a:defRPr>
             </a:pPr>
             <a:r>
-              <a:rPr sz="1400" b="0">
-                <a:solidFill>
-                  <a:srgbClr val="FFFFFF"/>
+              <a:rPr sz="5400" b="1">
+                <a:solidFill>
+                  <a:srgbClr val="0077FF"/>
                 </a:solidFill>
                 <a:latin typeface="Play"/>
                 <a:ea typeface="Play"/>
                 <a:cs typeface="Play"/>
               </a:rPr>
-              <a:t>Подключение 4 команд</a:t>
+              <a:t>4 мин</a:t>
+            </a:r>
+          </a:p>
+          <a:p>
+            <a:pPr>
+              <a:spcAft>
+                <a:spcPts val="300"/>
+              </a:spcAft>
+              <a:defRPr sz="2400" b="0">
+                <a:solidFill>
+                  <a:srgbClr val="FFFFFF"/>
+                </a:solidFill>
+                <a:latin typeface="Play"/>
+                <a:ea typeface="Play"/>
+                <a:cs typeface="Play"/>
+              </a:defRPr>
+            </a:pPr>
+            <a:r>
+              <a:rPr sz="2400" b="0">
+                <a:solidFill>
+                  <a:srgbClr val="FFFFFF"/>
+                </a:solidFill>
+                <a:latin typeface="Play"/>
+                <a:ea typeface="Play"/>
+                <a:cs typeface="Play"/>
+              </a:rPr>
+              <a:t>Время сборки сократилось с 186 до 4 минут</a:t>
             </a:r>
           </a:p>
         </p:txBody>
       </p:sp>
       <p:sp>
         <p:nvSpPr>
-          <p:cNvPr id="6" name="Oval 5"/>
-          <p:cNvSpPr/>
-          <p:nvPr/>
-        </p:nvSpPr>
-        <p:spPr>
-          <a:xfrm>
-            <a:off x="5838209" y="2482133"/>
-            <a:ext cx="493024" cy="493024"/>
-          </a:xfrm>
-          <a:prstGeom prst="ellipse">
-            <a:avLst/>
-          </a:prstGeom>
-          <a:solidFill>
-            <a:srgbClr val="0077FF"/>
-          </a:solidFill>
-          <a:ln>
-            <a:noFill/>
-          </a:ln>
-        </p:spPr>
-        <p:style>
-          <a:lnRef idx="1">
-            <a:schemeClr val="accent1"/>
-          </a:lnRef>
-          <a:fillRef idx="3">
-            <a:schemeClr val="accent1"/>
-          </a:fillRef>
-          <a:effectRef idx="2">
-            <a:schemeClr val="accent1"/>
-          </a:effectRef>
-          <a:fontRef idx="minor">
-            <a:schemeClr val="lt1"/>
-          </a:fontRef>
-        </p:style>
-        <p:txBody>
-          <a:bodyPr rtlCol="0" anchor="ctr"/>
-          <a:lstStyle/>
-          <a:p>
-            <a:pPr algn="ctr"/>
-          </a:p>
-        </p:txBody>
-      </p:sp>
-      <p:sp>
-        <p:nvSpPr>
-          <p:cNvPr id="7" name="TextBox 6"/>
+          <p:cNvPr id="5" name="body"/>
           <p:cNvSpPr txBox="1"/>
           <p:nvPr/>
         </p:nvSpPr>
         <p:spPr>
           <a:xfrm>
-            <a:off x="3257001" y="3188054"/>
-            <a:ext cx="5655442" cy="851587"/>
-          </a:xfrm>
-          <a:prstGeom prst="rect">
-            <a:avLst/>
-          </a:prstGeom>
-          <a:noFill/>
-        </p:spPr>
-        <p:txBody>
-          <a:bodyPr wrap="square" lIns="12700" rIns="12700" tIns="12700" bIns="12700">
-            <a:spAutoFit/>
-          </a:bodyPr>
-          <a:lstStyle/>
-          <a:p>
-            <a:pPr algn="ctr">
-              <a:defRPr sz="1400" b="0">
-                <a:solidFill>
-                  <a:srgbClr val="FFFFFF"/>
-                </a:solidFill>
-                <a:latin typeface="Play"/>
-                <a:ea typeface="Play"/>
-                <a:cs typeface="Play"/>
-              </a:defRPr>
-            </a:pPr>
-            <a:r>
-              <a:rPr sz="1400" b="0">
-                <a:solidFill>
-                  <a:srgbClr val="FFFFFF"/>
-                </a:solidFill>
-                <a:latin typeface="Play"/>
-                <a:ea typeface="Play"/>
-                <a:cs typeface="Play"/>
-              </a:rPr>
-              <a:t>Доступ для всей компании</a:t>
-            </a:r>
-          </a:p>
-        </p:txBody>
-      </p:sp>
-      <p:sp>
-        <p:nvSpPr>
-          <p:cNvPr id="8" name="Oval 7"/>
-          <p:cNvSpPr/>
-          <p:nvPr/>
-        </p:nvSpPr>
-        <p:spPr>
-          <a:xfrm>
-            <a:off x="9608504" y="2482133"/>
-            <a:ext cx="493024" cy="493024"/>
-          </a:xfrm>
-          <a:prstGeom prst="ellipse">
-            <a:avLst/>
-          </a:prstGeom>
-          <a:solidFill>
-            <a:srgbClr val="0077FF"/>
-          </a:solidFill>
-          <a:ln>
-            <a:noFill/>
-          </a:ln>
-        </p:spPr>
-        <p:style>
-          <a:lnRef idx="1">
-            <a:schemeClr val="accent1"/>
-          </a:lnRef>
-          <a:fillRef idx="3">
-            <a:schemeClr val="accent1"/>
-          </a:fillRef>
-          <a:effectRef idx="2">
-            <a:schemeClr val="accent1"/>
-          </a:effectRef>
-          <a:fontRef idx="minor">
-            <a:schemeClr val="lt1"/>
-          </a:fontRef>
-        </p:style>
-        <p:txBody>
-          <a:bodyPr rtlCol="0" anchor="ctr"/>
-          <a:lstStyle/>
-          <a:p>
-            <a:pPr algn="ctr"/>
-          </a:p>
-        </p:txBody>
-      </p:sp>
-      <p:sp>
-        <p:nvSpPr>
-          <p:cNvPr id="9" name="TextBox 8"/>
-          <p:cNvSpPr txBox="1"/>
-          <p:nvPr/>
-        </p:nvSpPr>
-        <p:spPr>
-          <a:xfrm>
-            <a:off x="6084722" y="1664162"/>
-            <a:ext cx="5655442" cy="851587"/>
-          </a:xfrm>
-          <a:prstGeom prst="rect">
-            <a:avLst/>
-          </a:prstGeom>
-          <a:noFill/>
-        </p:spPr>
-        <p:txBody>
-          <a:bodyPr wrap="square" lIns="12700" rIns="12700" tIns="12700" bIns="12700">
-            <a:spAutoFit/>
-          </a:bodyPr>
-          <a:lstStyle/>
-          <a:p>
-            <a:pPr algn="ctr">
-              <a:defRPr sz="1400" b="0">
-                <a:solidFill>
-                  <a:srgbClr val="FFFFFF"/>
-                </a:solidFill>
-                <a:latin typeface="Play"/>
-                <a:ea typeface="Play"/>
-                <a:cs typeface="Play"/>
-              </a:defRPr>
-            </a:pPr>
-            <a:r>
-              <a:rPr sz="1400" b="0">
-                <a:solidFill>
-                  <a:srgbClr val="FFFFFF"/>
-                </a:solidFill>
-                <a:latin typeface="Play"/>
-                <a:ea typeface="Play"/>
-                <a:cs typeface="Play"/>
-              </a:rPr>
-              <a:t>Генерация иллюстраций</a:t>
-            </a:r>
-          </a:p>
-        </p:txBody>
-      </p:sp>
-      <p:sp>
-        <p:nvSpPr>
-          <p:cNvPr id="10" name="body"/>
-          <p:cNvSpPr txBox="1"/>
-          <p:nvPr/>
-        </p:nvSpPr>
-        <p:spPr>
-          <a:xfrm>
-            <a:off x="429280" y="4076631"/>
-            <a:ext cx="11310884" cy="1341120"/>
+            <a:off x="429280" y="4169664"/>
+            <a:ext cx="11310884" cy="1728215"/>
           </a:xfrm>
           <a:prstGeom prst="rect">
             <a:avLst/>
@@ -12272,7 +13480,7 @@
               <a:spcAft>
                 <a:spcPts val="300"/>
               </a:spcAft>
-              <a:defRPr sz="1600">
+              <a:defRPr sz="2400">
                 <a:solidFill>
                   <a:srgbClr val="FFFFFF"/>
                 </a:solidFill>
@@ -12282,7 +13490,7 @@
               </a:defRPr>
             </a:pPr>
             <a:r>
-              <a:rPr sz="1600">
+              <a:rPr sz="2400">
                 <a:solidFill>
                   <a:srgbClr val="FFFFFF"/>
                 </a:solidFill>
@@ -12290,7 +13498,7 @@
                 <a:ea typeface="Play"/>
                 <a:cs typeface="Play"/>
               </a:rPr>
-              <a:t>• Q3 2026: подключение 4 команд, домен и HTTPS</a:t>
+              <a:t>• Первый вариант появился за 1 день вместо 6</a:t>
             </a:r>
           </a:p>
           <a:p>
@@ -12298,7 +13506,7 @@
               <a:spcAft>
                 <a:spcPts val="300"/>
               </a:spcAft>
-              <a:defRPr sz="1600">
+              <a:defRPr sz="2400">
                 <a:solidFill>
                   <a:srgbClr val="FFFFFF"/>
                 </a:solidFill>
@@ -12308,7 +13516,7 @@
               </a:defRPr>
             </a:pPr>
             <a:r>
-              <a:rPr sz="1600">
+              <a:rPr sz="2400">
                 <a:solidFill>
                   <a:srgbClr val="FFFFFF"/>
                 </a:solidFill>
@@ -12316,7 +13524,7 @@
                 <a:ea typeface="Play"/>
                 <a:cs typeface="Play"/>
               </a:rPr>
-              <a:t>• Q4 2026: доступ для всей компании, интеграция с хранилищем</a:t>
+              <a:t>• Нарушения стиля уменьшились до 2 из 68</a:t>
             </a:r>
           </a:p>
           <a:p>
@@ -12324,7 +13532,7 @@
               <a:spcAft>
                 <a:spcPts val="300"/>
               </a:spcAft>
-              <a:defRPr sz="1600">
+              <a:defRPr sz="2400">
                 <a:solidFill>
                   <a:srgbClr val="FFFFFF"/>
                 </a:solidFill>
@@ -12334,7 +13542,7 @@
               </a:defRPr>
             </a:pPr>
             <a:r>
-              <a:rPr sz="1600">
+              <a:rPr sz="2400">
                 <a:solidFill>
                   <a:srgbClr val="FFFFFF"/>
                 </a:solidFill>
@@ -12342,7 +13550,7 @@
                 <a:ea typeface="Play"/>
                 <a:cs typeface="Play"/>
               </a:rPr>
-              <a:t>• Q1 2027: генерация иллюстраций под стиль шаблона</a:t>
+              <a:t>• Дизайнеры закрыли 38 запросов вместо 11 в неделю</a:t>
             </a:r>
           </a:p>
         </p:txBody>
@@ -12355,7 +13563,7 @@
 </p:sld>
 </file>
 
-<file path=ppt/slides/slide38.xml><?xml version="1.0" encoding="utf-8"?>
+<file path=ppt/slides/slide39.xml><?xml version="1.0" encoding="utf-8"?>
 <p:sld xmlns:a="http://schemas.openxmlformats.org/drawingml/2006/main" xmlns:p="http://schemas.openxmlformats.org/presentationml/2006/main" xmlns:r="http://schemas.openxmlformats.org/officeDocument/2006/relationships">
   <p:cSld>
     <p:spTree>
@@ -12438,7 +13646,7 @@
         <p:spPr>
           <a:xfrm>
             <a:off x="300817" y="297715"/>
-            <a:ext cx="8081264" cy="5658188"/>
+            <a:ext cx="11566347" cy="5280124"/>
           </a:xfrm>
           <a:prstGeom prst="roundRect">
             <a:avLst/>
@@ -12501,7 +13709,7 @@
               <a:spcAft>
                 <a:spcPts val="300"/>
               </a:spcAft>
-              <a:defRPr sz="4000">
+              <a:defRPr sz="3200">
                 <a:solidFill>
                   <a:srgbClr val="FFFFFF"/>
                 </a:solidFill>
@@ -12511,7 +13719,7 @@
               </a:defRPr>
             </a:pPr>
             <a:r>
-              <a:rPr sz="4000">
+              <a:rPr sz="3200">
                 <a:solidFill>
                   <a:srgbClr val="FFFFFF"/>
                 </a:solidFill>
@@ -12519,21 +13727,210 @@
                 <a:ea typeface="Play"/>
                 <a:cs typeface="Play"/>
               </a:rPr>
-              <a:t>Что мы просим решить</a:t>
+              <a:t>Следующие шаги</a:t>
             </a:r>
           </a:p>
         </p:txBody>
       </p:sp>
       <p:sp>
         <p:nvSpPr>
-          <p:cNvPr id="682" name="lead"/>
+          <p:cNvPr id="682" name="Pentagon 681"/>
+          <p:cNvSpPr/>
+          <p:nvPr/>
+        </p:nvSpPr>
+        <p:spPr>
+          <a:xfrm>
+            <a:off x="427817" y="1943306"/>
+            <a:ext cx="3680283" cy="2281775"/>
+          </a:xfrm>
+          <a:prstGeom prst="homePlate">
+            <a:avLst/>
+          </a:prstGeom>
+          <a:solidFill>
+            <a:srgbClr val="0077FF"/>
+          </a:solidFill>
+          <a:ln>
+            <a:noFill/>
+          </a:ln>
+        </p:spPr>
+        <p:style>
+          <a:lnRef idx="1">
+            <a:schemeClr val="accent1"/>
+          </a:lnRef>
+          <a:fillRef idx="3">
+            <a:schemeClr val="accent1"/>
+          </a:fillRef>
+          <a:effectRef idx="2">
+            <a:schemeClr val="accent1"/>
+          </a:effectRef>
+          <a:fontRef idx="minor">
+            <a:schemeClr val="lt1"/>
+          </a:fontRef>
+        </p:style>
+        <p:txBody>
+          <a:bodyPr rtlCol="0" anchor="ctr" wrap="square" lIns="12700" rIns="12700" tIns="12700" bIns="12700"/>
+          <a:lstStyle/>
+          <a:p>
+            <a:pPr algn="ctr">
+              <a:defRPr sz="1260" b="0">
+                <a:solidFill>
+                  <a:srgbClr val="FFFFFF"/>
+                </a:solidFill>
+                <a:latin typeface="Play"/>
+                <a:ea typeface="Play"/>
+                <a:cs typeface="Play"/>
+              </a:defRPr>
+            </a:pPr>
+            <a:r>
+              <a:rPr sz="1260" b="0">
+                <a:solidFill>
+                  <a:srgbClr val="FFFFFF"/>
+                </a:solidFill>
+                <a:latin typeface="Play"/>
+                <a:ea typeface="Play"/>
+                <a:cs typeface="Play"/>
+              </a:rPr>
+              <a:t>Согласовать бюджет</a:t>
+            </a:r>
+          </a:p>
+        </p:txBody>
+      </p:sp>
+      <p:sp>
+        <p:nvSpPr>
+          <p:cNvPr id="683" name="Chevron 682"/>
+          <p:cNvSpPr/>
+          <p:nvPr/>
+        </p:nvSpPr>
+        <p:spPr>
+          <a:xfrm>
+            <a:off x="4243848" y="1943306"/>
+            <a:ext cx="3680283" cy="2281775"/>
+          </a:xfrm>
+          <a:prstGeom prst="chevron">
+            <a:avLst/>
+          </a:prstGeom>
+          <a:solidFill>
+            <a:srgbClr val="0077FF"/>
+          </a:solidFill>
+          <a:ln>
+            <a:noFill/>
+          </a:ln>
+        </p:spPr>
+        <p:style>
+          <a:lnRef idx="1">
+            <a:schemeClr val="accent1"/>
+          </a:lnRef>
+          <a:fillRef idx="3">
+            <a:schemeClr val="accent1"/>
+          </a:fillRef>
+          <a:effectRef idx="2">
+            <a:schemeClr val="accent1"/>
+          </a:effectRef>
+          <a:fontRef idx="minor">
+            <a:schemeClr val="lt1"/>
+          </a:fontRef>
+        </p:style>
+        <p:txBody>
+          <a:bodyPr rtlCol="0" anchor="ctr" wrap="square" lIns="12700" rIns="12700" tIns="12700" bIns="12700"/>
+          <a:lstStyle/>
+          <a:p>
+            <a:pPr algn="ctr">
+              <a:defRPr sz="1260" b="0">
+                <a:solidFill>
+                  <a:srgbClr val="FFFFFF"/>
+                </a:solidFill>
+                <a:latin typeface="Play"/>
+                <a:ea typeface="Play"/>
+                <a:cs typeface="Play"/>
+              </a:defRPr>
+            </a:pPr>
+            <a:r>
+              <a:rPr sz="1260" b="0">
+                <a:solidFill>
+                  <a:srgbClr val="FFFFFF"/>
+                </a:solidFill>
+                <a:latin typeface="Play"/>
+                <a:ea typeface="Play"/>
+                <a:cs typeface="Play"/>
+              </a:rPr>
+              <a:t>Интеграция с хранилищем</a:t>
+            </a:r>
+          </a:p>
+        </p:txBody>
+      </p:sp>
+      <p:sp>
+        <p:nvSpPr>
+          <p:cNvPr id="684" name="Chevron 683"/>
+          <p:cNvSpPr/>
+          <p:nvPr/>
+        </p:nvSpPr>
+        <p:spPr>
+          <a:xfrm>
+            <a:off x="8059880" y="1943306"/>
+            <a:ext cx="3680283" cy="2281775"/>
+          </a:xfrm>
+          <a:prstGeom prst="chevron">
+            <a:avLst/>
+          </a:prstGeom>
+          <a:solidFill>
+            <a:srgbClr val="0077FF"/>
+          </a:solidFill>
+          <a:ln>
+            <a:noFill/>
+          </a:ln>
+        </p:spPr>
+        <p:style>
+          <a:lnRef idx="1">
+            <a:schemeClr val="accent1"/>
+          </a:lnRef>
+          <a:fillRef idx="3">
+            <a:schemeClr val="accent1"/>
+          </a:fillRef>
+          <a:effectRef idx="2">
+            <a:schemeClr val="accent1"/>
+          </a:effectRef>
+          <a:fontRef idx="minor">
+            <a:schemeClr val="lt1"/>
+          </a:fontRef>
+        </p:style>
+        <p:txBody>
+          <a:bodyPr rtlCol="0" anchor="ctr" wrap="square" lIns="12700" rIns="12700" tIns="12700" bIns="12700"/>
+          <a:lstStyle/>
+          <a:p>
+            <a:pPr algn="ctr">
+              <a:defRPr sz="1260" b="0">
+                <a:solidFill>
+                  <a:srgbClr val="FFFFFF"/>
+                </a:solidFill>
+                <a:latin typeface="Play"/>
+                <a:ea typeface="Play"/>
+                <a:cs typeface="Play"/>
+              </a:defRPr>
+            </a:pPr>
+            <a:r>
+              <a:rPr sz="1260" b="0">
+                <a:solidFill>
+                  <a:srgbClr val="FFFFFF"/>
+                </a:solidFill>
+                <a:latin typeface="Play"/>
+                <a:ea typeface="Play"/>
+                <a:cs typeface="Play"/>
+              </a:rPr>
+              <a:t>Расширить команды</a:t>
+            </a:r>
+          </a:p>
+        </p:txBody>
+      </p:sp>
+      <p:sp>
+        <p:nvSpPr>
+          <p:cNvPr id="685" name="body"/>
           <p:cNvSpPr txBox="1"/>
           <p:nvPr/>
         </p:nvSpPr>
         <p:spPr>
           <a:xfrm>
-            <a:off x="427817" y="1837052"/>
-            <a:ext cx="7827264" cy="1531442"/>
+            <a:off x="427817" y="4556759"/>
+            <a:ext cx="11312347" cy="1341120"/>
           </a:xfrm>
           <a:prstGeom prst="rect">
             <a:avLst/>
@@ -12550,7 +13947,7 @@
               <a:spcAft>
                 <a:spcPts val="300"/>
               </a:spcAft>
-              <a:defRPr sz="4000">
+              <a:defRPr sz="1600">
                 <a:solidFill>
                   <a:srgbClr val="FFFFFF"/>
                 </a:solidFill>
@@ -12560,7 +13957,7 @@
               </a:defRPr>
             </a:pPr>
             <a:r>
-              <a:rPr sz="4000">
+              <a:rPr sz="1600">
                 <a:solidFill>
                   <a:srgbClr val="FFFFFF"/>
                 </a:solidFill>
@@ -12568,21 +13965,145 @@
                 <a:ea typeface="Play"/>
                 <a:cs typeface="Play"/>
               </a:rPr>
-              <a:t>Запуск сервиса на всю компанию</a:t>
+              <a:t>• Согласовать бюджет и ресурсы</a:t>
+            </a:r>
+          </a:p>
+          <a:p>
+            <a:pPr algn="l">
+              <a:spcAft>
+                <a:spcPts val="300"/>
+              </a:spcAft>
+              <a:defRPr sz="1600">
+                <a:solidFill>
+                  <a:srgbClr val="FFFFFF"/>
+                </a:solidFill>
+                <a:latin typeface="Play"/>
+                <a:ea typeface="Play"/>
+                <a:cs typeface="Play"/>
+              </a:defRPr>
+            </a:pPr>
+            <a:r>
+              <a:rPr sz="1600">
+                <a:solidFill>
+                  <a:srgbClr val="FFFFFF"/>
+                </a:solidFill>
+                <a:latin typeface="Play"/>
+                <a:ea typeface="Play"/>
+                <a:cs typeface="Play"/>
+              </a:rPr>
+              <a:t>• Интегрировать сервис с корпоративным хранилищем</a:t>
+            </a:r>
+          </a:p>
+          <a:p>
+            <a:pPr algn="l">
+              <a:spcAft>
+                <a:spcPts val="300"/>
+              </a:spcAft>
+              <a:defRPr sz="1600">
+                <a:solidFill>
+                  <a:srgbClr val="FFFFFF"/>
+                </a:solidFill>
+                <a:latin typeface="Play"/>
+                <a:ea typeface="Play"/>
+                <a:cs typeface="Play"/>
+              </a:defRPr>
+            </a:pPr>
+            <a:r>
+              <a:rPr sz="1600">
+                <a:solidFill>
+                  <a:srgbClr val="FFFFFF"/>
+                </a:solidFill>
+                <a:latin typeface="Play"/>
+                <a:ea typeface="Play"/>
+                <a:cs typeface="Play"/>
+              </a:rPr>
+              <a:t>• Расширить команды до 8 в Q3 2026</a:t>
             </a:r>
           </a:p>
         </p:txBody>
       </p:sp>
+    </p:spTree>
+  </p:cSld>
+  <p:clrMapOvr>
+    <a:masterClrMapping/>
+  </p:clrMapOvr>
+</p:sld>
+</file>
+
+<file path=ppt/slides/slide40.xml><?xml version="1.0" encoding="utf-8"?>
+<p:sld xmlns:a="http://schemas.openxmlformats.org/drawingml/2006/main" xmlns:p="http://schemas.openxmlformats.org/presentationml/2006/main" xmlns:r="http://schemas.openxmlformats.org/officeDocument/2006/relationships">
+  <p:cSld>
+    <p:spTree>
+      <p:nvGrpSpPr>
+        <p:cNvPr id="1" name=""/>
+        <p:cNvGrpSpPr/>
+        <p:nvPr/>
+      </p:nvGrpSpPr>
+      <p:grpSpPr/>
+      <p:pic>
+        <p:nvPicPr>
+          <p:cNvPr id="620" name="Google Shape;620;p28"/>
+          <p:cNvPicPr preferRelativeResize="0"/>
+          <p:nvPr/>
+        </p:nvPicPr>
+        <p:blipFill rotWithShape="1">
+          <a:blip r:embed="rId3">
+            <a:alphaModFix/>
+          </a:blip>
+          <a:srcRect b="0" l="0" r="0" t="0"/>
+          <a:stretch/>
+        </p:blipFill>
+        <p:spPr>
+          <a:xfrm>
+            <a:off x="398723" y="6160516"/>
+            <a:ext cx="1857481" cy="292671"/>
+          </a:xfrm>
+          <a:prstGeom prst="rect">
+            <a:avLst/>
+          </a:prstGeom>
+          <a:noFill/>
+          <a:ln>
+            <a:noFill/>
+          </a:ln>
+        </p:spPr>
+      </p:pic>
+      <p:pic>
+        <p:nvPicPr>
+          <p:cNvPr descr=" " id="621" name="Google Shape;621;p28"/>
+          <p:cNvPicPr preferRelativeResize="0"/>
+          <p:nvPr/>
+        </p:nvPicPr>
+        <p:blipFill rotWithShape="1">
+          <a:blip r:embed="rId4">
+            <a:alphaModFix/>
+          </a:blip>
+          <a:srcRect b="0" l="0" r="0" t="0"/>
+          <a:stretch/>
+        </p:blipFill>
+        <p:spPr>
+          <a:xfrm>
+            <a:off x="11093496" y="6238282"/>
+            <a:ext cx="690517" cy="216000"/>
+          </a:xfrm>
+          <a:prstGeom prst="rect">
+            <a:avLst/>
+          </a:prstGeom>
+          <a:noFill/>
+          <a:ln>
+            <a:noFill/>
+          </a:ln>
+        </p:spPr>
+      </p:pic>
       <p:sp>
         <p:nvSpPr>
-          <p:cNvPr id="683" name="body"/>
+          <p:cNvPr id="622" name="title"/>
           <p:cNvSpPr txBox="1"/>
           <p:nvPr/>
         </p:nvSpPr>
         <p:spPr>
           <a:xfrm>
-            <a:off x="427817" y="3614024"/>
-            <a:ext cx="7827264" cy="2315196"/>
+            <a:off x="429280" y="424715"/>
+            <a:ext cx="7827264" cy="822960"/>
           </a:xfrm>
           <a:prstGeom prst="rect">
             <a:avLst/>
@@ -12599,7 +14120,7 @@
               <a:spcAft>
                 <a:spcPts val="300"/>
               </a:spcAft>
-              <a:defRPr sz="3200">
+              <a:defRPr sz="4000">
                 <a:solidFill>
                   <a:srgbClr val="FFFFFF"/>
                 </a:solidFill>
@@ -12609,7 +14130,7 @@
               </a:defRPr>
             </a:pPr>
             <a:r>
-              <a:rPr sz="3200">
+              <a:rPr sz="4000">
                 <a:solidFill>
                   <a:srgbClr val="FFFFFF"/>
                 </a:solidFill>
@@ -12617,33 +14138,7 @@
                 <a:ea typeface="Play"/>
                 <a:cs typeface="Play"/>
               </a:rPr>
-              <a:t>• Выделение бюджета на поддержку и развитие</a:t>
-            </a:r>
-          </a:p>
-          <a:p>
-            <a:pPr algn="l">
-              <a:spcAft>
-                <a:spcPts val="300"/>
-              </a:spcAft>
-              <a:defRPr sz="3200">
-                <a:solidFill>
-                  <a:srgbClr val="FFFFFF"/>
-                </a:solidFill>
-                <a:latin typeface="Play"/>
-                <a:ea typeface="Play"/>
-                <a:cs typeface="Play"/>
-              </a:defRPr>
-            </a:pPr>
-            <a:r>
-              <a:rPr sz="3200">
-                <a:solidFill>
-                  <a:srgbClr val="FFFFFF"/>
-                </a:solidFill>
-                <a:latin typeface="Play"/>
-                <a:ea typeface="Play"/>
-                <a:cs typeface="Play"/>
-              </a:rPr>
-              <a:t>• Поддержка интеграции с корпоративными системами</a:t>
+              <a:t>Вопросы и ответы</a:t>
             </a:r>
           </a:p>
         </p:txBody>
@@ -12656,7 +14151,7 @@
 </p:sld>
 </file>
 
-<file path=ppt/slides/slide39.xml><?xml version="1.0" encoding="utf-8"?>
+<file path=ppt/slides/slide41.xml><?xml version="1.0" encoding="utf-8"?>
 <p:sld xmlns:a="http://schemas.openxmlformats.org/drawingml/2006/main" xmlns:p="http://schemas.openxmlformats.org/presentationml/2006/main" xmlns:r="http://schemas.openxmlformats.org/officeDocument/2006/relationships">
   <p:cSld>
     <p:spTree>
@@ -12777,7 +14272,7 @@
         <p:spPr>
           <a:xfrm>
             <a:off x="302280" y="2164394"/>
-            <a:ext cx="8081385" cy="1247140"/>
+            <a:ext cx="8081385" cy="2078989"/>
           </a:xfrm>
           <a:prstGeom prst="roundRect">
             <a:avLst/>
@@ -12823,7 +14318,7 @@
         <p:spPr>
           <a:xfrm>
             <a:off x="429280" y="2291394"/>
-            <a:ext cx="7827385" cy="1018540"/>
+            <a:ext cx="7827385" cy="822960"/>
           </a:xfrm>
           <a:prstGeom prst="rect">
             <a:avLst/>
@@ -12840,7 +14335,7 @@
               <a:spcAft>
                 <a:spcPts val="300"/>
               </a:spcAft>
-              <a:defRPr sz="5400">
+              <a:defRPr sz="4000">
                 <a:solidFill>
                   <a:srgbClr val="FFFFFF"/>
                 </a:solidFill>
@@ -12850,7 +14345,7 @@
               </a:defRPr>
             </a:pPr>
             <a:r>
-              <a:rPr sz="5400">
+              <a:rPr sz="4000">
                 <a:solidFill>
                   <a:srgbClr val="FFFFFF"/>
                 </a:solidFill>
@@ -12858,7 +14353,56 @@
                 <a:ea typeface="Play"/>
                 <a:cs typeface="Play"/>
               </a:rPr>
-              <a:t>Вопросы?</a:t>
+              <a:t>Контактная информация</a:t>
+            </a:r>
+          </a:p>
+        </p:txBody>
+      </p:sp>
+      <p:sp>
+        <p:nvSpPr>
+          <p:cNvPr id="886" name="lead"/>
+          <p:cNvSpPr txBox="1"/>
+          <p:nvPr/>
+        </p:nvSpPr>
+        <p:spPr>
+          <a:xfrm>
+            <a:off x="429280" y="3354384"/>
+            <a:ext cx="7827385" cy="1213523"/>
+          </a:xfrm>
+          <a:prstGeom prst="rect">
+            <a:avLst/>
+          </a:prstGeom>
+          <a:noFill/>
+        </p:spPr>
+        <p:txBody>
+          <a:bodyPr wrap="square" lIns="76200" rIns="76200" tIns="50800" bIns="50800">
+            <a:spAutoFit/>
+          </a:bodyPr>
+          <a:lstStyle/>
+          <a:p>
+            <a:pPr algn="ctr">
+              <a:spcAft>
+                <a:spcPts val="300"/>
+              </a:spcAft>
+              <a:defRPr sz="4000" b="1">
+                <a:solidFill>
+                  <a:srgbClr val="FFFFFF"/>
+                </a:solidFill>
+                <a:latin typeface="Play"/>
+                <a:ea typeface="Play"/>
+                <a:cs typeface="Play"/>
+              </a:defRPr>
+            </a:pPr>
+            <a:r>
+              <a:rPr sz="4000" b="1">
+                <a:solidFill>
+                  <a:srgbClr val="FFFFFF"/>
+                </a:solidFill>
+                <a:latin typeface="Play"/>
+                <a:ea typeface="Play"/>
+                <a:cs typeface="Play"/>
+              </a:rPr>
+              <a:t>Email: support@example.com</a:t>
             </a:r>
           </a:p>
         </p:txBody>

--- a/samples/VK_WorkSpace_Клиентская_конференция_Шабл__focus.pptx
+++ b/samples/VK_WorkSpace_Клиентская_конференция_Шабл__focus.pptx
@@ -286,6 +286,434 @@
     </p:ext>
   </p:extLst>
 </p:presentation>
+</file>
+
+<file path=ppt/charts/chart1.xml><?xml version="1.0" encoding="utf-8"?>
+<c:chartSpace xmlns:c="http://schemas.openxmlformats.org/drawingml/2006/chart" xmlns:a="http://schemas.openxmlformats.org/drawingml/2006/main" xmlns:r="http://schemas.openxmlformats.org/officeDocument/2006/relationships">
+  <c:date1904 val="0"/>
+  <c:chart>
+    <c:autoTitleDeleted val="1"/>
+    <c:plotArea>
+      <c:barChart>
+        <c:barDir val="col"/>
+        <c:grouping val="clustered"/>
+        <c:ser>
+          <c:idx val="0"/>
+          <c:order val="0"/>
+          <c:tx>
+            <c:strRef>
+              <c:f>Sheet1!$B$1</c:f>
+              <c:strCache>
+                <c:ptCount val="1"/>
+                <c:pt idx="0">
+                  <c:v>Время (мин)</c:v>
+                </c:pt>
+              </c:strCache>
+            </c:strRef>
+          </c:tx>
+          <c:spPr>
+            <a:solidFill>
+              <a:srgbClr val="0077FF"/>
+            </a:solidFill>
+            <a:ln>
+              <a:solidFill>
+                <a:srgbClr val="0077FF"/>
+              </a:solidFill>
+            </a:ln>
+          </c:spPr>
+          <c:cat>
+            <c:strRef>
+              <c:f>Sheet1!$A$2:$A$3</c:f>
+              <c:strCache>
+                <c:ptCount val="2"/>
+                <c:pt idx="0">
+                  <c:v>До</c:v>
+                </c:pt>
+                <c:pt idx="1">
+                  <c:v>После</c:v>
+                </c:pt>
+              </c:strCache>
+            </c:strRef>
+          </c:cat>
+          <c:val>
+            <c:numRef>
+              <c:f>Sheet1!$B$2:$B$3</c:f>
+              <c:numCache>
+                <c:formatCode>General</c:formatCode>
+                <c:ptCount val="2"/>
+                <c:pt idx="0">
+                  <c:v>186.0</c:v>
+                </c:pt>
+                <c:pt idx="1">
+                  <c:v>4.0</c:v>
+                </c:pt>
+              </c:numCache>
+            </c:numRef>
+          </c:val>
+        </c:ser>
+        <c:dLbls>
+          <c:numFmt formatCode="0&quot; мин&quot;" sourceLinked="0"/>
+          <c:txPr>
+            <a:bodyPr wrap="none"/>
+            <a:lstStyle/>
+            <a:p>
+              <a:pPr>
+                <a:defRPr sz="1100" b="0">
+                  <a:solidFill>
+                    <a:srgbClr val="FFFFFF"/>
+                  </a:solidFill>
+                  <a:latin typeface="Play"/>
+                  <a:ea typeface="Play"/>
+                  <a:cs typeface="Play"/>
+                </a:defRPr>
+              </a:pPr>
+            </a:p>
+          </c:txPr>
+          <c:dLblPos val="outEnd"/>
+          <c:showLegendKey val="0"/>
+          <c:showVal val="1"/>
+          <c:showCatName val="0"/>
+          <c:showSerName val="0"/>
+          <c:showPercent val="0"/>
+          <c:showBubbleSize val="0"/>
+          <c:showLeaderLines val="1"/>
+        </c:dLbls>
+        <c:gapWidth val="60"/>
+        <c:axId val="-2068027336"/>
+        <c:axId val="-2113994440"/>
+      </c:barChart>
+      <c:catAx>
+        <c:axId val="-2068027336"/>
+        <c:scaling>
+          <c:orientation val="minMax"/>
+        </c:scaling>
+        <c:delete val="0"/>
+        <c:axPos val="b"/>
+        <c:majorTickMark val="out"/>
+        <c:minorTickMark val="none"/>
+        <c:tickLblPos val="nextTo"/>
+        <c:txPr>
+          <a:bodyPr/>
+          <a:lstStyle/>
+          <a:p>
+            <a:pPr>
+              <a:defRPr sz="1100" b="0">
+                <a:solidFill>
+                  <a:srgbClr val="FFFFFF"/>
+                </a:solidFill>
+                <a:latin typeface="Play"/>
+                <a:ea typeface="Play"/>
+                <a:cs typeface="Play"/>
+              </a:defRPr>
+            </a:pPr>
+          </a:p>
+        </c:txPr>
+        <c:crossAx val="-2113994440"/>
+        <c:crosses val="autoZero"/>
+        <c:auto val="1"/>
+        <c:lblAlgn val="ctr"/>
+        <c:lblOffset val="100"/>
+        <c:noMultiLvlLbl val="0"/>
+      </c:catAx>
+      <c:valAx>
+        <c:axId val="-2113994440"/>
+        <c:scaling/>
+        <c:delete val="0"/>
+        <c:axPos val="l"/>
+        <c:majorGridlines>
+          <c:spPr>
+            <a:ln w="9525">
+              <a:solidFill>
+                <a:srgbClr val="3C3C3C"/>
+              </a:solidFill>
+            </a:ln>
+          </c:spPr>
+        </c:majorGridlines>
+        <c:title>
+          <c:tx>
+            <c:rich>
+              <a:bodyPr rot="0" vert="horz"/>
+              <a:lstStyle/>
+              <a:p>
+                <a:pPr>
+                  <a:defRPr sz="1100" b="0">
+                    <a:solidFill>
+                      <a:srgbClr val="FFFFFF"/>
+                    </a:solidFill>
+                    <a:latin typeface="Play"/>
+                    <a:ea typeface="Play"/>
+                    <a:cs typeface="Play"/>
+                  </a:defRPr>
+                </a:pPr>
+                <a:r>
+                  <a:t>Время (мин), мин</a:t>
+                </a:r>
+              </a:p>
+            </c:rich>
+          </c:tx>
+          <c:layout/>
+          <c:overlay val="0"/>
+        </c:title>
+        <c:majorTickMark val="out"/>
+        <c:minorTickMark val="none"/>
+        <c:tickLblPos val="nextTo"/>
+        <c:txPr>
+          <a:bodyPr/>
+          <a:lstStyle/>
+          <a:p>
+            <a:pPr>
+              <a:defRPr sz="1100" b="0">
+                <a:solidFill>
+                  <a:srgbClr val="FFFFFF"/>
+                </a:solidFill>
+                <a:latin typeface="Play"/>
+                <a:ea typeface="Play"/>
+                <a:cs typeface="Play"/>
+              </a:defRPr>
+            </a:pPr>
+          </a:p>
+        </c:txPr>
+        <c:crossAx val="-2068027336"/>
+        <c:crosses val="autoZero"/>
+      </c:valAx>
+    </c:plotArea>
+    <c:dispBlanksAs val="gap"/>
+  </c:chart>
+  <c:txPr>
+    <a:bodyPr/>
+    <a:lstStyle/>
+    <a:p>
+      <a:pPr>
+        <a:defRPr sz="1200" b="0">
+          <a:solidFill>
+            <a:srgbClr val="FFFFFF"/>
+          </a:solidFill>
+          <a:latin typeface="Play"/>
+          <a:ea typeface="Play"/>
+          <a:cs typeface="Play"/>
+        </a:defRPr>
+      </a:pPr>
+      <a:endParaRPr lang="en-US"/>
+    </a:p>
+  </c:txPr>
+  <c:externalData r:id="rId1">
+    <c:autoUpdate val="0"/>
+  </c:externalData>
+</c:chartSpace>
+</file>
+
+<file path=ppt/charts/chart2.xml><?xml version="1.0" encoding="utf-8"?>
+<c:chartSpace xmlns:c="http://schemas.openxmlformats.org/drawingml/2006/chart" xmlns:a="http://schemas.openxmlformats.org/drawingml/2006/main" xmlns:r="http://schemas.openxmlformats.org/officeDocument/2006/relationships">
+  <c:date1904 val="0"/>
+  <c:chart>
+    <c:autoTitleDeleted val="1"/>
+    <c:plotArea>
+      <c:barChart>
+        <c:barDir val="col"/>
+        <c:grouping val="clustered"/>
+        <c:ser>
+          <c:idx val="0"/>
+          <c:order val="0"/>
+          <c:tx>
+            <c:strRef>
+              <c:f>Sheet1!$B$1</c:f>
+              <c:strCache>
+                <c:ptCount val="1"/>
+                <c:pt idx="0">
+                  <c:v>Нарушения</c:v>
+                </c:pt>
+              </c:strCache>
+            </c:strRef>
+          </c:tx>
+          <c:spPr>
+            <a:solidFill>
+              <a:srgbClr val="0077FF"/>
+            </a:solidFill>
+            <a:ln>
+              <a:solidFill>
+                <a:srgbClr val="0077FF"/>
+              </a:solidFill>
+            </a:ln>
+          </c:spPr>
+          <c:cat>
+            <c:strRef>
+              <c:f>Sheet1!$A$2:$A$3</c:f>
+              <c:strCache>
+                <c:ptCount val="2"/>
+                <c:pt idx="0">
+                  <c:v>До</c:v>
+                </c:pt>
+                <c:pt idx="1">
+                  <c:v>После</c:v>
+                </c:pt>
+              </c:strCache>
+            </c:strRef>
+          </c:cat>
+          <c:val>
+            <c:numRef>
+              <c:f>Sheet1!$B$2:$B$3</c:f>
+              <c:numCache>
+                <c:formatCode>General</c:formatCode>
+                <c:ptCount val="2"/>
+                <c:pt idx="0">
+                  <c:v>19.0</c:v>
+                </c:pt>
+                <c:pt idx="1">
+                  <c:v>2.0</c:v>
+                </c:pt>
+              </c:numCache>
+            </c:numRef>
+          </c:val>
+        </c:ser>
+        <c:dLbls>
+          <c:numFmt formatCode="0&quot; колод&quot;" sourceLinked="0"/>
+          <c:txPr>
+            <a:bodyPr wrap="none"/>
+            <a:lstStyle/>
+            <a:p>
+              <a:pPr>
+                <a:defRPr sz="1100" b="0">
+                  <a:solidFill>
+                    <a:srgbClr val="FFFFFF"/>
+                  </a:solidFill>
+                  <a:latin typeface="Play"/>
+                  <a:ea typeface="Play"/>
+                  <a:cs typeface="Play"/>
+                </a:defRPr>
+              </a:pPr>
+            </a:p>
+          </c:txPr>
+          <c:dLblPos val="outEnd"/>
+          <c:showLegendKey val="0"/>
+          <c:showVal val="1"/>
+          <c:showCatName val="0"/>
+          <c:showSerName val="0"/>
+          <c:showPercent val="0"/>
+          <c:showBubbleSize val="0"/>
+          <c:showLeaderLines val="1"/>
+        </c:dLbls>
+        <c:gapWidth val="60"/>
+        <c:axId val="-2068027336"/>
+        <c:axId val="-2113994440"/>
+      </c:barChart>
+      <c:catAx>
+        <c:axId val="-2068027336"/>
+        <c:scaling>
+          <c:orientation val="minMax"/>
+        </c:scaling>
+        <c:delete val="0"/>
+        <c:axPos val="b"/>
+        <c:majorTickMark val="out"/>
+        <c:minorTickMark val="none"/>
+        <c:tickLblPos val="nextTo"/>
+        <c:txPr>
+          <a:bodyPr/>
+          <a:lstStyle/>
+          <a:p>
+            <a:pPr>
+              <a:defRPr sz="1100" b="0">
+                <a:solidFill>
+                  <a:srgbClr val="FFFFFF"/>
+                </a:solidFill>
+                <a:latin typeface="Play"/>
+                <a:ea typeface="Play"/>
+                <a:cs typeface="Play"/>
+              </a:defRPr>
+            </a:pPr>
+          </a:p>
+        </c:txPr>
+        <c:crossAx val="-2113994440"/>
+        <c:crosses val="autoZero"/>
+        <c:auto val="1"/>
+        <c:lblAlgn val="ctr"/>
+        <c:lblOffset val="100"/>
+        <c:noMultiLvlLbl val="0"/>
+      </c:catAx>
+      <c:valAx>
+        <c:axId val="-2113994440"/>
+        <c:scaling/>
+        <c:delete val="0"/>
+        <c:axPos val="l"/>
+        <c:majorGridlines>
+          <c:spPr>
+            <a:ln w="9525">
+              <a:solidFill>
+                <a:srgbClr val="3C3C3C"/>
+              </a:solidFill>
+            </a:ln>
+          </c:spPr>
+        </c:majorGridlines>
+        <c:title>
+          <c:tx>
+            <c:rich>
+              <a:bodyPr rot="0" vert="horz"/>
+              <a:lstStyle/>
+              <a:p>
+                <a:pPr>
+                  <a:defRPr sz="1100" b="0">
+                    <a:solidFill>
+                      <a:srgbClr val="FFFFFF"/>
+                    </a:solidFill>
+                    <a:latin typeface="Play"/>
+                    <a:ea typeface="Play"/>
+                    <a:cs typeface="Play"/>
+                  </a:defRPr>
+                </a:pPr>
+                <a:r>
+                  <a:t>Нарушения, колод</a:t>
+                </a:r>
+              </a:p>
+            </c:rich>
+          </c:tx>
+          <c:layout/>
+          <c:overlay val="0"/>
+        </c:title>
+        <c:majorTickMark val="out"/>
+        <c:minorTickMark val="none"/>
+        <c:tickLblPos val="nextTo"/>
+        <c:txPr>
+          <a:bodyPr/>
+          <a:lstStyle/>
+          <a:p>
+            <a:pPr>
+              <a:defRPr sz="1100" b="0">
+                <a:solidFill>
+                  <a:srgbClr val="FFFFFF"/>
+                </a:solidFill>
+                <a:latin typeface="Play"/>
+                <a:ea typeface="Play"/>
+                <a:cs typeface="Play"/>
+              </a:defRPr>
+            </a:pPr>
+          </a:p>
+        </c:txPr>
+        <c:crossAx val="-2068027336"/>
+        <c:crosses val="autoZero"/>
+      </c:valAx>
+    </c:plotArea>
+    <c:dispBlanksAs val="gap"/>
+  </c:chart>
+  <c:txPr>
+    <a:bodyPr/>
+    <a:lstStyle/>
+    <a:p>
+      <a:pPr>
+        <a:defRPr sz="1200" b="0">
+          <a:solidFill>
+            <a:srgbClr val="FFFFFF"/>
+          </a:solidFill>
+          <a:latin typeface="Play"/>
+          <a:ea typeface="Play"/>
+          <a:cs typeface="Play"/>
+        </a:defRPr>
+      </a:pPr>
+      <a:endParaRPr lang="en-US"/>
+    </a:p>
+  </c:txPr>
+  <c:externalData r:id="rId1">
+    <c:autoUpdate val="0"/>
+  </c:externalData>
+</c:chartSpace>
 </file>
 
 <file path=ppt/notesMasters/notesMaster1.xml><?xml version="1.0" encoding="utf-8"?>
@@ -9145,7 +9573,7 @@
         <p:spPr>
           <a:xfrm>
             <a:off x="429280" y="2490551"/>
-            <a:ext cx="7827385" cy="1876897"/>
+            <a:ext cx="7827385" cy="1884680"/>
           </a:xfrm>
           <a:prstGeom prst="rect">
             <a:avLst/>
@@ -9162,7 +9590,7 @@
               <a:spcAft>
                 <a:spcPts val="300"/>
               </a:spcAft>
-              <a:defRPr sz="3200" b="0">
+              <a:defRPr sz="5400" b="0">
                 <a:solidFill>
                   <a:srgbClr val="FFFFFF"/>
                 </a:solidFill>
@@ -9172,7 +9600,7 @@
               </a:defRPr>
             </a:pPr>
             <a:r>
-              <a:rPr sz="3200" b="0">
+              <a:rPr sz="5400" b="0">
                 <a:solidFill>
                   <a:srgbClr val="FFFFFF"/>
                 </a:solidFill>
@@ -9180,7 +9608,7 @@
                 <a:ea typeface="Play"/>
                 <a:cs typeface="Play"/>
               </a:rPr>
-              <a:t>Защита инициативы: сервис автоматической вёрстки презентаций</a:t>
+              <a:t>Автоматическая вёрстка презентаций</a:t>
             </a:r>
           </a:p>
         </p:txBody>
@@ -9212,7 +9640,7 @@
         <p:spPr>
           <a:xfrm>
             <a:off x="429280" y="424715"/>
-            <a:ext cx="7827264" cy="822960"/>
+            <a:ext cx="7827264" cy="1183640"/>
           </a:xfrm>
           <a:prstGeom prst="rect">
             <a:avLst/>
@@ -9247,7 +9675,7 @@
                 <a:ea typeface="Play"/>
                 <a:cs typeface="Play"/>
               </a:rPr>
-              <a:t>Контекст и возможность</a:t>
+              <a:t>42 колоды в первом квартале 2026 года</a:t>
             </a:r>
           </a:p>
         </p:txBody>
@@ -9261,8 +9689,8 @@
           <p:nvPr/>
         </p:nvGraphicFramePr>
         <p:xfrm>
-          <a:off x="429280" y="1783080"/>
-          <a:ext cx="11310884" cy="2297430"/>
+          <a:off x="429280" y="1848385"/>
+          <a:ext cx="11310884" cy="2536924"/>
         </p:xfrm>
         <a:graphic>
           <a:graphicData uri="http://schemas.openxmlformats.org/drawingml/2006/table">
@@ -9271,11 +9699,10 @@
                 <a:tableStyleId>{5C22544A-7EE6-4342-B048-85BDC9FD1C3A}</a:tableStyleId>
               </a:tblPr>
               <a:tblGrid>
-                <a:gridCol w="3770294"/>
-                <a:gridCol w="3770294"/>
-                <a:gridCol w="3770296"/>
+                <a:gridCol w="5655442"/>
+                <a:gridCol w="5655442"/>
               </a:tblGrid>
-              <a:tr h="328204">
+              <a:tr h="507384">
                 <a:tc>
                   <a:txBody>
                     <a:bodyPr/>
@@ -9328,34 +9755,8 @@
                     </a:solidFill>
                   </a:tcPr>
                 </a:tc>
-                <a:tc>
-                  <a:txBody>
-                    <a:bodyPr/>
-                    <a:lstStyle/>
-                    <a:p>
-                      <a:pPr>
-                        <a:defRPr sz="1300" b="1">
-                          <a:solidFill>
-                            <a:srgbClr val="FFFFFF"/>
-                          </a:solidFill>
-                          <a:latin typeface="Play"/>
-                          <a:ea typeface="Play"/>
-                          <a:cs typeface="Play"/>
-                        </a:defRPr>
-                      </a:pPr>
-                      <a:r>
-                        <a:t>Единица</a:t>
-                      </a:r>
-                    </a:p>
-                  </a:txBody>
-                  <a:tcPr>
-                    <a:solidFill>
-                      <a:srgbClr val="0077FF"/>
-                    </a:solidFill>
-                  </a:tcPr>
-                </a:tc>
               </a:tr>
-              <a:tr h="328204">
+              <a:tr h="507384">
                 <a:tc>
                   <a:txBody>
                     <a:bodyPr/>
@@ -9372,7 +9773,61 @@
                         </a:defRPr>
                       </a:pPr>
                       <a:r>
-                        <a:t>Время сборки</a:t>
+                        <a:t>Колоды</a:t>
+                      </a:r>
+                    </a:p>
+                  </a:txBody>
+                  <a:tcPr>
+                    <a:solidFill>
+                      <a:srgbClr val="111111"/>
+                    </a:solidFill>
+                  </a:tcPr>
+                </a:tc>
+                <a:tc>
+                  <a:txBody>
+                    <a:bodyPr/>
+                    <a:lstStyle/>
+                    <a:p>
+                      <a:pPr>
+                        <a:defRPr sz="1300" b="0">
+                          <a:solidFill>
+                            <a:srgbClr val="FFFFFF"/>
+                          </a:solidFill>
+                          <a:latin typeface="Play"/>
+                          <a:ea typeface="Play"/>
+                          <a:cs typeface="Play"/>
+                        </a:defRPr>
+                      </a:pPr>
+                      <a:r>
+                        <a:t>42</a:t>
+                      </a:r>
+                    </a:p>
+                  </a:txBody>
+                  <a:tcPr>
+                    <a:solidFill>
+                      <a:srgbClr val="111111"/>
+                    </a:solidFill>
+                  </a:tcPr>
+                </a:tc>
+              </a:tr>
+              <a:tr h="507384">
+                <a:tc>
+                  <a:txBody>
+                    <a:bodyPr/>
+                    <a:lstStyle/>
+                    <a:p>
+                      <a:pPr>
+                        <a:defRPr sz="1300" b="0">
+                          <a:solidFill>
+                            <a:srgbClr val="FFFFFF"/>
+                          </a:solidFill>
+                          <a:latin typeface="Play"/>
+                          <a:ea typeface="Play"/>
+                          <a:cs typeface="Play"/>
+                        </a:defRPr>
+                      </a:pPr>
+                      <a:r>
+                        <a:t>Средняя сборка (мин)</a:t>
                       </a:r>
                     </a:p>
                   </a:txBody>
@@ -9408,6 +9863,8 @@
                     </a:solidFill>
                   </a:tcPr>
                 </a:tc>
+              </a:tr>
+              <a:tr h="507384">
                 <a:tc>
                   <a:txBody>
                     <a:bodyPr/>
@@ -9424,35 +9881,7 @@
                         </a:defRPr>
                       </a:pPr>
                       <a:r>
-                        <a:t>мин</a:t>
-                      </a:r>
-                    </a:p>
-                  </a:txBody>
-                  <a:tcPr>
-                    <a:solidFill>
-                      <a:srgbClr val="111111"/>
-                    </a:solidFill>
-                  </a:tcPr>
-                </a:tc>
-              </a:tr>
-              <a:tr h="328204">
-                <a:tc>
-                  <a:txBody>
-                    <a:bodyPr/>
-                    <a:lstStyle/>
-                    <a:p>
-                      <a:pPr>
-                        <a:defRPr sz="1300" b="0">
-                          <a:solidFill>
-                            <a:srgbClr val="FFFFFF"/>
-                          </a:solidFill>
-                          <a:latin typeface="Play"/>
-                          <a:ea typeface="Play"/>
-                          <a:cs typeface="Play"/>
-                        </a:defRPr>
-                      </a:pPr>
-                      <a:r>
-                        <a:t>Время правок</a:t>
+                        <a:t>Правки (мин)</a:t>
                       </a:r>
                     </a:p>
                   </a:txBody>
@@ -9488,6 +9917,8 @@
                     </a:solidFill>
                   </a:tcPr>
                 </a:tc>
+              </a:tr>
+              <a:tr h="507388">
                 <a:tc>
                   <a:txBody>
                     <a:bodyPr/>
@@ -9504,35 +9935,7 @@
                         </a:defRPr>
                       </a:pPr>
                       <a:r>
-                        <a:t>мин</a:t>
-                      </a:r>
-                    </a:p>
-                  </a:txBody>
-                  <a:tcPr>
-                    <a:solidFill>
-                      <a:srgbClr val="111111"/>
-                    </a:solidFill>
-                  </a:tcPr>
-                </a:tc>
-              </a:tr>
-              <a:tr h="328204">
-                <a:tc>
-                  <a:txBody>
-                    <a:bodyPr/>
-                    <a:lstStyle/>
-                    <a:p>
-                      <a:pPr>
-                        <a:defRPr sz="1300" b="0">
-                          <a:solidFill>
-                            <a:srgbClr val="FFFFFF"/>
-                          </a:solidFill>
-                          <a:latin typeface="Play"/>
-                          <a:ea typeface="Play"/>
-                          <a:cs typeface="Play"/>
-                        </a:defRPr>
-                      </a:pPr>
-                      <a:r>
-                        <a:t>Нарушения стиля</a:t>
+                        <a:t>Нарушения</a:t>
                       </a:r>
                     </a:p>
                   </a:txBody>
@@ -9558,7 +9961,283 @@
                         </a:defRPr>
                       </a:pPr>
                       <a:r>
-                        <a:t>19/42</a:t>
+                        <a:t>19</a:t>
+                      </a:r>
+                    </a:p>
+                  </a:txBody>
+                  <a:tcPr>
+                    <a:solidFill>
+                      <a:srgbClr val="111111"/>
+                    </a:solidFill>
+                  </a:tcPr>
+                </a:tc>
+              </a:tr>
+            </a:tbl>
+          </a:graphicData>
+        </a:graphic>
+      </p:graphicFrame>
+      <p:sp>
+        <p:nvSpPr>
+          <p:cNvPr id="4" name="body"/>
+          <p:cNvSpPr txBox="1"/>
+          <p:nvPr/>
+        </p:nvSpPr>
+        <p:spPr>
+          <a:xfrm>
+            <a:off x="429280" y="4556759"/>
+            <a:ext cx="11310884" cy="1341120"/>
+          </a:xfrm>
+          <a:prstGeom prst="rect">
+            <a:avLst/>
+          </a:prstGeom>
+          <a:noFill/>
+        </p:spPr>
+        <p:txBody>
+          <a:bodyPr wrap="square" lIns="76200" rIns="76200" tIns="50800" bIns="50800">
+            <a:spAutoFit/>
+          </a:bodyPr>
+          <a:lstStyle/>
+          <a:p>
+            <a:pPr algn="l">
+              <a:spcAft>
+                <a:spcPts val="300"/>
+              </a:spcAft>
+              <a:defRPr sz="1600">
+                <a:solidFill>
+                  <a:srgbClr val="FFFFFF"/>
+                </a:solidFill>
+                <a:latin typeface="Play"/>
+                <a:ea typeface="Play"/>
+                <a:cs typeface="Play"/>
+              </a:defRPr>
+            </a:pPr>
+            <a:r>
+              <a:rPr sz="1600">
+                <a:solidFill>
+                  <a:srgbClr val="FFFFFF"/>
+                </a:solidFill>
+                <a:latin typeface="Play"/>
+                <a:ea typeface="Play"/>
+                <a:cs typeface="Play"/>
+              </a:rPr>
+              <a:t>• Средняя сборка 186 мин</a:t>
+            </a:r>
+          </a:p>
+          <a:p>
+            <a:pPr algn="l">
+              <a:spcAft>
+                <a:spcPts val="300"/>
+              </a:spcAft>
+              <a:defRPr sz="1600">
+                <a:solidFill>
+                  <a:srgbClr val="FFFFFF"/>
+                </a:solidFill>
+                <a:latin typeface="Play"/>
+                <a:ea typeface="Play"/>
+                <a:cs typeface="Play"/>
+              </a:defRPr>
+            </a:pPr>
+            <a:r>
+              <a:rPr sz="1600">
+                <a:solidFill>
+                  <a:srgbClr val="FFFFFF"/>
+                </a:solidFill>
+                <a:latin typeface="Play"/>
+                <a:ea typeface="Play"/>
+                <a:cs typeface="Play"/>
+              </a:rPr>
+              <a:t>• 74 мин на правки</a:t>
+            </a:r>
+          </a:p>
+          <a:p>
+            <a:pPr algn="l">
+              <a:spcAft>
+                <a:spcPts val="300"/>
+              </a:spcAft>
+              <a:defRPr sz="1600">
+                <a:solidFill>
+                  <a:srgbClr val="FFFFFF"/>
+                </a:solidFill>
+                <a:latin typeface="Play"/>
+                <a:ea typeface="Play"/>
+                <a:cs typeface="Play"/>
+              </a:defRPr>
+            </a:pPr>
+            <a:r>
+              <a:rPr sz="1600">
+                <a:solidFill>
+                  <a:srgbClr val="FFFFFF"/>
+                </a:solidFill>
+                <a:latin typeface="Play"/>
+                <a:ea typeface="Play"/>
+                <a:cs typeface="Play"/>
+              </a:rPr>
+              <a:t>• 19 колод нарушили стиль</a:t>
+            </a:r>
+          </a:p>
+        </p:txBody>
+      </p:sp>
+    </p:spTree>
+  </p:cSld>
+  <p:clrMapOvr>
+    <a:masterClrMapping/>
+  </p:clrMapOvr>
+</p:sld>
+</file>
+
+<file path=ppt/slides/slide32.xml><?xml version="1.0" encoding="utf-8"?>
+<p:sld xmlns:a="http://schemas.openxmlformats.org/drawingml/2006/main" xmlns:p="http://schemas.openxmlformats.org/presentationml/2006/main" xmlns:r="http://schemas.openxmlformats.org/officeDocument/2006/relationships">
+  <p:cSld>
+    <p:spTree>
+      <p:nvGrpSpPr>
+        <p:cNvPr id="1" name=""/>
+        <p:cNvGrpSpPr/>
+        <p:nvPr/>
+      </p:nvGrpSpPr>
+      <p:grpSpPr/>
+      <p:sp>
+        <p:nvSpPr>
+          <p:cNvPr id="2" name="title"/>
+          <p:cNvSpPr txBox="1"/>
+          <p:nvPr/>
+        </p:nvSpPr>
+        <p:spPr>
+          <a:xfrm>
+            <a:off x="429280" y="424715"/>
+            <a:ext cx="7827264" cy="1183640"/>
+          </a:xfrm>
+          <a:prstGeom prst="rect">
+            <a:avLst/>
+          </a:prstGeom>
+          <a:noFill/>
+        </p:spPr>
+        <p:txBody>
+          <a:bodyPr wrap="square" lIns="76200" rIns="76200" tIns="50800" bIns="50800">
+            <a:spAutoFit/>
+          </a:bodyPr>
+          <a:lstStyle/>
+          <a:p>
+            <a:pPr algn="l">
+              <a:spcAft>
+                <a:spcPts val="300"/>
+              </a:spcAft>
+              <a:defRPr sz="3200">
+                <a:solidFill>
+                  <a:srgbClr val="FFFFFF"/>
+                </a:solidFill>
+                <a:latin typeface="Play"/>
+                <a:ea typeface="Play"/>
+                <a:cs typeface="Play"/>
+              </a:defRPr>
+            </a:pPr>
+            <a:r>
+              <a:rPr sz="3200">
+                <a:solidFill>
+                  <a:srgbClr val="FFFFFF"/>
+                </a:solidFill>
+                <a:latin typeface="Play"/>
+                <a:ea typeface="Play"/>
+                <a:cs typeface="Play"/>
+              </a:rPr>
+              <a:t>Сборка одной презентации занимает 186 мин</a:t>
+            </a:r>
+          </a:p>
+        </p:txBody>
+      </p:sp>
+      <p:graphicFrame>
+        <p:nvGraphicFramePr>
+          <p:cNvPr id="3" name="Table 2"/>
+          <p:cNvGraphicFramePr>
+            <a:graphicFrameLocks noGrp="1"/>
+          </p:cNvGraphicFramePr>
+          <p:nvPr/>
+        </p:nvGraphicFramePr>
+        <p:xfrm>
+          <a:off x="429280" y="1848385"/>
+          <a:ext cx="11310884" cy="2933164"/>
+        </p:xfrm>
+        <a:graphic>
+          <a:graphicData uri="http://schemas.openxmlformats.org/drawingml/2006/table">
+            <a:tbl>
+              <a:tblPr firstRow="1" bandRow="1">
+                <a:tableStyleId>{5C22544A-7EE6-4342-B048-85BDC9FD1C3A}</a:tableStyleId>
+              </a:tblPr>
+              <a:tblGrid>
+                <a:gridCol w="5655442"/>
+                <a:gridCol w="5655442"/>
+              </a:tblGrid>
+              <a:tr h="733291">
+                <a:tc>
+                  <a:txBody>
+                    <a:bodyPr/>
+                    <a:lstStyle/>
+                    <a:p>
+                      <a:pPr>
+                        <a:defRPr sz="1300" b="1">
+                          <a:solidFill>
+                            <a:srgbClr val="FFFFFF"/>
+                          </a:solidFill>
+                          <a:latin typeface="Play"/>
+                          <a:ea typeface="Play"/>
+                          <a:cs typeface="Play"/>
+                        </a:defRPr>
+                      </a:pPr>
+                      <a:r>
+                        <a:t>Показатель</a:t>
+                      </a:r>
+                    </a:p>
+                  </a:txBody>
+                  <a:tcPr>
+                    <a:solidFill>
+                      <a:srgbClr val="0077FF"/>
+                    </a:solidFill>
+                  </a:tcPr>
+                </a:tc>
+                <a:tc>
+                  <a:txBody>
+                    <a:bodyPr/>
+                    <a:lstStyle/>
+                    <a:p>
+                      <a:pPr>
+                        <a:defRPr sz="1300" b="1">
+                          <a:solidFill>
+                            <a:srgbClr val="FFFFFF"/>
+                          </a:solidFill>
+                          <a:latin typeface="Play"/>
+                          <a:ea typeface="Play"/>
+                          <a:cs typeface="Play"/>
+                        </a:defRPr>
+                      </a:pPr>
+                      <a:r>
+                        <a:t>Значение</a:t>
+                      </a:r>
+                    </a:p>
+                  </a:txBody>
+                  <a:tcPr>
+                    <a:solidFill>
+                      <a:srgbClr val="0077FF"/>
+                    </a:solidFill>
+                  </a:tcPr>
+                </a:tc>
+              </a:tr>
+              <a:tr h="733291">
+                <a:tc>
+                  <a:txBody>
+                    <a:bodyPr/>
+                    <a:lstStyle/>
+                    <a:p>
+                      <a:pPr>
+                        <a:defRPr sz="1300" b="0">
+                          <a:solidFill>
+                            <a:srgbClr val="FFFFFF"/>
+                          </a:solidFill>
+                          <a:latin typeface="Play"/>
+                          <a:ea typeface="Play"/>
+                          <a:cs typeface="Play"/>
+                        </a:defRPr>
+                      </a:pPr>
+                      <a:r>
+                        <a:t>Слайдов</a:t>
                       </a:r>
                     </a:p>
                   </a:txBody>
@@ -9584,7 +10263,7 @@
                         </a:defRPr>
                       </a:pPr>
                       <a:r>
-                        <a:t>шт</a:t>
+                        <a:t>12</a:t>
                       </a:r>
                     </a:p>
                   </a:txBody>
@@ -9595,7 +10274,7 @@
                   </a:tcPr>
                 </a:tc>
               </a:tr>
-              <a:tr h="328204">
+              <a:tr h="733291">
                 <a:tc>
                   <a:txBody>
                     <a:bodyPr/>
@@ -9612,7 +10291,7 @@
                         </a:defRPr>
                       </a:pPr>
                       <a:r>
-                        <a:t>Размер команды</a:t>
+                        <a:t>Правки (мин)</a:t>
                       </a:r>
                     </a:p>
                   </a:txBody>
@@ -9638,7 +10317,7 @@
                         </a:defRPr>
                       </a:pPr>
                       <a:r>
-                        <a:t>4</a:t>
+                        <a:t>74</a:t>
                       </a:r>
                     </a:p>
                   </a:txBody>
@@ -9648,6 +10327,8 @@
                     </a:solidFill>
                   </a:tcPr>
                 </a:tc>
+              </a:tr>
+              <a:tr h="733291">
                 <a:tc>
                   <a:txBody>
                     <a:bodyPr/>
@@ -9664,115 +10345,7 @@
                         </a:defRPr>
                       </a:pPr>
                       <a:r>
-                        <a:t>чел</a:t>
-                      </a:r>
-                    </a:p>
-                  </a:txBody>
-                  <a:tcPr>
-                    <a:solidFill>
-                      <a:srgbClr val="111111"/>
-                    </a:solidFill>
-                  </a:tcPr>
-                </a:tc>
-              </a:tr>
-              <a:tr h="328204">
-                <a:tc>
-                  <a:txBody>
-                    <a:bodyPr/>
-                    <a:lstStyle/>
-                    <a:p>
-                      <a:pPr>
-                        <a:defRPr sz="1300" b="0">
-                          <a:solidFill>
-                            <a:srgbClr val="FFFFFF"/>
-                          </a:solidFill>
-                          <a:latin typeface="Play"/>
-                          <a:ea typeface="Play"/>
-                          <a:cs typeface="Play"/>
-                        </a:defRPr>
-                      </a:pPr>
-                      <a:r>
-                        <a:t>Запросы в неделю</a:t>
-                      </a:r>
-                    </a:p>
-                  </a:txBody>
-                  <a:tcPr>
-                    <a:solidFill>
-                      <a:srgbClr val="111111"/>
-                    </a:solidFill>
-                  </a:tcPr>
-                </a:tc>
-                <a:tc>
-                  <a:txBody>
-                    <a:bodyPr/>
-                    <a:lstStyle/>
-                    <a:p>
-                      <a:pPr>
-                        <a:defRPr sz="1300" b="0">
-                          <a:solidFill>
-                            <a:srgbClr val="FFFFFF"/>
-                          </a:solidFill>
-                          <a:latin typeface="Play"/>
-                          <a:ea typeface="Play"/>
-                          <a:cs typeface="Play"/>
-                        </a:defRPr>
-                      </a:pPr>
-                      <a:r>
-                        <a:t>11/27</a:t>
-                      </a:r>
-                    </a:p>
-                  </a:txBody>
-                  <a:tcPr>
-                    <a:solidFill>
-                      <a:srgbClr val="111111"/>
-                    </a:solidFill>
-                  </a:tcPr>
-                </a:tc>
-                <a:tc>
-                  <a:txBody>
-                    <a:bodyPr/>
-                    <a:lstStyle/>
-                    <a:p>
-                      <a:pPr>
-                        <a:defRPr sz="1300" b="0">
-                          <a:solidFill>
-                            <a:srgbClr val="FFFFFF"/>
-                          </a:solidFill>
-                          <a:latin typeface="Play"/>
-                          <a:ea typeface="Play"/>
-                          <a:cs typeface="Play"/>
-                        </a:defRPr>
-                      </a:pPr>
-                      <a:r>
-                        <a:t>запросов</a:t>
-                      </a:r>
-                    </a:p>
-                  </a:txBody>
-                  <a:tcPr>
-                    <a:solidFill>
-                      <a:srgbClr val="111111"/>
-                    </a:solidFill>
-                  </a:tcPr>
-                </a:tc>
-              </a:tr>
-              <a:tr h="328206">
-                <a:tc>
-                  <a:txBody>
-                    <a:bodyPr/>
-                    <a:lstStyle/>
-                    <a:p>
-                      <a:pPr>
-                        <a:defRPr sz="1300" b="0">
-                          <a:solidFill>
-                            <a:srgbClr val="FFFFFF"/>
-                          </a:solidFill>
-                          <a:latin typeface="Play"/>
-                          <a:ea typeface="Play"/>
-                          <a:cs typeface="Play"/>
-                        </a:defRPr>
-                      </a:pPr>
-                      <a:r>
-                        <a:t>Срок ожидания</a:t>
+                        <a:t>Ожидание (дней)</a:t>
                       </a:r>
                     </a:p>
                   </a:txBody>
@@ -9808,32 +10381,6 @@
                     </a:solidFill>
                   </a:tcPr>
                 </a:tc>
-                <a:tc>
-                  <a:txBody>
-                    <a:bodyPr/>
-                    <a:lstStyle/>
-                    <a:p>
-                      <a:pPr>
-                        <a:defRPr sz="1300" b="0">
-                          <a:solidFill>
-                            <a:srgbClr val="FFFFFF"/>
-                          </a:solidFill>
-                          <a:latin typeface="Play"/>
-                          <a:ea typeface="Play"/>
-                          <a:cs typeface="Play"/>
-                        </a:defRPr>
-                      </a:pPr>
-                      <a:r>
-                        <a:t>дней</a:t>
-                      </a:r>
-                    </a:p>
-                  </a:txBody>
-                  <a:tcPr>
-                    <a:solidFill>
-                      <a:srgbClr val="111111"/>
-                    </a:solidFill>
-                  </a:tcPr>
-                </a:tc>
               </a:tr>
             </a:tbl>
           </a:graphicData>
@@ -9847,8 +10394,8 @@
         </p:nvSpPr>
         <p:spPr>
           <a:xfrm>
-            <a:off x="429280" y="4251959"/>
-            <a:ext cx="11310884" cy="1645920"/>
+            <a:off x="429280" y="4953000"/>
+            <a:ext cx="11310884" cy="944880"/>
           </a:xfrm>
           <a:prstGeom prst="rect">
             <a:avLst/>
@@ -9883,7 +10430,7 @@
                 <a:ea typeface="Play"/>
                 <a:cs typeface="Play"/>
               </a:rPr>
-              <a:t>• Сборка одной презентации занимает 186 минут</a:t>
+              <a:t>• 12 слайдов</a:t>
             </a:r>
           </a:p>
           <a:p>
@@ -9909,657 +10456,7 @@
                 <a:ea typeface="Play"/>
                 <a:cs typeface="Play"/>
               </a:rPr>
-              <a:t>• Правки после ревью добавляют 74 минуты</a:t>
-            </a:r>
-          </a:p>
-          <a:p>
-            <a:pPr algn="l">
-              <a:spcAft>
-                <a:spcPts val="300"/>
-              </a:spcAft>
-              <a:defRPr sz="1600">
-                <a:solidFill>
-                  <a:srgbClr val="FFFFFF"/>
-                </a:solidFill>
-                <a:latin typeface="Play"/>
-                <a:ea typeface="Play"/>
-                <a:cs typeface="Play"/>
-              </a:defRPr>
-            </a:pPr>
-            <a:r>
-              <a:rPr sz="1600">
-                <a:solidFill>
-                  <a:srgbClr val="FFFFFF"/>
-                </a:solidFill>
-                <a:latin typeface="Play"/>
-                <a:ea typeface="Play"/>
-                <a:cs typeface="Play"/>
-              </a:rPr>
-              <a:t>• 19 из 42 колод нарушают фирменный стиль</a:t>
-            </a:r>
-          </a:p>
-          <a:p>
-            <a:pPr algn="l">
-              <a:spcAft>
-                <a:spcPts val="300"/>
-              </a:spcAft>
-              <a:defRPr sz="1600">
-                <a:solidFill>
-                  <a:srgbClr val="FFFFFF"/>
-                </a:solidFill>
-                <a:latin typeface="Play"/>
-                <a:ea typeface="Play"/>
-                <a:cs typeface="Play"/>
-              </a:defRPr>
-            </a:pPr>
-            <a:r>
-              <a:rPr sz="1600">
-                <a:solidFill>
-                  <a:srgbClr val="FFFFFF"/>
-                </a:solidFill>
-                <a:latin typeface="Play"/>
-                <a:ea typeface="Play"/>
-                <a:cs typeface="Play"/>
-              </a:rPr>
-              <a:t>• Дизайн-отдел из 4 человек обслуживает 11 запросов в неделю</a:t>
-            </a:r>
-          </a:p>
-        </p:txBody>
-      </p:sp>
-    </p:spTree>
-  </p:cSld>
-  <p:clrMapOvr>
-    <a:masterClrMapping/>
-  </p:clrMapOvr>
-</p:sld>
-</file>
-
-<file path=ppt/slides/slide32.xml><?xml version="1.0" encoding="utf-8"?>
-<p:sld xmlns:a="http://schemas.openxmlformats.org/drawingml/2006/main" xmlns:p="http://schemas.openxmlformats.org/presentationml/2006/main" xmlns:r="http://schemas.openxmlformats.org/officeDocument/2006/relationships">
-  <p:cSld>
-    <p:spTree>
-      <p:nvGrpSpPr>
-        <p:cNvPr id="1" name=""/>
-        <p:cNvGrpSpPr/>
-        <p:nvPr/>
-      </p:nvGrpSpPr>
-      <p:grpSpPr/>
-      <p:sp>
-        <p:nvSpPr>
-          <p:cNvPr id="2" name="title"/>
-          <p:cNvSpPr txBox="1"/>
-          <p:nvPr/>
-        </p:nvSpPr>
-        <p:spPr>
-          <a:xfrm>
-            <a:off x="429280" y="424715"/>
-            <a:ext cx="7827264" cy="822960"/>
-          </a:xfrm>
-          <a:prstGeom prst="rect">
-            <a:avLst/>
-          </a:prstGeom>
-          <a:noFill/>
-        </p:spPr>
-        <p:txBody>
-          <a:bodyPr wrap="square" lIns="76200" rIns="76200" tIns="50800" bIns="50800">
-            <a:spAutoFit/>
-          </a:bodyPr>
-          <a:lstStyle/>
-          <a:p>
-            <a:pPr algn="l">
-              <a:spcAft>
-                <a:spcPts val="300"/>
-              </a:spcAft>
-              <a:defRPr sz="3200">
-                <a:solidFill>
-                  <a:srgbClr val="FFFFFF"/>
-                </a:solidFill>
-                <a:latin typeface="Play"/>
-                <a:ea typeface="Play"/>
-                <a:cs typeface="Play"/>
-              </a:defRPr>
-            </a:pPr>
-            <a:r>
-              <a:rPr sz="3200">
-                <a:solidFill>
-                  <a:srgbClr val="FFFFFF"/>
-                </a:solidFill>
-                <a:latin typeface="Play"/>
-                <a:ea typeface="Play"/>
-                <a:cs typeface="Play"/>
-              </a:rPr>
-              <a:t>Предложение</a:t>
-            </a:r>
-          </a:p>
-        </p:txBody>
-      </p:sp>
-      <p:sp>
-        <p:nvSpPr>
-          <p:cNvPr id="3" name="Pentagon 2"/>
-          <p:cNvSpPr/>
-          <p:nvPr/>
-        </p:nvSpPr>
-        <p:spPr>
-          <a:xfrm>
-            <a:off x="429280" y="1809883"/>
-            <a:ext cx="11310884" cy="329298"/>
-          </a:xfrm>
-          <a:prstGeom prst="homePlate">
-            <a:avLst/>
-          </a:prstGeom>
-          <a:solidFill>
-            <a:srgbClr val="0077FF"/>
-          </a:solidFill>
-          <a:ln>
-            <a:noFill/>
-          </a:ln>
-        </p:spPr>
-        <p:style>
-          <a:lnRef idx="1">
-            <a:schemeClr val="accent1"/>
-          </a:lnRef>
-          <a:fillRef idx="3">
-            <a:schemeClr val="accent1"/>
-          </a:fillRef>
-          <a:effectRef idx="2">
-            <a:schemeClr val="accent1"/>
-          </a:effectRef>
-          <a:fontRef idx="minor">
-            <a:schemeClr val="lt1"/>
-          </a:fontRef>
-        </p:style>
-        <p:txBody>
-          <a:bodyPr rtlCol="0" anchor="ctr" wrap="square" lIns="12700" rIns="12700" tIns="12700" bIns="12700"/>
-          <a:lstStyle/>
-          <a:p>
-            <a:pPr algn="ctr">
-              <a:defRPr sz="1400" b="0">
-                <a:solidFill>
-                  <a:srgbClr val="FFFFFF"/>
-                </a:solidFill>
-                <a:latin typeface="Play"/>
-                <a:ea typeface="Play"/>
-                <a:cs typeface="Play"/>
-              </a:defRPr>
-            </a:pPr>
-            <a:r>
-              <a:rPr sz="1400" b="0">
-                <a:solidFill>
-                  <a:srgbClr val="FFFFFF"/>
-                </a:solidFill>
-                <a:latin typeface="Play"/>
-                <a:ea typeface="Play"/>
-                <a:cs typeface="Play"/>
-              </a:rPr>
-              <a:t>Загрузить шаблон</a:t>
-            </a:r>
-          </a:p>
-        </p:txBody>
-      </p:sp>
-      <p:sp>
-        <p:nvSpPr>
-          <p:cNvPr id="4" name="Chevron 3"/>
-          <p:cNvSpPr/>
-          <p:nvPr/>
-        </p:nvSpPr>
-        <p:spPr>
-          <a:xfrm>
-            <a:off x="429280" y="2192788"/>
-            <a:ext cx="11310884" cy="329298"/>
-          </a:xfrm>
-          <a:prstGeom prst="chevron">
-            <a:avLst/>
-          </a:prstGeom>
-          <a:solidFill>
-            <a:srgbClr val="0077FF"/>
-          </a:solidFill>
-          <a:ln>
-            <a:noFill/>
-          </a:ln>
-        </p:spPr>
-        <p:style>
-          <a:lnRef idx="1">
-            <a:schemeClr val="accent1"/>
-          </a:lnRef>
-          <a:fillRef idx="3">
-            <a:schemeClr val="accent1"/>
-          </a:fillRef>
-          <a:effectRef idx="2">
-            <a:schemeClr val="accent1"/>
-          </a:effectRef>
-          <a:fontRef idx="minor">
-            <a:schemeClr val="lt1"/>
-          </a:fontRef>
-        </p:style>
-        <p:txBody>
-          <a:bodyPr rtlCol="0" anchor="ctr" wrap="square" lIns="12700" rIns="12700" tIns="12700" bIns="12700"/>
-          <a:lstStyle/>
-          <a:p>
-            <a:pPr algn="ctr">
-              <a:defRPr sz="1400" b="0">
-                <a:solidFill>
-                  <a:srgbClr val="FFFFFF"/>
-                </a:solidFill>
-                <a:latin typeface="Play"/>
-                <a:ea typeface="Play"/>
-                <a:cs typeface="Play"/>
-              </a:defRPr>
-            </a:pPr>
-            <a:r>
-              <a:rPr sz="1400" b="0">
-                <a:solidFill>
-                  <a:srgbClr val="FFFFFF"/>
-                </a:solidFill>
-                <a:latin typeface="Play"/>
-                <a:ea typeface="Play"/>
-                <a:cs typeface="Play"/>
-              </a:rPr>
-              <a:t>Разобрать дизайн-систему</a:t>
-            </a:r>
-          </a:p>
-        </p:txBody>
-      </p:sp>
-      <p:sp>
-        <p:nvSpPr>
-          <p:cNvPr id="5" name="Chevron 4"/>
-          <p:cNvSpPr/>
-          <p:nvPr/>
-        </p:nvSpPr>
-        <p:spPr>
-          <a:xfrm>
-            <a:off x="429280" y="2575693"/>
-            <a:ext cx="11310884" cy="329298"/>
-          </a:xfrm>
-          <a:prstGeom prst="chevron">
-            <a:avLst/>
-          </a:prstGeom>
-          <a:solidFill>
-            <a:srgbClr val="0077FF"/>
-          </a:solidFill>
-          <a:ln>
-            <a:noFill/>
-          </a:ln>
-        </p:spPr>
-        <p:style>
-          <a:lnRef idx="1">
-            <a:schemeClr val="accent1"/>
-          </a:lnRef>
-          <a:fillRef idx="3">
-            <a:schemeClr val="accent1"/>
-          </a:fillRef>
-          <a:effectRef idx="2">
-            <a:schemeClr val="accent1"/>
-          </a:effectRef>
-          <a:fontRef idx="minor">
-            <a:schemeClr val="lt1"/>
-          </a:fontRef>
-        </p:style>
-        <p:txBody>
-          <a:bodyPr rtlCol="0" anchor="ctr" wrap="square" lIns="12700" rIns="12700" tIns="12700" bIns="12700"/>
-          <a:lstStyle/>
-          <a:p>
-            <a:pPr algn="ctr">
-              <a:defRPr sz="1400" b="0">
-                <a:solidFill>
-                  <a:srgbClr val="FFFFFF"/>
-                </a:solidFill>
-                <a:latin typeface="Play"/>
-                <a:ea typeface="Play"/>
-                <a:cs typeface="Play"/>
-              </a:defRPr>
-            </a:pPr>
-            <a:r>
-              <a:rPr sz="1400" b="0">
-                <a:solidFill>
-                  <a:srgbClr val="FFFFFF"/>
-                </a:solidFill>
-                <a:latin typeface="Play"/>
-                <a:ea typeface="Play"/>
-                <a:cs typeface="Play"/>
-              </a:rPr>
-              <a:t>Сформировать план колоды</a:t>
-            </a:r>
-          </a:p>
-        </p:txBody>
-      </p:sp>
-      <p:sp>
-        <p:nvSpPr>
-          <p:cNvPr id="6" name="Chevron 5"/>
-          <p:cNvSpPr/>
-          <p:nvPr/>
-        </p:nvSpPr>
-        <p:spPr>
-          <a:xfrm>
-            <a:off x="429280" y="2958598"/>
-            <a:ext cx="11310884" cy="329298"/>
-          </a:xfrm>
-          <a:prstGeom prst="chevron">
-            <a:avLst/>
-          </a:prstGeom>
-          <a:solidFill>
-            <a:srgbClr val="0077FF"/>
-          </a:solidFill>
-          <a:ln>
-            <a:noFill/>
-          </a:ln>
-        </p:spPr>
-        <p:style>
-          <a:lnRef idx="1">
-            <a:schemeClr val="accent1"/>
-          </a:lnRef>
-          <a:fillRef idx="3">
-            <a:schemeClr val="accent1"/>
-          </a:fillRef>
-          <a:effectRef idx="2">
-            <a:schemeClr val="accent1"/>
-          </a:effectRef>
-          <a:fontRef idx="minor">
-            <a:schemeClr val="lt1"/>
-          </a:fontRef>
-        </p:style>
-        <p:txBody>
-          <a:bodyPr rtlCol="0" anchor="ctr" wrap="square" lIns="12700" rIns="12700" tIns="12700" bIns="12700"/>
-          <a:lstStyle/>
-          <a:p>
-            <a:pPr algn="ctr">
-              <a:defRPr sz="1400" b="0">
-                <a:solidFill>
-                  <a:srgbClr val="FFFFFF"/>
-                </a:solidFill>
-                <a:latin typeface="Play"/>
-                <a:ea typeface="Play"/>
-                <a:cs typeface="Play"/>
-              </a:defRPr>
-            </a:pPr>
-            <a:r>
-              <a:rPr sz="1400" b="0">
-                <a:solidFill>
-                  <a:srgbClr val="FFFFFF"/>
-                </a:solidFill>
-                <a:latin typeface="Play"/>
-                <a:ea typeface="Play"/>
-                <a:cs typeface="Play"/>
-              </a:rPr>
-              <a:t>Автоматически вёрстать</a:t>
-            </a:r>
-          </a:p>
-        </p:txBody>
-      </p:sp>
-      <p:sp>
-        <p:nvSpPr>
-          <p:cNvPr id="7" name="Chevron 6"/>
-          <p:cNvSpPr/>
-          <p:nvPr/>
-        </p:nvSpPr>
-        <p:spPr>
-          <a:xfrm>
-            <a:off x="429280" y="3341503"/>
-            <a:ext cx="11310884" cy="329298"/>
-          </a:xfrm>
-          <a:prstGeom prst="chevron">
-            <a:avLst/>
-          </a:prstGeom>
-          <a:solidFill>
-            <a:srgbClr val="0077FF"/>
-          </a:solidFill>
-          <a:ln>
-            <a:noFill/>
-          </a:ln>
-        </p:spPr>
-        <p:style>
-          <a:lnRef idx="1">
-            <a:schemeClr val="accent1"/>
-          </a:lnRef>
-          <a:fillRef idx="3">
-            <a:schemeClr val="accent1"/>
-          </a:fillRef>
-          <a:effectRef idx="2">
-            <a:schemeClr val="accent1"/>
-          </a:effectRef>
-          <a:fontRef idx="minor">
-            <a:schemeClr val="lt1"/>
-          </a:fontRef>
-        </p:style>
-        <p:txBody>
-          <a:bodyPr rtlCol="0" anchor="ctr" wrap="square" lIns="12700" rIns="12700" tIns="12700" bIns="12700"/>
-          <a:lstStyle/>
-          <a:p>
-            <a:pPr algn="ctr">
-              <a:defRPr sz="1400" b="0">
-                <a:solidFill>
-                  <a:srgbClr val="FFFFFF"/>
-                </a:solidFill>
-                <a:latin typeface="Play"/>
-                <a:ea typeface="Play"/>
-                <a:cs typeface="Play"/>
-              </a:defRPr>
-            </a:pPr>
-            <a:r>
-              <a:rPr sz="1400" b="0">
-                <a:solidFill>
-                  <a:srgbClr val="FFFFFF"/>
-                </a:solidFill>
-                <a:latin typeface="Play"/>
-                <a:ea typeface="Play"/>
-                <a:cs typeface="Play"/>
-              </a:rPr>
-              <a:t>Провести аудит качества</a:t>
-            </a:r>
-          </a:p>
-        </p:txBody>
-      </p:sp>
-      <p:sp>
-        <p:nvSpPr>
-          <p:cNvPr id="8" name="Chevron 7"/>
-          <p:cNvSpPr/>
-          <p:nvPr/>
-        </p:nvSpPr>
-        <p:spPr>
-          <a:xfrm>
-            <a:off x="429280" y="3724408"/>
-            <a:ext cx="11310884" cy="329298"/>
-          </a:xfrm>
-          <a:prstGeom prst="chevron">
-            <a:avLst/>
-          </a:prstGeom>
-          <a:solidFill>
-            <a:srgbClr val="0077FF"/>
-          </a:solidFill>
-          <a:ln>
-            <a:noFill/>
-          </a:ln>
-        </p:spPr>
-        <p:style>
-          <a:lnRef idx="1">
-            <a:schemeClr val="accent1"/>
-          </a:lnRef>
-          <a:fillRef idx="3">
-            <a:schemeClr val="accent1"/>
-          </a:fillRef>
-          <a:effectRef idx="2">
-            <a:schemeClr val="accent1"/>
-          </a:effectRef>
-          <a:fontRef idx="minor">
-            <a:schemeClr val="lt1"/>
-          </a:fontRef>
-        </p:style>
-        <p:txBody>
-          <a:bodyPr rtlCol="0" anchor="ctr" wrap="square" lIns="12700" rIns="12700" tIns="12700" bIns="12700"/>
-          <a:lstStyle/>
-          <a:p>
-            <a:pPr algn="ctr">
-              <a:defRPr sz="1400" b="0">
-                <a:solidFill>
-                  <a:srgbClr val="FFFFFF"/>
-                </a:solidFill>
-                <a:latin typeface="Play"/>
-                <a:ea typeface="Play"/>
-                <a:cs typeface="Play"/>
-              </a:defRPr>
-            </a:pPr>
-            <a:r>
-              <a:rPr sz="1400" b="0">
-                <a:solidFill>
-                  <a:srgbClr val="FFFFFF"/>
-                </a:solidFill>
-                <a:latin typeface="Play"/>
-                <a:ea typeface="Play"/>
-                <a:cs typeface="Play"/>
-              </a:rPr>
-              <a:t>Экспортировать pptx/pdf/html</a:t>
-            </a:r>
-          </a:p>
-        </p:txBody>
-      </p:sp>
-      <p:sp>
-        <p:nvSpPr>
-          <p:cNvPr id="9" name="body"/>
-          <p:cNvSpPr txBox="1"/>
-          <p:nvPr/>
-        </p:nvSpPr>
-        <p:spPr>
-          <a:xfrm>
-            <a:off x="429280" y="4251959"/>
-            <a:ext cx="11310884" cy="1645920"/>
-          </a:xfrm>
-          <a:prstGeom prst="rect">
-            <a:avLst/>
-          </a:prstGeom>
-          <a:noFill/>
-        </p:spPr>
-        <p:txBody>
-          <a:bodyPr wrap="square" lIns="76200" rIns="76200" tIns="50800" bIns="50800">
-            <a:spAutoFit/>
-          </a:bodyPr>
-          <a:lstStyle/>
-          <a:p>
-            <a:pPr algn="l">
-              <a:spcAft>
-                <a:spcPts val="300"/>
-              </a:spcAft>
-              <a:defRPr sz="1600">
-                <a:solidFill>
-                  <a:srgbClr val="FFFFFF"/>
-                </a:solidFill>
-                <a:latin typeface="Play"/>
-                <a:ea typeface="Play"/>
-                <a:cs typeface="Play"/>
-              </a:defRPr>
-            </a:pPr>
-            <a:r>
-              <a:rPr sz="1600">
-                <a:solidFill>
-                  <a:srgbClr val="FFFFFF"/>
-                </a:solidFill>
-                <a:latin typeface="Play"/>
-                <a:ea typeface="Play"/>
-                <a:cs typeface="Play"/>
-              </a:rPr>
-              <a:t>• Сервис принимает шаблон pptx и материалы</a:t>
-            </a:r>
-          </a:p>
-          <a:p>
-            <a:pPr algn="l">
-              <a:spcAft>
-                <a:spcPts val="300"/>
-              </a:spcAft>
-              <a:defRPr sz="1600">
-                <a:solidFill>
-                  <a:srgbClr val="FFFFFF"/>
-                </a:solidFill>
-                <a:latin typeface="Play"/>
-                <a:ea typeface="Play"/>
-                <a:cs typeface="Play"/>
-              </a:defRPr>
-            </a:pPr>
-            <a:r>
-              <a:rPr sz="1600">
-                <a:solidFill>
-                  <a:srgbClr val="FFFFFF"/>
-                </a:solidFill>
-                <a:latin typeface="Play"/>
-                <a:ea typeface="Play"/>
-                <a:cs typeface="Play"/>
-              </a:rPr>
-              <a:t>• Шаблон преобразуется в дизайн-систему</a:t>
-            </a:r>
-          </a:p>
-          <a:p>
-            <a:pPr algn="l">
-              <a:spcAft>
-                <a:spcPts val="300"/>
-              </a:spcAft>
-              <a:defRPr sz="1600">
-                <a:solidFill>
-                  <a:srgbClr val="FFFFFF"/>
-                </a:solidFill>
-                <a:latin typeface="Play"/>
-                <a:ea typeface="Play"/>
-                <a:cs typeface="Play"/>
-              </a:defRPr>
-            </a:pPr>
-            <a:r>
-              <a:rPr sz="1600">
-                <a:solidFill>
-                  <a:srgbClr val="FFFFFF"/>
-                </a:solidFill>
-                <a:latin typeface="Play"/>
-                <a:ea typeface="Play"/>
-                <a:cs typeface="Play"/>
-              </a:rPr>
-              <a:t>• Автоматически формируется план колоды</a:t>
-            </a:r>
-          </a:p>
-          <a:p>
-            <a:pPr algn="l">
-              <a:spcAft>
-                <a:spcPts val="300"/>
-              </a:spcAft>
-              <a:defRPr sz="1600">
-                <a:solidFill>
-                  <a:srgbClr val="FFFFFF"/>
-                </a:solidFill>
-                <a:latin typeface="Play"/>
-                <a:ea typeface="Play"/>
-                <a:cs typeface="Play"/>
-              </a:defRPr>
-            </a:pPr>
-            <a:r>
-              <a:rPr sz="1600">
-                <a:solidFill>
-                  <a:srgbClr val="FFFFFF"/>
-                </a:solidFill>
-                <a:latin typeface="Play"/>
-                <a:ea typeface="Play"/>
-                <a:cs typeface="Play"/>
-              </a:rPr>
-              <a:t>• Вёрстка выполняется по правилам дизайна</a:t>
-            </a:r>
-          </a:p>
-          <a:p>
-            <a:pPr algn="l">
-              <a:spcAft>
-                <a:spcPts val="300"/>
-              </a:spcAft>
-              <a:defRPr sz="1600">
-                <a:solidFill>
-                  <a:srgbClr val="FFFFFF"/>
-                </a:solidFill>
-                <a:latin typeface="Play"/>
-                <a:ea typeface="Play"/>
-                <a:cs typeface="Play"/>
-              </a:defRPr>
-            </a:pPr>
-            <a:r>
-              <a:rPr sz="1600">
-                <a:solidFill>
-                  <a:srgbClr val="FFFFFF"/>
-                </a:solidFill>
-                <a:latin typeface="Play"/>
-                <a:ea typeface="Play"/>
-                <a:cs typeface="Play"/>
-              </a:rPr>
-              <a:t>• Проводится аудит качества до публикации</a:t>
+              <a:t>• 6 дней ожидания</a:t>
             </a:r>
           </a:p>
         </p:txBody>
@@ -10655,7 +10552,7 @@
         <p:spPr>
           <a:xfrm>
             <a:off x="300817" y="297715"/>
-            <a:ext cx="11566347" cy="5239484"/>
+            <a:ext cx="11566347" cy="5727164"/>
           </a:xfrm>
           <a:prstGeom prst="roundRect">
             <a:avLst/>
@@ -10701,7 +10598,7 @@
         <p:spPr>
           <a:xfrm>
             <a:off x="427817" y="424715"/>
-            <a:ext cx="7827264" cy="822960"/>
+            <a:ext cx="7827264" cy="1183640"/>
           </a:xfrm>
           <a:prstGeom prst="rect">
             <a:avLst/>
@@ -10736,465 +10633,52 @@
                 <a:ea typeface="Play"/>
                 <a:cs typeface="Play"/>
               </a:rPr>
-              <a:t>Ожидаемый эффект</a:t>
+              <a:t>Сервис автоматической вёрстки: как это работает</a:t>
             </a:r>
           </a:p>
         </p:txBody>
       </p:sp>
-      <p:graphicFrame>
-        <p:nvGraphicFramePr>
-          <p:cNvPr id="682" name="Table 681"/>
-          <p:cNvGraphicFramePr>
-            <a:graphicFrameLocks noGrp="1"/>
-          </p:cNvGraphicFramePr>
-          <p:nvPr/>
-        </p:nvGraphicFramePr>
-        <p:xfrm>
-          <a:off x="427817" y="1783080"/>
-          <a:ext cx="11312347" cy="2297430"/>
-        </p:xfrm>
-        <a:graphic>
-          <a:graphicData uri="http://schemas.openxmlformats.org/drawingml/2006/table">
-            <a:tbl>
-              <a:tblPr firstRow="1" bandRow="1">
-                <a:tableStyleId>{5C22544A-7EE6-4342-B048-85BDC9FD1C3A}</a:tableStyleId>
-              </a:tblPr>
-              <a:tblGrid>
-                <a:gridCol w="3770782"/>
-                <a:gridCol w="3770782"/>
-                <a:gridCol w="3770783"/>
-              </a:tblGrid>
-              <a:tr h="459486">
-                <a:tc>
-                  <a:txBody>
-                    <a:bodyPr/>
-                    <a:lstStyle/>
-                    <a:p>
-                      <a:pPr>
-                        <a:defRPr sz="1300" b="1">
-                          <a:solidFill>
-                            <a:srgbClr val="FFFFFF"/>
-                          </a:solidFill>
-                          <a:latin typeface="Play"/>
-                          <a:ea typeface="Play"/>
-                          <a:cs typeface="Play"/>
-                        </a:defRPr>
-                      </a:pPr>
-                      <a:r>
-                        <a:t>Метрика</a:t>
-                      </a:r>
-                    </a:p>
-                  </a:txBody>
-                  <a:tcPr>
-                    <a:solidFill>
-                      <a:srgbClr val="0077FF"/>
-                    </a:solidFill>
-                  </a:tcPr>
-                </a:tc>
-                <a:tc>
-                  <a:txBody>
-                    <a:bodyPr/>
-                    <a:lstStyle/>
-                    <a:p>
-                      <a:pPr>
-                        <a:defRPr sz="1300" b="1">
-                          <a:solidFill>
-                            <a:srgbClr val="FFFFFF"/>
-                          </a:solidFill>
-                          <a:latin typeface="Play"/>
-                          <a:ea typeface="Play"/>
-                          <a:cs typeface="Play"/>
-                        </a:defRPr>
-                      </a:pPr>
-                      <a:r>
-                        <a:t>До</a:t>
-                      </a:r>
-                    </a:p>
-                  </a:txBody>
-                  <a:tcPr>
-                    <a:solidFill>
-                      <a:srgbClr val="0077FF"/>
-                    </a:solidFill>
-                  </a:tcPr>
-                </a:tc>
-                <a:tc>
-                  <a:txBody>
-                    <a:bodyPr/>
-                    <a:lstStyle/>
-                    <a:p>
-                      <a:pPr>
-                        <a:defRPr sz="1300" b="1">
-                          <a:solidFill>
-                            <a:srgbClr val="FFFFFF"/>
-                          </a:solidFill>
-                          <a:latin typeface="Play"/>
-                          <a:ea typeface="Play"/>
-                          <a:cs typeface="Play"/>
-                        </a:defRPr>
-                      </a:pPr>
-                      <a:r>
-                        <a:t>После</a:t>
-                      </a:r>
-                    </a:p>
-                  </a:txBody>
-                  <a:tcPr>
-                    <a:solidFill>
-                      <a:srgbClr val="0077FF"/>
-                    </a:solidFill>
-                  </a:tcPr>
-                </a:tc>
-              </a:tr>
-              <a:tr h="459486">
-                <a:tc>
-                  <a:txBody>
-                    <a:bodyPr/>
-                    <a:lstStyle/>
-                    <a:p>
-                      <a:pPr>
-                        <a:defRPr sz="1300" b="0">
-                          <a:solidFill>
-                            <a:srgbClr val="FFFFFF"/>
-                          </a:solidFill>
-                          <a:latin typeface="Play"/>
-                          <a:ea typeface="Play"/>
-                          <a:cs typeface="Play"/>
-                        </a:defRPr>
-                      </a:pPr>
-                      <a:r>
-                        <a:t>Время сборки</a:t>
-                      </a:r>
-                    </a:p>
-                  </a:txBody>
-                  <a:tcPr>
-                    <a:solidFill>
-                      <a:srgbClr val="111111"/>
-                    </a:solidFill>
-                  </a:tcPr>
-                </a:tc>
-                <a:tc>
-                  <a:txBody>
-                    <a:bodyPr/>
-                    <a:lstStyle/>
-                    <a:p>
-                      <a:pPr>
-                        <a:defRPr sz="1300" b="0">
-                          <a:solidFill>
-                            <a:srgbClr val="FFFFFF"/>
-                          </a:solidFill>
-                          <a:latin typeface="Play"/>
-                          <a:ea typeface="Play"/>
-                          <a:cs typeface="Play"/>
-                        </a:defRPr>
-                      </a:pPr>
-                      <a:r>
-                        <a:t>186</a:t>
-                      </a:r>
-                    </a:p>
-                  </a:txBody>
-                  <a:tcPr>
-                    <a:solidFill>
-                      <a:srgbClr val="111111"/>
-                    </a:solidFill>
-                  </a:tcPr>
-                </a:tc>
-                <a:tc>
-                  <a:txBody>
-                    <a:bodyPr/>
-                    <a:lstStyle/>
-                    <a:p>
-                      <a:pPr>
-                        <a:defRPr sz="1300" b="0">
-                          <a:solidFill>
-                            <a:srgbClr val="FFFFFF"/>
-                          </a:solidFill>
-                          <a:latin typeface="Play"/>
-                          <a:ea typeface="Play"/>
-                          <a:cs typeface="Play"/>
-                        </a:defRPr>
-                      </a:pPr>
-                      <a:r>
-                        <a:t>4</a:t>
-                      </a:r>
-                    </a:p>
-                  </a:txBody>
-                  <a:tcPr>
-                    <a:solidFill>
-                      <a:srgbClr val="111111"/>
-                    </a:solidFill>
-                  </a:tcPr>
-                </a:tc>
-              </a:tr>
-              <a:tr h="459486">
-                <a:tc>
-                  <a:txBody>
-                    <a:bodyPr/>
-                    <a:lstStyle/>
-                    <a:p>
-                      <a:pPr>
-                        <a:defRPr sz="1300" b="0">
-                          <a:solidFill>
-                            <a:srgbClr val="FFFFFF"/>
-                          </a:solidFill>
-                          <a:latin typeface="Play"/>
-                          <a:ea typeface="Play"/>
-                          <a:cs typeface="Play"/>
-                        </a:defRPr>
-                      </a:pPr>
-                      <a:r>
-                        <a:t>Первый вариант</a:t>
-                      </a:r>
-                    </a:p>
-                  </a:txBody>
-                  <a:tcPr>
-                    <a:solidFill>
-                      <a:srgbClr val="111111"/>
-                    </a:solidFill>
-                  </a:tcPr>
-                </a:tc>
-                <a:tc>
-                  <a:txBody>
-                    <a:bodyPr/>
-                    <a:lstStyle/>
-                    <a:p>
-                      <a:pPr>
-                        <a:defRPr sz="1300" b="0">
-                          <a:solidFill>
-                            <a:srgbClr val="FFFFFF"/>
-                          </a:solidFill>
-                          <a:latin typeface="Play"/>
-                          <a:ea typeface="Play"/>
-                          <a:cs typeface="Play"/>
-                        </a:defRPr>
-                      </a:pPr>
-                      <a:r>
-                        <a:t>6</a:t>
-                      </a:r>
-                    </a:p>
-                  </a:txBody>
-                  <a:tcPr>
-                    <a:solidFill>
-                      <a:srgbClr val="111111"/>
-                    </a:solidFill>
-                  </a:tcPr>
-                </a:tc>
-                <a:tc>
-                  <a:txBody>
-                    <a:bodyPr/>
-                    <a:lstStyle/>
-                    <a:p>
-                      <a:pPr>
-                        <a:defRPr sz="1300" b="0">
-                          <a:solidFill>
-                            <a:srgbClr val="FFFFFF"/>
-                          </a:solidFill>
-                          <a:latin typeface="Play"/>
-                          <a:ea typeface="Play"/>
-                          <a:cs typeface="Play"/>
-                        </a:defRPr>
-                      </a:pPr>
-                      <a:r>
-                        <a:t>1</a:t>
-                      </a:r>
-                    </a:p>
-                  </a:txBody>
-                  <a:tcPr>
-                    <a:solidFill>
-                      <a:srgbClr val="111111"/>
-                    </a:solidFill>
-                  </a:tcPr>
-                </a:tc>
-              </a:tr>
-              <a:tr h="459486">
-                <a:tc>
-                  <a:txBody>
-                    <a:bodyPr/>
-                    <a:lstStyle/>
-                    <a:p>
-                      <a:pPr>
-                        <a:defRPr sz="1300" b="0">
-                          <a:solidFill>
-                            <a:srgbClr val="FFFFFF"/>
-                          </a:solidFill>
-                          <a:latin typeface="Play"/>
-                          <a:ea typeface="Play"/>
-                          <a:cs typeface="Play"/>
-                        </a:defRPr>
-                      </a:pPr>
-                      <a:r>
-                        <a:t>Нарушения стиля</a:t>
-                      </a:r>
-                    </a:p>
-                  </a:txBody>
-                  <a:tcPr>
-                    <a:solidFill>
-                      <a:srgbClr val="111111"/>
-                    </a:solidFill>
-                  </a:tcPr>
-                </a:tc>
-                <a:tc>
-                  <a:txBody>
-                    <a:bodyPr/>
-                    <a:lstStyle/>
-                    <a:p>
-                      <a:pPr>
-                        <a:defRPr sz="1300" b="0">
-                          <a:solidFill>
-                            <a:srgbClr val="FFFFFF"/>
-                          </a:solidFill>
-                          <a:latin typeface="Play"/>
-                          <a:ea typeface="Play"/>
-                          <a:cs typeface="Play"/>
-                        </a:defRPr>
-                      </a:pPr>
-                      <a:r>
-                        <a:t>19/42</a:t>
-                      </a:r>
-                    </a:p>
-                  </a:txBody>
-                  <a:tcPr>
-                    <a:solidFill>
-                      <a:srgbClr val="111111"/>
-                    </a:solidFill>
-                  </a:tcPr>
-                </a:tc>
-                <a:tc>
-                  <a:txBody>
-                    <a:bodyPr/>
-                    <a:lstStyle/>
-                    <a:p>
-                      <a:pPr>
-                        <a:defRPr sz="1300" b="0">
-                          <a:solidFill>
-                            <a:srgbClr val="FFFFFF"/>
-                          </a:solidFill>
-                          <a:latin typeface="Play"/>
-                          <a:ea typeface="Play"/>
-                          <a:cs typeface="Play"/>
-                        </a:defRPr>
-                      </a:pPr>
-                      <a:r>
-                        <a:t>2/68</a:t>
-                      </a:r>
-                    </a:p>
-                  </a:txBody>
-                  <a:tcPr>
-                    <a:solidFill>
-                      <a:srgbClr val="111111"/>
-                    </a:solidFill>
-                  </a:tcPr>
-                </a:tc>
-              </a:tr>
-              <a:tr h="459486">
-                <a:tc>
-                  <a:txBody>
-                    <a:bodyPr/>
-                    <a:lstStyle/>
-                    <a:p>
-                      <a:pPr>
-                        <a:defRPr sz="1300" b="0">
-                          <a:solidFill>
-                            <a:srgbClr val="FFFFFF"/>
-                          </a:solidFill>
-                          <a:latin typeface="Play"/>
-                          <a:ea typeface="Play"/>
-                          <a:cs typeface="Play"/>
-                        </a:defRPr>
-                      </a:pPr>
-                      <a:r>
-                        <a:t>Загрузка дизайнеров</a:t>
-                      </a:r>
-                    </a:p>
-                  </a:txBody>
-                  <a:tcPr>
-                    <a:solidFill>
-                      <a:srgbClr val="111111"/>
-                    </a:solidFill>
-                  </a:tcPr>
-                </a:tc>
-                <a:tc>
-                  <a:txBody>
-                    <a:bodyPr/>
-                    <a:lstStyle/>
-                    <a:p>
-                      <a:pPr>
-                        <a:defRPr sz="1300" b="0">
-                          <a:solidFill>
-                            <a:srgbClr val="FFFFFF"/>
-                          </a:solidFill>
-                          <a:latin typeface="Play"/>
-                          <a:ea typeface="Play"/>
-                          <a:cs typeface="Play"/>
-                        </a:defRPr>
-                      </a:pPr>
-                      <a:r>
-                        <a:t>11/нед</a:t>
-                      </a:r>
-                    </a:p>
-                  </a:txBody>
-                  <a:tcPr>
-                    <a:solidFill>
-                      <a:srgbClr val="111111"/>
-                    </a:solidFill>
-                  </a:tcPr>
-                </a:tc>
-                <a:tc>
-                  <a:txBody>
-                    <a:bodyPr/>
-                    <a:lstStyle/>
-                    <a:p>
-                      <a:pPr>
-                        <a:defRPr sz="1300" b="0">
-                          <a:solidFill>
-                            <a:srgbClr val="FFFFFF"/>
-                          </a:solidFill>
-                          <a:latin typeface="Play"/>
-                          <a:ea typeface="Play"/>
-                          <a:cs typeface="Play"/>
-                        </a:defRPr>
-                      </a:pPr>
-                      <a:r>
-                        <a:t>38/нед</a:t>
-                      </a:r>
-                    </a:p>
-                  </a:txBody>
-                  <a:tcPr>
-                    <a:solidFill>
-                      <a:srgbClr val="111111"/>
-                    </a:solidFill>
-                  </a:tcPr>
-                </a:tc>
-              </a:tr>
-            </a:tbl>
-          </a:graphicData>
-        </a:graphic>
-      </p:graphicFrame>
       <p:sp>
         <p:nvSpPr>
-          <p:cNvPr id="683" name="body"/>
-          <p:cNvSpPr txBox="1"/>
+          <p:cNvPr id="682" name="Pentagon 681"/>
+          <p:cNvSpPr/>
           <p:nvPr/>
         </p:nvSpPr>
         <p:spPr>
           <a:xfrm>
-            <a:off x="427817" y="4251959"/>
-            <a:ext cx="11312347" cy="1645920"/>
+            <a:off x="427817" y="1895629"/>
+            <a:ext cx="11312347" cy="580427"/>
           </a:xfrm>
-          <a:prstGeom prst="rect">
+          <a:prstGeom prst="homePlate">
             <a:avLst/>
           </a:prstGeom>
-          <a:noFill/>
+          <a:solidFill>
+            <a:srgbClr val="0077FF"/>
+          </a:solidFill>
+          <a:ln>
+            <a:noFill/>
+          </a:ln>
         </p:spPr>
+        <p:style>
+          <a:lnRef idx="1">
+            <a:schemeClr val="accent1"/>
+          </a:lnRef>
+          <a:fillRef idx="3">
+            <a:schemeClr val="accent1"/>
+          </a:fillRef>
+          <a:effectRef idx="2">
+            <a:schemeClr val="accent1"/>
+          </a:effectRef>
+          <a:fontRef idx="minor">
+            <a:schemeClr val="lt1"/>
+          </a:fontRef>
+        </p:style>
         <p:txBody>
-          <a:bodyPr wrap="square" lIns="76200" rIns="76200" tIns="50800" bIns="50800">
-            <a:spAutoFit/>
-          </a:bodyPr>
+          <a:bodyPr rtlCol="0" anchor="ctr" wrap="square" lIns="12700" rIns="12700" tIns="12700" bIns="12700"/>
           <a:lstStyle/>
           <a:p>
-            <a:pPr algn="l">
-              <a:spcAft>
-                <a:spcPts val="300"/>
-              </a:spcAft>
-              <a:defRPr sz="1600">
+            <a:pPr algn="ctr">
+              <a:defRPr sz="1400" b="0">
                 <a:solidFill>
                   <a:srgbClr val="FFFFFF"/>
                 </a:solidFill>
@@ -11204,7 +10688,7 @@
               </a:defRPr>
             </a:pPr>
             <a:r>
-              <a:rPr sz="1600">
+              <a:rPr sz="1400" b="0">
                 <a:solidFill>
                   <a:srgbClr val="FFFFFF"/>
                 </a:solidFill>
@@ -11212,15 +10696,52 @@
                 <a:ea typeface="Play"/>
                 <a:cs typeface="Play"/>
               </a:rPr>
-              <a:t>• Время сборки колоды сократилось с 186 до 4 минут</a:t>
+              <a:t>Ввод</a:t>
             </a:r>
           </a:p>
+        </p:txBody>
+      </p:sp>
+      <p:sp>
+        <p:nvSpPr>
+          <p:cNvPr id="683" name="Chevron 682"/>
+          <p:cNvSpPr/>
+          <p:nvPr/>
+        </p:nvSpPr>
+        <p:spPr>
+          <a:xfrm>
+            <a:off x="427817" y="2570544"/>
+            <a:ext cx="11312347" cy="580427"/>
+          </a:xfrm>
+          <a:prstGeom prst="chevron">
+            <a:avLst/>
+          </a:prstGeom>
+          <a:solidFill>
+            <a:srgbClr val="0077FF"/>
+          </a:solidFill>
+          <a:ln>
+            <a:noFill/>
+          </a:ln>
+        </p:spPr>
+        <p:style>
+          <a:lnRef idx="1">
+            <a:schemeClr val="accent1"/>
+          </a:lnRef>
+          <a:fillRef idx="3">
+            <a:schemeClr val="accent1"/>
+          </a:fillRef>
+          <a:effectRef idx="2">
+            <a:schemeClr val="accent1"/>
+          </a:effectRef>
+          <a:fontRef idx="minor">
+            <a:schemeClr val="lt1"/>
+          </a:fontRef>
+        </p:style>
+        <p:txBody>
+          <a:bodyPr rtlCol="0" anchor="ctr" wrap="square" lIns="12700" rIns="12700" tIns="12700" bIns="12700"/>
+          <a:lstStyle/>
           <a:p>
-            <a:pPr algn="l">
-              <a:spcAft>
-                <a:spcPts val="300"/>
-              </a:spcAft>
-              <a:defRPr sz="1600">
+            <a:pPr algn="ctr">
+              <a:defRPr sz="1400" b="0">
                 <a:solidFill>
                   <a:srgbClr val="FFFFFF"/>
                 </a:solidFill>
@@ -11230,7 +10751,7 @@
               </a:defRPr>
             </a:pPr>
             <a:r>
-              <a:rPr sz="1600">
+              <a:rPr sz="1400" b="0">
                 <a:solidFill>
                   <a:srgbClr val="FFFFFF"/>
                 </a:solidFill>
@@ -11238,15 +10759,52 @@
                 <a:ea typeface="Play"/>
                 <a:cs typeface="Play"/>
               </a:rPr>
-              <a:t>• Первый готовый вариант появился за 1 день вместо 6</a:t>
+              <a:t>Парсинг</a:t>
             </a:r>
           </a:p>
+        </p:txBody>
+      </p:sp>
+      <p:sp>
+        <p:nvSpPr>
+          <p:cNvPr id="684" name="Chevron 683"/>
+          <p:cNvSpPr/>
+          <p:nvPr/>
+        </p:nvSpPr>
+        <p:spPr>
+          <a:xfrm>
+            <a:off x="427817" y="3245460"/>
+            <a:ext cx="11312347" cy="580427"/>
+          </a:xfrm>
+          <a:prstGeom prst="chevron">
+            <a:avLst/>
+          </a:prstGeom>
+          <a:solidFill>
+            <a:srgbClr val="0077FF"/>
+          </a:solidFill>
+          <a:ln>
+            <a:noFill/>
+          </a:ln>
+        </p:spPr>
+        <p:style>
+          <a:lnRef idx="1">
+            <a:schemeClr val="accent1"/>
+          </a:lnRef>
+          <a:fillRef idx="3">
+            <a:schemeClr val="accent1"/>
+          </a:fillRef>
+          <a:effectRef idx="2">
+            <a:schemeClr val="accent1"/>
+          </a:effectRef>
+          <a:fontRef idx="minor">
+            <a:schemeClr val="lt1"/>
+          </a:fontRef>
+        </p:style>
+        <p:txBody>
+          <a:bodyPr rtlCol="0" anchor="ctr" wrap="square" lIns="12700" rIns="12700" tIns="12700" bIns="12700"/>
+          <a:lstStyle/>
           <a:p>
-            <a:pPr algn="l">
-              <a:spcAft>
-                <a:spcPts val="300"/>
-              </a:spcAft>
-              <a:defRPr sz="1600">
+            <a:pPr algn="ctr">
+              <a:defRPr sz="1400" b="0">
                 <a:solidFill>
                   <a:srgbClr val="FFFFFF"/>
                 </a:solidFill>
@@ -11256,7 +10814,7 @@
               </a:defRPr>
             </a:pPr>
             <a:r>
-              <a:rPr sz="1600">
+              <a:rPr sz="1400" b="0">
                 <a:solidFill>
                   <a:srgbClr val="FFFFFF"/>
                 </a:solidFill>
@@ -11264,15 +10822,52 @@
                 <a:ea typeface="Play"/>
                 <a:cs typeface="Play"/>
               </a:rPr>
-              <a:t>• Нарушения стиля уменьшились до 2 из 68 колод</a:t>
+              <a:t>Дизайн-система</a:t>
             </a:r>
           </a:p>
+        </p:txBody>
+      </p:sp>
+      <p:sp>
+        <p:nvSpPr>
+          <p:cNvPr id="685" name="Chevron 684"/>
+          <p:cNvSpPr/>
+          <p:nvPr/>
+        </p:nvSpPr>
+        <p:spPr>
+          <a:xfrm>
+            <a:off x="427817" y="3920376"/>
+            <a:ext cx="11312347" cy="580427"/>
+          </a:xfrm>
+          <a:prstGeom prst="chevron">
+            <a:avLst/>
+          </a:prstGeom>
+          <a:solidFill>
+            <a:srgbClr val="0077FF"/>
+          </a:solidFill>
+          <a:ln>
+            <a:noFill/>
+          </a:ln>
+        </p:spPr>
+        <p:style>
+          <a:lnRef idx="1">
+            <a:schemeClr val="accent1"/>
+          </a:lnRef>
+          <a:fillRef idx="3">
+            <a:schemeClr val="accent1"/>
+          </a:fillRef>
+          <a:effectRef idx="2">
+            <a:schemeClr val="accent1"/>
+          </a:effectRef>
+          <a:fontRef idx="minor">
+            <a:schemeClr val="lt1"/>
+          </a:fontRef>
+        </p:style>
+        <p:txBody>
+          <a:bodyPr rtlCol="0" anchor="ctr" wrap="square" lIns="12700" rIns="12700" tIns="12700" bIns="12700"/>
+          <a:lstStyle/>
           <a:p>
-            <a:pPr algn="l">
-              <a:spcAft>
-                <a:spcPts val="300"/>
-              </a:spcAft>
-              <a:defRPr sz="1600">
+            <a:pPr algn="ctr">
+              <a:defRPr sz="1400" b="0">
                 <a:solidFill>
                   <a:srgbClr val="FFFFFF"/>
                 </a:solidFill>
@@ -11282,7 +10877,7 @@
               </a:defRPr>
             </a:pPr>
             <a:r>
-              <a:rPr sz="1600">
+              <a:rPr sz="1400" b="0">
                 <a:solidFill>
                   <a:srgbClr val="FFFFFF"/>
                 </a:solidFill>
@@ -11290,7 +10885,133 @@
                 <a:ea typeface="Play"/>
                 <a:cs typeface="Play"/>
               </a:rPr>
-              <a:t>• Дизайнеры закрыли 38 запросов вместо 11 в неделю</a:t>
+              <a:t>Вёрстка</a:t>
+            </a:r>
+          </a:p>
+        </p:txBody>
+      </p:sp>
+      <p:sp>
+        <p:nvSpPr>
+          <p:cNvPr id="686" name="Chevron 685"/>
+          <p:cNvSpPr/>
+          <p:nvPr/>
+        </p:nvSpPr>
+        <p:spPr>
+          <a:xfrm>
+            <a:off x="427817" y="4595291"/>
+            <a:ext cx="11312347" cy="580427"/>
+          </a:xfrm>
+          <a:prstGeom prst="chevron">
+            <a:avLst/>
+          </a:prstGeom>
+          <a:solidFill>
+            <a:srgbClr val="0077FF"/>
+          </a:solidFill>
+          <a:ln>
+            <a:noFill/>
+          </a:ln>
+        </p:spPr>
+        <p:style>
+          <a:lnRef idx="1">
+            <a:schemeClr val="accent1"/>
+          </a:lnRef>
+          <a:fillRef idx="3">
+            <a:schemeClr val="accent1"/>
+          </a:fillRef>
+          <a:effectRef idx="2">
+            <a:schemeClr val="accent1"/>
+          </a:effectRef>
+          <a:fontRef idx="minor">
+            <a:schemeClr val="lt1"/>
+          </a:fontRef>
+        </p:style>
+        <p:txBody>
+          <a:bodyPr rtlCol="0" anchor="ctr" wrap="square" lIns="12700" rIns="12700" tIns="12700" bIns="12700"/>
+          <a:lstStyle/>
+          <a:p>
+            <a:pPr algn="ctr">
+              <a:defRPr sz="1400" b="0">
+                <a:solidFill>
+                  <a:srgbClr val="FFFFFF"/>
+                </a:solidFill>
+                <a:latin typeface="Play"/>
+                <a:ea typeface="Play"/>
+                <a:cs typeface="Play"/>
+              </a:defRPr>
+            </a:pPr>
+            <a:r>
+              <a:rPr sz="1400" b="0">
+                <a:solidFill>
+                  <a:srgbClr val="FFFFFF"/>
+                </a:solidFill>
+                <a:latin typeface="Play"/>
+                <a:ea typeface="Play"/>
+                <a:cs typeface="Play"/>
+              </a:rPr>
+              <a:t>Аудит</a:t>
+            </a:r>
+          </a:p>
+        </p:txBody>
+      </p:sp>
+      <p:sp>
+        <p:nvSpPr>
+          <p:cNvPr id="687" name="Chevron 686"/>
+          <p:cNvSpPr/>
+          <p:nvPr/>
+        </p:nvSpPr>
+        <p:spPr>
+          <a:xfrm>
+            <a:off x="427817" y="5270207"/>
+            <a:ext cx="11312347" cy="580427"/>
+          </a:xfrm>
+          <a:prstGeom prst="chevron">
+            <a:avLst/>
+          </a:prstGeom>
+          <a:solidFill>
+            <a:srgbClr val="0077FF"/>
+          </a:solidFill>
+          <a:ln>
+            <a:noFill/>
+          </a:ln>
+        </p:spPr>
+        <p:style>
+          <a:lnRef idx="1">
+            <a:schemeClr val="accent1"/>
+          </a:lnRef>
+          <a:fillRef idx="3">
+            <a:schemeClr val="accent1"/>
+          </a:fillRef>
+          <a:effectRef idx="2">
+            <a:schemeClr val="accent1"/>
+          </a:effectRef>
+          <a:fontRef idx="minor">
+            <a:schemeClr val="lt1"/>
+          </a:fontRef>
+        </p:style>
+        <p:txBody>
+          <a:bodyPr rtlCol="0" anchor="ctr" wrap="square" lIns="12700" rIns="12700" tIns="12700" bIns="12700"/>
+          <a:lstStyle/>
+          <a:p>
+            <a:pPr algn="ctr">
+              <a:defRPr sz="1400" b="0">
+                <a:solidFill>
+                  <a:srgbClr val="FFFFFF"/>
+                </a:solidFill>
+                <a:latin typeface="Play"/>
+                <a:ea typeface="Play"/>
+                <a:cs typeface="Play"/>
+              </a:defRPr>
+            </a:pPr>
+            <a:r>
+              <a:rPr sz="1400" b="0">
+                <a:solidFill>
+                  <a:srgbClr val="FFFFFF"/>
+                </a:solidFill>
+                <a:latin typeface="Play"/>
+                <a:ea typeface="Play"/>
+                <a:cs typeface="Play"/>
+              </a:rPr>
+              <a:t>Экспорт</a:t>
             </a:r>
           </a:p>
         </p:txBody>
@@ -11376,7 +11097,7 @@
         <p:spPr>
           <a:xfrm>
             <a:off x="429280" y="424715"/>
-            <a:ext cx="7827264" cy="822960"/>
+            <a:ext cx="7827264" cy="1183640"/>
           </a:xfrm>
           <a:prstGeom prst="rect">
             <a:avLst/>
@@ -11411,331 +11132,21 @@
                 <a:ea typeface="Play"/>
                 <a:cs typeface="Play"/>
               </a:rPr>
-              <a:t>Ресурсы и сроки</a:t>
+              <a:t>Сервис принимает шаблон pptx и материалы</a:t>
             </a:r>
           </a:p>
         </p:txBody>
       </p:sp>
       <p:sp>
         <p:nvSpPr>
-          <p:cNvPr id="623" name="Rectangle 622"/>
-          <p:cNvSpPr/>
-          <p:nvPr/>
-        </p:nvSpPr>
-        <p:spPr>
-          <a:xfrm>
-            <a:off x="429280" y="2839897"/>
-            <a:ext cx="11310884" cy="68922"/>
-          </a:xfrm>
-          <a:prstGeom prst="rect">
-            <a:avLst/>
-          </a:prstGeom>
-          <a:solidFill>
-            <a:srgbClr val="0077FF"/>
-          </a:solidFill>
-          <a:ln>
-            <a:noFill/>
-          </a:ln>
-        </p:spPr>
-        <p:style>
-          <a:lnRef idx="1">
-            <a:schemeClr val="accent1"/>
-          </a:lnRef>
-          <a:fillRef idx="3">
-            <a:schemeClr val="accent1"/>
-          </a:fillRef>
-          <a:effectRef idx="2">
-            <a:schemeClr val="accent1"/>
-          </a:effectRef>
-          <a:fontRef idx="minor">
-            <a:schemeClr val="lt1"/>
-          </a:fontRef>
-        </p:style>
-        <p:txBody>
-          <a:bodyPr rtlCol="0" anchor="ctr"/>
-          <a:lstStyle/>
-          <a:p>
-            <a:pPr algn="ctr"/>
-          </a:p>
-        </p:txBody>
-      </p:sp>
-      <p:sp>
-        <p:nvSpPr>
-          <p:cNvPr id="624" name="Oval 623"/>
-          <p:cNvSpPr/>
-          <p:nvPr/>
-        </p:nvSpPr>
-        <p:spPr>
-          <a:xfrm>
-            <a:off x="2061710" y="2621641"/>
-            <a:ext cx="505434" cy="505434"/>
-          </a:xfrm>
-          <a:prstGeom prst="ellipse">
-            <a:avLst/>
-          </a:prstGeom>
-          <a:solidFill>
-            <a:srgbClr val="0077FF"/>
-          </a:solidFill>
-          <a:ln>
-            <a:noFill/>
-          </a:ln>
-        </p:spPr>
-        <p:style>
-          <a:lnRef idx="1">
-            <a:schemeClr val="accent1"/>
-          </a:lnRef>
-          <a:fillRef idx="3">
-            <a:schemeClr val="accent1"/>
-          </a:fillRef>
-          <a:effectRef idx="2">
-            <a:schemeClr val="accent1"/>
-          </a:effectRef>
-          <a:fontRef idx="minor">
-            <a:schemeClr val="lt1"/>
-          </a:fontRef>
-        </p:style>
-        <p:txBody>
-          <a:bodyPr rtlCol="0" anchor="ctr"/>
-          <a:lstStyle/>
-          <a:p>
-            <a:pPr algn="ctr"/>
-          </a:p>
-        </p:txBody>
-      </p:sp>
-      <p:sp>
-        <p:nvSpPr>
-          <p:cNvPr id="625" name="TextBox 624"/>
+          <p:cNvPr id="623" name="lead"/>
           <p:cNvSpPr txBox="1"/>
           <p:nvPr/>
         </p:nvSpPr>
         <p:spPr>
           <a:xfrm>
-            <a:off x="429280" y="1783080"/>
-            <a:ext cx="5655442" cy="873023"/>
-          </a:xfrm>
-          <a:prstGeom prst="rect">
-            <a:avLst/>
-          </a:prstGeom>
-          <a:noFill/>
-        </p:spPr>
-        <p:txBody>
-          <a:bodyPr wrap="square" lIns="12700" rIns="12700" tIns="12700" bIns="12700">
-            <a:spAutoFit/>
-          </a:bodyPr>
-          <a:lstStyle/>
-          <a:p>
-            <a:pPr algn="ctr">
-              <a:defRPr sz="1400" b="0">
-                <a:solidFill>
-                  <a:srgbClr val="FFFFFF"/>
-                </a:solidFill>
-                <a:latin typeface="Play"/>
-                <a:ea typeface="Play"/>
-                <a:cs typeface="Play"/>
-              </a:defRPr>
-            </a:pPr>
-            <a:r>
-              <a:rPr sz="1400" b="0">
-                <a:solidFill>
-                  <a:srgbClr val="FFFFFF"/>
-                </a:solidFill>
-                <a:latin typeface="Play"/>
-                <a:ea typeface="Play"/>
-                <a:cs typeface="Play"/>
-              </a:rPr>
-              <a:t>Q3 2026: подключение 4 команд</a:t>
-            </a:r>
-          </a:p>
-        </p:txBody>
-      </p:sp>
-      <p:sp>
-        <p:nvSpPr>
-          <p:cNvPr id="626" name="Oval 625"/>
-          <p:cNvSpPr/>
-          <p:nvPr/>
-        </p:nvSpPr>
-        <p:spPr>
-          <a:xfrm>
-            <a:off x="5832004" y="2621641"/>
-            <a:ext cx="505434" cy="505434"/>
-          </a:xfrm>
-          <a:prstGeom prst="ellipse">
-            <a:avLst/>
-          </a:prstGeom>
-          <a:solidFill>
-            <a:srgbClr val="0077FF"/>
-          </a:solidFill>
-          <a:ln>
-            <a:noFill/>
-          </a:ln>
-        </p:spPr>
-        <p:style>
-          <a:lnRef idx="1">
-            <a:schemeClr val="accent1"/>
-          </a:lnRef>
-          <a:fillRef idx="3">
-            <a:schemeClr val="accent1"/>
-          </a:fillRef>
-          <a:effectRef idx="2">
-            <a:schemeClr val="accent1"/>
-          </a:effectRef>
-          <a:fontRef idx="minor">
-            <a:schemeClr val="lt1"/>
-          </a:fontRef>
-        </p:style>
-        <p:txBody>
-          <a:bodyPr rtlCol="0" anchor="ctr"/>
-          <a:lstStyle/>
-          <a:p>
-            <a:pPr algn="ctr"/>
-          </a:p>
-        </p:txBody>
-      </p:sp>
-      <p:sp>
-        <p:nvSpPr>
-          <p:cNvPr id="627" name="TextBox 626"/>
-          <p:cNvSpPr txBox="1"/>
-          <p:nvPr/>
-        </p:nvSpPr>
-        <p:spPr>
-          <a:xfrm>
-            <a:off x="3257001" y="3345332"/>
-            <a:ext cx="5655442" cy="873023"/>
-          </a:xfrm>
-          <a:prstGeom prst="rect">
-            <a:avLst/>
-          </a:prstGeom>
-          <a:noFill/>
-        </p:spPr>
-        <p:txBody>
-          <a:bodyPr wrap="square" lIns="12700" rIns="12700" tIns="12700" bIns="12700">
-            <a:spAutoFit/>
-          </a:bodyPr>
-          <a:lstStyle/>
-          <a:p>
-            <a:pPr algn="ctr">
-              <a:defRPr sz="1400" b="0">
-                <a:solidFill>
-                  <a:srgbClr val="FFFFFF"/>
-                </a:solidFill>
-                <a:latin typeface="Play"/>
-                <a:ea typeface="Play"/>
-                <a:cs typeface="Play"/>
-              </a:defRPr>
-            </a:pPr>
-            <a:r>
-              <a:rPr sz="1400" b="0">
-                <a:solidFill>
-                  <a:srgbClr val="FFFFFF"/>
-                </a:solidFill>
-                <a:latin typeface="Play"/>
-                <a:ea typeface="Play"/>
-                <a:cs typeface="Play"/>
-              </a:rPr>
-              <a:t>Q4 2026: доступ для всей компании</a:t>
-            </a:r>
-          </a:p>
-        </p:txBody>
-      </p:sp>
-      <p:sp>
-        <p:nvSpPr>
-          <p:cNvPr id="628" name="Oval 627"/>
-          <p:cNvSpPr/>
-          <p:nvPr/>
-        </p:nvSpPr>
-        <p:spPr>
-          <a:xfrm>
-            <a:off x="9602299" y="2621641"/>
-            <a:ext cx="505434" cy="505434"/>
-          </a:xfrm>
-          <a:prstGeom prst="ellipse">
-            <a:avLst/>
-          </a:prstGeom>
-          <a:solidFill>
-            <a:srgbClr val="0077FF"/>
-          </a:solidFill>
-          <a:ln>
-            <a:noFill/>
-          </a:ln>
-        </p:spPr>
-        <p:style>
-          <a:lnRef idx="1">
-            <a:schemeClr val="accent1"/>
-          </a:lnRef>
-          <a:fillRef idx="3">
-            <a:schemeClr val="accent1"/>
-          </a:fillRef>
-          <a:effectRef idx="2">
-            <a:schemeClr val="accent1"/>
-          </a:effectRef>
-          <a:fontRef idx="minor">
-            <a:schemeClr val="lt1"/>
-          </a:fontRef>
-        </p:style>
-        <p:txBody>
-          <a:bodyPr rtlCol="0" anchor="ctr"/>
-          <a:lstStyle/>
-          <a:p>
-            <a:pPr algn="ctr"/>
-          </a:p>
-        </p:txBody>
-      </p:sp>
-      <p:sp>
-        <p:nvSpPr>
-          <p:cNvPr id="629" name="TextBox 628"/>
-          <p:cNvSpPr txBox="1"/>
-          <p:nvPr/>
-        </p:nvSpPr>
-        <p:spPr>
-          <a:xfrm>
-            <a:off x="6084722" y="1783080"/>
-            <a:ext cx="5655442" cy="873023"/>
-          </a:xfrm>
-          <a:prstGeom prst="rect">
-            <a:avLst/>
-          </a:prstGeom>
-          <a:noFill/>
-        </p:spPr>
-        <p:txBody>
-          <a:bodyPr wrap="square" lIns="12700" rIns="12700" tIns="12700" bIns="12700">
-            <a:spAutoFit/>
-          </a:bodyPr>
-          <a:lstStyle/>
-          <a:p>
-            <a:pPr algn="ctr">
-              <a:defRPr sz="1400" b="0">
-                <a:solidFill>
-                  <a:srgbClr val="FFFFFF"/>
-                </a:solidFill>
-                <a:latin typeface="Play"/>
-                <a:ea typeface="Play"/>
-                <a:cs typeface="Play"/>
-              </a:defRPr>
-            </a:pPr>
-            <a:r>
-              <a:rPr sz="1400" b="0">
-                <a:solidFill>
-                  <a:srgbClr val="FFFFFF"/>
-                </a:solidFill>
-                <a:latin typeface="Play"/>
-                <a:ea typeface="Play"/>
-                <a:cs typeface="Play"/>
-              </a:rPr>
-              <a:t>Q1 2027: генерация иллюстраций</a:t>
-            </a:r>
-          </a:p>
-        </p:txBody>
-      </p:sp>
-      <p:sp>
-        <p:nvSpPr>
-          <p:cNvPr id="630" name="body"/>
-          <p:cNvSpPr txBox="1"/>
-          <p:nvPr/>
-        </p:nvSpPr>
-        <p:spPr>
-          <a:xfrm>
-            <a:off x="429280" y="4251959"/>
-            <a:ext cx="11310884" cy="1645920"/>
+            <a:off x="429280" y="1745515"/>
+            <a:ext cx="7827264" cy="1809556"/>
           </a:xfrm>
           <a:prstGeom prst="rect">
             <a:avLst/>
@@ -11752,7 +11163,7 @@
               <a:spcAft>
                 <a:spcPts val="300"/>
               </a:spcAft>
-              <a:defRPr sz="2000">
+              <a:defRPr sz="4000">
                 <a:solidFill>
                   <a:srgbClr val="FFFFFF"/>
                 </a:solidFill>
@@ -11762,7 +11173,7 @@
               </a:defRPr>
             </a:pPr>
             <a:r>
-              <a:rPr sz="2000">
+              <a:rPr sz="4000">
                 <a:solidFill>
                   <a:srgbClr val="FFFFFF"/>
                 </a:solidFill>
@@ -11770,15 +11181,38 @@
                 <a:ea typeface="Play"/>
                 <a:cs typeface="Play"/>
               </a:rPr>
-              <a:t>• Сервис работает на 2 vCPU / 2 ГБ RAM</a:t>
+              <a:t>Разбирает дизайн-систему</a:t>
             </a:r>
           </a:p>
+        </p:txBody>
+      </p:sp>
+      <p:sp>
+        <p:nvSpPr>
+          <p:cNvPr id="624" name="body"/>
+          <p:cNvSpPr txBox="1"/>
+          <p:nvPr/>
+        </p:nvSpPr>
+        <p:spPr>
+          <a:xfrm>
+            <a:off x="429280" y="3804214"/>
+            <a:ext cx="7827264" cy="2093665"/>
+          </a:xfrm>
+          <a:prstGeom prst="rect">
+            <a:avLst/>
+          </a:prstGeom>
+          <a:noFill/>
+        </p:spPr>
+        <p:txBody>
+          <a:bodyPr wrap="square" lIns="76200" rIns="76200" tIns="50800" bIns="50800">
+            <a:spAutoFit/>
+          </a:bodyPr>
+          <a:lstStyle/>
           <a:p>
             <a:pPr algn="l">
               <a:spcAft>
                 <a:spcPts val="300"/>
               </a:spcAft>
-              <a:defRPr sz="2000">
+              <a:defRPr sz="2800">
                 <a:solidFill>
                   <a:srgbClr val="FFFFFF"/>
                 </a:solidFill>
@@ -11788,7 +11222,7 @@
               </a:defRPr>
             </a:pPr>
             <a:r>
-              <a:rPr sz="2000">
+              <a:rPr sz="2800">
                 <a:solidFill>
                   <a:srgbClr val="FFFFFF"/>
                 </a:solidFill>
@@ -11796,7 +11230,7 @@
                 <a:ea typeface="Play"/>
                 <a:cs typeface="Play"/>
               </a:rPr>
-              <a:t>• Инференс gpt-oss-20b стоит 1 400 рублей за 6 недель</a:t>
+              <a:t>• Собирает план колоды</a:t>
             </a:r>
           </a:p>
           <a:p>
@@ -11804,7 +11238,7 @@
               <a:spcAft>
                 <a:spcPts val="300"/>
               </a:spcAft>
-              <a:defRPr sz="2000">
+              <a:defRPr sz="2800">
                 <a:solidFill>
                   <a:srgbClr val="FFFFFF"/>
                 </a:solidFill>
@@ -11814,7 +11248,7 @@
               </a:defRPr>
             </a:pPr>
             <a:r>
-              <a:rPr sz="2000">
+              <a:rPr sz="2800">
                 <a:solidFill>
                   <a:srgbClr val="FFFFFF"/>
                 </a:solidFill>
@@ -11822,7 +11256,33 @@
                 <a:ea typeface="Play"/>
                 <a:cs typeface="Play"/>
               </a:rPr>
-              <a:t>• План запуска: Q3 2026 подключение 4 команд, Q4 2026 доступ компании, Q1 2027 генерация иллюстраций</a:t>
+              <a:t>• Вёрстка по системе</a:t>
+            </a:r>
+          </a:p>
+          <a:p>
+            <a:pPr algn="l">
+              <a:spcAft>
+                <a:spcPts val="300"/>
+              </a:spcAft>
+              <a:defRPr sz="2800">
+                <a:solidFill>
+                  <a:srgbClr val="FFFFFF"/>
+                </a:solidFill>
+                <a:latin typeface="Play"/>
+                <a:ea typeface="Play"/>
+                <a:cs typeface="Play"/>
+              </a:defRPr>
+            </a:pPr>
+            <a:r>
+              <a:rPr sz="2800">
+                <a:solidFill>
+                  <a:srgbClr val="FFFFFF"/>
+                </a:solidFill>
+                <a:latin typeface="Play"/>
+                <a:ea typeface="Play"/>
+                <a:cs typeface="Play"/>
+              </a:rPr>
+              <a:t>• Аудит качества</a:t>
             </a:r>
           </a:p>
         </p:txBody>
@@ -11854,7 +11314,7 @@
         <p:spPr>
           <a:xfrm>
             <a:off x="429280" y="424715"/>
-            <a:ext cx="7827264" cy="822960"/>
+            <a:ext cx="7827264" cy="1183640"/>
           </a:xfrm>
           <a:prstGeom prst="rect">
             <a:avLst/>
@@ -11871,7 +11331,7 @@
               <a:spcAft>
                 <a:spcPts val="300"/>
               </a:spcAft>
-              <a:defRPr sz="4000">
+              <a:defRPr sz="3200">
                 <a:solidFill>
                   <a:srgbClr val="FFFFFF"/>
                 </a:solidFill>
@@ -11881,7 +11341,7 @@
               </a:defRPr>
             </a:pPr>
             <a:r>
-              <a:rPr sz="4000">
+              <a:rPr sz="3200">
                 <a:solidFill>
                   <a:srgbClr val="FFFFFF"/>
                 </a:solidFill>
@@ -11889,187 +11349,29 @@
                 <a:ea typeface="Play"/>
                 <a:cs typeface="Play"/>
               </a:rPr>
-              <a:t>План пилота</a:t>
+              <a:t>Сокращение времени сборки до 4 мин</a:t>
             </a:r>
           </a:p>
         </p:txBody>
       </p:sp>
-      <p:sp>
-        <p:nvSpPr>
-          <p:cNvPr id="3" name="lead"/>
-          <p:cNvSpPr txBox="1"/>
+      <p:graphicFrame>
+        <p:nvGraphicFramePr>
+          <p:cNvPr id="3" name="Chart 2"/>
+          <p:cNvGraphicFramePr>
+            <a:graphicFrameLocks noGrp="1"/>
+          </p:cNvGraphicFramePr>
           <p:nvPr/>
-        </p:nvSpPr>
-        <p:spPr>
-          <a:xfrm>
-            <a:off x="429280" y="1592290"/>
-            <a:ext cx="7827264" cy="1447534"/>
-          </a:xfrm>
-          <a:prstGeom prst="rect">
-            <a:avLst/>
-          </a:prstGeom>
-          <a:noFill/>
-        </p:spPr>
-        <p:txBody>
-          <a:bodyPr wrap="square" lIns="76200" rIns="76200" tIns="50800" bIns="50800">
-            <a:spAutoFit/>
-          </a:bodyPr>
-          <a:lstStyle/>
-          <a:p>
-            <a:pPr algn="ctr">
-              <a:spcAft>
-                <a:spcPts val="300"/>
-              </a:spcAft>
-              <a:defRPr sz="4000">
-                <a:solidFill>
-                  <a:srgbClr val="FFFFFF"/>
-                </a:solidFill>
-                <a:latin typeface="Play"/>
-                <a:ea typeface="Play"/>
-                <a:cs typeface="Play"/>
-              </a:defRPr>
-            </a:pPr>
-            <a:r>
-              <a:rPr sz="4000">
-                <a:solidFill>
-                  <a:srgbClr val="FFFFFF"/>
-                </a:solidFill>
-                <a:latin typeface="Play"/>
-                <a:ea typeface="Play"/>
-                <a:cs typeface="Play"/>
-              </a:rPr>
-              <a:t>Пилот длился 6 недель на двух командах</a:t>
-            </a:r>
-          </a:p>
-        </p:txBody>
-      </p:sp>
-      <p:sp>
-        <p:nvSpPr>
-          <p:cNvPr id="4" name="body"/>
-          <p:cNvSpPr txBox="1"/>
-          <p:nvPr/>
-        </p:nvSpPr>
-        <p:spPr>
-          <a:xfrm>
-            <a:off x="429280" y="3290703"/>
-            <a:ext cx="7827264" cy="2482909"/>
-          </a:xfrm>
-          <a:prstGeom prst="rect">
-            <a:avLst/>
-          </a:prstGeom>
-          <a:noFill/>
-        </p:spPr>
-        <p:txBody>
-          <a:bodyPr wrap="square" lIns="76200" rIns="76200" tIns="50800" bIns="50800">
-            <a:spAutoFit/>
-          </a:bodyPr>
-          <a:lstStyle/>
-          <a:p>
-            <a:pPr algn="l">
-              <a:spcAft>
-                <a:spcPts val="300"/>
-              </a:spcAft>
-              <a:defRPr sz="2800">
-                <a:solidFill>
-                  <a:srgbClr val="FFFFFF"/>
-                </a:solidFill>
-                <a:latin typeface="Play"/>
-                <a:ea typeface="Play"/>
-                <a:cs typeface="Play"/>
-              </a:defRPr>
-            </a:pPr>
-            <a:r>
-              <a:rPr sz="2800">
-                <a:solidFill>
-                  <a:srgbClr val="FFFFFF"/>
-                </a:solidFill>
-                <a:latin typeface="Play"/>
-                <a:ea typeface="Play"/>
-                <a:cs typeface="Play"/>
-              </a:rPr>
-              <a:t>• Собрано 68 презентаций</a:t>
-            </a:r>
-          </a:p>
-          <a:p>
-            <a:pPr algn="l">
-              <a:spcAft>
-                <a:spcPts val="300"/>
-              </a:spcAft>
-              <a:defRPr sz="2800">
-                <a:solidFill>
-                  <a:srgbClr val="FFFFFF"/>
-                </a:solidFill>
-                <a:latin typeface="Play"/>
-                <a:ea typeface="Play"/>
-                <a:cs typeface="Play"/>
-              </a:defRPr>
-            </a:pPr>
-            <a:r>
-              <a:rPr sz="2800">
-                <a:solidFill>
-                  <a:srgbClr val="FFFFFF"/>
-                </a:solidFill>
-                <a:latin typeface="Play"/>
-                <a:ea typeface="Play"/>
-                <a:cs typeface="Play"/>
-              </a:rPr>
-              <a:t>• Среднее время сборки 4 минуты</a:t>
-            </a:r>
-          </a:p>
-          <a:p>
-            <a:pPr algn="l">
-              <a:spcAft>
-                <a:spcPts val="300"/>
-              </a:spcAft>
-              <a:defRPr sz="2800">
-                <a:solidFill>
-                  <a:srgbClr val="FFFFFF"/>
-                </a:solidFill>
-                <a:latin typeface="Play"/>
-                <a:ea typeface="Play"/>
-                <a:cs typeface="Play"/>
-              </a:defRPr>
-            </a:pPr>
-            <a:r>
-              <a:rPr sz="2800">
-                <a:solidFill>
-                  <a:srgbClr val="FFFFFF"/>
-                </a:solidFill>
-                <a:latin typeface="Play"/>
-                <a:ea typeface="Play"/>
-                <a:cs typeface="Play"/>
-              </a:rPr>
-              <a:t>• Первый вариант готов за 1 день</a:t>
-            </a:r>
-          </a:p>
-          <a:p>
-            <a:pPr algn="l">
-              <a:spcAft>
-                <a:spcPts val="300"/>
-              </a:spcAft>
-              <a:defRPr sz="2800">
-                <a:solidFill>
-                  <a:srgbClr val="FFFFFF"/>
-                </a:solidFill>
-                <a:latin typeface="Play"/>
-                <a:ea typeface="Play"/>
-                <a:cs typeface="Play"/>
-              </a:defRPr>
-            </a:pPr>
-            <a:r>
-              <a:rPr sz="2800">
-                <a:solidFill>
-                  <a:srgbClr val="FFFFFF"/>
-                </a:solidFill>
-                <a:latin typeface="Play"/>
-                <a:ea typeface="Play"/>
-                <a:cs typeface="Play"/>
-              </a:rPr>
-              <a:t>• Нарушения стиля 2 из 68, исправлены автоматически</a:t>
-            </a:r>
-          </a:p>
-        </p:txBody>
-      </p:sp>
+        </p:nvGraphicFramePr>
+        <p:xfrm>
+          <a:off x="429280" y="1848385"/>
+          <a:ext cx="11310884" cy="4049494"/>
+        </p:xfrm>
+        <a:graphic>
+          <a:graphicData uri="http://schemas.openxmlformats.org/drawingml/2006/chart">
+            <c:chart xmlns:c="http://schemas.openxmlformats.org/drawingml/2006/chart" r:id="rId4"/>
+          </a:graphicData>
+        </a:graphic>
+      </p:graphicFrame>
     </p:spTree>
   </p:cSld>
   <p:clrMapOvr>
@@ -12097,56 +11399,7 @@
         <p:spPr>
           <a:xfrm>
             <a:off x="429280" y="424715"/>
-            <a:ext cx="7827264" cy="822960"/>
-          </a:xfrm>
-          <a:prstGeom prst="rect">
-            <a:avLst/>
-          </a:prstGeom>
-          <a:noFill/>
-        </p:spPr>
-        <p:txBody>
-          <a:bodyPr wrap="square" lIns="76200" rIns="76200" tIns="50800" bIns="50800">
-            <a:spAutoFit/>
-          </a:bodyPr>
-          <a:lstStyle/>
-          <a:p>
-            <a:pPr algn="l">
-              <a:spcAft>
-                <a:spcPts val="300"/>
-              </a:spcAft>
-              <a:defRPr sz="4000">
-                <a:solidFill>
-                  <a:srgbClr val="FFFFFF"/>
-                </a:solidFill>
-                <a:latin typeface="Play"/>
-                <a:ea typeface="Play"/>
-                <a:cs typeface="Play"/>
-              </a:defRPr>
-            </a:pPr>
-            <a:r>
-              <a:rPr sz="4000">
-                <a:solidFill>
-                  <a:srgbClr val="FFFFFF"/>
-                </a:solidFill>
-                <a:latin typeface="Play"/>
-                <a:ea typeface="Play"/>
-                <a:cs typeface="Play"/>
-              </a:rPr>
-              <a:t>Что мы просим решить</a:t>
-            </a:r>
-          </a:p>
-        </p:txBody>
-      </p:sp>
-      <p:sp>
-        <p:nvSpPr>
-          <p:cNvPr id="3" name="lead"/>
-          <p:cNvSpPr txBox="1"/>
-          <p:nvPr/>
-        </p:nvSpPr>
-        <p:spPr>
-          <a:xfrm>
-            <a:off x="429280" y="2431298"/>
-            <a:ext cx="7827264" cy="1178847"/>
+            <a:ext cx="7827264" cy="1183640"/>
           </a:xfrm>
           <a:prstGeom prst="rect">
             <a:avLst/>
@@ -12181,86 +11434,29 @@
                 <a:ea typeface="Play"/>
                 <a:cs typeface="Play"/>
               </a:rPr>
-              <a:t>Одобрить запуск сервиса на всю компанию</a:t>
+              <a:t>Нарушений фирменного стиля — 2 из 68</a:t>
             </a:r>
           </a:p>
         </p:txBody>
       </p:sp>
-      <p:sp>
-        <p:nvSpPr>
-          <p:cNvPr id="4" name="body"/>
-          <p:cNvSpPr txBox="1"/>
+      <p:graphicFrame>
+        <p:nvGraphicFramePr>
+          <p:cNvPr id="3" name="Chart 2"/>
+          <p:cNvGraphicFramePr>
+            <a:graphicFrameLocks noGrp="1"/>
+          </p:cNvGraphicFramePr>
           <p:nvPr/>
-        </p:nvSpPr>
-        <p:spPr>
-          <a:xfrm>
-            <a:off x="429280" y="3775758"/>
-            <a:ext cx="7827264" cy="1415747"/>
-          </a:xfrm>
-          <a:prstGeom prst="rect">
-            <a:avLst/>
-          </a:prstGeom>
-          <a:noFill/>
-        </p:spPr>
-        <p:txBody>
-          <a:bodyPr wrap="square" lIns="76200" rIns="76200" tIns="50800" bIns="50800">
-            <a:spAutoFit/>
-          </a:bodyPr>
-          <a:lstStyle/>
-          <a:p>
-            <a:pPr algn="l">
-              <a:spcAft>
-                <a:spcPts val="300"/>
-              </a:spcAft>
-              <a:defRPr sz="2400">
-                <a:solidFill>
-                  <a:srgbClr val="FFFFFF"/>
-                </a:solidFill>
-                <a:latin typeface="Play"/>
-                <a:ea typeface="Play"/>
-                <a:cs typeface="Play"/>
-              </a:defRPr>
-            </a:pPr>
-            <a:r>
-              <a:rPr sz="2400">
-                <a:solidFill>
-                  <a:srgbClr val="FFFFFF"/>
-                </a:solidFill>
-                <a:latin typeface="Play"/>
-                <a:ea typeface="Play"/>
-                <a:cs typeface="Play"/>
-              </a:rPr>
-              <a:t>• Выделить бюджет на интеграцию и поддержку</a:t>
-            </a:r>
-          </a:p>
-          <a:p>
-            <a:pPr algn="l">
-              <a:spcAft>
-                <a:spcPts val="300"/>
-              </a:spcAft>
-              <a:defRPr sz="2400">
-                <a:solidFill>
-                  <a:srgbClr val="FFFFFF"/>
-                </a:solidFill>
-                <a:latin typeface="Play"/>
-                <a:ea typeface="Play"/>
-                <a:cs typeface="Play"/>
-              </a:defRPr>
-            </a:pPr>
-            <a:r>
-              <a:rPr sz="2400">
-                <a:solidFill>
-                  <a:srgbClr val="FFFFFF"/>
-                </a:solidFill>
-                <a:latin typeface="Play"/>
-                <a:ea typeface="Play"/>
-                <a:cs typeface="Play"/>
-              </a:rPr>
-              <a:t>• Согласовать сроки и ответственных за расширение</a:t>
-            </a:r>
-          </a:p>
-        </p:txBody>
-      </p:sp>
+        </p:nvGraphicFramePr>
+        <p:xfrm>
+          <a:off x="429280" y="2431298"/>
+          <a:ext cx="11310884" cy="3466581"/>
+        </p:xfrm>
+        <a:graphic>
+          <a:graphicData uri="http://schemas.openxmlformats.org/drawingml/2006/chart">
+            <c:chart xmlns:c="http://schemas.openxmlformats.org/drawingml/2006/chart" r:id="rId3"/>
+          </a:graphicData>
+        </a:graphic>
+      </p:graphicFrame>
     </p:spTree>
   </p:cSld>
   <p:clrMapOvr>
@@ -12323,948 +11519,199 @@
                 <a:ea typeface="Play"/>
                 <a:cs typeface="Play"/>
               </a:rPr>
-              <a:t>Риски</a:t>
+              <a:t>Ресурсы: 2 vCPU / 2 ГБ RAM</a:t>
             </a:r>
           </a:p>
         </p:txBody>
       </p:sp>
-      <p:grpSp>
-        <p:nvGrpSpPr>
-          <p:cNvPr id="3" name="icon:builtin-sparkles"/>
-          <p:cNvGrpSpPr/>
+      <p:graphicFrame>
+        <p:nvGraphicFramePr>
+          <p:cNvPr id="3" name="Table 2"/>
+          <p:cNvGraphicFramePr>
+            <a:graphicFrameLocks noGrp="1"/>
+          </p:cNvGraphicFramePr>
           <p:nvPr/>
-        </p:nvGrpSpPr>
-        <p:grpSpPr>
-          <a:xfrm>
-            <a:off x="1884664" y="1945719"/>
-            <a:ext cx="878252" cy="840303"/>
-            <a:chOff x="1884664" y="1945719"/>
-            <a:chExt cx="878252" cy="840303"/>
-          </a:xfrm>
-        </p:grpSpPr>
-        <p:sp>
-          <p:nvSpPr>
-            <p:cNvPr id="4" name="Freeform 3"/>
-            <p:cNvSpPr/>
-            <p:nvPr/>
-          </p:nvSpPr>
-          <p:spPr>
-            <a:xfrm>
-              <a:off x="1884664" y="1945719"/>
-              <a:ext cx="650557" cy="650557"/>
-            </a:xfrm>
-            <a:custGeom>
-              <a:avLst/>
-              <a:gdLst/>
-              <a:ahLst/>
-              <a:cxnLst/>
-              <a:rect l="l" t="t" r="r" b="b"/>
-              <a:pathLst>
-                <a:path w="650557" h="650557">
-                  <a:moveTo>
-                    <a:pt x="325278" y="0"/>
-                  </a:moveTo>
-                  <a:lnTo>
-                    <a:pt x="335145" y="61098"/>
-                  </a:lnTo>
-                  <a:lnTo>
-                    <a:pt x="348698" y="114498"/>
-                  </a:lnTo>
-                  <a:lnTo>
-                    <a:pt x="366480" y="160742"/>
-                  </a:lnTo>
-                  <a:lnTo>
-                    <a:pt x="389033" y="200371"/>
-                  </a:lnTo>
-                  <a:lnTo>
-                    <a:pt x="416790" y="233767"/>
-                  </a:lnTo>
-                  <a:lnTo>
-                    <a:pt x="450185" y="261524"/>
-                  </a:lnTo>
-                  <a:lnTo>
-                    <a:pt x="489761" y="284022"/>
-                  </a:lnTo>
-                  <a:lnTo>
-                    <a:pt x="536059" y="301858"/>
-                  </a:lnTo>
-                  <a:lnTo>
-                    <a:pt x="589459" y="315466"/>
-                  </a:lnTo>
-                  <a:lnTo>
-                    <a:pt x="650557" y="325278"/>
-                  </a:lnTo>
-                  <a:lnTo>
-                    <a:pt x="589459" y="335145"/>
-                  </a:lnTo>
-                  <a:lnTo>
-                    <a:pt x="536059" y="348698"/>
-                  </a:lnTo>
-                  <a:lnTo>
-                    <a:pt x="489761" y="366480"/>
-                  </a:lnTo>
-                  <a:lnTo>
-                    <a:pt x="450185" y="389033"/>
-                  </a:lnTo>
-                  <a:lnTo>
-                    <a:pt x="416790" y="416790"/>
-                  </a:lnTo>
-                  <a:lnTo>
-                    <a:pt x="389033" y="450185"/>
-                  </a:lnTo>
-                  <a:lnTo>
-                    <a:pt x="366480" y="489761"/>
-                  </a:lnTo>
-                  <a:lnTo>
-                    <a:pt x="348698" y="536059"/>
-                  </a:lnTo>
-                  <a:lnTo>
-                    <a:pt x="335145" y="589513"/>
-                  </a:lnTo>
-                  <a:lnTo>
-                    <a:pt x="325278" y="650557"/>
-                  </a:lnTo>
-                  <a:lnTo>
-                    <a:pt x="315466" y="589513"/>
-                  </a:lnTo>
-                  <a:lnTo>
-                    <a:pt x="301858" y="536059"/>
-                  </a:lnTo>
-                  <a:lnTo>
-                    <a:pt x="284022" y="489761"/>
-                  </a:lnTo>
-                  <a:lnTo>
-                    <a:pt x="261524" y="450185"/>
-                  </a:lnTo>
-                  <a:lnTo>
-                    <a:pt x="233767" y="416790"/>
-                  </a:lnTo>
-                  <a:lnTo>
-                    <a:pt x="200371" y="389033"/>
-                  </a:lnTo>
-                  <a:lnTo>
-                    <a:pt x="160742" y="366534"/>
-                  </a:lnTo>
-                  <a:lnTo>
-                    <a:pt x="114498" y="348698"/>
-                  </a:lnTo>
-                  <a:lnTo>
-                    <a:pt x="61098" y="335091"/>
-                  </a:lnTo>
-                  <a:lnTo>
-                    <a:pt x="0" y="325278"/>
-                  </a:lnTo>
-                  <a:lnTo>
-                    <a:pt x="61098" y="315466"/>
-                  </a:lnTo>
-                  <a:lnTo>
-                    <a:pt x="114498" y="301858"/>
-                  </a:lnTo>
-                  <a:lnTo>
-                    <a:pt x="160742" y="284022"/>
-                  </a:lnTo>
-                  <a:lnTo>
-                    <a:pt x="200371" y="261524"/>
-                  </a:lnTo>
-                  <a:lnTo>
-                    <a:pt x="233767" y="233767"/>
-                  </a:lnTo>
-                  <a:lnTo>
-                    <a:pt x="261524" y="200371"/>
-                  </a:lnTo>
-                  <a:lnTo>
-                    <a:pt x="284022" y="160796"/>
-                  </a:lnTo>
-                  <a:lnTo>
-                    <a:pt x="301858" y="114498"/>
-                  </a:lnTo>
-                  <a:lnTo>
-                    <a:pt x="315466" y="61098"/>
-                  </a:lnTo>
-                  <a:lnTo>
-                    <a:pt x="325278" y="0"/>
-                  </a:lnTo>
-                  <a:close/>
-                </a:path>
-              </a:pathLst>
-            </a:custGeom>
-            <a:noFill/>
-            <a:ln w="108426" cap="rnd">
-              <a:solidFill>
-                <a:srgbClr val="0077FF"/>
-              </a:solidFill>
-              <a:round/>
-            </a:ln>
-            <a:effectLst/>
-          </p:spPr>
-          <p:style>
-            <a:lnRef idx="1">
-              <a:schemeClr val="accent1"/>
-            </a:lnRef>
-            <a:fillRef idx="3">
-              <a:schemeClr val="accent1"/>
-            </a:fillRef>
-            <a:effectRef idx="2">
-              <a:schemeClr val="accent1"/>
-            </a:effectRef>
-            <a:fontRef idx="minor">
-              <a:schemeClr val="lt1"/>
-            </a:fontRef>
-          </p:style>
-          <p:txBody>
-            <a:bodyPr rtlCol="0" anchor="ctr"/>
-            <a:lstStyle/>
-            <a:p>
-              <a:pPr algn="ctr"/>
-            </a:p>
-          </p:txBody>
-        </p:sp>
-        <p:sp>
-          <p:nvSpPr>
-            <p:cNvPr id="5" name="Freeform 4"/>
-            <p:cNvSpPr/>
-            <p:nvPr/>
-          </p:nvSpPr>
-          <p:spPr>
-            <a:xfrm>
-              <a:off x="2524378" y="2542063"/>
-              <a:ext cx="238538" cy="243959"/>
-            </a:xfrm>
-            <a:custGeom>
-              <a:avLst/>
-              <a:gdLst/>
-              <a:ahLst/>
-              <a:cxnLst/>
-              <a:rect l="l" t="t" r="r" b="b"/>
-              <a:pathLst>
-                <a:path w="238538" h="243959">
-                  <a:moveTo>
-                    <a:pt x="119269" y="0"/>
-                  </a:moveTo>
-                  <a:lnTo>
-                    <a:pt x="123172" y="22986"/>
-                  </a:lnTo>
-                  <a:lnTo>
-                    <a:pt x="128540" y="43153"/>
-                  </a:lnTo>
-                  <a:lnTo>
-                    <a:pt x="135479" y="60718"/>
-                  </a:lnTo>
-                  <a:lnTo>
-                    <a:pt x="144099" y="75898"/>
-                  </a:lnTo>
-                  <a:lnTo>
-                    <a:pt x="154508" y="88801"/>
-                  </a:lnTo>
-                  <a:lnTo>
-                    <a:pt x="166868" y="99535"/>
-                  </a:lnTo>
-                  <a:lnTo>
-                    <a:pt x="181343" y="108317"/>
-                  </a:lnTo>
-                  <a:lnTo>
-                    <a:pt x="198041" y="115365"/>
-                  </a:lnTo>
-                  <a:lnTo>
-                    <a:pt x="217069" y="120732"/>
-                  </a:lnTo>
-                  <a:lnTo>
-                    <a:pt x="238538" y="124690"/>
-                  </a:lnTo>
-                  <a:lnTo>
-                    <a:pt x="217069" y="128593"/>
-                  </a:lnTo>
-                  <a:lnTo>
-                    <a:pt x="198041" y="133960"/>
-                  </a:lnTo>
-                  <a:lnTo>
-                    <a:pt x="181343" y="140899"/>
-                  </a:lnTo>
-                  <a:lnTo>
-                    <a:pt x="166868" y="149519"/>
-                  </a:lnTo>
-                  <a:lnTo>
-                    <a:pt x="154508" y="159928"/>
-                  </a:lnTo>
-                  <a:lnTo>
-                    <a:pt x="144099" y="172289"/>
-                  </a:lnTo>
-                  <a:lnTo>
-                    <a:pt x="135479" y="186764"/>
-                  </a:lnTo>
-                  <a:lnTo>
-                    <a:pt x="128540" y="203461"/>
-                  </a:lnTo>
-                  <a:lnTo>
-                    <a:pt x="123172" y="222490"/>
-                  </a:lnTo>
-                  <a:lnTo>
-                    <a:pt x="119269" y="243959"/>
-                  </a:lnTo>
-                  <a:lnTo>
-                    <a:pt x="115366" y="222490"/>
-                  </a:lnTo>
-                  <a:lnTo>
-                    <a:pt x="109999" y="203461"/>
-                  </a:lnTo>
-                  <a:lnTo>
-                    <a:pt x="103059" y="186764"/>
-                  </a:lnTo>
-                  <a:lnTo>
-                    <a:pt x="94439" y="172289"/>
-                  </a:lnTo>
-                  <a:lnTo>
-                    <a:pt x="84031" y="159928"/>
-                  </a:lnTo>
-                  <a:lnTo>
-                    <a:pt x="71670" y="149519"/>
-                  </a:lnTo>
-                  <a:lnTo>
-                    <a:pt x="57195" y="140899"/>
-                  </a:lnTo>
-                  <a:lnTo>
-                    <a:pt x="40497" y="133960"/>
-                  </a:lnTo>
-                  <a:lnTo>
-                    <a:pt x="21469" y="128593"/>
-                  </a:lnTo>
-                  <a:lnTo>
-                    <a:pt x="0" y="124690"/>
-                  </a:lnTo>
-                  <a:lnTo>
-                    <a:pt x="21469" y="120786"/>
-                  </a:lnTo>
-                  <a:lnTo>
-                    <a:pt x="40497" y="115365"/>
-                  </a:lnTo>
-                  <a:lnTo>
-                    <a:pt x="57195" y="108317"/>
-                  </a:lnTo>
-                  <a:lnTo>
-                    <a:pt x="71670" y="99535"/>
-                  </a:lnTo>
-                  <a:lnTo>
-                    <a:pt x="84031" y="88801"/>
-                  </a:lnTo>
-                  <a:lnTo>
-                    <a:pt x="94439" y="75898"/>
-                  </a:lnTo>
-                  <a:lnTo>
-                    <a:pt x="103059" y="60718"/>
-                  </a:lnTo>
-                  <a:lnTo>
-                    <a:pt x="109999" y="43153"/>
-                  </a:lnTo>
-                  <a:lnTo>
-                    <a:pt x="115366" y="22986"/>
-                  </a:lnTo>
-                  <a:lnTo>
-                    <a:pt x="119269" y="0"/>
-                  </a:lnTo>
-                  <a:close/>
-                </a:path>
-              </a:pathLst>
-            </a:custGeom>
-            <a:noFill/>
-            <a:ln w="108426" cap="rnd">
-              <a:solidFill>
-                <a:srgbClr val="0077FF"/>
-              </a:solidFill>
-              <a:round/>
-            </a:ln>
-            <a:effectLst/>
-          </p:spPr>
-          <p:style>
-            <a:lnRef idx="1">
-              <a:schemeClr val="accent1"/>
-            </a:lnRef>
-            <a:fillRef idx="3">
-              <a:schemeClr val="accent1"/>
-            </a:fillRef>
-            <a:effectRef idx="2">
-              <a:schemeClr val="accent1"/>
-            </a:effectRef>
-            <a:fontRef idx="minor">
-              <a:schemeClr val="lt1"/>
-            </a:fontRef>
-          </p:style>
-          <p:txBody>
-            <a:bodyPr rtlCol="0" anchor="ctr"/>
-            <a:lstStyle/>
-            <a:p>
-              <a:pPr algn="ctr"/>
-            </a:p>
-          </p:txBody>
-        </p:sp>
-      </p:grpSp>
-      <p:sp>
-        <p:nvSpPr>
-          <p:cNvPr id="6" name="TextBox 5"/>
-          <p:cNvSpPr txBox="1"/>
-          <p:nvPr/>
-        </p:nvSpPr>
-        <p:spPr>
-          <a:xfrm>
-            <a:off x="429280" y="3240328"/>
-            <a:ext cx="3669753" cy="1144980"/>
-          </a:xfrm>
-          <a:prstGeom prst="rect">
-            <a:avLst/>
-          </a:prstGeom>
-          <a:noFill/>
-        </p:spPr>
-        <p:txBody>
-          <a:bodyPr wrap="square" lIns="12700" rIns="12700" tIns="12700" bIns="12700">
-            <a:spAutoFit/>
-          </a:bodyPr>
-          <a:lstStyle/>
-          <a:p>
-            <a:pPr algn="ctr">
-              <a:defRPr sz="1400" b="0">
-                <a:solidFill>
-                  <a:srgbClr val="FFFFFF"/>
-                </a:solidFill>
-                <a:latin typeface="Play"/>
-                <a:ea typeface="Play"/>
-                <a:cs typeface="Play"/>
-              </a:defRPr>
-            </a:pPr>
-            <a:r>
-              <a:rPr sz="1400" b="0">
-                <a:solidFill>
-                  <a:srgbClr val="FFFFFF"/>
-                </a:solidFill>
-                <a:latin typeface="Play"/>
-                <a:ea typeface="Play"/>
-                <a:cs typeface="Play"/>
-              </a:rPr>
-              <a:t>Модель может выдумать цифры</a:t>
-            </a:r>
-          </a:p>
-        </p:txBody>
-      </p:sp>
-      <p:grpSp>
-        <p:nvGrpSpPr>
-          <p:cNvPr id="7" name="icon:builtin-layout"/>
-          <p:cNvGrpSpPr/>
-          <p:nvPr/>
-        </p:nvGrpSpPr>
-        <p:grpSpPr>
-          <a:xfrm>
-            <a:off x="5596803" y="1945719"/>
-            <a:ext cx="975835" cy="975835"/>
-            <a:chOff x="5596803" y="1945719"/>
-            <a:chExt cx="975835" cy="975835"/>
-          </a:xfrm>
-        </p:grpSpPr>
-        <p:sp>
-          <p:nvSpPr>
-            <p:cNvPr id="8" name="Rounded Rectangle 7"/>
-            <p:cNvSpPr/>
-            <p:nvPr/>
-          </p:nvSpPr>
-          <p:spPr>
-            <a:xfrm>
-              <a:off x="5596803" y="1945719"/>
-              <a:ext cx="975835" cy="975835"/>
-            </a:xfrm>
-            <a:prstGeom prst="roundRect">
-              <a:avLst>
-                <a:gd name="adj" fmla="val 11111"/>
-              </a:avLst>
-            </a:prstGeom>
-            <a:noFill/>
-            <a:ln w="108426" cap="rnd">
-              <a:solidFill>
-                <a:srgbClr val="0077FF"/>
-              </a:solidFill>
-              <a:round/>
-            </a:ln>
-            <a:effectLst/>
-          </p:spPr>
-          <p:style>
-            <a:lnRef idx="1">
-              <a:schemeClr val="accent1"/>
-            </a:lnRef>
-            <a:fillRef idx="3">
-              <a:schemeClr val="accent1"/>
-            </a:fillRef>
-            <a:effectRef idx="2">
-              <a:schemeClr val="accent1"/>
-            </a:effectRef>
-            <a:fontRef idx="minor">
-              <a:schemeClr val="lt1"/>
-            </a:fontRef>
-          </p:style>
-          <p:txBody>
-            <a:bodyPr rtlCol="0" anchor="ctr"/>
-            <a:lstStyle/>
-            <a:p>
-              <a:pPr algn="ctr"/>
-            </a:p>
-          </p:txBody>
-        </p:sp>
-        <p:sp>
-          <p:nvSpPr>
-            <p:cNvPr id="9" name="Freeform 8"/>
-            <p:cNvSpPr/>
-            <p:nvPr/>
-          </p:nvSpPr>
-          <p:spPr>
-            <a:xfrm>
-              <a:off x="5596803" y="2270997"/>
-              <a:ext cx="975835" cy="0"/>
-            </a:xfrm>
-            <a:custGeom>
-              <a:avLst/>
-              <a:gdLst/>
-              <a:ahLst/>
-              <a:cxnLst/>
-              <a:rect l="l" t="t" r="r" b="b"/>
-              <a:pathLst>
-                <a:path w="975835" h="0">
-                  <a:moveTo>
-                    <a:pt x="0" y="0"/>
-                  </a:moveTo>
-                  <a:lnTo>
-                    <a:pt x="975835" y="0"/>
-                  </a:lnTo>
-                </a:path>
-              </a:pathLst>
-            </a:custGeom>
-            <a:noFill/>
-            <a:ln w="108426" cap="rnd">
-              <a:solidFill>
-                <a:srgbClr val="0077FF"/>
-              </a:solidFill>
-              <a:round/>
-            </a:ln>
-            <a:effectLst/>
-          </p:spPr>
-          <p:style>
-            <a:lnRef idx="1">
-              <a:schemeClr val="accent1"/>
-            </a:lnRef>
-            <a:fillRef idx="3">
-              <a:schemeClr val="accent1"/>
-            </a:fillRef>
-            <a:effectRef idx="2">
-              <a:schemeClr val="accent1"/>
-            </a:effectRef>
-            <a:fontRef idx="minor">
-              <a:schemeClr val="lt1"/>
-            </a:fontRef>
-          </p:style>
-          <p:txBody>
-            <a:bodyPr rtlCol="0" anchor="ctr"/>
-            <a:lstStyle/>
-            <a:p>
-              <a:pPr algn="ctr"/>
-            </a:p>
-          </p:txBody>
-        </p:sp>
-        <p:sp>
-          <p:nvSpPr>
-            <p:cNvPr id="10" name="Freeform 9"/>
-            <p:cNvSpPr/>
-            <p:nvPr/>
-          </p:nvSpPr>
-          <p:spPr>
-            <a:xfrm>
-              <a:off x="5922081" y="2270997"/>
-              <a:ext cx="0" cy="650557"/>
-            </a:xfrm>
-            <a:custGeom>
-              <a:avLst/>
-              <a:gdLst/>
-              <a:ahLst/>
-              <a:cxnLst/>
-              <a:rect l="l" t="t" r="r" b="b"/>
-              <a:pathLst>
-                <a:path w="0" h="650557">
-                  <a:moveTo>
-                    <a:pt x="0" y="0"/>
-                  </a:moveTo>
-                  <a:lnTo>
-                    <a:pt x="0" y="650557"/>
-                  </a:lnTo>
-                </a:path>
-              </a:pathLst>
-            </a:custGeom>
-            <a:noFill/>
-            <a:ln w="108426" cap="rnd">
-              <a:solidFill>
-                <a:srgbClr val="0077FF"/>
-              </a:solidFill>
-              <a:round/>
-            </a:ln>
-            <a:effectLst/>
-          </p:spPr>
-          <p:style>
-            <a:lnRef idx="1">
-              <a:schemeClr val="accent1"/>
-            </a:lnRef>
-            <a:fillRef idx="3">
-              <a:schemeClr val="accent1"/>
-            </a:fillRef>
-            <a:effectRef idx="2">
-              <a:schemeClr val="accent1"/>
-            </a:effectRef>
-            <a:fontRef idx="minor">
-              <a:schemeClr val="lt1"/>
-            </a:fontRef>
-          </p:style>
-          <p:txBody>
-            <a:bodyPr rtlCol="0" anchor="ctr"/>
-            <a:lstStyle/>
-            <a:p>
-              <a:pPr algn="ctr"/>
-            </a:p>
-          </p:txBody>
-        </p:sp>
-      </p:grpSp>
-      <p:sp>
-        <p:nvSpPr>
-          <p:cNvPr id="11" name="TextBox 10"/>
-          <p:cNvSpPr txBox="1"/>
-          <p:nvPr/>
-        </p:nvSpPr>
-        <p:spPr>
-          <a:xfrm>
-            <a:off x="4249845" y="3240328"/>
-            <a:ext cx="3669753" cy="1144980"/>
-          </a:xfrm>
-          <a:prstGeom prst="rect">
-            <a:avLst/>
-          </a:prstGeom>
-          <a:noFill/>
-        </p:spPr>
-        <p:txBody>
-          <a:bodyPr wrap="square" lIns="12700" rIns="12700" tIns="12700" bIns="12700">
-            <a:spAutoFit/>
-          </a:bodyPr>
-          <a:lstStyle/>
-          <a:p>
-            <a:pPr algn="ctr">
-              <a:defRPr sz="1400" b="0">
-                <a:solidFill>
-                  <a:srgbClr val="FFFFFF"/>
-                </a:solidFill>
-                <a:latin typeface="Play"/>
-                <a:ea typeface="Play"/>
-                <a:cs typeface="Play"/>
-              </a:defRPr>
-            </a:pPr>
-            <a:r>
-              <a:rPr sz="1400" b="0">
-                <a:solidFill>
-                  <a:srgbClr val="FFFFFF"/>
-                </a:solidFill>
-                <a:latin typeface="Play"/>
-                <a:ea typeface="Play"/>
-                <a:cs typeface="Play"/>
-              </a:rPr>
-              <a:t>Неправильный шаблон</a:t>
-            </a:r>
-          </a:p>
-        </p:txBody>
-      </p:sp>
-      <p:grpSp>
-        <p:nvGrpSpPr>
-          <p:cNvPr id="12" name="icon:builtin-target"/>
-          <p:cNvGrpSpPr/>
-          <p:nvPr/>
-        </p:nvGrpSpPr>
-        <p:grpSpPr>
-          <a:xfrm>
-            <a:off x="9417369" y="1945719"/>
-            <a:ext cx="975835" cy="975835"/>
-            <a:chOff x="9417369" y="1945719"/>
-            <a:chExt cx="975835" cy="975835"/>
-          </a:xfrm>
-        </p:grpSpPr>
-        <p:sp>
-          <p:nvSpPr>
-            <p:cNvPr id="13" name="Oval 12"/>
-            <p:cNvSpPr/>
-            <p:nvPr/>
-          </p:nvSpPr>
-          <p:spPr>
-            <a:xfrm>
-              <a:off x="9417369" y="1945719"/>
-              <a:ext cx="975835" cy="975835"/>
-            </a:xfrm>
-            <a:prstGeom prst="ellipse">
-              <a:avLst/>
-            </a:prstGeom>
-            <a:noFill/>
-            <a:ln w="108426" cap="rnd">
-              <a:solidFill>
-                <a:srgbClr val="0077FF"/>
-              </a:solidFill>
-              <a:round/>
-            </a:ln>
-            <a:effectLst/>
-          </p:spPr>
-          <p:style>
-            <a:lnRef idx="1">
-              <a:schemeClr val="accent1"/>
-            </a:lnRef>
-            <a:fillRef idx="3">
-              <a:schemeClr val="accent1"/>
-            </a:fillRef>
-            <a:effectRef idx="2">
-              <a:schemeClr val="accent1"/>
-            </a:effectRef>
-            <a:fontRef idx="minor">
-              <a:schemeClr val="lt1"/>
-            </a:fontRef>
-          </p:style>
-          <p:txBody>
-            <a:bodyPr rtlCol="0" anchor="ctr"/>
-            <a:lstStyle/>
-            <a:p>
-              <a:pPr algn="ctr"/>
-            </a:p>
-          </p:txBody>
-        </p:sp>
-        <p:sp>
-          <p:nvSpPr>
-            <p:cNvPr id="14" name="Oval 13"/>
-            <p:cNvSpPr/>
-            <p:nvPr/>
-          </p:nvSpPr>
-          <p:spPr>
-            <a:xfrm>
-              <a:off x="9634221" y="2162571"/>
-              <a:ext cx="542130" cy="542130"/>
-            </a:xfrm>
-            <a:prstGeom prst="ellipse">
-              <a:avLst/>
-            </a:prstGeom>
-            <a:noFill/>
-            <a:ln w="108426" cap="rnd">
-              <a:solidFill>
-                <a:srgbClr val="0077FF"/>
-              </a:solidFill>
-              <a:round/>
-            </a:ln>
-            <a:effectLst/>
-          </p:spPr>
-          <p:style>
-            <a:lnRef idx="1">
-              <a:schemeClr val="accent1"/>
-            </a:lnRef>
-            <a:fillRef idx="3">
-              <a:schemeClr val="accent1"/>
-            </a:fillRef>
-            <a:effectRef idx="2">
-              <a:schemeClr val="accent1"/>
-            </a:effectRef>
-            <a:fontRef idx="minor">
-              <a:schemeClr val="lt1"/>
-            </a:fontRef>
-          </p:style>
-          <p:txBody>
-            <a:bodyPr rtlCol="0" anchor="ctr"/>
-            <a:lstStyle/>
-            <a:p>
-              <a:pPr algn="ctr"/>
-            </a:p>
-          </p:txBody>
-        </p:sp>
-        <p:sp>
-          <p:nvSpPr>
-            <p:cNvPr id="15" name="Oval 14"/>
-            <p:cNvSpPr/>
-            <p:nvPr/>
-          </p:nvSpPr>
-          <p:spPr>
-            <a:xfrm>
-              <a:off x="9829388" y="2357738"/>
-              <a:ext cx="151796" cy="151796"/>
-            </a:xfrm>
-            <a:prstGeom prst="ellipse">
-              <a:avLst/>
-            </a:prstGeom>
-            <a:solidFill>
-              <a:srgbClr val="0077FF"/>
-            </a:solidFill>
-            <a:ln>
-              <a:noFill/>
-            </a:ln>
-            <a:effectLst/>
-          </p:spPr>
-          <p:style>
-            <a:lnRef idx="1">
-              <a:schemeClr val="accent1"/>
-            </a:lnRef>
-            <a:fillRef idx="3">
-              <a:schemeClr val="accent1"/>
-            </a:fillRef>
-            <a:effectRef idx="2">
-              <a:schemeClr val="accent1"/>
-            </a:effectRef>
-            <a:fontRef idx="minor">
-              <a:schemeClr val="lt1"/>
-            </a:fontRef>
-          </p:style>
-          <p:txBody>
-            <a:bodyPr rtlCol="0" anchor="ctr"/>
-            <a:lstStyle/>
-            <a:p>
-              <a:pPr algn="ctr"/>
-            </a:p>
-          </p:txBody>
-        </p:sp>
-      </p:grpSp>
-      <p:sp>
-        <p:nvSpPr>
-          <p:cNvPr id="16" name="TextBox 15"/>
-          <p:cNvSpPr txBox="1"/>
-          <p:nvPr/>
-        </p:nvSpPr>
-        <p:spPr>
-          <a:xfrm>
-            <a:off x="8070410" y="3240328"/>
-            <a:ext cx="3669753" cy="1144980"/>
-          </a:xfrm>
-          <a:prstGeom prst="rect">
-            <a:avLst/>
-          </a:prstGeom>
-          <a:noFill/>
-        </p:spPr>
-        <p:txBody>
-          <a:bodyPr wrap="square" lIns="12700" rIns="12700" tIns="12700" bIns="12700">
-            <a:spAutoFit/>
-          </a:bodyPr>
-          <a:lstStyle/>
-          <a:p>
-            <a:pPr algn="ctr">
-              <a:defRPr sz="1400" b="0">
-                <a:solidFill>
-                  <a:srgbClr val="FFFFFF"/>
-                </a:solidFill>
-                <a:latin typeface="Play"/>
-                <a:ea typeface="Play"/>
-                <a:cs typeface="Play"/>
-              </a:defRPr>
-            </a:pPr>
-            <a:r>
-              <a:rPr sz="1400" b="0">
-                <a:solidFill>
-                  <a:srgbClr val="FFFFFF"/>
-                </a:solidFill>
-                <a:latin typeface="Play"/>
-                <a:ea typeface="Play"/>
-                <a:cs typeface="Play"/>
-              </a:rPr>
-              <a:t>Нагрузка &gt;20 задач</a:t>
-            </a:r>
-          </a:p>
-        </p:txBody>
-      </p:sp>
-      <p:sp>
-        <p:nvSpPr>
-          <p:cNvPr id="17" name="body"/>
-          <p:cNvSpPr txBox="1"/>
-          <p:nvPr/>
-        </p:nvSpPr>
-        <p:spPr>
-          <a:xfrm>
-            <a:off x="429280" y="4556759"/>
-            <a:ext cx="11310884" cy="1341120"/>
-          </a:xfrm>
-          <a:prstGeom prst="rect">
-            <a:avLst/>
-          </a:prstGeom>
-          <a:noFill/>
-        </p:spPr>
-        <p:txBody>
-          <a:bodyPr wrap="square" lIns="76200" rIns="76200" tIns="50800" bIns="50800">
-            <a:spAutoFit/>
-          </a:bodyPr>
-          <a:lstStyle/>
-          <a:p>
-            <a:pPr algn="l">
-              <a:spcAft>
-                <a:spcPts val="300"/>
-              </a:spcAft>
-              <a:defRPr sz="1600">
-                <a:solidFill>
-                  <a:srgbClr val="FFFFFF"/>
-                </a:solidFill>
-                <a:latin typeface="Play"/>
-                <a:ea typeface="Play"/>
-                <a:cs typeface="Play"/>
-              </a:defRPr>
-            </a:pPr>
-            <a:r>
-              <a:rPr sz="1600">
-                <a:solidFill>
-                  <a:srgbClr val="FFFFFF"/>
-                </a:solidFill>
-                <a:latin typeface="Play"/>
-                <a:ea typeface="Play"/>
-                <a:cs typeface="Play"/>
-              </a:rPr>
-              <a:t>• Модель может выдумать цифры, которые не подтверждены</a:t>
-            </a:r>
-          </a:p>
-          <a:p>
-            <a:pPr algn="l">
-              <a:spcAft>
-                <a:spcPts val="300"/>
-              </a:spcAft>
-              <a:defRPr sz="1600">
-                <a:solidFill>
-                  <a:srgbClr val="FFFFFF"/>
-                </a:solidFill>
-                <a:latin typeface="Play"/>
-                <a:ea typeface="Play"/>
-                <a:cs typeface="Play"/>
-              </a:defRPr>
-            </a:pPr>
-            <a:r>
-              <a:rPr sz="1600">
-                <a:solidFill>
-                  <a:srgbClr val="FFFFFF"/>
-                </a:solidFill>
-                <a:latin typeface="Play"/>
-                <a:ea typeface="Play"/>
-                <a:cs typeface="Play"/>
-              </a:rPr>
-              <a:t>• Неправильный шаблон может привести к некорректной вёрстке</a:t>
-            </a:r>
-          </a:p>
-          <a:p>
-            <a:pPr algn="l">
-              <a:spcAft>
-                <a:spcPts val="300"/>
-              </a:spcAft>
-              <a:defRPr sz="1600">
-                <a:solidFill>
-                  <a:srgbClr val="FFFFFF"/>
-                </a:solidFill>
-                <a:latin typeface="Play"/>
-                <a:ea typeface="Play"/>
-                <a:cs typeface="Play"/>
-              </a:defRPr>
-            </a:pPr>
-            <a:r>
-              <a:rPr sz="1600">
-                <a:solidFill>
-                  <a:srgbClr val="FFFFFF"/>
-                </a:solidFill>
-                <a:latin typeface="Play"/>
-                <a:ea typeface="Play"/>
-                <a:cs typeface="Play"/>
-              </a:rPr>
-              <a:t>• Нагрузка выше 20 одновременных задач требует внешней очереди</a:t>
-            </a:r>
-          </a:p>
-        </p:txBody>
-      </p:sp>
+        </p:nvGraphicFramePr>
+        <p:xfrm>
+          <a:off x="429280" y="1783080"/>
+          <a:ext cx="11310884" cy="4114800"/>
+        </p:xfrm>
+        <a:graphic>
+          <a:graphicData uri="http://schemas.openxmlformats.org/drawingml/2006/table">
+            <a:tbl>
+              <a:tblPr firstRow="1" bandRow="1">
+                <a:tableStyleId>{5C22544A-7EE6-4342-B048-85BDC9FD1C3A}</a:tableStyleId>
+              </a:tblPr>
+              <a:tblGrid>
+                <a:gridCol w="5655442"/>
+                <a:gridCol w="5655442"/>
+              </a:tblGrid>
+              <a:tr h="1371600">
+                <a:tc>
+                  <a:txBody>
+                    <a:bodyPr/>
+                    <a:lstStyle/>
+                    <a:p>
+                      <a:pPr>
+                        <a:defRPr sz="1300" b="1">
+                          <a:solidFill>
+                            <a:srgbClr val="FFFFFF"/>
+                          </a:solidFill>
+                          <a:latin typeface="Play"/>
+                          <a:ea typeface="Play"/>
+                          <a:cs typeface="Play"/>
+                        </a:defRPr>
+                      </a:pPr>
+                      <a:r>
+                        <a:t>Ресурс</a:t>
+                      </a:r>
+                    </a:p>
+                  </a:txBody>
+                  <a:tcPr>
+                    <a:solidFill>
+                      <a:srgbClr val="0077FF"/>
+                    </a:solidFill>
+                  </a:tcPr>
+                </a:tc>
+                <a:tc>
+                  <a:txBody>
+                    <a:bodyPr/>
+                    <a:lstStyle/>
+                    <a:p>
+                      <a:pPr>
+                        <a:defRPr sz="1300" b="1">
+                          <a:solidFill>
+                            <a:srgbClr val="FFFFFF"/>
+                          </a:solidFill>
+                          <a:latin typeface="Play"/>
+                          <a:ea typeface="Play"/>
+                          <a:cs typeface="Play"/>
+                        </a:defRPr>
+                      </a:pPr>
+                      <a:r>
+                        <a:t>Значение</a:t>
+                      </a:r>
+                    </a:p>
+                  </a:txBody>
+                  <a:tcPr>
+                    <a:solidFill>
+                      <a:srgbClr val="0077FF"/>
+                    </a:solidFill>
+                  </a:tcPr>
+                </a:tc>
+              </a:tr>
+              <a:tr h="1371600">
+                <a:tc>
+                  <a:txBody>
+                    <a:bodyPr/>
+                    <a:lstStyle/>
+                    <a:p>
+                      <a:pPr>
+                        <a:defRPr sz="1300" b="0">
+                          <a:solidFill>
+                            <a:srgbClr val="FFFFFF"/>
+                          </a:solidFill>
+                          <a:latin typeface="Play"/>
+                          <a:ea typeface="Play"/>
+                          <a:cs typeface="Play"/>
+                        </a:defRPr>
+                      </a:pPr>
+                      <a:r>
+                        <a:t>CPU</a:t>
+                      </a:r>
+                    </a:p>
+                  </a:txBody>
+                  <a:tcPr>
+                    <a:solidFill>
+                      <a:srgbClr val="111111"/>
+                    </a:solidFill>
+                  </a:tcPr>
+                </a:tc>
+                <a:tc>
+                  <a:txBody>
+                    <a:bodyPr/>
+                    <a:lstStyle/>
+                    <a:p>
+                      <a:pPr>
+                        <a:defRPr sz="1300" b="0">
+                          <a:solidFill>
+                            <a:srgbClr val="FFFFFF"/>
+                          </a:solidFill>
+                          <a:latin typeface="Play"/>
+                          <a:ea typeface="Play"/>
+                          <a:cs typeface="Play"/>
+                        </a:defRPr>
+                      </a:pPr>
+                      <a:r>
+                        <a:t>2 vCPU</a:t>
+                      </a:r>
+                    </a:p>
+                  </a:txBody>
+                  <a:tcPr>
+                    <a:solidFill>
+                      <a:srgbClr val="111111"/>
+                    </a:solidFill>
+                  </a:tcPr>
+                </a:tc>
+              </a:tr>
+              <a:tr h="1371600">
+                <a:tc>
+                  <a:txBody>
+                    <a:bodyPr/>
+                    <a:lstStyle/>
+                    <a:p>
+                      <a:pPr>
+                        <a:defRPr sz="1300" b="0">
+                          <a:solidFill>
+                            <a:srgbClr val="FFFFFF"/>
+                          </a:solidFill>
+                          <a:latin typeface="Play"/>
+                          <a:ea typeface="Play"/>
+                          <a:cs typeface="Play"/>
+                        </a:defRPr>
+                      </a:pPr>
+                      <a:r>
+                        <a:t>RAM</a:t>
+                      </a:r>
+                    </a:p>
+                  </a:txBody>
+                  <a:tcPr>
+                    <a:solidFill>
+                      <a:srgbClr val="111111"/>
+                    </a:solidFill>
+                  </a:tcPr>
+                </a:tc>
+                <a:tc>
+                  <a:txBody>
+                    <a:bodyPr/>
+                    <a:lstStyle/>
+                    <a:p>
+                      <a:pPr>
+                        <a:defRPr sz="1300" b="0">
+                          <a:solidFill>
+                            <a:srgbClr val="FFFFFF"/>
+                          </a:solidFill>
+                          <a:latin typeface="Play"/>
+                          <a:ea typeface="Play"/>
+                          <a:cs typeface="Play"/>
+                        </a:defRPr>
+                      </a:pPr>
+                      <a:r>
+                        <a:t>2 ГБ</a:t>
+                      </a:r>
+                    </a:p>
+                  </a:txBody>
+                  <a:tcPr>
+                    <a:solidFill>
+                      <a:srgbClr val="111111"/>
+                    </a:solidFill>
+                  </a:tcPr>
+                </a:tc>
+              </a:tr>
+            </a:tbl>
+          </a:graphicData>
+        </a:graphic>
+      </p:graphicFrame>
     </p:spTree>
   </p:cSld>
   <p:clrMapOvr>
@@ -13292,7 +11739,7 @@
         <p:spPr>
           <a:xfrm>
             <a:off x="429280" y="424715"/>
-            <a:ext cx="7827264" cy="822960"/>
+            <a:ext cx="7827264" cy="1183640"/>
           </a:xfrm>
           <a:prstGeom prst="rect">
             <a:avLst/>
@@ -13327,234 +11774,145 @@
                 <a:ea typeface="Play"/>
                 <a:cs typeface="Play"/>
               </a:rPr>
-              <a:t>Итоги</a:t>
+              <a:t>Стоимость инференса за 6 недель — 1 400 руб</a:t>
             </a:r>
           </a:p>
         </p:txBody>
       </p:sp>
-      <p:sp>
-        <p:nvSpPr>
-          <p:cNvPr id="3" name="stat_0:bar"/>
-          <p:cNvSpPr/>
+      <p:graphicFrame>
+        <p:nvGraphicFramePr>
+          <p:cNvPr id="3" name="Table 2"/>
+          <p:cNvGraphicFramePr>
+            <a:graphicFrameLocks noGrp="1"/>
+          </p:cNvGraphicFramePr>
           <p:nvPr/>
-        </p:nvSpPr>
-        <p:spPr>
-          <a:xfrm>
-            <a:off x="429280" y="1906524"/>
-            <a:ext cx="50800" cy="1231646"/>
-          </a:xfrm>
-          <a:prstGeom prst="rect">
-            <a:avLst/>
-          </a:prstGeom>
-          <a:solidFill>
-            <a:srgbClr val="0077FF"/>
-          </a:solidFill>
-          <a:ln>
-            <a:noFill/>
-          </a:ln>
-          <a:effectLst/>
-        </p:spPr>
-        <p:style>
-          <a:lnRef idx="1">
-            <a:schemeClr val="accent1"/>
-          </a:lnRef>
-          <a:fillRef idx="3">
-            <a:schemeClr val="accent1"/>
-          </a:fillRef>
-          <a:effectRef idx="2">
-            <a:schemeClr val="accent1"/>
-          </a:effectRef>
-          <a:fontRef idx="minor">
-            <a:schemeClr val="lt1"/>
-          </a:fontRef>
-        </p:style>
-        <p:txBody>
-          <a:bodyPr rtlCol="0" anchor="ctr"/>
-          <a:lstStyle/>
-          <a:p>
-            <a:pPr algn="ctr"/>
-          </a:p>
-        </p:txBody>
-      </p:sp>
-      <p:sp>
-        <p:nvSpPr>
-          <p:cNvPr id="4" name="stat_0"/>
-          <p:cNvSpPr txBox="1"/>
-          <p:nvPr/>
-        </p:nvSpPr>
-        <p:spPr>
-          <a:xfrm>
-            <a:off x="607080" y="1783080"/>
-            <a:ext cx="11133084" cy="1355090"/>
-          </a:xfrm>
-          <a:prstGeom prst="rect">
-            <a:avLst/>
-          </a:prstGeom>
-          <a:noFill/>
-        </p:spPr>
-        <p:txBody>
-          <a:bodyPr wrap="square" lIns="76200" rIns="76200" tIns="0" bIns="0">
-            <a:spAutoFit/>
-          </a:bodyPr>
-          <a:lstStyle/>
-          <a:p>
-            <a:pPr>
-              <a:lnSpc>
-                <a:spcPct val="100000"/>
-              </a:lnSpc>
-              <a:spcAft>
-                <a:spcPts val="200"/>
-              </a:spcAft>
-              <a:defRPr sz="5400" b="1">
-                <a:solidFill>
-                  <a:srgbClr val="0077FF"/>
-                </a:solidFill>
-                <a:latin typeface="Play"/>
-                <a:ea typeface="Play"/>
-                <a:cs typeface="Play"/>
-              </a:defRPr>
-            </a:pPr>
-            <a:r>
-              <a:rPr sz="5400" b="1">
-                <a:solidFill>
-                  <a:srgbClr val="0077FF"/>
-                </a:solidFill>
-                <a:latin typeface="Play"/>
-                <a:ea typeface="Play"/>
-                <a:cs typeface="Play"/>
-              </a:rPr>
-              <a:t>4 мин</a:t>
-            </a:r>
-          </a:p>
-          <a:p>
-            <a:pPr>
-              <a:spcAft>
-                <a:spcPts val="300"/>
-              </a:spcAft>
-              <a:defRPr sz="2400" b="0">
-                <a:solidFill>
-                  <a:srgbClr val="FFFFFF"/>
-                </a:solidFill>
-                <a:latin typeface="Play"/>
-                <a:ea typeface="Play"/>
-                <a:cs typeface="Play"/>
-              </a:defRPr>
-            </a:pPr>
-            <a:r>
-              <a:rPr sz="2400" b="0">
-                <a:solidFill>
-                  <a:srgbClr val="FFFFFF"/>
-                </a:solidFill>
-                <a:latin typeface="Play"/>
-                <a:ea typeface="Play"/>
-                <a:cs typeface="Play"/>
-              </a:rPr>
-              <a:t>Время сборки сократилось с 186 до 4 минут</a:t>
-            </a:r>
-          </a:p>
-        </p:txBody>
-      </p:sp>
-      <p:sp>
-        <p:nvSpPr>
-          <p:cNvPr id="5" name="body"/>
-          <p:cNvSpPr txBox="1"/>
-          <p:nvPr/>
-        </p:nvSpPr>
-        <p:spPr>
-          <a:xfrm>
-            <a:off x="429280" y="4169664"/>
-            <a:ext cx="11310884" cy="1728215"/>
-          </a:xfrm>
-          <a:prstGeom prst="rect">
-            <a:avLst/>
-          </a:prstGeom>
-          <a:noFill/>
-        </p:spPr>
-        <p:txBody>
-          <a:bodyPr wrap="square" lIns="76200" rIns="76200" tIns="50800" bIns="50800">
-            <a:spAutoFit/>
-          </a:bodyPr>
-          <a:lstStyle/>
-          <a:p>
-            <a:pPr algn="l">
-              <a:spcAft>
-                <a:spcPts val="300"/>
-              </a:spcAft>
-              <a:defRPr sz="2400">
-                <a:solidFill>
-                  <a:srgbClr val="FFFFFF"/>
-                </a:solidFill>
-                <a:latin typeface="Play"/>
-                <a:ea typeface="Play"/>
-                <a:cs typeface="Play"/>
-              </a:defRPr>
-            </a:pPr>
-            <a:r>
-              <a:rPr sz="2400">
-                <a:solidFill>
-                  <a:srgbClr val="FFFFFF"/>
-                </a:solidFill>
-                <a:latin typeface="Play"/>
-                <a:ea typeface="Play"/>
-                <a:cs typeface="Play"/>
-              </a:rPr>
-              <a:t>• Первый вариант появился за 1 день вместо 6</a:t>
-            </a:r>
-          </a:p>
-          <a:p>
-            <a:pPr algn="l">
-              <a:spcAft>
-                <a:spcPts val="300"/>
-              </a:spcAft>
-              <a:defRPr sz="2400">
-                <a:solidFill>
-                  <a:srgbClr val="FFFFFF"/>
-                </a:solidFill>
-                <a:latin typeface="Play"/>
-                <a:ea typeface="Play"/>
-                <a:cs typeface="Play"/>
-              </a:defRPr>
-            </a:pPr>
-            <a:r>
-              <a:rPr sz="2400">
-                <a:solidFill>
-                  <a:srgbClr val="FFFFFF"/>
-                </a:solidFill>
-                <a:latin typeface="Play"/>
-                <a:ea typeface="Play"/>
-                <a:cs typeface="Play"/>
-              </a:rPr>
-              <a:t>• Нарушения стиля уменьшились до 2 из 68</a:t>
-            </a:r>
-          </a:p>
-          <a:p>
-            <a:pPr algn="l">
-              <a:spcAft>
-                <a:spcPts val="300"/>
-              </a:spcAft>
-              <a:defRPr sz="2400">
-                <a:solidFill>
-                  <a:srgbClr val="FFFFFF"/>
-                </a:solidFill>
-                <a:latin typeface="Play"/>
-                <a:ea typeface="Play"/>
-                <a:cs typeface="Play"/>
-              </a:defRPr>
-            </a:pPr>
-            <a:r>
-              <a:rPr sz="2400">
-                <a:solidFill>
-                  <a:srgbClr val="FFFFFF"/>
-                </a:solidFill>
-                <a:latin typeface="Play"/>
-                <a:ea typeface="Play"/>
-                <a:cs typeface="Play"/>
-              </a:rPr>
-              <a:t>• Дизайнеры закрыли 38 запросов вместо 11 в неделю</a:t>
-            </a:r>
-          </a:p>
-        </p:txBody>
-      </p:sp>
+        </p:nvGraphicFramePr>
+        <p:xfrm>
+          <a:off x="429280" y="1848385"/>
+          <a:ext cx="11310884" cy="4049494"/>
+        </p:xfrm>
+        <a:graphic>
+          <a:graphicData uri="http://schemas.openxmlformats.org/drawingml/2006/table">
+            <a:tbl>
+              <a:tblPr firstRow="1" bandRow="1">
+                <a:tableStyleId>{5C22544A-7EE6-4342-B048-85BDC9FD1C3A}</a:tableStyleId>
+              </a:tblPr>
+              <a:tblGrid>
+                <a:gridCol w="5655442"/>
+                <a:gridCol w="5655442"/>
+              </a:tblGrid>
+              <a:tr h="2024747">
+                <a:tc>
+                  <a:txBody>
+                    <a:bodyPr/>
+                    <a:lstStyle/>
+                    <a:p>
+                      <a:pPr>
+                        <a:defRPr sz="1300" b="1">
+                          <a:solidFill>
+                            <a:srgbClr val="FFFFFF"/>
+                          </a:solidFill>
+                          <a:latin typeface="Play"/>
+                          <a:ea typeface="Play"/>
+                          <a:cs typeface="Play"/>
+                        </a:defRPr>
+                      </a:pPr>
+                      <a:r>
+                        <a:t>Показатель</a:t>
+                      </a:r>
+                    </a:p>
+                  </a:txBody>
+                  <a:tcPr>
+                    <a:solidFill>
+                      <a:srgbClr val="0077FF"/>
+                    </a:solidFill>
+                  </a:tcPr>
+                </a:tc>
+                <a:tc>
+                  <a:txBody>
+                    <a:bodyPr/>
+                    <a:lstStyle/>
+                    <a:p>
+                      <a:pPr>
+                        <a:defRPr sz="1300" b="1">
+                          <a:solidFill>
+                            <a:srgbClr val="FFFFFF"/>
+                          </a:solidFill>
+                          <a:latin typeface="Play"/>
+                          <a:ea typeface="Play"/>
+                          <a:cs typeface="Play"/>
+                        </a:defRPr>
+                      </a:pPr>
+                      <a:r>
+                        <a:t>Значение</a:t>
+                      </a:r>
+                    </a:p>
+                  </a:txBody>
+                  <a:tcPr>
+                    <a:solidFill>
+                      <a:srgbClr val="0077FF"/>
+                    </a:solidFill>
+                  </a:tcPr>
+                </a:tc>
+              </a:tr>
+              <a:tr h="2024747">
+                <a:tc>
+                  <a:txBody>
+                    <a:bodyPr/>
+                    <a:lstStyle/>
+                    <a:p>
+                      <a:pPr>
+                        <a:defRPr sz="1300" b="0">
+                          <a:solidFill>
+                            <a:srgbClr val="FFFFFF"/>
+                          </a:solidFill>
+                          <a:latin typeface="Play"/>
+                          <a:ea typeface="Play"/>
+                          <a:cs typeface="Play"/>
+                        </a:defRPr>
+                      </a:pPr>
+                      <a:r>
+                        <a:t>Инференс</a:t>
+                      </a:r>
+                    </a:p>
+                  </a:txBody>
+                  <a:tcPr>
+                    <a:solidFill>
+                      <a:srgbClr val="111111"/>
+                    </a:solidFill>
+                  </a:tcPr>
+                </a:tc>
+                <a:tc>
+                  <a:txBody>
+                    <a:bodyPr/>
+                    <a:lstStyle/>
+                    <a:p>
+                      <a:pPr>
+                        <a:defRPr sz="1300" b="0">
+                          <a:solidFill>
+                            <a:srgbClr val="FFFFFF"/>
+                          </a:solidFill>
+                          <a:latin typeface="Play"/>
+                          <a:ea typeface="Play"/>
+                          <a:cs typeface="Play"/>
+                        </a:defRPr>
+                      </a:pPr>
+                      <a:r>
+                        <a:t>1 400 руб.</a:t>
+                      </a:r>
+                    </a:p>
+                  </a:txBody>
+                  <a:tcPr>
+                    <a:solidFill>
+                      <a:srgbClr val="111111"/>
+                    </a:solidFill>
+                  </a:tcPr>
+                </a:tc>
+              </a:tr>
+            </a:tbl>
+          </a:graphicData>
+        </a:graphic>
+      </p:graphicFrame>
     </p:spTree>
   </p:cSld>
   <p:clrMapOvr>
@@ -13646,7 +12004,7 @@
         <p:spPr>
           <a:xfrm>
             <a:off x="300817" y="297715"/>
-            <a:ext cx="11566347" cy="5280124"/>
+            <a:ext cx="11566347" cy="5672851"/>
           </a:xfrm>
           <a:prstGeom prst="roundRect">
             <a:avLst/>
@@ -13692,7 +12050,7 @@
         <p:spPr>
           <a:xfrm>
             <a:off x="427817" y="424715"/>
-            <a:ext cx="7827264" cy="822960"/>
+            <a:ext cx="7827264" cy="1183640"/>
           </a:xfrm>
           <a:prstGeom prst="rect">
             <a:avLst/>
@@ -13727,210 +12085,21 @@
                 <a:ea typeface="Play"/>
                 <a:cs typeface="Play"/>
               </a:rPr>
-              <a:t>Следующие шаги</a:t>
+              <a:t>Нагрузка выше 20 задач: главный риск</a:t>
             </a:r>
           </a:p>
         </p:txBody>
       </p:sp>
       <p:sp>
         <p:nvSpPr>
-          <p:cNvPr id="682" name="Pentagon 681"/>
-          <p:cNvSpPr/>
-          <p:nvPr/>
-        </p:nvSpPr>
-        <p:spPr>
-          <a:xfrm>
-            <a:off x="427817" y="1943306"/>
-            <a:ext cx="3680283" cy="2281775"/>
-          </a:xfrm>
-          <a:prstGeom prst="homePlate">
-            <a:avLst/>
-          </a:prstGeom>
-          <a:solidFill>
-            <a:srgbClr val="0077FF"/>
-          </a:solidFill>
-          <a:ln>
-            <a:noFill/>
-          </a:ln>
-        </p:spPr>
-        <p:style>
-          <a:lnRef idx="1">
-            <a:schemeClr val="accent1"/>
-          </a:lnRef>
-          <a:fillRef idx="3">
-            <a:schemeClr val="accent1"/>
-          </a:fillRef>
-          <a:effectRef idx="2">
-            <a:schemeClr val="accent1"/>
-          </a:effectRef>
-          <a:fontRef idx="minor">
-            <a:schemeClr val="lt1"/>
-          </a:fontRef>
-        </p:style>
-        <p:txBody>
-          <a:bodyPr rtlCol="0" anchor="ctr" wrap="square" lIns="12700" rIns="12700" tIns="12700" bIns="12700"/>
-          <a:lstStyle/>
-          <a:p>
-            <a:pPr algn="ctr">
-              <a:defRPr sz="1260" b="0">
-                <a:solidFill>
-                  <a:srgbClr val="FFFFFF"/>
-                </a:solidFill>
-                <a:latin typeface="Play"/>
-                <a:ea typeface="Play"/>
-                <a:cs typeface="Play"/>
-              </a:defRPr>
-            </a:pPr>
-            <a:r>
-              <a:rPr sz="1260" b="0">
-                <a:solidFill>
-                  <a:srgbClr val="FFFFFF"/>
-                </a:solidFill>
-                <a:latin typeface="Play"/>
-                <a:ea typeface="Play"/>
-                <a:cs typeface="Play"/>
-              </a:rPr>
-              <a:t>Согласовать бюджет</a:t>
-            </a:r>
-          </a:p>
-        </p:txBody>
-      </p:sp>
-      <p:sp>
-        <p:nvSpPr>
-          <p:cNvPr id="683" name="Chevron 682"/>
-          <p:cNvSpPr/>
-          <p:nvPr/>
-        </p:nvSpPr>
-        <p:spPr>
-          <a:xfrm>
-            <a:off x="4243848" y="1943306"/>
-            <a:ext cx="3680283" cy="2281775"/>
-          </a:xfrm>
-          <a:prstGeom prst="chevron">
-            <a:avLst/>
-          </a:prstGeom>
-          <a:solidFill>
-            <a:srgbClr val="0077FF"/>
-          </a:solidFill>
-          <a:ln>
-            <a:noFill/>
-          </a:ln>
-        </p:spPr>
-        <p:style>
-          <a:lnRef idx="1">
-            <a:schemeClr val="accent1"/>
-          </a:lnRef>
-          <a:fillRef idx="3">
-            <a:schemeClr val="accent1"/>
-          </a:fillRef>
-          <a:effectRef idx="2">
-            <a:schemeClr val="accent1"/>
-          </a:effectRef>
-          <a:fontRef idx="minor">
-            <a:schemeClr val="lt1"/>
-          </a:fontRef>
-        </p:style>
-        <p:txBody>
-          <a:bodyPr rtlCol="0" anchor="ctr" wrap="square" lIns="12700" rIns="12700" tIns="12700" bIns="12700"/>
-          <a:lstStyle/>
-          <a:p>
-            <a:pPr algn="ctr">
-              <a:defRPr sz="1260" b="0">
-                <a:solidFill>
-                  <a:srgbClr val="FFFFFF"/>
-                </a:solidFill>
-                <a:latin typeface="Play"/>
-                <a:ea typeface="Play"/>
-                <a:cs typeface="Play"/>
-              </a:defRPr>
-            </a:pPr>
-            <a:r>
-              <a:rPr sz="1260" b="0">
-                <a:solidFill>
-                  <a:srgbClr val="FFFFFF"/>
-                </a:solidFill>
-                <a:latin typeface="Play"/>
-                <a:ea typeface="Play"/>
-                <a:cs typeface="Play"/>
-              </a:rPr>
-              <a:t>Интеграция с хранилищем</a:t>
-            </a:r>
-          </a:p>
-        </p:txBody>
-      </p:sp>
-      <p:sp>
-        <p:nvSpPr>
-          <p:cNvPr id="684" name="Chevron 683"/>
-          <p:cNvSpPr/>
-          <p:nvPr/>
-        </p:nvSpPr>
-        <p:spPr>
-          <a:xfrm>
-            <a:off x="8059880" y="1943306"/>
-            <a:ext cx="3680283" cy="2281775"/>
-          </a:xfrm>
-          <a:prstGeom prst="chevron">
-            <a:avLst/>
-          </a:prstGeom>
-          <a:solidFill>
-            <a:srgbClr val="0077FF"/>
-          </a:solidFill>
-          <a:ln>
-            <a:noFill/>
-          </a:ln>
-        </p:spPr>
-        <p:style>
-          <a:lnRef idx="1">
-            <a:schemeClr val="accent1"/>
-          </a:lnRef>
-          <a:fillRef idx="3">
-            <a:schemeClr val="accent1"/>
-          </a:fillRef>
-          <a:effectRef idx="2">
-            <a:schemeClr val="accent1"/>
-          </a:effectRef>
-          <a:fontRef idx="minor">
-            <a:schemeClr val="lt1"/>
-          </a:fontRef>
-        </p:style>
-        <p:txBody>
-          <a:bodyPr rtlCol="0" anchor="ctr" wrap="square" lIns="12700" rIns="12700" tIns="12700" bIns="12700"/>
-          <a:lstStyle/>
-          <a:p>
-            <a:pPr algn="ctr">
-              <a:defRPr sz="1260" b="0">
-                <a:solidFill>
-                  <a:srgbClr val="FFFFFF"/>
-                </a:solidFill>
-                <a:latin typeface="Play"/>
-                <a:ea typeface="Play"/>
-                <a:cs typeface="Play"/>
-              </a:defRPr>
-            </a:pPr>
-            <a:r>
-              <a:rPr sz="1260" b="0">
-                <a:solidFill>
-                  <a:srgbClr val="FFFFFF"/>
-                </a:solidFill>
-                <a:latin typeface="Play"/>
-                <a:ea typeface="Play"/>
-                <a:cs typeface="Play"/>
-              </a:rPr>
-              <a:t>Расширить команды</a:t>
-            </a:r>
-          </a:p>
-        </p:txBody>
-      </p:sp>
-      <p:sp>
-        <p:nvSpPr>
-          <p:cNvPr id="685" name="body"/>
+          <p:cNvPr id="682" name="lead"/>
           <p:cNvSpPr txBox="1"/>
           <p:nvPr/>
         </p:nvSpPr>
         <p:spPr>
           <a:xfrm>
-            <a:off x="427817" y="4556759"/>
-            <a:ext cx="11312347" cy="1341120"/>
+            <a:off x="427817" y="2409364"/>
+            <a:ext cx="5692225" cy="1884680"/>
           </a:xfrm>
           <a:prstGeom prst="rect">
             <a:avLst/>
@@ -13947,7 +12116,7 @@
               <a:spcAft>
                 <a:spcPts val="300"/>
               </a:spcAft>
-              <a:defRPr sz="1600">
+              <a:defRPr sz="5400">
                 <a:solidFill>
                   <a:srgbClr val="FFFFFF"/>
                 </a:solidFill>
@@ -13957,7 +12126,7 @@
               </a:defRPr>
             </a:pPr>
             <a:r>
-              <a:rPr sz="1600">
+              <a:rPr sz="5400">
                 <a:solidFill>
                   <a:srgbClr val="FFFFFF"/>
                 </a:solidFill>
@@ -13965,15 +12134,38 @@
                 <a:ea typeface="Play"/>
                 <a:cs typeface="Play"/>
               </a:rPr>
-              <a:t>• Согласовать бюджет и ресурсы</a:t>
+              <a:t>Требуется внешняя очередь</a:t>
             </a:r>
           </a:p>
+        </p:txBody>
+      </p:sp>
+      <p:sp>
+        <p:nvSpPr>
+          <p:cNvPr id="683" name="body"/>
+          <p:cNvSpPr txBox="1"/>
+          <p:nvPr/>
+        </p:nvSpPr>
+        <p:spPr>
+          <a:xfrm>
+            <a:off x="427817" y="4839061"/>
+            <a:ext cx="5692225" cy="497840"/>
+          </a:xfrm>
+          <a:prstGeom prst="rect">
+            <a:avLst/>
+          </a:prstGeom>
+          <a:noFill/>
+        </p:spPr>
+        <p:txBody>
+          <a:bodyPr wrap="square" lIns="76200" rIns="76200" tIns="50800" bIns="50800">
+            <a:spAutoFit/>
+          </a:bodyPr>
+          <a:lstStyle/>
           <a:p>
             <a:pPr algn="l">
               <a:spcAft>
                 <a:spcPts val="300"/>
               </a:spcAft>
-              <a:defRPr sz="1600">
+              <a:defRPr sz="2400">
                 <a:solidFill>
                   <a:srgbClr val="FFFFFF"/>
                 </a:solidFill>
@@ -13983,7 +12175,7 @@
               </a:defRPr>
             </a:pPr>
             <a:r>
-              <a:rPr sz="1600">
+              <a:rPr sz="2400">
                 <a:solidFill>
                   <a:srgbClr val="FFFFFF"/>
                 </a:solidFill>
@@ -13991,37 +12183,431 @@
                 <a:ea typeface="Play"/>
                 <a:cs typeface="Play"/>
               </a:rPr>
-              <a:t>• Интегрировать сервис с корпоративным хранилищем</a:t>
-            </a:r>
-          </a:p>
-          <a:p>
-            <a:pPr algn="l">
-              <a:spcAft>
-                <a:spcPts val="300"/>
-              </a:spcAft>
-              <a:defRPr sz="1600">
-                <a:solidFill>
-                  <a:srgbClr val="FFFFFF"/>
-                </a:solidFill>
-                <a:latin typeface="Play"/>
-                <a:ea typeface="Play"/>
-                <a:cs typeface="Play"/>
-              </a:defRPr>
-            </a:pPr>
-            <a:r>
-              <a:rPr sz="1600">
-                <a:solidFill>
-                  <a:srgbClr val="FFFFFF"/>
-                </a:solidFill>
-                <a:latin typeface="Play"/>
-                <a:ea typeface="Play"/>
-                <a:cs typeface="Play"/>
-              </a:rPr>
-              <a:t>• Расширить команды до 8 в Q3 2026</a:t>
+              <a:t>Модель может выдумать цифры</a:t>
             </a:r>
           </a:p>
         </p:txBody>
       </p:sp>
+      <p:grpSp>
+        <p:nvGrpSpPr>
+          <p:cNvPr id="2" name="illustration:builtin-target"/>
+          <p:cNvGrpSpPr/>
+          <p:nvPr/>
+        </p:nvGrpSpPr>
+        <p:grpSpPr>
+          <a:xfrm>
+            <a:off x="7457858" y="2218008"/>
+            <a:ext cx="3310248" cy="3310247"/>
+            <a:chOff x="7457858" y="2218008"/>
+            <a:chExt cx="3310248" cy="3310247"/>
+          </a:xfrm>
+        </p:grpSpPr>
+        <p:sp>
+          <p:nvSpPr>
+            <p:cNvPr id="684" name="Oval 683"/>
+            <p:cNvSpPr/>
+            <p:nvPr/>
+          </p:nvSpPr>
+          <p:spPr>
+            <a:xfrm>
+              <a:off x="7457858" y="2218008"/>
+              <a:ext cx="3310247" cy="3310247"/>
+            </a:xfrm>
+            <a:prstGeom prst="ellipse">
+              <a:avLst/>
+            </a:prstGeom>
+            <a:solidFill>
+              <a:srgbClr val="0E2137"/>
+            </a:solidFill>
+            <a:ln>
+              <a:noFill/>
+            </a:ln>
+            <a:effectLst/>
+          </p:spPr>
+          <p:style>
+            <a:lnRef idx="1">
+              <a:schemeClr val="accent1"/>
+            </a:lnRef>
+            <a:fillRef idx="3">
+              <a:schemeClr val="accent1"/>
+            </a:fillRef>
+            <a:effectRef idx="2">
+              <a:schemeClr val="accent1"/>
+            </a:effectRef>
+            <a:fontRef idx="minor">
+              <a:schemeClr val="lt1"/>
+            </a:fontRef>
+          </p:style>
+          <p:txBody>
+            <a:bodyPr rtlCol="0" anchor="ctr"/>
+            <a:lstStyle/>
+            <a:p>
+              <a:pPr algn="ctr"/>
+            </a:p>
+          </p:txBody>
+        </p:sp>
+        <p:sp>
+          <p:nvSpPr>
+            <p:cNvPr id="685" name="Oval 684"/>
+            <p:cNvSpPr/>
+            <p:nvPr/>
+          </p:nvSpPr>
+          <p:spPr>
+            <a:xfrm>
+              <a:off x="7720576" y="2743444"/>
+              <a:ext cx="2522093" cy="2522093"/>
+            </a:xfrm>
+            <a:prstGeom prst="ellipse">
+              <a:avLst/>
+            </a:prstGeom>
+            <a:solidFill>
+              <a:srgbClr val="111111"/>
+            </a:solidFill>
+            <a:ln>
+              <a:noFill/>
+            </a:ln>
+            <a:effectLst/>
+          </p:spPr>
+          <p:style>
+            <a:lnRef idx="1">
+              <a:schemeClr val="accent1"/>
+            </a:lnRef>
+            <a:fillRef idx="3">
+              <a:schemeClr val="accent1"/>
+            </a:fillRef>
+            <a:effectRef idx="2">
+              <a:schemeClr val="accent1"/>
+            </a:effectRef>
+            <a:fontRef idx="minor">
+              <a:schemeClr val="lt1"/>
+            </a:fontRef>
+          </p:style>
+          <p:txBody>
+            <a:bodyPr rtlCol="0" anchor="ctr"/>
+            <a:lstStyle/>
+            <a:p>
+              <a:pPr algn="ctr"/>
+            </a:p>
+          </p:txBody>
+        </p:sp>
+        <p:sp>
+          <p:nvSpPr>
+            <p:cNvPr id="686" name="Oval 685"/>
+            <p:cNvSpPr/>
+            <p:nvPr/>
+          </p:nvSpPr>
+          <p:spPr>
+            <a:xfrm>
+              <a:off x="8035838" y="3058706"/>
+              <a:ext cx="1891569" cy="1891569"/>
+            </a:xfrm>
+            <a:prstGeom prst="ellipse">
+              <a:avLst/>
+            </a:prstGeom>
+            <a:solidFill>
+              <a:srgbClr val="0077FF"/>
+            </a:solidFill>
+            <a:ln>
+              <a:noFill/>
+            </a:ln>
+            <a:effectLst/>
+          </p:spPr>
+          <p:style>
+            <a:lnRef idx="1">
+              <a:schemeClr val="accent1"/>
+            </a:lnRef>
+            <a:fillRef idx="3">
+              <a:schemeClr val="accent1"/>
+            </a:fillRef>
+            <a:effectRef idx="2">
+              <a:schemeClr val="accent1"/>
+            </a:effectRef>
+            <a:fontRef idx="minor">
+              <a:schemeClr val="lt1"/>
+            </a:fontRef>
+          </p:style>
+          <p:txBody>
+            <a:bodyPr rtlCol="0" anchor="ctr"/>
+            <a:lstStyle/>
+            <a:p>
+              <a:pPr algn="ctr"/>
+            </a:p>
+          </p:txBody>
+        </p:sp>
+        <p:sp>
+          <p:nvSpPr>
+            <p:cNvPr id="687" name="Oval 686"/>
+            <p:cNvSpPr/>
+            <p:nvPr/>
+          </p:nvSpPr>
+          <p:spPr>
+            <a:xfrm>
+              <a:off x="8351100" y="3373968"/>
+              <a:ext cx="1261046" cy="1261046"/>
+            </a:xfrm>
+            <a:prstGeom prst="ellipse">
+              <a:avLst/>
+            </a:prstGeom>
+            <a:solidFill>
+              <a:srgbClr val="111111"/>
+            </a:solidFill>
+            <a:ln>
+              <a:noFill/>
+            </a:ln>
+            <a:effectLst/>
+          </p:spPr>
+          <p:style>
+            <a:lnRef idx="1">
+              <a:schemeClr val="accent1"/>
+            </a:lnRef>
+            <a:fillRef idx="3">
+              <a:schemeClr val="accent1"/>
+            </a:fillRef>
+            <a:effectRef idx="2">
+              <a:schemeClr val="accent1"/>
+            </a:effectRef>
+            <a:fontRef idx="minor">
+              <a:schemeClr val="lt1"/>
+            </a:fontRef>
+          </p:style>
+          <p:txBody>
+            <a:bodyPr rtlCol="0" anchor="ctr"/>
+            <a:lstStyle/>
+            <a:p>
+              <a:pPr algn="ctr"/>
+            </a:p>
+          </p:txBody>
+        </p:sp>
+        <p:sp>
+          <p:nvSpPr>
+            <p:cNvPr id="688" name="Oval 687"/>
+            <p:cNvSpPr/>
+            <p:nvPr/>
+          </p:nvSpPr>
+          <p:spPr>
+            <a:xfrm>
+              <a:off x="8666361" y="3689229"/>
+              <a:ext cx="630523" cy="630523"/>
+            </a:xfrm>
+            <a:prstGeom prst="ellipse">
+              <a:avLst/>
+            </a:prstGeom>
+            <a:solidFill>
+              <a:srgbClr val="6DBCFF"/>
+            </a:solidFill>
+            <a:ln>
+              <a:noFill/>
+            </a:ln>
+            <a:effectLst/>
+          </p:spPr>
+          <p:style>
+            <a:lnRef idx="1">
+              <a:schemeClr val="accent1"/>
+            </a:lnRef>
+            <a:fillRef idx="3">
+              <a:schemeClr val="accent1"/>
+            </a:fillRef>
+            <a:effectRef idx="2">
+              <a:schemeClr val="accent1"/>
+            </a:effectRef>
+            <a:fontRef idx="minor">
+              <a:schemeClr val="lt1"/>
+            </a:fontRef>
+          </p:style>
+          <p:txBody>
+            <a:bodyPr rtlCol="0" anchor="ctr"/>
+            <a:lstStyle/>
+            <a:p>
+              <a:pPr algn="ctr"/>
+            </a:p>
+          </p:txBody>
+        </p:sp>
+        <p:sp>
+          <p:nvSpPr>
+            <p:cNvPr id="3" name="Freeform 2"/>
+            <p:cNvSpPr/>
+            <p:nvPr/>
+          </p:nvSpPr>
+          <p:spPr>
+            <a:xfrm>
+              <a:off x="9060438" y="2559542"/>
+              <a:ext cx="1366134" cy="1366134"/>
+            </a:xfrm>
+            <a:custGeom>
+              <a:avLst/>
+              <a:gdLst/>
+              <a:ahLst/>
+              <a:cxnLst/>
+              <a:rect l="l" t="t" r="r" b="b"/>
+              <a:pathLst>
+                <a:path w="1366134" h="1366134">
+                  <a:moveTo>
+                    <a:pt x="0" y="1366134"/>
+                  </a:moveTo>
+                  <a:lnTo>
+                    <a:pt x="1366134" y="0"/>
+                  </a:lnTo>
+                </a:path>
+              </a:pathLst>
+            </a:custGeom>
+            <a:solidFill>
+              <a:srgbClr val="000000"/>
+            </a:solidFill>
+            <a:ln w="105087" cap="rnd">
+              <a:solidFill>
+                <a:srgbClr val="FFFFFF"/>
+              </a:solidFill>
+              <a:round/>
+            </a:ln>
+            <a:effectLst/>
+          </p:spPr>
+          <p:style>
+            <a:lnRef idx="1">
+              <a:schemeClr val="accent1"/>
+            </a:lnRef>
+            <a:fillRef idx="3">
+              <a:schemeClr val="accent1"/>
+            </a:fillRef>
+            <a:effectRef idx="2">
+              <a:schemeClr val="accent1"/>
+            </a:effectRef>
+            <a:fontRef idx="minor">
+              <a:schemeClr val="lt1"/>
+            </a:fontRef>
+          </p:style>
+          <p:txBody>
+            <a:bodyPr rtlCol="0" anchor="ctr"/>
+            <a:lstStyle/>
+            <a:p>
+              <a:pPr algn="ctr"/>
+            </a:p>
+          </p:txBody>
+        </p:sp>
+        <p:sp>
+          <p:nvSpPr>
+            <p:cNvPr id="4" name="Freeform 3"/>
+            <p:cNvSpPr/>
+            <p:nvPr/>
+          </p:nvSpPr>
+          <p:spPr>
+            <a:xfrm>
+              <a:off x="10426572" y="2218008"/>
+              <a:ext cx="341534" cy="446621"/>
+            </a:xfrm>
+            <a:custGeom>
+              <a:avLst/>
+              <a:gdLst/>
+              <a:ahLst/>
+              <a:cxnLst/>
+              <a:rect l="l" t="t" r="r" b="b"/>
+              <a:pathLst>
+                <a:path w="341534" h="446621">
+                  <a:moveTo>
+                    <a:pt x="0" y="341534"/>
+                  </a:moveTo>
+                  <a:lnTo>
+                    <a:pt x="236446" y="0"/>
+                  </a:lnTo>
+                  <a:lnTo>
+                    <a:pt x="341534" y="446621"/>
+                  </a:lnTo>
+                  <a:close/>
+                </a:path>
+              </a:pathLst>
+            </a:custGeom>
+            <a:solidFill>
+              <a:srgbClr val="FFFFFF"/>
+            </a:solidFill>
+            <a:ln>
+              <a:noFill/>
+            </a:ln>
+            <a:effectLst/>
+          </p:spPr>
+          <p:style>
+            <a:lnRef idx="1">
+              <a:schemeClr val="accent1"/>
+            </a:lnRef>
+            <a:fillRef idx="3">
+              <a:schemeClr val="accent1"/>
+            </a:fillRef>
+            <a:effectRef idx="2">
+              <a:schemeClr val="accent1"/>
+            </a:effectRef>
+            <a:fontRef idx="minor">
+              <a:schemeClr val="lt1"/>
+            </a:fontRef>
+          </p:style>
+          <p:txBody>
+            <a:bodyPr rtlCol="0" anchor="ctr"/>
+            <a:lstStyle/>
+            <a:p>
+              <a:pPr algn="ctr"/>
+            </a:p>
+          </p:txBody>
+        </p:sp>
+        <p:sp>
+          <p:nvSpPr>
+            <p:cNvPr id="5" name="Freeform 4"/>
+            <p:cNvSpPr/>
+            <p:nvPr/>
+          </p:nvSpPr>
+          <p:spPr>
+            <a:xfrm>
+              <a:off x="10111311" y="2323096"/>
+              <a:ext cx="446620" cy="236446"/>
+            </a:xfrm>
+            <a:custGeom>
+              <a:avLst/>
+              <a:gdLst/>
+              <a:ahLst/>
+              <a:cxnLst/>
+              <a:rect l="l" t="t" r="r" b="b"/>
+              <a:pathLst>
+                <a:path w="446620" h="236446">
+                  <a:moveTo>
+                    <a:pt x="315261" y="236446"/>
+                  </a:moveTo>
+                  <a:lnTo>
+                    <a:pt x="0" y="131359"/>
+                  </a:lnTo>
+                  <a:lnTo>
+                    <a:pt x="446620" y="0"/>
+                  </a:lnTo>
+                  <a:close/>
+                </a:path>
+              </a:pathLst>
+            </a:custGeom>
+            <a:solidFill>
+              <a:srgbClr val="FFFFFF"/>
+            </a:solidFill>
+            <a:ln>
+              <a:noFill/>
+            </a:ln>
+            <a:effectLst/>
+          </p:spPr>
+          <p:style>
+            <a:lnRef idx="1">
+              <a:schemeClr val="accent1"/>
+            </a:lnRef>
+            <a:fillRef idx="3">
+              <a:schemeClr val="accent1"/>
+            </a:fillRef>
+            <a:effectRef idx="2">
+              <a:schemeClr val="accent1"/>
+            </a:effectRef>
+            <a:fontRef idx="minor">
+              <a:schemeClr val="lt1"/>
+            </a:fontRef>
+          </p:style>
+          <p:txBody>
+            <a:bodyPr rtlCol="0" anchor="ctr"/>
+            <a:lstStyle/>
+            <a:p>
+              <a:pPr algn="ctr"/>
+            </a:p>
+          </p:txBody>
+        </p:sp>
+      </p:grpSp>
     </p:spTree>
   </p:cSld>
   <p:clrMapOvr>
@@ -14120,7 +12706,7 @@
               <a:spcAft>
                 <a:spcPts val="300"/>
               </a:spcAft>
-              <a:defRPr sz="4000">
+              <a:defRPr sz="3200">
                 <a:solidFill>
                   <a:srgbClr val="FFFFFF"/>
                 </a:solidFill>
@@ -14130,7 +12716,7 @@
               </a:defRPr>
             </a:pPr>
             <a:r>
-              <a:rPr sz="4000">
+              <a:rPr sz="3200">
                 <a:solidFill>
                   <a:srgbClr val="FFFFFF"/>
                 </a:solidFill>
@@ -14138,11 +12724,199 @@
                 <a:ea typeface="Play"/>
                 <a:cs typeface="Play"/>
               </a:rPr>
-              <a:t>Вопросы и ответы</a:t>
+              <a:t>Пилот: 6 недель, 68 колод</a:t>
             </a:r>
           </a:p>
         </p:txBody>
       </p:sp>
+      <p:graphicFrame>
+        <p:nvGraphicFramePr>
+          <p:cNvPr id="623" name="Table 622"/>
+          <p:cNvGraphicFramePr>
+            <a:graphicFrameLocks noGrp="1"/>
+          </p:cNvGraphicFramePr>
+          <p:nvPr/>
+        </p:nvGraphicFramePr>
+        <p:xfrm>
+          <a:off x="429280" y="1783080"/>
+          <a:ext cx="11310884" cy="4114800"/>
+        </p:xfrm>
+        <a:graphic>
+          <a:graphicData uri="http://schemas.openxmlformats.org/drawingml/2006/table">
+            <a:tbl>
+              <a:tblPr firstRow="1" bandRow="1">
+                <a:tableStyleId>{5C22544A-7EE6-4342-B048-85BDC9FD1C3A}</a:tableStyleId>
+              </a:tblPr>
+              <a:tblGrid>
+                <a:gridCol w="5655442"/>
+                <a:gridCol w="5655442"/>
+              </a:tblGrid>
+              <a:tr h="1371600">
+                <a:tc>
+                  <a:txBody>
+                    <a:bodyPr/>
+                    <a:lstStyle/>
+                    <a:p>
+                      <a:pPr>
+                        <a:defRPr sz="1300" b="1">
+                          <a:solidFill>
+                            <a:srgbClr val="FFFFFF"/>
+                          </a:solidFill>
+                          <a:latin typeface="Play"/>
+                          <a:ea typeface="Play"/>
+                          <a:cs typeface="Play"/>
+                        </a:defRPr>
+                      </a:pPr>
+                      <a:r>
+                        <a:t>Показатель</a:t>
+                      </a:r>
+                    </a:p>
+                  </a:txBody>
+                  <a:tcPr>
+                    <a:solidFill>
+                      <a:srgbClr val="0077FF"/>
+                    </a:solidFill>
+                  </a:tcPr>
+                </a:tc>
+                <a:tc>
+                  <a:txBody>
+                    <a:bodyPr/>
+                    <a:lstStyle/>
+                    <a:p>
+                      <a:pPr>
+                        <a:defRPr sz="1300" b="1">
+                          <a:solidFill>
+                            <a:srgbClr val="FFFFFF"/>
+                          </a:solidFill>
+                          <a:latin typeface="Play"/>
+                          <a:ea typeface="Play"/>
+                          <a:cs typeface="Play"/>
+                        </a:defRPr>
+                      </a:pPr>
+                      <a:r>
+                        <a:t>Значение</a:t>
+                      </a:r>
+                    </a:p>
+                  </a:txBody>
+                  <a:tcPr>
+                    <a:solidFill>
+                      <a:srgbClr val="0077FF"/>
+                    </a:solidFill>
+                  </a:tcPr>
+                </a:tc>
+              </a:tr>
+              <a:tr h="1371600">
+                <a:tc>
+                  <a:txBody>
+                    <a:bodyPr/>
+                    <a:lstStyle/>
+                    <a:p>
+                      <a:pPr>
+                        <a:defRPr sz="1300" b="0">
+                          <a:solidFill>
+                            <a:srgbClr val="FFFFFF"/>
+                          </a:solidFill>
+                          <a:latin typeface="Play"/>
+                          <a:ea typeface="Play"/>
+                          <a:cs typeface="Play"/>
+                        </a:defRPr>
+                      </a:pPr>
+                      <a:r>
+                        <a:t>Длительность</a:t>
+                      </a:r>
+                    </a:p>
+                  </a:txBody>
+                  <a:tcPr>
+                    <a:solidFill>
+                      <a:srgbClr val="111111"/>
+                    </a:solidFill>
+                  </a:tcPr>
+                </a:tc>
+                <a:tc>
+                  <a:txBody>
+                    <a:bodyPr/>
+                    <a:lstStyle/>
+                    <a:p>
+                      <a:pPr>
+                        <a:defRPr sz="1300" b="0">
+                          <a:solidFill>
+                            <a:srgbClr val="FFFFFF"/>
+                          </a:solidFill>
+                          <a:latin typeface="Play"/>
+                          <a:ea typeface="Play"/>
+                          <a:cs typeface="Play"/>
+                        </a:defRPr>
+                      </a:pPr>
+                      <a:r>
+                        <a:t>6 недель</a:t>
+                      </a:r>
+                    </a:p>
+                  </a:txBody>
+                  <a:tcPr>
+                    <a:solidFill>
+                      <a:srgbClr val="111111"/>
+                    </a:solidFill>
+                  </a:tcPr>
+                </a:tc>
+              </a:tr>
+              <a:tr h="1371600">
+                <a:tc>
+                  <a:txBody>
+                    <a:bodyPr/>
+                    <a:lstStyle/>
+                    <a:p>
+                      <a:pPr>
+                        <a:defRPr sz="1300" b="0">
+                          <a:solidFill>
+                            <a:srgbClr val="FFFFFF"/>
+                          </a:solidFill>
+                          <a:latin typeface="Play"/>
+                          <a:ea typeface="Play"/>
+                          <a:cs typeface="Play"/>
+                        </a:defRPr>
+                      </a:pPr>
+                      <a:r>
+                        <a:t>Колоды</a:t>
+                      </a:r>
+                    </a:p>
+                  </a:txBody>
+                  <a:tcPr>
+                    <a:solidFill>
+                      <a:srgbClr val="111111"/>
+                    </a:solidFill>
+                  </a:tcPr>
+                </a:tc>
+                <a:tc>
+                  <a:txBody>
+                    <a:bodyPr/>
+                    <a:lstStyle/>
+                    <a:p>
+                      <a:pPr>
+                        <a:defRPr sz="1300" b="0">
+                          <a:solidFill>
+                            <a:srgbClr val="FFFFFF"/>
+                          </a:solidFill>
+                          <a:latin typeface="Play"/>
+                          <a:ea typeface="Play"/>
+                          <a:cs typeface="Play"/>
+                        </a:defRPr>
+                      </a:pPr>
+                      <a:r>
+                        <a:t>68</a:t>
+                      </a:r>
+                    </a:p>
+                  </a:txBody>
+                  <a:tcPr>
+                    <a:solidFill>
+                      <a:srgbClr val="111111"/>
+                    </a:solidFill>
+                  </a:tcPr>
+                </a:tc>
+              </a:tr>
+            </a:tbl>
+          </a:graphicData>
+        </a:graphic>
+      </p:graphicFrame>
     </p:spTree>
   </p:cSld>
   <p:clrMapOvr>
@@ -14271,8 +13045,8 @@
         </p:nvSpPr>
         <p:spPr>
           <a:xfrm>
-            <a:off x="302280" y="2164394"/>
-            <a:ext cx="8081385" cy="2078989"/>
+            <a:off x="300817" y="297715"/>
+            <a:ext cx="11566347" cy="4108356"/>
           </a:xfrm>
           <a:prstGeom prst="roundRect">
             <a:avLst/>
@@ -14317,8 +13091,8 @@
         </p:nvSpPr>
         <p:spPr>
           <a:xfrm>
-            <a:off x="429280" y="2291394"/>
-            <a:ext cx="7827385" cy="822960"/>
+            <a:off x="427817" y="424715"/>
+            <a:ext cx="11312347" cy="1018540"/>
           </a:xfrm>
           <a:prstGeom prst="rect">
             <a:avLst/>
@@ -14335,7 +13109,7 @@
               <a:spcAft>
                 <a:spcPts val="300"/>
               </a:spcAft>
-              <a:defRPr sz="4000">
+              <a:defRPr sz="5400">
                 <a:solidFill>
                   <a:srgbClr val="FFFFFF"/>
                 </a:solidFill>
@@ -14345,7 +13119,7 @@
               </a:defRPr>
             </a:pPr>
             <a:r>
-              <a:rPr sz="4000">
+              <a:rPr sz="5400">
                 <a:solidFill>
                   <a:srgbClr val="FFFFFF"/>
                 </a:solidFill>
@@ -14353,7 +13127,7 @@
                 <a:ea typeface="Play"/>
                 <a:cs typeface="Play"/>
               </a:rPr>
-              <a:t>Контактная информация</a:t>
+              <a:t>Решение о полном запуске</a:t>
             </a:r>
           </a:p>
         </p:txBody>
@@ -14366,8 +13140,8 @@
         </p:nvSpPr>
         <p:spPr>
           <a:xfrm>
-            <a:off x="429280" y="3354384"/>
-            <a:ext cx="7827385" cy="1213523"/>
+            <a:off x="427817" y="1783080"/>
+            <a:ext cx="11312347" cy="1174777"/>
           </a:xfrm>
           <a:prstGeom prst="rect">
             <a:avLst/>
@@ -14384,7 +13158,7 @@
               <a:spcAft>
                 <a:spcPts val="300"/>
               </a:spcAft>
-              <a:defRPr sz="4000" b="1">
+              <a:defRPr sz="3200" b="1">
                 <a:solidFill>
                   <a:srgbClr val="FFFFFF"/>
                 </a:solidFill>
@@ -14394,7 +13168,7 @@
               </a:defRPr>
             </a:pPr>
             <a:r>
-              <a:rPr sz="4000" b="1">
+              <a:rPr sz="3200" b="1">
                 <a:solidFill>
                   <a:srgbClr val="FFFFFF"/>
                 </a:solidFill>
@@ -14402,7 +13176,82 @@
                 <a:ea typeface="Play"/>
                 <a:cs typeface="Play"/>
               </a:rPr>
-              <a:t>Email: support@example.com</a:t>
+              <a:t>Третий квартал 2026 подключение 4 команд</a:t>
+            </a:r>
+          </a:p>
+        </p:txBody>
+      </p:sp>
+      <p:sp>
+        <p:nvSpPr>
+          <p:cNvPr id="887" name="body"/>
+          <p:cNvSpPr txBox="1"/>
+          <p:nvPr/>
+        </p:nvSpPr>
+        <p:spPr>
+          <a:xfrm>
+            <a:off x="427817" y="3120832"/>
+            <a:ext cx="11312347" cy="1378495"/>
+          </a:xfrm>
+          <a:prstGeom prst="rect">
+            <a:avLst/>
+          </a:prstGeom>
+          <a:noFill/>
+        </p:spPr>
+        <p:txBody>
+          <a:bodyPr wrap="square" lIns="76200" rIns="76200" tIns="50800" bIns="50800">
+            <a:spAutoFit/>
+          </a:bodyPr>
+          <a:lstStyle/>
+          <a:p>
+            <a:pPr algn="l">
+              <a:spcAft>
+                <a:spcPts val="300"/>
+              </a:spcAft>
+              <a:defRPr sz="3200" b="1">
+                <a:solidFill>
+                  <a:srgbClr val="FFFFFF"/>
+                </a:solidFill>
+                <a:latin typeface="Play"/>
+                <a:ea typeface="Play"/>
+                <a:cs typeface="Play"/>
+              </a:defRPr>
+            </a:pPr>
+            <a:r>
+              <a:rPr sz="3200" b="1">
+                <a:solidFill>
+                  <a:srgbClr val="FFFFFF"/>
+                </a:solidFill>
+                <a:latin typeface="Play"/>
+                <a:ea typeface="Play"/>
+                <a:cs typeface="Play"/>
+              </a:rPr>
+              <a:t>• Четвертый квартал 2026 доступ для всей компании</a:t>
+            </a:r>
+          </a:p>
+          <a:p>
+            <a:pPr algn="l">
+              <a:spcAft>
+                <a:spcPts val="300"/>
+              </a:spcAft>
+              <a:defRPr sz="3200" b="1">
+                <a:solidFill>
+                  <a:srgbClr val="FFFFFF"/>
+                </a:solidFill>
+                <a:latin typeface="Play"/>
+                <a:ea typeface="Play"/>
+                <a:cs typeface="Play"/>
+              </a:defRPr>
+            </a:pPr>
+            <a:r>
+              <a:rPr sz="3200" b="1">
+                <a:solidFill>
+                  <a:srgbClr val="FFFFFF"/>
+                </a:solidFill>
+                <a:latin typeface="Play"/>
+                <a:ea typeface="Play"/>
+                <a:cs typeface="Play"/>
+              </a:rPr>
+              <a:t>• Первый квартал 2027 генерация иллюстраций</a:t>
             </a:r>
           </a:p>
         </p:txBody>
